--- a/rapport/schema.pptx
+++ b/rapport/schema.pptx
@@ -4,9 +4,14 @@
   <p:sldMasterIdLst>
     <p:sldMasterId id="2147483648" r:id="rId1"/>
   </p:sldMasterIdLst>
+  <p:notesMasterIdLst>
+    <p:notesMasterId r:id="rId6"/>
+  </p:notesMasterIdLst>
   <p:sldIdLst>
     <p:sldId id="256" r:id="rId2"/>
     <p:sldId id="257" r:id="rId3"/>
+    <p:sldId id="258" r:id="rId4"/>
+    <p:sldId id="259" r:id="rId5"/>
   </p:sldIdLst>
   <p:sldSz cx="12192000" cy="6858000"/>
   <p:notesSz cx="6858000" cy="9144000"/>
@@ -105,7 +110,538 @@
       </a:defRPr>
     </a:lvl9pPr>
   </p:defaultTextStyle>
+  <p:extLst>
+    <p:ext uri="{EFAFB233-063F-42B5-8137-9DF3F51BA10A}">
+      <p15:sldGuideLst xmlns:p15="http://schemas.microsoft.com/office/powerpoint/2012/main"/>
+    </p:ext>
+  </p:extLst>
 </p:presentation>
+</file>
+
+<file path=ppt/notesMasters/notesMaster1.xml><?xml version="1.0" encoding="utf-8"?>
+<p:notesMaster xmlns:a="http://schemas.openxmlformats.org/drawingml/2006/main" xmlns:r="http://schemas.openxmlformats.org/officeDocument/2006/relationships" xmlns:p="http://schemas.openxmlformats.org/presentationml/2006/main">
+  <p:cSld>
+    <p:bg>
+      <p:bgRef idx="1001">
+        <a:schemeClr val="bg1"/>
+      </p:bgRef>
+    </p:bg>
+    <p:spTree>
+      <p:nvGrpSpPr>
+        <p:cNvPr id="1" name=""/>
+        <p:cNvGrpSpPr/>
+        <p:nvPr/>
+      </p:nvGrpSpPr>
+      <p:grpSpPr>
+        <a:xfrm>
+          <a:off x="0" y="0"/>
+          <a:ext cx="0" cy="0"/>
+          <a:chOff x="0" y="0"/>
+          <a:chExt cx="0" cy="0"/>
+        </a:xfrm>
+      </p:grpSpPr>
+      <p:sp>
+        <p:nvSpPr>
+          <p:cNvPr id="2" name="Espace réservé de l'en-tête 1"/>
+          <p:cNvSpPr>
+            <a:spLocks noGrp="1"/>
+          </p:cNvSpPr>
+          <p:nvPr>
+            <p:ph type="hdr" sz="quarter"/>
+          </p:nvPr>
+        </p:nvSpPr>
+        <p:spPr>
+          <a:xfrm>
+            <a:off x="0" y="0"/>
+            <a:ext cx="2971800" cy="458788"/>
+          </a:xfrm>
+          <a:prstGeom prst="rect">
+            <a:avLst/>
+          </a:prstGeom>
+        </p:spPr>
+        <p:txBody>
+          <a:bodyPr vert="horz" lIns="91440" tIns="45720" rIns="91440" bIns="45720" rtlCol="0"/>
+          <a:lstStyle>
+            <a:lvl1pPr algn="l">
+              <a:defRPr sz="1200"/>
+            </a:lvl1pPr>
+          </a:lstStyle>
+          <a:p>
+            <a:endParaRPr lang="en-GB"/>
+          </a:p>
+        </p:txBody>
+      </p:sp>
+      <p:sp>
+        <p:nvSpPr>
+          <p:cNvPr id="3" name="Espace réservé de la date 2"/>
+          <p:cNvSpPr>
+            <a:spLocks noGrp="1"/>
+          </p:cNvSpPr>
+          <p:nvPr>
+            <p:ph type="dt" idx="1"/>
+          </p:nvPr>
+        </p:nvSpPr>
+        <p:spPr>
+          <a:xfrm>
+            <a:off x="3884613" y="0"/>
+            <a:ext cx="2971800" cy="458788"/>
+          </a:xfrm>
+          <a:prstGeom prst="rect">
+            <a:avLst/>
+          </a:prstGeom>
+        </p:spPr>
+        <p:txBody>
+          <a:bodyPr vert="horz" lIns="91440" tIns="45720" rIns="91440" bIns="45720" rtlCol="0"/>
+          <a:lstStyle>
+            <a:lvl1pPr algn="r">
+              <a:defRPr sz="1200"/>
+            </a:lvl1pPr>
+          </a:lstStyle>
+          <a:p>
+            <a:fld id="{A3D9FBD5-0A08-42A7-A20A-3E938E2C13C1}" type="datetimeFigureOut">
+              <a:rPr lang="en-GB" smtClean="0"/>
+              <a:t>26/09/2020</a:t>
+            </a:fld>
+            <a:endParaRPr lang="en-GB"/>
+          </a:p>
+        </p:txBody>
+      </p:sp>
+      <p:sp>
+        <p:nvSpPr>
+          <p:cNvPr id="4" name="Espace réservé de l'image des diapositives 3"/>
+          <p:cNvSpPr>
+            <a:spLocks noGrp="1" noRot="1" noChangeAspect="1"/>
+          </p:cNvSpPr>
+          <p:nvPr>
+            <p:ph type="sldImg" idx="2"/>
+          </p:nvPr>
+        </p:nvSpPr>
+        <p:spPr>
+          <a:xfrm>
+            <a:off x="685800" y="1143000"/>
+            <a:ext cx="5486400" cy="3086100"/>
+          </a:xfrm>
+          <a:prstGeom prst="rect">
+            <a:avLst/>
+          </a:prstGeom>
+          <a:noFill/>
+          <a:ln w="12700">
+            <a:solidFill>
+              <a:prstClr val="black"/>
+            </a:solidFill>
+          </a:ln>
+        </p:spPr>
+        <p:txBody>
+          <a:bodyPr vert="horz" lIns="91440" tIns="45720" rIns="91440" bIns="45720" rtlCol="0" anchor="ctr"/>
+          <a:lstStyle/>
+          <a:p>
+            <a:endParaRPr lang="en-GB"/>
+          </a:p>
+        </p:txBody>
+      </p:sp>
+      <p:sp>
+        <p:nvSpPr>
+          <p:cNvPr id="5" name="Espace réservé des notes 4"/>
+          <p:cNvSpPr>
+            <a:spLocks noGrp="1"/>
+          </p:cNvSpPr>
+          <p:nvPr>
+            <p:ph type="body" sz="quarter" idx="3"/>
+          </p:nvPr>
+        </p:nvSpPr>
+        <p:spPr>
+          <a:xfrm>
+            <a:off x="685800" y="4400550"/>
+            <a:ext cx="5486400" cy="3600450"/>
+          </a:xfrm>
+          <a:prstGeom prst="rect">
+            <a:avLst/>
+          </a:prstGeom>
+        </p:spPr>
+        <p:txBody>
+          <a:bodyPr vert="horz" lIns="91440" tIns="45720" rIns="91440" bIns="45720" rtlCol="0"/>
+          <a:lstStyle/>
+          <a:p>
+            <a:pPr lvl="0"/>
+            <a:r>
+              <a:rPr lang="fr-FR"/>
+              <a:t>Cliquez pour modifier les styles du texte du masque</a:t>
+            </a:r>
+          </a:p>
+          <a:p>
+            <a:pPr lvl="1"/>
+            <a:r>
+              <a:rPr lang="fr-FR"/>
+              <a:t>Deuxième niveau</a:t>
+            </a:r>
+          </a:p>
+          <a:p>
+            <a:pPr lvl="2"/>
+            <a:r>
+              <a:rPr lang="fr-FR"/>
+              <a:t>Troisième niveau</a:t>
+            </a:r>
+          </a:p>
+          <a:p>
+            <a:pPr lvl="3"/>
+            <a:r>
+              <a:rPr lang="fr-FR"/>
+              <a:t>Quatrième niveau</a:t>
+            </a:r>
+          </a:p>
+          <a:p>
+            <a:pPr lvl="4"/>
+            <a:r>
+              <a:rPr lang="fr-FR"/>
+              <a:t>Cinquième niveau</a:t>
+            </a:r>
+            <a:endParaRPr lang="en-GB"/>
+          </a:p>
+        </p:txBody>
+      </p:sp>
+      <p:sp>
+        <p:nvSpPr>
+          <p:cNvPr id="6" name="Espace réservé du pied de page 5"/>
+          <p:cNvSpPr>
+            <a:spLocks noGrp="1"/>
+          </p:cNvSpPr>
+          <p:nvPr>
+            <p:ph type="ftr" sz="quarter" idx="4"/>
+          </p:nvPr>
+        </p:nvSpPr>
+        <p:spPr>
+          <a:xfrm>
+            <a:off x="0" y="8685213"/>
+            <a:ext cx="2971800" cy="458787"/>
+          </a:xfrm>
+          <a:prstGeom prst="rect">
+            <a:avLst/>
+          </a:prstGeom>
+        </p:spPr>
+        <p:txBody>
+          <a:bodyPr vert="horz" lIns="91440" tIns="45720" rIns="91440" bIns="45720" rtlCol="0" anchor="b"/>
+          <a:lstStyle>
+            <a:lvl1pPr algn="l">
+              <a:defRPr sz="1200"/>
+            </a:lvl1pPr>
+          </a:lstStyle>
+          <a:p>
+            <a:endParaRPr lang="en-GB"/>
+          </a:p>
+        </p:txBody>
+      </p:sp>
+      <p:sp>
+        <p:nvSpPr>
+          <p:cNvPr id="7" name="Espace réservé du numéro de diapositive 6"/>
+          <p:cNvSpPr>
+            <a:spLocks noGrp="1"/>
+          </p:cNvSpPr>
+          <p:nvPr>
+            <p:ph type="sldNum" sz="quarter" idx="5"/>
+          </p:nvPr>
+        </p:nvSpPr>
+        <p:spPr>
+          <a:xfrm>
+            <a:off x="3884613" y="8685213"/>
+            <a:ext cx="2971800" cy="458787"/>
+          </a:xfrm>
+          <a:prstGeom prst="rect">
+            <a:avLst/>
+          </a:prstGeom>
+        </p:spPr>
+        <p:txBody>
+          <a:bodyPr vert="horz" lIns="91440" tIns="45720" rIns="91440" bIns="45720" rtlCol="0" anchor="b"/>
+          <a:lstStyle>
+            <a:lvl1pPr algn="r">
+              <a:defRPr sz="1200"/>
+            </a:lvl1pPr>
+          </a:lstStyle>
+          <a:p>
+            <a:fld id="{7512EB12-3C52-4A5B-9741-32EF9D1D721D}" type="slidenum">
+              <a:rPr lang="en-GB" smtClean="0"/>
+              <a:t>‹N°›</a:t>
+            </a:fld>
+            <a:endParaRPr lang="en-GB"/>
+          </a:p>
+        </p:txBody>
+      </p:sp>
+    </p:spTree>
+    <p:extLst>
+      <p:ext uri="{BB962C8B-B14F-4D97-AF65-F5344CB8AC3E}">
+        <p14:creationId xmlns:p14="http://schemas.microsoft.com/office/powerpoint/2010/main" val="110179412"/>
+      </p:ext>
+    </p:extLst>
+  </p:cSld>
+  <p:clrMap bg1="lt1" tx1="dk1" bg2="lt2" tx2="dk2" accent1="accent1" accent2="accent2" accent3="accent3" accent4="accent4" accent5="accent5" accent6="accent6" hlink="hlink" folHlink="folHlink"/>
+  <p:notesStyle>
+    <a:lvl1pPr marL="0" algn="l" defTabSz="914400" rtl="0" eaLnBrk="1" latinLnBrk="0" hangingPunct="1">
+      <a:defRPr sz="1200" kern="1200">
+        <a:solidFill>
+          <a:schemeClr val="tx1"/>
+        </a:solidFill>
+        <a:latin typeface="+mn-lt"/>
+        <a:ea typeface="+mn-ea"/>
+        <a:cs typeface="+mn-cs"/>
+      </a:defRPr>
+    </a:lvl1pPr>
+    <a:lvl2pPr marL="457200" algn="l" defTabSz="914400" rtl="0" eaLnBrk="1" latinLnBrk="0" hangingPunct="1">
+      <a:defRPr sz="1200" kern="1200">
+        <a:solidFill>
+          <a:schemeClr val="tx1"/>
+        </a:solidFill>
+        <a:latin typeface="+mn-lt"/>
+        <a:ea typeface="+mn-ea"/>
+        <a:cs typeface="+mn-cs"/>
+      </a:defRPr>
+    </a:lvl2pPr>
+    <a:lvl3pPr marL="914400" algn="l" defTabSz="914400" rtl="0" eaLnBrk="1" latinLnBrk="0" hangingPunct="1">
+      <a:defRPr sz="1200" kern="1200">
+        <a:solidFill>
+          <a:schemeClr val="tx1"/>
+        </a:solidFill>
+        <a:latin typeface="+mn-lt"/>
+        <a:ea typeface="+mn-ea"/>
+        <a:cs typeface="+mn-cs"/>
+      </a:defRPr>
+    </a:lvl3pPr>
+    <a:lvl4pPr marL="1371600" algn="l" defTabSz="914400" rtl="0" eaLnBrk="1" latinLnBrk="0" hangingPunct="1">
+      <a:defRPr sz="1200" kern="1200">
+        <a:solidFill>
+          <a:schemeClr val="tx1"/>
+        </a:solidFill>
+        <a:latin typeface="+mn-lt"/>
+        <a:ea typeface="+mn-ea"/>
+        <a:cs typeface="+mn-cs"/>
+      </a:defRPr>
+    </a:lvl4pPr>
+    <a:lvl5pPr marL="1828800" algn="l" defTabSz="914400" rtl="0" eaLnBrk="1" latinLnBrk="0" hangingPunct="1">
+      <a:defRPr sz="1200" kern="1200">
+        <a:solidFill>
+          <a:schemeClr val="tx1"/>
+        </a:solidFill>
+        <a:latin typeface="+mn-lt"/>
+        <a:ea typeface="+mn-ea"/>
+        <a:cs typeface="+mn-cs"/>
+      </a:defRPr>
+    </a:lvl5pPr>
+    <a:lvl6pPr marL="2286000" algn="l" defTabSz="914400" rtl="0" eaLnBrk="1" latinLnBrk="0" hangingPunct="1">
+      <a:defRPr sz="1200" kern="1200">
+        <a:solidFill>
+          <a:schemeClr val="tx1"/>
+        </a:solidFill>
+        <a:latin typeface="+mn-lt"/>
+        <a:ea typeface="+mn-ea"/>
+        <a:cs typeface="+mn-cs"/>
+      </a:defRPr>
+    </a:lvl6pPr>
+    <a:lvl7pPr marL="2743200" algn="l" defTabSz="914400" rtl="0" eaLnBrk="1" latinLnBrk="0" hangingPunct="1">
+      <a:defRPr sz="1200" kern="1200">
+        <a:solidFill>
+          <a:schemeClr val="tx1"/>
+        </a:solidFill>
+        <a:latin typeface="+mn-lt"/>
+        <a:ea typeface="+mn-ea"/>
+        <a:cs typeface="+mn-cs"/>
+      </a:defRPr>
+    </a:lvl7pPr>
+    <a:lvl8pPr marL="3200400" algn="l" defTabSz="914400" rtl="0" eaLnBrk="1" latinLnBrk="0" hangingPunct="1">
+      <a:defRPr sz="1200" kern="1200">
+        <a:solidFill>
+          <a:schemeClr val="tx1"/>
+        </a:solidFill>
+        <a:latin typeface="+mn-lt"/>
+        <a:ea typeface="+mn-ea"/>
+        <a:cs typeface="+mn-cs"/>
+      </a:defRPr>
+    </a:lvl8pPr>
+    <a:lvl9pPr marL="3657600" algn="l" defTabSz="914400" rtl="0" eaLnBrk="1" latinLnBrk="0" hangingPunct="1">
+      <a:defRPr sz="1200" kern="1200">
+        <a:solidFill>
+          <a:schemeClr val="tx1"/>
+        </a:solidFill>
+        <a:latin typeface="+mn-lt"/>
+        <a:ea typeface="+mn-ea"/>
+        <a:cs typeface="+mn-cs"/>
+      </a:defRPr>
+    </a:lvl9pPr>
+  </p:notesStyle>
+</p:notesMaster>
+</file>
+
+<file path=ppt/notesSlides/notesSlide1.xml><?xml version="1.0" encoding="utf-8"?>
+<p:notes xmlns:a="http://schemas.openxmlformats.org/drawingml/2006/main" xmlns:r="http://schemas.openxmlformats.org/officeDocument/2006/relationships" xmlns:p="http://schemas.openxmlformats.org/presentationml/2006/main">
+  <p:cSld>
+    <p:spTree>
+      <p:nvGrpSpPr>
+        <p:cNvPr id="1" name=""/>
+        <p:cNvGrpSpPr/>
+        <p:nvPr/>
+      </p:nvGrpSpPr>
+      <p:grpSpPr>
+        <a:xfrm>
+          <a:off x="0" y="0"/>
+          <a:ext cx="0" cy="0"/>
+          <a:chOff x="0" y="0"/>
+          <a:chExt cx="0" cy="0"/>
+        </a:xfrm>
+      </p:grpSpPr>
+      <p:sp>
+        <p:nvSpPr>
+          <p:cNvPr id="2" name="Espace réservé de l'image des diapositives 1"/>
+          <p:cNvSpPr>
+            <a:spLocks noGrp="1" noRot="1" noChangeAspect="1"/>
+          </p:cNvSpPr>
+          <p:nvPr>
+            <p:ph type="sldImg"/>
+          </p:nvPr>
+        </p:nvSpPr>
+        <p:spPr/>
+      </p:sp>
+      <p:sp>
+        <p:nvSpPr>
+          <p:cNvPr id="3" name="Espace réservé des notes 2"/>
+          <p:cNvSpPr>
+            <a:spLocks noGrp="1"/>
+          </p:cNvSpPr>
+          <p:nvPr>
+            <p:ph type="body" idx="1"/>
+          </p:nvPr>
+        </p:nvSpPr>
+        <p:spPr/>
+        <p:txBody>
+          <a:bodyPr/>
+          <a:lstStyle/>
+          <a:p>
+            <a:r>
+              <a:rPr lang="fr-FR" dirty="0"/>
+              <a:t>3,3 check</a:t>
+            </a:r>
+            <a:endParaRPr lang="en-GB" dirty="0"/>
+          </a:p>
+        </p:txBody>
+      </p:sp>
+      <p:sp>
+        <p:nvSpPr>
+          <p:cNvPr id="4" name="Espace réservé du numéro de diapositive 3"/>
+          <p:cNvSpPr>
+            <a:spLocks noGrp="1"/>
+          </p:cNvSpPr>
+          <p:nvPr>
+            <p:ph type="sldNum" sz="quarter" idx="5"/>
+          </p:nvPr>
+        </p:nvSpPr>
+        <p:spPr/>
+        <p:txBody>
+          <a:bodyPr/>
+          <a:lstStyle/>
+          <a:p>
+            <a:fld id="{7512EB12-3C52-4A5B-9741-32EF9D1D721D}" type="slidenum">
+              <a:rPr lang="en-GB" smtClean="0"/>
+              <a:t>2</a:t>
+            </a:fld>
+            <a:endParaRPr lang="en-GB"/>
+          </a:p>
+        </p:txBody>
+      </p:sp>
+    </p:spTree>
+    <p:extLst>
+      <p:ext uri="{BB962C8B-B14F-4D97-AF65-F5344CB8AC3E}">
+        <p14:creationId xmlns:p14="http://schemas.microsoft.com/office/powerpoint/2010/main" val="3166291482"/>
+      </p:ext>
+    </p:extLst>
+  </p:cSld>
+  <p:clrMapOvr>
+    <a:masterClrMapping/>
+  </p:clrMapOvr>
+</p:notes>
+</file>
+
+<file path=ppt/notesSlides/notesSlide2.xml><?xml version="1.0" encoding="utf-8"?>
+<p:notes xmlns:a="http://schemas.openxmlformats.org/drawingml/2006/main" xmlns:r="http://schemas.openxmlformats.org/officeDocument/2006/relationships" xmlns:p="http://schemas.openxmlformats.org/presentationml/2006/main">
+  <p:cSld>
+    <p:spTree>
+      <p:nvGrpSpPr>
+        <p:cNvPr id="1" name=""/>
+        <p:cNvGrpSpPr/>
+        <p:nvPr/>
+      </p:nvGrpSpPr>
+      <p:grpSpPr>
+        <a:xfrm>
+          <a:off x="0" y="0"/>
+          <a:ext cx="0" cy="0"/>
+          <a:chOff x="0" y="0"/>
+          <a:chExt cx="0" cy="0"/>
+        </a:xfrm>
+      </p:grpSpPr>
+      <p:sp>
+        <p:nvSpPr>
+          <p:cNvPr id="2" name="Espace réservé de l'image des diapositives 1"/>
+          <p:cNvSpPr>
+            <a:spLocks noGrp="1" noRot="1" noChangeAspect="1"/>
+          </p:cNvSpPr>
+          <p:nvPr>
+            <p:ph type="sldImg"/>
+          </p:nvPr>
+        </p:nvSpPr>
+        <p:spPr/>
+      </p:sp>
+      <p:sp>
+        <p:nvSpPr>
+          <p:cNvPr id="3" name="Espace réservé des notes 2"/>
+          <p:cNvSpPr>
+            <a:spLocks noGrp="1"/>
+          </p:cNvSpPr>
+          <p:nvPr>
+            <p:ph type="body" idx="1"/>
+          </p:nvPr>
+        </p:nvSpPr>
+        <p:spPr/>
+        <p:txBody>
+          <a:bodyPr/>
+          <a:lstStyle/>
+          <a:p>
+            <a:r>
+              <a:rPr lang="fr-FR" dirty="0"/>
+              <a:t>3,3 check</a:t>
+            </a:r>
+            <a:endParaRPr lang="en-GB" dirty="0"/>
+          </a:p>
+        </p:txBody>
+      </p:sp>
+      <p:sp>
+        <p:nvSpPr>
+          <p:cNvPr id="4" name="Espace réservé du numéro de diapositive 3"/>
+          <p:cNvSpPr>
+            <a:spLocks noGrp="1"/>
+          </p:cNvSpPr>
+          <p:nvPr>
+            <p:ph type="sldNum" sz="quarter" idx="5"/>
+          </p:nvPr>
+        </p:nvSpPr>
+        <p:spPr/>
+        <p:txBody>
+          <a:bodyPr/>
+          <a:lstStyle/>
+          <a:p>
+            <a:fld id="{7512EB12-3C52-4A5B-9741-32EF9D1D721D}" type="slidenum">
+              <a:rPr lang="en-GB" smtClean="0"/>
+              <a:t>3</a:t>
+            </a:fld>
+            <a:endParaRPr lang="en-GB"/>
+          </a:p>
+        </p:txBody>
+      </p:sp>
+    </p:spTree>
+    <p:extLst>
+      <p:ext uri="{BB962C8B-B14F-4D97-AF65-F5344CB8AC3E}">
+        <p14:creationId xmlns:p14="http://schemas.microsoft.com/office/powerpoint/2010/main" val="2048777989"/>
+      </p:ext>
+    </p:extLst>
+  </p:cSld>
+  <p:clrMapOvr>
+    <a:masterClrMapping/>
+  </p:clrMapOvr>
+</p:notes>
 </file>
 
 <file path=ppt/slideLayouts/slideLayout1.xml><?xml version="1.0" encoding="utf-8"?>
@@ -257,7 +793,7 @@
           <a:p>
             <a:fld id="{DCD882A2-DD72-4F80-A6AB-80BB922E5FBF}" type="datetimeFigureOut">
               <a:rPr lang="en-GB" smtClean="0"/>
-              <a:t>26/06/2020</a:t>
+              <a:t>26/09/2020</a:t>
             </a:fld>
             <a:endParaRPr lang="en-GB" dirty="0"/>
           </a:p>
@@ -457,7 +993,7 @@
           <a:p>
             <a:fld id="{DCD882A2-DD72-4F80-A6AB-80BB922E5FBF}" type="datetimeFigureOut">
               <a:rPr lang="en-GB" smtClean="0"/>
-              <a:t>26/06/2020</a:t>
+              <a:t>26/09/2020</a:t>
             </a:fld>
             <a:endParaRPr lang="en-GB" dirty="0"/>
           </a:p>
@@ -667,7 +1203,7 @@
           <a:p>
             <a:fld id="{DCD882A2-DD72-4F80-A6AB-80BB922E5FBF}" type="datetimeFigureOut">
               <a:rPr lang="en-GB" smtClean="0"/>
-              <a:t>26/06/2020</a:t>
+              <a:t>26/09/2020</a:t>
             </a:fld>
             <a:endParaRPr lang="en-GB" dirty="0"/>
           </a:p>
@@ -867,7 +1403,7 @@
           <a:p>
             <a:fld id="{DCD882A2-DD72-4F80-A6AB-80BB922E5FBF}" type="datetimeFigureOut">
               <a:rPr lang="en-GB" smtClean="0"/>
-              <a:t>26/06/2020</a:t>
+              <a:t>26/09/2020</a:t>
             </a:fld>
             <a:endParaRPr lang="en-GB" dirty="0"/>
           </a:p>
@@ -1143,7 +1679,7 @@
           <a:p>
             <a:fld id="{DCD882A2-DD72-4F80-A6AB-80BB922E5FBF}" type="datetimeFigureOut">
               <a:rPr lang="en-GB" smtClean="0"/>
-              <a:t>26/06/2020</a:t>
+              <a:t>26/09/2020</a:t>
             </a:fld>
             <a:endParaRPr lang="en-GB" dirty="0"/>
           </a:p>
@@ -1411,7 +1947,7 @@
           <a:p>
             <a:fld id="{DCD882A2-DD72-4F80-A6AB-80BB922E5FBF}" type="datetimeFigureOut">
               <a:rPr lang="en-GB" smtClean="0"/>
-              <a:t>26/06/2020</a:t>
+              <a:t>26/09/2020</a:t>
             </a:fld>
             <a:endParaRPr lang="en-GB" dirty="0"/>
           </a:p>
@@ -1826,7 +2362,7 @@
           <a:p>
             <a:fld id="{DCD882A2-DD72-4F80-A6AB-80BB922E5FBF}" type="datetimeFigureOut">
               <a:rPr lang="en-GB" smtClean="0"/>
-              <a:t>26/06/2020</a:t>
+              <a:t>26/09/2020</a:t>
             </a:fld>
             <a:endParaRPr lang="en-GB" dirty="0"/>
           </a:p>
@@ -1968,7 +2504,7 @@
           <a:p>
             <a:fld id="{DCD882A2-DD72-4F80-A6AB-80BB922E5FBF}" type="datetimeFigureOut">
               <a:rPr lang="en-GB" smtClean="0"/>
-              <a:t>26/06/2020</a:t>
+              <a:t>26/09/2020</a:t>
             </a:fld>
             <a:endParaRPr lang="en-GB" dirty="0"/>
           </a:p>
@@ -2081,7 +2617,7 @@
           <a:p>
             <a:fld id="{DCD882A2-DD72-4F80-A6AB-80BB922E5FBF}" type="datetimeFigureOut">
               <a:rPr lang="en-GB" smtClean="0"/>
-              <a:t>26/06/2020</a:t>
+              <a:t>26/09/2020</a:t>
             </a:fld>
             <a:endParaRPr lang="en-GB" dirty="0"/>
           </a:p>
@@ -2394,7 +2930,7 @@
           <a:p>
             <a:fld id="{DCD882A2-DD72-4F80-A6AB-80BB922E5FBF}" type="datetimeFigureOut">
               <a:rPr lang="en-GB" smtClean="0"/>
-              <a:t>26/06/2020</a:t>
+              <a:t>26/09/2020</a:t>
             </a:fld>
             <a:endParaRPr lang="en-GB" dirty="0"/>
           </a:p>
@@ -2683,7 +3219,7 @@
           <a:p>
             <a:fld id="{DCD882A2-DD72-4F80-A6AB-80BB922E5FBF}" type="datetimeFigureOut">
               <a:rPr lang="en-GB" smtClean="0"/>
-              <a:t>26/06/2020</a:t>
+              <a:t>26/09/2020</a:t>
             </a:fld>
             <a:endParaRPr lang="en-GB" dirty="0"/>
           </a:p>
@@ -2926,7 +3462,7 @@
           <a:p>
             <a:fld id="{DCD882A2-DD72-4F80-A6AB-80BB922E5FBF}" type="datetimeFigureOut">
               <a:rPr lang="en-GB" smtClean="0"/>
-              <a:t>26/06/2020</a:t>
+              <a:t>26/09/2020</a:t>
             </a:fld>
             <a:endParaRPr lang="en-GB" dirty="0"/>
           </a:p>
@@ -3413,6 +3949,9 @@
           <a:prstGeom prst="ellipse">
             <a:avLst/>
           </a:prstGeom>
+          <a:solidFill>
+            <a:srgbClr val="C00000"/>
+          </a:solidFill>
         </p:spPr>
         <p:style>
           <a:lnRef idx="2">
@@ -3463,6 +4002,9 @@
           <a:prstGeom prst="ellipse">
             <a:avLst/>
           </a:prstGeom>
+          <a:solidFill>
+            <a:srgbClr val="C00000"/>
+          </a:solidFill>
         </p:spPr>
         <p:style>
           <a:lnRef idx="2">
@@ -3567,7 +4109,9 @@
             <a:avLst/>
           </a:prstGeom>
           <a:solidFill>
-            <a:srgbClr val="C00000"/>
+            <a:schemeClr val="accent6">
+              <a:lumMod val="75000"/>
+            </a:schemeClr>
           </a:solidFill>
         </p:spPr>
         <p:style>
@@ -4175,8 +4719,8 @@
         </p:nvSpPr>
         <p:spPr>
           <a:xfrm rot="16200000">
-            <a:off x="360578" y="3277283"/>
-            <a:ext cx="2584747" cy="646331"/>
+            <a:off x="712377" y="3031062"/>
+            <a:ext cx="2584747" cy="1138773"/>
           </a:xfrm>
           <a:prstGeom prst="rect">
             <a:avLst/>
@@ -4199,6 +4743,15 @@
               <a:rPr lang="fr-BE" dirty="0"/>
               <a:t>s.STRAM_DATA_BLOCKED</a:t>
             </a:r>
+          </a:p>
+          <a:p>
+            <a:r>
+              <a:rPr lang="en-GB" sz="1400" dirty="0"/>
+              <a:t>Peer Create Bidirectional Stream</a:t>
+            </a:r>
+            <a:endParaRPr lang="fr-BE" sz="1400" dirty="0"/>
+          </a:p>
+          <a:p>
             <a:endParaRPr lang="en-GB" dirty="0"/>
           </a:p>
         </p:txBody>
@@ -4244,6 +4797,241 @@
           </a:fontRef>
         </p:style>
       </p:cxnSp>
+      <p:sp>
+        <p:nvSpPr>
+          <p:cNvPr id="2" name="ZoneTexte 1">
+            <a:extLst>
+              <a:ext uri="{FF2B5EF4-FFF2-40B4-BE49-F238E27FC236}">
+                <a16:creationId xmlns:a16="http://schemas.microsoft.com/office/drawing/2014/main" id="{88F6E5C9-E973-4B06-9C4B-9944C2767988}"/>
+              </a:ext>
+            </a:extLst>
+          </p:cNvPr>
+          <p:cNvSpPr txBox="1"/>
+          <p:nvPr/>
+        </p:nvSpPr>
+        <p:spPr>
+          <a:xfrm>
+            <a:off x="359650" y="436564"/>
+            <a:ext cx="3232936" cy="646331"/>
+          </a:xfrm>
+          <a:prstGeom prst="rect">
+            <a:avLst/>
+          </a:prstGeom>
+          <a:noFill/>
+        </p:spPr>
+        <p:txBody>
+          <a:bodyPr wrap="none" rtlCol="0">
+            <a:spAutoFit/>
+          </a:bodyPr>
+          <a:lstStyle/>
+          <a:p>
+            <a:r>
+              <a:rPr lang="fr-BE" dirty="0"/>
+              <a:t>Create Stream (Sending</a:t>
+            </a:r>
+            <a:r>
+              <a:rPr lang="en-GB" dirty="0"/>
+              <a:t>)</a:t>
+            </a:r>
+          </a:p>
+          <a:p>
+            <a:r>
+              <a:rPr lang="en-GB" dirty="0"/>
+              <a:t>Peer Create Bidirectional Stream</a:t>
+            </a:r>
+            <a:endParaRPr lang="fr-BE" dirty="0"/>
+          </a:p>
+        </p:txBody>
+      </p:sp>
+      <p:sp>
+        <p:nvSpPr>
+          <p:cNvPr id="3" name="Bulle narrative : rectangle à coins arrondis 2">
+            <a:extLst>
+              <a:ext uri="{FF2B5EF4-FFF2-40B4-BE49-F238E27FC236}">
+                <a16:creationId xmlns:a16="http://schemas.microsoft.com/office/drawing/2014/main" id="{988D0EB4-947A-46B9-A29D-46DAE79C5B8E}"/>
+              </a:ext>
+            </a:extLst>
+          </p:cNvPr>
+          <p:cNvSpPr/>
+          <p:nvPr/>
+        </p:nvSpPr>
+        <p:spPr>
+          <a:xfrm>
+            <a:off x="3790358" y="1072421"/>
+            <a:ext cx="1126921" cy="369332"/>
+          </a:xfrm>
+          <a:prstGeom prst="wedgeRoundRectCallout">
+            <a:avLst/>
+          </a:prstGeom>
+          <a:ln>
+            <a:solidFill>
+              <a:schemeClr val="tx1"/>
+            </a:solidFill>
+          </a:ln>
+        </p:spPr>
+        <p:style>
+          <a:lnRef idx="2">
+            <a:schemeClr val="accent6"/>
+          </a:lnRef>
+          <a:fillRef idx="1">
+            <a:schemeClr val="lt1"/>
+          </a:fillRef>
+          <a:effectRef idx="0">
+            <a:schemeClr val="accent6"/>
+          </a:effectRef>
+          <a:fontRef idx="minor">
+            <a:schemeClr val="dk1"/>
+          </a:fontRef>
+        </p:style>
+        <p:txBody>
+          <a:bodyPr rtlCol="0" anchor="ctr"/>
+          <a:lstStyle/>
+          <a:p>
+            <a:pPr algn="ctr"/>
+            <a:r>
+              <a:rPr lang="fr-FR" dirty="0"/>
+              <a:t>sending</a:t>
+            </a:r>
+            <a:endParaRPr lang="en-GB" dirty="0"/>
+          </a:p>
+        </p:txBody>
+      </p:sp>
+      <p:sp>
+        <p:nvSpPr>
+          <p:cNvPr id="10" name="Bulle narrative : rectangle à coins arrondis 9">
+            <a:extLst>
+              <a:ext uri="{FF2B5EF4-FFF2-40B4-BE49-F238E27FC236}">
+                <a16:creationId xmlns:a16="http://schemas.microsoft.com/office/drawing/2014/main" id="{5DD2B065-1291-4E98-9EA8-E397CA6004D6}"/>
+              </a:ext>
+            </a:extLst>
+          </p:cNvPr>
+          <p:cNvSpPr/>
+          <p:nvPr/>
+        </p:nvSpPr>
+        <p:spPr>
+          <a:xfrm>
+            <a:off x="7599222" y="1138519"/>
+            <a:ext cx="1126921" cy="369332"/>
+          </a:xfrm>
+          <a:prstGeom prst="wedgeRoundRectCallout">
+            <a:avLst/>
+          </a:prstGeom>
+          <a:ln>
+            <a:solidFill>
+              <a:schemeClr val="tx1"/>
+            </a:solidFill>
+          </a:ln>
+        </p:spPr>
+        <p:style>
+          <a:lnRef idx="2">
+            <a:schemeClr val="accent6"/>
+          </a:lnRef>
+          <a:fillRef idx="1">
+            <a:schemeClr val="lt1"/>
+          </a:fillRef>
+          <a:effectRef idx="0">
+            <a:schemeClr val="accent6"/>
+          </a:effectRef>
+          <a:fontRef idx="minor">
+            <a:schemeClr val="dk1"/>
+          </a:fontRef>
+        </p:style>
+        <p:txBody>
+          <a:bodyPr rtlCol="0" anchor="ctr"/>
+          <a:lstStyle/>
+          <a:p>
+            <a:pPr algn="ctr"/>
+            <a:r>
+              <a:rPr lang="fr-FR" dirty="0"/>
+              <a:t>receiving</a:t>
+            </a:r>
+            <a:endParaRPr lang="en-GB" dirty="0"/>
+          </a:p>
+        </p:txBody>
+      </p:sp>
+      <p:sp>
+        <p:nvSpPr>
+          <p:cNvPr id="14" name="Bulle narrative : rectangle à coins arrondis 13">
+            <a:extLst>
+              <a:ext uri="{FF2B5EF4-FFF2-40B4-BE49-F238E27FC236}">
+                <a16:creationId xmlns:a16="http://schemas.microsoft.com/office/drawing/2014/main" id="{949E7391-F356-4A29-822D-BB2783A50072}"/>
+              </a:ext>
+            </a:extLst>
+          </p:cNvPr>
+          <p:cNvSpPr/>
+          <p:nvPr/>
+        </p:nvSpPr>
+        <p:spPr>
+          <a:xfrm>
+            <a:off x="9228239" y="624253"/>
+            <a:ext cx="1126921" cy="603783"/>
+          </a:xfrm>
+          <a:prstGeom prst="wedgeRoundRectCallout">
+            <a:avLst/>
+          </a:prstGeom>
+        </p:spPr>
+        <p:style>
+          <a:lnRef idx="2">
+            <a:schemeClr val="accent6"/>
+          </a:lnRef>
+          <a:fillRef idx="1">
+            <a:schemeClr val="lt1"/>
+          </a:fillRef>
+          <a:effectRef idx="0">
+            <a:schemeClr val="accent6"/>
+          </a:effectRef>
+          <a:fontRef idx="minor">
+            <a:schemeClr val="dk1"/>
+          </a:fontRef>
+        </p:style>
+        <p:txBody>
+          <a:bodyPr rtlCol="0" anchor="ctr"/>
+          <a:lstStyle/>
+          <a:p>
+            <a:pPr algn="ctr"/>
+            <a:r>
+              <a:rPr lang="fr-FR" dirty="0"/>
+              <a:t>Terminal state</a:t>
+            </a:r>
+            <a:endParaRPr lang="en-GB" dirty="0"/>
+          </a:p>
+        </p:txBody>
+      </p:sp>
+      <p:sp>
+        <p:nvSpPr>
+          <p:cNvPr id="32" name="ZoneTexte 31">
+            <a:extLst>
+              <a:ext uri="{FF2B5EF4-FFF2-40B4-BE49-F238E27FC236}">
+                <a16:creationId xmlns:a16="http://schemas.microsoft.com/office/drawing/2014/main" id="{3854FA4F-3B96-4A8F-9412-672862F5CD0D}"/>
+              </a:ext>
+            </a:extLst>
+          </p:cNvPr>
+          <p:cNvSpPr txBox="1"/>
+          <p:nvPr/>
+        </p:nvSpPr>
+        <p:spPr>
+          <a:xfrm>
+            <a:off x="3851075" y="-11029"/>
+            <a:ext cx="3985757" cy="523220"/>
+          </a:xfrm>
+          <a:prstGeom prst="rect">
+            <a:avLst/>
+          </a:prstGeom>
+          <a:noFill/>
+        </p:spPr>
+        <p:txBody>
+          <a:bodyPr wrap="square">
+            <a:spAutoFit/>
+          </a:bodyPr>
+          <a:lstStyle/>
+          <a:p>
+            <a:r>
+              <a:rPr lang="en-GB" sz="2800" b="1" dirty="0"/>
+              <a:t>Sending Stream States</a:t>
+            </a:r>
+          </a:p>
+        </p:txBody>
+      </p:sp>
     </p:spTree>
     <p:extLst>
       <p:ext uri="{BB962C8B-B14F-4D97-AF65-F5344CB8AC3E}">
@@ -4344,6 +5132,9 @@
           <a:prstGeom prst="ellipse">
             <a:avLst/>
           </a:prstGeom>
+          <a:solidFill>
+            <a:srgbClr val="C00000"/>
+          </a:solidFill>
         </p:spPr>
         <p:style>
           <a:lnRef idx="2">
@@ -4388,12 +5179,15 @@
         </p:nvSpPr>
         <p:spPr>
           <a:xfrm>
-            <a:off x="5348653" y="4897317"/>
+            <a:off x="5348652" y="4897315"/>
             <a:ext cx="1494693" cy="931985"/>
           </a:xfrm>
           <a:prstGeom prst="ellipse">
             <a:avLst/>
           </a:prstGeom>
+          <a:solidFill>
+            <a:srgbClr val="C00000"/>
+          </a:solidFill>
         </p:spPr>
         <p:style>
           <a:lnRef idx="2">
@@ -4498,7 +5292,9 @@
             <a:avLst/>
           </a:prstGeom>
           <a:solidFill>
-            <a:srgbClr val="C00000"/>
+            <a:schemeClr val="accent6">
+              <a:lumMod val="75000"/>
+            </a:schemeClr>
           </a:solidFill>
         </p:spPr>
         <p:style>
@@ -4579,7 +5375,7 @@
             <a:pPr algn="ctr"/>
             <a:r>
               <a:rPr lang="fr-BE" b="1" dirty="0"/>
-              <a:t>Data Recvd </a:t>
+              <a:t>Data Read </a:t>
             </a:r>
             <a:endParaRPr lang="en-GB" b="1" dirty="0"/>
           </a:p>
@@ -4724,9 +5520,9 @@
           <p:nvPr/>
         </p:nvCxnSpPr>
         <p:spPr>
-          <a:xfrm>
-            <a:off x="3147645" y="5363310"/>
-            <a:ext cx="2201008" cy="0"/>
+          <a:xfrm flipV="1">
+            <a:off x="3147645" y="5363308"/>
+            <a:ext cx="2201007" cy="2"/>
           </a:xfrm>
           <a:prstGeom prst="straightConnector1">
             <a:avLst/>
@@ -4766,9 +5562,9 @@
           <p:nvPr/>
         </p:nvCxnSpPr>
         <p:spPr>
-          <a:xfrm flipV="1">
-            <a:off x="6843346" y="5363309"/>
-            <a:ext cx="2201008" cy="1"/>
+          <a:xfrm>
+            <a:off x="6843345" y="5363308"/>
+            <a:ext cx="2201009" cy="1"/>
           </a:xfrm>
           <a:prstGeom prst="straightConnector1">
             <a:avLst/>
@@ -5181,8 +5977,8 @@
         </p:nvSpPr>
         <p:spPr>
           <a:xfrm>
-            <a:off x="1472254" y="540684"/>
-            <a:ext cx="4012317" cy="923330"/>
+            <a:off x="229185" y="14804"/>
+            <a:ext cx="5386283" cy="1200329"/>
           </a:xfrm>
           <a:prstGeom prst="rect">
             <a:avLst/>
@@ -5197,19 +5993,25 @@
           <a:p>
             <a:r>
               <a:rPr lang="fr-BE" dirty="0"/>
-              <a:t>r.STREAM / r.RESET_STREAM</a:t>
+              <a:t>r.STREAM / r.RESET_STREAM/ r.STRAM_DATA_BLOCKED</a:t>
             </a:r>
           </a:p>
           <a:p>
             <a:r>
               <a:rPr lang="fr-BE" dirty="0"/>
-              <a:t>r.STRAM_DATA_BLOCKED</a:t>
+              <a:t>Create Bidirectional Stream (Sending)</a:t>
             </a:r>
           </a:p>
           <a:p>
             <a:r>
               <a:rPr lang="fr-BE" dirty="0"/>
-              <a:t>r.MAX_STREAM_DATA / r.STOP_SENDING</a:t>
+              <a:t>r.MAX_STREAM_DATA / r.STOP_SENDING (Bidirectional)</a:t>
+            </a:r>
+          </a:p>
+          <a:p>
+            <a:r>
+              <a:rPr lang="fr-BE" dirty="0"/>
+              <a:t>Create Higher-Numbered Stream</a:t>
             </a:r>
             <a:endParaRPr lang="en-GB" dirty="0"/>
           </a:p>
@@ -5292,10 +6094,2312 @@
           </a:p>
         </p:txBody>
       </p:sp>
+      <p:sp>
+        <p:nvSpPr>
+          <p:cNvPr id="18" name="ZoneTexte 17">
+            <a:extLst>
+              <a:ext uri="{FF2B5EF4-FFF2-40B4-BE49-F238E27FC236}">
+                <a16:creationId xmlns:a16="http://schemas.microsoft.com/office/drawing/2014/main" id="{1B9DEA2C-3E1F-47F7-9854-33FFAE313979}"/>
+              </a:ext>
+            </a:extLst>
+          </p:cNvPr>
+          <p:cNvSpPr txBox="1"/>
+          <p:nvPr/>
+        </p:nvSpPr>
+        <p:spPr>
+          <a:xfrm>
+            <a:off x="6117824" y="19667"/>
+            <a:ext cx="3985757" cy="523220"/>
+          </a:xfrm>
+          <a:prstGeom prst="rect">
+            <a:avLst/>
+          </a:prstGeom>
+          <a:noFill/>
+        </p:spPr>
+        <p:txBody>
+          <a:bodyPr wrap="square">
+            <a:spAutoFit/>
+          </a:bodyPr>
+          <a:lstStyle/>
+          <a:p>
+            <a:r>
+              <a:rPr lang="en-GB" sz="2800" b="1" dirty="0"/>
+              <a:t>Receiving Stream States</a:t>
+            </a:r>
+          </a:p>
+        </p:txBody>
+      </p:sp>
     </p:spTree>
     <p:extLst>
       <p:ext uri="{BB962C8B-B14F-4D97-AF65-F5344CB8AC3E}">
         <p14:creationId xmlns:p14="http://schemas.microsoft.com/office/powerpoint/2010/main" val="1520386991"/>
+      </p:ext>
+    </p:extLst>
+  </p:cSld>
+  <p:clrMapOvr>
+    <a:masterClrMapping/>
+  </p:clrMapOvr>
+</p:sld>
+</file>
+
+<file path=ppt/slides/slide3.xml><?xml version="1.0" encoding="utf-8"?>
+<p:sld xmlns:a="http://schemas.openxmlformats.org/drawingml/2006/main" xmlns:r="http://schemas.openxmlformats.org/officeDocument/2006/relationships" xmlns:p="http://schemas.openxmlformats.org/presentationml/2006/main">
+  <p:cSld>
+    <p:spTree>
+      <p:nvGrpSpPr>
+        <p:cNvPr id="1" name=""/>
+        <p:cNvGrpSpPr/>
+        <p:nvPr/>
+      </p:nvGrpSpPr>
+      <p:grpSpPr>
+        <a:xfrm>
+          <a:off x="0" y="0"/>
+          <a:ext cx="0" cy="0"/>
+          <a:chOff x="0" y="0"/>
+          <a:chExt cx="0" cy="0"/>
+        </a:xfrm>
+      </p:grpSpPr>
+      <p:sp>
+        <p:nvSpPr>
+          <p:cNvPr id="162" name="ZoneTexte 161">
+            <a:extLst>
+              <a:ext uri="{FF2B5EF4-FFF2-40B4-BE49-F238E27FC236}">
+                <a16:creationId xmlns:a16="http://schemas.microsoft.com/office/drawing/2014/main" id="{1E9F2AA7-EE6F-4583-B9CC-274E91DD8329}"/>
+              </a:ext>
+            </a:extLst>
+          </p:cNvPr>
+          <p:cNvSpPr txBox="1"/>
+          <p:nvPr/>
+        </p:nvSpPr>
+        <p:spPr>
+          <a:xfrm>
+            <a:off x="3851075" y="-11029"/>
+            <a:ext cx="4273838" cy="523220"/>
+          </a:xfrm>
+          <a:prstGeom prst="rect">
+            <a:avLst/>
+          </a:prstGeom>
+          <a:noFill/>
+        </p:spPr>
+        <p:txBody>
+          <a:bodyPr wrap="square">
+            <a:spAutoFit/>
+          </a:bodyPr>
+          <a:lstStyle/>
+          <a:p>
+            <a:r>
+              <a:rPr lang="en-GB" sz="2800" b="1" dirty="0"/>
+              <a:t>Bidirectional Stream States</a:t>
+            </a:r>
+          </a:p>
+        </p:txBody>
+      </p:sp>
+      <p:sp>
+        <p:nvSpPr>
+          <p:cNvPr id="164" name="Ellipse 163">
+            <a:extLst>
+              <a:ext uri="{FF2B5EF4-FFF2-40B4-BE49-F238E27FC236}">
+                <a16:creationId xmlns:a16="http://schemas.microsoft.com/office/drawing/2014/main" id="{1EA6948B-714F-43F0-9744-118D43364489}"/>
+              </a:ext>
+            </a:extLst>
+          </p:cNvPr>
+          <p:cNvSpPr/>
+          <p:nvPr/>
+        </p:nvSpPr>
+        <p:spPr>
+          <a:xfrm>
+            <a:off x="1114692" y="329113"/>
+            <a:ext cx="1632113" cy="728460"/>
+          </a:xfrm>
+          <a:prstGeom prst="ellipse">
+            <a:avLst/>
+          </a:prstGeom>
+        </p:spPr>
+        <p:style>
+          <a:lnRef idx="2">
+            <a:schemeClr val="accent5">
+              <a:shade val="50000"/>
+            </a:schemeClr>
+          </a:lnRef>
+          <a:fillRef idx="1">
+            <a:schemeClr val="accent5"/>
+          </a:fillRef>
+          <a:effectRef idx="0">
+            <a:schemeClr val="accent5"/>
+          </a:effectRef>
+          <a:fontRef idx="minor">
+            <a:schemeClr val="lt1"/>
+          </a:fontRef>
+        </p:style>
+        <p:txBody>
+          <a:bodyPr rtlCol="0" anchor="ctr"/>
+          <a:lstStyle/>
+          <a:p>
+            <a:pPr algn="ctr"/>
+            <a:r>
+              <a:rPr lang="fr-BE" sz="1600" b="1" dirty="0" err="1"/>
+              <a:t>idle</a:t>
+            </a:r>
+            <a:r>
+              <a:rPr lang="fr-BE" sz="1600" b="1" dirty="0"/>
+              <a:t> </a:t>
+            </a:r>
+            <a:endParaRPr lang="en-GB" sz="1600" b="1" dirty="0"/>
+          </a:p>
+        </p:txBody>
+      </p:sp>
+      <p:sp>
+        <p:nvSpPr>
+          <p:cNvPr id="168" name="Ellipse 167">
+            <a:extLst>
+              <a:ext uri="{FF2B5EF4-FFF2-40B4-BE49-F238E27FC236}">
+                <a16:creationId xmlns:a16="http://schemas.microsoft.com/office/drawing/2014/main" id="{CB6D624A-7107-465A-8446-21A7AFD83649}"/>
+              </a:ext>
+            </a:extLst>
+          </p:cNvPr>
+          <p:cNvSpPr/>
+          <p:nvPr/>
+        </p:nvSpPr>
+        <p:spPr>
+          <a:xfrm>
+            <a:off x="1114692" y="2916149"/>
+            <a:ext cx="1632113" cy="728460"/>
+          </a:xfrm>
+          <a:prstGeom prst="ellipse">
+            <a:avLst/>
+          </a:prstGeom>
+        </p:spPr>
+        <p:style>
+          <a:lnRef idx="2">
+            <a:schemeClr val="accent5">
+              <a:shade val="50000"/>
+            </a:schemeClr>
+          </a:lnRef>
+          <a:fillRef idx="1">
+            <a:schemeClr val="accent5"/>
+          </a:fillRef>
+          <a:effectRef idx="0">
+            <a:schemeClr val="accent5"/>
+          </a:effectRef>
+          <a:fontRef idx="minor">
+            <a:schemeClr val="lt1"/>
+          </a:fontRef>
+        </p:style>
+        <p:txBody>
+          <a:bodyPr rtlCol="0" anchor="ctr"/>
+          <a:lstStyle/>
+          <a:p>
+            <a:pPr algn="ctr"/>
+            <a:r>
+              <a:rPr lang="fr-BE" sz="1600" b="1" dirty="0"/>
+              <a:t>Open </a:t>
+            </a:r>
+            <a:endParaRPr lang="en-GB" sz="1600" b="1" dirty="0"/>
+          </a:p>
+        </p:txBody>
+      </p:sp>
+      <p:sp>
+        <p:nvSpPr>
+          <p:cNvPr id="170" name="Ellipse 169">
+            <a:extLst>
+              <a:ext uri="{FF2B5EF4-FFF2-40B4-BE49-F238E27FC236}">
+                <a16:creationId xmlns:a16="http://schemas.microsoft.com/office/drawing/2014/main" id="{D96BE0B3-B7D3-43C3-BCE3-CF021A5D7237}"/>
+              </a:ext>
+            </a:extLst>
+          </p:cNvPr>
+          <p:cNvSpPr/>
+          <p:nvPr/>
+        </p:nvSpPr>
+        <p:spPr>
+          <a:xfrm>
+            <a:off x="7422276" y="4234674"/>
+            <a:ext cx="1632113" cy="728460"/>
+          </a:xfrm>
+          <a:prstGeom prst="ellipse">
+            <a:avLst/>
+          </a:prstGeom>
+        </p:spPr>
+        <p:style>
+          <a:lnRef idx="2">
+            <a:schemeClr val="accent5">
+              <a:shade val="50000"/>
+            </a:schemeClr>
+          </a:lnRef>
+          <a:fillRef idx="1">
+            <a:schemeClr val="accent5"/>
+          </a:fillRef>
+          <a:effectRef idx="0">
+            <a:schemeClr val="accent5"/>
+          </a:effectRef>
+          <a:fontRef idx="minor">
+            <a:schemeClr val="lt1"/>
+          </a:fontRef>
+        </p:style>
+        <p:txBody>
+          <a:bodyPr rtlCol="0" anchor="ctr"/>
+          <a:lstStyle/>
+          <a:p>
+            <a:pPr algn="ctr"/>
+            <a:r>
+              <a:rPr lang="fr-BE" sz="1600" b="1" dirty="0"/>
+              <a:t>Half-</a:t>
+            </a:r>
+            <a:r>
+              <a:rPr lang="fr-BE" sz="1600" b="1" dirty="0" err="1"/>
+              <a:t>Closed</a:t>
+            </a:r>
+            <a:endParaRPr lang="fr-BE" sz="1600" b="1" dirty="0"/>
+          </a:p>
+          <a:p>
+            <a:pPr algn="ctr"/>
+            <a:r>
+              <a:rPr lang="fr-BE" sz="1600" b="1" dirty="0"/>
+              <a:t>(</a:t>
+            </a:r>
+            <a:r>
+              <a:rPr lang="fr-BE" sz="1600" b="1" dirty="0" err="1"/>
+              <a:t>remote</a:t>
+            </a:r>
+            <a:r>
+              <a:rPr lang="fr-BE" sz="1600" b="1" dirty="0"/>
+              <a:t>)</a:t>
+            </a:r>
+            <a:endParaRPr lang="en-GB" sz="1600" b="1" dirty="0"/>
+          </a:p>
+        </p:txBody>
+      </p:sp>
+      <p:sp>
+        <p:nvSpPr>
+          <p:cNvPr id="172" name="Ellipse 171">
+            <a:extLst>
+              <a:ext uri="{FF2B5EF4-FFF2-40B4-BE49-F238E27FC236}">
+                <a16:creationId xmlns:a16="http://schemas.microsoft.com/office/drawing/2014/main" id="{619E1E41-588A-483E-9D50-84EBFE3C6057}"/>
+              </a:ext>
+            </a:extLst>
+          </p:cNvPr>
+          <p:cNvSpPr/>
+          <p:nvPr/>
+        </p:nvSpPr>
+        <p:spPr>
+          <a:xfrm>
+            <a:off x="5279943" y="3443520"/>
+            <a:ext cx="1632113" cy="728460"/>
+          </a:xfrm>
+          <a:prstGeom prst="ellipse">
+            <a:avLst/>
+          </a:prstGeom>
+        </p:spPr>
+        <p:style>
+          <a:lnRef idx="2">
+            <a:schemeClr val="accent5">
+              <a:shade val="50000"/>
+            </a:schemeClr>
+          </a:lnRef>
+          <a:fillRef idx="1">
+            <a:schemeClr val="accent5"/>
+          </a:fillRef>
+          <a:effectRef idx="0">
+            <a:schemeClr val="accent5"/>
+          </a:effectRef>
+          <a:fontRef idx="minor">
+            <a:schemeClr val="lt1"/>
+          </a:fontRef>
+        </p:style>
+        <p:txBody>
+          <a:bodyPr rtlCol="0" anchor="ctr"/>
+          <a:lstStyle/>
+          <a:p>
+            <a:pPr algn="ctr"/>
+            <a:r>
+              <a:rPr lang="fr-BE" sz="1600" b="1" dirty="0"/>
+              <a:t>Half-</a:t>
+            </a:r>
+            <a:r>
+              <a:rPr lang="fr-BE" sz="1600" b="1" dirty="0" err="1"/>
+              <a:t>Closed</a:t>
+            </a:r>
+            <a:endParaRPr lang="fr-BE" sz="1600" b="1" dirty="0"/>
+          </a:p>
+          <a:p>
+            <a:pPr algn="ctr"/>
+            <a:r>
+              <a:rPr lang="fr-BE" sz="1600" b="1" dirty="0"/>
+              <a:t>(local)</a:t>
+            </a:r>
+            <a:endParaRPr lang="en-GB" sz="1600" b="1" dirty="0"/>
+          </a:p>
+        </p:txBody>
+      </p:sp>
+      <p:sp>
+        <p:nvSpPr>
+          <p:cNvPr id="174" name="Ellipse 173">
+            <a:extLst>
+              <a:ext uri="{FF2B5EF4-FFF2-40B4-BE49-F238E27FC236}">
+                <a16:creationId xmlns:a16="http://schemas.microsoft.com/office/drawing/2014/main" id="{C5D5C692-6E58-4BC9-8D5E-89B457F0E824}"/>
+              </a:ext>
+            </a:extLst>
+          </p:cNvPr>
+          <p:cNvSpPr/>
+          <p:nvPr/>
+        </p:nvSpPr>
+        <p:spPr>
+          <a:xfrm>
+            <a:off x="9601200" y="3080071"/>
+            <a:ext cx="1632113" cy="728460"/>
+          </a:xfrm>
+          <a:prstGeom prst="ellipse">
+            <a:avLst/>
+          </a:prstGeom>
+        </p:spPr>
+        <p:style>
+          <a:lnRef idx="2">
+            <a:schemeClr val="accent5">
+              <a:shade val="50000"/>
+            </a:schemeClr>
+          </a:lnRef>
+          <a:fillRef idx="1">
+            <a:schemeClr val="accent5"/>
+          </a:fillRef>
+          <a:effectRef idx="0">
+            <a:schemeClr val="accent5"/>
+          </a:effectRef>
+          <a:fontRef idx="minor">
+            <a:schemeClr val="lt1"/>
+          </a:fontRef>
+        </p:style>
+        <p:txBody>
+          <a:bodyPr rtlCol="0" anchor="ctr"/>
+          <a:lstStyle/>
+          <a:p>
+            <a:pPr algn="ctr"/>
+            <a:r>
+              <a:rPr lang="fr-BE" sz="1600" b="1" dirty="0" err="1"/>
+              <a:t>Closed</a:t>
+            </a:r>
+            <a:endParaRPr lang="en-GB" sz="1600" b="1" dirty="0"/>
+          </a:p>
+        </p:txBody>
+      </p:sp>
+      <p:sp>
+        <p:nvSpPr>
+          <p:cNvPr id="175" name="Rectangle 174">
+            <a:extLst>
+              <a:ext uri="{FF2B5EF4-FFF2-40B4-BE49-F238E27FC236}">
+                <a16:creationId xmlns:a16="http://schemas.microsoft.com/office/drawing/2014/main" id="{66718011-F1A9-4A80-9F56-C0593A608762}"/>
+              </a:ext>
+            </a:extLst>
+          </p:cNvPr>
+          <p:cNvSpPr/>
+          <p:nvPr/>
+        </p:nvSpPr>
+        <p:spPr>
+          <a:xfrm>
+            <a:off x="313267" y="1573810"/>
+            <a:ext cx="1337733" cy="523281"/>
+          </a:xfrm>
+          <a:prstGeom prst="rect">
+            <a:avLst/>
+          </a:prstGeom>
+        </p:spPr>
+        <p:style>
+          <a:lnRef idx="2">
+            <a:schemeClr val="accent2">
+              <a:shade val="50000"/>
+            </a:schemeClr>
+          </a:lnRef>
+          <a:fillRef idx="1">
+            <a:schemeClr val="accent2"/>
+          </a:fillRef>
+          <a:effectRef idx="0">
+            <a:schemeClr val="accent2"/>
+          </a:effectRef>
+          <a:fontRef idx="minor">
+            <a:schemeClr val="lt1"/>
+          </a:fontRef>
+        </p:style>
+        <p:txBody>
+          <a:bodyPr rtlCol="0" anchor="ctr"/>
+          <a:lstStyle/>
+          <a:p>
+            <a:pPr algn="ctr"/>
+            <a:r>
+              <a:rPr lang="fr-FR" dirty="0" err="1"/>
+              <a:t>Ready</a:t>
+            </a:r>
+            <a:endParaRPr lang="en-GB" dirty="0"/>
+          </a:p>
+        </p:txBody>
+      </p:sp>
+      <p:sp>
+        <p:nvSpPr>
+          <p:cNvPr id="176" name="Rectangle : coins arrondis 175">
+            <a:extLst>
+              <a:ext uri="{FF2B5EF4-FFF2-40B4-BE49-F238E27FC236}">
+                <a16:creationId xmlns:a16="http://schemas.microsoft.com/office/drawing/2014/main" id="{6EC3BE33-2D16-45B4-B62D-63EB4C274A25}"/>
+              </a:ext>
+            </a:extLst>
+          </p:cNvPr>
+          <p:cNvSpPr/>
+          <p:nvPr/>
+        </p:nvSpPr>
+        <p:spPr>
+          <a:xfrm>
+            <a:off x="2218267" y="1557332"/>
+            <a:ext cx="1243342" cy="523220"/>
+          </a:xfrm>
+          <a:prstGeom prst="roundRect">
+            <a:avLst/>
+          </a:prstGeom>
+        </p:spPr>
+        <p:style>
+          <a:lnRef idx="2">
+            <a:schemeClr val="accent2">
+              <a:shade val="50000"/>
+            </a:schemeClr>
+          </a:lnRef>
+          <a:fillRef idx="1">
+            <a:schemeClr val="accent2"/>
+          </a:fillRef>
+          <a:effectRef idx="0">
+            <a:schemeClr val="accent2"/>
+          </a:effectRef>
+          <a:fontRef idx="minor">
+            <a:schemeClr val="lt1"/>
+          </a:fontRef>
+        </p:style>
+        <p:txBody>
+          <a:bodyPr rtlCol="0" anchor="ctr"/>
+          <a:lstStyle/>
+          <a:p>
+            <a:pPr algn="ctr"/>
+            <a:r>
+              <a:rPr lang="fr-FR" dirty="0" err="1"/>
+              <a:t>Recv</a:t>
+            </a:r>
+            <a:endParaRPr lang="en-GB" dirty="0"/>
+          </a:p>
+        </p:txBody>
+      </p:sp>
+      <p:sp>
+        <p:nvSpPr>
+          <p:cNvPr id="178" name="Rectangle 177">
+            <a:extLst>
+              <a:ext uri="{FF2B5EF4-FFF2-40B4-BE49-F238E27FC236}">
+                <a16:creationId xmlns:a16="http://schemas.microsoft.com/office/drawing/2014/main" id="{523D3E57-D6CD-47B5-9604-315199251AF9}"/>
+              </a:ext>
+            </a:extLst>
+          </p:cNvPr>
+          <p:cNvSpPr/>
+          <p:nvPr/>
+        </p:nvSpPr>
+        <p:spPr>
+          <a:xfrm>
+            <a:off x="313267" y="5093501"/>
+            <a:ext cx="1337733" cy="523281"/>
+          </a:xfrm>
+          <a:prstGeom prst="rect">
+            <a:avLst/>
+          </a:prstGeom>
+          <a:solidFill>
+            <a:srgbClr val="C00000"/>
+          </a:solidFill>
+        </p:spPr>
+        <p:style>
+          <a:lnRef idx="2">
+            <a:schemeClr val="accent2">
+              <a:shade val="50000"/>
+            </a:schemeClr>
+          </a:lnRef>
+          <a:fillRef idx="1">
+            <a:schemeClr val="accent2"/>
+          </a:fillRef>
+          <a:effectRef idx="0">
+            <a:schemeClr val="accent2"/>
+          </a:effectRef>
+          <a:fontRef idx="minor">
+            <a:schemeClr val="lt1"/>
+          </a:fontRef>
+        </p:style>
+        <p:txBody>
+          <a:bodyPr rtlCol="0" anchor="ctr"/>
+          <a:lstStyle/>
+          <a:p>
+            <a:pPr algn="ctr"/>
+            <a:r>
+              <a:rPr lang="fr-FR" dirty="0" err="1"/>
+              <a:t>Send</a:t>
+            </a:r>
+            <a:endParaRPr lang="en-GB" dirty="0"/>
+          </a:p>
+        </p:txBody>
+      </p:sp>
+      <p:sp>
+        <p:nvSpPr>
+          <p:cNvPr id="180" name="Rectangle 179">
+            <a:extLst>
+              <a:ext uri="{FF2B5EF4-FFF2-40B4-BE49-F238E27FC236}">
+                <a16:creationId xmlns:a16="http://schemas.microsoft.com/office/drawing/2014/main" id="{2357F8A8-5CDA-4D11-8FE0-1989EE191E4A}"/>
+              </a:ext>
+            </a:extLst>
+          </p:cNvPr>
+          <p:cNvSpPr/>
+          <p:nvPr/>
+        </p:nvSpPr>
+        <p:spPr>
+          <a:xfrm>
+            <a:off x="2270671" y="4598904"/>
+            <a:ext cx="1337733" cy="523281"/>
+          </a:xfrm>
+          <a:prstGeom prst="rect">
+            <a:avLst/>
+          </a:prstGeom>
+          <a:solidFill>
+            <a:srgbClr val="C00000"/>
+          </a:solidFill>
+        </p:spPr>
+        <p:style>
+          <a:lnRef idx="2">
+            <a:schemeClr val="accent2">
+              <a:shade val="50000"/>
+            </a:schemeClr>
+          </a:lnRef>
+          <a:fillRef idx="1">
+            <a:schemeClr val="accent2"/>
+          </a:fillRef>
+          <a:effectRef idx="0">
+            <a:schemeClr val="accent2"/>
+          </a:effectRef>
+          <a:fontRef idx="minor">
+            <a:schemeClr val="lt1"/>
+          </a:fontRef>
+        </p:style>
+        <p:txBody>
+          <a:bodyPr rtlCol="0" anchor="ctr"/>
+          <a:lstStyle/>
+          <a:p>
+            <a:pPr algn="ctr"/>
+            <a:r>
+              <a:rPr lang="fr-FR" dirty="0"/>
+              <a:t>Reset Sent</a:t>
+            </a:r>
+            <a:endParaRPr lang="en-GB" dirty="0"/>
+          </a:p>
+        </p:txBody>
+      </p:sp>
+      <p:sp>
+        <p:nvSpPr>
+          <p:cNvPr id="182" name="Rectangle 181">
+            <a:extLst>
+              <a:ext uri="{FF2B5EF4-FFF2-40B4-BE49-F238E27FC236}">
+                <a16:creationId xmlns:a16="http://schemas.microsoft.com/office/drawing/2014/main" id="{D725C38A-8727-4AD5-B8C6-AA47886C28D2}"/>
+              </a:ext>
+            </a:extLst>
+          </p:cNvPr>
+          <p:cNvSpPr/>
+          <p:nvPr/>
+        </p:nvSpPr>
+        <p:spPr>
+          <a:xfrm>
+            <a:off x="2270671" y="5645466"/>
+            <a:ext cx="1337733" cy="523281"/>
+          </a:xfrm>
+          <a:prstGeom prst="rect">
+            <a:avLst/>
+          </a:prstGeom>
+          <a:solidFill>
+            <a:srgbClr val="C00000"/>
+          </a:solidFill>
+        </p:spPr>
+        <p:style>
+          <a:lnRef idx="2">
+            <a:schemeClr val="accent2">
+              <a:shade val="50000"/>
+            </a:schemeClr>
+          </a:lnRef>
+          <a:fillRef idx="1">
+            <a:schemeClr val="accent2"/>
+          </a:fillRef>
+          <a:effectRef idx="0">
+            <a:schemeClr val="accent2"/>
+          </a:effectRef>
+          <a:fontRef idx="minor">
+            <a:schemeClr val="lt1"/>
+          </a:fontRef>
+        </p:style>
+        <p:txBody>
+          <a:bodyPr rtlCol="0" anchor="ctr"/>
+          <a:lstStyle/>
+          <a:p>
+            <a:pPr algn="ctr"/>
+            <a:r>
+              <a:rPr lang="fr-FR" dirty="0"/>
+              <a:t>Data Sent</a:t>
+            </a:r>
+            <a:endParaRPr lang="en-GB" dirty="0"/>
+          </a:p>
+        </p:txBody>
+      </p:sp>
+      <p:sp>
+        <p:nvSpPr>
+          <p:cNvPr id="184" name="Rectangle 183">
+            <a:extLst>
+              <a:ext uri="{FF2B5EF4-FFF2-40B4-BE49-F238E27FC236}">
+                <a16:creationId xmlns:a16="http://schemas.microsoft.com/office/drawing/2014/main" id="{70DF2D4B-F8F5-40C3-B075-1CAE3632CAFD}"/>
+              </a:ext>
+            </a:extLst>
+          </p:cNvPr>
+          <p:cNvSpPr/>
+          <p:nvPr/>
+        </p:nvSpPr>
+        <p:spPr>
+          <a:xfrm>
+            <a:off x="4065607" y="4598904"/>
+            <a:ext cx="1337733" cy="523281"/>
+          </a:xfrm>
+          <a:prstGeom prst="rect">
+            <a:avLst/>
+          </a:prstGeom>
+          <a:solidFill>
+            <a:schemeClr val="accent6">
+              <a:lumMod val="75000"/>
+            </a:schemeClr>
+          </a:solidFill>
+        </p:spPr>
+        <p:style>
+          <a:lnRef idx="2">
+            <a:schemeClr val="accent6">
+              <a:shade val="50000"/>
+            </a:schemeClr>
+          </a:lnRef>
+          <a:fillRef idx="1">
+            <a:schemeClr val="accent6"/>
+          </a:fillRef>
+          <a:effectRef idx="0">
+            <a:schemeClr val="accent6"/>
+          </a:effectRef>
+          <a:fontRef idx="minor">
+            <a:schemeClr val="lt1"/>
+          </a:fontRef>
+        </p:style>
+        <p:txBody>
+          <a:bodyPr rtlCol="0" anchor="ctr"/>
+          <a:lstStyle/>
+          <a:p>
+            <a:pPr algn="ctr"/>
+            <a:r>
+              <a:rPr lang="fr-FR" dirty="0"/>
+              <a:t>Reset </a:t>
+            </a:r>
+            <a:r>
+              <a:rPr lang="fr-FR" dirty="0" err="1"/>
+              <a:t>Recvd</a:t>
+            </a:r>
+            <a:endParaRPr lang="en-GB" dirty="0"/>
+          </a:p>
+        </p:txBody>
+      </p:sp>
+      <p:sp>
+        <p:nvSpPr>
+          <p:cNvPr id="186" name="Rectangle 185">
+            <a:extLst>
+              <a:ext uri="{FF2B5EF4-FFF2-40B4-BE49-F238E27FC236}">
+                <a16:creationId xmlns:a16="http://schemas.microsoft.com/office/drawing/2014/main" id="{48D27E21-6331-4013-A8ED-C8F531D3EB23}"/>
+              </a:ext>
+            </a:extLst>
+          </p:cNvPr>
+          <p:cNvSpPr/>
+          <p:nvPr/>
+        </p:nvSpPr>
+        <p:spPr>
+          <a:xfrm>
+            <a:off x="4065607" y="5645466"/>
+            <a:ext cx="1337733" cy="523281"/>
+          </a:xfrm>
+          <a:prstGeom prst="rect">
+            <a:avLst/>
+          </a:prstGeom>
+          <a:solidFill>
+            <a:schemeClr val="accent6">
+              <a:lumMod val="75000"/>
+            </a:schemeClr>
+          </a:solidFill>
+        </p:spPr>
+        <p:style>
+          <a:lnRef idx="2">
+            <a:schemeClr val="accent6">
+              <a:shade val="50000"/>
+            </a:schemeClr>
+          </a:lnRef>
+          <a:fillRef idx="1">
+            <a:schemeClr val="accent6"/>
+          </a:fillRef>
+          <a:effectRef idx="0">
+            <a:schemeClr val="accent6"/>
+          </a:effectRef>
+          <a:fontRef idx="minor">
+            <a:schemeClr val="lt1"/>
+          </a:fontRef>
+        </p:style>
+        <p:txBody>
+          <a:bodyPr rtlCol="0" anchor="ctr"/>
+          <a:lstStyle/>
+          <a:p>
+            <a:pPr algn="ctr"/>
+            <a:r>
+              <a:rPr lang="fr-FR" dirty="0"/>
+              <a:t>Data </a:t>
+            </a:r>
+            <a:r>
+              <a:rPr lang="fr-FR" dirty="0" err="1"/>
+              <a:t>Recvd</a:t>
+            </a:r>
+            <a:endParaRPr lang="en-GB" dirty="0"/>
+          </a:p>
+        </p:txBody>
+      </p:sp>
+      <p:cxnSp>
+        <p:nvCxnSpPr>
+          <p:cNvPr id="188" name="Connecteur droit avec flèche 187">
+            <a:extLst>
+              <a:ext uri="{FF2B5EF4-FFF2-40B4-BE49-F238E27FC236}">
+                <a16:creationId xmlns:a16="http://schemas.microsoft.com/office/drawing/2014/main" id="{08D9A169-A7C0-461D-8187-840540051B18}"/>
+              </a:ext>
+            </a:extLst>
+          </p:cNvPr>
+          <p:cNvCxnSpPr>
+            <a:stCxn id="178" idx="3"/>
+            <a:endCxn id="180" idx="1"/>
+          </p:cNvCxnSpPr>
+          <p:nvPr/>
+        </p:nvCxnSpPr>
+        <p:spPr>
+          <a:xfrm flipV="1">
+            <a:off x="1651000" y="4860545"/>
+            <a:ext cx="619671" cy="494597"/>
+          </a:xfrm>
+          <a:prstGeom prst="straightConnector1">
+            <a:avLst/>
+          </a:prstGeom>
+          <a:ln>
+            <a:solidFill>
+              <a:schemeClr val="tx1"/>
+            </a:solidFill>
+            <a:tailEnd type="triangle"/>
+          </a:ln>
+        </p:spPr>
+        <p:style>
+          <a:lnRef idx="1">
+            <a:schemeClr val="accent1"/>
+          </a:lnRef>
+          <a:fillRef idx="0">
+            <a:schemeClr val="accent1"/>
+          </a:fillRef>
+          <a:effectRef idx="0">
+            <a:schemeClr val="accent1"/>
+          </a:effectRef>
+          <a:fontRef idx="minor">
+            <a:schemeClr val="tx1"/>
+          </a:fontRef>
+        </p:style>
+      </p:cxnSp>
+      <p:cxnSp>
+        <p:nvCxnSpPr>
+          <p:cNvPr id="189" name="Connecteur droit avec flèche 188">
+            <a:extLst>
+              <a:ext uri="{FF2B5EF4-FFF2-40B4-BE49-F238E27FC236}">
+                <a16:creationId xmlns:a16="http://schemas.microsoft.com/office/drawing/2014/main" id="{2DE85B40-3301-44A8-BFE9-E72679501136}"/>
+              </a:ext>
+            </a:extLst>
+          </p:cNvPr>
+          <p:cNvCxnSpPr>
+            <a:cxnSpLocks/>
+            <a:stCxn id="178" idx="3"/>
+            <a:endCxn id="182" idx="1"/>
+          </p:cNvCxnSpPr>
+          <p:nvPr/>
+        </p:nvCxnSpPr>
+        <p:spPr>
+          <a:xfrm>
+            <a:off x="1651000" y="5355142"/>
+            <a:ext cx="619671" cy="551965"/>
+          </a:xfrm>
+          <a:prstGeom prst="straightConnector1">
+            <a:avLst/>
+          </a:prstGeom>
+          <a:ln>
+            <a:solidFill>
+              <a:schemeClr val="tx1"/>
+            </a:solidFill>
+            <a:tailEnd type="triangle"/>
+          </a:ln>
+        </p:spPr>
+        <p:style>
+          <a:lnRef idx="1">
+            <a:schemeClr val="accent1"/>
+          </a:lnRef>
+          <a:fillRef idx="0">
+            <a:schemeClr val="accent1"/>
+          </a:fillRef>
+          <a:effectRef idx="0">
+            <a:schemeClr val="accent1"/>
+          </a:effectRef>
+          <a:fontRef idx="minor">
+            <a:schemeClr val="tx1"/>
+          </a:fontRef>
+        </p:style>
+      </p:cxnSp>
+      <p:cxnSp>
+        <p:nvCxnSpPr>
+          <p:cNvPr id="192" name="Connecteur droit avec flèche 191">
+            <a:extLst>
+              <a:ext uri="{FF2B5EF4-FFF2-40B4-BE49-F238E27FC236}">
+                <a16:creationId xmlns:a16="http://schemas.microsoft.com/office/drawing/2014/main" id="{D6DA2AEB-C5AE-412C-A3CD-51F2A34EA60A}"/>
+              </a:ext>
+            </a:extLst>
+          </p:cNvPr>
+          <p:cNvCxnSpPr>
+            <a:cxnSpLocks/>
+            <a:stCxn id="182" idx="0"/>
+            <a:endCxn id="180" idx="2"/>
+          </p:cNvCxnSpPr>
+          <p:nvPr/>
+        </p:nvCxnSpPr>
+        <p:spPr>
+          <a:xfrm flipV="1">
+            <a:off x="2939538" y="5122185"/>
+            <a:ext cx="0" cy="523281"/>
+          </a:xfrm>
+          <a:prstGeom prst="straightConnector1">
+            <a:avLst/>
+          </a:prstGeom>
+          <a:ln>
+            <a:solidFill>
+              <a:schemeClr val="tx1"/>
+            </a:solidFill>
+            <a:tailEnd type="triangle"/>
+          </a:ln>
+        </p:spPr>
+        <p:style>
+          <a:lnRef idx="1">
+            <a:schemeClr val="accent1"/>
+          </a:lnRef>
+          <a:fillRef idx="0">
+            <a:schemeClr val="accent1"/>
+          </a:fillRef>
+          <a:effectRef idx="0">
+            <a:schemeClr val="accent1"/>
+          </a:effectRef>
+          <a:fontRef idx="minor">
+            <a:schemeClr val="tx1"/>
+          </a:fontRef>
+        </p:style>
+      </p:cxnSp>
+      <p:cxnSp>
+        <p:nvCxnSpPr>
+          <p:cNvPr id="195" name="Connecteur droit avec flèche 194">
+            <a:extLst>
+              <a:ext uri="{FF2B5EF4-FFF2-40B4-BE49-F238E27FC236}">
+                <a16:creationId xmlns:a16="http://schemas.microsoft.com/office/drawing/2014/main" id="{F8CF6522-BB05-404D-89B0-27210AC93648}"/>
+              </a:ext>
+            </a:extLst>
+          </p:cNvPr>
+          <p:cNvCxnSpPr>
+            <a:cxnSpLocks/>
+            <a:stCxn id="180" idx="3"/>
+            <a:endCxn id="184" idx="1"/>
+          </p:cNvCxnSpPr>
+          <p:nvPr/>
+        </p:nvCxnSpPr>
+        <p:spPr>
+          <a:xfrm>
+            <a:off x="3608404" y="4860545"/>
+            <a:ext cx="457203" cy="0"/>
+          </a:xfrm>
+          <a:prstGeom prst="straightConnector1">
+            <a:avLst/>
+          </a:prstGeom>
+          <a:ln>
+            <a:solidFill>
+              <a:schemeClr val="tx1"/>
+            </a:solidFill>
+            <a:tailEnd type="triangle"/>
+          </a:ln>
+        </p:spPr>
+        <p:style>
+          <a:lnRef idx="1">
+            <a:schemeClr val="accent1"/>
+          </a:lnRef>
+          <a:fillRef idx="0">
+            <a:schemeClr val="accent1"/>
+          </a:fillRef>
+          <a:effectRef idx="0">
+            <a:schemeClr val="accent1"/>
+          </a:effectRef>
+          <a:fontRef idx="minor">
+            <a:schemeClr val="tx1"/>
+          </a:fontRef>
+        </p:style>
+      </p:cxnSp>
+      <p:cxnSp>
+        <p:nvCxnSpPr>
+          <p:cNvPr id="215" name="Connecteur droit avec flèche 214">
+            <a:extLst>
+              <a:ext uri="{FF2B5EF4-FFF2-40B4-BE49-F238E27FC236}">
+                <a16:creationId xmlns:a16="http://schemas.microsoft.com/office/drawing/2014/main" id="{F06AB171-C4D0-4A6C-9431-6478921646FC}"/>
+              </a:ext>
+            </a:extLst>
+          </p:cNvPr>
+          <p:cNvCxnSpPr>
+            <a:cxnSpLocks/>
+          </p:cNvCxnSpPr>
+          <p:nvPr/>
+        </p:nvCxnSpPr>
+        <p:spPr>
+          <a:xfrm>
+            <a:off x="3608404" y="5907106"/>
+            <a:ext cx="457203" cy="0"/>
+          </a:xfrm>
+          <a:prstGeom prst="straightConnector1">
+            <a:avLst/>
+          </a:prstGeom>
+          <a:ln>
+            <a:solidFill>
+              <a:schemeClr val="tx1"/>
+            </a:solidFill>
+            <a:tailEnd type="triangle"/>
+          </a:ln>
+        </p:spPr>
+        <p:style>
+          <a:lnRef idx="1">
+            <a:schemeClr val="accent1"/>
+          </a:lnRef>
+          <a:fillRef idx="0">
+            <a:schemeClr val="accent1"/>
+          </a:fillRef>
+          <a:effectRef idx="0">
+            <a:schemeClr val="accent1"/>
+          </a:effectRef>
+          <a:fontRef idx="minor">
+            <a:schemeClr val="tx1"/>
+          </a:fontRef>
+        </p:style>
+      </p:cxnSp>
+      <p:sp>
+        <p:nvSpPr>
+          <p:cNvPr id="217" name="Rectangle : coins arrondis 216">
+            <a:extLst>
+              <a:ext uri="{FF2B5EF4-FFF2-40B4-BE49-F238E27FC236}">
+                <a16:creationId xmlns:a16="http://schemas.microsoft.com/office/drawing/2014/main" id="{B1EBE2B5-BCD4-4009-BC49-E3743BDA79EE}"/>
+              </a:ext>
+            </a:extLst>
+          </p:cNvPr>
+          <p:cNvSpPr/>
+          <p:nvPr/>
+        </p:nvSpPr>
+        <p:spPr>
+          <a:xfrm>
+            <a:off x="3994017" y="1578328"/>
+            <a:ext cx="1243342" cy="523220"/>
+          </a:xfrm>
+          <a:prstGeom prst="roundRect">
+            <a:avLst/>
+          </a:prstGeom>
+          <a:solidFill>
+            <a:srgbClr val="C00000"/>
+          </a:solidFill>
+        </p:spPr>
+        <p:style>
+          <a:lnRef idx="2">
+            <a:schemeClr val="accent2">
+              <a:shade val="50000"/>
+            </a:schemeClr>
+          </a:lnRef>
+          <a:fillRef idx="1">
+            <a:schemeClr val="accent2"/>
+          </a:fillRef>
+          <a:effectRef idx="0">
+            <a:schemeClr val="accent2"/>
+          </a:effectRef>
+          <a:fontRef idx="minor">
+            <a:schemeClr val="lt1"/>
+          </a:fontRef>
+        </p:style>
+        <p:txBody>
+          <a:bodyPr rtlCol="0" anchor="ctr"/>
+          <a:lstStyle/>
+          <a:p>
+            <a:pPr algn="ctr"/>
+            <a:r>
+              <a:rPr lang="fr-FR" dirty="0"/>
+              <a:t>Size </a:t>
+            </a:r>
+            <a:r>
+              <a:rPr lang="fr-FR" dirty="0" err="1"/>
+              <a:t>Known</a:t>
+            </a:r>
+            <a:endParaRPr lang="en-GB" dirty="0"/>
+          </a:p>
+        </p:txBody>
+      </p:sp>
+      <p:sp>
+        <p:nvSpPr>
+          <p:cNvPr id="219" name="Rectangle : coins arrondis 218">
+            <a:extLst>
+              <a:ext uri="{FF2B5EF4-FFF2-40B4-BE49-F238E27FC236}">
+                <a16:creationId xmlns:a16="http://schemas.microsoft.com/office/drawing/2014/main" id="{841C666D-A606-47D4-B762-686A42A8296D}"/>
+              </a:ext>
+            </a:extLst>
+          </p:cNvPr>
+          <p:cNvSpPr/>
+          <p:nvPr/>
+        </p:nvSpPr>
+        <p:spPr>
+          <a:xfrm>
+            <a:off x="5899017" y="1112444"/>
+            <a:ext cx="1243342" cy="523220"/>
+          </a:xfrm>
+          <a:prstGeom prst="roundRect">
+            <a:avLst/>
+          </a:prstGeom>
+          <a:solidFill>
+            <a:srgbClr val="C00000"/>
+          </a:solidFill>
+        </p:spPr>
+        <p:style>
+          <a:lnRef idx="2">
+            <a:schemeClr val="accent2">
+              <a:shade val="50000"/>
+            </a:schemeClr>
+          </a:lnRef>
+          <a:fillRef idx="1">
+            <a:schemeClr val="accent2"/>
+          </a:fillRef>
+          <a:effectRef idx="0">
+            <a:schemeClr val="accent2"/>
+          </a:effectRef>
+          <a:fontRef idx="minor">
+            <a:schemeClr val="lt1"/>
+          </a:fontRef>
+        </p:style>
+        <p:txBody>
+          <a:bodyPr rtlCol="0" anchor="ctr"/>
+          <a:lstStyle/>
+          <a:p>
+            <a:pPr algn="ctr"/>
+            <a:r>
+              <a:rPr lang="fr-FR" dirty="0"/>
+              <a:t>Reset </a:t>
+            </a:r>
+            <a:r>
+              <a:rPr lang="fr-FR" dirty="0" err="1"/>
+              <a:t>Recvd</a:t>
+            </a:r>
+            <a:endParaRPr lang="en-GB" dirty="0"/>
+          </a:p>
+        </p:txBody>
+      </p:sp>
+      <p:cxnSp>
+        <p:nvCxnSpPr>
+          <p:cNvPr id="220" name="Connecteur droit avec flèche 219">
+            <a:extLst>
+              <a:ext uri="{FF2B5EF4-FFF2-40B4-BE49-F238E27FC236}">
+                <a16:creationId xmlns:a16="http://schemas.microsoft.com/office/drawing/2014/main" id="{E282615C-C279-424D-AC29-946D456855CB}"/>
+              </a:ext>
+            </a:extLst>
+          </p:cNvPr>
+          <p:cNvCxnSpPr/>
+          <p:nvPr/>
+        </p:nvCxnSpPr>
+        <p:spPr>
+          <a:xfrm flipV="1">
+            <a:off x="5237359" y="1374054"/>
+            <a:ext cx="619671" cy="494597"/>
+          </a:xfrm>
+          <a:prstGeom prst="straightConnector1">
+            <a:avLst/>
+          </a:prstGeom>
+          <a:ln>
+            <a:solidFill>
+              <a:schemeClr val="tx1"/>
+            </a:solidFill>
+            <a:tailEnd type="triangle"/>
+          </a:ln>
+        </p:spPr>
+        <p:style>
+          <a:lnRef idx="1">
+            <a:schemeClr val="accent1"/>
+          </a:lnRef>
+          <a:fillRef idx="0">
+            <a:schemeClr val="accent1"/>
+          </a:fillRef>
+          <a:effectRef idx="0">
+            <a:schemeClr val="accent1"/>
+          </a:effectRef>
+          <a:fontRef idx="minor">
+            <a:schemeClr val="tx1"/>
+          </a:fontRef>
+        </p:style>
+      </p:cxnSp>
+      <p:sp>
+        <p:nvSpPr>
+          <p:cNvPr id="222" name="Rectangle : coins arrondis 221">
+            <a:extLst>
+              <a:ext uri="{FF2B5EF4-FFF2-40B4-BE49-F238E27FC236}">
+                <a16:creationId xmlns:a16="http://schemas.microsoft.com/office/drawing/2014/main" id="{3BE9F64E-183E-4FC2-9E85-9AEC4A332740}"/>
+              </a:ext>
+            </a:extLst>
+          </p:cNvPr>
+          <p:cNvSpPr/>
+          <p:nvPr/>
+        </p:nvSpPr>
+        <p:spPr>
+          <a:xfrm>
+            <a:off x="5899017" y="2133948"/>
+            <a:ext cx="1243342" cy="523220"/>
+          </a:xfrm>
+          <a:prstGeom prst="roundRect">
+            <a:avLst/>
+          </a:prstGeom>
+          <a:solidFill>
+            <a:srgbClr val="C00000"/>
+          </a:solidFill>
+        </p:spPr>
+        <p:style>
+          <a:lnRef idx="2">
+            <a:schemeClr val="accent2">
+              <a:shade val="50000"/>
+            </a:schemeClr>
+          </a:lnRef>
+          <a:fillRef idx="1">
+            <a:schemeClr val="accent2"/>
+          </a:fillRef>
+          <a:effectRef idx="0">
+            <a:schemeClr val="accent2"/>
+          </a:effectRef>
+          <a:fontRef idx="minor">
+            <a:schemeClr val="lt1"/>
+          </a:fontRef>
+        </p:style>
+        <p:txBody>
+          <a:bodyPr rtlCol="0" anchor="ctr"/>
+          <a:lstStyle/>
+          <a:p>
+            <a:pPr algn="ctr"/>
+            <a:r>
+              <a:rPr lang="fr-FR" dirty="0"/>
+              <a:t>Data </a:t>
+            </a:r>
+            <a:r>
+              <a:rPr lang="fr-FR" dirty="0" err="1"/>
+              <a:t>Recvd</a:t>
+            </a:r>
+            <a:endParaRPr lang="en-GB" dirty="0"/>
+          </a:p>
+        </p:txBody>
+      </p:sp>
+      <p:cxnSp>
+        <p:nvCxnSpPr>
+          <p:cNvPr id="223" name="Connecteur droit avec flèche 222">
+            <a:extLst>
+              <a:ext uri="{FF2B5EF4-FFF2-40B4-BE49-F238E27FC236}">
+                <a16:creationId xmlns:a16="http://schemas.microsoft.com/office/drawing/2014/main" id="{DF236E6B-21F7-4A46-966C-032D44C15BEF}"/>
+              </a:ext>
+            </a:extLst>
+          </p:cNvPr>
+          <p:cNvCxnSpPr>
+            <a:cxnSpLocks/>
+          </p:cNvCxnSpPr>
+          <p:nvPr/>
+        </p:nvCxnSpPr>
+        <p:spPr>
+          <a:xfrm>
+            <a:off x="5258352" y="1868651"/>
+            <a:ext cx="619671" cy="551965"/>
+          </a:xfrm>
+          <a:prstGeom prst="straightConnector1">
+            <a:avLst/>
+          </a:prstGeom>
+          <a:ln>
+            <a:solidFill>
+              <a:schemeClr val="tx1"/>
+            </a:solidFill>
+            <a:tailEnd type="triangle"/>
+          </a:ln>
+        </p:spPr>
+        <p:style>
+          <a:lnRef idx="1">
+            <a:schemeClr val="accent1"/>
+          </a:lnRef>
+          <a:fillRef idx="0">
+            <a:schemeClr val="accent1"/>
+          </a:fillRef>
+          <a:effectRef idx="0">
+            <a:schemeClr val="accent1"/>
+          </a:effectRef>
+          <a:fontRef idx="minor">
+            <a:schemeClr val="tx1"/>
+          </a:fontRef>
+        </p:style>
+      </p:cxnSp>
+      <p:cxnSp>
+        <p:nvCxnSpPr>
+          <p:cNvPr id="224" name="Connecteur droit avec flèche 223">
+            <a:extLst>
+              <a:ext uri="{FF2B5EF4-FFF2-40B4-BE49-F238E27FC236}">
+                <a16:creationId xmlns:a16="http://schemas.microsoft.com/office/drawing/2014/main" id="{710F0520-3080-405A-8A08-0596A1BCD120}"/>
+              </a:ext>
+            </a:extLst>
+          </p:cNvPr>
+          <p:cNvCxnSpPr>
+            <a:cxnSpLocks/>
+          </p:cNvCxnSpPr>
+          <p:nvPr/>
+        </p:nvCxnSpPr>
+        <p:spPr>
+          <a:xfrm flipV="1">
+            <a:off x="6305416" y="1607010"/>
+            <a:ext cx="0" cy="523281"/>
+          </a:xfrm>
+          <a:prstGeom prst="straightConnector1">
+            <a:avLst/>
+          </a:prstGeom>
+          <a:ln>
+            <a:solidFill>
+              <a:schemeClr val="tx1"/>
+            </a:solidFill>
+            <a:tailEnd type="triangle"/>
+          </a:ln>
+        </p:spPr>
+        <p:style>
+          <a:lnRef idx="1">
+            <a:schemeClr val="accent1"/>
+          </a:lnRef>
+          <a:fillRef idx="0">
+            <a:schemeClr val="accent1"/>
+          </a:fillRef>
+          <a:effectRef idx="0">
+            <a:schemeClr val="accent1"/>
+          </a:effectRef>
+          <a:fontRef idx="minor">
+            <a:schemeClr val="tx1"/>
+          </a:fontRef>
+        </p:style>
+      </p:cxnSp>
+      <p:cxnSp>
+        <p:nvCxnSpPr>
+          <p:cNvPr id="225" name="Connecteur droit avec flèche 224">
+            <a:extLst>
+              <a:ext uri="{FF2B5EF4-FFF2-40B4-BE49-F238E27FC236}">
+                <a16:creationId xmlns:a16="http://schemas.microsoft.com/office/drawing/2014/main" id="{FD2AD9F1-AAA5-40ED-9EF5-A8FD862862E1}"/>
+              </a:ext>
+            </a:extLst>
+          </p:cNvPr>
+          <p:cNvCxnSpPr>
+            <a:cxnSpLocks/>
+          </p:cNvCxnSpPr>
+          <p:nvPr/>
+        </p:nvCxnSpPr>
+        <p:spPr>
+          <a:xfrm>
+            <a:off x="6753803" y="1635664"/>
+            <a:ext cx="0" cy="508969"/>
+          </a:xfrm>
+          <a:prstGeom prst="straightConnector1">
+            <a:avLst/>
+          </a:prstGeom>
+          <a:ln>
+            <a:solidFill>
+              <a:schemeClr val="tx1"/>
+            </a:solidFill>
+            <a:tailEnd type="triangle"/>
+          </a:ln>
+        </p:spPr>
+        <p:style>
+          <a:lnRef idx="1">
+            <a:schemeClr val="accent1"/>
+          </a:lnRef>
+          <a:fillRef idx="0">
+            <a:schemeClr val="accent1"/>
+          </a:fillRef>
+          <a:effectRef idx="0">
+            <a:schemeClr val="accent1"/>
+          </a:effectRef>
+          <a:fontRef idx="minor">
+            <a:schemeClr val="tx1"/>
+          </a:fontRef>
+        </p:style>
+      </p:cxnSp>
+      <p:sp>
+        <p:nvSpPr>
+          <p:cNvPr id="230" name="Rectangle : coins arrondis 229">
+            <a:extLst>
+              <a:ext uri="{FF2B5EF4-FFF2-40B4-BE49-F238E27FC236}">
+                <a16:creationId xmlns:a16="http://schemas.microsoft.com/office/drawing/2014/main" id="{13F37134-309F-4816-9A78-651A5D7CB676}"/>
+              </a:ext>
+            </a:extLst>
+          </p:cNvPr>
+          <p:cNvSpPr/>
+          <p:nvPr/>
+        </p:nvSpPr>
+        <p:spPr>
+          <a:xfrm>
+            <a:off x="7590745" y="1098132"/>
+            <a:ext cx="1243342" cy="523220"/>
+          </a:xfrm>
+          <a:prstGeom prst="roundRect">
+            <a:avLst/>
+          </a:prstGeom>
+          <a:solidFill>
+            <a:schemeClr val="accent6">
+              <a:lumMod val="75000"/>
+            </a:schemeClr>
+          </a:solidFill>
+        </p:spPr>
+        <p:style>
+          <a:lnRef idx="2">
+            <a:schemeClr val="accent2">
+              <a:shade val="50000"/>
+            </a:schemeClr>
+          </a:lnRef>
+          <a:fillRef idx="1">
+            <a:schemeClr val="accent2"/>
+          </a:fillRef>
+          <a:effectRef idx="0">
+            <a:schemeClr val="accent2"/>
+          </a:effectRef>
+          <a:fontRef idx="minor">
+            <a:schemeClr val="lt1"/>
+          </a:fontRef>
+        </p:style>
+        <p:txBody>
+          <a:bodyPr rtlCol="0" anchor="ctr"/>
+          <a:lstStyle/>
+          <a:p>
+            <a:pPr algn="ctr"/>
+            <a:r>
+              <a:rPr lang="fr-FR" dirty="0"/>
+              <a:t>Reset Read</a:t>
+            </a:r>
+            <a:endParaRPr lang="en-GB" dirty="0"/>
+          </a:p>
+        </p:txBody>
+      </p:sp>
+      <p:sp>
+        <p:nvSpPr>
+          <p:cNvPr id="232" name="Rectangle : coins arrondis 231">
+            <a:extLst>
+              <a:ext uri="{FF2B5EF4-FFF2-40B4-BE49-F238E27FC236}">
+                <a16:creationId xmlns:a16="http://schemas.microsoft.com/office/drawing/2014/main" id="{E561FA01-2DAB-42B4-95C2-0E356AA4D4DF}"/>
+              </a:ext>
+            </a:extLst>
+          </p:cNvPr>
+          <p:cNvSpPr/>
+          <p:nvPr/>
+        </p:nvSpPr>
+        <p:spPr>
+          <a:xfrm>
+            <a:off x="7629584" y="2144633"/>
+            <a:ext cx="1243342" cy="523220"/>
+          </a:xfrm>
+          <a:prstGeom prst="roundRect">
+            <a:avLst/>
+          </a:prstGeom>
+          <a:solidFill>
+            <a:schemeClr val="accent6">
+              <a:lumMod val="75000"/>
+            </a:schemeClr>
+          </a:solidFill>
+        </p:spPr>
+        <p:style>
+          <a:lnRef idx="2">
+            <a:schemeClr val="accent2">
+              <a:shade val="50000"/>
+            </a:schemeClr>
+          </a:lnRef>
+          <a:fillRef idx="1">
+            <a:schemeClr val="accent2"/>
+          </a:fillRef>
+          <a:effectRef idx="0">
+            <a:schemeClr val="accent2"/>
+          </a:effectRef>
+          <a:fontRef idx="minor">
+            <a:schemeClr val="lt1"/>
+          </a:fontRef>
+        </p:style>
+        <p:txBody>
+          <a:bodyPr rtlCol="0" anchor="ctr"/>
+          <a:lstStyle/>
+          <a:p>
+            <a:pPr algn="ctr"/>
+            <a:r>
+              <a:rPr lang="fr-FR" dirty="0"/>
+              <a:t>Data Read</a:t>
+            </a:r>
+            <a:endParaRPr lang="en-GB" dirty="0"/>
+          </a:p>
+        </p:txBody>
+      </p:sp>
+      <p:cxnSp>
+        <p:nvCxnSpPr>
+          <p:cNvPr id="233" name="Connecteur droit avec flèche 232">
+            <a:extLst>
+              <a:ext uri="{FF2B5EF4-FFF2-40B4-BE49-F238E27FC236}">
+                <a16:creationId xmlns:a16="http://schemas.microsoft.com/office/drawing/2014/main" id="{AB81251E-8436-4FCE-A331-264E6593C451}"/>
+              </a:ext>
+            </a:extLst>
+          </p:cNvPr>
+          <p:cNvCxnSpPr>
+            <a:cxnSpLocks/>
+          </p:cNvCxnSpPr>
+          <p:nvPr/>
+        </p:nvCxnSpPr>
+        <p:spPr>
+          <a:xfrm>
+            <a:off x="7142359" y="1374054"/>
+            <a:ext cx="457203" cy="0"/>
+          </a:xfrm>
+          <a:prstGeom prst="straightConnector1">
+            <a:avLst/>
+          </a:prstGeom>
+          <a:ln>
+            <a:solidFill>
+              <a:schemeClr val="tx1"/>
+            </a:solidFill>
+            <a:tailEnd type="triangle"/>
+          </a:ln>
+        </p:spPr>
+        <p:style>
+          <a:lnRef idx="1">
+            <a:schemeClr val="accent1"/>
+          </a:lnRef>
+          <a:fillRef idx="0">
+            <a:schemeClr val="accent1"/>
+          </a:fillRef>
+          <a:effectRef idx="0">
+            <a:schemeClr val="accent1"/>
+          </a:effectRef>
+          <a:fontRef idx="minor">
+            <a:schemeClr val="tx1"/>
+          </a:fontRef>
+        </p:style>
+      </p:cxnSp>
+      <p:cxnSp>
+        <p:nvCxnSpPr>
+          <p:cNvPr id="234" name="Connecteur droit avec flèche 233">
+            <a:extLst>
+              <a:ext uri="{FF2B5EF4-FFF2-40B4-BE49-F238E27FC236}">
+                <a16:creationId xmlns:a16="http://schemas.microsoft.com/office/drawing/2014/main" id="{FE902090-C3A8-4B74-BEF8-4402648111E1}"/>
+              </a:ext>
+            </a:extLst>
+          </p:cNvPr>
+          <p:cNvCxnSpPr>
+            <a:cxnSpLocks/>
+          </p:cNvCxnSpPr>
+          <p:nvPr/>
+        </p:nvCxnSpPr>
+        <p:spPr>
+          <a:xfrm>
+            <a:off x="7158036" y="2420616"/>
+            <a:ext cx="457203" cy="0"/>
+          </a:xfrm>
+          <a:prstGeom prst="straightConnector1">
+            <a:avLst/>
+          </a:prstGeom>
+          <a:ln>
+            <a:solidFill>
+              <a:schemeClr val="tx1"/>
+            </a:solidFill>
+            <a:tailEnd type="triangle"/>
+          </a:ln>
+        </p:spPr>
+        <p:style>
+          <a:lnRef idx="1">
+            <a:schemeClr val="accent1"/>
+          </a:lnRef>
+          <a:fillRef idx="0">
+            <a:schemeClr val="accent1"/>
+          </a:fillRef>
+          <a:effectRef idx="0">
+            <a:schemeClr val="accent1"/>
+          </a:effectRef>
+          <a:fontRef idx="minor">
+            <a:schemeClr val="tx1"/>
+          </a:fontRef>
+        </p:style>
+      </p:cxnSp>
+      <p:cxnSp>
+        <p:nvCxnSpPr>
+          <p:cNvPr id="235" name="Connecteur droit avec flèche 234">
+            <a:extLst>
+              <a:ext uri="{FF2B5EF4-FFF2-40B4-BE49-F238E27FC236}">
+                <a16:creationId xmlns:a16="http://schemas.microsoft.com/office/drawing/2014/main" id="{9A07EC96-3AC2-48A7-B279-3B7E74DA5465}"/>
+              </a:ext>
+            </a:extLst>
+          </p:cNvPr>
+          <p:cNvCxnSpPr>
+            <a:cxnSpLocks/>
+            <a:stCxn id="164" idx="5"/>
+            <a:endCxn id="176" idx="0"/>
+          </p:cNvCxnSpPr>
+          <p:nvPr/>
+        </p:nvCxnSpPr>
+        <p:spPr>
+          <a:xfrm>
+            <a:off x="2507788" y="950893"/>
+            <a:ext cx="332150" cy="606439"/>
+          </a:xfrm>
+          <a:prstGeom prst="straightConnector1">
+            <a:avLst/>
+          </a:prstGeom>
+          <a:ln>
+            <a:solidFill>
+              <a:schemeClr val="tx1"/>
+            </a:solidFill>
+            <a:tailEnd type="triangle"/>
+          </a:ln>
+        </p:spPr>
+        <p:style>
+          <a:lnRef idx="1">
+            <a:schemeClr val="accent1"/>
+          </a:lnRef>
+          <a:fillRef idx="0">
+            <a:schemeClr val="accent1"/>
+          </a:fillRef>
+          <a:effectRef idx="0">
+            <a:schemeClr val="accent1"/>
+          </a:effectRef>
+          <a:fontRef idx="minor">
+            <a:schemeClr val="tx1"/>
+          </a:fontRef>
+        </p:style>
+      </p:cxnSp>
+      <p:cxnSp>
+        <p:nvCxnSpPr>
+          <p:cNvPr id="239" name="Connecteur droit avec flèche 238">
+            <a:extLst>
+              <a:ext uri="{FF2B5EF4-FFF2-40B4-BE49-F238E27FC236}">
+                <a16:creationId xmlns:a16="http://schemas.microsoft.com/office/drawing/2014/main" id="{2E747C15-F807-45E7-BFDC-B8E819925F1A}"/>
+              </a:ext>
+            </a:extLst>
+          </p:cNvPr>
+          <p:cNvCxnSpPr>
+            <a:cxnSpLocks/>
+            <a:stCxn id="164" idx="3"/>
+            <a:endCxn id="175" idx="0"/>
+          </p:cNvCxnSpPr>
+          <p:nvPr/>
+        </p:nvCxnSpPr>
+        <p:spPr>
+          <a:xfrm flipH="1">
+            <a:off x="982134" y="950893"/>
+            <a:ext cx="371575" cy="622917"/>
+          </a:xfrm>
+          <a:prstGeom prst="straightConnector1">
+            <a:avLst/>
+          </a:prstGeom>
+          <a:ln>
+            <a:solidFill>
+              <a:schemeClr val="tx1"/>
+            </a:solidFill>
+            <a:tailEnd type="triangle"/>
+          </a:ln>
+        </p:spPr>
+        <p:style>
+          <a:lnRef idx="1">
+            <a:schemeClr val="accent1"/>
+          </a:lnRef>
+          <a:fillRef idx="0">
+            <a:schemeClr val="accent1"/>
+          </a:fillRef>
+          <a:effectRef idx="0">
+            <a:schemeClr val="accent1"/>
+          </a:effectRef>
+          <a:fontRef idx="minor">
+            <a:schemeClr val="tx1"/>
+          </a:fontRef>
+        </p:style>
+      </p:cxnSp>
+      <p:cxnSp>
+        <p:nvCxnSpPr>
+          <p:cNvPr id="242" name="Connecteur droit avec flèche 241">
+            <a:extLst>
+              <a:ext uri="{FF2B5EF4-FFF2-40B4-BE49-F238E27FC236}">
+                <a16:creationId xmlns:a16="http://schemas.microsoft.com/office/drawing/2014/main" id="{54CC4135-177E-4569-9CFA-193A1B456190}"/>
+              </a:ext>
+            </a:extLst>
+          </p:cNvPr>
+          <p:cNvCxnSpPr>
+            <a:cxnSpLocks/>
+            <a:stCxn id="175" idx="2"/>
+            <a:endCxn id="178" idx="0"/>
+          </p:cNvCxnSpPr>
+          <p:nvPr/>
+        </p:nvCxnSpPr>
+        <p:spPr>
+          <a:xfrm>
+            <a:off x="982134" y="2097091"/>
+            <a:ext cx="0" cy="2996410"/>
+          </a:xfrm>
+          <a:prstGeom prst="straightConnector1">
+            <a:avLst/>
+          </a:prstGeom>
+          <a:ln>
+            <a:solidFill>
+              <a:schemeClr val="tx1"/>
+            </a:solidFill>
+            <a:tailEnd type="triangle"/>
+          </a:ln>
+        </p:spPr>
+        <p:style>
+          <a:lnRef idx="1">
+            <a:schemeClr val="accent1"/>
+          </a:lnRef>
+          <a:fillRef idx="0">
+            <a:schemeClr val="accent1"/>
+          </a:fillRef>
+          <a:effectRef idx="0">
+            <a:schemeClr val="accent1"/>
+          </a:effectRef>
+          <a:fontRef idx="minor">
+            <a:schemeClr val="tx1"/>
+          </a:fontRef>
+        </p:style>
+      </p:cxnSp>
+      <p:cxnSp>
+        <p:nvCxnSpPr>
+          <p:cNvPr id="246" name="Connecteur droit avec flèche 245">
+            <a:extLst>
+              <a:ext uri="{FF2B5EF4-FFF2-40B4-BE49-F238E27FC236}">
+                <a16:creationId xmlns:a16="http://schemas.microsoft.com/office/drawing/2014/main" id="{02386CF8-1EE3-4FE8-AA13-AD36A0F7108E}"/>
+              </a:ext>
+            </a:extLst>
+          </p:cNvPr>
+          <p:cNvCxnSpPr>
+            <a:cxnSpLocks/>
+            <a:stCxn id="176" idx="3"/>
+            <a:endCxn id="217" idx="1"/>
+          </p:cNvCxnSpPr>
+          <p:nvPr/>
+        </p:nvCxnSpPr>
+        <p:spPr>
+          <a:xfrm>
+            <a:off x="3461609" y="1818942"/>
+            <a:ext cx="532408" cy="20996"/>
+          </a:xfrm>
+          <a:prstGeom prst="straightConnector1">
+            <a:avLst/>
+          </a:prstGeom>
+          <a:ln>
+            <a:solidFill>
+              <a:schemeClr val="tx1"/>
+            </a:solidFill>
+            <a:tailEnd type="triangle"/>
+          </a:ln>
+        </p:spPr>
+        <p:style>
+          <a:lnRef idx="1">
+            <a:schemeClr val="accent1"/>
+          </a:lnRef>
+          <a:fillRef idx="0">
+            <a:schemeClr val="accent1"/>
+          </a:fillRef>
+          <a:effectRef idx="0">
+            <a:schemeClr val="accent1"/>
+          </a:effectRef>
+          <a:fontRef idx="minor">
+            <a:schemeClr val="tx1"/>
+          </a:fontRef>
+        </p:style>
+      </p:cxnSp>
+      <p:cxnSp>
+        <p:nvCxnSpPr>
+          <p:cNvPr id="251" name="Connecteur droit avec flèche 250">
+            <a:extLst>
+              <a:ext uri="{FF2B5EF4-FFF2-40B4-BE49-F238E27FC236}">
+                <a16:creationId xmlns:a16="http://schemas.microsoft.com/office/drawing/2014/main" id="{B45C2B87-9299-4486-B04F-AA6E045EEA78}"/>
+              </a:ext>
+            </a:extLst>
+          </p:cNvPr>
+          <p:cNvCxnSpPr>
+            <a:stCxn id="168" idx="7"/>
+            <a:endCxn id="217" idx="2"/>
+          </p:cNvCxnSpPr>
+          <p:nvPr/>
+        </p:nvCxnSpPr>
+        <p:spPr>
+          <a:xfrm flipV="1">
+            <a:off x="2507788" y="2101548"/>
+            <a:ext cx="2107900" cy="921281"/>
+          </a:xfrm>
+          <a:prstGeom prst="straightConnector1">
+            <a:avLst/>
+          </a:prstGeom>
+          <a:ln>
+            <a:headEnd type="triangle"/>
+            <a:tailEnd type="triangle"/>
+          </a:ln>
+        </p:spPr>
+        <p:style>
+          <a:lnRef idx="1">
+            <a:schemeClr val="accent1"/>
+          </a:lnRef>
+          <a:fillRef idx="0">
+            <a:schemeClr val="accent1"/>
+          </a:fillRef>
+          <a:effectRef idx="0">
+            <a:schemeClr val="accent1"/>
+          </a:effectRef>
+          <a:fontRef idx="minor">
+            <a:schemeClr val="tx1"/>
+          </a:fontRef>
+        </p:style>
+      </p:cxnSp>
+      <p:cxnSp>
+        <p:nvCxnSpPr>
+          <p:cNvPr id="252" name="Connecteur droit avec flèche 251">
+            <a:extLst>
+              <a:ext uri="{FF2B5EF4-FFF2-40B4-BE49-F238E27FC236}">
+                <a16:creationId xmlns:a16="http://schemas.microsoft.com/office/drawing/2014/main" id="{439C077F-27BB-4F3B-B59E-6A55E27B6D38}"/>
+              </a:ext>
+            </a:extLst>
+          </p:cNvPr>
+          <p:cNvCxnSpPr>
+            <a:cxnSpLocks/>
+            <a:endCxn id="168" idx="4"/>
+          </p:cNvCxnSpPr>
+          <p:nvPr/>
+        </p:nvCxnSpPr>
+        <p:spPr>
+          <a:xfrm flipH="1" flipV="1">
+            <a:off x="1930749" y="3644609"/>
+            <a:ext cx="385835" cy="2000857"/>
+          </a:xfrm>
+          <a:prstGeom prst="straightConnector1">
+            <a:avLst/>
+          </a:prstGeom>
+          <a:ln>
+            <a:headEnd type="triangle"/>
+            <a:tailEnd type="triangle"/>
+          </a:ln>
+        </p:spPr>
+        <p:style>
+          <a:lnRef idx="1">
+            <a:schemeClr val="accent1"/>
+          </a:lnRef>
+          <a:fillRef idx="0">
+            <a:schemeClr val="accent1"/>
+          </a:fillRef>
+          <a:effectRef idx="0">
+            <a:schemeClr val="accent1"/>
+          </a:effectRef>
+          <a:fontRef idx="minor">
+            <a:schemeClr val="tx1"/>
+          </a:fontRef>
+        </p:style>
+      </p:cxnSp>
+      <p:cxnSp>
+        <p:nvCxnSpPr>
+          <p:cNvPr id="256" name="Connecteur droit avec flèche 255">
+            <a:extLst>
+              <a:ext uri="{FF2B5EF4-FFF2-40B4-BE49-F238E27FC236}">
+                <a16:creationId xmlns:a16="http://schemas.microsoft.com/office/drawing/2014/main" id="{AAF2B872-E6D7-42D7-869A-0AF764772FD8}"/>
+              </a:ext>
+            </a:extLst>
+          </p:cNvPr>
+          <p:cNvCxnSpPr>
+            <a:cxnSpLocks/>
+            <a:stCxn id="182" idx="3"/>
+            <a:endCxn id="170" idx="2"/>
+          </p:cNvCxnSpPr>
+          <p:nvPr/>
+        </p:nvCxnSpPr>
+        <p:spPr>
+          <a:xfrm flipV="1">
+            <a:off x="3608404" y="4598904"/>
+            <a:ext cx="3813872" cy="1308203"/>
+          </a:xfrm>
+          <a:prstGeom prst="straightConnector1">
+            <a:avLst/>
+          </a:prstGeom>
+          <a:ln>
+            <a:headEnd type="triangle"/>
+            <a:tailEnd type="triangle"/>
+          </a:ln>
+        </p:spPr>
+        <p:style>
+          <a:lnRef idx="1">
+            <a:schemeClr val="accent1"/>
+          </a:lnRef>
+          <a:fillRef idx="0">
+            <a:schemeClr val="accent1"/>
+          </a:fillRef>
+          <a:effectRef idx="0">
+            <a:schemeClr val="accent1"/>
+          </a:effectRef>
+          <a:fontRef idx="minor">
+            <a:schemeClr val="tx1"/>
+          </a:fontRef>
+        </p:style>
+      </p:cxnSp>
+      <p:cxnSp>
+        <p:nvCxnSpPr>
+          <p:cNvPr id="259" name="Connecteur droit avec flèche 258">
+            <a:extLst>
+              <a:ext uri="{FF2B5EF4-FFF2-40B4-BE49-F238E27FC236}">
+                <a16:creationId xmlns:a16="http://schemas.microsoft.com/office/drawing/2014/main" id="{15F80B20-804A-4682-9538-EC1F3419BD2A}"/>
+              </a:ext>
+            </a:extLst>
+          </p:cNvPr>
+          <p:cNvCxnSpPr>
+            <a:cxnSpLocks/>
+            <a:stCxn id="232" idx="2"/>
+            <a:endCxn id="170" idx="0"/>
+          </p:cNvCxnSpPr>
+          <p:nvPr/>
+        </p:nvCxnSpPr>
+        <p:spPr>
+          <a:xfrm flipH="1">
+            <a:off x="8238333" y="2667853"/>
+            <a:ext cx="12922" cy="1566821"/>
+          </a:xfrm>
+          <a:prstGeom prst="straightConnector1">
+            <a:avLst/>
+          </a:prstGeom>
+          <a:ln>
+            <a:headEnd type="triangle"/>
+            <a:tailEnd type="triangle"/>
+          </a:ln>
+        </p:spPr>
+        <p:style>
+          <a:lnRef idx="1">
+            <a:schemeClr val="accent1"/>
+          </a:lnRef>
+          <a:fillRef idx="0">
+            <a:schemeClr val="accent1"/>
+          </a:fillRef>
+          <a:effectRef idx="0">
+            <a:schemeClr val="accent1"/>
+          </a:effectRef>
+          <a:fontRef idx="minor">
+            <a:schemeClr val="tx1"/>
+          </a:fontRef>
+        </p:style>
+      </p:cxnSp>
+      <p:cxnSp>
+        <p:nvCxnSpPr>
+          <p:cNvPr id="265" name="Connecteur droit avec flèche 264">
+            <a:extLst>
+              <a:ext uri="{FF2B5EF4-FFF2-40B4-BE49-F238E27FC236}">
+                <a16:creationId xmlns:a16="http://schemas.microsoft.com/office/drawing/2014/main" id="{3E54D7A2-DE93-4811-861F-F48F159567E4}"/>
+              </a:ext>
+            </a:extLst>
+          </p:cNvPr>
+          <p:cNvCxnSpPr>
+            <a:cxnSpLocks/>
+          </p:cNvCxnSpPr>
+          <p:nvPr/>
+        </p:nvCxnSpPr>
+        <p:spPr>
+          <a:xfrm>
+            <a:off x="8460187" y="1635664"/>
+            <a:ext cx="0" cy="2599010"/>
+          </a:xfrm>
+          <a:prstGeom prst="straightConnector1">
+            <a:avLst/>
+          </a:prstGeom>
+          <a:ln>
+            <a:headEnd type="triangle"/>
+            <a:tailEnd type="triangle"/>
+          </a:ln>
+        </p:spPr>
+        <p:style>
+          <a:lnRef idx="1">
+            <a:schemeClr val="accent1"/>
+          </a:lnRef>
+          <a:fillRef idx="0">
+            <a:schemeClr val="accent1"/>
+          </a:fillRef>
+          <a:effectRef idx="0">
+            <a:schemeClr val="accent1"/>
+          </a:effectRef>
+          <a:fontRef idx="minor">
+            <a:schemeClr val="tx1"/>
+          </a:fontRef>
+        </p:style>
+      </p:cxnSp>
+      <p:cxnSp>
+        <p:nvCxnSpPr>
+          <p:cNvPr id="267" name="Connecteur droit avec flèche 266">
+            <a:extLst>
+              <a:ext uri="{FF2B5EF4-FFF2-40B4-BE49-F238E27FC236}">
+                <a16:creationId xmlns:a16="http://schemas.microsoft.com/office/drawing/2014/main" id="{F7AC6A69-12E7-4B67-A60E-BB2E6236BA96}"/>
+              </a:ext>
+            </a:extLst>
+          </p:cNvPr>
+          <p:cNvCxnSpPr>
+            <a:cxnSpLocks/>
+            <a:stCxn id="172" idx="1"/>
+          </p:cNvCxnSpPr>
+          <p:nvPr/>
+        </p:nvCxnSpPr>
+        <p:spPr>
+          <a:xfrm flipH="1" flipV="1">
+            <a:off x="4896669" y="2130291"/>
+            <a:ext cx="622291" cy="1419909"/>
+          </a:xfrm>
+          <a:prstGeom prst="straightConnector1">
+            <a:avLst/>
+          </a:prstGeom>
+          <a:ln>
+            <a:headEnd type="triangle"/>
+            <a:tailEnd type="triangle"/>
+          </a:ln>
+        </p:spPr>
+        <p:style>
+          <a:lnRef idx="1">
+            <a:schemeClr val="accent1"/>
+          </a:lnRef>
+          <a:fillRef idx="0">
+            <a:schemeClr val="accent1"/>
+          </a:fillRef>
+          <a:effectRef idx="0">
+            <a:schemeClr val="accent1"/>
+          </a:effectRef>
+          <a:fontRef idx="minor">
+            <a:schemeClr val="tx1"/>
+          </a:fontRef>
+        </p:style>
+      </p:cxnSp>
+      <p:cxnSp>
+        <p:nvCxnSpPr>
+          <p:cNvPr id="270" name="Connecteur droit avec flèche 269">
+            <a:extLst>
+              <a:ext uri="{FF2B5EF4-FFF2-40B4-BE49-F238E27FC236}">
+                <a16:creationId xmlns:a16="http://schemas.microsoft.com/office/drawing/2014/main" id="{99F3C843-32BA-445B-A4F8-EBD52E25820E}"/>
+              </a:ext>
+            </a:extLst>
+          </p:cNvPr>
+          <p:cNvCxnSpPr>
+            <a:cxnSpLocks/>
+            <a:endCxn id="172" idx="4"/>
+          </p:cNvCxnSpPr>
+          <p:nvPr/>
+        </p:nvCxnSpPr>
+        <p:spPr>
+          <a:xfrm flipV="1">
+            <a:off x="5255059" y="4171980"/>
+            <a:ext cx="840941" cy="1444802"/>
+          </a:xfrm>
+          <a:prstGeom prst="straightConnector1">
+            <a:avLst/>
+          </a:prstGeom>
+          <a:ln>
+            <a:headEnd type="triangle"/>
+            <a:tailEnd type="triangle"/>
+          </a:ln>
+        </p:spPr>
+        <p:style>
+          <a:lnRef idx="1">
+            <a:schemeClr val="accent1"/>
+          </a:lnRef>
+          <a:fillRef idx="0">
+            <a:schemeClr val="accent1"/>
+          </a:fillRef>
+          <a:effectRef idx="0">
+            <a:schemeClr val="accent1"/>
+          </a:effectRef>
+          <a:fontRef idx="minor">
+            <a:schemeClr val="tx1"/>
+          </a:fontRef>
+        </p:style>
+      </p:cxnSp>
+      <p:cxnSp>
+        <p:nvCxnSpPr>
+          <p:cNvPr id="273" name="Connecteur droit avec flèche 272">
+            <a:extLst>
+              <a:ext uri="{FF2B5EF4-FFF2-40B4-BE49-F238E27FC236}">
+                <a16:creationId xmlns:a16="http://schemas.microsoft.com/office/drawing/2014/main" id="{99E80C1D-CD0F-43B7-9F88-8A2CA1CFF469}"/>
+              </a:ext>
+            </a:extLst>
+          </p:cNvPr>
+          <p:cNvCxnSpPr>
+            <a:cxnSpLocks/>
+            <a:endCxn id="172" idx="3"/>
+          </p:cNvCxnSpPr>
+          <p:nvPr/>
+        </p:nvCxnSpPr>
+        <p:spPr>
+          <a:xfrm flipV="1">
+            <a:off x="5207814" y="4065300"/>
+            <a:ext cx="311146" cy="501694"/>
+          </a:xfrm>
+          <a:prstGeom prst="straightConnector1">
+            <a:avLst/>
+          </a:prstGeom>
+          <a:ln>
+            <a:headEnd type="triangle"/>
+            <a:tailEnd type="triangle"/>
+          </a:ln>
+        </p:spPr>
+        <p:style>
+          <a:lnRef idx="1">
+            <a:schemeClr val="accent1"/>
+          </a:lnRef>
+          <a:fillRef idx="0">
+            <a:schemeClr val="accent1"/>
+          </a:fillRef>
+          <a:effectRef idx="0">
+            <a:schemeClr val="accent1"/>
+          </a:effectRef>
+          <a:fontRef idx="minor">
+            <a:schemeClr val="tx1"/>
+          </a:fontRef>
+        </p:style>
+      </p:cxnSp>
+      <p:cxnSp>
+        <p:nvCxnSpPr>
+          <p:cNvPr id="276" name="Connecteur droit avec flèche 275">
+            <a:extLst>
+              <a:ext uri="{FF2B5EF4-FFF2-40B4-BE49-F238E27FC236}">
+                <a16:creationId xmlns:a16="http://schemas.microsoft.com/office/drawing/2014/main" id="{39D10607-7465-4ED6-AD0B-FEF292123988}"/>
+              </a:ext>
+            </a:extLst>
+          </p:cNvPr>
+          <p:cNvCxnSpPr>
+            <a:cxnSpLocks/>
+            <a:stCxn id="174" idx="2"/>
+            <a:endCxn id="184" idx="3"/>
+          </p:cNvCxnSpPr>
+          <p:nvPr/>
+        </p:nvCxnSpPr>
+        <p:spPr>
+          <a:xfrm flipH="1">
+            <a:off x="5403340" y="3444301"/>
+            <a:ext cx="4197860" cy="1416244"/>
+          </a:xfrm>
+          <a:prstGeom prst="straightConnector1">
+            <a:avLst/>
+          </a:prstGeom>
+          <a:ln>
+            <a:headEnd type="triangle"/>
+            <a:tailEnd type="triangle"/>
+          </a:ln>
+        </p:spPr>
+        <p:style>
+          <a:lnRef idx="1">
+            <a:schemeClr val="accent1"/>
+          </a:lnRef>
+          <a:fillRef idx="0">
+            <a:schemeClr val="accent1"/>
+          </a:fillRef>
+          <a:effectRef idx="0">
+            <a:schemeClr val="accent1"/>
+          </a:effectRef>
+          <a:fontRef idx="minor">
+            <a:schemeClr val="tx1"/>
+          </a:fontRef>
+        </p:style>
+      </p:cxnSp>
+      <p:cxnSp>
+        <p:nvCxnSpPr>
+          <p:cNvPr id="279" name="Connecteur droit avec flèche 278">
+            <a:extLst>
+              <a:ext uri="{FF2B5EF4-FFF2-40B4-BE49-F238E27FC236}">
+                <a16:creationId xmlns:a16="http://schemas.microsoft.com/office/drawing/2014/main" id="{07027E4A-A6DF-4651-B31B-0348AFB091F4}"/>
+              </a:ext>
+            </a:extLst>
+          </p:cNvPr>
+          <p:cNvCxnSpPr>
+            <a:cxnSpLocks/>
+            <a:stCxn id="174" idx="1"/>
+            <a:endCxn id="232" idx="3"/>
+          </p:cNvCxnSpPr>
+          <p:nvPr/>
+        </p:nvCxnSpPr>
+        <p:spPr>
+          <a:xfrm flipH="1" flipV="1">
+            <a:off x="8872926" y="2406243"/>
+            <a:ext cx="967291" cy="780508"/>
+          </a:xfrm>
+          <a:prstGeom prst="straightConnector1">
+            <a:avLst/>
+          </a:prstGeom>
+          <a:ln>
+            <a:headEnd type="triangle"/>
+            <a:tailEnd type="triangle"/>
+          </a:ln>
+        </p:spPr>
+        <p:style>
+          <a:lnRef idx="1">
+            <a:schemeClr val="accent1"/>
+          </a:lnRef>
+          <a:fillRef idx="0">
+            <a:schemeClr val="accent1"/>
+          </a:fillRef>
+          <a:effectRef idx="0">
+            <a:schemeClr val="accent1"/>
+          </a:effectRef>
+          <a:fontRef idx="minor">
+            <a:schemeClr val="tx1"/>
+          </a:fontRef>
+        </p:style>
+      </p:cxnSp>
+      <p:cxnSp>
+        <p:nvCxnSpPr>
+          <p:cNvPr id="282" name="Connecteur droit avec flèche 281">
+            <a:extLst>
+              <a:ext uri="{FF2B5EF4-FFF2-40B4-BE49-F238E27FC236}">
+                <a16:creationId xmlns:a16="http://schemas.microsoft.com/office/drawing/2014/main" id="{DEBB1C9C-3D9E-4EA6-B05E-B1C92B9B837D}"/>
+              </a:ext>
+            </a:extLst>
+          </p:cNvPr>
+          <p:cNvCxnSpPr>
+            <a:cxnSpLocks/>
+            <a:stCxn id="174" idx="0"/>
+            <a:endCxn id="230" idx="3"/>
+          </p:cNvCxnSpPr>
+          <p:nvPr/>
+        </p:nvCxnSpPr>
+        <p:spPr>
+          <a:xfrm flipH="1" flipV="1">
+            <a:off x="8834087" y="1359742"/>
+            <a:ext cx="1583170" cy="1720329"/>
+          </a:xfrm>
+          <a:prstGeom prst="straightConnector1">
+            <a:avLst/>
+          </a:prstGeom>
+          <a:ln>
+            <a:headEnd type="triangle"/>
+            <a:tailEnd type="triangle"/>
+          </a:ln>
+        </p:spPr>
+        <p:style>
+          <a:lnRef idx="1">
+            <a:schemeClr val="accent1"/>
+          </a:lnRef>
+          <a:fillRef idx="0">
+            <a:schemeClr val="accent1"/>
+          </a:fillRef>
+          <a:effectRef idx="0">
+            <a:schemeClr val="accent1"/>
+          </a:effectRef>
+          <a:fontRef idx="minor">
+            <a:schemeClr val="tx1"/>
+          </a:fontRef>
+        </p:style>
+      </p:cxnSp>
+      <p:cxnSp>
+        <p:nvCxnSpPr>
+          <p:cNvPr id="285" name="Connecteur droit avec flèche 284">
+            <a:extLst>
+              <a:ext uri="{FF2B5EF4-FFF2-40B4-BE49-F238E27FC236}">
+                <a16:creationId xmlns:a16="http://schemas.microsoft.com/office/drawing/2014/main" id="{197E7B99-DEFD-4536-9E2C-99DC5AF8F6E0}"/>
+              </a:ext>
+            </a:extLst>
+          </p:cNvPr>
+          <p:cNvCxnSpPr>
+            <a:cxnSpLocks/>
+            <a:stCxn id="174" idx="4"/>
+          </p:cNvCxnSpPr>
+          <p:nvPr/>
+        </p:nvCxnSpPr>
+        <p:spPr>
+          <a:xfrm flipH="1">
+            <a:off x="5403341" y="3808531"/>
+            <a:ext cx="5013916" cy="2121927"/>
+          </a:xfrm>
+          <a:prstGeom prst="straightConnector1">
+            <a:avLst/>
+          </a:prstGeom>
+          <a:ln>
+            <a:headEnd type="triangle"/>
+            <a:tailEnd type="triangle"/>
+          </a:ln>
+        </p:spPr>
+        <p:style>
+          <a:lnRef idx="1">
+            <a:schemeClr val="accent1"/>
+          </a:lnRef>
+          <a:fillRef idx="0">
+            <a:schemeClr val="accent1"/>
+          </a:fillRef>
+          <a:effectRef idx="0">
+            <a:schemeClr val="accent1"/>
+          </a:effectRef>
+          <a:fontRef idx="minor">
+            <a:schemeClr val="tx1"/>
+          </a:fontRef>
+        </p:style>
+      </p:cxnSp>
+    </p:spTree>
+    <p:extLst>
+      <p:ext uri="{BB962C8B-B14F-4D97-AF65-F5344CB8AC3E}">
+        <p14:creationId xmlns:p14="http://schemas.microsoft.com/office/powerpoint/2010/main" val="4242378882"/>
+      </p:ext>
+    </p:extLst>
+  </p:cSld>
+  <p:clrMapOvr>
+    <a:masterClrMapping/>
+  </p:clrMapOvr>
+</p:sld>
+</file>
+
+<file path=ppt/slides/slide4.xml><?xml version="1.0" encoding="utf-8"?>
+<p:sld xmlns:a="http://schemas.openxmlformats.org/drawingml/2006/main" xmlns:r="http://schemas.openxmlformats.org/officeDocument/2006/relationships" xmlns:p="http://schemas.openxmlformats.org/presentationml/2006/main">
+  <p:cSld>
+    <p:spTree>
+      <p:nvGrpSpPr>
+        <p:cNvPr id="1" name=""/>
+        <p:cNvGrpSpPr/>
+        <p:nvPr/>
+      </p:nvGrpSpPr>
+      <p:grpSpPr>
+        <a:xfrm>
+          <a:off x="0" y="0"/>
+          <a:ext cx="0" cy="0"/>
+          <a:chOff x="0" y="0"/>
+          <a:chExt cx="0" cy="0"/>
+        </a:xfrm>
+      </p:grpSpPr>
+      <p:sp>
+        <p:nvSpPr>
+          <p:cNvPr id="5" name="ZoneTexte 4">
+            <a:extLst>
+              <a:ext uri="{FF2B5EF4-FFF2-40B4-BE49-F238E27FC236}">
+                <a16:creationId xmlns:a16="http://schemas.microsoft.com/office/drawing/2014/main" id="{25D0CFDD-F8D9-4498-A666-F31BA473AEDD}"/>
+              </a:ext>
+            </a:extLst>
+          </p:cNvPr>
+          <p:cNvSpPr txBox="1"/>
+          <p:nvPr/>
+        </p:nvSpPr>
+        <p:spPr>
+          <a:xfrm>
+            <a:off x="3048000" y="3244334"/>
+            <a:ext cx="6096000" cy="369332"/>
+          </a:xfrm>
+          <a:prstGeom prst="rect">
+            <a:avLst/>
+          </a:prstGeom>
+          <a:noFill/>
+        </p:spPr>
+        <p:txBody>
+          <a:bodyPr wrap="square">
+            <a:spAutoFit/>
+          </a:bodyPr>
+          <a:lstStyle/>
+          <a:p>
+            <a:r>
+              <a:rPr lang="en-GB" dirty="0"/>
+              <a:t>10.  Connection Termination</a:t>
+            </a:r>
+          </a:p>
+        </p:txBody>
+      </p:sp>
+    </p:spTree>
+    <p:extLst>
+      <p:ext uri="{BB962C8B-B14F-4D97-AF65-F5344CB8AC3E}">
+        <p14:creationId xmlns:p14="http://schemas.microsoft.com/office/powerpoint/2010/main" val="3973114266"/>
       </p:ext>
     </p:extLst>
   </p:cSld>
@@ -5598,4 +8702,299 @@
     </a:ext>
   </a:extLst>
 </a:theme>
+</file>
+
+<file path=ppt/theme/theme2.xml><?xml version="1.0" encoding="utf-8"?>
+<a:theme xmlns:a="http://schemas.openxmlformats.org/drawingml/2006/main" name="Thème Office">
+  <a:themeElements>
+    <a:clrScheme name="Office">
+      <a:dk1>
+        <a:sysClr val="windowText" lastClr="000000"/>
+      </a:dk1>
+      <a:lt1>
+        <a:sysClr val="window" lastClr="FFFFFF"/>
+      </a:lt1>
+      <a:dk2>
+        <a:srgbClr val="44546A"/>
+      </a:dk2>
+      <a:lt2>
+        <a:srgbClr val="E7E6E6"/>
+      </a:lt2>
+      <a:accent1>
+        <a:srgbClr val="4472C4"/>
+      </a:accent1>
+      <a:accent2>
+        <a:srgbClr val="ED7D31"/>
+      </a:accent2>
+      <a:accent3>
+        <a:srgbClr val="A5A5A5"/>
+      </a:accent3>
+      <a:accent4>
+        <a:srgbClr val="FFC000"/>
+      </a:accent4>
+      <a:accent5>
+        <a:srgbClr val="5B9BD5"/>
+      </a:accent5>
+      <a:accent6>
+        <a:srgbClr val="70AD47"/>
+      </a:accent6>
+      <a:hlink>
+        <a:srgbClr val="0563C1"/>
+      </a:hlink>
+      <a:folHlink>
+        <a:srgbClr val="954F72"/>
+      </a:folHlink>
+    </a:clrScheme>
+    <a:fontScheme name="Office">
+      <a:majorFont>
+        <a:latin typeface="Calibri Light" panose="020F0302020204030204"/>
+        <a:ea typeface=""/>
+        <a:cs typeface=""/>
+        <a:font script="Jpan" typeface="游ゴシック Light"/>
+        <a:font script="Hang" typeface="맑은 고딕"/>
+        <a:font script="Hans" typeface="等线 Light"/>
+        <a:font script="Hant" typeface="新細明體"/>
+        <a:font script="Arab" typeface="Times New Roman"/>
+        <a:font script="Hebr" typeface="Times New Roman"/>
+        <a:font script="Thai" typeface="Angsana New"/>
+        <a:font script="Ethi" typeface="Nyala"/>
+        <a:font script="Beng" typeface="Vrinda"/>
+        <a:font script="Gujr" typeface="Shruti"/>
+        <a:font script="Khmr" typeface="MoolBoran"/>
+        <a:font script="Knda" typeface="Tunga"/>
+        <a:font script="Guru" typeface="Raavi"/>
+        <a:font script="Cans" typeface="Euphemia"/>
+        <a:font script="Cher" typeface="Plantagenet Cherokee"/>
+        <a:font script="Yiii" typeface="Microsoft Yi Baiti"/>
+        <a:font script="Tibt" typeface="Microsoft Himalaya"/>
+        <a:font script="Thaa" typeface="MV Boli"/>
+        <a:font script="Deva" typeface="Mangal"/>
+        <a:font script="Telu" typeface="Gautami"/>
+        <a:font script="Taml" typeface="Latha"/>
+        <a:font script="Syrc" typeface="Estrangelo Edessa"/>
+        <a:font script="Orya" typeface="Kalinga"/>
+        <a:font script="Mlym" typeface="Kartika"/>
+        <a:font script="Laoo" typeface="DokChampa"/>
+        <a:font script="Sinh" typeface="Iskoola Pota"/>
+        <a:font script="Mong" typeface="Mongolian Baiti"/>
+        <a:font script="Viet" typeface="Times New Roman"/>
+        <a:font script="Uigh" typeface="Microsoft Uighur"/>
+        <a:font script="Geor" typeface="Sylfaen"/>
+        <a:font script="Armn" typeface="Arial"/>
+        <a:font script="Bugi" typeface="Leelawadee UI"/>
+        <a:font script="Bopo" typeface="Microsoft JhengHei"/>
+        <a:font script="Java" typeface="Javanese Text"/>
+        <a:font script="Lisu" typeface="Segoe UI"/>
+        <a:font script="Mymr" typeface="Myanmar Text"/>
+        <a:font script="Nkoo" typeface="Ebrima"/>
+        <a:font script="Olck" typeface="Nirmala UI"/>
+        <a:font script="Osma" typeface="Ebrima"/>
+        <a:font script="Phag" typeface="Phagspa"/>
+        <a:font script="Syrn" typeface="Estrangelo Edessa"/>
+        <a:font script="Syrj" typeface="Estrangelo Edessa"/>
+        <a:font script="Syre" typeface="Estrangelo Edessa"/>
+        <a:font script="Sora" typeface="Nirmala UI"/>
+        <a:font script="Tale" typeface="Microsoft Tai Le"/>
+        <a:font script="Talu" typeface="Microsoft New Tai Lue"/>
+        <a:font script="Tfng" typeface="Ebrima"/>
+      </a:majorFont>
+      <a:minorFont>
+        <a:latin typeface="Calibri" panose="020F0502020204030204"/>
+        <a:ea typeface=""/>
+        <a:cs typeface=""/>
+        <a:font script="Jpan" typeface="游ゴシック"/>
+        <a:font script="Hang" typeface="맑은 고딕"/>
+        <a:font script="Hans" typeface="等线"/>
+        <a:font script="Hant" typeface="新細明體"/>
+        <a:font script="Arab" typeface="Arial"/>
+        <a:font script="Hebr" typeface="Arial"/>
+        <a:font script="Thai" typeface="Cordia New"/>
+        <a:font script="Ethi" typeface="Nyala"/>
+        <a:font script="Beng" typeface="Vrinda"/>
+        <a:font script="Gujr" typeface="Shruti"/>
+        <a:font script="Khmr" typeface="DaunPenh"/>
+        <a:font script="Knda" typeface="Tunga"/>
+        <a:font script="Guru" typeface="Raavi"/>
+        <a:font script="Cans" typeface="Euphemia"/>
+        <a:font script="Cher" typeface="Plantagenet Cherokee"/>
+        <a:font script="Yiii" typeface="Microsoft Yi Baiti"/>
+        <a:font script="Tibt" typeface="Microsoft Himalaya"/>
+        <a:font script="Thaa" typeface="MV Boli"/>
+        <a:font script="Deva" typeface="Mangal"/>
+        <a:font script="Telu" typeface="Gautami"/>
+        <a:font script="Taml" typeface="Latha"/>
+        <a:font script="Syrc" typeface="Estrangelo Edessa"/>
+        <a:font script="Orya" typeface="Kalinga"/>
+        <a:font script="Mlym" typeface="Kartika"/>
+        <a:font script="Laoo" typeface="DokChampa"/>
+        <a:font script="Sinh" typeface="Iskoola Pota"/>
+        <a:font script="Mong" typeface="Mongolian Baiti"/>
+        <a:font script="Viet" typeface="Arial"/>
+        <a:font script="Uigh" typeface="Microsoft Uighur"/>
+        <a:font script="Geor" typeface="Sylfaen"/>
+        <a:font script="Armn" typeface="Arial"/>
+        <a:font script="Bugi" typeface="Leelawadee UI"/>
+        <a:font script="Bopo" typeface="Microsoft JhengHei"/>
+        <a:font script="Java" typeface="Javanese Text"/>
+        <a:font script="Lisu" typeface="Segoe UI"/>
+        <a:font script="Mymr" typeface="Myanmar Text"/>
+        <a:font script="Nkoo" typeface="Ebrima"/>
+        <a:font script="Olck" typeface="Nirmala UI"/>
+        <a:font script="Osma" typeface="Ebrima"/>
+        <a:font script="Phag" typeface="Phagspa"/>
+        <a:font script="Syrn" typeface="Estrangelo Edessa"/>
+        <a:font script="Syrj" typeface="Estrangelo Edessa"/>
+        <a:font script="Syre" typeface="Estrangelo Edessa"/>
+        <a:font script="Sora" typeface="Nirmala UI"/>
+        <a:font script="Tale" typeface="Microsoft Tai Le"/>
+        <a:font script="Talu" typeface="Microsoft New Tai Lue"/>
+        <a:font script="Tfng" typeface="Ebrima"/>
+      </a:minorFont>
+    </a:fontScheme>
+    <a:fmtScheme name="Office">
+      <a:fillStyleLst>
+        <a:solidFill>
+          <a:schemeClr val="phClr"/>
+        </a:solidFill>
+        <a:gradFill rotWithShape="1">
+          <a:gsLst>
+            <a:gs pos="0">
+              <a:schemeClr val="phClr">
+                <a:lumMod val="110000"/>
+                <a:satMod val="105000"/>
+                <a:tint val="67000"/>
+              </a:schemeClr>
+            </a:gs>
+            <a:gs pos="50000">
+              <a:schemeClr val="phClr">
+                <a:lumMod val="105000"/>
+                <a:satMod val="103000"/>
+                <a:tint val="73000"/>
+              </a:schemeClr>
+            </a:gs>
+            <a:gs pos="100000">
+              <a:schemeClr val="phClr">
+                <a:lumMod val="105000"/>
+                <a:satMod val="109000"/>
+                <a:tint val="81000"/>
+              </a:schemeClr>
+            </a:gs>
+          </a:gsLst>
+          <a:lin ang="5400000" scaled="0"/>
+        </a:gradFill>
+        <a:gradFill rotWithShape="1">
+          <a:gsLst>
+            <a:gs pos="0">
+              <a:schemeClr val="phClr">
+                <a:satMod val="103000"/>
+                <a:lumMod val="102000"/>
+                <a:tint val="94000"/>
+              </a:schemeClr>
+            </a:gs>
+            <a:gs pos="50000">
+              <a:schemeClr val="phClr">
+                <a:satMod val="110000"/>
+                <a:lumMod val="100000"/>
+                <a:shade val="100000"/>
+              </a:schemeClr>
+            </a:gs>
+            <a:gs pos="100000">
+              <a:schemeClr val="phClr">
+                <a:lumMod val="99000"/>
+                <a:satMod val="120000"/>
+                <a:shade val="78000"/>
+              </a:schemeClr>
+            </a:gs>
+          </a:gsLst>
+          <a:lin ang="5400000" scaled="0"/>
+        </a:gradFill>
+      </a:fillStyleLst>
+      <a:lnStyleLst>
+        <a:ln w="6350" cap="flat" cmpd="sng" algn="ctr">
+          <a:solidFill>
+            <a:schemeClr val="phClr"/>
+          </a:solidFill>
+          <a:prstDash val="solid"/>
+          <a:miter lim="800000"/>
+        </a:ln>
+        <a:ln w="12700" cap="flat" cmpd="sng" algn="ctr">
+          <a:solidFill>
+            <a:schemeClr val="phClr"/>
+          </a:solidFill>
+          <a:prstDash val="solid"/>
+          <a:miter lim="800000"/>
+        </a:ln>
+        <a:ln w="19050" cap="flat" cmpd="sng" algn="ctr">
+          <a:solidFill>
+            <a:schemeClr val="phClr"/>
+          </a:solidFill>
+          <a:prstDash val="solid"/>
+          <a:miter lim="800000"/>
+        </a:ln>
+      </a:lnStyleLst>
+      <a:effectStyleLst>
+        <a:effectStyle>
+          <a:effectLst/>
+        </a:effectStyle>
+        <a:effectStyle>
+          <a:effectLst/>
+        </a:effectStyle>
+        <a:effectStyle>
+          <a:effectLst>
+            <a:outerShdw blurRad="57150" dist="19050" dir="5400000" algn="ctr" rotWithShape="0">
+              <a:srgbClr val="000000">
+                <a:alpha val="63000"/>
+              </a:srgbClr>
+            </a:outerShdw>
+          </a:effectLst>
+        </a:effectStyle>
+      </a:effectStyleLst>
+      <a:bgFillStyleLst>
+        <a:solidFill>
+          <a:schemeClr val="phClr"/>
+        </a:solidFill>
+        <a:solidFill>
+          <a:schemeClr val="phClr">
+            <a:tint val="95000"/>
+            <a:satMod val="170000"/>
+          </a:schemeClr>
+        </a:solidFill>
+        <a:gradFill rotWithShape="1">
+          <a:gsLst>
+            <a:gs pos="0">
+              <a:schemeClr val="phClr">
+                <a:tint val="93000"/>
+                <a:satMod val="150000"/>
+                <a:shade val="98000"/>
+                <a:lumMod val="102000"/>
+              </a:schemeClr>
+            </a:gs>
+            <a:gs pos="50000">
+              <a:schemeClr val="phClr">
+                <a:tint val="98000"/>
+                <a:satMod val="130000"/>
+                <a:shade val="90000"/>
+                <a:lumMod val="103000"/>
+              </a:schemeClr>
+            </a:gs>
+            <a:gs pos="100000">
+              <a:schemeClr val="phClr">
+                <a:shade val="63000"/>
+                <a:satMod val="120000"/>
+              </a:schemeClr>
+            </a:gs>
+          </a:gsLst>
+          <a:lin ang="5400000" scaled="0"/>
+        </a:gradFill>
+      </a:bgFillStyleLst>
+    </a:fmtScheme>
+  </a:themeElements>
+  <a:objectDefaults/>
+  <a:extraClrSchemeLst/>
+  <a:extLst>
+    <a:ext uri="{05A4C25C-085E-4340-85A3-A5531E510DB2}">
+      <thm15:themeFamily xmlns:thm15="http://schemas.microsoft.com/office/thememl/2012/main" name="Office Theme" id="{62F939B6-93AF-4DB8-9C6B-D6C7DFDC589F}" vid="{4A3C46E8-61CC-4603-A589-7422A47A8E4A}"/>
+    </a:ext>
+  </a:extLst>
+</a:theme>
 </file>
--- a/rapport/schema.pptx
+++ b/rapport/schema.pptx
@@ -5,13 +5,24 @@
     <p:sldMasterId id="2147483648" r:id="rId1"/>
   </p:sldMasterIdLst>
   <p:notesMasterIdLst>
-    <p:notesMasterId r:id="rId6"/>
+    <p:notesMasterId r:id="rId17"/>
   </p:notesMasterIdLst>
   <p:sldIdLst>
-    <p:sldId id="256" r:id="rId2"/>
-    <p:sldId id="257" r:id="rId3"/>
-    <p:sldId id="258" r:id="rId4"/>
-    <p:sldId id="259" r:id="rId5"/>
+    <p:sldId id="262" r:id="rId2"/>
+    <p:sldId id="256" r:id="rId3"/>
+    <p:sldId id="257" r:id="rId4"/>
+    <p:sldId id="258" r:id="rId5"/>
+    <p:sldId id="263" r:id="rId6"/>
+    <p:sldId id="260" r:id="rId7"/>
+    <p:sldId id="259" r:id="rId8"/>
+    <p:sldId id="261" r:id="rId9"/>
+    <p:sldId id="264" r:id="rId10"/>
+    <p:sldId id="265" r:id="rId11"/>
+    <p:sldId id="266" r:id="rId12"/>
+    <p:sldId id="267" r:id="rId13"/>
+    <p:sldId id="268" r:id="rId14"/>
+    <p:sldId id="269" r:id="rId15"/>
+    <p:sldId id="270" r:id="rId16"/>
   </p:sldIdLst>
   <p:sldSz cx="12192000" cy="6858000"/>
   <p:notesSz cx="6858000" cy="9144000"/>
@@ -167,7 +178,7 @@
             </a:lvl1pPr>
           </a:lstStyle>
           <a:p>
-            <a:endParaRPr lang="en-GB"/>
+            <a:endParaRPr lang="en-GB" dirty="0"/>
           </a:p>
         </p:txBody>
       </p:sp>
@@ -200,9 +211,9 @@
           <a:p>
             <a:fld id="{A3D9FBD5-0A08-42A7-A20A-3E938E2C13C1}" type="datetimeFigureOut">
               <a:rPr lang="en-GB" smtClean="0"/>
-              <a:t>26/09/2020</a:t>
+              <a:t>01/10/2020</a:t>
             </a:fld>
-            <a:endParaRPr lang="en-GB"/>
+            <a:endParaRPr lang="en-GB" dirty="0"/>
           </a:p>
         </p:txBody>
       </p:sp>
@@ -235,7 +246,7 @@
           <a:bodyPr vert="horz" lIns="91440" tIns="45720" rIns="91440" bIns="45720" rtlCol="0" anchor="ctr"/>
           <a:lstStyle/>
           <a:p>
-            <a:endParaRPr lang="en-GB"/>
+            <a:endParaRPr lang="en-GB" dirty="0"/>
           </a:p>
         </p:txBody>
       </p:sp>
@@ -326,7 +337,7 @@
             </a:lvl1pPr>
           </a:lstStyle>
           <a:p>
-            <a:endParaRPr lang="en-GB"/>
+            <a:endParaRPr lang="en-GB" dirty="0"/>
           </a:p>
         </p:txBody>
       </p:sp>
@@ -361,7 +372,7 @@
               <a:rPr lang="en-GB" smtClean="0"/>
               <a:t>‹N°›</a:t>
             </a:fld>
-            <a:endParaRPr lang="en-GB"/>
+            <a:endParaRPr lang="en-GB" dirty="0"/>
           </a:p>
         </p:txBody>
       </p:sp>
@@ -537,9 +548,9 @@
           <a:p>
             <a:fld id="{7512EB12-3C52-4A5B-9741-32EF9D1D721D}" type="slidenum">
               <a:rPr lang="en-GB" smtClean="0"/>
-              <a:t>2</a:t>
+              <a:t>3</a:t>
             </a:fld>
-            <a:endParaRPr lang="en-GB"/>
+            <a:endParaRPr lang="en-GB" dirty="0"/>
           </a:p>
         </p:txBody>
       </p:sp>
@@ -547,6 +558,258 @@
     <p:extLst>
       <p:ext uri="{BB962C8B-B14F-4D97-AF65-F5344CB8AC3E}">
         <p14:creationId xmlns:p14="http://schemas.microsoft.com/office/powerpoint/2010/main" val="3166291482"/>
+      </p:ext>
+    </p:extLst>
+  </p:cSld>
+  <p:clrMapOvr>
+    <a:masterClrMapping/>
+  </p:clrMapOvr>
+</p:notes>
+</file>
+
+<file path=ppt/notesSlides/notesSlide10.xml><?xml version="1.0" encoding="utf-8"?>
+<p:notes xmlns:a="http://schemas.openxmlformats.org/drawingml/2006/main" xmlns:r="http://schemas.openxmlformats.org/officeDocument/2006/relationships" xmlns:p="http://schemas.openxmlformats.org/presentationml/2006/main">
+  <p:cSld>
+    <p:spTree>
+      <p:nvGrpSpPr>
+        <p:cNvPr id="1" name=""/>
+        <p:cNvGrpSpPr/>
+        <p:nvPr/>
+      </p:nvGrpSpPr>
+      <p:grpSpPr>
+        <a:xfrm>
+          <a:off x="0" y="0"/>
+          <a:ext cx="0" cy="0"/>
+          <a:chOff x="0" y="0"/>
+          <a:chExt cx="0" cy="0"/>
+        </a:xfrm>
+      </p:grpSpPr>
+      <p:sp>
+        <p:nvSpPr>
+          <p:cNvPr id="2" name="Espace réservé de l'image des diapositives 1"/>
+          <p:cNvSpPr>
+            <a:spLocks noGrp="1" noRot="1" noChangeAspect="1"/>
+          </p:cNvSpPr>
+          <p:nvPr>
+            <p:ph type="sldImg"/>
+          </p:nvPr>
+        </p:nvSpPr>
+        <p:spPr/>
+      </p:sp>
+      <p:sp>
+        <p:nvSpPr>
+          <p:cNvPr id="3" name="Espace réservé des commentaires 2"/>
+          <p:cNvSpPr>
+            <a:spLocks noGrp="1"/>
+          </p:cNvSpPr>
+          <p:nvPr>
+            <p:ph type="body" idx="1"/>
+          </p:nvPr>
+        </p:nvSpPr>
+        <p:spPr/>
+        <p:txBody>
+          <a:bodyPr/>
+          <a:lstStyle/>
+          <a:p>
+            <a:endParaRPr lang="fr-FR" dirty="0"/>
+          </a:p>
+        </p:txBody>
+      </p:sp>
+      <p:sp>
+        <p:nvSpPr>
+          <p:cNvPr id="4" name="Espace réservé du numéro de diapositive 3"/>
+          <p:cNvSpPr>
+            <a:spLocks noGrp="1"/>
+          </p:cNvSpPr>
+          <p:nvPr>
+            <p:ph type="sldNum" sz="quarter" idx="10"/>
+          </p:nvPr>
+        </p:nvSpPr>
+        <p:spPr/>
+        <p:txBody>
+          <a:bodyPr/>
+          <a:lstStyle/>
+          <a:p>
+            <a:fld id="{7512EB12-3C52-4A5B-9741-32EF9D1D721D}" type="slidenum">
+              <a:rPr lang="en-GB" smtClean="0"/>
+              <a:t>13</a:t>
+            </a:fld>
+            <a:endParaRPr lang="en-GB" dirty="0"/>
+          </a:p>
+        </p:txBody>
+      </p:sp>
+    </p:spTree>
+    <p:extLst>
+      <p:ext uri="{BB962C8B-B14F-4D97-AF65-F5344CB8AC3E}">
+        <p14:creationId xmlns:p14="http://schemas.microsoft.com/office/powerpoint/2010/main" val="3793848798"/>
+      </p:ext>
+    </p:extLst>
+  </p:cSld>
+  <p:clrMapOvr>
+    <a:masterClrMapping/>
+  </p:clrMapOvr>
+</p:notes>
+</file>
+
+<file path=ppt/notesSlides/notesSlide11.xml><?xml version="1.0" encoding="utf-8"?>
+<p:notes xmlns:a="http://schemas.openxmlformats.org/drawingml/2006/main" xmlns:r="http://schemas.openxmlformats.org/officeDocument/2006/relationships" xmlns:p="http://schemas.openxmlformats.org/presentationml/2006/main">
+  <p:cSld>
+    <p:spTree>
+      <p:nvGrpSpPr>
+        <p:cNvPr id="1" name=""/>
+        <p:cNvGrpSpPr/>
+        <p:nvPr/>
+      </p:nvGrpSpPr>
+      <p:grpSpPr>
+        <a:xfrm>
+          <a:off x="0" y="0"/>
+          <a:ext cx="0" cy="0"/>
+          <a:chOff x="0" y="0"/>
+          <a:chExt cx="0" cy="0"/>
+        </a:xfrm>
+      </p:grpSpPr>
+      <p:sp>
+        <p:nvSpPr>
+          <p:cNvPr id="2" name="Espace réservé de l'image des diapositives 1"/>
+          <p:cNvSpPr>
+            <a:spLocks noGrp="1" noRot="1" noChangeAspect="1"/>
+          </p:cNvSpPr>
+          <p:nvPr>
+            <p:ph type="sldImg"/>
+          </p:nvPr>
+        </p:nvSpPr>
+        <p:spPr/>
+      </p:sp>
+      <p:sp>
+        <p:nvSpPr>
+          <p:cNvPr id="3" name="Espace réservé des commentaires 2"/>
+          <p:cNvSpPr>
+            <a:spLocks noGrp="1"/>
+          </p:cNvSpPr>
+          <p:nvPr>
+            <p:ph type="body" idx="1"/>
+          </p:nvPr>
+        </p:nvSpPr>
+        <p:spPr/>
+        <p:txBody>
+          <a:bodyPr/>
+          <a:lstStyle/>
+          <a:p>
+            <a:endParaRPr lang="fr-FR" dirty="0"/>
+          </a:p>
+        </p:txBody>
+      </p:sp>
+      <p:sp>
+        <p:nvSpPr>
+          <p:cNvPr id="4" name="Espace réservé du numéro de diapositive 3"/>
+          <p:cNvSpPr>
+            <a:spLocks noGrp="1"/>
+          </p:cNvSpPr>
+          <p:nvPr>
+            <p:ph type="sldNum" sz="quarter" idx="10"/>
+          </p:nvPr>
+        </p:nvSpPr>
+        <p:spPr/>
+        <p:txBody>
+          <a:bodyPr/>
+          <a:lstStyle/>
+          <a:p>
+            <a:fld id="{7512EB12-3C52-4A5B-9741-32EF9D1D721D}" type="slidenum">
+              <a:rPr lang="en-GB" smtClean="0"/>
+              <a:t>14</a:t>
+            </a:fld>
+            <a:endParaRPr lang="en-GB" dirty="0"/>
+          </a:p>
+        </p:txBody>
+      </p:sp>
+    </p:spTree>
+    <p:extLst>
+      <p:ext uri="{BB962C8B-B14F-4D97-AF65-F5344CB8AC3E}">
+        <p14:creationId xmlns:p14="http://schemas.microsoft.com/office/powerpoint/2010/main" val="2209372663"/>
+      </p:ext>
+    </p:extLst>
+  </p:cSld>
+  <p:clrMapOvr>
+    <a:masterClrMapping/>
+  </p:clrMapOvr>
+</p:notes>
+</file>
+
+<file path=ppt/notesSlides/notesSlide12.xml><?xml version="1.0" encoding="utf-8"?>
+<p:notes xmlns:a="http://schemas.openxmlformats.org/drawingml/2006/main" xmlns:r="http://schemas.openxmlformats.org/officeDocument/2006/relationships" xmlns:p="http://schemas.openxmlformats.org/presentationml/2006/main">
+  <p:cSld>
+    <p:spTree>
+      <p:nvGrpSpPr>
+        <p:cNvPr id="1" name=""/>
+        <p:cNvGrpSpPr/>
+        <p:nvPr/>
+      </p:nvGrpSpPr>
+      <p:grpSpPr>
+        <a:xfrm>
+          <a:off x="0" y="0"/>
+          <a:ext cx="0" cy="0"/>
+          <a:chOff x="0" y="0"/>
+          <a:chExt cx="0" cy="0"/>
+        </a:xfrm>
+      </p:grpSpPr>
+      <p:sp>
+        <p:nvSpPr>
+          <p:cNvPr id="2" name="Espace réservé de l'image des diapositives 1"/>
+          <p:cNvSpPr>
+            <a:spLocks noGrp="1" noRot="1" noChangeAspect="1"/>
+          </p:cNvSpPr>
+          <p:nvPr>
+            <p:ph type="sldImg"/>
+          </p:nvPr>
+        </p:nvSpPr>
+        <p:spPr/>
+      </p:sp>
+      <p:sp>
+        <p:nvSpPr>
+          <p:cNvPr id="3" name="Espace réservé des commentaires 2"/>
+          <p:cNvSpPr>
+            <a:spLocks noGrp="1"/>
+          </p:cNvSpPr>
+          <p:nvPr>
+            <p:ph type="body" idx="1"/>
+          </p:nvPr>
+        </p:nvSpPr>
+        <p:spPr/>
+        <p:txBody>
+          <a:bodyPr/>
+          <a:lstStyle/>
+          <a:p>
+            <a:endParaRPr lang="fr-FR" dirty="0"/>
+          </a:p>
+        </p:txBody>
+      </p:sp>
+      <p:sp>
+        <p:nvSpPr>
+          <p:cNvPr id="4" name="Espace réservé du numéro de diapositive 3"/>
+          <p:cNvSpPr>
+            <a:spLocks noGrp="1"/>
+          </p:cNvSpPr>
+          <p:nvPr>
+            <p:ph type="sldNum" sz="quarter" idx="10"/>
+          </p:nvPr>
+        </p:nvSpPr>
+        <p:spPr/>
+        <p:txBody>
+          <a:bodyPr/>
+          <a:lstStyle/>
+          <a:p>
+            <a:fld id="{7512EB12-3C52-4A5B-9741-32EF9D1D721D}" type="slidenum">
+              <a:rPr lang="en-GB" smtClean="0"/>
+              <a:t>15</a:t>
+            </a:fld>
+            <a:endParaRPr lang="en-GB" dirty="0"/>
+          </a:p>
+        </p:txBody>
+      </p:sp>
+    </p:spTree>
+    <p:extLst>
+      <p:ext uri="{BB962C8B-B14F-4D97-AF65-F5344CB8AC3E}">
+        <p14:creationId xmlns:p14="http://schemas.microsoft.com/office/powerpoint/2010/main" val="2475242471"/>
       </p:ext>
     </p:extLst>
   </p:cSld>
@@ -625,9 +888,9 @@
           <a:p>
             <a:fld id="{7512EB12-3C52-4A5B-9741-32EF9D1D721D}" type="slidenum">
               <a:rPr lang="en-GB" smtClean="0"/>
-              <a:t>3</a:t>
+              <a:t>4</a:t>
             </a:fld>
-            <a:endParaRPr lang="en-GB"/>
+            <a:endParaRPr lang="en-GB" dirty="0"/>
           </a:p>
         </p:txBody>
       </p:sp>
@@ -635,6 +898,758 @@
     <p:extLst>
       <p:ext uri="{BB962C8B-B14F-4D97-AF65-F5344CB8AC3E}">
         <p14:creationId xmlns:p14="http://schemas.microsoft.com/office/powerpoint/2010/main" val="2048777989"/>
+      </p:ext>
+    </p:extLst>
+  </p:cSld>
+  <p:clrMapOvr>
+    <a:masterClrMapping/>
+  </p:clrMapOvr>
+</p:notes>
+</file>
+
+<file path=ppt/notesSlides/notesSlide3.xml><?xml version="1.0" encoding="utf-8"?>
+<p:notes xmlns:a="http://schemas.openxmlformats.org/drawingml/2006/main" xmlns:r="http://schemas.openxmlformats.org/officeDocument/2006/relationships" xmlns:p="http://schemas.openxmlformats.org/presentationml/2006/main">
+  <p:cSld>
+    <p:spTree>
+      <p:nvGrpSpPr>
+        <p:cNvPr id="1" name=""/>
+        <p:cNvGrpSpPr/>
+        <p:nvPr/>
+      </p:nvGrpSpPr>
+      <p:grpSpPr>
+        <a:xfrm>
+          <a:off x="0" y="0"/>
+          <a:ext cx="0" cy="0"/>
+          <a:chOff x="0" y="0"/>
+          <a:chExt cx="0" cy="0"/>
+        </a:xfrm>
+      </p:grpSpPr>
+      <p:sp>
+        <p:nvSpPr>
+          <p:cNvPr id="2" name="Espace réservé de l'image des diapositives 1"/>
+          <p:cNvSpPr>
+            <a:spLocks noGrp="1" noRot="1" noChangeAspect="1"/>
+          </p:cNvSpPr>
+          <p:nvPr>
+            <p:ph type="sldImg"/>
+          </p:nvPr>
+        </p:nvSpPr>
+        <p:spPr/>
+      </p:sp>
+      <p:sp>
+        <p:nvSpPr>
+          <p:cNvPr id="3" name="Espace réservé des commentaires 2"/>
+          <p:cNvSpPr>
+            <a:spLocks noGrp="1"/>
+          </p:cNvSpPr>
+          <p:nvPr>
+            <p:ph type="body" idx="1"/>
+          </p:nvPr>
+        </p:nvSpPr>
+        <p:spPr/>
+        <p:txBody>
+          <a:bodyPr/>
+          <a:lstStyle/>
+          <a:p>
+            <a:r>
+              <a:rPr lang="fr-FR" dirty="0" smtClean="0"/>
+              <a:t>10,1</a:t>
+            </a:r>
+          </a:p>
+          <a:p>
+            <a:endParaRPr lang="fr-FR" dirty="0" smtClean="0"/>
+          </a:p>
+          <a:p>
+            <a:r>
+              <a:rPr lang="fr-FR" dirty="0" smtClean="0"/>
+              <a:t>?? </a:t>
+            </a:r>
+            <a:r>
+              <a:rPr lang="en-US" dirty="0" smtClean="0"/>
+              <a:t>Once the closing or draining period has ended, an endpoint SHOULD discard all connection state. </a:t>
+            </a:r>
+          </a:p>
+          <a:p>
+            <a:r>
+              <a:rPr lang="en-US" dirty="0" smtClean="0"/>
+              <a:t>This results in new packets on the connection being handled generically. </a:t>
+            </a:r>
+          </a:p>
+          <a:p>
+            <a:r>
+              <a:rPr lang="en-US" dirty="0" smtClean="0"/>
+              <a:t>For instance, an endpoint MAY send a stateless reset in response to any further incoming packets.</a:t>
+            </a:r>
+            <a:endParaRPr lang="fr-FR" dirty="0"/>
+          </a:p>
+        </p:txBody>
+      </p:sp>
+      <p:sp>
+        <p:nvSpPr>
+          <p:cNvPr id="4" name="Espace réservé du numéro de diapositive 3"/>
+          <p:cNvSpPr>
+            <a:spLocks noGrp="1"/>
+          </p:cNvSpPr>
+          <p:nvPr>
+            <p:ph type="sldNum" sz="quarter" idx="10"/>
+          </p:nvPr>
+        </p:nvSpPr>
+        <p:spPr/>
+        <p:txBody>
+          <a:bodyPr/>
+          <a:lstStyle/>
+          <a:p>
+            <a:fld id="{7512EB12-3C52-4A5B-9741-32EF9D1D721D}" type="slidenum">
+              <a:rPr lang="en-GB" smtClean="0"/>
+              <a:t>6</a:t>
+            </a:fld>
+            <a:endParaRPr lang="en-GB" dirty="0"/>
+          </a:p>
+        </p:txBody>
+      </p:sp>
+    </p:spTree>
+    <p:extLst>
+      <p:ext uri="{BB962C8B-B14F-4D97-AF65-F5344CB8AC3E}">
+        <p14:creationId xmlns:p14="http://schemas.microsoft.com/office/powerpoint/2010/main" val="1145339694"/>
+      </p:ext>
+    </p:extLst>
+  </p:cSld>
+  <p:clrMapOvr>
+    <a:masterClrMapping/>
+  </p:clrMapOvr>
+</p:notes>
+</file>
+
+<file path=ppt/notesSlides/notesSlide4.xml><?xml version="1.0" encoding="utf-8"?>
+<p:notes xmlns:a="http://schemas.openxmlformats.org/drawingml/2006/main" xmlns:r="http://schemas.openxmlformats.org/officeDocument/2006/relationships" xmlns:p="http://schemas.openxmlformats.org/presentationml/2006/main">
+  <p:cSld>
+    <p:spTree>
+      <p:nvGrpSpPr>
+        <p:cNvPr id="1" name=""/>
+        <p:cNvGrpSpPr/>
+        <p:nvPr/>
+      </p:nvGrpSpPr>
+      <p:grpSpPr>
+        <a:xfrm>
+          <a:off x="0" y="0"/>
+          <a:ext cx="0" cy="0"/>
+          <a:chOff x="0" y="0"/>
+          <a:chExt cx="0" cy="0"/>
+        </a:xfrm>
+      </p:grpSpPr>
+      <p:sp>
+        <p:nvSpPr>
+          <p:cNvPr id="2" name="Espace réservé de l'image des diapositives 1"/>
+          <p:cNvSpPr>
+            <a:spLocks noGrp="1" noRot="1" noChangeAspect="1"/>
+          </p:cNvSpPr>
+          <p:nvPr>
+            <p:ph type="sldImg"/>
+          </p:nvPr>
+        </p:nvSpPr>
+        <p:spPr/>
+      </p:sp>
+      <p:sp>
+        <p:nvSpPr>
+          <p:cNvPr id="3" name="Espace réservé des commentaires 2"/>
+          <p:cNvSpPr>
+            <a:spLocks noGrp="1"/>
+          </p:cNvSpPr>
+          <p:nvPr>
+            <p:ph type="body" idx="1"/>
+          </p:nvPr>
+        </p:nvSpPr>
+        <p:spPr/>
+        <p:txBody>
+          <a:bodyPr/>
+          <a:lstStyle/>
+          <a:p>
+            <a:r>
+              <a:rPr lang="fr-FR" dirty="0" smtClean="0"/>
+              <a:t>10,2</a:t>
+            </a:r>
+          </a:p>
+          <a:p>
+            <a:endParaRPr lang="fr-FR" dirty="0" smtClean="0"/>
+          </a:p>
+          <a:p>
+            <a:r>
+              <a:rPr lang="fr-FR" dirty="0" smtClean="0"/>
+              <a:t>https://tools.ietf.org/html/draft-ietf-quic-recovery-29</a:t>
+            </a:r>
+          </a:p>
+          <a:p>
+            <a:endParaRPr lang="fr-FR" dirty="0" smtClean="0"/>
+          </a:p>
+          <a:p>
+            <a:r>
+              <a:rPr lang="fr-FR" dirty="0" smtClean="0"/>
+              <a:t>LIVENESS</a:t>
+            </a:r>
+          </a:p>
+          <a:p>
+            <a:r>
+              <a:rPr lang="en-US" dirty="0" smtClean="0"/>
+              <a:t>An endpoint that sends packets close to the effective timeout risks having them be discarded at the peer, since the peer might enter its draining state before these packets arrive</a:t>
+            </a:r>
+          </a:p>
+          <a:p>
+            <a:r>
+              <a:rPr lang="en-US" dirty="0" smtClean="0"/>
+              <a:t>An endpoint can send a PING or another ack-eliciting frame to test the connection for liveness if the peer could time out soon, such as within a PTO; see Section 6.2 of [</a:t>
+            </a:r>
+            <a:r>
+              <a:rPr lang="en-US" dirty="0" smtClean="0">
+                <a:hlinkClick r:id="rId3" tooltip="&quot;QUIC Loss Detection and Congestion Control&quot;"/>
+              </a:rPr>
+              <a:t>QUIC-RECOVERY</a:t>
+            </a:r>
+            <a:r>
+              <a:rPr lang="en-US" dirty="0" smtClean="0"/>
+              <a:t>]. </a:t>
+            </a:r>
+          </a:p>
+          <a:p>
+            <a:r>
+              <a:rPr lang="en-US" dirty="0" smtClean="0"/>
+              <a:t>This is especially useful if any available application data cannot be safely retried. Note that the application determines what data is safe to retry.</a:t>
+            </a:r>
+            <a:endParaRPr lang="fr-FR" dirty="0"/>
+          </a:p>
+        </p:txBody>
+      </p:sp>
+      <p:sp>
+        <p:nvSpPr>
+          <p:cNvPr id="4" name="Espace réservé du numéro de diapositive 3"/>
+          <p:cNvSpPr>
+            <a:spLocks noGrp="1"/>
+          </p:cNvSpPr>
+          <p:nvPr>
+            <p:ph type="sldNum" sz="quarter" idx="10"/>
+          </p:nvPr>
+        </p:nvSpPr>
+        <p:spPr/>
+        <p:txBody>
+          <a:bodyPr/>
+          <a:lstStyle/>
+          <a:p>
+            <a:fld id="{7512EB12-3C52-4A5B-9741-32EF9D1D721D}" type="slidenum">
+              <a:rPr lang="en-GB" smtClean="0"/>
+              <a:t>7</a:t>
+            </a:fld>
+            <a:endParaRPr lang="en-GB" dirty="0"/>
+          </a:p>
+        </p:txBody>
+      </p:sp>
+    </p:spTree>
+    <p:extLst>
+      <p:ext uri="{BB962C8B-B14F-4D97-AF65-F5344CB8AC3E}">
+        <p14:creationId xmlns:p14="http://schemas.microsoft.com/office/powerpoint/2010/main" val="1549581960"/>
+      </p:ext>
+    </p:extLst>
+  </p:cSld>
+  <p:clrMapOvr>
+    <a:masterClrMapping/>
+  </p:clrMapOvr>
+</p:notes>
+</file>
+
+<file path=ppt/notesSlides/notesSlide5.xml><?xml version="1.0" encoding="utf-8"?>
+<p:notes xmlns:a="http://schemas.openxmlformats.org/drawingml/2006/main" xmlns:r="http://schemas.openxmlformats.org/officeDocument/2006/relationships" xmlns:p="http://schemas.openxmlformats.org/presentationml/2006/main">
+  <p:cSld>
+    <p:spTree>
+      <p:nvGrpSpPr>
+        <p:cNvPr id="1" name=""/>
+        <p:cNvGrpSpPr/>
+        <p:nvPr/>
+      </p:nvGrpSpPr>
+      <p:grpSpPr>
+        <a:xfrm>
+          <a:off x="0" y="0"/>
+          <a:ext cx="0" cy="0"/>
+          <a:chOff x="0" y="0"/>
+          <a:chExt cx="0" cy="0"/>
+        </a:xfrm>
+      </p:grpSpPr>
+      <p:sp>
+        <p:nvSpPr>
+          <p:cNvPr id="2" name="Espace réservé de l'image des diapositives 1"/>
+          <p:cNvSpPr>
+            <a:spLocks noGrp="1" noRot="1" noChangeAspect="1"/>
+          </p:cNvSpPr>
+          <p:nvPr>
+            <p:ph type="sldImg"/>
+          </p:nvPr>
+        </p:nvSpPr>
+        <p:spPr/>
+      </p:sp>
+      <p:sp>
+        <p:nvSpPr>
+          <p:cNvPr id="3" name="Espace réservé des commentaires 2"/>
+          <p:cNvSpPr>
+            <a:spLocks noGrp="1"/>
+          </p:cNvSpPr>
+          <p:nvPr>
+            <p:ph type="body" idx="1"/>
+          </p:nvPr>
+        </p:nvSpPr>
+        <p:spPr/>
+        <p:txBody>
+          <a:bodyPr/>
+          <a:lstStyle/>
+          <a:p>
+            <a:r>
+              <a:rPr lang="en-US" dirty="0" smtClean="0"/>
+              <a:t>   A minimum size of 21 bytes does not guarantee that a stateless reset</a:t>
+            </a:r>
+          </a:p>
+          <a:p>
+            <a:r>
+              <a:rPr lang="en-US" dirty="0" smtClean="0"/>
+              <a:t>   is difficult to distinguish from other packets if the recipient</a:t>
+            </a:r>
+          </a:p>
+          <a:p>
+            <a:r>
+              <a:rPr lang="en-US" dirty="0" smtClean="0"/>
+              <a:t>   requires the use of a connection ID.  To prevent a resulting</a:t>
+            </a:r>
+          </a:p>
+          <a:p>
+            <a:r>
+              <a:rPr lang="en-US" dirty="0" smtClean="0"/>
+              <a:t>   stateless reset from being trivially distinguishable from a valid</a:t>
+            </a:r>
+          </a:p>
+          <a:p>
+            <a:r>
+              <a:rPr lang="en-US" dirty="0" smtClean="0"/>
+              <a:t>   packet, all packets sent by an endpoint SHOULD be padded to at least</a:t>
+            </a:r>
+          </a:p>
+          <a:p>
+            <a:r>
+              <a:rPr lang="en-US" dirty="0" smtClean="0"/>
+              <a:t>   22 bytes longer than the minimum connection ID that the endpoint</a:t>
+            </a:r>
+          </a:p>
+          <a:p>
+            <a:r>
+              <a:rPr lang="en-US" dirty="0" smtClean="0"/>
+              <a:t>   might use.  An endpoint that sends a stateless reset in response to a</a:t>
+            </a:r>
+          </a:p>
+          <a:p>
+            <a:r>
+              <a:rPr lang="en-US" dirty="0" smtClean="0"/>
+              <a:t>   packet that is 43 bytes or less in length SHOULD send a stateless</a:t>
+            </a:r>
+          </a:p>
+          <a:p>
+            <a:r>
+              <a:rPr lang="en-US" dirty="0" smtClean="0"/>
+              <a:t>   reset that is one byte shorter than the packet it responds to.</a:t>
+            </a:r>
+          </a:p>
+          <a:p>
+            <a:endParaRPr lang="en-US" dirty="0" smtClean="0"/>
+          </a:p>
+          <a:p>
+            <a:r>
+              <a:rPr lang="en-US" dirty="0" smtClean="0"/>
+              <a:t>   These values assume that the Stateless Reset Token is the same length</a:t>
+            </a:r>
+          </a:p>
+          <a:p>
+            <a:r>
+              <a:rPr lang="en-US" dirty="0" smtClean="0"/>
+              <a:t>   as the minimum expansion of the packet protection AEAD.  Additional</a:t>
+            </a:r>
+          </a:p>
+          <a:p>
+            <a:r>
+              <a:rPr lang="en-US" dirty="0" smtClean="0"/>
+              <a:t>   unpredictable bytes are necessary if the endpoint could have</a:t>
+            </a:r>
+          </a:p>
+          <a:p>
+            <a:r>
+              <a:rPr lang="en-US" dirty="0" smtClean="0"/>
+              <a:t>   negotiated a packet protection scheme with a larger minimum</a:t>
+            </a:r>
+          </a:p>
+          <a:p>
+            <a:r>
+              <a:rPr lang="en-US" dirty="0" smtClean="0"/>
+              <a:t>   expansion.</a:t>
+            </a:r>
+            <a:endParaRPr lang="fr-FR" dirty="0"/>
+          </a:p>
+        </p:txBody>
+      </p:sp>
+      <p:sp>
+        <p:nvSpPr>
+          <p:cNvPr id="4" name="Espace réservé du numéro de diapositive 3"/>
+          <p:cNvSpPr>
+            <a:spLocks noGrp="1"/>
+          </p:cNvSpPr>
+          <p:nvPr>
+            <p:ph type="sldNum" sz="quarter" idx="10"/>
+          </p:nvPr>
+        </p:nvSpPr>
+        <p:spPr/>
+        <p:txBody>
+          <a:bodyPr/>
+          <a:lstStyle/>
+          <a:p>
+            <a:fld id="{7512EB12-3C52-4A5B-9741-32EF9D1D721D}" type="slidenum">
+              <a:rPr lang="en-GB" smtClean="0"/>
+              <a:t>8</a:t>
+            </a:fld>
+            <a:endParaRPr lang="en-GB" dirty="0"/>
+          </a:p>
+        </p:txBody>
+      </p:sp>
+    </p:spTree>
+    <p:extLst>
+      <p:ext uri="{BB962C8B-B14F-4D97-AF65-F5344CB8AC3E}">
+        <p14:creationId xmlns:p14="http://schemas.microsoft.com/office/powerpoint/2010/main" val="1842708280"/>
+      </p:ext>
+    </p:extLst>
+  </p:cSld>
+  <p:clrMapOvr>
+    <a:masterClrMapping/>
+  </p:clrMapOvr>
+</p:notes>
+</file>
+
+<file path=ppt/notesSlides/notesSlide6.xml><?xml version="1.0" encoding="utf-8"?>
+<p:notes xmlns:a="http://schemas.openxmlformats.org/drawingml/2006/main" xmlns:r="http://schemas.openxmlformats.org/officeDocument/2006/relationships" xmlns:p="http://schemas.openxmlformats.org/presentationml/2006/main">
+  <p:cSld>
+    <p:spTree>
+      <p:nvGrpSpPr>
+        <p:cNvPr id="1" name=""/>
+        <p:cNvGrpSpPr/>
+        <p:nvPr/>
+      </p:nvGrpSpPr>
+      <p:grpSpPr>
+        <a:xfrm>
+          <a:off x="0" y="0"/>
+          <a:ext cx="0" cy="0"/>
+          <a:chOff x="0" y="0"/>
+          <a:chExt cx="0" cy="0"/>
+        </a:xfrm>
+      </p:grpSpPr>
+      <p:sp>
+        <p:nvSpPr>
+          <p:cNvPr id="2" name="Espace réservé de l'image des diapositives 1"/>
+          <p:cNvSpPr>
+            <a:spLocks noGrp="1" noRot="1" noChangeAspect="1"/>
+          </p:cNvSpPr>
+          <p:nvPr>
+            <p:ph type="sldImg"/>
+          </p:nvPr>
+        </p:nvSpPr>
+        <p:spPr/>
+      </p:sp>
+      <p:sp>
+        <p:nvSpPr>
+          <p:cNvPr id="3" name="Espace réservé des commentaires 2"/>
+          <p:cNvSpPr>
+            <a:spLocks noGrp="1"/>
+          </p:cNvSpPr>
+          <p:nvPr>
+            <p:ph type="body" idx="1"/>
+          </p:nvPr>
+        </p:nvSpPr>
+        <p:spPr/>
+        <p:txBody>
+          <a:bodyPr/>
+          <a:lstStyle/>
+          <a:p>
+            <a:endParaRPr lang="fr-FR" dirty="0"/>
+          </a:p>
+        </p:txBody>
+      </p:sp>
+      <p:sp>
+        <p:nvSpPr>
+          <p:cNvPr id="4" name="Espace réservé du numéro de diapositive 3"/>
+          <p:cNvSpPr>
+            <a:spLocks noGrp="1"/>
+          </p:cNvSpPr>
+          <p:nvPr>
+            <p:ph type="sldNum" sz="quarter" idx="10"/>
+          </p:nvPr>
+        </p:nvSpPr>
+        <p:spPr/>
+        <p:txBody>
+          <a:bodyPr/>
+          <a:lstStyle/>
+          <a:p>
+            <a:fld id="{7512EB12-3C52-4A5B-9741-32EF9D1D721D}" type="slidenum">
+              <a:rPr lang="en-GB" smtClean="0"/>
+              <a:t>9</a:t>
+            </a:fld>
+            <a:endParaRPr lang="en-GB" dirty="0"/>
+          </a:p>
+        </p:txBody>
+      </p:sp>
+    </p:spTree>
+    <p:extLst>
+      <p:ext uri="{BB962C8B-B14F-4D97-AF65-F5344CB8AC3E}">
+        <p14:creationId xmlns:p14="http://schemas.microsoft.com/office/powerpoint/2010/main" val="4288333112"/>
+      </p:ext>
+    </p:extLst>
+  </p:cSld>
+  <p:clrMapOvr>
+    <a:masterClrMapping/>
+  </p:clrMapOvr>
+</p:notes>
+</file>
+
+<file path=ppt/notesSlides/notesSlide7.xml><?xml version="1.0" encoding="utf-8"?>
+<p:notes xmlns:a="http://schemas.openxmlformats.org/drawingml/2006/main" xmlns:r="http://schemas.openxmlformats.org/officeDocument/2006/relationships" xmlns:p="http://schemas.openxmlformats.org/presentationml/2006/main">
+  <p:cSld>
+    <p:spTree>
+      <p:nvGrpSpPr>
+        <p:cNvPr id="1" name=""/>
+        <p:cNvGrpSpPr/>
+        <p:nvPr/>
+      </p:nvGrpSpPr>
+      <p:grpSpPr>
+        <a:xfrm>
+          <a:off x="0" y="0"/>
+          <a:ext cx="0" cy="0"/>
+          <a:chOff x="0" y="0"/>
+          <a:chExt cx="0" cy="0"/>
+        </a:xfrm>
+      </p:grpSpPr>
+      <p:sp>
+        <p:nvSpPr>
+          <p:cNvPr id="2" name="Espace réservé de l'image des diapositives 1"/>
+          <p:cNvSpPr>
+            <a:spLocks noGrp="1" noRot="1" noChangeAspect="1"/>
+          </p:cNvSpPr>
+          <p:nvPr>
+            <p:ph type="sldImg"/>
+          </p:nvPr>
+        </p:nvSpPr>
+        <p:spPr/>
+      </p:sp>
+      <p:sp>
+        <p:nvSpPr>
+          <p:cNvPr id="3" name="Espace réservé des commentaires 2"/>
+          <p:cNvSpPr>
+            <a:spLocks noGrp="1"/>
+          </p:cNvSpPr>
+          <p:nvPr>
+            <p:ph type="body" idx="1"/>
+          </p:nvPr>
+        </p:nvSpPr>
+        <p:spPr/>
+        <p:txBody>
+          <a:bodyPr/>
+          <a:lstStyle/>
+          <a:p>
+            <a:endParaRPr lang="fr-FR" dirty="0"/>
+          </a:p>
+        </p:txBody>
+      </p:sp>
+      <p:sp>
+        <p:nvSpPr>
+          <p:cNvPr id="4" name="Espace réservé du numéro de diapositive 3"/>
+          <p:cNvSpPr>
+            <a:spLocks noGrp="1"/>
+          </p:cNvSpPr>
+          <p:nvPr>
+            <p:ph type="sldNum" sz="quarter" idx="10"/>
+          </p:nvPr>
+        </p:nvSpPr>
+        <p:spPr/>
+        <p:txBody>
+          <a:bodyPr/>
+          <a:lstStyle/>
+          <a:p>
+            <a:fld id="{7512EB12-3C52-4A5B-9741-32EF9D1D721D}" type="slidenum">
+              <a:rPr lang="en-GB" smtClean="0"/>
+              <a:t>10</a:t>
+            </a:fld>
+            <a:endParaRPr lang="en-GB" dirty="0"/>
+          </a:p>
+        </p:txBody>
+      </p:sp>
+    </p:spTree>
+    <p:extLst>
+      <p:ext uri="{BB962C8B-B14F-4D97-AF65-F5344CB8AC3E}">
+        <p14:creationId xmlns:p14="http://schemas.microsoft.com/office/powerpoint/2010/main" val="1587273287"/>
+      </p:ext>
+    </p:extLst>
+  </p:cSld>
+  <p:clrMapOvr>
+    <a:masterClrMapping/>
+  </p:clrMapOvr>
+</p:notes>
+</file>
+
+<file path=ppt/notesSlides/notesSlide8.xml><?xml version="1.0" encoding="utf-8"?>
+<p:notes xmlns:a="http://schemas.openxmlformats.org/drawingml/2006/main" xmlns:r="http://schemas.openxmlformats.org/officeDocument/2006/relationships" xmlns:p="http://schemas.openxmlformats.org/presentationml/2006/main">
+  <p:cSld>
+    <p:spTree>
+      <p:nvGrpSpPr>
+        <p:cNvPr id="1" name=""/>
+        <p:cNvGrpSpPr/>
+        <p:nvPr/>
+      </p:nvGrpSpPr>
+      <p:grpSpPr>
+        <a:xfrm>
+          <a:off x="0" y="0"/>
+          <a:ext cx="0" cy="0"/>
+          <a:chOff x="0" y="0"/>
+          <a:chExt cx="0" cy="0"/>
+        </a:xfrm>
+      </p:grpSpPr>
+      <p:sp>
+        <p:nvSpPr>
+          <p:cNvPr id="2" name="Espace réservé de l'image des diapositives 1"/>
+          <p:cNvSpPr>
+            <a:spLocks noGrp="1" noRot="1" noChangeAspect="1"/>
+          </p:cNvSpPr>
+          <p:nvPr>
+            <p:ph type="sldImg"/>
+          </p:nvPr>
+        </p:nvSpPr>
+        <p:spPr/>
+      </p:sp>
+      <p:sp>
+        <p:nvSpPr>
+          <p:cNvPr id="3" name="Espace réservé des commentaires 2"/>
+          <p:cNvSpPr>
+            <a:spLocks noGrp="1"/>
+          </p:cNvSpPr>
+          <p:nvPr>
+            <p:ph type="body" idx="1"/>
+          </p:nvPr>
+        </p:nvSpPr>
+        <p:spPr/>
+        <p:txBody>
+          <a:bodyPr/>
+          <a:lstStyle/>
+          <a:p>
+            <a:endParaRPr lang="fr-FR" dirty="0"/>
+          </a:p>
+        </p:txBody>
+      </p:sp>
+      <p:sp>
+        <p:nvSpPr>
+          <p:cNvPr id="4" name="Espace réservé du numéro de diapositive 3"/>
+          <p:cNvSpPr>
+            <a:spLocks noGrp="1"/>
+          </p:cNvSpPr>
+          <p:nvPr>
+            <p:ph type="sldNum" sz="quarter" idx="10"/>
+          </p:nvPr>
+        </p:nvSpPr>
+        <p:spPr/>
+        <p:txBody>
+          <a:bodyPr/>
+          <a:lstStyle/>
+          <a:p>
+            <a:fld id="{7512EB12-3C52-4A5B-9741-32EF9D1D721D}" type="slidenum">
+              <a:rPr lang="en-GB" smtClean="0"/>
+              <a:t>11</a:t>
+            </a:fld>
+            <a:endParaRPr lang="en-GB" dirty="0"/>
+          </a:p>
+        </p:txBody>
+      </p:sp>
+    </p:spTree>
+    <p:extLst>
+      <p:ext uri="{BB962C8B-B14F-4D97-AF65-F5344CB8AC3E}">
+        <p14:creationId xmlns:p14="http://schemas.microsoft.com/office/powerpoint/2010/main" val="4287305566"/>
+      </p:ext>
+    </p:extLst>
+  </p:cSld>
+  <p:clrMapOvr>
+    <a:masterClrMapping/>
+  </p:clrMapOvr>
+</p:notes>
+</file>
+
+<file path=ppt/notesSlides/notesSlide9.xml><?xml version="1.0" encoding="utf-8"?>
+<p:notes xmlns:a="http://schemas.openxmlformats.org/drawingml/2006/main" xmlns:r="http://schemas.openxmlformats.org/officeDocument/2006/relationships" xmlns:p="http://schemas.openxmlformats.org/presentationml/2006/main">
+  <p:cSld>
+    <p:spTree>
+      <p:nvGrpSpPr>
+        <p:cNvPr id="1" name=""/>
+        <p:cNvGrpSpPr/>
+        <p:nvPr/>
+      </p:nvGrpSpPr>
+      <p:grpSpPr>
+        <a:xfrm>
+          <a:off x="0" y="0"/>
+          <a:ext cx="0" cy="0"/>
+          <a:chOff x="0" y="0"/>
+          <a:chExt cx="0" cy="0"/>
+        </a:xfrm>
+      </p:grpSpPr>
+      <p:sp>
+        <p:nvSpPr>
+          <p:cNvPr id="2" name="Espace réservé de l'image des diapositives 1"/>
+          <p:cNvSpPr>
+            <a:spLocks noGrp="1" noRot="1" noChangeAspect="1"/>
+          </p:cNvSpPr>
+          <p:nvPr>
+            <p:ph type="sldImg"/>
+          </p:nvPr>
+        </p:nvSpPr>
+        <p:spPr/>
+      </p:sp>
+      <p:sp>
+        <p:nvSpPr>
+          <p:cNvPr id="3" name="Espace réservé des commentaires 2"/>
+          <p:cNvSpPr>
+            <a:spLocks noGrp="1"/>
+          </p:cNvSpPr>
+          <p:nvPr>
+            <p:ph type="body" idx="1"/>
+          </p:nvPr>
+        </p:nvSpPr>
+        <p:spPr/>
+        <p:txBody>
+          <a:bodyPr/>
+          <a:lstStyle/>
+          <a:p>
+            <a:endParaRPr lang="fr-FR" dirty="0"/>
+          </a:p>
+        </p:txBody>
+      </p:sp>
+      <p:sp>
+        <p:nvSpPr>
+          <p:cNvPr id="4" name="Espace réservé du numéro de diapositive 3"/>
+          <p:cNvSpPr>
+            <a:spLocks noGrp="1"/>
+          </p:cNvSpPr>
+          <p:nvPr>
+            <p:ph type="sldNum" sz="quarter" idx="10"/>
+          </p:nvPr>
+        </p:nvSpPr>
+        <p:spPr/>
+        <p:txBody>
+          <a:bodyPr/>
+          <a:lstStyle/>
+          <a:p>
+            <a:fld id="{7512EB12-3C52-4A5B-9741-32EF9D1D721D}" type="slidenum">
+              <a:rPr lang="en-GB" smtClean="0"/>
+              <a:t>12</a:t>
+            </a:fld>
+            <a:endParaRPr lang="en-GB" dirty="0"/>
+          </a:p>
+        </p:txBody>
+      </p:sp>
+    </p:spTree>
+    <p:extLst>
+      <p:ext uri="{BB962C8B-B14F-4D97-AF65-F5344CB8AC3E}">
+        <p14:creationId xmlns:p14="http://schemas.microsoft.com/office/powerpoint/2010/main" val="1688383247"/>
       </p:ext>
     </p:extLst>
   </p:cSld>
@@ -666,7 +1681,7 @@
           <p:cNvPr id="2" name="Titre 1">
             <a:extLst>
               <a:ext uri="{FF2B5EF4-FFF2-40B4-BE49-F238E27FC236}">
-                <a16:creationId xmlns:a16="http://schemas.microsoft.com/office/drawing/2014/main" id="{99E3394D-DD88-4BFA-88A9-110D4ECA49E8}"/>
+                <a16:creationId xmlns:a16="http://schemas.microsoft.com/office/drawing/2014/main" xmlns="" id="{99E3394D-DD88-4BFA-88A9-110D4ECA49E8}"/>
               </a:ext>
             </a:extLst>
           </p:cNvPr>
@@ -704,7 +1719,7 @@
           <p:cNvPr id="3" name="Sous-titre 2">
             <a:extLst>
               <a:ext uri="{FF2B5EF4-FFF2-40B4-BE49-F238E27FC236}">
-                <a16:creationId xmlns:a16="http://schemas.microsoft.com/office/drawing/2014/main" id="{166594DE-FD46-42BB-A276-9B76DA001F8F}"/>
+                <a16:creationId xmlns:a16="http://schemas.microsoft.com/office/drawing/2014/main" xmlns="" id="{166594DE-FD46-42BB-A276-9B76DA001F8F}"/>
               </a:ext>
             </a:extLst>
           </p:cNvPr>
@@ -775,7 +1790,7 @@
           <p:cNvPr id="4" name="Espace réservé de la date 3">
             <a:extLst>
               <a:ext uri="{FF2B5EF4-FFF2-40B4-BE49-F238E27FC236}">
-                <a16:creationId xmlns:a16="http://schemas.microsoft.com/office/drawing/2014/main" id="{7ECB63B5-A7DD-4085-A1E9-6C31FD67553A}"/>
+                <a16:creationId xmlns:a16="http://schemas.microsoft.com/office/drawing/2014/main" xmlns="" id="{7ECB63B5-A7DD-4085-A1E9-6C31FD67553A}"/>
               </a:ext>
             </a:extLst>
           </p:cNvPr>
@@ -793,7 +1808,7 @@
           <a:p>
             <a:fld id="{DCD882A2-DD72-4F80-A6AB-80BB922E5FBF}" type="datetimeFigureOut">
               <a:rPr lang="en-GB" smtClean="0"/>
-              <a:t>26/09/2020</a:t>
+              <a:t>01/10/2020</a:t>
             </a:fld>
             <a:endParaRPr lang="en-GB" dirty="0"/>
           </a:p>
@@ -804,7 +1819,7 @@
           <p:cNvPr id="5" name="Espace réservé du pied de page 4">
             <a:extLst>
               <a:ext uri="{FF2B5EF4-FFF2-40B4-BE49-F238E27FC236}">
-                <a16:creationId xmlns:a16="http://schemas.microsoft.com/office/drawing/2014/main" id="{675EFB3A-A725-4EAF-935A-76DA0DF3B699}"/>
+                <a16:creationId xmlns:a16="http://schemas.microsoft.com/office/drawing/2014/main" xmlns="" id="{675EFB3A-A725-4EAF-935A-76DA0DF3B699}"/>
               </a:ext>
             </a:extLst>
           </p:cNvPr>
@@ -829,7 +1844,7 @@
           <p:cNvPr id="6" name="Espace réservé du numéro de diapositive 5">
             <a:extLst>
               <a:ext uri="{FF2B5EF4-FFF2-40B4-BE49-F238E27FC236}">
-                <a16:creationId xmlns:a16="http://schemas.microsoft.com/office/drawing/2014/main" id="{28ECEA54-9A57-4837-B63D-2C59499C0CCE}"/>
+                <a16:creationId xmlns:a16="http://schemas.microsoft.com/office/drawing/2014/main" xmlns="" id="{28ECEA54-9A57-4837-B63D-2C59499C0CCE}"/>
               </a:ext>
             </a:extLst>
           </p:cNvPr>
@@ -888,7 +1903,7 @@
           <p:cNvPr id="2" name="Titre 1">
             <a:extLst>
               <a:ext uri="{FF2B5EF4-FFF2-40B4-BE49-F238E27FC236}">
-                <a16:creationId xmlns:a16="http://schemas.microsoft.com/office/drawing/2014/main" id="{EC9BE05C-63A7-450A-9790-60BDC0DFEFD6}"/>
+                <a16:creationId xmlns:a16="http://schemas.microsoft.com/office/drawing/2014/main" xmlns="" id="{EC9BE05C-63A7-450A-9790-60BDC0DFEFD6}"/>
               </a:ext>
             </a:extLst>
           </p:cNvPr>
@@ -917,7 +1932,7 @@
           <p:cNvPr id="3" name="Espace réservé du texte vertical 2">
             <a:extLst>
               <a:ext uri="{FF2B5EF4-FFF2-40B4-BE49-F238E27FC236}">
-                <a16:creationId xmlns:a16="http://schemas.microsoft.com/office/drawing/2014/main" id="{41AC279B-0CA7-44FD-864C-FA7475C3F0EC}"/>
+                <a16:creationId xmlns:a16="http://schemas.microsoft.com/office/drawing/2014/main" xmlns="" id="{41AC279B-0CA7-44FD-864C-FA7475C3F0EC}"/>
               </a:ext>
             </a:extLst>
           </p:cNvPr>
@@ -975,7 +1990,7 @@
           <p:cNvPr id="4" name="Espace réservé de la date 3">
             <a:extLst>
               <a:ext uri="{FF2B5EF4-FFF2-40B4-BE49-F238E27FC236}">
-                <a16:creationId xmlns:a16="http://schemas.microsoft.com/office/drawing/2014/main" id="{4E6E87B2-E303-4D52-8466-2576624DC979}"/>
+                <a16:creationId xmlns:a16="http://schemas.microsoft.com/office/drawing/2014/main" xmlns="" id="{4E6E87B2-E303-4D52-8466-2576624DC979}"/>
               </a:ext>
             </a:extLst>
           </p:cNvPr>
@@ -993,7 +2008,7 @@
           <a:p>
             <a:fld id="{DCD882A2-DD72-4F80-A6AB-80BB922E5FBF}" type="datetimeFigureOut">
               <a:rPr lang="en-GB" smtClean="0"/>
-              <a:t>26/09/2020</a:t>
+              <a:t>01/10/2020</a:t>
             </a:fld>
             <a:endParaRPr lang="en-GB" dirty="0"/>
           </a:p>
@@ -1004,7 +2019,7 @@
           <p:cNvPr id="5" name="Espace réservé du pied de page 4">
             <a:extLst>
               <a:ext uri="{FF2B5EF4-FFF2-40B4-BE49-F238E27FC236}">
-                <a16:creationId xmlns:a16="http://schemas.microsoft.com/office/drawing/2014/main" id="{891C475F-EE53-4824-A479-291E8BC94E74}"/>
+                <a16:creationId xmlns:a16="http://schemas.microsoft.com/office/drawing/2014/main" xmlns="" id="{891C475F-EE53-4824-A479-291E8BC94E74}"/>
               </a:ext>
             </a:extLst>
           </p:cNvPr>
@@ -1029,7 +2044,7 @@
           <p:cNvPr id="6" name="Espace réservé du numéro de diapositive 5">
             <a:extLst>
               <a:ext uri="{FF2B5EF4-FFF2-40B4-BE49-F238E27FC236}">
-                <a16:creationId xmlns:a16="http://schemas.microsoft.com/office/drawing/2014/main" id="{4F6DC346-0C49-4B9D-B739-8D8FF178BFDA}"/>
+                <a16:creationId xmlns:a16="http://schemas.microsoft.com/office/drawing/2014/main" xmlns="" id="{4F6DC346-0C49-4B9D-B739-8D8FF178BFDA}"/>
               </a:ext>
             </a:extLst>
           </p:cNvPr>
@@ -1088,7 +2103,7 @@
           <p:cNvPr id="2" name="Titre vertical 1">
             <a:extLst>
               <a:ext uri="{FF2B5EF4-FFF2-40B4-BE49-F238E27FC236}">
-                <a16:creationId xmlns:a16="http://schemas.microsoft.com/office/drawing/2014/main" id="{4FED3BAF-2376-4728-8BF7-8DB84B7B6246}"/>
+                <a16:creationId xmlns:a16="http://schemas.microsoft.com/office/drawing/2014/main" xmlns="" id="{4FED3BAF-2376-4728-8BF7-8DB84B7B6246}"/>
               </a:ext>
             </a:extLst>
           </p:cNvPr>
@@ -1122,7 +2137,7 @@
           <p:cNvPr id="3" name="Espace réservé du texte vertical 2">
             <a:extLst>
               <a:ext uri="{FF2B5EF4-FFF2-40B4-BE49-F238E27FC236}">
-                <a16:creationId xmlns:a16="http://schemas.microsoft.com/office/drawing/2014/main" id="{F833F1F4-97DD-42BA-94D0-2FE696EBCF91}"/>
+                <a16:creationId xmlns:a16="http://schemas.microsoft.com/office/drawing/2014/main" xmlns="" id="{F833F1F4-97DD-42BA-94D0-2FE696EBCF91}"/>
               </a:ext>
             </a:extLst>
           </p:cNvPr>
@@ -1185,7 +2200,7 @@
           <p:cNvPr id="4" name="Espace réservé de la date 3">
             <a:extLst>
               <a:ext uri="{FF2B5EF4-FFF2-40B4-BE49-F238E27FC236}">
-                <a16:creationId xmlns:a16="http://schemas.microsoft.com/office/drawing/2014/main" id="{741BC0C2-2BC4-4C2F-968C-F17D8EECBB12}"/>
+                <a16:creationId xmlns:a16="http://schemas.microsoft.com/office/drawing/2014/main" xmlns="" id="{741BC0C2-2BC4-4C2F-968C-F17D8EECBB12}"/>
               </a:ext>
             </a:extLst>
           </p:cNvPr>
@@ -1203,7 +2218,7 @@
           <a:p>
             <a:fld id="{DCD882A2-DD72-4F80-A6AB-80BB922E5FBF}" type="datetimeFigureOut">
               <a:rPr lang="en-GB" smtClean="0"/>
-              <a:t>26/09/2020</a:t>
+              <a:t>01/10/2020</a:t>
             </a:fld>
             <a:endParaRPr lang="en-GB" dirty="0"/>
           </a:p>
@@ -1214,7 +2229,7 @@
           <p:cNvPr id="5" name="Espace réservé du pied de page 4">
             <a:extLst>
               <a:ext uri="{FF2B5EF4-FFF2-40B4-BE49-F238E27FC236}">
-                <a16:creationId xmlns:a16="http://schemas.microsoft.com/office/drawing/2014/main" id="{695F807C-4C53-4110-BE4D-D4A1AE7CF371}"/>
+                <a16:creationId xmlns:a16="http://schemas.microsoft.com/office/drawing/2014/main" xmlns="" id="{695F807C-4C53-4110-BE4D-D4A1AE7CF371}"/>
               </a:ext>
             </a:extLst>
           </p:cNvPr>
@@ -1239,7 +2254,7 @@
           <p:cNvPr id="6" name="Espace réservé du numéro de diapositive 5">
             <a:extLst>
               <a:ext uri="{FF2B5EF4-FFF2-40B4-BE49-F238E27FC236}">
-                <a16:creationId xmlns:a16="http://schemas.microsoft.com/office/drawing/2014/main" id="{5864A6F6-59D9-45F3-B32F-CCEACB684C37}"/>
+                <a16:creationId xmlns:a16="http://schemas.microsoft.com/office/drawing/2014/main" xmlns="" id="{5864A6F6-59D9-45F3-B32F-CCEACB684C37}"/>
               </a:ext>
             </a:extLst>
           </p:cNvPr>
@@ -1298,7 +2313,7 @@
           <p:cNvPr id="2" name="Titre 1">
             <a:extLst>
               <a:ext uri="{FF2B5EF4-FFF2-40B4-BE49-F238E27FC236}">
-                <a16:creationId xmlns:a16="http://schemas.microsoft.com/office/drawing/2014/main" id="{4D3C2618-69F0-45B6-8F27-09B7A203ADB9}"/>
+                <a16:creationId xmlns:a16="http://schemas.microsoft.com/office/drawing/2014/main" xmlns="" id="{4D3C2618-69F0-45B6-8F27-09B7A203ADB9}"/>
               </a:ext>
             </a:extLst>
           </p:cNvPr>
@@ -1327,7 +2342,7 @@
           <p:cNvPr id="3" name="Espace réservé du contenu 2">
             <a:extLst>
               <a:ext uri="{FF2B5EF4-FFF2-40B4-BE49-F238E27FC236}">
-                <a16:creationId xmlns:a16="http://schemas.microsoft.com/office/drawing/2014/main" id="{A4389116-6456-4E0B-9420-C0810F85220A}"/>
+                <a16:creationId xmlns:a16="http://schemas.microsoft.com/office/drawing/2014/main" xmlns="" id="{A4389116-6456-4E0B-9420-C0810F85220A}"/>
               </a:ext>
             </a:extLst>
           </p:cNvPr>
@@ -1385,7 +2400,7 @@
           <p:cNvPr id="4" name="Espace réservé de la date 3">
             <a:extLst>
               <a:ext uri="{FF2B5EF4-FFF2-40B4-BE49-F238E27FC236}">
-                <a16:creationId xmlns:a16="http://schemas.microsoft.com/office/drawing/2014/main" id="{F2D34F74-D7AB-4A9A-AF48-19A3714569DA}"/>
+                <a16:creationId xmlns:a16="http://schemas.microsoft.com/office/drawing/2014/main" xmlns="" id="{F2D34F74-D7AB-4A9A-AF48-19A3714569DA}"/>
               </a:ext>
             </a:extLst>
           </p:cNvPr>
@@ -1403,7 +2418,7 @@
           <a:p>
             <a:fld id="{DCD882A2-DD72-4F80-A6AB-80BB922E5FBF}" type="datetimeFigureOut">
               <a:rPr lang="en-GB" smtClean="0"/>
-              <a:t>26/09/2020</a:t>
+              <a:t>01/10/2020</a:t>
             </a:fld>
             <a:endParaRPr lang="en-GB" dirty="0"/>
           </a:p>
@@ -1414,7 +2429,7 @@
           <p:cNvPr id="5" name="Espace réservé du pied de page 4">
             <a:extLst>
               <a:ext uri="{FF2B5EF4-FFF2-40B4-BE49-F238E27FC236}">
-                <a16:creationId xmlns:a16="http://schemas.microsoft.com/office/drawing/2014/main" id="{3E284FFD-493C-407D-86AE-FA2209DC52A5}"/>
+                <a16:creationId xmlns:a16="http://schemas.microsoft.com/office/drawing/2014/main" xmlns="" id="{3E284FFD-493C-407D-86AE-FA2209DC52A5}"/>
               </a:ext>
             </a:extLst>
           </p:cNvPr>
@@ -1439,7 +2454,7 @@
           <p:cNvPr id="6" name="Espace réservé du numéro de diapositive 5">
             <a:extLst>
               <a:ext uri="{FF2B5EF4-FFF2-40B4-BE49-F238E27FC236}">
-                <a16:creationId xmlns:a16="http://schemas.microsoft.com/office/drawing/2014/main" id="{7A9E5556-53BA-4B18-8B46-7C10511CC2E8}"/>
+                <a16:creationId xmlns:a16="http://schemas.microsoft.com/office/drawing/2014/main" xmlns="" id="{7A9E5556-53BA-4B18-8B46-7C10511CC2E8}"/>
               </a:ext>
             </a:extLst>
           </p:cNvPr>
@@ -1498,7 +2513,7 @@
           <p:cNvPr id="2" name="Titre 1">
             <a:extLst>
               <a:ext uri="{FF2B5EF4-FFF2-40B4-BE49-F238E27FC236}">
-                <a16:creationId xmlns:a16="http://schemas.microsoft.com/office/drawing/2014/main" id="{B84EDBC3-48EB-4660-A71A-81D826DE0D3D}"/>
+                <a16:creationId xmlns:a16="http://schemas.microsoft.com/office/drawing/2014/main" xmlns="" id="{B84EDBC3-48EB-4660-A71A-81D826DE0D3D}"/>
               </a:ext>
             </a:extLst>
           </p:cNvPr>
@@ -1536,7 +2551,7 @@
           <p:cNvPr id="3" name="Espace réservé du texte 2">
             <a:extLst>
               <a:ext uri="{FF2B5EF4-FFF2-40B4-BE49-F238E27FC236}">
-                <a16:creationId xmlns:a16="http://schemas.microsoft.com/office/drawing/2014/main" id="{4934F111-3E17-4DC3-B9F1-3B281A0E5F6C}"/>
+                <a16:creationId xmlns:a16="http://schemas.microsoft.com/office/drawing/2014/main" xmlns="" id="{4934F111-3E17-4DC3-B9F1-3B281A0E5F6C}"/>
               </a:ext>
             </a:extLst>
           </p:cNvPr>
@@ -1661,7 +2676,7 @@
           <p:cNvPr id="4" name="Espace réservé de la date 3">
             <a:extLst>
               <a:ext uri="{FF2B5EF4-FFF2-40B4-BE49-F238E27FC236}">
-                <a16:creationId xmlns:a16="http://schemas.microsoft.com/office/drawing/2014/main" id="{8E844854-D2DD-43B9-B16A-2BBD39D0F67E}"/>
+                <a16:creationId xmlns:a16="http://schemas.microsoft.com/office/drawing/2014/main" xmlns="" id="{8E844854-D2DD-43B9-B16A-2BBD39D0F67E}"/>
               </a:ext>
             </a:extLst>
           </p:cNvPr>
@@ -1679,7 +2694,7 @@
           <a:p>
             <a:fld id="{DCD882A2-DD72-4F80-A6AB-80BB922E5FBF}" type="datetimeFigureOut">
               <a:rPr lang="en-GB" smtClean="0"/>
-              <a:t>26/09/2020</a:t>
+              <a:t>01/10/2020</a:t>
             </a:fld>
             <a:endParaRPr lang="en-GB" dirty="0"/>
           </a:p>
@@ -1690,7 +2705,7 @@
           <p:cNvPr id="5" name="Espace réservé du pied de page 4">
             <a:extLst>
               <a:ext uri="{FF2B5EF4-FFF2-40B4-BE49-F238E27FC236}">
-                <a16:creationId xmlns:a16="http://schemas.microsoft.com/office/drawing/2014/main" id="{D4CDFE30-C34F-44C1-AC90-65461E8B02F2}"/>
+                <a16:creationId xmlns:a16="http://schemas.microsoft.com/office/drawing/2014/main" xmlns="" id="{D4CDFE30-C34F-44C1-AC90-65461E8B02F2}"/>
               </a:ext>
             </a:extLst>
           </p:cNvPr>
@@ -1715,7 +2730,7 @@
           <p:cNvPr id="6" name="Espace réservé du numéro de diapositive 5">
             <a:extLst>
               <a:ext uri="{FF2B5EF4-FFF2-40B4-BE49-F238E27FC236}">
-                <a16:creationId xmlns:a16="http://schemas.microsoft.com/office/drawing/2014/main" id="{F09F30A0-E658-47E1-80FF-A795B55F9246}"/>
+                <a16:creationId xmlns:a16="http://schemas.microsoft.com/office/drawing/2014/main" xmlns="" id="{F09F30A0-E658-47E1-80FF-A795B55F9246}"/>
               </a:ext>
             </a:extLst>
           </p:cNvPr>
@@ -1774,7 +2789,7 @@
           <p:cNvPr id="2" name="Titre 1">
             <a:extLst>
               <a:ext uri="{FF2B5EF4-FFF2-40B4-BE49-F238E27FC236}">
-                <a16:creationId xmlns:a16="http://schemas.microsoft.com/office/drawing/2014/main" id="{F89645C2-3497-4817-8503-09A09D3F39B3}"/>
+                <a16:creationId xmlns:a16="http://schemas.microsoft.com/office/drawing/2014/main" xmlns="" id="{F89645C2-3497-4817-8503-09A09D3F39B3}"/>
               </a:ext>
             </a:extLst>
           </p:cNvPr>
@@ -1803,7 +2818,7 @@
           <p:cNvPr id="3" name="Espace réservé du contenu 2">
             <a:extLst>
               <a:ext uri="{FF2B5EF4-FFF2-40B4-BE49-F238E27FC236}">
-                <a16:creationId xmlns:a16="http://schemas.microsoft.com/office/drawing/2014/main" id="{5B58AEBF-CC00-4EB3-992E-D4901B40AAA9}"/>
+                <a16:creationId xmlns:a16="http://schemas.microsoft.com/office/drawing/2014/main" xmlns="" id="{5B58AEBF-CC00-4EB3-992E-D4901B40AAA9}"/>
               </a:ext>
             </a:extLst>
           </p:cNvPr>
@@ -1866,7 +2881,7 @@
           <p:cNvPr id="4" name="Espace réservé du contenu 3">
             <a:extLst>
               <a:ext uri="{FF2B5EF4-FFF2-40B4-BE49-F238E27FC236}">
-                <a16:creationId xmlns:a16="http://schemas.microsoft.com/office/drawing/2014/main" id="{D1AC2563-9C02-4FF6-AC5E-BD3104993299}"/>
+                <a16:creationId xmlns:a16="http://schemas.microsoft.com/office/drawing/2014/main" xmlns="" id="{D1AC2563-9C02-4FF6-AC5E-BD3104993299}"/>
               </a:ext>
             </a:extLst>
           </p:cNvPr>
@@ -1929,7 +2944,7 @@
           <p:cNvPr id="5" name="Espace réservé de la date 4">
             <a:extLst>
               <a:ext uri="{FF2B5EF4-FFF2-40B4-BE49-F238E27FC236}">
-                <a16:creationId xmlns:a16="http://schemas.microsoft.com/office/drawing/2014/main" id="{2DB32CB1-6FDC-4E55-8597-5B55A0D0EA32}"/>
+                <a16:creationId xmlns:a16="http://schemas.microsoft.com/office/drawing/2014/main" xmlns="" id="{2DB32CB1-6FDC-4E55-8597-5B55A0D0EA32}"/>
               </a:ext>
             </a:extLst>
           </p:cNvPr>
@@ -1947,7 +2962,7 @@
           <a:p>
             <a:fld id="{DCD882A2-DD72-4F80-A6AB-80BB922E5FBF}" type="datetimeFigureOut">
               <a:rPr lang="en-GB" smtClean="0"/>
-              <a:t>26/09/2020</a:t>
+              <a:t>01/10/2020</a:t>
             </a:fld>
             <a:endParaRPr lang="en-GB" dirty="0"/>
           </a:p>
@@ -1958,7 +2973,7 @@
           <p:cNvPr id="6" name="Espace réservé du pied de page 5">
             <a:extLst>
               <a:ext uri="{FF2B5EF4-FFF2-40B4-BE49-F238E27FC236}">
-                <a16:creationId xmlns:a16="http://schemas.microsoft.com/office/drawing/2014/main" id="{5216C04C-C11B-4D45-914C-335847044F86}"/>
+                <a16:creationId xmlns:a16="http://schemas.microsoft.com/office/drawing/2014/main" xmlns="" id="{5216C04C-C11B-4D45-914C-335847044F86}"/>
               </a:ext>
             </a:extLst>
           </p:cNvPr>
@@ -1983,7 +2998,7 @@
           <p:cNvPr id="7" name="Espace réservé du numéro de diapositive 6">
             <a:extLst>
               <a:ext uri="{FF2B5EF4-FFF2-40B4-BE49-F238E27FC236}">
-                <a16:creationId xmlns:a16="http://schemas.microsoft.com/office/drawing/2014/main" id="{94D47916-5038-4CB3-9CB7-F8FC9F8AD21B}"/>
+                <a16:creationId xmlns:a16="http://schemas.microsoft.com/office/drawing/2014/main" xmlns="" id="{94D47916-5038-4CB3-9CB7-F8FC9F8AD21B}"/>
               </a:ext>
             </a:extLst>
           </p:cNvPr>
@@ -2042,7 +3057,7 @@
           <p:cNvPr id="2" name="Titre 1">
             <a:extLst>
               <a:ext uri="{FF2B5EF4-FFF2-40B4-BE49-F238E27FC236}">
-                <a16:creationId xmlns:a16="http://schemas.microsoft.com/office/drawing/2014/main" id="{EE6DE7CE-1804-438D-92F3-8ECCE7FC6791}"/>
+                <a16:creationId xmlns:a16="http://schemas.microsoft.com/office/drawing/2014/main" xmlns="" id="{EE6DE7CE-1804-438D-92F3-8ECCE7FC6791}"/>
               </a:ext>
             </a:extLst>
           </p:cNvPr>
@@ -2076,7 +3091,7 @@
           <p:cNvPr id="3" name="Espace réservé du texte 2">
             <a:extLst>
               <a:ext uri="{FF2B5EF4-FFF2-40B4-BE49-F238E27FC236}">
-                <a16:creationId xmlns:a16="http://schemas.microsoft.com/office/drawing/2014/main" id="{1AEAF901-B2E6-4EFB-8256-2024C9F725DE}"/>
+                <a16:creationId xmlns:a16="http://schemas.microsoft.com/office/drawing/2014/main" xmlns="" id="{1AEAF901-B2E6-4EFB-8256-2024C9F725DE}"/>
               </a:ext>
             </a:extLst>
           </p:cNvPr>
@@ -2147,7 +3162,7 @@
           <p:cNvPr id="4" name="Espace réservé du contenu 3">
             <a:extLst>
               <a:ext uri="{FF2B5EF4-FFF2-40B4-BE49-F238E27FC236}">
-                <a16:creationId xmlns:a16="http://schemas.microsoft.com/office/drawing/2014/main" id="{4E0906BE-0FD6-4C59-891F-485B80865AB7}"/>
+                <a16:creationId xmlns:a16="http://schemas.microsoft.com/office/drawing/2014/main" xmlns="" id="{4E0906BE-0FD6-4C59-891F-485B80865AB7}"/>
               </a:ext>
             </a:extLst>
           </p:cNvPr>
@@ -2210,7 +3225,7 @@
           <p:cNvPr id="5" name="Espace réservé du texte 4">
             <a:extLst>
               <a:ext uri="{FF2B5EF4-FFF2-40B4-BE49-F238E27FC236}">
-                <a16:creationId xmlns:a16="http://schemas.microsoft.com/office/drawing/2014/main" id="{E9510595-D718-4D18-A662-38248708A406}"/>
+                <a16:creationId xmlns:a16="http://schemas.microsoft.com/office/drawing/2014/main" xmlns="" id="{E9510595-D718-4D18-A662-38248708A406}"/>
               </a:ext>
             </a:extLst>
           </p:cNvPr>
@@ -2281,7 +3296,7 @@
           <p:cNvPr id="6" name="Espace réservé du contenu 5">
             <a:extLst>
               <a:ext uri="{FF2B5EF4-FFF2-40B4-BE49-F238E27FC236}">
-                <a16:creationId xmlns:a16="http://schemas.microsoft.com/office/drawing/2014/main" id="{943853A8-6FB0-4188-82AE-071C2836EA4C}"/>
+                <a16:creationId xmlns:a16="http://schemas.microsoft.com/office/drawing/2014/main" xmlns="" id="{943853A8-6FB0-4188-82AE-071C2836EA4C}"/>
               </a:ext>
             </a:extLst>
           </p:cNvPr>
@@ -2344,7 +3359,7 @@
           <p:cNvPr id="7" name="Espace réservé de la date 6">
             <a:extLst>
               <a:ext uri="{FF2B5EF4-FFF2-40B4-BE49-F238E27FC236}">
-                <a16:creationId xmlns:a16="http://schemas.microsoft.com/office/drawing/2014/main" id="{D6E2BD8B-D645-423A-A613-EF6AE8CA5401}"/>
+                <a16:creationId xmlns:a16="http://schemas.microsoft.com/office/drawing/2014/main" xmlns="" id="{D6E2BD8B-D645-423A-A613-EF6AE8CA5401}"/>
               </a:ext>
             </a:extLst>
           </p:cNvPr>
@@ -2362,7 +3377,7 @@
           <a:p>
             <a:fld id="{DCD882A2-DD72-4F80-A6AB-80BB922E5FBF}" type="datetimeFigureOut">
               <a:rPr lang="en-GB" smtClean="0"/>
-              <a:t>26/09/2020</a:t>
+              <a:t>01/10/2020</a:t>
             </a:fld>
             <a:endParaRPr lang="en-GB" dirty="0"/>
           </a:p>
@@ -2373,7 +3388,7 @@
           <p:cNvPr id="8" name="Espace réservé du pied de page 7">
             <a:extLst>
               <a:ext uri="{FF2B5EF4-FFF2-40B4-BE49-F238E27FC236}">
-                <a16:creationId xmlns:a16="http://schemas.microsoft.com/office/drawing/2014/main" id="{1930F11A-0202-4F0A-B8CC-13773D6E17F7}"/>
+                <a16:creationId xmlns:a16="http://schemas.microsoft.com/office/drawing/2014/main" xmlns="" id="{1930F11A-0202-4F0A-B8CC-13773D6E17F7}"/>
               </a:ext>
             </a:extLst>
           </p:cNvPr>
@@ -2398,7 +3413,7 @@
           <p:cNvPr id="9" name="Espace réservé du numéro de diapositive 8">
             <a:extLst>
               <a:ext uri="{FF2B5EF4-FFF2-40B4-BE49-F238E27FC236}">
-                <a16:creationId xmlns:a16="http://schemas.microsoft.com/office/drawing/2014/main" id="{C2EBFF67-0B6C-41CB-B69D-58B7A1FCEAD8}"/>
+                <a16:creationId xmlns:a16="http://schemas.microsoft.com/office/drawing/2014/main" xmlns="" id="{C2EBFF67-0B6C-41CB-B69D-58B7A1FCEAD8}"/>
               </a:ext>
             </a:extLst>
           </p:cNvPr>
@@ -2457,7 +3472,7 @@
           <p:cNvPr id="2" name="Titre 1">
             <a:extLst>
               <a:ext uri="{FF2B5EF4-FFF2-40B4-BE49-F238E27FC236}">
-                <a16:creationId xmlns:a16="http://schemas.microsoft.com/office/drawing/2014/main" id="{5E1B6B80-0F0A-4418-9FF7-988FF646AB5C}"/>
+                <a16:creationId xmlns:a16="http://schemas.microsoft.com/office/drawing/2014/main" xmlns="" id="{5E1B6B80-0F0A-4418-9FF7-988FF646AB5C}"/>
               </a:ext>
             </a:extLst>
           </p:cNvPr>
@@ -2486,7 +3501,7 @@
           <p:cNvPr id="3" name="Espace réservé de la date 2">
             <a:extLst>
               <a:ext uri="{FF2B5EF4-FFF2-40B4-BE49-F238E27FC236}">
-                <a16:creationId xmlns:a16="http://schemas.microsoft.com/office/drawing/2014/main" id="{7C0B3F64-9335-40BA-999F-C11D959399C4}"/>
+                <a16:creationId xmlns:a16="http://schemas.microsoft.com/office/drawing/2014/main" xmlns="" id="{7C0B3F64-9335-40BA-999F-C11D959399C4}"/>
               </a:ext>
             </a:extLst>
           </p:cNvPr>
@@ -2504,7 +3519,7 @@
           <a:p>
             <a:fld id="{DCD882A2-DD72-4F80-A6AB-80BB922E5FBF}" type="datetimeFigureOut">
               <a:rPr lang="en-GB" smtClean="0"/>
-              <a:t>26/09/2020</a:t>
+              <a:t>01/10/2020</a:t>
             </a:fld>
             <a:endParaRPr lang="en-GB" dirty="0"/>
           </a:p>
@@ -2515,7 +3530,7 @@
           <p:cNvPr id="4" name="Espace réservé du pied de page 3">
             <a:extLst>
               <a:ext uri="{FF2B5EF4-FFF2-40B4-BE49-F238E27FC236}">
-                <a16:creationId xmlns:a16="http://schemas.microsoft.com/office/drawing/2014/main" id="{A95AA07E-E44B-40C4-904A-6B2F9984E576}"/>
+                <a16:creationId xmlns:a16="http://schemas.microsoft.com/office/drawing/2014/main" xmlns="" id="{A95AA07E-E44B-40C4-904A-6B2F9984E576}"/>
               </a:ext>
             </a:extLst>
           </p:cNvPr>
@@ -2540,7 +3555,7 @@
           <p:cNvPr id="5" name="Espace réservé du numéro de diapositive 4">
             <a:extLst>
               <a:ext uri="{FF2B5EF4-FFF2-40B4-BE49-F238E27FC236}">
-                <a16:creationId xmlns:a16="http://schemas.microsoft.com/office/drawing/2014/main" id="{114E8655-3895-4A33-BB09-1138AD2BB1F3}"/>
+                <a16:creationId xmlns:a16="http://schemas.microsoft.com/office/drawing/2014/main" xmlns="" id="{114E8655-3895-4A33-BB09-1138AD2BB1F3}"/>
               </a:ext>
             </a:extLst>
           </p:cNvPr>
@@ -2599,7 +3614,7 @@
           <p:cNvPr id="2" name="Espace réservé de la date 1">
             <a:extLst>
               <a:ext uri="{FF2B5EF4-FFF2-40B4-BE49-F238E27FC236}">
-                <a16:creationId xmlns:a16="http://schemas.microsoft.com/office/drawing/2014/main" id="{DF25D4A0-12F0-439C-BD13-D69D2E90A80F}"/>
+                <a16:creationId xmlns:a16="http://schemas.microsoft.com/office/drawing/2014/main" xmlns="" id="{DF25D4A0-12F0-439C-BD13-D69D2E90A80F}"/>
               </a:ext>
             </a:extLst>
           </p:cNvPr>
@@ -2617,7 +3632,7 @@
           <a:p>
             <a:fld id="{DCD882A2-DD72-4F80-A6AB-80BB922E5FBF}" type="datetimeFigureOut">
               <a:rPr lang="en-GB" smtClean="0"/>
-              <a:t>26/09/2020</a:t>
+              <a:t>01/10/2020</a:t>
             </a:fld>
             <a:endParaRPr lang="en-GB" dirty="0"/>
           </a:p>
@@ -2628,7 +3643,7 @@
           <p:cNvPr id="3" name="Espace réservé du pied de page 2">
             <a:extLst>
               <a:ext uri="{FF2B5EF4-FFF2-40B4-BE49-F238E27FC236}">
-                <a16:creationId xmlns:a16="http://schemas.microsoft.com/office/drawing/2014/main" id="{9404ED9A-37C7-4CD4-8544-B3E56ABA6E47}"/>
+                <a16:creationId xmlns:a16="http://schemas.microsoft.com/office/drawing/2014/main" xmlns="" id="{9404ED9A-37C7-4CD4-8544-B3E56ABA6E47}"/>
               </a:ext>
             </a:extLst>
           </p:cNvPr>
@@ -2653,7 +3668,7 @@
           <p:cNvPr id="4" name="Espace réservé du numéro de diapositive 3">
             <a:extLst>
               <a:ext uri="{FF2B5EF4-FFF2-40B4-BE49-F238E27FC236}">
-                <a16:creationId xmlns:a16="http://schemas.microsoft.com/office/drawing/2014/main" id="{AD368354-4F02-410F-B452-5F8092422E99}"/>
+                <a16:creationId xmlns:a16="http://schemas.microsoft.com/office/drawing/2014/main" xmlns="" id="{AD368354-4F02-410F-B452-5F8092422E99}"/>
               </a:ext>
             </a:extLst>
           </p:cNvPr>
@@ -2712,7 +3727,7 @@
           <p:cNvPr id="2" name="Titre 1">
             <a:extLst>
               <a:ext uri="{FF2B5EF4-FFF2-40B4-BE49-F238E27FC236}">
-                <a16:creationId xmlns:a16="http://schemas.microsoft.com/office/drawing/2014/main" id="{532ADDE6-48F7-491B-9EEB-E0CFCFAE8804}"/>
+                <a16:creationId xmlns:a16="http://schemas.microsoft.com/office/drawing/2014/main" xmlns="" id="{532ADDE6-48F7-491B-9EEB-E0CFCFAE8804}"/>
               </a:ext>
             </a:extLst>
           </p:cNvPr>
@@ -2750,7 +3765,7 @@
           <p:cNvPr id="3" name="Espace réservé du contenu 2">
             <a:extLst>
               <a:ext uri="{FF2B5EF4-FFF2-40B4-BE49-F238E27FC236}">
-                <a16:creationId xmlns:a16="http://schemas.microsoft.com/office/drawing/2014/main" id="{9A0582AD-F3CF-4B1C-8D7E-1CF8DA070BFB}"/>
+                <a16:creationId xmlns:a16="http://schemas.microsoft.com/office/drawing/2014/main" xmlns="" id="{9A0582AD-F3CF-4B1C-8D7E-1CF8DA070BFB}"/>
               </a:ext>
             </a:extLst>
           </p:cNvPr>
@@ -2841,7 +3856,7 @@
           <p:cNvPr id="4" name="Espace réservé du texte 3">
             <a:extLst>
               <a:ext uri="{FF2B5EF4-FFF2-40B4-BE49-F238E27FC236}">
-                <a16:creationId xmlns:a16="http://schemas.microsoft.com/office/drawing/2014/main" id="{CDEE0241-53C0-45BA-98AE-B40355BC499C}"/>
+                <a16:creationId xmlns:a16="http://schemas.microsoft.com/office/drawing/2014/main" xmlns="" id="{CDEE0241-53C0-45BA-98AE-B40355BC499C}"/>
               </a:ext>
             </a:extLst>
           </p:cNvPr>
@@ -2912,7 +3927,7 @@
           <p:cNvPr id="5" name="Espace réservé de la date 4">
             <a:extLst>
               <a:ext uri="{FF2B5EF4-FFF2-40B4-BE49-F238E27FC236}">
-                <a16:creationId xmlns:a16="http://schemas.microsoft.com/office/drawing/2014/main" id="{60609A82-974A-41D7-B24F-74B984890798}"/>
+                <a16:creationId xmlns:a16="http://schemas.microsoft.com/office/drawing/2014/main" xmlns="" id="{60609A82-974A-41D7-B24F-74B984890798}"/>
               </a:ext>
             </a:extLst>
           </p:cNvPr>
@@ -2930,7 +3945,7 @@
           <a:p>
             <a:fld id="{DCD882A2-DD72-4F80-A6AB-80BB922E5FBF}" type="datetimeFigureOut">
               <a:rPr lang="en-GB" smtClean="0"/>
-              <a:t>26/09/2020</a:t>
+              <a:t>01/10/2020</a:t>
             </a:fld>
             <a:endParaRPr lang="en-GB" dirty="0"/>
           </a:p>
@@ -2941,7 +3956,7 @@
           <p:cNvPr id="6" name="Espace réservé du pied de page 5">
             <a:extLst>
               <a:ext uri="{FF2B5EF4-FFF2-40B4-BE49-F238E27FC236}">
-                <a16:creationId xmlns:a16="http://schemas.microsoft.com/office/drawing/2014/main" id="{C970C28E-E1A0-45E4-93B9-216045297614}"/>
+                <a16:creationId xmlns:a16="http://schemas.microsoft.com/office/drawing/2014/main" xmlns="" id="{C970C28E-E1A0-45E4-93B9-216045297614}"/>
               </a:ext>
             </a:extLst>
           </p:cNvPr>
@@ -2966,7 +3981,7 @@
           <p:cNvPr id="7" name="Espace réservé du numéro de diapositive 6">
             <a:extLst>
               <a:ext uri="{FF2B5EF4-FFF2-40B4-BE49-F238E27FC236}">
-                <a16:creationId xmlns:a16="http://schemas.microsoft.com/office/drawing/2014/main" id="{498D67BA-5A09-432C-B808-23937F9ADC96}"/>
+                <a16:creationId xmlns:a16="http://schemas.microsoft.com/office/drawing/2014/main" xmlns="" id="{498D67BA-5A09-432C-B808-23937F9ADC96}"/>
               </a:ext>
             </a:extLst>
           </p:cNvPr>
@@ -3025,7 +4040,7 @@
           <p:cNvPr id="2" name="Titre 1">
             <a:extLst>
               <a:ext uri="{FF2B5EF4-FFF2-40B4-BE49-F238E27FC236}">
-                <a16:creationId xmlns:a16="http://schemas.microsoft.com/office/drawing/2014/main" id="{F2E0DACD-13BC-43FB-B1E0-B22645BDEBCE}"/>
+                <a16:creationId xmlns:a16="http://schemas.microsoft.com/office/drawing/2014/main" xmlns="" id="{F2E0DACD-13BC-43FB-B1E0-B22645BDEBCE}"/>
               </a:ext>
             </a:extLst>
           </p:cNvPr>
@@ -3063,7 +4078,7 @@
           <p:cNvPr id="3" name="Espace réservé pour une image  2">
             <a:extLst>
               <a:ext uri="{FF2B5EF4-FFF2-40B4-BE49-F238E27FC236}">
-                <a16:creationId xmlns:a16="http://schemas.microsoft.com/office/drawing/2014/main" id="{276D1F07-F43D-4E32-B947-4A4A6081DBFC}"/>
+                <a16:creationId xmlns:a16="http://schemas.microsoft.com/office/drawing/2014/main" xmlns="" id="{276D1F07-F43D-4E32-B947-4A4A6081DBFC}"/>
               </a:ext>
             </a:extLst>
           </p:cNvPr>
@@ -3130,7 +4145,7 @@
           <p:cNvPr id="4" name="Espace réservé du texte 3">
             <a:extLst>
               <a:ext uri="{FF2B5EF4-FFF2-40B4-BE49-F238E27FC236}">
-                <a16:creationId xmlns:a16="http://schemas.microsoft.com/office/drawing/2014/main" id="{9F8B9218-AB50-4D9F-B54E-C81D4450DDC3}"/>
+                <a16:creationId xmlns:a16="http://schemas.microsoft.com/office/drawing/2014/main" xmlns="" id="{9F8B9218-AB50-4D9F-B54E-C81D4450DDC3}"/>
               </a:ext>
             </a:extLst>
           </p:cNvPr>
@@ -3201,7 +4216,7 @@
           <p:cNvPr id="5" name="Espace réservé de la date 4">
             <a:extLst>
               <a:ext uri="{FF2B5EF4-FFF2-40B4-BE49-F238E27FC236}">
-                <a16:creationId xmlns:a16="http://schemas.microsoft.com/office/drawing/2014/main" id="{EC003829-24ED-4921-8854-A1DF8D768939}"/>
+                <a16:creationId xmlns:a16="http://schemas.microsoft.com/office/drawing/2014/main" xmlns="" id="{EC003829-24ED-4921-8854-A1DF8D768939}"/>
               </a:ext>
             </a:extLst>
           </p:cNvPr>
@@ -3219,7 +4234,7 @@
           <a:p>
             <a:fld id="{DCD882A2-DD72-4F80-A6AB-80BB922E5FBF}" type="datetimeFigureOut">
               <a:rPr lang="en-GB" smtClean="0"/>
-              <a:t>26/09/2020</a:t>
+              <a:t>01/10/2020</a:t>
             </a:fld>
             <a:endParaRPr lang="en-GB" dirty="0"/>
           </a:p>
@@ -3230,7 +4245,7 @@
           <p:cNvPr id="6" name="Espace réservé du pied de page 5">
             <a:extLst>
               <a:ext uri="{FF2B5EF4-FFF2-40B4-BE49-F238E27FC236}">
-                <a16:creationId xmlns:a16="http://schemas.microsoft.com/office/drawing/2014/main" id="{42928E3D-0B44-4C6A-99D0-CCCFF8FD2CE0}"/>
+                <a16:creationId xmlns:a16="http://schemas.microsoft.com/office/drawing/2014/main" xmlns="" id="{42928E3D-0B44-4C6A-99D0-CCCFF8FD2CE0}"/>
               </a:ext>
             </a:extLst>
           </p:cNvPr>
@@ -3255,7 +4270,7 @@
           <p:cNvPr id="7" name="Espace réservé du numéro de diapositive 6">
             <a:extLst>
               <a:ext uri="{FF2B5EF4-FFF2-40B4-BE49-F238E27FC236}">
-                <a16:creationId xmlns:a16="http://schemas.microsoft.com/office/drawing/2014/main" id="{3885E1CC-B383-4D7C-A565-8AD5768FC15A}"/>
+                <a16:creationId xmlns:a16="http://schemas.microsoft.com/office/drawing/2014/main" xmlns="" id="{3885E1CC-B383-4D7C-A565-8AD5768FC15A}"/>
               </a:ext>
             </a:extLst>
           </p:cNvPr>
@@ -3319,7 +4334,7 @@
           <p:cNvPr id="2" name="Espace réservé du titre 1">
             <a:extLst>
               <a:ext uri="{FF2B5EF4-FFF2-40B4-BE49-F238E27FC236}">
-                <a16:creationId xmlns:a16="http://schemas.microsoft.com/office/drawing/2014/main" id="{A649896A-D181-4C6A-A102-64120B1C840B}"/>
+                <a16:creationId xmlns:a16="http://schemas.microsoft.com/office/drawing/2014/main" xmlns="" id="{A649896A-D181-4C6A-A102-64120B1C840B}"/>
               </a:ext>
             </a:extLst>
           </p:cNvPr>
@@ -3358,7 +4373,7 @@
           <p:cNvPr id="3" name="Espace réservé du texte 2">
             <a:extLst>
               <a:ext uri="{FF2B5EF4-FFF2-40B4-BE49-F238E27FC236}">
-                <a16:creationId xmlns:a16="http://schemas.microsoft.com/office/drawing/2014/main" id="{18F8B4BF-987C-4DD9-90CE-D41F362065DC}"/>
+                <a16:creationId xmlns:a16="http://schemas.microsoft.com/office/drawing/2014/main" xmlns="" id="{18F8B4BF-987C-4DD9-90CE-D41F362065DC}"/>
               </a:ext>
             </a:extLst>
           </p:cNvPr>
@@ -3426,7 +4441,7 @@
           <p:cNvPr id="4" name="Espace réservé de la date 3">
             <a:extLst>
               <a:ext uri="{FF2B5EF4-FFF2-40B4-BE49-F238E27FC236}">
-                <a16:creationId xmlns:a16="http://schemas.microsoft.com/office/drawing/2014/main" id="{4B565221-4CE7-4A22-8435-CC6E9B131A88}"/>
+                <a16:creationId xmlns:a16="http://schemas.microsoft.com/office/drawing/2014/main" xmlns="" id="{4B565221-4CE7-4A22-8435-CC6E9B131A88}"/>
               </a:ext>
             </a:extLst>
           </p:cNvPr>
@@ -3462,7 +4477,7 @@
           <a:p>
             <a:fld id="{DCD882A2-DD72-4F80-A6AB-80BB922E5FBF}" type="datetimeFigureOut">
               <a:rPr lang="en-GB" smtClean="0"/>
-              <a:t>26/09/2020</a:t>
+              <a:t>01/10/2020</a:t>
             </a:fld>
             <a:endParaRPr lang="en-GB" dirty="0"/>
           </a:p>
@@ -3473,7 +4488,7 @@
           <p:cNvPr id="5" name="Espace réservé du pied de page 4">
             <a:extLst>
               <a:ext uri="{FF2B5EF4-FFF2-40B4-BE49-F238E27FC236}">
-                <a16:creationId xmlns:a16="http://schemas.microsoft.com/office/drawing/2014/main" id="{64618333-3851-4F4F-9D0A-6C6A85B7986F}"/>
+                <a16:creationId xmlns:a16="http://schemas.microsoft.com/office/drawing/2014/main" xmlns="" id="{64618333-3851-4F4F-9D0A-6C6A85B7986F}"/>
               </a:ext>
             </a:extLst>
           </p:cNvPr>
@@ -3516,7 +4531,7 @@
           <p:cNvPr id="6" name="Espace réservé du numéro de diapositive 5">
             <a:extLst>
               <a:ext uri="{FF2B5EF4-FFF2-40B4-BE49-F238E27FC236}">
-                <a16:creationId xmlns:a16="http://schemas.microsoft.com/office/drawing/2014/main" id="{7FB9699C-0E80-426A-A06E-7B1FF7B08558}"/>
+                <a16:creationId xmlns:a16="http://schemas.microsoft.com/office/drawing/2014/main" xmlns="" id="{7FB9699C-0E80-426A-A06E-7B1FF7B08558}"/>
               </a:ext>
             </a:extLst>
           </p:cNvPr>
@@ -3881,10 +4896,105 @@
       </p:grpSpPr>
       <p:sp>
         <p:nvSpPr>
-          <p:cNvPr id="4" name="Ellipse 3">
-            <a:extLst>
-              <a:ext uri="{FF2B5EF4-FFF2-40B4-BE49-F238E27FC236}">
-                <a16:creationId xmlns:a16="http://schemas.microsoft.com/office/drawing/2014/main" id="{89FCD844-DF7E-40C9-9D11-022F7FE63189}"/>
+          <p:cNvPr id="2" name="Titre 1"/>
+          <p:cNvSpPr>
+            <a:spLocks noGrp="1"/>
+          </p:cNvSpPr>
+          <p:nvPr>
+            <p:ph type="title"/>
+          </p:nvPr>
+        </p:nvSpPr>
+        <p:spPr>
+          <a:xfrm>
+            <a:off x="903514" y="2705554"/>
+            <a:ext cx="10515600" cy="1325563"/>
+          </a:xfrm>
+        </p:spPr>
+        <p:txBody>
+          <a:bodyPr/>
+          <a:lstStyle/>
+          <a:p>
+            <a:pPr algn="ctr"/>
+            <a:r>
+              <a:rPr lang="fr-FR" b="1" dirty="0" smtClean="0"/>
+              <a:t>3.Streams state</a:t>
+            </a:r>
+            <a:endParaRPr lang="fr-FR" b="1" dirty="0"/>
+          </a:p>
+        </p:txBody>
+      </p:sp>
+    </p:spTree>
+    <p:extLst>
+      <p:ext uri="{BB962C8B-B14F-4D97-AF65-F5344CB8AC3E}">
+        <p14:creationId xmlns:p14="http://schemas.microsoft.com/office/powerpoint/2010/main" val="2168963345"/>
+      </p:ext>
+    </p:extLst>
+  </p:cSld>
+  <p:clrMapOvr>
+    <a:masterClrMapping/>
+  </p:clrMapOvr>
+</p:sld>
+</file>
+
+<file path=ppt/slides/slide10.xml><?xml version="1.0" encoding="utf-8"?>
+<p:sld xmlns:a="http://schemas.openxmlformats.org/drawingml/2006/main" xmlns:r="http://schemas.openxmlformats.org/officeDocument/2006/relationships" xmlns:p="http://schemas.openxmlformats.org/presentationml/2006/main">
+  <p:cSld>
+    <p:spTree>
+      <p:nvGrpSpPr>
+        <p:cNvPr id="1" name=""/>
+        <p:cNvGrpSpPr/>
+        <p:nvPr/>
+      </p:nvGrpSpPr>
+      <p:grpSpPr>
+        <a:xfrm>
+          <a:off x="0" y="0"/>
+          <a:ext cx="0" cy="0"/>
+          <a:chOff x="0" y="0"/>
+          <a:chExt cx="0" cy="0"/>
+        </a:xfrm>
+      </p:grpSpPr>
+      <p:sp>
+        <p:nvSpPr>
+          <p:cNvPr id="5" name="ZoneTexte 4">
+            <a:extLst>
+              <a:ext uri="{FF2B5EF4-FFF2-40B4-BE49-F238E27FC236}">
+                <a16:creationId xmlns:a16="http://schemas.microsoft.com/office/drawing/2014/main" xmlns="" id="{25D0CFDD-F8D9-4498-A666-F31BA473AEDD}"/>
+              </a:ext>
+            </a:extLst>
+          </p:cNvPr>
+          <p:cNvSpPr txBox="1"/>
+          <p:nvPr/>
+        </p:nvSpPr>
+        <p:spPr>
+          <a:xfrm>
+            <a:off x="9308369" y="0"/>
+            <a:ext cx="2883631" cy="523220"/>
+          </a:xfrm>
+          <a:prstGeom prst="rect">
+            <a:avLst/>
+          </a:prstGeom>
+          <a:noFill/>
+        </p:spPr>
+        <p:txBody>
+          <a:bodyPr wrap="square">
+            <a:spAutoFit/>
+          </a:bodyPr>
+          <a:lstStyle/>
+          <a:p>
+            <a:r>
+              <a:rPr lang="en-GB" sz="2800" b="1" dirty="0" smtClean="0"/>
+              <a:t>Connection Errors</a:t>
+            </a:r>
+            <a:endParaRPr lang="en-GB" sz="2800" b="1" dirty="0"/>
+          </a:p>
+        </p:txBody>
+      </p:sp>
+      <p:sp>
+        <p:nvSpPr>
+          <p:cNvPr id="24" name="Ellipse 23">
+            <a:extLst>
+              <a:ext uri="{FF2B5EF4-FFF2-40B4-BE49-F238E27FC236}">
+                <a16:creationId xmlns:a16="http://schemas.microsoft.com/office/drawing/2014/main" xmlns="" id="{89FCD844-DF7E-40C9-9D11-022F7FE63189}"/>
               </a:ext>
             </a:extLst>
           </p:cNvPr>
@@ -3893,7 +5003,7 @@
         </p:nvSpPr>
         <p:spPr>
           <a:xfrm>
-            <a:off x="1652953" y="1459524"/>
+            <a:off x="3582977" y="2420721"/>
             <a:ext cx="1494693" cy="931985"/>
           </a:xfrm>
           <a:prstGeom prst="ellipse">
@@ -3922,19 +5032,95 @@
           <a:p>
             <a:pPr algn="ctr"/>
             <a:r>
-              <a:rPr lang="fr-BE" b="1" dirty="0"/>
-              <a:t>Ready </a:t>
-            </a:r>
-            <a:endParaRPr lang="en-GB" b="1" dirty="0"/>
-          </a:p>
-        </p:txBody>
-      </p:sp>
-      <p:sp>
-        <p:nvSpPr>
-          <p:cNvPr id="5" name="Ellipse 4">
-            <a:extLst>
-              <a:ext uri="{FF2B5EF4-FFF2-40B4-BE49-F238E27FC236}">
-                <a16:creationId xmlns:a16="http://schemas.microsoft.com/office/drawing/2014/main" id="{04266D3A-83FA-4DC5-B077-3FE3BE66996C}"/>
+              <a:rPr lang="fr-BE" sz="1400" b="1" dirty="0" smtClean="0"/>
+              <a:t>Error detected</a:t>
+            </a:r>
+            <a:endParaRPr lang="en-GB" sz="1400" b="1" dirty="0"/>
+          </a:p>
+        </p:txBody>
+      </p:sp>
+      <p:cxnSp>
+        <p:nvCxnSpPr>
+          <p:cNvPr id="12" name="Connecteur droit avec flèche 11"/>
+          <p:cNvCxnSpPr>
+            <a:endCxn id="24" idx="0"/>
+          </p:cNvCxnSpPr>
+          <p:nvPr/>
+        </p:nvCxnSpPr>
+        <p:spPr>
+          <a:xfrm>
+            <a:off x="4330323" y="1556657"/>
+            <a:ext cx="1" cy="864064"/>
+          </a:xfrm>
+          <a:prstGeom prst="straightConnector1">
+            <a:avLst/>
+          </a:prstGeom>
+          <a:ln>
+            <a:tailEnd type="triangle"/>
+          </a:ln>
+        </p:spPr>
+        <p:style>
+          <a:lnRef idx="1">
+            <a:schemeClr val="dk1"/>
+          </a:lnRef>
+          <a:fillRef idx="0">
+            <a:schemeClr val="dk1"/>
+          </a:fillRef>
+          <a:effectRef idx="0">
+            <a:schemeClr val="dk1"/>
+          </a:effectRef>
+          <a:fontRef idx="minor">
+            <a:schemeClr val="tx1"/>
+          </a:fontRef>
+        </p:style>
+      </p:cxnSp>
+      <p:sp>
+        <p:nvSpPr>
+          <p:cNvPr id="32" name="ZoneTexte 31">
+            <a:extLst>
+              <a:ext uri="{FF2B5EF4-FFF2-40B4-BE49-F238E27FC236}">
+                <a16:creationId xmlns:a16="http://schemas.microsoft.com/office/drawing/2014/main" xmlns="" id="{479D2F68-32D5-4E80-B573-2C6156DCB22F}"/>
+              </a:ext>
+            </a:extLst>
+          </p:cNvPr>
+          <p:cNvSpPr txBox="1"/>
+          <p:nvPr/>
+        </p:nvSpPr>
+        <p:spPr>
+          <a:xfrm>
+            <a:off x="3582977" y="1033437"/>
+            <a:ext cx="2786276" cy="523220"/>
+          </a:xfrm>
+          <a:prstGeom prst="rect">
+            <a:avLst/>
+          </a:prstGeom>
+          <a:noFill/>
+        </p:spPr>
+        <p:txBody>
+          <a:bodyPr wrap="none" rtlCol="0">
+            <a:spAutoFit/>
+          </a:bodyPr>
+          <a:lstStyle/>
+          <a:p>
+            <a:r>
+              <a:rPr lang="fr-BE" sz="1400" dirty="0" smtClean="0"/>
+              <a:t>Obvious violation entire connection</a:t>
+            </a:r>
+          </a:p>
+          <a:p>
+            <a:r>
+              <a:rPr lang="fr-BE" sz="1400" dirty="0" smtClean="0"/>
+              <a:t>| corruption of state</a:t>
+            </a:r>
+          </a:p>
+        </p:txBody>
+      </p:sp>
+      <p:sp>
+        <p:nvSpPr>
+          <p:cNvPr id="33" name="Ellipse 32">
+            <a:extLst>
+              <a:ext uri="{FF2B5EF4-FFF2-40B4-BE49-F238E27FC236}">
+                <a16:creationId xmlns:a16="http://schemas.microsoft.com/office/drawing/2014/main" xmlns="" id="{89FCD844-DF7E-40C9-9D11-022F7FE63189}"/>
               </a:ext>
             </a:extLst>
           </p:cNvPr>
@@ -3943,14 +5129,152 @@
         </p:nvSpPr>
         <p:spPr>
           <a:xfrm>
-            <a:off x="1652952" y="4809393"/>
+            <a:off x="6924891" y="2420721"/>
             <a:ext cx="1494693" cy="931985"/>
           </a:xfrm>
           <a:prstGeom prst="ellipse">
             <a:avLst/>
           </a:prstGeom>
+        </p:spPr>
+        <p:style>
+          <a:lnRef idx="2">
+            <a:schemeClr val="accent2">
+              <a:shade val="50000"/>
+            </a:schemeClr>
+          </a:lnRef>
+          <a:fillRef idx="1">
+            <a:schemeClr val="accent2"/>
+          </a:fillRef>
+          <a:effectRef idx="0">
+            <a:schemeClr val="accent2"/>
+          </a:effectRef>
+          <a:fontRef idx="minor">
+            <a:schemeClr val="lt1"/>
+          </a:fontRef>
+        </p:style>
+        <p:txBody>
+          <a:bodyPr rtlCol="0" anchor="ctr"/>
+          <a:lstStyle/>
+          <a:p>
+            <a:pPr algn="ctr"/>
+            <a:r>
+              <a:rPr lang="fr-BE" sz="1400" b="1" dirty="0" smtClean="0"/>
+              <a:t>Error Sign</a:t>
+            </a:r>
+            <a:r>
+              <a:rPr lang="fr-BE" sz="1400" b="1" dirty="0" smtClean="0"/>
+              <a:t>aled</a:t>
+            </a:r>
+            <a:endParaRPr lang="en-GB" sz="1400" b="1" dirty="0"/>
+          </a:p>
+        </p:txBody>
+      </p:sp>
+      <p:cxnSp>
+        <p:nvCxnSpPr>
+          <p:cNvPr id="34" name="Connecteur droit avec flèche 33">
+            <a:extLst>
+              <a:ext uri="{FF2B5EF4-FFF2-40B4-BE49-F238E27FC236}">
+                <a16:creationId xmlns:a16="http://schemas.microsoft.com/office/drawing/2014/main" xmlns="" id="{6589CEFF-63AD-48E0-B8C2-2B9C42EE3BA1}"/>
+              </a:ext>
+            </a:extLst>
+          </p:cNvPr>
+          <p:cNvCxnSpPr>
+            <a:stCxn id="24" idx="6"/>
+            <a:endCxn id="33" idx="2"/>
+          </p:cNvCxnSpPr>
+          <p:nvPr/>
+        </p:nvCxnSpPr>
+        <p:spPr>
+          <a:xfrm>
+            <a:off x="5077670" y="2886714"/>
+            <a:ext cx="1847221" cy="0"/>
+          </a:xfrm>
+          <a:prstGeom prst="straightConnector1">
+            <a:avLst/>
+          </a:prstGeom>
+          <a:ln w="28575">
+            <a:tailEnd type="triangle"/>
+          </a:ln>
+        </p:spPr>
+        <p:style>
+          <a:lnRef idx="1">
+            <a:schemeClr val="dk1"/>
+          </a:lnRef>
+          <a:fillRef idx="0">
+            <a:schemeClr val="dk1"/>
+          </a:fillRef>
+          <a:effectRef idx="0">
+            <a:schemeClr val="dk1"/>
+          </a:effectRef>
+          <a:fontRef idx="minor">
+            <a:schemeClr val="tx1"/>
+          </a:fontRef>
+        </p:style>
+      </p:cxnSp>
+      <p:sp>
+        <p:nvSpPr>
+          <p:cNvPr id="36" name="ZoneTexte 35">
+            <a:extLst>
+              <a:ext uri="{FF2B5EF4-FFF2-40B4-BE49-F238E27FC236}">
+                <a16:creationId xmlns:a16="http://schemas.microsoft.com/office/drawing/2014/main" xmlns="" id="{479D2F68-32D5-4E80-B573-2C6156DCB22F}"/>
+              </a:ext>
+            </a:extLst>
+          </p:cNvPr>
+          <p:cNvSpPr txBox="1"/>
+          <p:nvPr/>
+        </p:nvSpPr>
+        <p:spPr>
+          <a:xfrm>
+            <a:off x="5088041" y="2578936"/>
+            <a:ext cx="1836850" cy="307777"/>
+          </a:xfrm>
+          <a:prstGeom prst="rect">
+            <a:avLst/>
+          </a:prstGeom>
+          <a:noFill/>
+        </p:spPr>
+        <p:txBody>
+          <a:bodyPr wrap="none" rtlCol="0">
+            <a:spAutoFit/>
+          </a:bodyPr>
+          <a:lstStyle/>
+          <a:p>
+            <a:r>
+              <a:rPr lang="fr-BE" sz="1400" dirty="0"/>
+              <a:t>s</a:t>
+            </a:r>
+            <a:r>
+              <a:rPr lang="fr-BE" sz="1400" dirty="0" smtClean="0"/>
+              <a:t>.CONNECTION_CLOSE</a:t>
+            </a:r>
+            <a:endParaRPr lang="en-GB" sz="1400" dirty="0"/>
+          </a:p>
+        </p:txBody>
+      </p:sp>
+      <p:sp>
+        <p:nvSpPr>
+          <p:cNvPr id="37" name="Ellipse 36">
+            <a:extLst>
+              <a:ext uri="{FF2B5EF4-FFF2-40B4-BE49-F238E27FC236}">
+                <a16:creationId xmlns:a16="http://schemas.microsoft.com/office/drawing/2014/main" xmlns="" id="{D18BD9DA-F640-40D8-890E-826C2DD83CAC}"/>
+              </a:ext>
+            </a:extLst>
+          </p:cNvPr>
+          <p:cNvSpPr/>
+          <p:nvPr/>
+        </p:nvSpPr>
+        <p:spPr>
+          <a:xfrm>
+            <a:off x="6924890" y="4216770"/>
+            <a:ext cx="1494693" cy="931985"/>
+          </a:xfrm>
+          <a:prstGeom prst="ellipse">
+            <a:avLst/>
+          </a:prstGeom>
           <a:solidFill>
-            <a:srgbClr val="C00000"/>
+            <a:schemeClr val="accent6">
+              <a:lumMod val="75000"/>
+            </a:schemeClr>
           </a:solidFill>
         </p:spPr>
         <p:style>
@@ -3975,253 +5299,31 @@
           <a:p>
             <a:pPr algn="ctr"/>
             <a:r>
-              <a:rPr lang="fr-BE" b="1" dirty="0"/>
-              <a:t>Send </a:t>
-            </a:r>
-            <a:endParaRPr lang="en-GB" b="1" dirty="0"/>
-          </a:p>
-        </p:txBody>
-      </p:sp>
-      <p:sp>
-        <p:nvSpPr>
-          <p:cNvPr id="6" name="Ellipse 5">
-            <a:extLst>
-              <a:ext uri="{FF2B5EF4-FFF2-40B4-BE49-F238E27FC236}">
-                <a16:creationId xmlns:a16="http://schemas.microsoft.com/office/drawing/2014/main" id="{20EF6430-F8E7-4FD1-9FFC-35EEC2563371}"/>
-              </a:ext>
-            </a:extLst>
-          </p:cNvPr>
-          <p:cNvSpPr/>
-          <p:nvPr/>
-        </p:nvSpPr>
-        <p:spPr>
-          <a:xfrm>
-            <a:off x="5348653" y="4809393"/>
-            <a:ext cx="1494693" cy="931985"/>
-          </a:xfrm>
-          <a:prstGeom prst="ellipse">
-            <a:avLst/>
-          </a:prstGeom>
-          <a:solidFill>
-            <a:srgbClr val="C00000"/>
-          </a:solidFill>
-        </p:spPr>
-        <p:style>
-          <a:lnRef idx="2">
-            <a:schemeClr val="accent1">
-              <a:shade val="50000"/>
-            </a:schemeClr>
-          </a:lnRef>
-          <a:fillRef idx="1">
-            <a:schemeClr val="accent1"/>
-          </a:fillRef>
-          <a:effectRef idx="0">
-            <a:schemeClr val="accent1"/>
-          </a:effectRef>
-          <a:fontRef idx="minor">
-            <a:schemeClr val="lt1"/>
-          </a:fontRef>
-        </p:style>
-        <p:txBody>
-          <a:bodyPr rtlCol="0" anchor="ctr"/>
-          <a:lstStyle/>
-          <a:p>
-            <a:pPr algn="ctr"/>
-            <a:r>
-              <a:rPr lang="fr-BE" b="1" dirty="0"/>
-              <a:t>Data Sent </a:t>
-            </a:r>
-            <a:endParaRPr lang="en-GB" b="1" dirty="0"/>
-          </a:p>
-        </p:txBody>
-      </p:sp>
-      <p:sp>
-        <p:nvSpPr>
-          <p:cNvPr id="7" name="Ellipse 6">
-            <a:extLst>
-              <a:ext uri="{FF2B5EF4-FFF2-40B4-BE49-F238E27FC236}">
-                <a16:creationId xmlns:a16="http://schemas.microsoft.com/office/drawing/2014/main" id="{A05BD43F-3BA6-4D44-9A89-6240DC624C9A}"/>
-              </a:ext>
-            </a:extLst>
-          </p:cNvPr>
-          <p:cNvSpPr/>
-          <p:nvPr/>
-        </p:nvSpPr>
-        <p:spPr>
-          <a:xfrm>
-            <a:off x="5348652" y="1459523"/>
-            <a:ext cx="1494693" cy="931985"/>
-          </a:xfrm>
-          <a:prstGeom prst="ellipse">
-            <a:avLst/>
-          </a:prstGeom>
-          <a:solidFill>
-            <a:srgbClr val="C00000"/>
-          </a:solidFill>
-        </p:spPr>
-        <p:style>
-          <a:lnRef idx="2">
-            <a:schemeClr val="accent1">
-              <a:shade val="50000"/>
-            </a:schemeClr>
-          </a:lnRef>
-          <a:fillRef idx="1">
-            <a:schemeClr val="accent1"/>
-          </a:fillRef>
-          <a:effectRef idx="0">
-            <a:schemeClr val="accent1"/>
-          </a:effectRef>
-          <a:fontRef idx="minor">
-            <a:schemeClr val="lt1"/>
-          </a:fontRef>
-        </p:style>
-        <p:txBody>
-          <a:bodyPr rtlCol="0" anchor="ctr"/>
-          <a:lstStyle/>
-          <a:p>
-            <a:pPr algn="ctr"/>
-            <a:r>
-              <a:rPr lang="fr-BE" b="1" dirty="0"/>
-              <a:t>Reset Sent </a:t>
-            </a:r>
-            <a:endParaRPr lang="en-GB" b="1" dirty="0"/>
-          </a:p>
-        </p:txBody>
-      </p:sp>
-      <p:sp>
-        <p:nvSpPr>
-          <p:cNvPr id="8" name="Ellipse 7">
-            <a:extLst>
-              <a:ext uri="{FF2B5EF4-FFF2-40B4-BE49-F238E27FC236}">
-                <a16:creationId xmlns:a16="http://schemas.microsoft.com/office/drawing/2014/main" id="{D18BD9DA-F640-40D8-890E-826C2DD83CAC}"/>
-              </a:ext>
-            </a:extLst>
-          </p:cNvPr>
-          <p:cNvSpPr/>
-          <p:nvPr/>
-        </p:nvSpPr>
-        <p:spPr>
-          <a:xfrm>
-            <a:off x="9044354" y="1459522"/>
-            <a:ext cx="1494693" cy="931985"/>
-          </a:xfrm>
-          <a:prstGeom prst="ellipse">
-            <a:avLst/>
-          </a:prstGeom>
-          <a:solidFill>
-            <a:schemeClr val="accent6">
-              <a:lumMod val="75000"/>
-            </a:schemeClr>
-          </a:solidFill>
-        </p:spPr>
-        <p:style>
-          <a:lnRef idx="2">
-            <a:schemeClr val="accent1">
-              <a:shade val="50000"/>
-            </a:schemeClr>
-          </a:lnRef>
-          <a:fillRef idx="1">
-            <a:schemeClr val="accent1"/>
-          </a:fillRef>
-          <a:effectRef idx="0">
-            <a:schemeClr val="accent1"/>
-          </a:effectRef>
-          <a:fontRef idx="minor">
-            <a:schemeClr val="lt1"/>
-          </a:fontRef>
-        </p:style>
-        <p:txBody>
-          <a:bodyPr rtlCol="0" anchor="ctr"/>
-          <a:lstStyle/>
-          <a:p>
-            <a:pPr algn="ctr"/>
-            <a:r>
-              <a:rPr lang="fr-BE" b="1" dirty="0"/>
-              <a:t>Reset Recvd </a:t>
-            </a:r>
-            <a:endParaRPr lang="en-GB" b="1" dirty="0"/>
-          </a:p>
-        </p:txBody>
-      </p:sp>
-      <p:sp>
-        <p:nvSpPr>
-          <p:cNvPr id="9" name="Ellipse 8">
-            <a:extLst>
-              <a:ext uri="{FF2B5EF4-FFF2-40B4-BE49-F238E27FC236}">
-                <a16:creationId xmlns:a16="http://schemas.microsoft.com/office/drawing/2014/main" id="{C9FE4625-6D4C-4C81-B023-2ED8433BE05F}"/>
-              </a:ext>
-            </a:extLst>
-          </p:cNvPr>
-          <p:cNvSpPr/>
-          <p:nvPr/>
-        </p:nvSpPr>
-        <p:spPr>
-          <a:xfrm>
-            <a:off x="9044354" y="4809392"/>
-            <a:ext cx="1494693" cy="931985"/>
-          </a:xfrm>
-          <a:prstGeom prst="ellipse">
-            <a:avLst/>
-          </a:prstGeom>
-          <a:solidFill>
-            <a:schemeClr val="accent6">
-              <a:lumMod val="75000"/>
-            </a:schemeClr>
-          </a:solidFill>
-        </p:spPr>
-        <p:style>
-          <a:lnRef idx="2">
-            <a:schemeClr val="accent1">
-              <a:shade val="50000"/>
-            </a:schemeClr>
-          </a:lnRef>
-          <a:fillRef idx="1">
-            <a:schemeClr val="accent1"/>
-          </a:fillRef>
-          <a:effectRef idx="0">
-            <a:schemeClr val="accent1"/>
-          </a:effectRef>
-          <a:fontRef idx="minor">
-            <a:schemeClr val="lt1"/>
-          </a:fontRef>
-        </p:style>
-        <p:txBody>
-          <a:bodyPr rtlCol="0" anchor="ctr"/>
-          <a:lstStyle/>
-          <a:p>
-            <a:pPr algn="ctr"/>
-            <a:r>
-              <a:rPr lang="fr-BE" b="1" dirty="0"/>
-              <a:t>Data Recvd </a:t>
-            </a:r>
-            <a:endParaRPr lang="en-GB" b="1" dirty="0"/>
+              <a:rPr lang="fr-BE" sz="1400" b="1" dirty="0" smtClean="0"/>
+              <a:t>Connection close</a:t>
+            </a:r>
+            <a:endParaRPr lang="en-GB" sz="1400" b="1" dirty="0"/>
           </a:p>
         </p:txBody>
       </p:sp>
       <p:cxnSp>
         <p:nvCxnSpPr>
-          <p:cNvPr id="11" name="Connecteur droit avec flèche 10">
-            <a:extLst>
-              <a:ext uri="{FF2B5EF4-FFF2-40B4-BE49-F238E27FC236}">
-                <a16:creationId xmlns:a16="http://schemas.microsoft.com/office/drawing/2014/main" id="{FA4799A5-0298-4D1C-A51C-8C4AC1ECF70E}"/>
-              </a:ext>
-            </a:extLst>
-          </p:cNvPr>
+          <p:cNvPr id="40" name="Connecteur droit avec flèche 39"/>
           <p:cNvCxnSpPr>
-            <a:stCxn id="4" idx="6"/>
-            <a:endCxn id="7" idx="2"/>
+            <a:stCxn id="33" idx="4"/>
+            <a:endCxn id="37" idx="0"/>
           </p:cNvCxnSpPr>
           <p:nvPr/>
         </p:nvCxnSpPr>
         <p:spPr>
-          <a:xfrm flipV="1">
-            <a:off x="3147646" y="1925516"/>
-            <a:ext cx="2201006" cy="1"/>
+          <a:xfrm flipH="1">
+            <a:off x="7672237" y="3352706"/>
+            <a:ext cx="1" cy="864064"/>
           </a:xfrm>
           <a:prstGeom prst="straightConnector1">
             <a:avLst/>
           </a:prstGeom>
-          <a:ln w="28575">
+          <a:ln>
             <a:tailEnd type="triangle"/>
           </a:ln>
         </p:spPr>
@@ -4240,27 +5342,175 @@
           </a:fontRef>
         </p:style>
       </p:cxnSp>
+      <p:sp>
+        <p:nvSpPr>
+          <p:cNvPr id="41" name="ZoneTexte 40">
+            <a:extLst>
+              <a:ext uri="{FF2B5EF4-FFF2-40B4-BE49-F238E27FC236}">
+                <a16:creationId xmlns:a16="http://schemas.microsoft.com/office/drawing/2014/main" xmlns="" id="{479D2F68-32D5-4E80-B573-2C6156DCB22F}"/>
+              </a:ext>
+            </a:extLst>
+          </p:cNvPr>
+          <p:cNvSpPr txBox="1"/>
+          <p:nvPr/>
+        </p:nvSpPr>
+        <p:spPr>
+          <a:xfrm>
+            <a:off x="7742220" y="3630849"/>
+            <a:ext cx="1024511" cy="307777"/>
+          </a:xfrm>
+          <a:prstGeom prst="rect">
+            <a:avLst/>
+          </a:prstGeom>
+          <a:noFill/>
+        </p:spPr>
+        <p:txBody>
+          <a:bodyPr wrap="none" rtlCol="0">
+            <a:spAutoFit/>
+          </a:bodyPr>
+          <a:lstStyle/>
+          <a:p>
+            <a:r>
+              <a:rPr lang="fr-BE" sz="1400" dirty="0" smtClean="0"/>
+              <a:t>[May close]</a:t>
+            </a:r>
+            <a:endParaRPr lang="en-GB" sz="1400" dirty="0"/>
+          </a:p>
+        </p:txBody>
+      </p:sp>
+    </p:spTree>
+    <p:extLst>
+      <p:ext uri="{BB962C8B-B14F-4D97-AF65-F5344CB8AC3E}">
+        <p14:creationId xmlns:p14="http://schemas.microsoft.com/office/powerpoint/2010/main" val="2441797121"/>
+      </p:ext>
+    </p:extLst>
+  </p:cSld>
+  <p:clrMapOvr>
+    <a:masterClrMapping/>
+  </p:clrMapOvr>
+</p:sld>
+</file>
+
+<file path=ppt/slides/slide11.xml><?xml version="1.0" encoding="utf-8"?>
+<p:sld xmlns:a="http://schemas.openxmlformats.org/drawingml/2006/main" xmlns:r="http://schemas.openxmlformats.org/officeDocument/2006/relationships" xmlns:p="http://schemas.openxmlformats.org/presentationml/2006/main">
+  <p:cSld>
+    <p:spTree>
+      <p:nvGrpSpPr>
+        <p:cNvPr id="1" name=""/>
+        <p:cNvGrpSpPr/>
+        <p:nvPr/>
+      </p:nvGrpSpPr>
+      <p:grpSpPr>
+        <a:xfrm>
+          <a:off x="0" y="0"/>
+          <a:ext cx="0" cy="0"/>
+          <a:chOff x="0" y="0"/>
+          <a:chExt cx="0" cy="0"/>
+        </a:xfrm>
+      </p:grpSpPr>
+      <p:sp>
+        <p:nvSpPr>
+          <p:cNvPr id="5" name="ZoneTexte 4">
+            <a:extLst>
+              <a:ext uri="{FF2B5EF4-FFF2-40B4-BE49-F238E27FC236}">
+                <a16:creationId xmlns:a16="http://schemas.microsoft.com/office/drawing/2014/main" xmlns="" id="{25D0CFDD-F8D9-4498-A666-F31BA473AEDD}"/>
+              </a:ext>
+            </a:extLst>
+          </p:cNvPr>
+          <p:cNvSpPr txBox="1"/>
+          <p:nvPr/>
+        </p:nvSpPr>
+        <p:spPr>
+          <a:xfrm>
+            <a:off x="9308369" y="0"/>
+            <a:ext cx="2883631" cy="523220"/>
+          </a:xfrm>
+          <a:prstGeom prst="rect">
+            <a:avLst/>
+          </a:prstGeom>
+          <a:noFill/>
+        </p:spPr>
+        <p:txBody>
+          <a:bodyPr wrap="square">
+            <a:spAutoFit/>
+          </a:bodyPr>
+          <a:lstStyle/>
+          <a:p>
+            <a:r>
+              <a:rPr lang="en-GB" sz="2800" b="1" dirty="0" smtClean="0"/>
+              <a:t>Stream Errors</a:t>
+            </a:r>
+            <a:endParaRPr lang="en-GB" sz="2800" b="1" dirty="0"/>
+          </a:p>
+        </p:txBody>
+      </p:sp>
+      <p:sp>
+        <p:nvSpPr>
+          <p:cNvPr id="3" name="Ellipse 2">
+            <a:extLst>
+              <a:ext uri="{FF2B5EF4-FFF2-40B4-BE49-F238E27FC236}">
+                <a16:creationId xmlns:a16="http://schemas.microsoft.com/office/drawing/2014/main" xmlns="" id="{89FCD844-DF7E-40C9-9D11-022F7FE63189}"/>
+              </a:ext>
+            </a:extLst>
+          </p:cNvPr>
+          <p:cNvSpPr/>
+          <p:nvPr/>
+        </p:nvSpPr>
+        <p:spPr>
+          <a:xfrm>
+            <a:off x="3713606" y="3150064"/>
+            <a:ext cx="1494693" cy="931985"/>
+          </a:xfrm>
+          <a:prstGeom prst="ellipse">
+            <a:avLst/>
+          </a:prstGeom>
+        </p:spPr>
+        <p:style>
+          <a:lnRef idx="2">
+            <a:schemeClr val="accent2">
+              <a:shade val="50000"/>
+            </a:schemeClr>
+          </a:lnRef>
+          <a:fillRef idx="1">
+            <a:schemeClr val="accent2"/>
+          </a:fillRef>
+          <a:effectRef idx="0">
+            <a:schemeClr val="accent2"/>
+          </a:effectRef>
+          <a:fontRef idx="minor">
+            <a:schemeClr val="lt1"/>
+          </a:fontRef>
+        </p:style>
+        <p:txBody>
+          <a:bodyPr rtlCol="0" anchor="ctr"/>
+          <a:lstStyle/>
+          <a:p>
+            <a:pPr algn="ctr"/>
+            <a:r>
+              <a:rPr lang="fr-BE" sz="1400" b="1" dirty="0" smtClean="0"/>
+              <a:t>Error detected</a:t>
+            </a:r>
+            <a:endParaRPr lang="en-GB" sz="1400" b="1" dirty="0"/>
+          </a:p>
+        </p:txBody>
+      </p:sp>
       <p:cxnSp>
         <p:nvCxnSpPr>
-          <p:cNvPr id="13" name="Connecteur droit avec flèche 12">
-            <a:extLst>
-              <a:ext uri="{FF2B5EF4-FFF2-40B4-BE49-F238E27FC236}">
-                <a16:creationId xmlns:a16="http://schemas.microsoft.com/office/drawing/2014/main" id="{015152B5-CA66-4A0F-9894-51E75D341D8D}"/>
-              </a:ext>
-            </a:extLst>
-          </p:cNvPr>
-          <p:cNvCxnSpPr/>
+          <p:cNvPr id="4" name="Connecteur droit avec flèche 3"/>
+          <p:cNvCxnSpPr>
+            <a:endCxn id="3" idx="0"/>
+          </p:cNvCxnSpPr>
           <p:nvPr/>
         </p:nvCxnSpPr>
         <p:spPr>
-          <a:xfrm flipV="1">
-            <a:off x="2919046" y="2391507"/>
-            <a:ext cx="2672862" cy="2417885"/>
+          <a:xfrm>
+            <a:off x="4460952" y="2286000"/>
+            <a:ext cx="1" cy="864064"/>
           </a:xfrm>
           <a:prstGeom prst="straightConnector1">
             <a:avLst/>
           </a:prstGeom>
-          <a:ln w="28575">
+          <a:ln>
             <a:tailEnd type="triangle"/>
           </a:ln>
         </p:spPr>
@@ -4279,30 +5529,125 @@
           </a:fontRef>
         </p:style>
       </p:cxnSp>
+      <p:sp>
+        <p:nvSpPr>
+          <p:cNvPr id="6" name="ZoneTexte 5">
+            <a:extLst>
+              <a:ext uri="{FF2B5EF4-FFF2-40B4-BE49-F238E27FC236}">
+                <a16:creationId xmlns:a16="http://schemas.microsoft.com/office/drawing/2014/main" xmlns="" id="{479D2F68-32D5-4E80-B573-2C6156DCB22F}"/>
+              </a:ext>
+            </a:extLst>
+          </p:cNvPr>
+          <p:cNvSpPr txBox="1"/>
+          <p:nvPr/>
+        </p:nvSpPr>
+        <p:spPr>
+          <a:xfrm>
+            <a:off x="3713606" y="1762780"/>
+            <a:ext cx="2136611" cy="523220"/>
+          </a:xfrm>
+          <a:prstGeom prst="rect">
+            <a:avLst/>
+          </a:prstGeom>
+          <a:noFill/>
+        </p:spPr>
+        <p:txBody>
+          <a:bodyPr wrap="none" rtlCol="0">
+            <a:spAutoFit/>
+          </a:bodyPr>
+          <a:lstStyle/>
+          <a:p>
+            <a:r>
+              <a:rPr lang="fr-BE" sz="1400" dirty="0" smtClean="0"/>
+              <a:t>Obvious violation 1 stream</a:t>
+            </a:r>
+          </a:p>
+          <a:p>
+            <a:r>
+              <a:rPr lang="fr-BE" sz="1400" dirty="0" smtClean="0"/>
+              <a:t>| corruption of state</a:t>
+            </a:r>
+          </a:p>
+        </p:txBody>
+      </p:sp>
+      <p:sp>
+        <p:nvSpPr>
+          <p:cNvPr id="7" name="Ellipse 6">
+            <a:extLst>
+              <a:ext uri="{FF2B5EF4-FFF2-40B4-BE49-F238E27FC236}">
+                <a16:creationId xmlns:a16="http://schemas.microsoft.com/office/drawing/2014/main" xmlns="" id="{89FCD844-DF7E-40C9-9D11-022F7FE63189}"/>
+              </a:ext>
+            </a:extLst>
+          </p:cNvPr>
+          <p:cNvSpPr/>
+          <p:nvPr/>
+        </p:nvSpPr>
+        <p:spPr>
+          <a:xfrm>
+            <a:off x="7055520" y="3150064"/>
+            <a:ext cx="1494693" cy="931985"/>
+          </a:xfrm>
+          <a:prstGeom prst="ellipse">
+            <a:avLst/>
+          </a:prstGeom>
+        </p:spPr>
+        <p:style>
+          <a:lnRef idx="2">
+            <a:schemeClr val="accent2">
+              <a:shade val="50000"/>
+            </a:schemeClr>
+          </a:lnRef>
+          <a:fillRef idx="1">
+            <a:schemeClr val="accent2"/>
+          </a:fillRef>
+          <a:effectRef idx="0">
+            <a:schemeClr val="accent2"/>
+          </a:effectRef>
+          <a:fontRef idx="minor">
+            <a:schemeClr val="lt1"/>
+          </a:fontRef>
+        </p:style>
+        <p:txBody>
+          <a:bodyPr rtlCol="0" anchor="ctr"/>
+          <a:lstStyle/>
+          <a:p>
+            <a:pPr algn="ctr"/>
+            <a:r>
+              <a:rPr lang="fr-BE" sz="1400" b="1" dirty="0" smtClean="0"/>
+              <a:t>Error Sign</a:t>
+            </a:r>
+            <a:r>
+              <a:rPr lang="fr-BE" sz="1400" b="1" dirty="0" smtClean="0"/>
+              <a:t>aled</a:t>
+            </a:r>
+            <a:endParaRPr lang="en-GB" sz="1400" b="1" dirty="0"/>
+          </a:p>
+        </p:txBody>
+      </p:sp>
       <p:cxnSp>
         <p:nvCxnSpPr>
-          <p:cNvPr id="15" name="Connecteur droit avec flèche 14">
-            <a:extLst>
-              <a:ext uri="{FF2B5EF4-FFF2-40B4-BE49-F238E27FC236}">
-                <a16:creationId xmlns:a16="http://schemas.microsoft.com/office/drawing/2014/main" id="{7849844A-8993-4C5F-A72A-918BFA1F176F}"/>
+          <p:cNvPr id="8" name="Connecteur droit avec flèche 7">
+            <a:extLst>
+              <a:ext uri="{FF2B5EF4-FFF2-40B4-BE49-F238E27FC236}">
+                <a16:creationId xmlns:a16="http://schemas.microsoft.com/office/drawing/2014/main" xmlns="" id="{6589CEFF-63AD-48E0-B8C2-2B9C42EE3BA1}"/>
               </a:ext>
             </a:extLst>
           </p:cNvPr>
           <p:cNvCxnSpPr>
-            <a:stCxn id="4" idx="4"/>
-            <a:endCxn id="5" idx="0"/>
+            <a:stCxn id="3" idx="6"/>
+            <a:endCxn id="7" idx="2"/>
           </p:cNvCxnSpPr>
           <p:nvPr/>
         </p:nvCxnSpPr>
         <p:spPr>
-          <a:xfrm flipH="1">
-            <a:off x="2400299" y="2391509"/>
-            <a:ext cx="1" cy="2417884"/>
+          <a:xfrm>
+            <a:off x="5208299" y="3616057"/>
+            <a:ext cx="1847221" cy="0"/>
           </a:xfrm>
           <a:prstGeom prst="straightConnector1">
             <a:avLst/>
           </a:prstGeom>
-          <a:ln w="38100">
+          <a:ln w="28575">
             <a:tailEnd type="triangle"/>
           </a:ln>
         </p:spPr>
@@ -4321,25 +5666,299 @@
           </a:fontRef>
         </p:style>
       </p:cxnSp>
+      <p:sp>
+        <p:nvSpPr>
+          <p:cNvPr id="9" name="ZoneTexte 8">
+            <a:extLst>
+              <a:ext uri="{FF2B5EF4-FFF2-40B4-BE49-F238E27FC236}">
+                <a16:creationId xmlns:a16="http://schemas.microsoft.com/office/drawing/2014/main" xmlns="" id="{479D2F68-32D5-4E80-B573-2C6156DCB22F}"/>
+              </a:ext>
+            </a:extLst>
+          </p:cNvPr>
+          <p:cNvSpPr txBox="1"/>
+          <p:nvPr/>
+        </p:nvSpPr>
+        <p:spPr>
+          <a:xfrm>
+            <a:off x="5348714" y="3064224"/>
+            <a:ext cx="1566391" cy="523220"/>
+          </a:xfrm>
+          <a:prstGeom prst="rect">
+            <a:avLst/>
+          </a:prstGeom>
+          <a:noFill/>
+        </p:spPr>
+        <p:txBody>
+          <a:bodyPr wrap="none" rtlCol="0">
+            <a:spAutoFit/>
+          </a:bodyPr>
+          <a:lstStyle/>
+          <a:p>
+            <a:r>
+              <a:rPr lang="fr-BE" sz="1400" dirty="0" smtClean="0"/>
+              <a:t>s.RESET_STREAM |</a:t>
+            </a:r>
+          </a:p>
+          <a:p>
+            <a:r>
+              <a:rPr lang="fr-BE" sz="1400" dirty="0" smtClean="0"/>
+              <a:t>s.STOP_SENDING</a:t>
+            </a:r>
+            <a:endParaRPr lang="en-GB" sz="1400" dirty="0"/>
+          </a:p>
+        </p:txBody>
+      </p:sp>
+    </p:spTree>
+    <p:extLst>
+      <p:ext uri="{BB962C8B-B14F-4D97-AF65-F5344CB8AC3E}">
+        <p14:creationId xmlns:p14="http://schemas.microsoft.com/office/powerpoint/2010/main" val="2508387996"/>
+      </p:ext>
+    </p:extLst>
+  </p:cSld>
+  <p:clrMapOvr>
+    <a:masterClrMapping/>
+  </p:clrMapOvr>
+</p:sld>
+</file>
+
+<file path=ppt/slides/slide12.xml><?xml version="1.0" encoding="utf-8"?>
+<p:sld xmlns:a="http://schemas.openxmlformats.org/drawingml/2006/main" xmlns:r="http://schemas.openxmlformats.org/officeDocument/2006/relationships" xmlns:p="http://schemas.openxmlformats.org/presentationml/2006/main">
+  <p:cSld>
+    <p:spTree>
+      <p:nvGrpSpPr>
+        <p:cNvPr id="1" name=""/>
+        <p:cNvGrpSpPr/>
+        <p:nvPr/>
+      </p:nvGrpSpPr>
+      <p:grpSpPr>
+        <a:xfrm>
+          <a:off x="0" y="0"/>
+          <a:ext cx="0" cy="0"/>
+          <a:chOff x="0" y="0"/>
+          <a:chExt cx="0" cy="0"/>
+        </a:xfrm>
+      </p:grpSpPr>
+      <p:sp>
+        <p:nvSpPr>
+          <p:cNvPr id="2" name="Titre 1"/>
+          <p:cNvSpPr>
+            <a:spLocks noGrp="1"/>
+          </p:cNvSpPr>
+          <p:nvPr>
+            <p:ph type="title"/>
+          </p:nvPr>
+        </p:nvSpPr>
+        <p:spPr>
+          <a:xfrm>
+            <a:off x="903514" y="2705554"/>
+            <a:ext cx="10515600" cy="1325563"/>
+          </a:xfrm>
+        </p:spPr>
+        <p:txBody>
+          <a:bodyPr/>
+          <a:lstStyle/>
+          <a:p>
+            <a:pPr algn="ctr"/>
+            <a:r>
+              <a:rPr lang="en-GB" b="1" dirty="0" smtClean="0"/>
+              <a:t>12.Packet and Frames</a:t>
+            </a:r>
+            <a:endParaRPr lang="fr-FR" b="1" dirty="0"/>
+          </a:p>
+        </p:txBody>
+      </p:sp>
+    </p:spTree>
+    <p:extLst>
+      <p:ext uri="{BB962C8B-B14F-4D97-AF65-F5344CB8AC3E}">
+        <p14:creationId xmlns:p14="http://schemas.microsoft.com/office/powerpoint/2010/main" val="416313138"/>
+      </p:ext>
+    </p:extLst>
+  </p:cSld>
+  <p:clrMapOvr>
+    <a:masterClrMapping/>
+  </p:clrMapOvr>
+</p:sld>
+</file>
+
+<file path=ppt/slides/slide13.xml><?xml version="1.0" encoding="utf-8"?>
+<p:sld xmlns:a="http://schemas.openxmlformats.org/drawingml/2006/main" xmlns:r="http://schemas.openxmlformats.org/officeDocument/2006/relationships" xmlns:p="http://schemas.openxmlformats.org/presentationml/2006/main">
+  <p:cSld>
+    <p:spTree>
+      <p:nvGrpSpPr>
+        <p:cNvPr id="1" name=""/>
+        <p:cNvGrpSpPr/>
+        <p:nvPr/>
+      </p:nvGrpSpPr>
+      <p:grpSpPr>
+        <a:xfrm>
+          <a:off x="0" y="0"/>
+          <a:ext cx="0" cy="0"/>
+          <a:chOff x="0" y="0"/>
+          <a:chExt cx="0" cy="0"/>
+        </a:xfrm>
+      </p:grpSpPr>
+      <p:sp>
+        <p:nvSpPr>
+          <p:cNvPr id="5" name="ZoneTexte 4">
+            <a:extLst>
+              <a:ext uri="{FF2B5EF4-FFF2-40B4-BE49-F238E27FC236}">
+                <a16:creationId xmlns:a16="http://schemas.microsoft.com/office/drawing/2014/main" xmlns="" id="{25D0CFDD-F8D9-4498-A666-F31BA473AEDD}"/>
+              </a:ext>
+            </a:extLst>
+          </p:cNvPr>
+          <p:cNvSpPr txBox="1"/>
+          <p:nvPr/>
+        </p:nvSpPr>
+        <p:spPr>
+          <a:xfrm>
+            <a:off x="9308369" y="0"/>
+            <a:ext cx="2883631" cy="523220"/>
+          </a:xfrm>
+          <a:prstGeom prst="rect">
+            <a:avLst/>
+          </a:prstGeom>
+          <a:noFill/>
+        </p:spPr>
+        <p:txBody>
+          <a:bodyPr wrap="square">
+            <a:spAutoFit/>
+          </a:bodyPr>
+          <a:lstStyle/>
+          <a:p>
+            <a:r>
+              <a:rPr lang="en-GB" sz="2800" b="1" dirty="0" smtClean="0"/>
+              <a:t>Protected packet</a:t>
+            </a:r>
+            <a:endParaRPr lang="en-GB" sz="2800" b="1" dirty="0"/>
+          </a:p>
+        </p:txBody>
+      </p:sp>
+      <p:sp>
+        <p:nvSpPr>
+          <p:cNvPr id="13" name="Ellipse 12">
+            <a:extLst>
+              <a:ext uri="{FF2B5EF4-FFF2-40B4-BE49-F238E27FC236}">
+                <a16:creationId xmlns:a16="http://schemas.microsoft.com/office/drawing/2014/main" xmlns="" id="{89FCD844-DF7E-40C9-9D11-022F7FE63189}"/>
+              </a:ext>
+            </a:extLst>
+          </p:cNvPr>
+          <p:cNvSpPr/>
+          <p:nvPr/>
+        </p:nvSpPr>
+        <p:spPr>
+          <a:xfrm>
+            <a:off x="3163899" y="2888806"/>
+            <a:ext cx="1779299" cy="931985"/>
+          </a:xfrm>
+          <a:prstGeom prst="ellipse">
+            <a:avLst/>
+          </a:prstGeom>
+        </p:spPr>
+        <p:style>
+          <a:lnRef idx="2">
+            <a:schemeClr val="accent2">
+              <a:shade val="50000"/>
+            </a:schemeClr>
+          </a:lnRef>
+          <a:fillRef idx="1">
+            <a:schemeClr val="accent2"/>
+          </a:fillRef>
+          <a:effectRef idx="0">
+            <a:schemeClr val="accent2"/>
+          </a:effectRef>
+          <a:fontRef idx="minor">
+            <a:schemeClr val="lt1"/>
+          </a:fontRef>
+        </p:style>
+        <p:txBody>
+          <a:bodyPr rtlCol="0" anchor="ctr"/>
+          <a:lstStyle/>
+          <a:p>
+            <a:pPr algn="ctr"/>
+            <a:r>
+              <a:rPr lang="fr-BE" sz="1400" b="1" dirty="0" smtClean="0"/>
+              <a:t>Initial packets</a:t>
+            </a:r>
+          </a:p>
+          <a:p>
+            <a:pPr algn="ctr"/>
+            <a:r>
+              <a:rPr lang="fr-BE" sz="1400" b="1" dirty="0" smtClean="0"/>
+              <a:t>(all exept Version Negotiation)</a:t>
+            </a:r>
+            <a:endParaRPr lang="en-GB" sz="1400" b="1" dirty="0"/>
+          </a:p>
+        </p:txBody>
+      </p:sp>
+      <p:sp>
+        <p:nvSpPr>
+          <p:cNvPr id="16" name="Ellipse 15">
+            <a:extLst>
+              <a:ext uri="{FF2B5EF4-FFF2-40B4-BE49-F238E27FC236}">
+                <a16:creationId xmlns:a16="http://schemas.microsoft.com/office/drawing/2014/main" xmlns="" id="{89FCD844-DF7E-40C9-9D11-022F7FE63189}"/>
+              </a:ext>
+            </a:extLst>
+          </p:cNvPr>
+          <p:cNvSpPr/>
+          <p:nvPr/>
+        </p:nvSpPr>
+        <p:spPr>
+          <a:xfrm>
+            <a:off x="7813676" y="2888806"/>
+            <a:ext cx="1494693" cy="931985"/>
+          </a:xfrm>
+          <a:prstGeom prst="ellipse">
+            <a:avLst/>
+          </a:prstGeom>
+        </p:spPr>
+        <p:style>
+          <a:lnRef idx="2">
+            <a:schemeClr val="accent2">
+              <a:shade val="50000"/>
+            </a:schemeClr>
+          </a:lnRef>
+          <a:fillRef idx="1">
+            <a:schemeClr val="accent2"/>
+          </a:fillRef>
+          <a:effectRef idx="0">
+            <a:schemeClr val="accent2"/>
+          </a:effectRef>
+          <a:fontRef idx="minor">
+            <a:schemeClr val="lt1"/>
+          </a:fontRef>
+        </p:style>
+        <p:txBody>
+          <a:bodyPr rtlCol="0" anchor="ctr"/>
+          <a:lstStyle/>
+          <a:p>
+            <a:pPr algn="ctr"/>
+            <a:r>
+              <a:rPr lang="fr-BE" sz="1400" b="1" dirty="0" smtClean="0"/>
+              <a:t>All other packet</a:t>
+            </a:r>
+            <a:endParaRPr lang="en-GB" sz="1400" b="1" dirty="0"/>
+          </a:p>
+        </p:txBody>
+      </p:sp>
       <p:cxnSp>
         <p:nvCxnSpPr>
           <p:cNvPr id="17" name="Connecteur droit avec flèche 16">
             <a:extLst>
               <a:ext uri="{FF2B5EF4-FFF2-40B4-BE49-F238E27FC236}">
-                <a16:creationId xmlns:a16="http://schemas.microsoft.com/office/drawing/2014/main" id="{35CD81BA-EEE1-4F6F-B1D2-060F1B5B1F95}"/>
+                <a16:creationId xmlns:a16="http://schemas.microsoft.com/office/drawing/2014/main" xmlns="" id="{6589CEFF-63AD-48E0-B8C2-2B9C42EE3BA1}"/>
               </a:ext>
             </a:extLst>
           </p:cNvPr>
           <p:cNvCxnSpPr>
-            <a:stCxn id="5" idx="6"/>
-            <a:endCxn id="6" idx="2"/>
+            <a:stCxn id="13" idx="6"/>
+            <a:endCxn id="16" idx="2"/>
           </p:cNvCxnSpPr>
           <p:nvPr/>
         </p:nvCxnSpPr>
         <p:spPr>
           <a:xfrm>
-            <a:off x="3147645" y="5275386"/>
-            <a:ext cx="2201008" cy="0"/>
+            <a:off x="4943198" y="3354799"/>
+            <a:ext cx="2870478" cy="0"/>
           </a:xfrm>
           <a:prstGeom prst="straightConnector1">
             <a:avLst/>
@@ -4363,30 +5982,57 @@
           </a:fontRef>
         </p:style>
       </p:cxnSp>
+      <p:sp>
+        <p:nvSpPr>
+          <p:cNvPr id="18" name="ZoneTexte 17">
+            <a:extLst>
+              <a:ext uri="{FF2B5EF4-FFF2-40B4-BE49-F238E27FC236}">
+                <a16:creationId xmlns:a16="http://schemas.microsoft.com/office/drawing/2014/main" xmlns="" id="{479D2F68-32D5-4E80-B573-2C6156DCB22F}"/>
+              </a:ext>
+            </a:extLst>
+          </p:cNvPr>
+          <p:cNvSpPr txBox="1"/>
+          <p:nvPr/>
+        </p:nvSpPr>
+        <p:spPr>
+          <a:xfrm>
+            <a:off x="3114556" y="1735941"/>
+            <a:ext cx="1828642" cy="307777"/>
+          </a:xfrm>
+          <a:prstGeom prst="rect">
+            <a:avLst/>
+          </a:prstGeom>
+          <a:noFill/>
+        </p:spPr>
+        <p:txBody>
+          <a:bodyPr wrap="none" rtlCol="0">
+            <a:spAutoFit/>
+          </a:bodyPr>
+          <a:lstStyle/>
+          <a:p>
+            <a:r>
+              <a:rPr lang="fr-BE" sz="1400" dirty="0" smtClean="0"/>
+              <a:t>Keys staticallly derived</a:t>
+            </a:r>
+            <a:endParaRPr lang="en-GB" sz="1400" dirty="0"/>
+          </a:p>
+        </p:txBody>
+      </p:sp>
       <p:cxnSp>
         <p:nvCxnSpPr>
-          <p:cNvPr id="20" name="Connecteur droit avec flèche 19">
-            <a:extLst>
-              <a:ext uri="{FF2B5EF4-FFF2-40B4-BE49-F238E27FC236}">
-                <a16:creationId xmlns:a16="http://schemas.microsoft.com/office/drawing/2014/main" id="{1055E33E-43DF-4EA1-B851-345375F53862}"/>
-              </a:ext>
-            </a:extLst>
-          </p:cNvPr>
-          <p:cNvCxnSpPr>
-            <a:stCxn id="6" idx="6"/>
-            <a:endCxn id="9" idx="2"/>
-          </p:cNvCxnSpPr>
+          <p:cNvPr id="23" name="Connecteur droit avec flèche 22"/>
+          <p:cNvCxnSpPr/>
           <p:nvPr/>
         </p:nvCxnSpPr>
         <p:spPr>
-          <a:xfrm flipV="1">
-            <a:off x="6843346" y="5275385"/>
-            <a:ext cx="2201008" cy="1"/>
+          <a:xfrm>
+            <a:off x="4053547" y="2024742"/>
+            <a:ext cx="1" cy="864064"/>
           </a:xfrm>
           <a:prstGeom prst="straightConnector1">
             <a:avLst/>
           </a:prstGeom>
-          <a:ln w="38100">
+          <a:ln>
             <a:tailEnd type="triangle"/>
           </a:ln>
         </p:spPr>
@@ -4405,25 +6051,238 @@
           </a:fontRef>
         </p:style>
       </p:cxnSp>
+      <p:sp>
+        <p:nvSpPr>
+          <p:cNvPr id="25" name="ZoneTexte 24">
+            <a:extLst>
+              <a:ext uri="{FF2B5EF4-FFF2-40B4-BE49-F238E27FC236}">
+                <a16:creationId xmlns:a16="http://schemas.microsoft.com/office/drawing/2014/main" xmlns="" id="{479D2F68-32D5-4E80-B573-2C6156DCB22F}"/>
+              </a:ext>
+            </a:extLst>
+          </p:cNvPr>
+          <p:cNvSpPr txBox="1"/>
+          <p:nvPr/>
+        </p:nvSpPr>
+        <p:spPr>
+          <a:xfrm>
+            <a:off x="4992541" y="3011570"/>
+            <a:ext cx="2833981" cy="307777"/>
+          </a:xfrm>
+          <a:prstGeom prst="rect">
+            <a:avLst/>
+          </a:prstGeom>
+          <a:noFill/>
+        </p:spPr>
+        <p:txBody>
+          <a:bodyPr wrap="none" rtlCol="0">
+            <a:spAutoFit/>
+          </a:bodyPr>
+          <a:lstStyle/>
+          <a:p>
+            <a:r>
+              <a:rPr lang="fr-BE" sz="1400" dirty="0" smtClean="0"/>
+              <a:t>Keys derived from crypto handshake</a:t>
+            </a:r>
+            <a:endParaRPr lang="en-GB" sz="1400" dirty="0"/>
+          </a:p>
+        </p:txBody>
+      </p:sp>
+    </p:spTree>
+    <p:extLst>
+      <p:ext uri="{BB962C8B-B14F-4D97-AF65-F5344CB8AC3E}">
+        <p14:creationId xmlns:p14="http://schemas.microsoft.com/office/powerpoint/2010/main" val="3870665267"/>
+      </p:ext>
+    </p:extLst>
+  </p:cSld>
+  <p:clrMapOvr>
+    <a:masterClrMapping/>
+  </p:clrMapOvr>
+</p:sld>
+</file>
+
+<file path=ppt/slides/slide14.xml><?xml version="1.0" encoding="utf-8"?>
+<p:sld xmlns:a="http://schemas.openxmlformats.org/drawingml/2006/main" xmlns:r="http://schemas.openxmlformats.org/officeDocument/2006/relationships" xmlns:p="http://schemas.openxmlformats.org/presentationml/2006/main">
+  <p:cSld>
+    <p:spTree>
+      <p:nvGrpSpPr>
+        <p:cNvPr id="1" name=""/>
+        <p:cNvGrpSpPr/>
+        <p:nvPr/>
+      </p:nvGrpSpPr>
+      <p:grpSpPr>
+        <a:xfrm>
+          <a:off x="0" y="0"/>
+          <a:ext cx="0" cy="0"/>
+          <a:chOff x="0" y="0"/>
+          <a:chExt cx="0" cy="0"/>
+        </a:xfrm>
+      </p:grpSpPr>
+      <p:sp>
+        <p:nvSpPr>
+          <p:cNvPr id="5" name="ZoneTexte 4">
+            <a:extLst>
+              <a:ext uri="{FF2B5EF4-FFF2-40B4-BE49-F238E27FC236}">
+                <a16:creationId xmlns:a16="http://schemas.microsoft.com/office/drawing/2014/main" xmlns="" id="{25D0CFDD-F8D9-4498-A666-F31BA473AEDD}"/>
+              </a:ext>
+            </a:extLst>
+          </p:cNvPr>
+          <p:cNvSpPr txBox="1"/>
+          <p:nvPr/>
+        </p:nvSpPr>
+        <p:spPr>
+          <a:xfrm>
+            <a:off x="9308369" y="0"/>
+            <a:ext cx="2883631" cy="523220"/>
+          </a:xfrm>
+          <a:prstGeom prst="rect">
+            <a:avLst/>
+          </a:prstGeom>
+          <a:noFill/>
+        </p:spPr>
+        <p:txBody>
+          <a:bodyPr wrap="square">
+            <a:spAutoFit/>
+          </a:bodyPr>
+          <a:lstStyle/>
+          <a:p>
+            <a:r>
+              <a:rPr lang="en-GB" sz="2800" b="1" dirty="0"/>
+              <a:t>Coalescing </a:t>
+            </a:r>
+            <a:r>
+              <a:rPr lang="en-GB" sz="2800" b="1" dirty="0" smtClean="0"/>
+              <a:t>packet</a:t>
+            </a:r>
+            <a:endParaRPr lang="en-GB" sz="2800" b="1" dirty="0"/>
+          </a:p>
+        </p:txBody>
+      </p:sp>
+      <p:sp>
+        <p:nvSpPr>
+          <p:cNvPr id="3" name="Ellipse 2">
+            <a:extLst>
+              <a:ext uri="{FF2B5EF4-FFF2-40B4-BE49-F238E27FC236}">
+                <a16:creationId xmlns:a16="http://schemas.microsoft.com/office/drawing/2014/main" xmlns="" id="{89FCD844-DF7E-40C9-9D11-022F7FE63189}"/>
+              </a:ext>
+            </a:extLst>
+          </p:cNvPr>
+          <p:cNvSpPr/>
+          <p:nvPr/>
+        </p:nvSpPr>
+        <p:spPr>
+          <a:xfrm>
+            <a:off x="3163899" y="2888806"/>
+            <a:ext cx="1779299" cy="931985"/>
+          </a:xfrm>
+          <a:prstGeom prst="ellipse">
+            <a:avLst/>
+          </a:prstGeom>
+        </p:spPr>
+        <p:style>
+          <a:lnRef idx="2">
+            <a:schemeClr val="accent2">
+              <a:shade val="50000"/>
+            </a:schemeClr>
+          </a:lnRef>
+          <a:fillRef idx="1">
+            <a:schemeClr val="accent2"/>
+          </a:fillRef>
+          <a:effectRef idx="0">
+            <a:schemeClr val="accent2"/>
+          </a:effectRef>
+          <a:fontRef idx="minor">
+            <a:schemeClr val="lt1"/>
+          </a:fontRef>
+        </p:style>
+        <p:txBody>
+          <a:bodyPr rtlCol="0" anchor="ctr"/>
+          <a:lstStyle/>
+          <a:p>
+            <a:pPr algn="ctr"/>
+            <a:r>
+              <a:rPr lang="fr-BE" sz="1400" b="1" dirty="0" smtClean="0"/>
+              <a:t>Initial packets</a:t>
+            </a:r>
+          </a:p>
+          <a:p>
+            <a:pPr algn="ctr"/>
+            <a:r>
+              <a:rPr lang="fr-BE" sz="1400" b="1" dirty="0" smtClean="0"/>
+              <a:t>(all exept Version Negotiation)</a:t>
+            </a:r>
+            <a:endParaRPr lang="en-GB" sz="1400" b="1" dirty="0"/>
+          </a:p>
+        </p:txBody>
+      </p:sp>
+      <p:sp>
+        <p:nvSpPr>
+          <p:cNvPr id="4" name="Ellipse 3">
+            <a:extLst>
+              <a:ext uri="{FF2B5EF4-FFF2-40B4-BE49-F238E27FC236}">
+                <a16:creationId xmlns:a16="http://schemas.microsoft.com/office/drawing/2014/main" xmlns="" id="{89FCD844-DF7E-40C9-9D11-022F7FE63189}"/>
+              </a:ext>
+            </a:extLst>
+          </p:cNvPr>
+          <p:cNvSpPr/>
+          <p:nvPr/>
+        </p:nvSpPr>
+        <p:spPr>
+          <a:xfrm>
+            <a:off x="7813676" y="2888806"/>
+            <a:ext cx="1494693" cy="931985"/>
+          </a:xfrm>
+          <a:prstGeom prst="ellipse">
+            <a:avLst/>
+          </a:prstGeom>
+        </p:spPr>
+        <p:style>
+          <a:lnRef idx="2">
+            <a:schemeClr val="accent2">
+              <a:shade val="50000"/>
+            </a:schemeClr>
+          </a:lnRef>
+          <a:fillRef idx="1">
+            <a:schemeClr val="accent2"/>
+          </a:fillRef>
+          <a:effectRef idx="0">
+            <a:schemeClr val="accent2"/>
+          </a:effectRef>
+          <a:fontRef idx="minor">
+            <a:schemeClr val="lt1"/>
+          </a:fontRef>
+        </p:style>
+        <p:txBody>
+          <a:bodyPr rtlCol="0" anchor="ctr"/>
+          <a:lstStyle/>
+          <a:p>
+            <a:pPr algn="ctr"/>
+            <a:r>
+              <a:rPr lang="fr-BE" sz="1400" b="1" dirty="0" smtClean="0"/>
+              <a:t>All other packet</a:t>
+            </a:r>
+            <a:endParaRPr lang="en-GB" sz="1400" b="1" dirty="0"/>
+          </a:p>
+        </p:txBody>
+      </p:sp>
       <p:cxnSp>
         <p:nvCxnSpPr>
-          <p:cNvPr id="22" name="Connecteur droit avec flèche 21">
-            <a:extLst>
-              <a:ext uri="{FF2B5EF4-FFF2-40B4-BE49-F238E27FC236}">
-                <a16:creationId xmlns:a16="http://schemas.microsoft.com/office/drawing/2014/main" id="{774693B9-DF54-4AE5-81F3-7FD221F2E9EC}"/>
+          <p:cNvPr id="6" name="Connecteur droit avec flèche 5">
+            <a:extLst>
+              <a:ext uri="{FF2B5EF4-FFF2-40B4-BE49-F238E27FC236}">
+                <a16:creationId xmlns:a16="http://schemas.microsoft.com/office/drawing/2014/main" xmlns="" id="{6589CEFF-63AD-48E0-B8C2-2B9C42EE3BA1}"/>
               </a:ext>
             </a:extLst>
           </p:cNvPr>
           <p:cNvCxnSpPr>
-            <a:stCxn id="7" idx="6"/>
-            <a:endCxn id="8" idx="2"/>
+            <a:stCxn id="3" idx="6"/>
+            <a:endCxn id="4" idx="2"/>
           </p:cNvCxnSpPr>
           <p:nvPr/>
         </p:nvCxnSpPr>
         <p:spPr>
-          <a:xfrm flipV="1">
-            <a:off x="6843345" y="1925515"/>
-            <a:ext cx="2201009" cy="1"/>
+          <a:xfrm>
+            <a:off x="4943198" y="3354799"/>
+            <a:ext cx="2870478" cy="0"/>
           </a:xfrm>
           <a:prstGeom prst="straightConnector1">
             <a:avLst/>
@@ -4447,30 +6306,57 @@
           </a:fontRef>
         </p:style>
       </p:cxnSp>
+      <p:sp>
+        <p:nvSpPr>
+          <p:cNvPr id="7" name="ZoneTexte 6">
+            <a:extLst>
+              <a:ext uri="{FF2B5EF4-FFF2-40B4-BE49-F238E27FC236}">
+                <a16:creationId xmlns:a16="http://schemas.microsoft.com/office/drawing/2014/main" xmlns="" id="{479D2F68-32D5-4E80-B573-2C6156DCB22F}"/>
+              </a:ext>
+            </a:extLst>
+          </p:cNvPr>
+          <p:cNvSpPr txBox="1"/>
+          <p:nvPr/>
+        </p:nvSpPr>
+        <p:spPr>
+          <a:xfrm>
+            <a:off x="3114556" y="1735941"/>
+            <a:ext cx="1828642" cy="307777"/>
+          </a:xfrm>
+          <a:prstGeom prst="rect">
+            <a:avLst/>
+          </a:prstGeom>
+          <a:noFill/>
+        </p:spPr>
+        <p:txBody>
+          <a:bodyPr wrap="none" rtlCol="0">
+            <a:spAutoFit/>
+          </a:bodyPr>
+          <a:lstStyle/>
+          <a:p>
+            <a:r>
+              <a:rPr lang="fr-BE" sz="1400" dirty="0" smtClean="0"/>
+              <a:t>Keys staticallly derived</a:t>
+            </a:r>
+            <a:endParaRPr lang="en-GB" sz="1400" dirty="0"/>
+          </a:p>
+        </p:txBody>
+      </p:sp>
       <p:cxnSp>
         <p:nvCxnSpPr>
-          <p:cNvPr id="24" name="Connecteur droit avec flèche 23">
-            <a:extLst>
-              <a:ext uri="{FF2B5EF4-FFF2-40B4-BE49-F238E27FC236}">
-                <a16:creationId xmlns:a16="http://schemas.microsoft.com/office/drawing/2014/main" id="{FE3792FD-3716-4B03-8B24-62235C4F1465}"/>
-              </a:ext>
-            </a:extLst>
-          </p:cNvPr>
-          <p:cNvCxnSpPr>
-            <a:stCxn id="6" idx="0"/>
-            <a:endCxn id="7" idx="4"/>
-          </p:cNvCxnSpPr>
+          <p:cNvPr id="8" name="Connecteur droit avec flèche 7"/>
+          <p:cNvCxnSpPr/>
           <p:nvPr/>
         </p:nvCxnSpPr>
         <p:spPr>
-          <a:xfrm flipH="1" flipV="1">
-            <a:off x="6095999" y="2391508"/>
-            <a:ext cx="1" cy="2417885"/>
+          <a:xfrm>
+            <a:off x="4053547" y="2024742"/>
+            <a:ext cx="1" cy="864064"/>
           </a:xfrm>
           <a:prstGeom prst="straightConnector1">
             <a:avLst/>
           </a:prstGeom>
-          <a:ln w="28575">
+          <a:ln>
             <a:tailEnd type="triangle"/>
           </a:ln>
         </p:spPr>
@@ -4491,10 +6377,10 @@
       </p:cxnSp>
       <p:sp>
         <p:nvSpPr>
-          <p:cNvPr id="25" name="ZoneTexte 24">
-            <a:extLst>
-              <a:ext uri="{FF2B5EF4-FFF2-40B4-BE49-F238E27FC236}">
-                <a16:creationId xmlns:a16="http://schemas.microsoft.com/office/drawing/2014/main" id="{EC37E58C-8569-44E3-A1DC-1FED44F81068}"/>
+          <p:cNvPr id="9" name="ZoneTexte 8">
+            <a:extLst>
+              <a:ext uri="{FF2B5EF4-FFF2-40B4-BE49-F238E27FC236}">
+                <a16:creationId xmlns:a16="http://schemas.microsoft.com/office/drawing/2014/main" xmlns="" id="{479D2F68-32D5-4E80-B573-2C6156DCB22F}"/>
               </a:ext>
             </a:extLst>
           </p:cNvPr>
@@ -4503,8 +6389,8 @@
         </p:nvSpPr>
         <p:spPr>
           <a:xfrm>
-            <a:off x="3404781" y="1538360"/>
-            <a:ext cx="1794146" cy="369332"/>
+            <a:off x="4992541" y="3011570"/>
+            <a:ext cx="2833981" cy="307777"/>
           </a:xfrm>
           <a:prstGeom prst="rect">
             <a:avLst/>
@@ -4518,19 +6404,19 @@
           <a:lstStyle/>
           <a:p>
             <a:r>
-              <a:rPr lang="fr-BE" dirty="0"/>
-              <a:t>s.RESET_STREAM</a:t>
-            </a:r>
-            <a:endParaRPr lang="en-GB" dirty="0"/>
-          </a:p>
-        </p:txBody>
-      </p:sp>
-      <p:sp>
-        <p:nvSpPr>
-          <p:cNvPr id="26" name="ZoneTexte 25">
-            <a:extLst>
-              <a:ext uri="{FF2B5EF4-FFF2-40B4-BE49-F238E27FC236}">
-                <a16:creationId xmlns:a16="http://schemas.microsoft.com/office/drawing/2014/main" id="{FAA392D6-1A3B-4D0A-8C01-817A0F04B637}"/>
+              <a:rPr lang="fr-BE" sz="1400" dirty="0" smtClean="0"/>
+              <a:t>Keys derived from crypto handshake</a:t>
+            </a:r>
+            <a:endParaRPr lang="en-GB" sz="1400" dirty="0"/>
+          </a:p>
+        </p:txBody>
+      </p:sp>
+      <p:sp>
+        <p:nvSpPr>
+          <p:cNvPr id="10" name="ZoneTexte 9">
+            <a:extLst>
+              <a:ext uri="{FF2B5EF4-FFF2-40B4-BE49-F238E27FC236}">
+                <a16:creationId xmlns:a16="http://schemas.microsoft.com/office/drawing/2014/main" xmlns="" id="{25D0CFDD-F8D9-4498-A666-F31BA473AEDD}"/>
               </a:ext>
             </a:extLst>
           </p:cNvPr>
@@ -4538,481 +6424,9 @@
           <p:nvPr/>
         </p:nvSpPr>
         <p:spPr>
-          <a:xfrm rot="18948727">
-            <a:off x="3242901" y="3192815"/>
-            <a:ext cx="1794146" cy="369332"/>
-          </a:xfrm>
-          <a:prstGeom prst="rect">
-            <a:avLst/>
-          </a:prstGeom>
-          <a:noFill/>
-        </p:spPr>
-        <p:txBody>
-          <a:bodyPr wrap="none" rtlCol="0">
-            <a:spAutoFit/>
-          </a:bodyPr>
-          <a:lstStyle/>
-          <a:p>
-            <a:r>
-              <a:rPr lang="fr-BE" dirty="0"/>
-              <a:t>s.RESET_STREAM</a:t>
-            </a:r>
-            <a:endParaRPr lang="en-GB" dirty="0"/>
-          </a:p>
-        </p:txBody>
-      </p:sp>
-      <p:sp>
-        <p:nvSpPr>
-          <p:cNvPr id="27" name="ZoneTexte 26">
-            <a:extLst>
-              <a:ext uri="{FF2B5EF4-FFF2-40B4-BE49-F238E27FC236}">
-                <a16:creationId xmlns:a16="http://schemas.microsoft.com/office/drawing/2014/main" id="{E9D2A897-EAB3-4778-A48C-996CC1E8AC50}"/>
-              </a:ext>
-            </a:extLst>
-          </p:cNvPr>
-          <p:cNvSpPr txBox="1"/>
-          <p:nvPr/>
-        </p:nvSpPr>
-        <p:spPr>
-          <a:xfrm rot="16200000">
-            <a:off x="4946881" y="3496169"/>
-            <a:ext cx="1794146" cy="369332"/>
-          </a:xfrm>
-          <a:prstGeom prst="rect">
-            <a:avLst/>
-          </a:prstGeom>
-          <a:noFill/>
-        </p:spPr>
-        <p:txBody>
-          <a:bodyPr wrap="none" rtlCol="0">
-            <a:spAutoFit/>
-          </a:bodyPr>
-          <a:lstStyle/>
-          <a:p>
-            <a:r>
-              <a:rPr lang="fr-BE" dirty="0"/>
-              <a:t>s.RESET_STREAM</a:t>
-            </a:r>
-            <a:endParaRPr lang="en-GB" dirty="0"/>
-          </a:p>
-        </p:txBody>
-      </p:sp>
-      <p:sp>
-        <p:nvSpPr>
-          <p:cNvPr id="28" name="ZoneTexte 27">
-            <a:extLst>
-              <a:ext uri="{FF2B5EF4-FFF2-40B4-BE49-F238E27FC236}">
-                <a16:creationId xmlns:a16="http://schemas.microsoft.com/office/drawing/2014/main" id="{25FE3CA9-2E21-4E5D-8555-BE8394BBA317}"/>
-              </a:ext>
-            </a:extLst>
-          </p:cNvPr>
-          <p:cNvSpPr txBox="1"/>
-          <p:nvPr/>
-        </p:nvSpPr>
-        <p:spPr>
-          <a:xfrm>
-            <a:off x="7599222" y="1556182"/>
-            <a:ext cx="675698" cy="369332"/>
-          </a:xfrm>
-          <a:prstGeom prst="rect">
-            <a:avLst/>
-          </a:prstGeom>
-          <a:noFill/>
-        </p:spPr>
-        <p:txBody>
-          <a:bodyPr wrap="none" rtlCol="0">
-            <a:spAutoFit/>
-          </a:bodyPr>
-          <a:lstStyle/>
-          <a:p>
-            <a:r>
-              <a:rPr lang="fr-BE" dirty="0"/>
-              <a:t>r.ACK</a:t>
-            </a:r>
-            <a:endParaRPr lang="en-GB" dirty="0"/>
-          </a:p>
-        </p:txBody>
-      </p:sp>
-      <p:sp>
-        <p:nvSpPr>
-          <p:cNvPr id="29" name="ZoneTexte 28">
-            <a:extLst>
-              <a:ext uri="{FF2B5EF4-FFF2-40B4-BE49-F238E27FC236}">
-                <a16:creationId xmlns:a16="http://schemas.microsoft.com/office/drawing/2014/main" id="{0692236C-15B0-4B00-964F-2FC9F6384F6F}"/>
-              </a:ext>
-            </a:extLst>
-          </p:cNvPr>
-          <p:cNvSpPr txBox="1"/>
-          <p:nvPr/>
-        </p:nvSpPr>
-        <p:spPr>
-          <a:xfrm>
-            <a:off x="7641825" y="4809391"/>
-            <a:ext cx="937757" cy="369332"/>
-          </a:xfrm>
-          <a:prstGeom prst="rect">
-            <a:avLst/>
-          </a:prstGeom>
-          <a:noFill/>
-        </p:spPr>
-        <p:txBody>
-          <a:bodyPr wrap="none" rtlCol="0">
-            <a:spAutoFit/>
-          </a:bodyPr>
-          <a:lstStyle/>
-          <a:p>
-            <a:r>
-              <a:rPr lang="fr-BE" dirty="0"/>
-              <a:t>rAll.ACK</a:t>
-            </a:r>
-            <a:endParaRPr lang="en-GB" dirty="0"/>
-          </a:p>
-        </p:txBody>
-      </p:sp>
-      <p:sp>
-        <p:nvSpPr>
-          <p:cNvPr id="30" name="ZoneTexte 29">
-            <a:extLst>
-              <a:ext uri="{FF2B5EF4-FFF2-40B4-BE49-F238E27FC236}">
-                <a16:creationId xmlns:a16="http://schemas.microsoft.com/office/drawing/2014/main" id="{CE7EF607-C441-4C6F-934E-973FAD16220A}"/>
-              </a:ext>
-            </a:extLst>
-          </p:cNvPr>
-          <p:cNvSpPr txBox="1"/>
-          <p:nvPr/>
-        </p:nvSpPr>
-        <p:spPr>
-          <a:xfrm>
-            <a:off x="3431822" y="4897256"/>
-            <a:ext cx="1647310" cy="369332"/>
-          </a:xfrm>
-          <a:prstGeom prst="rect">
-            <a:avLst/>
-          </a:prstGeom>
-          <a:noFill/>
-        </p:spPr>
-        <p:txBody>
-          <a:bodyPr wrap="none" rtlCol="0">
-            <a:spAutoFit/>
-          </a:bodyPr>
-          <a:lstStyle/>
-          <a:p>
-            <a:r>
-              <a:rPr lang="fr-BE" dirty="0"/>
-              <a:t>s.STREAM + FIN</a:t>
-            </a:r>
-            <a:endParaRPr lang="en-GB" dirty="0"/>
-          </a:p>
-        </p:txBody>
-      </p:sp>
-      <p:sp>
-        <p:nvSpPr>
-          <p:cNvPr id="31" name="ZoneTexte 30">
-            <a:extLst>
-              <a:ext uri="{FF2B5EF4-FFF2-40B4-BE49-F238E27FC236}">
-                <a16:creationId xmlns:a16="http://schemas.microsoft.com/office/drawing/2014/main" id="{C9963DA0-1C1A-4E2E-BA58-B5FF1051DD91}"/>
-              </a:ext>
-            </a:extLst>
-          </p:cNvPr>
-          <p:cNvSpPr txBox="1"/>
-          <p:nvPr/>
-        </p:nvSpPr>
-        <p:spPr>
-          <a:xfrm rot="16200000">
-            <a:off x="712377" y="3031062"/>
-            <a:ext cx="2584747" cy="1138773"/>
-          </a:xfrm>
-          <a:prstGeom prst="rect">
-            <a:avLst/>
-          </a:prstGeom>
-          <a:noFill/>
-        </p:spPr>
-        <p:txBody>
-          <a:bodyPr wrap="none" rtlCol="0">
-            <a:spAutoFit/>
-          </a:bodyPr>
-          <a:lstStyle/>
-          <a:p>
-            <a:r>
-              <a:rPr lang="fr-BE" dirty="0"/>
-              <a:t>s.STREAM</a:t>
-            </a:r>
-          </a:p>
-          <a:p>
-            <a:r>
-              <a:rPr lang="fr-BE" dirty="0"/>
-              <a:t>s.STRAM_DATA_BLOCKED</a:t>
-            </a:r>
-          </a:p>
-          <a:p>
-            <a:r>
-              <a:rPr lang="en-GB" sz="1400" dirty="0"/>
-              <a:t>Peer Create Bidirectional Stream</a:t>
-            </a:r>
-            <a:endParaRPr lang="fr-BE" sz="1400" dirty="0"/>
-          </a:p>
-          <a:p>
-            <a:endParaRPr lang="en-GB" dirty="0"/>
-          </a:p>
-        </p:txBody>
-      </p:sp>
-      <p:cxnSp>
-        <p:nvCxnSpPr>
-          <p:cNvPr id="33" name="Connecteur droit avec flèche 32">
-            <a:extLst>
-              <a:ext uri="{FF2B5EF4-FFF2-40B4-BE49-F238E27FC236}">
-                <a16:creationId xmlns:a16="http://schemas.microsoft.com/office/drawing/2014/main" id="{6589CEFF-63AD-48E0-B8C2-2B9C42EE3BA1}"/>
-              </a:ext>
-            </a:extLst>
-          </p:cNvPr>
-          <p:cNvCxnSpPr>
-            <a:endCxn id="4" idx="1"/>
-          </p:cNvCxnSpPr>
-          <p:nvPr/>
-        </p:nvCxnSpPr>
-        <p:spPr>
-          <a:xfrm>
-            <a:off x="1072662" y="1055078"/>
-            <a:ext cx="799184" cy="540932"/>
-          </a:xfrm>
-          <a:prstGeom prst="straightConnector1">
-            <a:avLst/>
-          </a:prstGeom>
-          <a:ln w="28575">
-            <a:tailEnd type="triangle"/>
-          </a:ln>
-        </p:spPr>
-        <p:style>
-          <a:lnRef idx="1">
-            <a:schemeClr val="dk1"/>
-          </a:lnRef>
-          <a:fillRef idx="0">
-            <a:schemeClr val="dk1"/>
-          </a:fillRef>
-          <a:effectRef idx="0">
-            <a:schemeClr val="dk1"/>
-          </a:effectRef>
-          <a:fontRef idx="minor">
-            <a:schemeClr val="tx1"/>
-          </a:fontRef>
-        </p:style>
-      </p:cxnSp>
-      <p:sp>
-        <p:nvSpPr>
-          <p:cNvPr id="2" name="ZoneTexte 1">
-            <a:extLst>
-              <a:ext uri="{FF2B5EF4-FFF2-40B4-BE49-F238E27FC236}">
-                <a16:creationId xmlns:a16="http://schemas.microsoft.com/office/drawing/2014/main" id="{88F6E5C9-E973-4B06-9C4B-9944C2767988}"/>
-              </a:ext>
-            </a:extLst>
-          </p:cNvPr>
-          <p:cNvSpPr txBox="1"/>
-          <p:nvPr/>
-        </p:nvSpPr>
-        <p:spPr>
-          <a:xfrm>
-            <a:off x="359650" y="436564"/>
-            <a:ext cx="3232936" cy="646331"/>
-          </a:xfrm>
-          <a:prstGeom prst="rect">
-            <a:avLst/>
-          </a:prstGeom>
-          <a:noFill/>
-        </p:spPr>
-        <p:txBody>
-          <a:bodyPr wrap="none" rtlCol="0">
-            <a:spAutoFit/>
-          </a:bodyPr>
-          <a:lstStyle/>
-          <a:p>
-            <a:r>
-              <a:rPr lang="fr-BE" dirty="0"/>
-              <a:t>Create Stream (Sending</a:t>
-            </a:r>
-            <a:r>
-              <a:rPr lang="en-GB" dirty="0"/>
-              <a:t>)</a:t>
-            </a:r>
-          </a:p>
-          <a:p>
-            <a:r>
-              <a:rPr lang="en-GB" dirty="0"/>
-              <a:t>Peer Create Bidirectional Stream</a:t>
-            </a:r>
-            <a:endParaRPr lang="fr-BE" dirty="0"/>
-          </a:p>
-        </p:txBody>
-      </p:sp>
-      <p:sp>
-        <p:nvSpPr>
-          <p:cNvPr id="3" name="Bulle narrative : rectangle à coins arrondis 2">
-            <a:extLst>
-              <a:ext uri="{FF2B5EF4-FFF2-40B4-BE49-F238E27FC236}">
-                <a16:creationId xmlns:a16="http://schemas.microsoft.com/office/drawing/2014/main" id="{988D0EB4-947A-46B9-A29D-46DAE79C5B8E}"/>
-              </a:ext>
-            </a:extLst>
-          </p:cNvPr>
-          <p:cNvSpPr/>
-          <p:nvPr/>
-        </p:nvSpPr>
-        <p:spPr>
-          <a:xfrm>
-            <a:off x="3790358" y="1072421"/>
-            <a:ext cx="1126921" cy="369332"/>
-          </a:xfrm>
-          <a:prstGeom prst="wedgeRoundRectCallout">
-            <a:avLst/>
-          </a:prstGeom>
-          <a:ln>
-            <a:solidFill>
-              <a:schemeClr val="tx1"/>
-            </a:solidFill>
-          </a:ln>
-        </p:spPr>
-        <p:style>
-          <a:lnRef idx="2">
-            <a:schemeClr val="accent6"/>
-          </a:lnRef>
-          <a:fillRef idx="1">
-            <a:schemeClr val="lt1"/>
-          </a:fillRef>
-          <a:effectRef idx="0">
-            <a:schemeClr val="accent6"/>
-          </a:effectRef>
-          <a:fontRef idx="minor">
-            <a:schemeClr val="dk1"/>
-          </a:fontRef>
-        </p:style>
-        <p:txBody>
-          <a:bodyPr rtlCol="0" anchor="ctr"/>
-          <a:lstStyle/>
-          <a:p>
-            <a:pPr algn="ctr"/>
-            <a:r>
-              <a:rPr lang="fr-FR" dirty="0"/>
-              <a:t>sending</a:t>
-            </a:r>
-            <a:endParaRPr lang="en-GB" dirty="0"/>
-          </a:p>
-        </p:txBody>
-      </p:sp>
-      <p:sp>
-        <p:nvSpPr>
-          <p:cNvPr id="10" name="Bulle narrative : rectangle à coins arrondis 9">
-            <a:extLst>
-              <a:ext uri="{FF2B5EF4-FFF2-40B4-BE49-F238E27FC236}">
-                <a16:creationId xmlns:a16="http://schemas.microsoft.com/office/drawing/2014/main" id="{5DD2B065-1291-4E98-9EA8-E397CA6004D6}"/>
-              </a:ext>
-            </a:extLst>
-          </p:cNvPr>
-          <p:cNvSpPr/>
-          <p:nvPr/>
-        </p:nvSpPr>
-        <p:spPr>
-          <a:xfrm>
-            <a:off x="7599222" y="1138519"/>
-            <a:ext cx="1126921" cy="369332"/>
-          </a:xfrm>
-          <a:prstGeom prst="wedgeRoundRectCallout">
-            <a:avLst/>
-          </a:prstGeom>
-          <a:ln>
-            <a:solidFill>
-              <a:schemeClr val="tx1"/>
-            </a:solidFill>
-          </a:ln>
-        </p:spPr>
-        <p:style>
-          <a:lnRef idx="2">
-            <a:schemeClr val="accent6"/>
-          </a:lnRef>
-          <a:fillRef idx="1">
-            <a:schemeClr val="lt1"/>
-          </a:fillRef>
-          <a:effectRef idx="0">
-            <a:schemeClr val="accent6"/>
-          </a:effectRef>
-          <a:fontRef idx="minor">
-            <a:schemeClr val="dk1"/>
-          </a:fontRef>
-        </p:style>
-        <p:txBody>
-          <a:bodyPr rtlCol="0" anchor="ctr"/>
-          <a:lstStyle/>
-          <a:p>
-            <a:pPr algn="ctr"/>
-            <a:r>
-              <a:rPr lang="fr-FR" dirty="0"/>
-              <a:t>receiving</a:t>
-            </a:r>
-            <a:endParaRPr lang="en-GB" dirty="0"/>
-          </a:p>
-        </p:txBody>
-      </p:sp>
-      <p:sp>
-        <p:nvSpPr>
-          <p:cNvPr id="14" name="Bulle narrative : rectangle à coins arrondis 13">
-            <a:extLst>
-              <a:ext uri="{FF2B5EF4-FFF2-40B4-BE49-F238E27FC236}">
-                <a16:creationId xmlns:a16="http://schemas.microsoft.com/office/drawing/2014/main" id="{949E7391-F356-4A29-822D-BB2783A50072}"/>
-              </a:ext>
-            </a:extLst>
-          </p:cNvPr>
-          <p:cNvSpPr/>
-          <p:nvPr/>
-        </p:nvSpPr>
-        <p:spPr>
-          <a:xfrm>
-            <a:off x="9228239" y="624253"/>
-            <a:ext cx="1126921" cy="603783"/>
-          </a:xfrm>
-          <a:prstGeom prst="wedgeRoundRectCallout">
-            <a:avLst/>
-          </a:prstGeom>
-        </p:spPr>
-        <p:style>
-          <a:lnRef idx="2">
-            <a:schemeClr val="accent6"/>
-          </a:lnRef>
-          <a:fillRef idx="1">
-            <a:schemeClr val="lt1"/>
-          </a:fillRef>
-          <a:effectRef idx="0">
-            <a:schemeClr val="accent6"/>
-          </a:effectRef>
-          <a:fontRef idx="minor">
-            <a:schemeClr val="dk1"/>
-          </a:fontRef>
-        </p:style>
-        <p:txBody>
-          <a:bodyPr rtlCol="0" anchor="ctr"/>
-          <a:lstStyle/>
-          <a:p>
-            <a:pPr algn="ctr"/>
-            <a:r>
-              <a:rPr lang="fr-FR" dirty="0"/>
-              <a:t>Terminal state</a:t>
-            </a:r>
-            <a:endParaRPr lang="en-GB" dirty="0"/>
-          </a:p>
-        </p:txBody>
-      </p:sp>
-      <p:sp>
-        <p:nvSpPr>
-          <p:cNvPr id="32" name="ZoneTexte 31">
-            <a:extLst>
-              <a:ext uri="{FF2B5EF4-FFF2-40B4-BE49-F238E27FC236}">
-                <a16:creationId xmlns:a16="http://schemas.microsoft.com/office/drawing/2014/main" id="{3854FA4F-3B96-4A8F-9412-672862F5CD0D}"/>
-              </a:ext>
-            </a:extLst>
-          </p:cNvPr>
-          <p:cNvSpPr txBox="1"/>
-          <p:nvPr/>
-        </p:nvSpPr>
-        <p:spPr>
-          <a:xfrm>
-            <a:off x="3851075" y="-11029"/>
-            <a:ext cx="3985757" cy="523220"/>
+          <a:xfrm>
+            <a:off x="6241981" y="1501522"/>
+            <a:ext cx="1474056" cy="523220"/>
           </a:xfrm>
           <a:prstGeom prst="rect">
             <a:avLst/>
@@ -5026,16 +6440,83 @@
           <a:lstStyle/>
           <a:p>
             <a:r>
-              <a:rPr lang="en-GB" sz="2800" b="1" dirty="0"/>
-              <a:t>Sending Stream States</a:t>
-            </a:r>
+              <a:rPr lang="en-GB" sz="2800" b="1" dirty="0" smtClean="0"/>
+              <a:t>TOREAD</a:t>
+            </a:r>
+            <a:endParaRPr lang="en-GB" sz="2800" b="1" dirty="0"/>
           </a:p>
         </p:txBody>
       </p:sp>
     </p:spTree>
     <p:extLst>
       <p:ext uri="{BB962C8B-B14F-4D97-AF65-F5344CB8AC3E}">
-        <p14:creationId xmlns:p14="http://schemas.microsoft.com/office/powerpoint/2010/main" val="3758773835"/>
+        <p14:creationId xmlns:p14="http://schemas.microsoft.com/office/powerpoint/2010/main" val="2376729844"/>
+      </p:ext>
+    </p:extLst>
+  </p:cSld>
+  <p:clrMapOvr>
+    <a:masterClrMapping/>
+  </p:clrMapOvr>
+</p:sld>
+</file>
+
+<file path=ppt/slides/slide15.xml><?xml version="1.0" encoding="utf-8"?>
+<p:sld xmlns:a="http://schemas.openxmlformats.org/drawingml/2006/main" xmlns:r="http://schemas.openxmlformats.org/officeDocument/2006/relationships" xmlns:p="http://schemas.openxmlformats.org/presentationml/2006/main">
+  <p:cSld>
+    <p:spTree>
+      <p:nvGrpSpPr>
+        <p:cNvPr id="1" name=""/>
+        <p:cNvGrpSpPr/>
+        <p:nvPr/>
+      </p:nvGrpSpPr>
+      <p:grpSpPr>
+        <a:xfrm>
+          <a:off x="0" y="0"/>
+          <a:ext cx="0" cy="0"/>
+          <a:chOff x="0" y="0"/>
+          <a:chExt cx="0" cy="0"/>
+        </a:xfrm>
+      </p:grpSpPr>
+      <p:sp>
+        <p:nvSpPr>
+          <p:cNvPr id="5" name="ZoneTexte 4">
+            <a:extLst>
+              <a:ext uri="{FF2B5EF4-FFF2-40B4-BE49-F238E27FC236}">
+                <a16:creationId xmlns:a16="http://schemas.microsoft.com/office/drawing/2014/main" xmlns="" id="{25D0CFDD-F8D9-4498-A666-F31BA473AEDD}"/>
+              </a:ext>
+            </a:extLst>
+          </p:cNvPr>
+          <p:cNvSpPr txBox="1"/>
+          <p:nvPr/>
+        </p:nvSpPr>
+        <p:spPr>
+          <a:xfrm>
+            <a:off x="9308369" y="0"/>
+            <a:ext cx="2883631" cy="523220"/>
+          </a:xfrm>
+          <a:prstGeom prst="rect">
+            <a:avLst/>
+          </a:prstGeom>
+          <a:noFill/>
+        </p:spPr>
+        <p:txBody>
+          <a:bodyPr wrap="square">
+            <a:spAutoFit/>
+          </a:bodyPr>
+          <a:lstStyle/>
+          <a:p>
+            <a:r>
+              <a:rPr lang="en-GB" sz="2800" b="1" dirty="0" smtClean="0"/>
+              <a:t>Packet number</a:t>
+            </a:r>
+            <a:endParaRPr lang="en-GB" sz="2800" b="1" dirty="0"/>
+          </a:p>
+        </p:txBody>
+      </p:sp>
+    </p:spTree>
+    <p:extLst>
+      <p:ext uri="{BB962C8B-B14F-4D97-AF65-F5344CB8AC3E}">
+        <p14:creationId xmlns:p14="http://schemas.microsoft.com/office/powerpoint/2010/main" val="1112834315"/>
       </p:ext>
     </p:extLst>
   </p:cSld>
@@ -5067,7 +6548,7 @@
           <p:cNvPr id="4" name="Ellipse 3">
             <a:extLst>
               <a:ext uri="{FF2B5EF4-FFF2-40B4-BE49-F238E27FC236}">
-                <a16:creationId xmlns:a16="http://schemas.microsoft.com/office/drawing/2014/main" id="{89FCD844-DF7E-40C9-9D11-022F7FE63189}"/>
+                <a16:creationId xmlns:a16="http://schemas.microsoft.com/office/drawing/2014/main" xmlns="" id="{89FCD844-DF7E-40C9-9D11-022F7FE63189}"/>
               </a:ext>
             </a:extLst>
           </p:cNvPr>
@@ -5076,7 +6557,7 @@
         </p:nvSpPr>
         <p:spPr>
           <a:xfrm>
-            <a:off x="1652953" y="1547448"/>
+            <a:off x="1652953" y="1459524"/>
             <a:ext cx="1494693" cy="931985"/>
           </a:xfrm>
           <a:prstGeom prst="ellipse">
@@ -5106,7 +6587,7 @@
             <a:pPr algn="ctr"/>
             <a:r>
               <a:rPr lang="fr-BE" b="1" dirty="0"/>
-              <a:t>Recv </a:t>
+              <a:t>Ready </a:t>
             </a:r>
             <a:endParaRPr lang="en-GB" b="1" dirty="0"/>
           </a:p>
@@ -5117,7 +6598,7 @@
           <p:cNvPr id="5" name="Ellipse 4">
             <a:extLst>
               <a:ext uri="{FF2B5EF4-FFF2-40B4-BE49-F238E27FC236}">
-                <a16:creationId xmlns:a16="http://schemas.microsoft.com/office/drawing/2014/main" id="{04266D3A-83FA-4DC5-B077-3FE3BE66996C}"/>
+                <a16:creationId xmlns:a16="http://schemas.microsoft.com/office/drawing/2014/main" xmlns="" id="{04266D3A-83FA-4DC5-B077-3FE3BE66996C}"/>
               </a:ext>
             </a:extLst>
           </p:cNvPr>
@@ -5126,7 +6607,7 @@
         </p:nvSpPr>
         <p:spPr>
           <a:xfrm>
-            <a:off x="1652952" y="4897317"/>
+            <a:off x="1652952" y="4809393"/>
             <a:ext cx="1494693" cy="931985"/>
           </a:xfrm>
           <a:prstGeom prst="ellipse">
@@ -5159,7 +6640,7 @@
             <a:pPr algn="ctr"/>
             <a:r>
               <a:rPr lang="fr-BE" b="1" dirty="0"/>
-              <a:t>Size Known </a:t>
+              <a:t>Send </a:t>
             </a:r>
             <a:endParaRPr lang="en-GB" b="1" dirty="0"/>
           </a:p>
@@ -5170,7 +6651,7 @@
           <p:cNvPr id="6" name="Ellipse 5">
             <a:extLst>
               <a:ext uri="{FF2B5EF4-FFF2-40B4-BE49-F238E27FC236}">
-                <a16:creationId xmlns:a16="http://schemas.microsoft.com/office/drawing/2014/main" id="{20EF6430-F8E7-4FD1-9FFC-35EEC2563371}"/>
+                <a16:creationId xmlns:a16="http://schemas.microsoft.com/office/drawing/2014/main" xmlns="" id="{20EF6430-F8E7-4FD1-9FFC-35EEC2563371}"/>
               </a:ext>
             </a:extLst>
           </p:cNvPr>
@@ -5179,7 +6660,7 @@
         </p:nvSpPr>
         <p:spPr>
           <a:xfrm>
-            <a:off x="5348652" y="4897315"/>
+            <a:off x="5348653" y="4809393"/>
             <a:ext cx="1494693" cy="931985"/>
           </a:xfrm>
           <a:prstGeom prst="ellipse">
@@ -5212,7 +6693,7 @@
             <a:pPr algn="ctr"/>
             <a:r>
               <a:rPr lang="fr-BE" b="1" dirty="0"/>
-              <a:t>Data Recvd </a:t>
+              <a:t>Data Sent </a:t>
             </a:r>
             <a:endParaRPr lang="en-GB" b="1" dirty="0"/>
           </a:p>
@@ -5223,7 +6704,7 @@
           <p:cNvPr id="7" name="Ellipse 6">
             <a:extLst>
               <a:ext uri="{FF2B5EF4-FFF2-40B4-BE49-F238E27FC236}">
-                <a16:creationId xmlns:a16="http://schemas.microsoft.com/office/drawing/2014/main" id="{A05BD43F-3BA6-4D44-9A89-6240DC624C9A}"/>
+                <a16:creationId xmlns:a16="http://schemas.microsoft.com/office/drawing/2014/main" xmlns="" id="{A05BD43F-3BA6-4D44-9A89-6240DC624C9A}"/>
               </a:ext>
             </a:extLst>
           </p:cNvPr>
@@ -5232,7 +6713,7 @@
         </p:nvSpPr>
         <p:spPr>
           <a:xfrm>
-            <a:off x="5348652" y="1547447"/>
+            <a:off x="5348652" y="1459523"/>
             <a:ext cx="1494693" cy="931985"/>
           </a:xfrm>
           <a:prstGeom prst="ellipse">
@@ -5265,7 +6746,7 @@
             <a:pPr algn="ctr"/>
             <a:r>
               <a:rPr lang="fr-BE" b="1" dirty="0"/>
-              <a:t>Reset Recvd </a:t>
+              <a:t>Reset Sent </a:t>
             </a:r>
             <a:endParaRPr lang="en-GB" b="1" dirty="0"/>
           </a:p>
@@ -5276,7 +6757,7 @@
           <p:cNvPr id="8" name="Ellipse 7">
             <a:extLst>
               <a:ext uri="{FF2B5EF4-FFF2-40B4-BE49-F238E27FC236}">
-                <a16:creationId xmlns:a16="http://schemas.microsoft.com/office/drawing/2014/main" id="{D18BD9DA-F640-40D8-890E-826C2DD83CAC}"/>
+                <a16:creationId xmlns:a16="http://schemas.microsoft.com/office/drawing/2014/main" xmlns="" id="{D18BD9DA-F640-40D8-890E-826C2DD83CAC}"/>
               </a:ext>
             </a:extLst>
           </p:cNvPr>
@@ -5285,7 +6766,7 @@
         </p:nvSpPr>
         <p:spPr>
           <a:xfrm>
-            <a:off x="9044354" y="1547446"/>
+            <a:off x="9044354" y="1459522"/>
             <a:ext cx="1494693" cy="931985"/>
           </a:xfrm>
           <a:prstGeom prst="ellipse">
@@ -5320,7 +6801,7 @@
             <a:pPr algn="ctr"/>
             <a:r>
               <a:rPr lang="fr-BE" b="1" dirty="0"/>
-              <a:t>Reset Read </a:t>
+              <a:t>Reset Recvd </a:t>
             </a:r>
             <a:endParaRPr lang="en-GB" b="1" dirty="0"/>
           </a:p>
@@ -5331,7 +6812,7 @@
           <p:cNvPr id="9" name="Ellipse 8">
             <a:extLst>
               <a:ext uri="{FF2B5EF4-FFF2-40B4-BE49-F238E27FC236}">
-                <a16:creationId xmlns:a16="http://schemas.microsoft.com/office/drawing/2014/main" id="{C9FE4625-6D4C-4C81-B023-2ED8433BE05F}"/>
+                <a16:creationId xmlns:a16="http://schemas.microsoft.com/office/drawing/2014/main" xmlns="" id="{C9FE4625-6D4C-4C81-B023-2ED8433BE05F}"/>
               </a:ext>
             </a:extLst>
           </p:cNvPr>
@@ -5340,7 +6821,7 @@
         </p:nvSpPr>
         <p:spPr>
           <a:xfrm>
-            <a:off x="9044354" y="4897316"/>
+            <a:off x="9044354" y="4809392"/>
             <a:ext cx="1494693" cy="931985"/>
           </a:xfrm>
           <a:prstGeom prst="ellipse">
@@ -5375,7 +6856,7 @@
             <a:pPr algn="ctr"/>
             <a:r>
               <a:rPr lang="fr-BE" b="1" dirty="0"/>
-              <a:t>Data Read </a:t>
+              <a:t>Data Recvd </a:t>
             </a:r>
             <a:endParaRPr lang="en-GB" b="1" dirty="0"/>
           </a:p>
@@ -5386,7 +6867,7 @@
           <p:cNvPr id="11" name="Connecteur droit avec flèche 10">
             <a:extLst>
               <a:ext uri="{FF2B5EF4-FFF2-40B4-BE49-F238E27FC236}">
-                <a16:creationId xmlns:a16="http://schemas.microsoft.com/office/drawing/2014/main" id="{FA4799A5-0298-4D1C-A51C-8C4AC1ECF70E}"/>
+                <a16:creationId xmlns:a16="http://schemas.microsoft.com/office/drawing/2014/main" xmlns="" id="{FA4799A5-0298-4D1C-A51C-8C4AC1ECF70E}"/>
               </a:ext>
             </a:extLst>
           </p:cNvPr>
@@ -5398,7 +6879,7 @@
         </p:nvCxnSpPr>
         <p:spPr>
           <a:xfrm flipV="1">
-            <a:off x="3147646" y="2013440"/>
+            <a:off x="3147646" y="1925516"/>
             <a:ext cx="2201006" cy="1"/>
           </a:xfrm>
           <a:prstGeom prst="straightConnector1">
@@ -5428,7 +6909,7 @@
           <p:cNvPr id="13" name="Connecteur droit avec flèche 12">
             <a:extLst>
               <a:ext uri="{FF2B5EF4-FFF2-40B4-BE49-F238E27FC236}">
-                <a16:creationId xmlns:a16="http://schemas.microsoft.com/office/drawing/2014/main" id="{015152B5-CA66-4A0F-9894-51E75D341D8D}"/>
+                <a16:creationId xmlns:a16="http://schemas.microsoft.com/office/drawing/2014/main" xmlns="" id="{015152B5-CA66-4A0F-9894-51E75D341D8D}"/>
               </a:ext>
             </a:extLst>
           </p:cNvPr>
@@ -5437,7 +6918,7 @@
         </p:nvCxnSpPr>
         <p:spPr>
           <a:xfrm flipV="1">
-            <a:off x="2919046" y="2479431"/>
+            <a:off x="2919046" y="2391507"/>
             <a:ext cx="2672862" cy="2417885"/>
           </a:xfrm>
           <a:prstGeom prst="straightConnector1">
@@ -5467,7 +6948,7 @@
           <p:cNvPr id="15" name="Connecteur droit avec flèche 14">
             <a:extLst>
               <a:ext uri="{FF2B5EF4-FFF2-40B4-BE49-F238E27FC236}">
-                <a16:creationId xmlns:a16="http://schemas.microsoft.com/office/drawing/2014/main" id="{7849844A-8993-4C5F-A72A-918BFA1F176F}"/>
+                <a16:creationId xmlns:a16="http://schemas.microsoft.com/office/drawing/2014/main" xmlns="" id="{7849844A-8993-4C5F-A72A-918BFA1F176F}"/>
               </a:ext>
             </a:extLst>
           </p:cNvPr>
@@ -5479,7 +6960,7 @@
         </p:nvCxnSpPr>
         <p:spPr>
           <a:xfrm flipH="1">
-            <a:off x="2400299" y="2479433"/>
+            <a:off x="2400299" y="2391509"/>
             <a:ext cx="1" cy="2417884"/>
           </a:xfrm>
           <a:prstGeom prst="straightConnector1">
@@ -5509,7 +6990,7 @@
           <p:cNvPr id="17" name="Connecteur droit avec flèche 16">
             <a:extLst>
               <a:ext uri="{FF2B5EF4-FFF2-40B4-BE49-F238E27FC236}">
-                <a16:creationId xmlns:a16="http://schemas.microsoft.com/office/drawing/2014/main" id="{35CD81BA-EEE1-4F6F-B1D2-060F1B5B1F95}"/>
+                <a16:creationId xmlns:a16="http://schemas.microsoft.com/office/drawing/2014/main" xmlns="" id="{35CD81BA-EEE1-4F6F-B1D2-060F1B5B1F95}"/>
               </a:ext>
             </a:extLst>
           </p:cNvPr>
@@ -5520,9 +7001,9 @@
           <p:nvPr/>
         </p:nvCxnSpPr>
         <p:spPr>
-          <a:xfrm flipV="1">
-            <a:off x="3147645" y="5363308"/>
-            <a:ext cx="2201007" cy="2"/>
+          <a:xfrm>
+            <a:off x="3147645" y="5275386"/>
+            <a:ext cx="2201008" cy="0"/>
           </a:xfrm>
           <a:prstGeom prst="straightConnector1">
             <a:avLst/>
@@ -5551,7 +7032,7 @@
           <p:cNvPr id="20" name="Connecteur droit avec flèche 19">
             <a:extLst>
               <a:ext uri="{FF2B5EF4-FFF2-40B4-BE49-F238E27FC236}">
-                <a16:creationId xmlns:a16="http://schemas.microsoft.com/office/drawing/2014/main" id="{1055E33E-43DF-4EA1-B851-345375F53862}"/>
+                <a16:creationId xmlns:a16="http://schemas.microsoft.com/office/drawing/2014/main" xmlns="" id="{1055E33E-43DF-4EA1-B851-345375F53862}"/>
               </a:ext>
             </a:extLst>
           </p:cNvPr>
@@ -5562,9 +7043,9 @@
           <p:nvPr/>
         </p:nvCxnSpPr>
         <p:spPr>
-          <a:xfrm>
-            <a:off x="6843345" y="5363308"/>
-            <a:ext cx="2201009" cy="1"/>
+          <a:xfrm flipV="1">
+            <a:off x="6843346" y="5275385"/>
+            <a:ext cx="2201008" cy="1"/>
           </a:xfrm>
           <a:prstGeom prst="straightConnector1">
             <a:avLst/>
@@ -5593,7 +7074,7 @@
           <p:cNvPr id="22" name="Connecteur droit avec flèche 21">
             <a:extLst>
               <a:ext uri="{FF2B5EF4-FFF2-40B4-BE49-F238E27FC236}">
-                <a16:creationId xmlns:a16="http://schemas.microsoft.com/office/drawing/2014/main" id="{774693B9-DF54-4AE5-81F3-7FD221F2E9EC}"/>
+                <a16:creationId xmlns:a16="http://schemas.microsoft.com/office/drawing/2014/main" xmlns="" id="{774693B9-DF54-4AE5-81F3-7FD221F2E9EC}"/>
               </a:ext>
             </a:extLst>
           </p:cNvPr>
@@ -5605,7 +7086,7 @@
         </p:nvCxnSpPr>
         <p:spPr>
           <a:xfrm flipV="1">
-            <a:off x="6843345" y="2013439"/>
+            <a:off x="6843345" y="1925515"/>
             <a:ext cx="2201009" cy="1"/>
           </a:xfrm>
           <a:prstGeom prst="straightConnector1">
@@ -5635,18 +7116,19 @@
           <p:cNvPr id="24" name="Connecteur droit avec flèche 23">
             <a:extLst>
               <a:ext uri="{FF2B5EF4-FFF2-40B4-BE49-F238E27FC236}">
-                <a16:creationId xmlns:a16="http://schemas.microsoft.com/office/drawing/2014/main" id="{FE3792FD-3716-4B03-8B24-62235C4F1465}"/>
+                <a16:creationId xmlns:a16="http://schemas.microsoft.com/office/drawing/2014/main" xmlns="" id="{FE3792FD-3716-4B03-8B24-62235C4F1465}"/>
               </a:ext>
             </a:extLst>
           </p:cNvPr>
           <p:cNvCxnSpPr>
-            <a:cxnSpLocks/>
+            <a:stCxn id="6" idx="0"/>
+            <a:endCxn id="7" idx="4"/>
           </p:cNvCxnSpPr>
           <p:nvPr/>
         </p:nvCxnSpPr>
         <p:spPr>
           <a:xfrm flipH="1" flipV="1">
-            <a:off x="5887774" y="2479431"/>
+            <a:off x="6095999" y="2391508"/>
             <a:ext cx="1" cy="2417885"/>
           </a:xfrm>
           <a:prstGeom prst="straightConnector1">
@@ -5676,7 +7158,7 @@
           <p:cNvPr id="25" name="ZoneTexte 24">
             <a:extLst>
               <a:ext uri="{FF2B5EF4-FFF2-40B4-BE49-F238E27FC236}">
-                <a16:creationId xmlns:a16="http://schemas.microsoft.com/office/drawing/2014/main" id="{EC37E58C-8569-44E3-A1DC-1FED44F81068}"/>
+                <a16:creationId xmlns:a16="http://schemas.microsoft.com/office/drawing/2014/main" xmlns="" id="{EC37E58C-8569-44E3-A1DC-1FED44F81068}"/>
               </a:ext>
             </a:extLst>
           </p:cNvPr>
@@ -5685,8 +7167,8 @@
         </p:nvSpPr>
         <p:spPr>
           <a:xfrm>
-            <a:off x="3404781" y="1626284"/>
-            <a:ext cx="1761316" cy="369332"/>
+            <a:off x="3404781" y="1538360"/>
+            <a:ext cx="1794146" cy="369332"/>
           </a:xfrm>
           <a:prstGeom prst="rect">
             <a:avLst/>
@@ -5701,7 +7183,7 @@
           <a:p>
             <a:r>
               <a:rPr lang="fr-BE" dirty="0"/>
-              <a:t>r.RESET_STREAM</a:t>
+              <a:t>s.RESET_STREAM</a:t>
             </a:r>
             <a:endParaRPr lang="en-GB" dirty="0"/>
           </a:p>
@@ -5712,7 +7194,7 @@
           <p:cNvPr id="26" name="ZoneTexte 25">
             <a:extLst>
               <a:ext uri="{FF2B5EF4-FFF2-40B4-BE49-F238E27FC236}">
-                <a16:creationId xmlns:a16="http://schemas.microsoft.com/office/drawing/2014/main" id="{FAA392D6-1A3B-4D0A-8C01-817A0F04B637}"/>
+                <a16:creationId xmlns:a16="http://schemas.microsoft.com/office/drawing/2014/main" xmlns="" id="{FAA392D6-1A3B-4D0A-8C01-817A0F04B637}"/>
               </a:ext>
             </a:extLst>
           </p:cNvPr>
@@ -5721,8 +7203,8 @@
         </p:nvSpPr>
         <p:spPr>
           <a:xfrm rot="18948727">
-            <a:off x="3259316" y="3280739"/>
-            <a:ext cx="1761316" cy="369332"/>
+            <a:off x="3242901" y="3192815"/>
+            <a:ext cx="1794146" cy="369332"/>
           </a:xfrm>
           <a:prstGeom prst="rect">
             <a:avLst/>
@@ -5737,7 +7219,7 @@
           <a:p>
             <a:r>
               <a:rPr lang="fr-BE" dirty="0"/>
-              <a:t>r.RESET_STREAM</a:t>
+              <a:t>s.RESET_STREAM</a:t>
             </a:r>
             <a:endParaRPr lang="en-GB" dirty="0"/>
           </a:p>
@@ -5748,7 +7230,7 @@
           <p:cNvPr id="27" name="ZoneTexte 26">
             <a:extLst>
               <a:ext uri="{FF2B5EF4-FFF2-40B4-BE49-F238E27FC236}">
-                <a16:creationId xmlns:a16="http://schemas.microsoft.com/office/drawing/2014/main" id="{E9D2A897-EAB3-4778-A48C-996CC1E8AC50}"/>
+                <a16:creationId xmlns:a16="http://schemas.microsoft.com/office/drawing/2014/main" xmlns="" id="{E9D2A897-EAB3-4778-A48C-996CC1E8AC50}"/>
               </a:ext>
             </a:extLst>
           </p:cNvPr>
@@ -5757,8 +7239,8 @@
         </p:nvSpPr>
         <p:spPr>
           <a:xfrm rot="16200000">
-            <a:off x="4664278" y="3566218"/>
-            <a:ext cx="1902380" cy="369332"/>
+            <a:off x="4946881" y="3496169"/>
+            <a:ext cx="1794146" cy="369332"/>
           </a:xfrm>
           <a:prstGeom prst="rect">
             <a:avLst/>
@@ -5773,7 +7255,7 @@
           <a:p>
             <a:r>
               <a:rPr lang="fr-BE" dirty="0"/>
-              <a:t>[r.RESET_STREAM]</a:t>
+              <a:t>s.RESET_STREAM</a:t>
             </a:r>
             <a:endParaRPr lang="en-GB" dirty="0"/>
           </a:p>
@@ -5784,7 +7266,7 @@
           <p:cNvPr id="28" name="ZoneTexte 27">
             <a:extLst>
               <a:ext uri="{FF2B5EF4-FFF2-40B4-BE49-F238E27FC236}">
-                <a16:creationId xmlns:a16="http://schemas.microsoft.com/office/drawing/2014/main" id="{25FE3CA9-2E21-4E5D-8555-BE8394BBA317}"/>
+                <a16:creationId xmlns:a16="http://schemas.microsoft.com/office/drawing/2014/main" xmlns="" id="{25FE3CA9-2E21-4E5D-8555-BE8394BBA317}"/>
               </a:ext>
             </a:extLst>
           </p:cNvPr>
@@ -5793,8 +7275,8 @@
         </p:nvSpPr>
         <p:spPr>
           <a:xfrm>
-            <a:off x="7223748" y="1626519"/>
-            <a:ext cx="1417760" cy="369332"/>
+            <a:off x="7599222" y="1556182"/>
+            <a:ext cx="675698" cy="369332"/>
           </a:xfrm>
           <a:prstGeom prst="rect">
             <a:avLst/>
@@ -5809,7 +7291,7 @@
           <a:p>
             <a:r>
               <a:rPr lang="fr-BE" dirty="0"/>
-              <a:t>app.read.RST</a:t>
+              <a:t>r.ACK</a:t>
             </a:r>
             <a:endParaRPr lang="en-GB" dirty="0"/>
           </a:p>
@@ -5820,7 +7302,7 @@
           <p:cNvPr id="29" name="ZoneTexte 28">
             <a:extLst>
               <a:ext uri="{FF2B5EF4-FFF2-40B4-BE49-F238E27FC236}">
-                <a16:creationId xmlns:a16="http://schemas.microsoft.com/office/drawing/2014/main" id="{0692236C-15B0-4B00-964F-2FC9F6384F6F}"/>
+                <a16:creationId xmlns:a16="http://schemas.microsoft.com/office/drawing/2014/main" xmlns="" id="{0692236C-15B0-4B00-964F-2FC9F6384F6F}"/>
               </a:ext>
             </a:extLst>
           </p:cNvPr>
@@ -5829,7 +7311,7 @@
         </p:nvSpPr>
         <p:spPr>
           <a:xfrm>
-            <a:off x="7641825" y="4897315"/>
+            <a:off x="7641825" y="4809391"/>
             <a:ext cx="937757" cy="369332"/>
           </a:xfrm>
           <a:prstGeom prst="rect">
@@ -5856,7 +7338,7 @@
           <p:cNvPr id="30" name="ZoneTexte 29">
             <a:extLst>
               <a:ext uri="{FF2B5EF4-FFF2-40B4-BE49-F238E27FC236}">
-                <a16:creationId xmlns:a16="http://schemas.microsoft.com/office/drawing/2014/main" id="{CE7EF607-C441-4C6F-934E-973FAD16220A}"/>
+                <a16:creationId xmlns:a16="http://schemas.microsoft.com/office/drawing/2014/main" xmlns="" id="{CE7EF607-C441-4C6F-934E-973FAD16220A}"/>
               </a:ext>
             </a:extLst>
           </p:cNvPr>
@@ -5865,8 +7347,8 @@
         </p:nvSpPr>
         <p:spPr>
           <a:xfrm>
-            <a:off x="3431822" y="4985180"/>
-            <a:ext cx="1763688" cy="369332"/>
+            <a:off x="3431822" y="4897256"/>
+            <a:ext cx="1647310" cy="369332"/>
           </a:xfrm>
           <a:prstGeom prst="rect">
             <a:avLst/>
@@ -5881,7 +7363,7 @@
           <a:p>
             <a:r>
               <a:rPr lang="fr-BE" dirty="0"/>
-              <a:t>app.read.all data</a:t>
+              <a:t>s.STREAM + FIN</a:t>
             </a:r>
             <a:endParaRPr lang="en-GB" dirty="0"/>
           </a:p>
@@ -5892,7 +7374,7 @@
           <p:cNvPr id="31" name="ZoneTexte 30">
             <a:extLst>
               <a:ext uri="{FF2B5EF4-FFF2-40B4-BE49-F238E27FC236}">
-                <a16:creationId xmlns:a16="http://schemas.microsoft.com/office/drawing/2014/main" id="{C9963DA0-1C1A-4E2E-BA58-B5FF1051DD91}"/>
+                <a16:creationId xmlns:a16="http://schemas.microsoft.com/office/drawing/2014/main" xmlns="" id="{C9963DA0-1C1A-4E2E-BA58-B5FF1051DD91}"/>
               </a:ext>
             </a:extLst>
           </p:cNvPr>
@@ -5901,8 +7383,8 @@
         </p:nvSpPr>
         <p:spPr>
           <a:xfrm rot="16200000">
-            <a:off x="1219384" y="3494259"/>
-            <a:ext cx="1614481" cy="369332"/>
+            <a:off x="712377" y="3031062"/>
+            <a:ext cx="2584747" cy="1138773"/>
           </a:xfrm>
           <a:prstGeom prst="rect">
             <a:avLst/>
@@ -5917,8 +7399,24 @@
           <a:p>
             <a:r>
               <a:rPr lang="fr-BE" dirty="0"/>
-              <a:t>r.STREAM + FIN</a:t>
-            </a:r>
+              <a:t>s.STREAM</a:t>
+            </a:r>
+          </a:p>
+          <a:p>
+            <a:r>
+              <a:rPr lang="fr-BE" dirty="0"/>
+              <a:t>s.STRAM_DATA_BLOCKED</a:t>
+            </a:r>
+          </a:p>
+          <a:p>
+            <a:r>
+              <a:rPr lang="en-GB" sz="1400" dirty="0"/>
+              <a:t>Peer Create Bidirectional Stream</a:t>
+            </a:r>
+            <a:endParaRPr lang="fr-BE" sz="1400" dirty="0"/>
+          </a:p>
+          <a:p>
+            <a:endParaRPr lang="en-GB" dirty="0"/>
           </a:p>
         </p:txBody>
       </p:sp>
@@ -5927,7 +7425,7 @@
           <p:cNvPr id="33" name="Connecteur droit avec flèche 32">
             <a:extLst>
               <a:ext uri="{FF2B5EF4-FFF2-40B4-BE49-F238E27FC236}">
-                <a16:creationId xmlns:a16="http://schemas.microsoft.com/office/drawing/2014/main" id="{6589CEFF-63AD-48E0-B8C2-2B9C42EE3BA1}"/>
+                <a16:creationId xmlns:a16="http://schemas.microsoft.com/office/drawing/2014/main" xmlns="" id="{6589CEFF-63AD-48E0-B8C2-2B9C42EE3BA1}"/>
               </a:ext>
             </a:extLst>
           </p:cNvPr>
@@ -5938,7 +7436,7 @@
         </p:nvCxnSpPr>
         <p:spPr>
           <a:xfrm>
-            <a:off x="1072662" y="1143002"/>
+            <a:off x="1072662" y="1055078"/>
             <a:ext cx="799184" cy="540932"/>
           </a:xfrm>
           <a:prstGeom prst="straightConnector1">
@@ -5965,10 +7463,10 @@
       </p:cxnSp>
       <p:sp>
         <p:nvSpPr>
-          <p:cNvPr id="23" name="ZoneTexte 22">
-            <a:extLst>
-              <a:ext uri="{FF2B5EF4-FFF2-40B4-BE49-F238E27FC236}">
-                <a16:creationId xmlns:a16="http://schemas.microsoft.com/office/drawing/2014/main" id="{479D2F68-32D5-4E80-B573-2C6156DCB22F}"/>
+          <p:cNvPr id="2" name="ZoneTexte 1">
+            <a:extLst>
+              <a:ext uri="{FF2B5EF4-FFF2-40B4-BE49-F238E27FC236}">
+                <a16:creationId xmlns:a16="http://schemas.microsoft.com/office/drawing/2014/main" xmlns="" id="{88F6E5C9-E973-4B06-9C4B-9944C2767988}"/>
               </a:ext>
             </a:extLst>
           </p:cNvPr>
@@ -5977,8 +7475,8 @@
         </p:nvSpPr>
         <p:spPr>
           <a:xfrm>
-            <a:off x="229185" y="14804"/>
-            <a:ext cx="5386283" cy="1200329"/>
+            <a:off x="359650" y="436564"/>
+            <a:ext cx="3232936" cy="646331"/>
           </a:xfrm>
           <a:prstGeom prst="rect">
             <a:avLst/>
@@ -5993,77 +7491,182 @@
           <a:p>
             <a:r>
               <a:rPr lang="fr-BE" dirty="0"/>
-              <a:t>r.STREAM / r.RESET_STREAM/ r.STRAM_DATA_BLOCKED</a:t>
-            </a:r>
-          </a:p>
-          <a:p>
-            <a:r>
-              <a:rPr lang="fr-BE" dirty="0"/>
-              <a:t>Create Bidirectional Stream (Sending)</a:t>
-            </a:r>
-          </a:p>
-          <a:p>
-            <a:r>
-              <a:rPr lang="fr-BE" dirty="0"/>
-              <a:t>r.MAX_STREAM_DATA / r.STOP_SENDING (Bidirectional)</a:t>
-            </a:r>
-          </a:p>
-          <a:p>
-            <a:r>
-              <a:rPr lang="fr-BE" dirty="0"/>
-              <a:t>Create Higher-Numbered Stream</a:t>
-            </a:r>
-            <a:endParaRPr lang="en-GB" dirty="0"/>
-          </a:p>
-        </p:txBody>
-      </p:sp>
-      <p:cxnSp>
-        <p:nvCxnSpPr>
-          <p:cNvPr id="32" name="Connecteur droit avec flèche 31">
-            <a:extLst>
-              <a:ext uri="{FF2B5EF4-FFF2-40B4-BE49-F238E27FC236}">
-                <a16:creationId xmlns:a16="http://schemas.microsoft.com/office/drawing/2014/main" id="{F4BA6B60-DF61-4E3A-B967-DF30AA624FE0}"/>
-              </a:ext>
-            </a:extLst>
-          </p:cNvPr>
-          <p:cNvCxnSpPr>
-            <a:cxnSpLocks/>
-          </p:cNvCxnSpPr>
-          <p:nvPr/>
-        </p:nvCxnSpPr>
-        <p:spPr>
-          <a:xfrm flipH="1">
-            <a:off x="6304227" y="2505971"/>
-            <a:ext cx="1" cy="2391344"/>
-          </a:xfrm>
-          <a:prstGeom prst="straightConnector1">
-            <a:avLst/>
-          </a:prstGeom>
-          <a:ln w="28575">
-            <a:tailEnd type="triangle"/>
+              <a:t>Create Stream (Sending</a:t>
+            </a:r>
+            <a:r>
+              <a:rPr lang="en-GB" dirty="0"/>
+              <a:t>)</a:t>
+            </a:r>
+          </a:p>
+          <a:p>
+            <a:r>
+              <a:rPr lang="en-GB" dirty="0"/>
+              <a:t>Peer Create Bidirectional Stream</a:t>
+            </a:r>
+            <a:endParaRPr lang="fr-BE" dirty="0"/>
+          </a:p>
+        </p:txBody>
+      </p:sp>
+      <p:sp>
+        <p:nvSpPr>
+          <p:cNvPr id="3" name="Bulle narrative : rectangle à coins arrondis 2">
+            <a:extLst>
+              <a:ext uri="{FF2B5EF4-FFF2-40B4-BE49-F238E27FC236}">
+                <a16:creationId xmlns:a16="http://schemas.microsoft.com/office/drawing/2014/main" xmlns="" id="{988D0EB4-947A-46B9-A29D-46DAE79C5B8E}"/>
+              </a:ext>
+            </a:extLst>
+          </p:cNvPr>
+          <p:cNvSpPr/>
+          <p:nvPr/>
+        </p:nvSpPr>
+        <p:spPr>
+          <a:xfrm>
+            <a:off x="3790358" y="1072421"/>
+            <a:ext cx="1126921" cy="369332"/>
+          </a:xfrm>
+          <a:prstGeom prst="wedgeRoundRectCallout">
+            <a:avLst/>
+          </a:prstGeom>
+          <a:ln>
+            <a:solidFill>
+              <a:schemeClr val="tx1"/>
+            </a:solidFill>
           </a:ln>
         </p:spPr>
         <p:style>
-          <a:lnRef idx="1">
-            <a:schemeClr val="dk1"/>
+          <a:lnRef idx="2">
+            <a:schemeClr val="accent6"/>
           </a:lnRef>
-          <a:fillRef idx="0">
-            <a:schemeClr val="dk1"/>
+          <a:fillRef idx="1">
+            <a:schemeClr val="lt1"/>
           </a:fillRef>
           <a:effectRef idx="0">
-            <a:schemeClr val="dk1"/>
+            <a:schemeClr val="accent6"/>
           </a:effectRef>
           <a:fontRef idx="minor">
-            <a:schemeClr val="tx1"/>
+            <a:schemeClr val="dk1"/>
           </a:fontRef>
         </p:style>
-      </p:cxnSp>
-      <p:sp>
-        <p:nvSpPr>
-          <p:cNvPr id="34" name="ZoneTexte 33">
-            <a:extLst>
-              <a:ext uri="{FF2B5EF4-FFF2-40B4-BE49-F238E27FC236}">
-                <a16:creationId xmlns:a16="http://schemas.microsoft.com/office/drawing/2014/main" id="{E9ED5443-1DA7-441F-B3CC-AA9A0CEBB87B}"/>
+        <p:txBody>
+          <a:bodyPr rtlCol="0" anchor="ctr"/>
+          <a:lstStyle/>
+          <a:p>
+            <a:pPr algn="ctr"/>
+            <a:r>
+              <a:rPr lang="fr-FR" dirty="0"/>
+              <a:t>sending</a:t>
+            </a:r>
+            <a:endParaRPr lang="en-GB" dirty="0"/>
+          </a:p>
+        </p:txBody>
+      </p:sp>
+      <p:sp>
+        <p:nvSpPr>
+          <p:cNvPr id="10" name="Bulle narrative : rectangle à coins arrondis 9">
+            <a:extLst>
+              <a:ext uri="{FF2B5EF4-FFF2-40B4-BE49-F238E27FC236}">
+                <a16:creationId xmlns:a16="http://schemas.microsoft.com/office/drawing/2014/main" xmlns="" id="{5DD2B065-1291-4E98-9EA8-E397CA6004D6}"/>
+              </a:ext>
+            </a:extLst>
+          </p:cNvPr>
+          <p:cNvSpPr/>
+          <p:nvPr/>
+        </p:nvSpPr>
+        <p:spPr>
+          <a:xfrm>
+            <a:off x="7599222" y="1138519"/>
+            <a:ext cx="1126921" cy="369332"/>
+          </a:xfrm>
+          <a:prstGeom prst="wedgeRoundRectCallout">
+            <a:avLst/>
+          </a:prstGeom>
+          <a:ln>
+            <a:solidFill>
+              <a:schemeClr val="tx1"/>
+            </a:solidFill>
+          </a:ln>
+        </p:spPr>
+        <p:style>
+          <a:lnRef idx="2">
+            <a:schemeClr val="accent6"/>
+          </a:lnRef>
+          <a:fillRef idx="1">
+            <a:schemeClr val="lt1"/>
+          </a:fillRef>
+          <a:effectRef idx="0">
+            <a:schemeClr val="accent6"/>
+          </a:effectRef>
+          <a:fontRef idx="minor">
+            <a:schemeClr val="dk1"/>
+          </a:fontRef>
+        </p:style>
+        <p:txBody>
+          <a:bodyPr rtlCol="0" anchor="ctr"/>
+          <a:lstStyle/>
+          <a:p>
+            <a:pPr algn="ctr"/>
+            <a:r>
+              <a:rPr lang="fr-FR" dirty="0"/>
+              <a:t>receiving</a:t>
+            </a:r>
+            <a:endParaRPr lang="en-GB" dirty="0"/>
+          </a:p>
+        </p:txBody>
+      </p:sp>
+      <p:sp>
+        <p:nvSpPr>
+          <p:cNvPr id="14" name="Bulle narrative : rectangle à coins arrondis 13">
+            <a:extLst>
+              <a:ext uri="{FF2B5EF4-FFF2-40B4-BE49-F238E27FC236}">
+                <a16:creationId xmlns:a16="http://schemas.microsoft.com/office/drawing/2014/main" xmlns="" id="{949E7391-F356-4A29-822D-BB2783A50072}"/>
+              </a:ext>
+            </a:extLst>
+          </p:cNvPr>
+          <p:cNvSpPr/>
+          <p:nvPr/>
+        </p:nvSpPr>
+        <p:spPr>
+          <a:xfrm>
+            <a:off x="9228239" y="624253"/>
+            <a:ext cx="1126921" cy="603783"/>
+          </a:xfrm>
+          <a:prstGeom prst="wedgeRoundRectCallout">
+            <a:avLst/>
+          </a:prstGeom>
+        </p:spPr>
+        <p:style>
+          <a:lnRef idx="2">
+            <a:schemeClr val="accent6"/>
+          </a:lnRef>
+          <a:fillRef idx="1">
+            <a:schemeClr val="lt1"/>
+          </a:fillRef>
+          <a:effectRef idx="0">
+            <a:schemeClr val="accent6"/>
+          </a:effectRef>
+          <a:fontRef idx="minor">
+            <a:schemeClr val="dk1"/>
+          </a:fontRef>
+        </p:style>
+        <p:txBody>
+          <a:bodyPr rtlCol="0" anchor="ctr"/>
+          <a:lstStyle/>
+          <a:p>
+            <a:pPr algn="ctr"/>
+            <a:r>
+              <a:rPr lang="fr-FR" dirty="0"/>
+              <a:t>Terminal state</a:t>
+            </a:r>
+            <a:endParaRPr lang="en-GB" dirty="0"/>
+          </a:p>
+        </p:txBody>
+      </p:sp>
+      <p:sp>
+        <p:nvSpPr>
+          <p:cNvPr id="32" name="ZoneTexte 31">
+            <a:extLst>
+              <a:ext uri="{FF2B5EF4-FFF2-40B4-BE49-F238E27FC236}">
+                <a16:creationId xmlns:a16="http://schemas.microsoft.com/office/drawing/2014/main" xmlns="" id="{3854FA4F-3B96-4A8F-9412-672862F5CD0D}"/>
               </a:ext>
             </a:extLst>
           </p:cNvPr>
@@ -6071,45 +7674,9 @@
           <p:nvPr/>
         </p:nvSpPr>
         <p:spPr>
-          <a:xfrm rot="16200000">
-            <a:off x="5916870" y="3503708"/>
-            <a:ext cx="1238288" cy="369332"/>
-          </a:xfrm>
-          <a:prstGeom prst="rect">
-            <a:avLst/>
-          </a:prstGeom>
-          <a:noFill/>
-        </p:spPr>
-        <p:txBody>
-          <a:bodyPr wrap="none" rtlCol="0">
-            <a:spAutoFit/>
-          </a:bodyPr>
-          <a:lstStyle/>
-          <a:p>
-            <a:r>
-              <a:rPr lang="fr-BE" dirty="0"/>
-              <a:t>[r.ALL data]</a:t>
-            </a:r>
-            <a:endParaRPr lang="en-GB" dirty="0"/>
-          </a:p>
-        </p:txBody>
-      </p:sp>
-      <p:sp>
-        <p:nvSpPr>
-          <p:cNvPr id="18" name="ZoneTexte 17">
-            <a:extLst>
-              <a:ext uri="{FF2B5EF4-FFF2-40B4-BE49-F238E27FC236}">
-                <a16:creationId xmlns:a16="http://schemas.microsoft.com/office/drawing/2014/main" id="{1B9DEA2C-3E1F-47F7-9854-33FFAE313979}"/>
-              </a:ext>
-            </a:extLst>
-          </p:cNvPr>
-          <p:cNvSpPr txBox="1"/>
-          <p:nvPr/>
-        </p:nvSpPr>
-        <p:spPr>
-          <a:xfrm>
-            <a:off x="6117824" y="19667"/>
-            <a:ext cx="3985757" cy="523220"/>
+          <a:xfrm>
+            <a:off x="8669718" y="1656"/>
+            <a:ext cx="3522282" cy="523220"/>
           </a:xfrm>
           <a:prstGeom prst="rect">
             <a:avLst/>
@@ -6124,7 +7691,7 @@
           <a:p>
             <a:r>
               <a:rPr lang="en-GB" sz="2800" b="1" dirty="0"/>
-              <a:t>Receiving Stream States</a:t>
+              <a:t>Sending Stream States</a:t>
             </a:r>
           </a:p>
         </p:txBody>
@@ -6132,13 +7699,20 @@
     </p:spTree>
     <p:extLst>
       <p:ext uri="{BB962C8B-B14F-4D97-AF65-F5344CB8AC3E}">
-        <p14:creationId xmlns:p14="http://schemas.microsoft.com/office/powerpoint/2010/main" val="1520386991"/>
+        <p14:creationId xmlns:p14="http://schemas.microsoft.com/office/powerpoint/2010/main" val="3758773835"/>
       </p:ext>
     </p:extLst>
   </p:cSld>
   <p:clrMapOvr>
     <a:masterClrMapping/>
   </p:clrMapOvr>
+  <p:timing>
+    <p:tnLst>
+      <p:par>
+        <p:cTn id="1" dur="indefinite" restart="never" nodeType="tmRoot"/>
+      </p:par>
+    </p:tnLst>
+  </p:timing>
 </p:sld>
 </file>
 
@@ -6161,10 +7735,619 @@
       </p:grpSpPr>
       <p:sp>
         <p:nvSpPr>
-          <p:cNvPr id="162" name="ZoneTexte 161">
-            <a:extLst>
-              <a:ext uri="{FF2B5EF4-FFF2-40B4-BE49-F238E27FC236}">
-                <a16:creationId xmlns:a16="http://schemas.microsoft.com/office/drawing/2014/main" id="{1E9F2AA7-EE6F-4583-B9CC-274E91DD8329}"/>
+          <p:cNvPr id="4" name="Ellipse 3">
+            <a:extLst>
+              <a:ext uri="{FF2B5EF4-FFF2-40B4-BE49-F238E27FC236}">
+                <a16:creationId xmlns:a16="http://schemas.microsoft.com/office/drawing/2014/main" xmlns="" id="{89FCD844-DF7E-40C9-9D11-022F7FE63189}"/>
+              </a:ext>
+            </a:extLst>
+          </p:cNvPr>
+          <p:cNvSpPr/>
+          <p:nvPr/>
+        </p:nvSpPr>
+        <p:spPr>
+          <a:xfrm>
+            <a:off x="1652953" y="1547448"/>
+            <a:ext cx="1494693" cy="931985"/>
+          </a:xfrm>
+          <a:prstGeom prst="ellipse">
+            <a:avLst/>
+          </a:prstGeom>
+        </p:spPr>
+        <p:style>
+          <a:lnRef idx="2">
+            <a:schemeClr val="accent2">
+              <a:shade val="50000"/>
+            </a:schemeClr>
+          </a:lnRef>
+          <a:fillRef idx="1">
+            <a:schemeClr val="accent2"/>
+          </a:fillRef>
+          <a:effectRef idx="0">
+            <a:schemeClr val="accent2"/>
+          </a:effectRef>
+          <a:fontRef idx="minor">
+            <a:schemeClr val="lt1"/>
+          </a:fontRef>
+        </p:style>
+        <p:txBody>
+          <a:bodyPr rtlCol="0" anchor="ctr"/>
+          <a:lstStyle/>
+          <a:p>
+            <a:pPr algn="ctr"/>
+            <a:r>
+              <a:rPr lang="fr-BE" b="1" dirty="0"/>
+              <a:t>Recv </a:t>
+            </a:r>
+            <a:endParaRPr lang="en-GB" b="1" dirty="0"/>
+          </a:p>
+        </p:txBody>
+      </p:sp>
+      <p:sp>
+        <p:nvSpPr>
+          <p:cNvPr id="5" name="Ellipse 4">
+            <a:extLst>
+              <a:ext uri="{FF2B5EF4-FFF2-40B4-BE49-F238E27FC236}">
+                <a16:creationId xmlns:a16="http://schemas.microsoft.com/office/drawing/2014/main" xmlns="" id="{04266D3A-83FA-4DC5-B077-3FE3BE66996C}"/>
+              </a:ext>
+            </a:extLst>
+          </p:cNvPr>
+          <p:cNvSpPr/>
+          <p:nvPr/>
+        </p:nvSpPr>
+        <p:spPr>
+          <a:xfrm>
+            <a:off x="1652952" y="4897317"/>
+            <a:ext cx="1494693" cy="931985"/>
+          </a:xfrm>
+          <a:prstGeom prst="ellipse">
+            <a:avLst/>
+          </a:prstGeom>
+          <a:solidFill>
+            <a:srgbClr val="C00000"/>
+          </a:solidFill>
+        </p:spPr>
+        <p:style>
+          <a:lnRef idx="2">
+            <a:schemeClr val="accent1">
+              <a:shade val="50000"/>
+            </a:schemeClr>
+          </a:lnRef>
+          <a:fillRef idx="1">
+            <a:schemeClr val="accent1"/>
+          </a:fillRef>
+          <a:effectRef idx="0">
+            <a:schemeClr val="accent1"/>
+          </a:effectRef>
+          <a:fontRef idx="minor">
+            <a:schemeClr val="lt1"/>
+          </a:fontRef>
+        </p:style>
+        <p:txBody>
+          <a:bodyPr rtlCol="0" anchor="ctr"/>
+          <a:lstStyle/>
+          <a:p>
+            <a:pPr algn="ctr"/>
+            <a:r>
+              <a:rPr lang="fr-BE" b="1" dirty="0"/>
+              <a:t>Size Known </a:t>
+            </a:r>
+            <a:endParaRPr lang="en-GB" b="1" dirty="0"/>
+          </a:p>
+        </p:txBody>
+      </p:sp>
+      <p:sp>
+        <p:nvSpPr>
+          <p:cNvPr id="6" name="Ellipse 5">
+            <a:extLst>
+              <a:ext uri="{FF2B5EF4-FFF2-40B4-BE49-F238E27FC236}">
+                <a16:creationId xmlns:a16="http://schemas.microsoft.com/office/drawing/2014/main" xmlns="" id="{20EF6430-F8E7-4FD1-9FFC-35EEC2563371}"/>
+              </a:ext>
+            </a:extLst>
+          </p:cNvPr>
+          <p:cNvSpPr/>
+          <p:nvPr/>
+        </p:nvSpPr>
+        <p:spPr>
+          <a:xfrm>
+            <a:off x="5348652" y="4897315"/>
+            <a:ext cx="1494693" cy="931985"/>
+          </a:xfrm>
+          <a:prstGeom prst="ellipse">
+            <a:avLst/>
+          </a:prstGeom>
+          <a:solidFill>
+            <a:srgbClr val="C00000"/>
+          </a:solidFill>
+        </p:spPr>
+        <p:style>
+          <a:lnRef idx="2">
+            <a:schemeClr val="accent1">
+              <a:shade val="50000"/>
+            </a:schemeClr>
+          </a:lnRef>
+          <a:fillRef idx="1">
+            <a:schemeClr val="accent1"/>
+          </a:fillRef>
+          <a:effectRef idx="0">
+            <a:schemeClr val="accent1"/>
+          </a:effectRef>
+          <a:fontRef idx="minor">
+            <a:schemeClr val="lt1"/>
+          </a:fontRef>
+        </p:style>
+        <p:txBody>
+          <a:bodyPr rtlCol="0" anchor="ctr"/>
+          <a:lstStyle/>
+          <a:p>
+            <a:pPr algn="ctr"/>
+            <a:r>
+              <a:rPr lang="fr-BE" b="1" dirty="0"/>
+              <a:t>Data Recvd </a:t>
+            </a:r>
+            <a:endParaRPr lang="en-GB" b="1" dirty="0"/>
+          </a:p>
+        </p:txBody>
+      </p:sp>
+      <p:sp>
+        <p:nvSpPr>
+          <p:cNvPr id="7" name="Ellipse 6">
+            <a:extLst>
+              <a:ext uri="{FF2B5EF4-FFF2-40B4-BE49-F238E27FC236}">
+                <a16:creationId xmlns:a16="http://schemas.microsoft.com/office/drawing/2014/main" xmlns="" id="{A05BD43F-3BA6-4D44-9A89-6240DC624C9A}"/>
+              </a:ext>
+            </a:extLst>
+          </p:cNvPr>
+          <p:cNvSpPr/>
+          <p:nvPr/>
+        </p:nvSpPr>
+        <p:spPr>
+          <a:xfrm>
+            <a:off x="5348652" y="1547447"/>
+            <a:ext cx="1494693" cy="931985"/>
+          </a:xfrm>
+          <a:prstGeom prst="ellipse">
+            <a:avLst/>
+          </a:prstGeom>
+          <a:solidFill>
+            <a:srgbClr val="C00000"/>
+          </a:solidFill>
+        </p:spPr>
+        <p:style>
+          <a:lnRef idx="2">
+            <a:schemeClr val="accent1">
+              <a:shade val="50000"/>
+            </a:schemeClr>
+          </a:lnRef>
+          <a:fillRef idx="1">
+            <a:schemeClr val="accent1"/>
+          </a:fillRef>
+          <a:effectRef idx="0">
+            <a:schemeClr val="accent1"/>
+          </a:effectRef>
+          <a:fontRef idx="minor">
+            <a:schemeClr val="lt1"/>
+          </a:fontRef>
+        </p:style>
+        <p:txBody>
+          <a:bodyPr rtlCol="0" anchor="ctr"/>
+          <a:lstStyle/>
+          <a:p>
+            <a:pPr algn="ctr"/>
+            <a:r>
+              <a:rPr lang="fr-BE" b="1" dirty="0"/>
+              <a:t>Reset Recvd </a:t>
+            </a:r>
+            <a:endParaRPr lang="en-GB" b="1" dirty="0"/>
+          </a:p>
+        </p:txBody>
+      </p:sp>
+      <p:sp>
+        <p:nvSpPr>
+          <p:cNvPr id="8" name="Ellipse 7">
+            <a:extLst>
+              <a:ext uri="{FF2B5EF4-FFF2-40B4-BE49-F238E27FC236}">
+                <a16:creationId xmlns:a16="http://schemas.microsoft.com/office/drawing/2014/main" xmlns="" id="{D18BD9DA-F640-40D8-890E-826C2DD83CAC}"/>
+              </a:ext>
+            </a:extLst>
+          </p:cNvPr>
+          <p:cNvSpPr/>
+          <p:nvPr/>
+        </p:nvSpPr>
+        <p:spPr>
+          <a:xfrm>
+            <a:off x="9044354" y="1547446"/>
+            <a:ext cx="1494693" cy="931985"/>
+          </a:xfrm>
+          <a:prstGeom prst="ellipse">
+            <a:avLst/>
+          </a:prstGeom>
+          <a:solidFill>
+            <a:schemeClr val="accent6">
+              <a:lumMod val="75000"/>
+            </a:schemeClr>
+          </a:solidFill>
+        </p:spPr>
+        <p:style>
+          <a:lnRef idx="2">
+            <a:schemeClr val="accent1">
+              <a:shade val="50000"/>
+            </a:schemeClr>
+          </a:lnRef>
+          <a:fillRef idx="1">
+            <a:schemeClr val="accent1"/>
+          </a:fillRef>
+          <a:effectRef idx="0">
+            <a:schemeClr val="accent1"/>
+          </a:effectRef>
+          <a:fontRef idx="minor">
+            <a:schemeClr val="lt1"/>
+          </a:fontRef>
+        </p:style>
+        <p:txBody>
+          <a:bodyPr rtlCol="0" anchor="ctr"/>
+          <a:lstStyle/>
+          <a:p>
+            <a:pPr algn="ctr"/>
+            <a:r>
+              <a:rPr lang="fr-BE" b="1" dirty="0"/>
+              <a:t>Reset Read </a:t>
+            </a:r>
+            <a:endParaRPr lang="en-GB" b="1" dirty="0"/>
+          </a:p>
+        </p:txBody>
+      </p:sp>
+      <p:sp>
+        <p:nvSpPr>
+          <p:cNvPr id="9" name="Ellipse 8">
+            <a:extLst>
+              <a:ext uri="{FF2B5EF4-FFF2-40B4-BE49-F238E27FC236}">
+                <a16:creationId xmlns:a16="http://schemas.microsoft.com/office/drawing/2014/main" xmlns="" id="{C9FE4625-6D4C-4C81-B023-2ED8433BE05F}"/>
+              </a:ext>
+            </a:extLst>
+          </p:cNvPr>
+          <p:cNvSpPr/>
+          <p:nvPr/>
+        </p:nvSpPr>
+        <p:spPr>
+          <a:xfrm>
+            <a:off x="9044354" y="4897316"/>
+            <a:ext cx="1494693" cy="931985"/>
+          </a:xfrm>
+          <a:prstGeom prst="ellipse">
+            <a:avLst/>
+          </a:prstGeom>
+          <a:solidFill>
+            <a:schemeClr val="accent6">
+              <a:lumMod val="75000"/>
+            </a:schemeClr>
+          </a:solidFill>
+        </p:spPr>
+        <p:style>
+          <a:lnRef idx="2">
+            <a:schemeClr val="accent1">
+              <a:shade val="50000"/>
+            </a:schemeClr>
+          </a:lnRef>
+          <a:fillRef idx="1">
+            <a:schemeClr val="accent1"/>
+          </a:fillRef>
+          <a:effectRef idx="0">
+            <a:schemeClr val="accent1"/>
+          </a:effectRef>
+          <a:fontRef idx="minor">
+            <a:schemeClr val="lt1"/>
+          </a:fontRef>
+        </p:style>
+        <p:txBody>
+          <a:bodyPr rtlCol="0" anchor="ctr"/>
+          <a:lstStyle/>
+          <a:p>
+            <a:pPr algn="ctr"/>
+            <a:r>
+              <a:rPr lang="fr-BE" b="1" dirty="0"/>
+              <a:t>Data Read </a:t>
+            </a:r>
+            <a:endParaRPr lang="en-GB" b="1" dirty="0"/>
+          </a:p>
+        </p:txBody>
+      </p:sp>
+      <p:cxnSp>
+        <p:nvCxnSpPr>
+          <p:cNvPr id="11" name="Connecteur droit avec flèche 10">
+            <a:extLst>
+              <a:ext uri="{FF2B5EF4-FFF2-40B4-BE49-F238E27FC236}">
+                <a16:creationId xmlns:a16="http://schemas.microsoft.com/office/drawing/2014/main" xmlns="" id="{FA4799A5-0298-4D1C-A51C-8C4AC1ECF70E}"/>
+              </a:ext>
+            </a:extLst>
+          </p:cNvPr>
+          <p:cNvCxnSpPr>
+            <a:stCxn id="4" idx="6"/>
+            <a:endCxn id="7" idx="2"/>
+          </p:cNvCxnSpPr>
+          <p:nvPr/>
+        </p:nvCxnSpPr>
+        <p:spPr>
+          <a:xfrm flipV="1">
+            <a:off x="3147646" y="2013440"/>
+            <a:ext cx="2201006" cy="1"/>
+          </a:xfrm>
+          <a:prstGeom prst="straightConnector1">
+            <a:avLst/>
+          </a:prstGeom>
+          <a:ln w="28575">
+            <a:tailEnd type="triangle"/>
+          </a:ln>
+        </p:spPr>
+        <p:style>
+          <a:lnRef idx="1">
+            <a:schemeClr val="dk1"/>
+          </a:lnRef>
+          <a:fillRef idx="0">
+            <a:schemeClr val="dk1"/>
+          </a:fillRef>
+          <a:effectRef idx="0">
+            <a:schemeClr val="dk1"/>
+          </a:effectRef>
+          <a:fontRef idx="minor">
+            <a:schemeClr val="tx1"/>
+          </a:fontRef>
+        </p:style>
+      </p:cxnSp>
+      <p:cxnSp>
+        <p:nvCxnSpPr>
+          <p:cNvPr id="13" name="Connecteur droit avec flèche 12">
+            <a:extLst>
+              <a:ext uri="{FF2B5EF4-FFF2-40B4-BE49-F238E27FC236}">
+                <a16:creationId xmlns:a16="http://schemas.microsoft.com/office/drawing/2014/main" xmlns="" id="{015152B5-CA66-4A0F-9894-51E75D341D8D}"/>
+              </a:ext>
+            </a:extLst>
+          </p:cNvPr>
+          <p:cNvCxnSpPr/>
+          <p:nvPr/>
+        </p:nvCxnSpPr>
+        <p:spPr>
+          <a:xfrm flipV="1">
+            <a:off x="2919046" y="2479431"/>
+            <a:ext cx="2672862" cy="2417885"/>
+          </a:xfrm>
+          <a:prstGeom prst="straightConnector1">
+            <a:avLst/>
+          </a:prstGeom>
+          <a:ln w="28575">
+            <a:tailEnd type="triangle"/>
+          </a:ln>
+        </p:spPr>
+        <p:style>
+          <a:lnRef idx="1">
+            <a:schemeClr val="dk1"/>
+          </a:lnRef>
+          <a:fillRef idx="0">
+            <a:schemeClr val="dk1"/>
+          </a:fillRef>
+          <a:effectRef idx="0">
+            <a:schemeClr val="dk1"/>
+          </a:effectRef>
+          <a:fontRef idx="minor">
+            <a:schemeClr val="tx1"/>
+          </a:fontRef>
+        </p:style>
+      </p:cxnSp>
+      <p:cxnSp>
+        <p:nvCxnSpPr>
+          <p:cNvPr id="15" name="Connecteur droit avec flèche 14">
+            <a:extLst>
+              <a:ext uri="{FF2B5EF4-FFF2-40B4-BE49-F238E27FC236}">
+                <a16:creationId xmlns:a16="http://schemas.microsoft.com/office/drawing/2014/main" xmlns="" id="{7849844A-8993-4C5F-A72A-918BFA1F176F}"/>
+              </a:ext>
+            </a:extLst>
+          </p:cNvPr>
+          <p:cNvCxnSpPr>
+            <a:stCxn id="4" idx="4"/>
+            <a:endCxn id="5" idx="0"/>
+          </p:cNvCxnSpPr>
+          <p:nvPr/>
+        </p:nvCxnSpPr>
+        <p:spPr>
+          <a:xfrm flipH="1">
+            <a:off x="2400299" y="2479433"/>
+            <a:ext cx="1" cy="2417884"/>
+          </a:xfrm>
+          <a:prstGeom prst="straightConnector1">
+            <a:avLst/>
+          </a:prstGeom>
+          <a:ln w="38100">
+            <a:tailEnd type="triangle"/>
+          </a:ln>
+        </p:spPr>
+        <p:style>
+          <a:lnRef idx="1">
+            <a:schemeClr val="dk1"/>
+          </a:lnRef>
+          <a:fillRef idx="0">
+            <a:schemeClr val="dk1"/>
+          </a:fillRef>
+          <a:effectRef idx="0">
+            <a:schemeClr val="dk1"/>
+          </a:effectRef>
+          <a:fontRef idx="minor">
+            <a:schemeClr val="tx1"/>
+          </a:fontRef>
+        </p:style>
+      </p:cxnSp>
+      <p:cxnSp>
+        <p:nvCxnSpPr>
+          <p:cNvPr id="17" name="Connecteur droit avec flèche 16">
+            <a:extLst>
+              <a:ext uri="{FF2B5EF4-FFF2-40B4-BE49-F238E27FC236}">
+                <a16:creationId xmlns:a16="http://schemas.microsoft.com/office/drawing/2014/main" xmlns="" id="{35CD81BA-EEE1-4F6F-B1D2-060F1B5B1F95}"/>
+              </a:ext>
+            </a:extLst>
+          </p:cNvPr>
+          <p:cNvCxnSpPr>
+            <a:stCxn id="5" idx="6"/>
+            <a:endCxn id="6" idx="2"/>
+          </p:cNvCxnSpPr>
+          <p:nvPr/>
+        </p:nvCxnSpPr>
+        <p:spPr>
+          <a:xfrm flipV="1">
+            <a:off x="3147645" y="5363308"/>
+            <a:ext cx="2201007" cy="2"/>
+          </a:xfrm>
+          <a:prstGeom prst="straightConnector1">
+            <a:avLst/>
+          </a:prstGeom>
+          <a:ln w="28575">
+            <a:tailEnd type="triangle"/>
+          </a:ln>
+        </p:spPr>
+        <p:style>
+          <a:lnRef idx="1">
+            <a:schemeClr val="dk1"/>
+          </a:lnRef>
+          <a:fillRef idx="0">
+            <a:schemeClr val="dk1"/>
+          </a:fillRef>
+          <a:effectRef idx="0">
+            <a:schemeClr val="dk1"/>
+          </a:effectRef>
+          <a:fontRef idx="minor">
+            <a:schemeClr val="tx1"/>
+          </a:fontRef>
+        </p:style>
+      </p:cxnSp>
+      <p:cxnSp>
+        <p:nvCxnSpPr>
+          <p:cNvPr id="20" name="Connecteur droit avec flèche 19">
+            <a:extLst>
+              <a:ext uri="{FF2B5EF4-FFF2-40B4-BE49-F238E27FC236}">
+                <a16:creationId xmlns:a16="http://schemas.microsoft.com/office/drawing/2014/main" xmlns="" id="{1055E33E-43DF-4EA1-B851-345375F53862}"/>
+              </a:ext>
+            </a:extLst>
+          </p:cNvPr>
+          <p:cNvCxnSpPr>
+            <a:stCxn id="6" idx="6"/>
+            <a:endCxn id="9" idx="2"/>
+          </p:cNvCxnSpPr>
+          <p:nvPr/>
+        </p:nvCxnSpPr>
+        <p:spPr>
+          <a:xfrm>
+            <a:off x="6843345" y="5363308"/>
+            <a:ext cx="2201009" cy="1"/>
+          </a:xfrm>
+          <a:prstGeom prst="straightConnector1">
+            <a:avLst/>
+          </a:prstGeom>
+          <a:ln w="38100">
+            <a:tailEnd type="triangle"/>
+          </a:ln>
+        </p:spPr>
+        <p:style>
+          <a:lnRef idx="1">
+            <a:schemeClr val="dk1"/>
+          </a:lnRef>
+          <a:fillRef idx="0">
+            <a:schemeClr val="dk1"/>
+          </a:fillRef>
+          <a:effectRef idx="0">
+            <a:schemeClr val="dk1"/>
+          </a:effectRef>
+          <a:fontRef idx="minor">
+            <a:schemeClr val="tx1"/>
+          </a:fontRef>
+        </p:style>
+      </p:cxnSp>
+      <p:cxnSp>
+        <p:nvCxnSpPr>
+          <p:cNvPr id="22" name="Connecteur droit avec flèche 21">
+            <a:extLst>
+              <a:ext uri="{FF2B5EF4-FFF2-40B4-BE49-F238E27FC236}">
+                <a16:creationId xmlns:a16="http://schemas.microsoft.com/office/drawing/2014/main" xmlns="" id="{774693B9-DF54-4AE5-81F3-7FD221F2E9EC}"/>
+              </a:ext>
+            </a:extLst>
+          </p:cNvPr>
+          <p:cNvCxnSpPr>
+            <a:stCxn id="7" idx="6"/>
+            <a:endCxn id="8" idx="2"/>
+          </p:cNvCxnSpPr>
+          <p:nvPr/>
+        </p:nvCxnSpPr>
+        <p:spPr>
+          <a:xfrm flipV="1">
+            <a:off x="6843345" y="2013439"/>
+            <a:ext cx="2201009" cy="1"/>
+          </a:xfrm>
+          <a:prstGeom prst="straightConnector1">
+            <a:avLst/>
+          </a:prstGeom>
+          <a:ln w="28575">
+            <a:tailEnd type="triangle"/>
+          </a:ln>
+        </p:spPr>
+        <p:style>
+          <a:lnRef idx="1">
+            <a:schemeClr val="dk1"/>
+          </a:lnRef>
+          <a:fillRef idx="0">
+            <a:schemeClr val="dk1"/>
+          </a:fillRef>
+          <a:effectRef idx="0">
+            <a:schemeClr val="dk1"/>
+          </a:effectRef>
+          <a:fontRef idx="minor">
+            <a:schemeClr val="tx1"/>
+          </a:fontRef>
+        </p:style>
+      </p:cxnSp>
+      <p:cxnSp>
+        <p:nvCxnSpPr>
+          <p:cNvPr id="24" name="Connecteur droit avec flèche 23">
+            <a:extLst>
+              <a:ext uri="{FF2B5EF4-FFF2-40B4-BE49-F238E27FC236}">
+                <a16:creationId xmlns:a16="http://schemas.microsoft.com/office/drawing/2014/main" xmlns="" id="{FE3792FD-3716-4B03-8B24-62235C4F1465}"/>
+              </a:ext>
+            </a:extLst>
+          </p:cNvPr>
+          <p:cNvCxnSpPr>
+            <a:cxnSpLocks/>
+          </p:cNvCxnSpPr>
+          <p:nvPr/>
+        </p:nvCxnSpPr>
+        <p:spPr>
+          <a:xfrm flipH="1" flipV="1">
+            <a:off x="5887774" y="2479431"/>
+            <a:ext cx="1" cy="2417885"/>
+          </a:xfrm>
+          <a:prstGeom prst="straightConnector1">
+            <a:avLst/>
+          </a:prstGeom>
+          <a:ln w="28575">
+            <a:tailEnd type="triangle"/>
+          </a:ln>
+        </p:spPr>
+        <p:style>
+          <a:lnRef idx="1">
+            <a:schemeClr val="dk1"/>
+          </a:lnRef>
+          <a:fillRef idx="0">
+            <a:schemeClr val="dk1"/>
+          </a:fillRef>
+          <a:effectRef idx="0">
+            <a:schemeClr val="dk1"/>
+          </a:effectRef>
+          <a:fontRef idx="minor">
+            <a:schemeClr val="tx1"/>
+          </a:fontRef>
+        </p:style>
+      </p:cxnSp>
+      <p:sp>
+        <p:nvSpPr>
+          <p:cNvPr id="25" name="ZoneTexte 24">
+            <a:extLst>
+              <a:ext uri="{FF2B5EF4-FFF2-40B4-BE49-F238E27FC236}">
+                <a16:creationId xmlns:a16="http://schemas.microsoft.com/office/drawing/2014/main" xmlns="" id="{EC37E58C-8569-44E3-A1DC-1FED44F81068}"/>
               </a:ext>
             </a:extLst>
           </p:cNvPr>
@@ -6173,8 +8356,431 @@
         </p:nvSpPr>
         <p:spPr>
           <a:xfrm>
-            <a:off x="3851075" y="-11029"/>
-            <a:ext cx="4273838" cy="523220"/>
+            <a:off x="3404781" y="1626284"/>
+            <a:ext cx="1761316" cy="369332"/>
+          </a:xfrm>
+          <a:prstGeom prst="rect">
+            <a:avLst/>
+          </a:prstGeom>
+          <a:noFill/>
+        </p:spPr>
+        <p:txBody>
+          <a:bodyPr wrap="none" rtlCol="0">
+            <a:spAutoFit/>
+          </a:bodyPr>
+          <a:lstStyle/>
+          <a:p>
+            <a:r>
+              <a:rPr lang="fr-BE" dirty="0"/>
+              <a:t>r.RESET_STREAM</a:t>
+            </a:r>
+            <a:endParaRPr lang="en-GB" dirty="0"/>
+          </a:p>
+        </p:txBody>
+      </p:sp>
+      <p:sp>
+        <p:nvSpPr>
+          <p:cNvPr id="26" name="ZoneTexte 25">
+            <a:extLst>
+              <a:ext uri="{FF2B5EF4-FFF2-40B4-BE49-F238E27FC236}">
+                <a16:creationId xmlns:a16="http://schemas.microsoft.com/office/drawing/2014/main" xmlns="" id="{FAA392D6-1A3B-4D0A-8C01-817A0F04B637}"/>
+              </a:ext>
+            </a:extLst>
+          </p:cNvPr>
+          <p:cNvSpPr txBox="1"/>
+          <p:nvPr/>
+        </p:nvSpPr>
+        <p:spPr>
+          <a:xfrm rot="18948727">
+            <a:off x="3259316" y="3280739"/>
+            <a:ext cx="1761316" cy="369332"/>
+          </a:xfrm>
+          <a:prstGeom prst="rect">
+            <a:avLst/>
+          </a:prstGeom>
+          <a:noFill/>
+        </p:spPr>
+        <p:txBody>
+          <a:bodyPr wrap="none" rtlCol="0">
+            <a:spAutoFit/>
+          </a:bodyPr>
+          <a:lstStyle/>
+          <a:p>
+            <a:r>
+              <a:rPr lang="fr-BE" dirty="0"/>
+              <a:t>r.RESET_STREAM</a:t>
+            </a:r>
+            <a:endParaRPr lang="en-GB" dirty="0"/>
+          </a:p>
+        </p:txBody>
+      </p:sp>
+      <p:sp>
+        <p:nvSpPr>
+          <p:cNvPr id="27" name="ZoneTexte 26">
+            <a:extLst>
+              <a:ext uri="{FF2B5EF4-FFF2-40B4-BE49-F238E27FC236}">
+                <a16:creationId xmlns:a16="http://schemas.microsoft.com/office/drawing/2014/main" xmlns="" id="{E9D2A897-EAB3-4778-A48C-996CC1E8AC50}"/>
+              </a:ext>
+            </a:extLst>
+          </p:cNvPr>
+          <p:cNvSpPr txBox="1"/>
+          <p:nvPr/>
+        </p:nvSpPr>
+        <p:spPr>
+          <a:xfrm rot="16200000">
+            <a:off x="4664278" y="3566218"/>
+            <a:ext cx="1902380" cy="369332"/>
+          </a:xfrm>
+          <a:prstGeom prst="rect">
+            <a:avLst/>
+          </a:prstGeom>
+          <a:noFill/>
+        </p:spPr>
+        <p:txBody>
+          <a:bodyPr wrap="none" rtlCol="0">
+            <a:spAutoFit/>
+          </a:bodyPr>
+          <a:lstStyle/>
+          <a:p>
+            <a:r>
+              <a:rPr lang="fr-BE" dirty="0"/>
+              <a:t>[r.RESET_STREAM]</a:t>
+            </a:r>
+            <a:endParaRPr lang="en-GB" dirty="0"/>
+          </a:p>
+        </p:txBody>
+      </p:sp>
+      <p:sp>
+        <p:nvSpPr>
+          <p:cNvPr id="28" name="ZoneTexte 27">
+            <a:extLst>
+              <a:ext uri="{FF2B5EF4-FFF2-40B4-BE49-F238E27FC236}">
+                <a16:creationId xmlns:a16="http://schemas.microsoft.com/office/drawing/2014/main" xmlns="" id="{25FE3CA9-2E21-4E5D-8555-BE8394BBA317}"/>
+              </a:ext>
+            </a:extLst>
+          </p:cNvPr>
+          <p:cNvSpPr txBox="1"/>
+          <p:nvPr/>
+        </p:nvSpPr>
+        <p:spPr>
+          <a:xfrm>
+            <a:off x="7223748" y="1626519"/>
+            <a:ext cx="1417760" cy="369332"/>
+          </a:xfrm>
+          <a:prstGeom prst="rect">
+            <a:avLst/>
+          </a:prstGeom>
+          <a:noFill/>
+        </p:spPr>
+        <p:txBody>
+          <a:bodyPr wrap="none" rtlCol="0">
+            <a:spAutoFit/>
+          </a:bodyPr>
+          <a:lstStyle/>
+          <a:p>
+            <a:r>
+              <a:rPr lang="fr-BE" dirty="0"/>
+              <a:t>app.read.RST</a:t>
+            </a:r>
+            <a:endParaRPr lang="en-GB" dirty="0"/>
+          </a:p>
+        </p:txBody>
+      </p:sp>
+      <p:sp>
+        <p:nvSpPr>
+          <p:cNvPr id="29" name="ZoneTexte 28">
+            <a:extLst>
+              <a:ext uri="{FF2B5EF4-FFF2-40B4-BE49-F238E27FC236}">
+                <a16:creationId xmlns:a16="http://schemas.microsoft.com/office/drawing/2014/main" xmlns="" id="{0692236C-15B0-4B00-964F-2FC9F6384F6F}"/>
+              </a:ext>
+            </a:extLst>
+          </p:cNvPr>
+          <p:cNvSpPr txBox="1"/>
+          <p:nvPr/>
+        </p:nvSpPr>
+        <p:spPr>
+          <a:xfrm>
+            <a:off x="7641825" y="4897315"/>
+            <a:ext cx="937757" cy="369332"/>
+          </a:xfrm>
+          <a:prstGeom prst="rect">
+            <a:avLst/>
+          </a:prstGeom>
+          <a:noFill/>
+        </p:spPr>
+        <p:txBody>
+          <a:bodyPr wrap="none" rtlCol="0">
+            <a:spAutoFit/>
+          </a:bodyPr>
+          <a:lstStyle/>
+          <a:p>
+            <a:r>
+              <a:rPr lang="fr-BE" dirty="0"/>
+              <a:t>rAll.ACK</a:t>
+            </a:r>
+            <a:endParaRPr lang="en-GB" dirty="0"/>
+          </a:p>
+        </p:txBody>
+      </p:sp>
+      <p:sp>
+        <p:nvSpPr>
+          <p:cNvPr id="30" name="ZoneTexte 29">
+            <a:extLst>
+              <a:ext uri="{FF2B5EF4-FFF2-40B4-BE49-F238E27FC236}">
+                <a16:creationId xmlns:a16="http://schemas.microsoft.com/office/drawing/2014/main" xmlns="" id="{CE7EF607-C441-4C6F-934E-973FAD16220A}"/>
+              </a:ext>
+            </a:extLst>
+          </p:cNvPr>
+          <p:cNvSpPr txBox="1"/>
+          <p:nvPr/>
+        </p:nvSpPr>
+        <p:spPr>
+          <a:xfrm>
+            <a:off x="3431822" y="4985180"/>
+            <a:ext cx="1763688" cy="369332"/>
+          </a:xfrm>
+          <a:prstGeom prst="rect">
+            <a:avLst/>
+          </a:prstGeom>
+          <a:noFill/>
+        </p:spPr>
+        <p:txBody>
+          <a:bodyPr wrap="none" rtlCol="0">
+            <a:spAutoFit/>
+          </a:bodyPr>
+          <a:lstStyle/>
+          <a:p>
+            <a:r>
+              <a:rPr lang="fr-BE" dirty="0"/>
+              <a:t>app.read.all data</a:t>
+            </a:r>
+            <a:endParaRPr lang="en-GB" dirty="0"/>
+          </a:p>
+        </p:txBody>
+      </p:sp>
+      <p:sp>
+        <p:nvSpPr>
+          <p:cNvPr id="31" name="ZoneTexte 30">
+            <a:extLst>
+              <a:ext uri="{FF2B5EF4-FFF2-40B4-BE49-F238E27FC236}">
+                <a16:creationId xmlns:a16="http://schemas.microsoft.com/office/drawing/2014/main" xmlns="" id="{C9963DA0-1C1A-4E2E-BA58-B5FF1051DD91}"/>
+              </a:ext>
+            </a:extLst>
+          </p:cNvPr>
+          <p:cNvSpPr txBox="1"/>
+          <p:nvPr/>
+        </p:nvSpPr>
+        <p:spPr>
+          <a:xfrm rot="16200000">
+            <a:off x="1219384" y="3494259"/>
+            <a:ext cx="1614481" cy="369332"/>
+          </a:xfrm>
+          <a:prstGeom prst="rect">
+            <a:avLst/>
+          </a:prstGeom>
+          <a:noFill/>
+        </p:spPr>
+        <p:txBody>
+          <a:bodyPr wrap="none" rtlCol="0">
+            <a:spAutoFit/>
+          </a:bodyPr>
+          <a:lstStyle/>
+          <a:p>
+            <a:r>
+              <a:rPr lang="fr-BE" dirty="0"/>
+              <a:t>r.STREAM + FIN</a:t>
+            </a:r>
+          </a:p>
+        </p:txBody>
+      </p:sp>
+      <p:cxnSp>
+        <p:nvCxnSpPr>
+          <p:cNvPr id="33" name="Connecteur droit avec flèche 32">
+            <a:extLst>
+              <a:ext uri="{FF2B5EF4-FFF2-40B4-BE49-F238E27FC236}">
+                <a16:creationId xmlns:a16="http://schemas.microsoft.com/office/drawing/2014/main" xmlns="" id="{6589CEFF-63AD-48E0-B8C2-2B9C42EE3BA1}"/>
+              </a:ext>
+            </a:extLst>
+          </p:cNvPr>
+          <p:cNvCxnSpPr>
+            <a:endCxn id="4" idx="1"/>
+          </p:cNvCxnSpPr>
+          <p:nvPr/>
+        </p:nvCxnSpPr>
+        <p:spPr>
+          <a:xfrm>
+            <a:off x="1072662" y="1143002"/>
+            <a:ext cx="799184" cy="540932"/>
+          </a:xfrm>
+          <a:prstGeom prst="straightConnector1">
+            <a:avLst/>
+          </a:prstGeom>
+          <a:ln w="28575">
+            <a:tailEnd type="triangle"/>
+          </a:ln>
+        </p:spPr>
+        <p:style>
+          <a:lnRef idx="1">
+            <a:schemeClr val="dk1"/>
+          </a:lnRef>
+          <a:fillRef idx="0">
+            <a:schemeClr val="dk1"/>
+          </a:fillRef>
+          <a:effectRef idx="0">
+            <a:schemeClr val="dk1"/>
+          </a:effectRef>
+          <a:fontRef idx="minor">
+            <a:schemeClr val="tx1"/>
+          </a:fontRef>
+        </p:style>
+      </p:cxnSp>
+      <p:sp>
+        <p:nvSpPr>
+          <p:cNvPr id="23" name="ZoneTexte 22">
+            <a:extLst>
+              <a:ext uri="{FF2B5EF4-FFF2-40B4-BE49-F238E27FC236}">
+                <a16:creationId xmlns:a16="http://schemas.microsoft.com/office/drawing/2014/main" xmlns="" id="{479D2F68-32D5-4E80-B573-2C6156DCB22F}"/>
+              </a:ext>
+            </a:extLst>
+          </p:cNvPr>
+          <p:cNvSpPr txBox="1"/>
+          <p:nvPr/>
+        </p:nvSpPr>
+        <p:spPr>
+          <a:xfrm>
+            <a:off x="229185" y="14804"/>
+            <a:ext cx="5386283" cy="1200329"/>
+          </a:xfrm>
+          <a:prstGeom prst="rect">
+            <a:avLst/>
+          </a:prstGeom>
+          <a:noFill/>
+        </p:spPr>
+        <p:txBody>
+          <a:bodyPr wrap="none" rtlCol="0">
+            <a:spAutoFit/>
+          </a:bodyPr>
+          <a:lstStyle/>
+          <a:p>
+            <a:r>
+              <a:rPr lang="fr-BE" dirty="0"/>
+              <a:t>r.STREAM / r.RESET_STREAM/ r.STRAM_DATA_BLOCKED</a:t>
+            </a:r>
+          </a:p>
+          <a:p>
+            <a:r>
+              <a:rPr lang="fr-BE" dirty="0"/>
+              <a:t>Create Bidirectional Stream (Sending)</a:t>
+            </a:r>
+          </a:p>
+          <a:p>
+            <a:r>
+              <a:rPr lang="fr-BE" dirty="0"/>
+              <a:t>r.MAX_STREAM_DATA / r.STOP_SENDING (Bidirectional)</a:t>
+            </a:r>
+          </a:p>
+          <a:p>
+            <a:r>
+              <a:rPr lang="fr-BE" dirty="0"/>
+              <a:t>Create Higher-Numbered Stream</a:t>
+            </a:r>
+            <a:endParaRPr lang="en-GB" dirty="0"/>
+          </a:p>
+        </p:txBody>
+      </p:sp>
+      <p:cxnSp>
+        <p:nvCxnSpPr>
+          <p:cNvPr id="32" name="Connecteur droit avec flèche 31">
+            <a:extLst>
+              <a:ext uri="{FF2B5EF4-FFF2-40B4-BE49-F238E27FC236}">
+                <a16:creationId xmlns:a16="http://schemas.microsoft.com/office/drawing/2014/main" xmlns="" id="{F4BA6B60-DF61-4E3A-B967-DF30AA624FE0}"/>
+              </a:ext>
+            </a:extLst>
+          </p:cNvPr>
+          <p:cNvCxnSpPr>
+            <a:cxnSpLocks/>
+          </p:cNvCxnSpPr>
+          <p:nvPr/>
+        </p:nvCxnSpPr>
+        <p:spPr>
+          <a:xfrm flipH="1">
+            <a:off x="6304227" y="2505971"/>
+            <a:ext cx="1" cy="2391344"/>
+          </a:xfrm>
+          <a:prstGeom prst="straightConnector1">
+            <a:avLst/>
+          </a:prstGeom>
+          <a:ln w="28575">
+            <a:tailEnd type="triangle"/>
+          </a:ln>
+        </p:spPr>
+        <p:style>
+          <a:lnRef idx="1">
+            <a:schemeClr val="dk1"/>
+          </a:lnRef>
+          <a:fillRef idx="0">
+            <a:schemeClr val="dk1"/>
+          </a:fillRef>
+          <a:effectRef idx="0">
+            <a:schemeClr val="dk1"/>
+          </a:effectRef>
+          <a:fontRef idx="minor">
+            <a:schemeClr val="tx1"/>
+          </a:fontRef>
+        </p:style>
+      </p:cxnSp>
+      <p:sp>
+        <p:nvSpPr>
+          <p:cNvPr id="34" name="ZoneTexte 33">
+            <a:extLst>
+              <a:ext uri="{FF2B5EF4-FFF2-40B4-BE49-F238E27FC236}">
+                <a16:creationId xmlns:a16="http://schemas.microsoft.com/office/drawing/2014/main" xmlns="" id="{E9ED5443-1DA7-441F-B3CC-AA9A0CEBB87B}"/>
+              </a:ext>
+            </a:extLst>
+          </p:cNvPr>
+          <p:cNvSpPr txBox="1"/>
+          <p:nvPr/>
+        </p:nvSpPr>
+        <p:spPr>
+          <a:xfrm rot="16200000">
+            <a:off x="5916870" y="3503708"/>
+            <a:ext cx="1238288" cy="369332"/>
+          </a:xfrm>
+          <a:prstGeom prst="rect">
+            <a:avLst/>
+          </a:prstGeom>
+          <a:noFill/>
+        </p:spPr>
+        <p:txBody>
+          <a:bodyPr wrap="none" rtlCol="0">
+            <a:spAutoFit/>
+          </a:bodyPr>
+          <a:lstStyle/>
+          <a:p>
+            <a:r>
+              <a:rPr lang="fr-BE" dirty="0"/>
+              <a:t>[r.ALL data]</a:t>
+            </a:r>
+            <a:endParaRPr lang="en-GB" dirty="0"/>
+          </a:p>
+        </p:txBody>
+      </p:sp>
+      <p:sp>
+        <p:nvSpPr>
+          <p:cNvPr id="18" name="ZoneTexte 17">
+            <a:extLst>
+              <a:ext uri="{FF2B5EF4-FFF2-40B4-BE49-F238E27FC236}">
+                <a16:creationId xmlns:a16="http://schemas.microsoft.com/office/drawing/2014/main" xmlns="" id="{1B9DEA2C-3E1F-47F7-9854-33FFAE313979}"/>
+              </a:ext>
+            </a:extLst>
+          </p:cNvPr>
+          <p:cNvSpPr txBox="1"/>
+          <p:nvPr/>
+        </p:nvSpPr>
+        <p:spPr>
+          <a:xfrm>
+            <a:off x="8469138" y="0"/>
+            <a:ext cx="3722862" cy="523220"/>
           </a:xfrm>
           <a:prstGeom prst="rect">
             <a:avLst/>
@@ -6189,6 +8795,78 @@
           <a:p>
             <a:r>
               <a:rPr lang="en-GB" sz="2800" b="1" dirty="0"/>
+              <a:t>Receiving Stream States</a:t>
+            </a:r>
+          </a:p>
+        </p:txBody>
+      </p:sp>
+    </p:spTree>
+    <p:extLst>
+      <p:ext uri="{BB962C8B-B14F-4D97-AF65-F5344CB8AC3E}">
+        <p14:creationId xmlns:p14="http://schemas.microsoft.com/office/powerpoint/2010/main" val="1520386991"/>
+      </p:ext>
+    </p:extLst>
+  </p:cSld>
+  <p:clrMapOvr>
+    <a:masterClrMapping/>
+  </p:clrMapOvr>
+  <p:timing>
+    <p:tnLst>
+      <p:par>
+        <p:cTn id="1" dur="indefinite" restart="never" nodeType="tmRoot"/>
+      </p:par>
+    </p:tnLst>
+  </p:timing>
+</p:sld>
+</file>
+
+<file path=ppt/slides/slide4.xml><?xml version="1.0" encoding="utf-8"?>
+<p:sld xmlns:a="http://schemas.openxmlformats.org/drawingml/2006/main" xmlns:r="http://schemas.openxmlformats.org/officeDocument/2006/relationships" xmlns:p="http://schemas.openxmlformats.org/presentationml/2006/main">
+  <p:cSld>
+    <p:spTree>
+      <p:nvGrpSpPr>
+        <p:cNvPr id="1" name=""/>
+        <p:cNvGrpSpPr/>
+        <p:nvPr/>
+      </p:nvGrpSpPr>
+      <p:grpSpPr>
+        <a:xfrm>
+          <a:off x="0" y="0"/>
+          <a:ext cx="0" cy="0"/>
+          <a:chOff x="0" y="0"/>
+          <a:chExt cx="0" cy="0"/>
+        </a:xfrm>
+      </p:grpSpPr>
+      <p:sp>
+        <p:nvSpPr>
+          <p:cNvPr id="162" name="ZoneTexte 161">
+            <a:extLst>
+              <a:ext uri="{FF2B5EF4-FFF2-40B4-BE49-F238E27FC236}">
+                <a16:creationId xmlns:a16="http://schemas.microsoft.com/office/drawing/2014/main" xmlns="" id="{1E9F2AA7-EE6F-4583-B9CC-274E91DD8329}"/>
+              </a:ext>
+            </a:extLst>
+          </p:cNvPr>
+          <p:cNvSpPr txBox="1"/>
+          <p:nvPr/>
+        </p:nvSpPr>
+        <p:spPr>
+          <a:xfrm>
+            <a:off x="7918162" y="-13891"/>
+            <a:ext cx="4273838" cy="523220"/>
+          </a:xfrm>
+          <a:prstGeom prst="rect">
+            <a:avLst/>
+          </a:prstGeom>
+          <a:noFill/>
+        </p:spPr>
+        <p:txBody>
+          <a:bodyPr wrap="square">
+            <a:spAutoFit/>
+          </a:bodyPr>
+          <a:lstStyle/>
+          <a:p>
+            <a:r>
+              <a:rPr lang="en-GB" sz="2800" b="1" dirty="0"/>
               <a:t>Bidirectional Stream States</a:t>
             </a:r>
           </a:p>
@@ -6199,7 +8877,7 @@
           <p:cNvPr id="164" name="Ellipse 163">
             <a:extLst>
               <a:ext uri="{FF2B5EF4-FFF2-40B4-BE49-F238E27FC236}">
-                <a16:creationId xmlns:a16="http://schemas.microsoft.com/office/drawing/2014/main" id="{1EA6948B-714F-43F0-9744-118D43364489}"/>
+                <a16:creationId xmlns:a16="http://schemas.microsoft.com/office/drawing/2014/main" xmlns="" id="{1EA6948B-714F-43F0-9744-118D43364489}"/>
               </a:ext>
             </a:extLst>
           </p:cNvPr>
@@ -6237,12 +8915,8 @@
           <a:p>
             <a:pPr algn="ctr"/>
             <a:r>
-              <a:rPr lang="fr-BE" sz="1600" b="1" dirty="0" err="1"/>
-              <a:t>idle</a:t>
-            </a:r>
-            <a:r>
               <a:rPr lang="fr-BE" sz="1600" b="1" dirty="0"/>
-              <a:t> </a:t>
+              <a:t>idle </a:t>
             </a:r>
             <a:endParaRPr lang="en-GB" sz="1600" b="1" dirty="0"/>
           </a:p>
@@ -6253,7 +8927,7 @@
           <p:cNvPr id="168" name="Ellipse 167">
             <a:extLst>
               <a:ext uri="{FF2B5EF4-FFF2-40B4-BE49-F238E27FC236}">
-                <a16:creationId xmlns:a16="http://schemas.microsoft.com/office/drawing/2014/main" id="{CB6D624A-7107-465A-8446-21A7AFD83649}"/>
+                <a16:creationId xmlns:a16="http://schemas.microsoft.com/office/drawing/2014/main" xmlns="" id="{CB6D624A-7107-465A-8446-21A7AFD83649}"/>
               </a:ext>
             </a:extLst>
           </p:cNvPr>
@@ -6303,7 +8977,7 @@
           <p:cNvPr id="170" name="Ellipse 169">
             <a:extLst>
               <a:ext uri="{FF2B5EF4-FFF2-40B4-BE49-F238E27FC236}">
-                <a16:creationId xmlns:a16="http://schemas.microsoft.com/office/drawing/2014/main" id="{D96BE0B3-B7D3-43C3-BCE3-CF021A5D7237}"/>
+                <a16:creationId xmlns:a16="http://schemas.microsoft.com/office/drawing/2014/main" xmlns="" id="{D96BE0B3-B7D3-43C3-BCE3-CF021A5D7237}"/>
               </a:ext>
             </a:extLst>
           </p:cNvPr>
@@ -6342,27 +9016,14 @@
             <a:pPr algn="ctr"/>
             <a:r>
               <a:rPr lang="fr-BE" sz="1600" b="1" dirty="0"/>
-              <a:t>Half-</a:t>
-            </a:r>
-            <a:r>
-              <a:rPr lang="fr-BE" sz="1600" b="1" dirty="0" err="1"/>
-              <a:t>Closed</a:t>
-            </a:r>
-            <a:endParaRPr lang="fr-BE" sz="1600" b="1" dirty="0"/>
+              <a:t>Half-Closed</a:t>
+            </a:r>
           </a:p>
           <a:p>
             <a:pPr algn="ctr"/>
             <a:r>
               <a:rPr lang="fr-BE" sz="1600" b="1" dirty="0"/>
-              <a:t>(</a:t>
-            </a:r>
-            <a:r>
-              <a:rPr lang="fr-BE" sz="1600" b="1" dirty="0" err="1"/>
-              <a:t>remote</a:t>
-            </a:r>
-            <a:r>
-              <a:rPr lang="fr-BE" sz="1600" b="1" dirty="0"/>
-              <a:t>)</a:t>
+              <a:t>(remote)</a:t>
             </a:r>
             <a:endParaRPr lang="en-GB" sz="1600" b="1" dirty="0"/>
           </a:p>
@@ -6373,7 +9034,7 @@
           <p:cNvPr id="172" name="Ellipse 171">
             <a:extLst>
               <a:ext uri="{FF2B5EF4-FFF2-40B4-BE49-F238E27FC236}">
-                <a16:creationId xmlns:a16="http://schemas.microsoft.com/office/drawing/2014/main" id="{619E1E41-588A-483E-9D50-84EBFE3C6057}"/>
+                <a16:creationId xmlns:a16="http://schemas.microsoft.com/office/drawing/2014/main" xmlns="" id="{619E1E41-588A-483E-9D50-84EBFE3C6057}"/>
               </a:ext>
             </a:extLst>
           </p:cNvPr>
@@ -6412,13 +9073,8 @@
             <a:pPr algn="ctr"/>
             <a:r>
               <a:rPr lang="fr-BE" sz="1600" b="1" dirty="0"/>
-              <a:t>Half-</a:t>
-            </a:r>
-            <a:r>
-              <a:rPr lang="fr-BE" sz="1600" b="1" dirty="0" err="1"/>
-              <a:t>Closed</a:t>
-            </a:r>
-            <a:endParaRPr lang="fr-BE" sz="1600" b="1" dirty="0"/>
+              <a:t>Half-Closed</a:t>
+            </a:r>
           </a:p>
           <a:p>
             <a:pPr algn="ctr"/>
@@ -6435,7 +9091,7 @@
           <p:cNvPr id="174" name="Ellipse 173">
             <a:extLst>
               <a:ext uri="{FF2B5EF4-FFF2-40B4-BE49-F238E27FC236}">
-                <a16:creationId xmlns:a16="http://schemas.microsoft.com/office/drawing/2014/main" id="{C5D5C692-6E58-4BC9-8D5E-89B457F0E824}"/>
+                <a16:creationId xmlns:a16="http://schemas.microsoft.com/office/drawing/2014/main" xmlns="" id="{C5D5C692-6E58-4BC9-8D5E-89B457F0E824}"/>
               </a:ext>
             </a:extLst>
           </p:cNvPr>
@@ -6473,7 +9129,7 @@
           <a:p>
             <a:pPr algn="ctr"/>
             <a:r>
-              <a:rPr lang="fr-BE" sz="1600" b="1" dirty="0" err="1"/>
+              <a:rPr lang="fr-BE" sz="1600" b="1" dirty="0"/>
               <a:t>Closed</a:t>
             </a:r>
             <a:endParaRPr lang="en-GB" sz="1600" b="1" dirty="0"/>
@@ -6485,7 +9141,7 @@
           <p:cNvPr id="175" name="Rectangle 174">
             <a:extLst>
               <a:ext uri="{FF2B5EF4-FFF2-40B4-BE49-F238E27FC236}">
-                <a16:creationId xmlns:a16="http://schemas.microsoft.com/office/drawing/2014/main" id="{66718011-F1A9-4A80-9F56-C0593A608762}"/>
+                <a16:creationId xmlns:a16="http://schemas.microsoft.com/office/drawing/2014/main" xmlns="" id="{66718011-F1A9-4A80-9F56-C0593A608762}"/>
               </a:ext>
             </a:extLst>
           </p:cNvPr>
@@ -6523,7 +9179,7 @@
           <a:p>
             <a:pPr algn="ctr"/>
             <a:r>
-              <a:rPr lang="fr-FR" dirty="0" err="1"/>
+              <a:rPr lang="fr-FR" dirty="0"/>
               <a:t>Ready</a:t>
             </a:r>
             <a:endParaRPr lang="en-GB" dirty="0"/>
@@ -6535,7 +9191,7 @@
           <p:cNvPr id="176" name="Rectangle : coins arrondis 175">
             <a:extLst>
               <a:ext uri="{FF2B5EF4-FFF2-40B4-BE49-F238E27FC236}">
-                <a16:creationId xmlns:a16="http://schemas.microsoft.com/office/drawing/2014/main" id="{6EC3BE33-2D16-45B4-B62D-63EB4C274A25}"/>
+                <a16:creationId xmlns:a16="http://schemas.microsoft.com/office/drawing/2014/main" xmlns="" id="{6EC3BE33-2D16-45B4-B62D-63EB4C274A25}"/>
               </a:ext>
             </a:extLst>
           </p:cNvPr>
@@ -6573,7 +9229,7 @@
           <a:p>
             <a:pPr algn="ctr"/>
             <a:r>
-              <a:rPr lang="fr-FR" dirty="0" err="1"/>
+              <a:rPr lang="fr-FR" dirty="0"/>
               <a:t>Recv</a:t>
             </a:r>
             <a:endParaRPr lang="en-GB" dirty="0"/>
@@ -6585,7 +9241,7 @@
           <p:cNvPr id="178" name="Rectangle 177">
             <a:extLst>
               <a:ext uri="{FF2B5EF4-FFF2-40B4-BE49-F238E27FC236}">
-                <a16:creationId xmlns:a16="http://schemas.microsoft.com/office/drawing/2014/main" id="{523D3E57-D6CD-47B5-9604-315199251AF9}"/>
+                <a16:creationId xmlns:a16="http://schemas.microsoft.com/office/drawing/2014/main" xmlns="" id="{523D3E57-D6CD-47B5-9604-315199251AF9}"/>
               </a:ext>
             </a:extLst>
           </p:cNvPr>
@@ -6626,7 +9282,7 @@
           <a:p>
             <a:pPr algn="ctr"/>
             <a:r>
-              <a:rPr lang="fr-FR" dirty="0" err="1"/>
+              <a:rPr lang="fr-FR" dirty="0"/>
               <a:t>Send</a:t>
             </a:r>
             <a:endParaRPr lang="en-GB" dirty="0"/>
@@ -6638,7 +9294,7 @@
           <p:cNvPr id="180" name="Rectangle 179">
             <a:extLst>
               <a:ext uri="{FF2B5EF4-FFF2-40B4-BE49-F238E27FC236}">
-                <a16:creationId xmlns:a16="http://schemas.microsoft.com/office/drawing/2014/main" id="{2357F8A8-5CDA-4D11-8FE0-1989EE191E4A}"/>
+                <a16:creationId xmlns:a16="http://schemas.microsoft.com/office/drawing/2014/main" xmlns="" id="{2357F8A8-5CDA-4D11-8FE0-1989EE191E4A}"/>
               </a:ext>
             </a:extLst>
           </p:cNvPr>
@@ -6691,7 +9347,7 @@
           <p:cNvPr id="182" name="Rectangle 181">
             <a:extLst>
               <a:ext uri="{FF2B5EF4-FFF2-40B4-BE49-F238E27FC236}">
-                <a16:creationId xmlns:a16="http://schemas.microsoft.com/office/drawing/2014/main" id="{D725C38A-8727-4AD5-B8C6-AA47886C28D2}"/>
+                <a16:creationId xmlns:a16="http://schemas.microsoft.com/office/drawing/2014/main" xmlns="" id="{D725C38A-8727-4AD5-B8C6-AA47886C28D2}"/>
               </a:ext>
             </a:extLst>
           </p:cNvPr>
@@ -6744,7 +9400,7 @@
           <p:cNvPr id="184" name="Rectangle 183">
             <a:extLst>
               <a:ext uri="{FF2B5EF4-FFF2-40B4-BE49-F238E27FC236}">
-                <a16:creationId xmlns:a16="http://schemas.microsoft.com/office/drawing/2014/main" id="{70DF2D4B-F8F5-40C3-B075-1CAE3632CAFD}"/>
+                <a16:creationId xmlns:a16="http://schemas.microsoft.com/office/drawing/2014/main" xmlns="" id="{70DF2D4B-F8F5-40C3-B075-1CAE3632CAFD}"/>
               </a:ext>
             </a:extLst>
           </p:cNvPr>
@@ -6788,11 +9444,7 @@
             <a:pPr algn="ctr"/>
             <a:r>
               <a:rPr lang="fr-FR" dirty="0"/>
-              <a:t>Reset </a:t>
-            </a:r>
-            <a:r>
-              <a:rPr lang="fr-FR" dirty="0" err="1"/>
-              <a:t>Recvd</a:t>
+              <a:t>Reset Recvd</a:t>
             </a:r>
             <a:endParaRPr lang="en-GB" dirty="0"/>
           </a:p>
@@ -6803,7 +9455,7 @@
           <p:cNvPr id="186" name="Rectangle 185">
             <a:extLst>
               <a:ext uri="{FF2B5EF4-FFF2-40B4-BE49-F238E27FC236}">
-                <a16:creationId xmlns:a16="http://schemas.microsoft.com/office/drawing/2014/main" id="{48D27E21-6331-4013-A8ED-C8F531D3EB23}"/>
+                <a16:creationId xmlns:a16="http://schemas.microsoft.com/office/drawing/2014/main" xmlns="" id="{48D27E21-6331-4013-A8ED-C8F531D3EB23}"/>
               </a:ext>
             </a:extLst>
           </p:cNvPr>
@@ -6847,11 +9499,7 @@
             <a:pPr algn="ctr"/>
             <a:r>
               <a:rPr lang="fr-FR" dirty="0"/>
-              <a:t>Data </a:t>
-            </a:r>
-            <a:r>
-              <a:rPr lang="fr-FR" dirty="0" err="1"/>
-              <a:t>Recvd</a:t>
+              <a:t>Data Recvd</a:t>
             </a:r>
             <a:endParaRPr lang="en-GB" dirty="0"/>
           </a:p>
@@ -6862,7 +9510,7 @@
           <p:cNvPr id="188" name="Connecteur droit avec flèche 187">
             <a:extLst>
               <a:ext uri="{FF2B5EF4-FFF2-40B4-BE49-F238E27FC236}">
-                <a16:creationId xmlns:a16="http://schemas.microsoft.com/office/drawing/2014/main" id="{08D9A169-A7C0-461D-8187-840540051B18}"/>
+                <a16:creationId xmlns:a16="http://schemas.microsoft.com/office/drawing/2014/main" xmlns="" id="{08D9A169-A7C0-461D-8187-840540051B18}"/>
               </a:ext>
             </a:extLst>
           </p:cNvPr>
@@ -6907,7 +9555,7 @@
           <p:cNvPr id="189" name="Connecteur droit avec flèche 188">
             <a:extLst>
               <a:ext uri="{FF2B5EF4-FFF2-40B4-BE49-F238E27FC236}">
-                <a16:creationId xmlns:a16="http://schemas.microsoft.com/office/drawing/2014/main" id="{2DE85B40-3301-44A8-BFE9-E72679501136}"/>
+                <a16:creationId xmlns:a16="http://schemas.microsoft.com/office/drawing/2014/main" xmlns="" id="{2DE85B40-3301-44A8-BFE9-E72679501136}"/>
               </a:ext>
             </a:extLst>
           </p:cNvPr>
@@ -6953,7 +9601,7 @@
           <p:cNvPr id="192" name="Connecteur droit avec flèche 191">
             <a:extLst>
               <a:ext uri="{FF2B5EF4-FFF2-40B4-BE49-F238E27FC236}">
-                <a16:creationId xmlns:a16="http://schemas.microsoft.com/office/drawing/2014/main" id="{D6DA2AEB-C5AE-412C-A3CD-51F2A34EA60A}"/>
+                <a16:creationId xmlns:a16="http://schemas.microsoft.com/office/drawing/2014/main" xmlns="" id="{D6DA2AEB-C5AE-412C-A3CD-51F2A34EA60A}"/>
               </a:ext>
             </a:extLst>
           </p:cNvPr>
@@ -6999,7 +9647,7 @@
           <p:cNvPr id="195" name="Connecteur droit avec flèche 194">
             <a:extLst>
               <a:ext uri="{FF2B5EF4-FFF2-40B4-BE49-F238E27FC236}">
-                <a16:creationId xmlns:a16="http://schemas.microsoft.com/office/drawing/2014/main" id="{F8CF6522-BB05-404D-89B0-27210AC93648}"/>
+                <a16:creationId xmlns:a16="http://schemas.microsoft.com/office/drawing/2014/main" xmlns="" id="{F8CF6522-BB05-404D-89B0-27210AC93648}"/>
               </a:ext>
             </a:extLst>
           </p:cNvPr>
@@ -7045,7 +9693,7 @@
           <p:cNvPr id="215" name="Connecteur droit avec flèche 214">
             <a:extLst>
               <a:ext uri="{FF2B5EF4-FFF2-40B4-BE49-F238E27FC236}">
-                <a16:creationId xmlns:a16="http://schemas.microsoft.com/office/drawing/2014/main" id="{F06AB171-C4D0-4A6C-9431-6478921646FC}"/>
+                <a16:creationId xmlns:a16="http://schemas.microsoft.com/office/drawing/2014/main" xmlns="" id="{F06AB171-C4D0-4A6C-9431-6478921646FC}"/>
               </a:ext>
             </a:extLst>
           </p:cNvPr>
@@ -7089,7 +9737,7 @@
           <p:cNvPr id="217" name="Rectangle : coins arrondis 216">
             <a:extLst>
               <a:ext uri="{FF2B5EF4-FFF2-40B4-BE49-F238E27FC236}">
-                <a16:creationId xmlns:a16="http://schemas.microsoft.com/office/drawing/2014/main" id="{B1EBE2B5-BCD4-4009-BC49-E3743BDA79EE}"/>
+                <a16:creationId xmlns:a16="http://schemas.microsoft.com/office/drawing/2014/main" xmlns="" id="{B1EBE2B5-BCD4-4009-BC49-E3743BDA79EE}"/>
               </a:ext>
             </a:extLst>
           </p:cNvPr>
@@ -7131,11 +9779,7 @@
             <a:pPr algn="ctr"/>
             <a:r>
               <a:rPr lang="fr-FR" dirty="0"/>
-              <a:t>Size </a:t>
-            </a:r>
-            <a:r>
-              <a:rPr lang="fr-FR" dirty="0" err="1"/>
-              <a:t>Known</a:t>
+              <a:t>Size Known</a:t>
             </a:r>
             <a:endParaRPr lang="en-GB" dirty="0"/>
           </a:p>
@@ -7146,7 +9790,7 @@
           <p:cNvPr id="219" name="Rectangle : coins arrondis 218">
             <a:extLst>
               <a:ext uri="{FF2B5EF4-FFF2-40B4-BE49-F238E27FC236}">
-                <a16:creationId xmlns:a16="http://schemas.microsoft.com/office/drawing/2014/main" id="{841C666D-A606-47D4-B762-686A42A8296D}"/>
+                <a16:creationId xmlns:a16="http://schemas.microsoft.com/office/drawing/2014/main" xmlns="" id="{841C666D-A606-47D4-B762-686A42A8296D}"/>
               </a:ext>
             </a:extLst>
           </p:cNvPr>
@@ -7188,11 +9832,7 @@
             <a:pPr algn="ctr"/>
             <a:r>
               <a:rPr lang="fr-FR" dirty="0"/>
-              <a:t>Reset </a:t>
-            </a:r>
-            <a:r>
-              <a:rPr lang="fr-FR" dirty="0" err="1"/>
-              <a:t>Recvd</a:t>
+              <a:t>Reset Recvd</a:t>
             </a:r>
             <a:endParaRPr lang="en-GB" dirty="0"/>
           </a:p>
@@ -7203,7 +9843,7 @@
           <p:cNvPr id="220" name="Connecteur droit avec flèche 219">
             <a:extLst>
               <a:ext uri="{FF2B5EF4-FFF2-40B4-BE49-F238E27FC236}">
-                <a16:creationId xmlns:a16="http://schemas.microsoft.com/office/drawing/2014/main" id="{E282615C-C279-424D-AC29-946D456855CB}"/>
+                <a16:creationId xmlns:a16="http://schemas.microsoft.com/office/drawing/2014/main" xmlns="" id="{E282615C-C279-424D-AC29-946D456855CB}"/>
               </a:ext>
             </a:extLst>
           </p:cNvPr>
@@ -7245,7 +9885,7 @@
           <p:cNvPr id="222" name="Rectangle : coins arrondis 221">
             <a:extLst>
               <a:ext uri="{FF2B5EF4-FFF2-40B4-BE49-F238E27FC236}">
-                <a16:creationId xmlns:a16="http://schemas.microsoft.com/office/drawing/2014/main" id="{3BE9F64E-183E-4FC2-9E85-9AEC4A332740}"/>
+                <a16:creationId xmlns:a16="http://schemas.microsoft.com/office/drawing/2014/main" xmlns="" id="{3BE9F64E-183E-4FC2-9E85-9AEC4A332740}"/>
               </a:ext>
             </a:extLst>
           </p:cNvPr>
@@ -7287,11 +9927,7 @@
             <a:pPr algn="ctr"/>
             <a:r>
               <a:rPr lang="fr-FR" dirty="0"/>
-              <a:t>Data </a:t>
-            </a:r>
-            <a:r>
-              <a:rPr lang="fr-FR" dirty="0" err="1"/>
-              <a:t>Recvd</a:t>
+              <a:t>Data Recvd</a:t>
             </a:r>
             <a:endParaRPr lang="en-GB" dirty="0"/>
           </a:p>
@@ -7302,7 +9938,7 @@
           <p:cNvPr id="223" name="Connecteur droit avec flèche 222">
             <a:extLst>
               <a:ext uri="{FF2B5EF4-FFF2-40B4-BE49-F238E27FC236}">
-                <a16:creationId xmlns:a16="http://schemas.microsoft.com/office/drawing/2014/main" id="{DF236E6B-21F7-4A46-966C-032D44C15BEF}"/>
+                <a16:creationId xmlns:a16="http://schemas.microsoft.com/office/drawing/2014/main" xmlns="" id="{DF236E6B-21F7-4A46-966C-032D44C15BEF}"/>
               </a:ext>
             </a:extLst>
           </p:cNvPr>
@@ -7346,7 +9982,7 @@
           <p:cNvPr id="224" name="Connecteur droit avec flèche 223">
             <a:extLst>
               <a:ext uri="{FF2B5EF4-FFF2-40B4-BE49-F238E27FC236}">
-                <a16:creationId xmlns:a16="http://schemas.microsoft.com/office/drawing/2014/main" id="{710F0520-3080-405A-8A08-0596A1BCD120}"/>
+                <a16:creationId xmlns:a16="http://schemas.microsoft.com/office/drawing/2014/main" xmlns="" id="{710F0520-3080-405A-8A08-0596A1BCD120}"/>
               </a:ext>
             </a:extLst>
           </p:cNvPr>
@@ -7390,7 +10026,7 @@
           <p:cNvPr id="225" name="Connecteur droit avec flèche 224">
             <a:extLst>
               <a:ext uri="{FF2B5EF4-FFF2-40B4-BE49-F238E27FC236}">
-                <a16:creationId xmlns:a16="http://schemas.microsoft.com/office/drawing/2014/main" id="{FD2AD9F1-AAA5-40ED-9EF5-A8FD862862E1}"/>
+                <a16:creationId xmlns:a16="http://schemas.microsoft.com/office/drawing/2014/main" xmlns="" id="{FD2AD9F1-AAA5-40ED-9EF5-A8FD862862E1}"/>
               </a:ext>
             </a:extLst>
           </p:cNvPr>
@@ -7434,7 +10070,7 @@
           <p:cNvPr id="230" name="Rectangle : coins arrondis 229">
             <a:extLst>
               <a:ext uri="{FF2B5EF4-FFF2-40B4-BE49-F238E27FC236}">
-                <a16:creationId xmlns:a16="http://schemas.microsoft.com/office/drawing/2014/main" id="{13F37134-309F-4816-9A78-651A5D7CB676}"/>
+                <a16:creationId xmlns:a16="http://schemas.microsoft.com/office/drawing/2014/main" xmlns="" id="{13F37134-309F-4816-9A78-651A5D7CB676}"/>
               </a:ext>
             </a:extLst>
           </p:cNvPr>
@@ -7489,7 +10125,7 @@
           <p:cNvPr id="232" name="Rectangle : coins arrondis 231">
             <a:extLst>
               <a:ext uri="{FF2B5EF4-FFF2-40B4-BE49-F238E27FC236}">
-                <a16:creationId xmlns:a16="http://schemas.microsoft.com/office/drawing/2014/main" id="{E561FA01-2DAB-42B4-95C2-0E356AA4D4DF}"/>
+                <a16:creationId xmlns:a16="http://schemas.microsoft.com/office/drawing/2014/main" xmlns="" id="{E561FA01-2DAB-42B4-95C2-0E356AA4D4DF}"/>
               </a:ext>
             </a:extLst>
           </p:cNvPr>
@@ -7544,7 +10180,7 @@
           <p:cNvPr id="233" name="Connecteur droit avec flèche 232">
             <a:extLst>
               <a:ext uri="{FF2B5EF4-FFF2-40B4-BE49-F238E27FC236}">
-                <a16:creationId xmlns:a16="http://schemas.microsoft.com/office/drawing/2014/main" id="{AB81251E-8436-4FCE-A331-264E6593C451}"/>
+                <a16:creationId xmlns:a16="http://schemas.microsoft.com/office/drawing/2014/main" xmlns="" id="{AB81251E-8436-4FCE-A331-264E6593C451}"/>
               </a:ext>
             </a:extLst>
           </p:cNvPr>
@@ -7588,7 +10224,7 @@
           <p:cNvPr id="234" name="Connecteur droit avec flèche 233">
             <a:extLst>
               <a:ext uri="{FF2B5EF4-FFF2-40B4-BE49-F238E27FC236}">
-                <a16:creationId xmlns:a16="http://schemas.microsoft.com/office/drawing/2014/main" id="{FE902090-C3A8-4B74-BEF8-4402648111E1}"/>
+                <a16:creationId xmlns:a16="http://schemas.microsoft.com/office/drawing/2014/main" xmlns="" id="{FE902090-C3A8-4B74-BEF8-4402648111E1}"/>
               </a:ext>
             </a:extLst>
           </p:cNvPr>
@@ -7632,7 +10268,7 @@
           <p:cNvPr id="235" name="Connecteur droit avec flèche 234">
             <a:extLst>
               <a:ext uri="{FF2B5EF4-FFF2-40B4-BE49-F238E27FC236}">
-                <a16:creationId xmlns:a16="http://schemas.microsoft.com/office/drawing/2014/main" id="{9A07EC96-3AC2-48A7-B279-3B7E74DA5465}"/>
+                <a16:creationId xmlns:a16="http://schemas.microsoft.com/office/drawing/2014/main" xmlns="" id="{9A07EC96-3AC2-48A7-B279-3B7E74DA5465}"/>
               </a:ext>
             </a:extLst>
           </p:cNvPr>
@@ -7678,7 +10314,7 @@
           <p:cNvPr id="239" name="Connecteur droit avec flèche 238">
             <a:extLst>
               <a:ext uri="{FF2B5EF4-FFF2-40B4-BE49-F238E27FC236}">
-                <a16:creationId xmlns:a16="http://schemas.microsoft.com/office/drawing/2014/main" id="{2E747C15-F807-45E7-BFDC-B8E819925F1A}"/>
+                <a16:creationId xmlns:a16="http://schemas.microsoft.com/office/drawing/2014/main" xmlns="" id="{2E747C15-F807-45E7-BFDC-B8E819925F1A}"/>
               </a:ext>
             </a:extLst>
           </p:cNvPr>
@@ -7724,7 +10360,7 @@
           <p:cNvPr id="242" name="Connecteur droit avec flèche 241">
             <a:extLst>
               <a:ext uri="{FF2B5EF4-FFF2-40B4-BE49-F238E27FC236}">
-                <a16:creationId xmlns:a16="http://schemas.microsoft.com/office/drawing/2014/main" id="{54CC4135-177E-4569-9CFA-193A1B456190}"/>
+                <a16:creationId xmlns:a16="http://schemas.microsoft.com/office/drawing/2014/main" xmlns="" id="{54CC4135-177E-4569-9CFA-193A1B456190}"/>
               </a:ext>
             </a:extLst>
           </p:cNvPr>
@@ -7770,7 +10406,7 @@
           <p:cNvPr id="246" name="Connecteur droit avec flèche 245">
             <a:extLst>
               <a:ext uri="{FF2B5EF4-FFF2-40B4-BE49-F238E27FC236}">
-                <a16:creationId xmlns:a16="http://schemas.microsoft.com/office/drawing/2014/main" id="{02386CF8-1EE3-4FE8-AA13-AD36A0F7108E}"/>
+                <a16:creationId xmlns:a16="http://schemas.microsoft.com/office/drawing/2014/main" xmlns="" id="{02386CF8-1EE3-4FE8-AA13-AD36A0F7108E}"/>
               </a:ext>
             </a:extLst>
           </p:cNvPr>
@@ -7816,7 +10452,7 @@
           <p:cNvPr id="251" name="Connecteur droit avec flèche 250">
             <a:extLst>
               <a:ext uri="{FF2B5EF4-FFF2-40B4-BE49-F238E27FC236}">
-                <a16:creationId xmlns:a16="http://schemas.microsoft.com/office/drawing/2014/main" id="{B45C2B87-9299-4486-B04F-AA6E045EEA78}"/>
+                <a16:creationId xmlns:a16="http://schemas.microsoft.com/office/drawing/2014/main" xmlns="" id="{B45C2B87-9299-4486-B04F-AA6E045EEA78}"/>
               </a:ext>
             </a:extLst>
           </p:cNvPr>
@@ -7859,7 +10495,7 @@
           <p:cNvPr id="252" name="Connecteur droit avec flèche 251">
             <a:extLst>
               <a:ext uri="{FF2B5EF4-FFF2-40B4-BE49-F238E27FC236}">
-                <a16:creationId xmlns:a16="http://schemas.microsoft.com/office/drawing/2014/main" id="{439C077F-27BB-4F3B-B59E-6A55E27B6D38}"/>
+                <a16:creationId xmlns:a16="http://schemas.microsoft.com/office/drawing/2014/main" xmlns="" id="{439C077F-27BB-4F3B-B59E-6A55E27B6D38}"/>
               </a:ext>
             </a:extLst>
           </p:cNvPr>
@@ -7902,7 +10538,7 @@
           <p:cNvPr id="256" name="Connecteur droit avec flèche 255">
             <a:extLst>
               <a:ext uri="{FF2B5EF4-FFF2-40B4-BE49-F238E27FC236}">
-                <a16:creationId xmlns:a16="http://schemas.microsoft.com/office/drawing/2014/main" id="{AAF2B872-E6D7-42D7-869A-0AF764772FD8}"/>
+                <a16:creationId xmlns:a16="http://schemas.microsoft.com/office/drawing/2014/main" xmlns="" id="{AAF2B872-E6D7-42D7-869A-0AF764772FD8}"/>
               </a:ext>
             </a:extLst>
           </p:cNvPr>
@@ -7946,7 +10582,7 @@
           <p:cNvPr id="259" name="Connecteur droit avec flèche 258">
             <a:extLst>
               <a:ext uri="{FF2B5EF4-FFF2-40B4-BE49-F238E27FC236}">
-                <a16:creationId xmlns:a16="http://schemas.microsoft.com/office/drawing/2014/main" id="{15F80B20-804A-4682-9538-EC1F3419BD2A}"/>
+                <a16:creationId xmlns:a16="http://schemas.microsoft.com/office/drawing/2014/main" xmlns="" id="{15F80B20-804A-4682-9538-EC1F3419BD2A}"/>
               </a:ext>
             </a:extLst>
           </p:cNvPr>
@@ -7990,7 +10626,7 @@
           <p:cNvPr id="265" name="Connecteur droit avec flèche 264">
             <a:extLst>
               <a:ext uri="{FF2B5EF4-FFF2-40B4-BE49-F238E27FC236}">
-                <a16:creationId xmlns:a16="http://schemas.microsoft.com/office/drawing/2014/main" id="{3E54D7A2-DE93-4811-861F-F48F159567E4}"/>
+                <a16:creationId xmlns:a16="http://schemas.microsoft.com/office/drawing/2014/main" xmlns="" id="{3E54D7A2-DE93-4811-861F-F48F159567E4}"/>
               </a:ext>
             </a:extLst>
           </p:cNvPr>
@@ -8032,7 +10668,7 @@
           <p:cNvPr id="267" name="Connecteur droit avec flèche 266">
             <a:extLst>
               <a:ext uri="{FF2B5EF4-FFF2-40B4-BE49-F238E27FC236}">
-                <a16:creationId xmlns:a16="http://schemas.microsoft.com/office/drawing/2014/main" id="{F7AC6A69-12E7-4B67-A60E-BB2E6236BA96}"/>
+                <a16:creationId xmlns:a16="http://schemas.microsoft.com/office/drawing/2014/main" xmlns="" id="{F7AC6A69-12E7-4B67-A60E-BB2E6236BA96}"/>
               </a:ext>
             </a:extLst>
           </p:cNvPr>
@@ -8075,7 +10711,7 @@
           <p:cNvPr id="270" name="Connecteur droit avec flèche 269">
             <a:extLst>
               <a:ext uri="{FF2B5EF4-FFF2-40B4-BE49-F238E27FC236}">
-                <a16:creationId xmlns:a16="http://schemas.microsoft.com/office/drawing/2014/main" id="{99F3C843-32BA-445B-A4F8-EBD52E25820E}"/>
+                <a16:creationId xmlns:a16="http://schemas.microsoft.com/office/drawing/2014/main" xmlns="" id="{99F3C843-32BA-445B-A4F8-EBD52E25820E}"/>
               </a:ext>
             </a:extLst>
           </p:cNvPr>
@@ -8118,7 +10754,7 @@
           <p:cNvPr id="273" name="Connecteur droit avec flèche 272">
             <a:extLst>
               <a:ext uri="{FF2B5EF4-FFF2-40B4-BE49-F238E27FC236}">
-                <a16:creationId xmlns:a16="http://schemas.microsoft.com/office/drawing/2014/main" id="{99E80C1D-CD0F-43B7-9F88-8A2CA1CFF469}"/>
+                <a16:creationId xmlns:a16="http://schemas.microsoft.com/office/drawing/2014/main" xmlns="" id="{99E80C1D-CD0F-43B7-9F88-8A2CA1CFF469}"/>
               </a:ext>
             </a:extLst>
           </p:cNvPr>
@@ -8161,7 +10797,7 @@
           <p:cNvPr id="276" name="Connecteur droit avec flèche 275">
             <a:extLst>
               <a:ext uri="{FF2B5EF4-FFF2-40B4-BE49-F238E27FC236}">
-                <a16:creationId xmlns:a16="http://schemas.microsoft.com/office/drawing/2014/main" id="{39D10607-7465-4ED6-AD0B-FEF292123988}"/>
+                <a16:creationId xmlns:a16="http://schemas.microsoft.com/office/drawing/2014/main" xmlns="" id="{39D10607-7465-4ED6-AD0B-FEF292123988}"/>
               </a:ext>
             </a:extLst>
           </p:cNvPr>
@@ -8205,7 +10841,7 @@
           <p:cNvPr id="279" name="Connecteur droit avec flèche 278">
             <a:extLst>
               <a:ext uri="{FF2B5EF4-FFF2-40B4-BE49-F238E27FC236}">
-                <a16:creationId xmlns:a16="http://schemas.microsoft.com/office/drawing/2014/main" id="{07027E4A-A6DF-4651-B31B-0348AFB091F4}"/>
+                <a16:creationId xmlns:a16="http://schemas.microsoft.com/office/drawing/2014/main" xmlns="" id="{07027E4A-A6DF-4651-B31B-0348AFB091F4}"/>
               </a:ext>
             </a:extLst>
           </p:cNvPr>
@@ -8249,7 +10885,7 @@
           <p:cNvPr id="282" name="Connecteur droit avec flèche 281">
             <a:extLst>
               <a:ext uri="{FF2B5EF4-FFF2-40B4-BE49-F238E27FC236}">
-                <a16:creationId xmlns:a16="http://schemas.microsoft.com/office/drawing/2014/main" id="{DEBB1C9C-3D9E-4EA6-B05E-B1C92B9B837D}"/>
+                <a16:creationId xmlns:a16="http://schemas.microsoft.com/office/drawing/2014/main" xmlns="" id="{DEBB1C9C-3D9E-4EA6-B05E-B1C92B9B837D}"/>
               </a:ext>
             </a:extLst>
           </p:cNvPr>
@@ -8293,7 +10929,7 @@
           <p:cNvPr id="285" name="Connecteur droit avec flèche 284">
             <a:extLst>
               <a:ext uri="{FF2B5EF4-FFF2-40B4-BE49-F238E27FC236}">
-                <a16:creationId xmlns:a16="http://schemas.microsoft.com/office/drawing/2014/main" id="{197E7B99-DEFD-4536-9E2C-99DC5AF8F6E0}"/>
+                <a16:creationId xmlns:a16="http://schemas.microsoft.com/office/drawing/2014/main" xmlns="" id="{197E7B99-DEFD-4536-9E2C-99DC5AF8F6E0}"/>
               </a:ext>
             </a:extLst>
           </p:cNvPr>
@@ -8344,7 +10980,7 @@
 </p:sld>
 </file>
 
-<file path=ppt/slides/slide4.xml><?xml version="1.0" encoding="utf-8"?>
+<file path=ppt/slides/slide5.xml><?xml version="1.0" encoding="utf-8"?>
 <p:sld xmlns:a="http://schemas.openxmlformats.org/drawingml/2006/main" xmlns:r="http://schemas.openxmlformats.org/officeDocument/2006/relationships" xmlns:p="http://schemas.openxmlformats.org/presentationml/2006/main">
   <p:cSld>
     <p:spTree>
@@ -8363,10 +10999,69 @@
       </p:grpSpPr>
       <p:sp>
         <p:nvSpPr>
+          <p:cNvPr id="2" name="Titre 1"/>
+          <p:cNvSpPr>
+            <a:spLocks noGrp="1"/>
+          </p:cNvSpPr>
+          <p:nvPr>
+            <p:ph type="title"/>
+          </p:nvPr>
+        </p:nvSpPr>
+        <p:spPr>
+          <a:xfrm>
+            <a:off x="903514" y="2705554"/>
+            <a:ext cx="10515600" cy="1325563"/>
+          </a:xfrm>
+        </p:spPr>
+        <p:txBody>
+          <a:bodyPr/>
+          <a:lstStyle/>
+          <a:p>
+            <a:pPr algn="ctr"/>
+            <a:r>
+              <a:rPr lang="en-GB" b="1" dirty="0" smtClean="0"/>
+              <a:t>10.Connection Termination</a:t>
+            </a:r>
+            <a:endParaRPr lang="fr-FR" b="1" dirty="0"/>
+          </a:p>
+        </p:txBody>
+      </p:sp>
+    </p:spTree>
+    <p:extLst>
+      <p:ext uri="{BB962C8B-B14F-4D97-AF65-F5344CB8AC3E}">
+        <p14:creationId xmlns:p14="http://schemas.microsoft.com/office/powerpoint/2010/main" val="1714462338"/>
+      </p:ext>
+    </p:extLst>
+  </p:cSld>
+  <p:clrMapOvr>
+    <a:masterClrMapping/>
+  </p:clrMapOvr>
+</p:sld>
+</file>
+
+<file path=ppt/slides/slide6.xml><?xml version="1.0" encoding="utf-8"?>
+<p:sld xmlns:a="http://schemas.openxmlformats.org/drawingml/2006/main" xmlns:r="http://schemas.openxmlformats.org/officeDocument/2006/relationships" xmlns:p="http://schemas.openxmlformats.org/presentationml/2006/main">
+  <p:cSld>
+    <p:spTree>
+      <p:nvGrpSpPr>
+        <p:cNvPr id="1" name=""/>
+        <p:cNvGrpSpPr/>
+        <p:nvPr/>
+      </p:nvGrpSpPr>
+      <p:grpSpPr>
+        <a:xfrm>
+          <a:off x="0" y="0"/>
+          <a:ext cx="0" cy="0"/>
+          <a:chOff x="0" y="0"/>
+          <a:chExt cx="0" cy="0"/>
+        </a:xfrm>
+      </p:grpSpPr>
+      <p:sp>
+        <p:nvSpPr>
           <p:cNvPr id="5" name="ZoneTexte 4">
             <a:extLst>
               <a:ext uri="{FF2B5EF4-FFF2-40B4-BE49-F238E27FC236}">
-                <a16:creationId xmlns:a16="http://schemas.microsoft.com/office/drawing/2014/main" id="{25D0CFDD-F8D9-4498-A666-F31BA473AEDD}"/>
+                <a16:creationId xmlns:a16="http://schemas.microsoft.com/office/drawing/2014/main" xmlns="" id="{25D0CFDD-F8D9-4498-A666-F31BA473AEDD}"/>
               </a:ext>
             </a:extLst>
           </p:cNvPr>
@@ -8375,8 +11070,8 @@
         </p:nvSpPr>
         <p:spPr>
           <a:xfrm>
-            <a:off x="3048000" y="3244334"/>
-            <a:ext cx="6096000" cy="369332"/>
+            <a:off x="9558740" y="0"/>
+            <a:ext cx="2633260" cy="523220"/>
           </a:xfrm>
           <a:prstGeom prst="rect">
             <a:avLst/>
@@ -8390,9 +11085,1995 @@
           <a:lstStyle/>
           <a:p>
             <a:r>
-              <a:rPr lang="en-GB" dirty="0"/>
-              <a:t>10.  Connection Termination</a:t>
-            </a:r>
+              <a:rPr lang="en-GB" sz="2800" b="1" dirty="0"/>
+              <a:t>I</a:t>
+            </a:r>
+            <a:r>
+              <a:rPr lang="en-GB" sz="2800" b="1" dirty="0" smtClean="0"/>
+              <a:t>mmediate close</a:t>
+            </a:r>
+            <a:endParaRPr lang="en-GB" sz="2800" b="1" dirty="0"/>
+          </a:p>
+        </p:txBody>
+      </p:sp>
+      <p:sp>
+        <p:nvSpPr>
+          <p:cNvPr id="3" name="Ellipse 2">
+            <a:extLst>
+              <a:ext uri="{FF2B5EF4-FFF2-40B4-BE49-F238E27FC236}">
+                <a16:creationId xmlns:a16="http://schemas.microsoft.com/office/drawing/2014/main" xmlns="" id="{89FCD844-DF7E-40C9-9D11-022F7FE63189}"/>
+              </a:ext>
+            </a:extLst>
+          </p:cNvPr>
+          <p:cNvSpPr/>
+          <p:nvPr/>
+        </p:nvSpPr>
+        <p:spPr>
+          <a:xfrm>
+            <a:off x="3376148" y="1462778"/>
+            <a:ext cx="1494693" cy="931985"/>
+          </a:xfrm>
+          <a:prstGeom prst="ellipse">
+            <a:avLst/>
+          </a:prstGeom>
+        </p:spPr>
+        <p:style>
+          <a:lnRef idx="2">
+            <a:schemeClr val="accent2">
+              <a:shade val="50000"/>
+            </a:schemeClr>
+          </a:lnRef>
+          <a:fillRef idx="1">
+            <a:schemeClr val="accent2"/>
+          </a:fillRef>
+          <a:effectRef idx="0">
+            <a:schemeClr val="accent2"/>
+          </a:effectRef>
+          <a:fontRef idx="minor">
+            <a:schemeClr val="lt1"/>
+          </a:fontRef>
+        </p:style>
+        <p:txBody>
+          <a:bodyPr rtlCol="0" anchor="ctr"/>
+          <a:lstStyle/>
+          <a:p>
+            <a:pPr algn="ctr"/>
+            <a:r>
+              <a:rPr lang="fr-BE" sz="1400" b="1" dirty="0" smtClean="0"/>
+              <a:t>Closing connection</a:t>
+            </a:r>
+            <a:endParaRPr lang="en-GB" sz="1400" b="1" dirty="0"/>
+          </a:p>
+        </p:txBody>
+      </p:sp>
+      <p:sp>
+        <p:nvSpPr>
+          <p:cNvPr id="4" name="Ellipse 3">
+            <a:extLst>
+              <a:ext uri="{FF2B5EF4-FFF2-40B4-BE49-F238E27FC236}">
+                <a16:creationId xmlns:a16="http://schemas.microsoft.com/office/drawing/2014/main" xmlns="" id="{89FCD844-DF7E-40C9-9D11-022F7FE63189}"/>
+              </a:ext>
+            </a:extLst>
+          </p:cNvPr>
+          <p:cNvSpPr/>
+          <p:nvPr/>
+        </p:nvSpPr>
+        <p:spPr>
+          <a:xfrm>
+            <a:off x="7150337" y="1462778"/>
+            <a:ext cx="1494693" cy="931985"/>
+          </a:xfrm>
+          <a:prstGeom prst="ellipse">
+            <a:avLst/>
+          </a:prstGeom>
+        </p:spPr>
+        <p:style>
+          <a:lnRef idx="2">
+            <a:schemeClr val="accent2">
+              <a:shade val="50000"/>
+            </a:schemeClr>
+          </a:lnRef>
+          <a:fillRef idx="1">
+            <a:schemeClr val="accent2"/>
+          </a:fillRef>
+          <a:effectRef idx="0">
+            <a:schemeClr val="accent2"/>
+          </a:effectRef>
+          <a:fontRef idx="minor">
+            <a:schemeClr val="lt1"/>
+          </a:fontRef>
+        </p:style>
+        <p:txBody>
+          <a:bodyPr rtlCol="0" anchor="ctr"/>
+          <a:lstStyle/>
+          <a:p>
+            <a:pPr algn="ctr"/>
+            <a:r>
+              <a:rPr lang="fr-BE" sz="1400" b="1" dirty="0" smtClean="0"/>
+              <a:t>Draining connection</a:t>
+            </a:r>
+            <a:endParaRPr lang="en-GB" sz="1400" b="1" dirty="0"/>
+          </a:p>
+        </p:txBody>
+      </p:sp>
+      <p:cxnSp>
+        <p:nvCxnSpPr>
+          <p:cNvPr id="7" name="Connecteur droit avec flèche 6">
+            <a:extLst>
+              <a:ext uri="{FF2B5EF4-FFF2-40B4-BE49-F238E27FC236}">
+                <a16:creationId xmlns:a16="http://schemas.microsoft.com/office/drawing/2014/main" xmlns="" id="{6589CEFF-63AD-48E0-B8C2-2B9C42EE3BA1}"/>
+              </a:ext>
+            </a:extLst>
+          </p:cNvPr>
+          <p:cNvCxnSpPr>
+            <a:endCxn id="3" idx="2"/>
+          </p:cNvCxnSpPr>
+          <p:nvPr/>
+        </p:nvCxnSpPr>
+        <p:spPr>
+          <a:xfrm>
+            <a:off x="2628801" y="1928770"/>
+            <a:ext cx="747347" cy="1"/>
+          </a:xfrm>
+          <a:prstGeom prst="straightConnector1">
+            <a:avLst/>
+          </a:prstGeom>
+          <a:ln w="28575">
+            <a:tailEnd type="triangle"/>
+          </a:ln>
+        </p:spPr>
+        <p:style>
+          <a:lnRef idx="1">
+            <a:schemeClr val="dk1"/>
+          </a:lnRef>
+          <a:fillRef idx="0">
+            <a:schemeClr val="dk1"/>
+          </a:fillRef>
+          <a:effectRef idx="0">
+            <a:schemeClr val="dk1"/>
+          </a:effectRef>
+          <a:fontRef idx="minor">
+            <a:schemeClr val="tx1"/>
+          </a:fontRef>
+        </p:style>
+      </p:cxnSp>
+      <p:sp>
+        <p:nvSpPr>
+          <p:cNvPr id="8" name="ZoneTexte 7">
+            <a:extLst>
+              <a:ext uri="{FF2B5EF4-FFF2-40B4-BE49-F238E27FC236}">
+                <a16:creationId xmlns:a16="http://schemas.microsoft.com/office/drawing/2014/main" xmlns="" id="{479D2F68-32D5-4E80-B573-2C6156DCB22F}"/>
+              </a:ext>
+            </a:extLst>
+          </p:cNvPr>
+          <p:cNvSpPr txBox="1"/>
+          <p:nvPr/>
+        </p:nvSpPr>
+        <p:spPr>
+          <a:xfrm>
+            <a:off x="422427" y="1744104"/>
+            <a:ext cx="2274084" cy="369332"/>
+          </a:xfrm>
+          <a:prstGeom prst="rect">
+            <a:avLst/>
+          </a:prstGeom>
+          <a:noFill/>
+        </p:spPr>
+        <p:txBody>
+          <a:bodyPr wrap="none" rtlCol="0">
+            <a:spAutoFit/>
+          </a:bodyPr>
+          <a:lstStyle/>
+          <a:p>
+            <a:r>
+              <a:rPr lang="fr-BE" dirty="0"/>
+              <a:t>r.CONNECTION_CLOSE</a:t>
+            </a:r>
+          </a:p>
+        </p:txBody>
+      </p:sp>
+      <p:sp>
+        <p:nvSpPr>
+          <p:cNvPr id="9" name="Ellipse 8">
+            <a:extLst>
+              <a:ext uri="{FF2B5EF4-FFF2-40B4-BE49-F238E27FC236}">
+                <a16:creationId xmlns:a16="http://schemas.microsoft.com/office/drawing/2014/main" xmlns="" id="{A05BD43F-3BA6-4D44-9A89-6240DC624C9A}"/>
+              </a:ext>
+            </a:extLst>
+          </p:cNvPr>
+          <p:cNvSpPr/>
+          <p:nvPr/>
+        </p:nvSpPr>
+        <p:spPr>
+          <a:xfrm>
+            <a:off x="3376147" y="4270455"/>
+            <a:ext cx="1494693" cy="931985"/>
+          </a:xfrm>
+          <a:prstGeom prst="ellipse">
+            <a:avLst/>
+          </a:prstGeom>
+          <a:solidFill>
+            <a:srgbClr val="C00000"/>
+          </a:solidFill>
+        </p:spPr>
+        <p:style>
+          <a:lnRef idx="2">
+            <a:schemeClr val="accent1">
+              <a:shade val="50000"/>
+            </a:schemeClr>
+          </a:lnRef>
+          <a:fillRef idx="1">
+            <a:schemeClr val="accent1"/>
+          </a:fillRef>
+          <a:effectRef idx="0">
+            <a:schemeClr val="accent1"/>
+          </a:effectRef>
+          <a:fontRef idx="minor">
+            <a:schemeClr val="lt1"/>
+          </a:fontRef>
+        </p:style>
+        <p:txBody>
+          <a:bodyPr rtlCol="0" anchor="ctr"/>
+          <a:lstStyle/>
+          <a:p>
+            <a:pPr algn="ctr"/>
+            <a:r>
+              <a:rPr lang="fr-BE" sz="1400" b="1" dirty="0" smtClean="0"/>
+              <a:t>Connection close sent</a:t>
+            </a:r>
+            <a:endParaRPr lang="en-GB" sz="1400" b="1" dirty="0"/>
+          </a:p>
+        </p:txBody>
+      </p:sp>
+      <p:cxnSp>
+        <p:nvCxnSpPr>
+          <p:cNvPr id="10" name="Connecteur droit avec flèche 9">
+            <a:extLst>
+              <a:ext uri="{FF2B5EF4-FFF2-40B4-BE49-F238E27FC236}">
+                <a16:creationId xmlns:a16="http://schemas.microsoft.com/office/drawing/2014/main" xmlns="" id="{6589CEFF-63AD-48E0-B8C2-2B9C42EE3BA1}"/>
+              </a:ext>
+            </a:extLst>
+          </p:cNvPr>
+          <p:cNvCxnSpPr>
+            <a:stCxn id="3" idx="4"/>
+            <a:endCxn id="9" idx="0"/>
+          </p:cNvCxnSpPr>
+          <p:nvPr/>
+        </p:nvCxnSpPr>
+        <p:spPr>
+          <a:xfrm flipH="1">
+            <a:off x="4123494" y="2394763"/>
+            <a:ext cx="1" cy="1875692"/>
+          </a:xfrm>
+          <a:prstGeom prst="straightConnector1">
+            <a:avLst/>
+          </a:prstGeom>
+          <a:ln w="28575">
+            <a:tailEnd type="triangle"/>
+          </a:ln>
+        </p:spPr>
+        <p:style>
+          <a:lnRef idx="1">
+            <a:schemeClr val="dk1"/>
+          </a:lnRef>
+          <a:fillRef idx="0">
+            <a:schemeClr val="dk1"/>
+          </a:fillRef>
+          <a:effectRef idx="0">
+            <a:schemeClr val="dk1"/>
+          </a:effectRef>
+          <a:fontRef idx="minor">
+            <a:schemeClr val="tx1"/>
+          </a:fontRef>
+        </p:style>
+      </p:cxnSp>
+      <p:sp>
+        <p:nvSpPr>
+          <p:cNvPr id="11" name="ZoneTexte 10">
+            <a:extLst>
+              <a:ext uri="{FF2B5EF4-FFF2-40B4-BE49-F238E27FC236}">
+                <a16:creationId xmlns:a16="http://schemas.microsoft.com/office/drawing/2014/main" xmlns="" id="{479D2F68-32D5-4E80-B573-2C6156DCB22F}"/>
+              </a:ext>
+            </a:extLst>
+          </p:cNvPr>
+          <p:cNvSpPr txBox="1"/>
+          <p:nvPr/>
+        </p:nvSpPr>
+        <p:spPr>
+          <a:xfrm rot="16200000">
+            <a:off x="3051180" y="3150831"/>
+            <a:ext cx="1836850" cy="307777"/>
+          </a:xfrm>
+          <a:prstGeom prst="rect">
+            <a:avLst/>
+          </a:prstGeom>
+          <a:noFill/>
+        </p:spPr>
+        <p:txBody>
+          <a:bodyPr wrap="none" rtlCol="0">
+            <a:spAutoFit/>
+          </a:bodyPr>
+          <a:lstStyle/>
+          <a:p>
+            <a:r>
+              <a:rPr lang="fr-BE" sz="1400" dirty="0"/>
+              <a:t>s</a:t>
+            </a:r>
+            <a:r>
+              <a:rPr lang="fr-BE" sz="1400" dirty="0" smtClean="0"/>
+              <a:t>.CONNECTION_CLOSE</a:t>
+            </a:r>
+            <a:endParaRPr lang="en-GB" sz="1400" dirty="0"/>
+          </a:p>
+        </p:txBody>
+      </p:sp>
+      <p:cxnSp>
+        <p:nvCxnSpPr>
+          <p:cNvPr id="17" name="Connecteur droit avec flèche 16">
+            <a:extLst>
+              <a:ext uri="{FF2B5EF4-FFF2-40B4-BE49-F238E27FC236}">
+                <a16:creationId xmlns:a16="http://schemas.microsoft.com/office/drawing/2014/main" xmlns="" id="{6589CEFF-63AD-48E0-B8C2-2B9C42EE3BA1}"/>
+              </a:ext>
+            </a:extLst>
+          </p:cNvPr>
+          <p:cNvCxnSpPr>
+            <a:endCxn id="4" idx="6"/>
+          </p:cNvCxnSpPr>
+          <p:nvPr/>
+        </p:nvCxnSpPr>
+        <p:spPr>
+          <a:xfrm flipH="1">
+            <a:off x="8645030" y="1928770"/>
+            <a:ext cx="1489570" cy="1"/>
+          </a:xfrm>
+          <a:prstGeom prst="straightConnector1">
+            <a:avLst/>
+          </a:prstGeom>
+          <a:ln w="28575">
+            <a:tailEnd type="triangle"/>
+          </a:ln>
+        </p:spPr>
+        <p:style>
+          <a:lnRef idx="1">
+            <a:schemeClr val="dk1"/>
+          </a:lnRef>
+          <a:fillRef idx="0">
+            <a:schemeClr val="dk1"/>
+          </a:fillRef>
+          <a:effectRef idx="0">
+            <a:schemeClr val="dk1"/>
+          </a:effectRef>
+          <a:fontRef idx="minor">
+            <a:schemeClr val="tx1"/>
+          </a:fontRef>
+        </p:style>
+      </p:cxnSp>
+      <p:sp>
+        <p:nvSpPr>
+          <p:cNvPr id="18" name="ZoneTexte 17">
+            <a:extLst>
+              <a:ext uri="{FF2B5EF4-FFF2-40B4-BE49-F238E27FC236}">
+                <a16:creationId xmlns:a16="http://schemas.microsoft.com/office/drawing/2014/main" xmlns="" id="{479D2F68-32D5-4E80-B573-2C6156DCB22F}"/>
+              </a:ext>
+            </a:extLst>
+          </p:cNvPr>
+          <p:cNvSpPr txBox="1"/>
+          <p:nvPr/>
+        </p:nvSpPr>
+        <p:spPr>
+          <a:xfrm>
+            <a:off x="10134600" y="1744104"/>
+            <a:ext cx="1069332" cy="369332"/>
+          </a:xfrm>
+          <a:prstGeom prst="rect">
+            <a:avLst/>
+          </a:prstGeom>
+          <a:noFill/>
+        </p:spPr>
+        <p:txBody>
+          <a:bodyPr wrap="none" rtlCol="0">
+            <a:spAutoFit/>
+          </a:bodyPr>
+          <a:lstStyle/>
+          <a:p>
+            <a:r>
+              <a:rPr lang="fr-BE" dirty="0" smtClean="0"/>
+              <a:t>Sig</a:t>
+            </a:r>
+            <a:r>
+              <a:rPr lang="fr-BE" dirty="0" smtClean="0"/>
+              <a:t>nal rcv</a:t>
+            </a:r>
+            <a:endParaRPr lang="en-GB" dirty="0"/>
+          </a:p>
+        </p:txBody>
+      </p:sp>
+      <p:cxnSp>
+        <p:nvCxnSpPr>
+          <p:cNvPr id="23" name="Connecteur droit avec flèche 22">
+            <a:extLst>
+              <a:ext uri="{FF2B5EF4-FFF2-40B4-BE49-F238E27FC236}">
+                <a16:creationId xmlns:a16="http://schemas.microsoft.com/office/drawing/2014/main" xmlns="" id="{6589CEFF-63AD-48E0-B8C2-2B9C42EE3BA1}"/>
+              </a:ext>
+            </a:extLst>
+          </p:cNvPr>
+          <p:cNvCxnSpPr>
+            <a:stCxn id="3" idx="6"/>
+            <a:endCxn id="4" idx="2"/>
+          </p:cNvCxnSpPr>
+          <p:nvPr/>
+        </p:nvCxnSpPr>
+        <p:spPr>
+          <a:xfrm>
+            <a:off x="4870841" y="1928771"/>
+            <a:ext cx="2279496" cy="0"/>
+          </a:xfrm>
+          <a:prstGeom prst="straightConnector1">
+            <a:avLst/>
+          </a:prstGeom>
+          <a:ln w="28575">
+            <a:tailEnd type="triangle"/>
+          </a:ln>
+        </p:spPr>
+        <p:style>
+          <a:lnRef idx="1">
+            <a:schemeClr val="dk1"/>
+          </a:lnRef>
+          <a:fillRef idx="0">
+            <a:schemeClr val="dk1"/>
+          </a:fillRef>
+          <a:effectRef idx="0">
+            <a:schemeClr val="dk1"/>
+          </a:effectRef>
+          <a:fontRef idx="minor">
+            <a:schemeClr val="tx1"/>
+          </a:fontRef>
+        </p:style>
+      </p:cxnSp>
+      <p:sp>
+        <p:nvSpPr>
+          <p:cNvPr id="28" name="ZoneTexte 27">
+            <a:extLst>
+              <a:ext uri="{FF2B5EF4-FFF2-40B4-BE49-F238E27FC236}">
+                <a16:creationId xmlns:a16="http://schemas.microsoft.com/office/drawing/2014/main" xmlns="" id="{479D2F68-32D5-4E80-B573-2C6156DCB22F}"/>
+              </a:ext>
+            </a:extLst>
+          </p:cNvPr>
+          <p:cNvSpPr txBox="1"/>
+          <p:nvPr/>
+        </p:nvSpPr>
+        <p:spPr>
+          <a:xfrm>
+            <a:off x="5050711" y="1387997"/>
+            <a:ext cx="1865254" cy="523220"/>
+          </a:xfrm>
+          <a:prstGeom prst="rect">
+            <a:avLst/>
+          </a:prstGeom>
+          <a:noFill/>
+        </p:spPr>
+        <p:txBody>
+          <a:bodyPr wrap="none" rtlCol="0">
+            <a:spAutoFit/>
+          </a:bodyPr>
+          <a:lstStyle/>
+          <a:p>
+            <a:r>
+              <a:rPr lang="fr-BE" sz="1400" dirty="0"/>
+              <a:t>[</a:t>
+            </a:r>
+            <a:r>
+              <a:rPr lang="fr-BE" sz="1400" dirty="0" smtClean="0"/>
+              <a:t>r.CONNECTION_CLOSE</a:t>
+            </a:r>
+          </a:p>
+          <a:p>
+            <a:r>
+              <a:rPr lang="fr-BE" sz="1400" dirty="0" smtClean="0"/>
+              <a:t>|| r.stateless_RESET</a:t>
+            </a:r>
+            <a:r>
+              <a:rPr lang="fr-BE" sz="1400" dirty="0" smtClean="0"/>
+              <a:t>]</a:t>
+            </a:r>
+            <a:endParaRPr lang="en-GB" sz="1400" dirty="0"/>
+          </a:p>
+        </p:txBody>
+      </p:sp>
+      <p:sp>
+        <p:nvSpPr>
+          <p:cNvPr id="29" name="Ellipse 28">
+            <a:extLst>
+              <a:ext uri="{FF2B5EF4-FFF2-40B4-BE49-F238E27FC236}">
+                <a16:creationId xmlns:a16="http://schemas.microsoft.com/office/drawing/2014/main" xmlns="" id="{D18BD9DA-F640-40D8-890E-826C2DD83CAC}"/>
+              </a:ext>
+            </a:extLst>
+          </p:cNvPr>
+          <p:cNvSpPr/>
+          <p:nvPr/>
+        </p:nvSpPr>
+        <p:spPr>
+          <a:xfrm>
+            <a:off x="7150336" y="3226262"/>
+            <a:ext cx="1494693" cy="931985"/>
+          </a:xfrm>
+          <a:prstGeom prst="ellipse">
+            <a:avLst/>
+          </a:prstGeom>
+          <a:solidFill>
+            <a:schemeClr val="accent6">
+              <a:lumMod val="75000"/>
+            </a:schemeClr>
+          </a:solidFill>
+        </p:spPr>
+        <p:style>
+          <a:lnRef idx="2">
+            <a:schemeClr val="accent1">
+              <a:shade val="50000"/>
+            </a:schemeClr>
+          </a:lnRef>
+          <a:fillRef idx="1">
+            <a:schemeClr val="accent1"/>
+          </a:fillRef>
+          <a:effectRef idx="0">
+            <a:schemeClr val="accent1"/>
+          </a:effectRef>
+          <a:fontRef idx="minor">
+            <a:schemeClr val="lt1"/>
+          </a:fontRef>
+        </p:style>
+        <p:txBody>
+          <a:bodyPr rtlCol="0" anchor="ctr"/>
+          <a:lstStyle/>
+          <a:p>
+            <a:pPr algn="ctr"/>
+            <a:r>
+              <a:rPr lang="fr-BE" sz="1400" b="1" dirty="0" smtClean="0"/>
+              <a:t>Connection close</a:t>
+            </a:r>
+            <a:endParaRPr lang="en-GB" sz="1400" b="1" dirty="0"/>
+          </a:p>
+        </p:txBody>
+      </p:sp>
+      <p:sp>
+        <p:nvSpPr>
+          <p:cNvPr id="30" name="Ellipse 29">
+            <a:extLst>
+              <a:ext uri="{FF2B5EF4-FFF2-40B4-BE49-F238E27FC236}">
+                <a16:creationId xmlns:a16="http://schemas.microsoft.com/office/drawing/2014/main" xmlns="" id="{D18BD9DA-F640-40D8-890E-826C2DD83CAC}"/>
+              </a:ext>
+            </a:extLst>
+          </p:cNvPr>
+          <p:cNvSpPr/>
+          <p:nvPr/>
+        </p:nvSpPr>
+        <p:spPr>
+          <a:xfrm>
+            <a:off x="7150335" y="4270454"/>
+            <a:ext cx="1494693" cy="931985"/>
+          </a:xfrm>
+          <a:prstGeom prst="ellipse">
+            <a:avLst/>
+          </a:prstGeom>
+          <a:solidFill>
+            <a:schemeClr val="accent6">
+              <a:lumMod val="75000"/>
+            </a:schemeClr>
+          </a:solidFill>
+        </p:spPr>
+        <p:style>
+          <a:lnRef idx="2">
+            <a:schemeClr val="accent1">
+              <a:shade val="50000"/>
+            </a:schemeClr>
+          </a:lnRef>
+          <a:fillRef idx="1">
+            <a:schemeClr val="accent1"/>
+          </a:fillRef>
+          <a:effectRef idx="0">
+            <a:schemeClr val="accent1"/>
+          </a:effectRef>
+          <a:fontRef idx="minor">
+            <a:schemeClr val="lt1"/>
+          </a:fontRef>
+        </p:style>
+        <p:txBody>
+          <a:bodyPr rtlCol="0" anchor="ctr"/>
+          <a:lstStyle/>
+          <a:p>
+            <a:pPr algn="ctr"/>
+            <a:r>
+              <a:rPr lang="fr-BE" sz="1400" b="1" dirty="0" smtClean="0"/>
+              <a:t>Connection close (faster)</a:t>
+            </a:r>
+            <a:endParaRPr lang="en-GB" sz="1400" b="1" dirty="0"/>
+          </a:p>
+        </p:txBody>
+      </p:sp>
+      <p:cxnSp>
+        <p:nvCxnSpPr>
+          <p:cNvPr id="31" name="Connecteur droit avec flèche 30">
+            <a:extLst>
+              <a:ext uri="{FF2B5EF4-FFF2-40B4-BE49-F238E27FC236}">
+                <a16:creationId xmlns:a16="http://schemas.microsoft.com/office/drawing/2014/main" xmlns="" id="{6589CEFF-63AD-48E0-B8C2-2B9C42EE3BA1}"/>
+              </a:ext>
+            </a:extLst>
+          </p:cNvPr>
+          <p:cNvCxnSpPr>
+            <a:stCxn id="3" idx="5"/>
+            <a:endCxn id="29" idx="1"/>
+          </p:cNvCxnSpPr>
+          <p:nvPr/>
+        </p:nvCxnSpPr>
+        <p:spPr>
+          <a:xfrm>
+            <a:off x="4651948" y="2258277"/>
+            <a:ext cx="2717281" cy="1104471"/>
+          </a:xfrm>
+          <a:prstGeom prst="straightConnector1">
+            <a:avLst/>
+          </a:prstGeom>
+          <a:ln w="28575">
+            <a:tailEnd type="triangle"/>
+          </a:ln>
+        </p:spPr>
+        <p:style>
+          <a:lnRef idx="1">
+            <a:schemeClr val="dk1"/>
+          </a:lnRef>
+          <a:fillRef idx="0">
+            <a:schemeClr val="dk1"/>
+          </a:fillRef>
+          <a:effectRef idx="0">
+            <a:schemeClr val="dk1"/>
+          </a:effectRef>
+          <a:fontRef idx="minor">
+            <a:schemeClr val="tx1"/>
+          </a:fontRef>
+        </p:style>
+      </p:cxnSp>
+      <p:cxnSp>
+        <p:nvCxnSpPr>
+          <p:cNvPr id="35" name="Connecteur droit avec flèche 34">
+            <a:extLst>
+              <a:ext uri="{FF2B5EF4-FFF2-40B4-BE49-F238E27FC236}">
+                <a16:creationId xmlns:a16="http://schemas.microsoft.com/office/drawing/2014/main" xmlns="" id="{6589CEFF-63AD-48E0-B8C2-2B9C42EE3BA1}"/>
+              </a:ext>
+            </a:extLst>
+          </p:cNvPr>
+          <p:cNvCxnSpPr>
+            <a:stCxn id="4" idx="4"/>
+            <a:endCxn id="29" idx="0"/>
+          </p:cNvCxnSpPr>
+          <p:nvPr/>
+        </p:nvCxnSpPr>
+        <p:spPr>
+          <a:xfrm flipH="1">
+            <a:off x="7897683" y="2394763"/>
+            <a:ext cx="1" cy="831499"/>
+          </a:xfrm>
+          <a:prstGeom prst="straightConnector1">
+            <a:avLst/>
+          </a:prstGeom>
+          <a:ln w="28575">
+            <a:tailEnd type="triangle"/>
+          </a:ln>
+        </p:spPr>
+        <p:style>
+          <a:lnRef idx="1">
+            <a:schemeClr val="dk1"/>
+          </a:lnRef>
+          <a:fillRef idx="0">
+            <a:schemeClr val="dk1"/>
+          </a:fillRef>
+          <a:effectRef idx="0">
+            <a:schemeClr val="dk1"/>
+          </a:effectRef>
+          <a:fontRef idx="minor">
+            <a:schemeClr val="tx1"/>
+          </a:fontRef>
+        </p:style>
+      </p:cxnSp>
+      <p:sp>
+        <p:nvSpPr>
+          <p:cNvPr id="38" name="ZoneTexte 37">
+            <a:extLst>
+              <a:ext uri="{FF2B5EF4-FFF2-40B4-BE49-F238E27FC236}">
+                <a16:creationId xmlns:a16="http://schemas.microsoft.com/office/drawing/2014/main" xmlns="" id="{479D2F68-32D5-4E80-B573-2C6156DCB22F}"/>
+              </a:ext>
+            </a:extLst>
+          </p:cNvPr>
+          <p:cNvSpPr txBox="1"/>
+          <p:nvPr/>
+        </p:nvSpPr>
+        <p:spPr>
+          <a:xfrm>
+            <a:off x="6475945" y="2557313"/>
+            <a:ext cx="1421736" cy="523220"/>
+          </a:xfrm>
+          <a:prstGeom prst="rect">
+            <a:avLst/>
+          </a:prstGeom>
+          <a:noFill/>
+        </p:spPr>
+        <p:txBody>
+          <a:bodyPr wrap="none" rtlCol="0">
+            <a:spAutoFit/>
+          </a:bodyPr>
+          <a:lstStyle/>
+          <a:p>
+            <a:pPr algn="ctr"/>
+            <a:r>
+              <a:rPr lang="fr-BE" sz="1400" dirty="0" smtClean="0"/>
+              <a:t>Closing/draining </a:t>
+            </a:r>
+          </a:p>
+          <a:p>
+            <a:pPr algn="ctr"/>
+            <a:r>
+              <a:rPr lang="fr-BE" sz="1400" dirty="0" smtClean="0"/>
+              <a:t>period finish</a:t>
+            </a:r>
+            <a:endParaRPr lang="en-GB" sz="1400" dirty="0"/>
+          </a:p>
+        </p:txBody>
+      </p:sp>
+      <p:cxnSp>
+        <p:nvCxnSpPr>
+          <p:cNvPr id="39" name="Connecteur droit avec flèche 38">
+            <a:extLst>
+              <a:ext uri="{FF2B5EF4-FFF2-40B4-BE49-F238E27FC236}">
+                <a16:creationId xmlns:a16="http://schemas.microsoft.com/office/drawing/2014/main" xmlns="" id="{6589CEFF-63AD-48E0-B8C2-2B9C42EE3BA1}"/>
+              </a:ext>
+            </a:extLst>
+          </p:cNvPr>
+          <p:cNvCxnSpPr>
+            <a:stCxn id="3" idx="5"/>
+            <a:endCxn id="30" idx="2"/>
+          </p:cNvCxnSpPr>
+          <p:nvPr/>
+        </p:nvCxnSpPr>
+        <p:spPr>
+          <a:xfrm>
+            <a:off x="4651948" y="2258277"/>
+            <a:ext cx="2498387" cy="2478170"/>
+          </a:xfrm>
+          <a:prstGeom prst="straightConnector1">
+            <a:avLst/>
+          </a:prstGeom>
+          <a:ln w="28575">
+            <a:tailEnd type="triangle"/>
+          </a:ln>
+        </p:spPr>
+        <p:style>
+          <a:lnRef idx="1">
+            <a:schemeClr val="dk1"/>
+          </a:lnRef>
+          <a:fillRef idx="0">
+            <a:schemeClr val="dk1"/>
+          </a:fillRef>
+          <a:effectRef idx="0">
+            <a:schemeClr val="dk1"/>
+          </a:effectRef>
+          <a:fontRef idx="minor">
+            <a:schemeClr val="tx1"/>
+          </a:fontRef>
+        </p:style>
+      </p:cxnSp>
+      <p:cxnSp>
+        <p:nvCxnSpPr>
+          <p:cNvPr id="42" name="Connecteur droit avec flèche 41">
+            <a:extLst>
+              <a:ext uri="{FF2B5EF4-FFF2-40B4-BE49-F238E27FC236}">
+                <a16:creationId xmlns:a16="http://schemas.microsoft.com/office/drawing/2014/main" xmlns="" id="{6589CEFF-63AD-48E0-B8C2-2B9C42EE3BA1}"/>
+              </a:ext>
+            </a:extLst>
+          </p:cNvPr>
+          <p:cNvCxnSpPr>
+            <a:stCxn id="4" idx="5"/>
+            <a:endCxn id="30" idx="7"/>
+          </p:cNvCxnSpPr>
+          <p:nvPr/>
+        </p:nvCxnSpPr>
+        <p:spPr>
+          <a:xfrm flipH="1">
+            <a:off x="8426135" y="2258277"/>
+            <a:ext cx="2" cy="2148663"/>
+          </a:xfrm>
+          <a:prstGeom prst="straightConnector1">
+            <a:avLst/>
+          </a:prstGeom>
+          <a:ln w="28575">
+            <a:tailEnd type="triangle"/>
+          </a:ln>
+        </p:spPr>
+        <p:style>
+          <a:lnRef idx="1">
+            <a:schemeClr val="dk1"/>
+          </a:lnRef>
+          <a:fillRef idx="0">
+            <a:schemeClr val="dk1"/>
+          </a:fillRef>
+          <a:effectRef idx="0">
+            <a:schemeClr val="dk1"/>
+          </a:effectRef>
+          <a:fontRef idx="minor">
+            <a:schemeClr val="tx1"/>
+          </a:fontRef>
+        </p:style>
+      </p:cxnSp>
+      <p:sp>
+        <p:nvSpPr>
+          <p:cNvPr id="45" name="ZoneTexte 44">
+            <a:extLst>
+              <a:ext uri="{FF2B5EF4-FFF2-40B4-BE49-F238E27FC236}">
+                <a16:creationId xmlns:a16="http://schemas.microsoft.com/office/drawing/2014/main" xmlns="" id="{479D2F68-32D5-4E80-B573-2C6156DCB22F}"/>
+              </a:ext>
+            </a:extLst>
+          </p:cNvPr>
+          <p:cNvSpPr txBox="1"/>
+          <p:nvPr/>
+        </p:nvSpPr>
+        <p:spPr>
+          <a:xfrm rot="2673654">
+            <a:off x="4365111" y="3539818"/>
+            <a:ext cx="2945871" cy="523220"/>
+          </a:xfrm>
+          <a:prstGeom prst="rect">
+            <a:avLst/>
+          </a:prstGeom>
+          <a:noFill/>
+        </p:spPr>
+        <p:txBody>
+          <a:bodyPr wrap="none" rtlCol="0">
+            <a:spAutoFit/>
+          </a:bodyPr>
+          <a:lstStyle/>
+          <a:p>
+            <a:pPr algn="ctr"/>
+            <a:r>
+              <a:rPr lang="fr-BE" sz="1400" dirty="0" smtClean="0"/>
+              <a:t>If no new socket open</a:t>
+            </a:r>
+          </a:p>
+          <a:p>
+            <a:pPr algn="ctr"/>
+            <a:r>
+              <a:rPr lang="fr-BE" sz="1400" dirty="0" smtClean="0"/>
+              <a:t>(no new response allow -&gt; close asap)</a:t>
+            </a:r>
+            <a:endParaRPr lang="en-GB" sz="1400" dirty="0"/>
+          </a:p>
+        </p:txBody>
+      </p:sp>
+      <p:sp>
+        <p:nvSpPr>
+          <p:cNvPr id="54" name="Bulle narrative : rectangle à coins arrondis 2">
+            <a:extLst>
+              <a:ext uri="{FF2B5EF4-FFF2-40B4-BE49-F238E27FC236}">
+                <a16:creationId xmlns:a16="http://schemas.microsoft.com/office/drawing/2014/main" xmlns="" id="{988D0EB4-947A-46B9-A29D-46DAE79C5B8E}"/>
+              </a:ext>
+            </a:extLst>
+          </p:cNvPr>
+          <p:cNvSpPr/>
+          <p:nvPr/>
+        </p:nvSpPr>
+        <p:spPr>
+          <a:xfrm>
+            <a:off x="3689418" y="1018665"/>
+            <a:ext cx="1361293" cy="369332"/>
+          </a:xfrm>
+          <a:prstGeom prst="wedgeRoundRectCallout">
+            <a:avLst/>
+          </a:prstGeom>
+          <a:ln>
+            <a:solidFill>
+              <a:schemeClr val="tx1"/>
+            </a:solidFill>
+          </a:ln>
+        </p:spPr>
+        <p:style>
+          <a:lnRef idx="2">
+            <a:schemeClr val="accent6"/>
+          </a:lnRef>
+          <a:fillRef idx="1">
+            <a:schemeClr val="lt1"/>
+          </a:fillRef>
+          <a:effectRef idx="0">
+            <a:schemeClr val="accent6"/>
+          </a:effectRef>
+          <a:fontRef idx="minor">
+            <a:schemeClr val="dk1"/>
+          </a:fontRef>
+        </p:style>
+        <p:txBody>
+          <a:bodyPr rtlCol="0" anchor="ctr"/>
+          <a:lstStyle/>
+          <a:p>
+            <a:pPr algn="ctr"/>
+            <a:r>
+              <a:rPr lang="fr-FR" sz="1200" dirty="0" smtClean="0"/>
+              <a:t>All stream closed</a:t>
+            </a:r>
+            <a:endParaRPr lang="en-GB" sz="1200" dirty="0"/>
+          </a:p>
+        </p:txBody>
+      </p:sp>
+    </p:spTree>
+    <p:extLst>
+      <p:ext uri="{BB962C8B-B14F-4D97-AF65-F5344CB8AC3E}">
+        <p14:creationId xmlns:p14="http://schemas.microsoft.com/office/powerpoint/2010/main" val="4106682431"/>
+      </p:ext>
+    </p:extLst>
+  </p:cSld>
+  <p:clrMapOvr>
+    <a:masterClrMapping/>
+  </p:clrMapOvr>
+</p:sld>
+</file>
+
+<file path=ppt/slides/slide7.xml><?xml version="1.0" encoding="utf-8"?>
+<p:sld xmlns:a="http://schemas.openxmlformats.org/drawingml/2006/main" xmlns:r="http://schemas.openxmlformats.org/officeDocument/2006/relationships" xmlns:p="http://schemas.openxmlformats.org/presentationml/2006/main">
+  <p:cSld>
+    <p:spTree>
+      <p:nvGrpSpPr>
+        <p:cNvPr id="1" name=""/>
+        <p:cNvGrpSpPr/>
+        <p:nvPr/>
+      </p:nvGrpSpPr>
+      <p:grpSpPr>
+        <a:xfrm>
+          <a:off x="0" y="0"/>
+          <a:ext cx="0" cy="0"/>
+          <a:chOff x="0" y="0"/>
+          <a:chExt cx="0" cy="0"/>
+        </a:xfrm>
+      </p:grpSpPr>
+      <p:sp>
+        <p:nvSpPr>
+          <p:cNvPr id="5" name="ZoneTexte 4">
+            <a:extLst>
+              <a:ext uri="{FF2B5EF4-FFF2-40B4-BE49-F238E27FC236}">
+                <a16:creationId xmlns:a16="http://schemas.microsoft.com/office/drawing/2014/main" xmlns="" id="{25D0CFDD-F8D9-4498-A666-F31BA473AEDD}"/>
+              </a:ext>
+            </a:extLst>
+          </p:cNvPr>
+          <p:cNvSpPr txBox="1"/>
+          <p:nvPr/>
+        </p:nvSpPr>
+        <p:spPr>
+          <a:xfrm>
+            <a:off x="10112926" y="-47791"/>
+            <a:ext cx="2079074" cy="523220"/>
+          </a:xfrm>
+          <a:prstGeom prst="rect">
+            <a:avLst/>
+          </a:prstGeom>
+          <a:noFill/>
+        </p:spPr>
+        <p:txBody>
+          <a:bodyPr wrap="square">
+            <a:spAutoFit/>
+          </a:bodyPr>
+          <a:lstStyle/>
+          <a:p>
+            <a:r>
+              <a:rPr lang="en-GB" sz="2800" b="1" dirty="0"/>
+              <a:t>I</a:t>
+            </a:r>
+            <a:r>
+              <a:rPr lang="en-GB" sz="2800" b="1" dirty="0" smtClean="0"/>
+              <a:t>dle timeout</a:t>
+            </a:r>
+            <a:endParaRPr lang="en-GB" sz="2800" b="1" dirty="0"/>
+          </a:p>
+        </p:txBody>
+      </p:sp>
+      <p:sp>
+        <p:nvSpPr>
+          <p:cNvPr id="9" name="Ellipse 8">
+            <a:extLst>
+              <a:ext uri="{FF2B5EF4-FFF2-40B4-BE49-F238E27FC236}">
+                <a16:creationId xmlns:a16="http://schemas.microsoft.com/office/drawing/2014/main" xmlns="" id="{1EA6948B-714F-43F0-9744-118D43364489}"/>
+              </a:ext>
+            </a:extLst>
+          </p:cNvPr>
+          <p:cNvSpPr/>
+          <p:nvPr/>
+        </p:nvSpPr>
+        <p:spPr>
+          <a:xfrm>
+            <a:off x="5066206" y="1059639"/>
+            <a:ext cx="1632113" cy="728460"/>
+          </a:xfrm>
+          <a:prstGeom prst="ellipse">
+            <a:avLst/>
+          </a:prstGeom>
+        </p:spPr>
+        <p:style>
+          <a:lnRef idx="2">
+            <a:schemeClr val="accent5">
+              <a:shade val="50000"/>
+            </a:schemeClr>
+          </a:lnRef>
+          <a:fillRef idx="1">
+            <a:schemeClr val="accent5"/>
+          </a:fillRef>
+          <a:effectRef idx="0">
+            <a:schemeClr val="accent5"/>
+          </a:effectRef>
+          <a:fontRef idx="minor">
+            <a:schemeClr val="lt1"/>
+          </a:fontRef>
+        </p:style>
+        <p:txBody>
+          <a:bodyPr rtlCol="0" anchor="ctr"/>
+          <a:lstStyle/>
+          <a:p>
+            <a:pPr algn="ctr"/>
+            <a:r>
+              <a:rPr lang="fr-BE" sz="1600" b="1" dirty="0"/>
+              <a:t>idle </a:t>
+            </a:r>
+            <a:endParaRPr lang="en-GB" sz="1600" b="1" dirty="0"/>
+          </a:p>
+        </p:txBody>
+      </p:sp>
+      <p:cxnSp>
+        <p:nvCxnSpPr>
+          <p:cNvPr id="10" name="Connecteur droit avec flèche 9">
+            <a:extLst>
+              <a:ext uri="{FF2B5EF4-FFF2-40B4-BE49-F238E27FC236}">
+                <a16:creationId xmlns:a16="http://schemas.microsoft.com/office/drawing/2014/main" xmlns="" id="{6589CEFF-63AD-48E0-B8C2-2B9C42EE3BA1}"/>
+              </a:ext>
+            </a:extLst>
+          </p:cNvPr>
+          <p:cNvCxnSpPr/>
+          <p:nvPr/>
+        </p:nvCxnSpPr>
+        <p:spPr>
+          <a:xfrm>
+            <a:off x="4294895" y="1417141"/>
+            <a:ext cx="747347" cy="1"/>
+          </a:xfrm>
+          <a:prstGeom prst="straightConnector1">
+            <a:avLst/>
+          </a:prstGeom>
+          <a:ln w="28575">
+            <a:tailEnd type="triangle"/>
+          </a:ln>
+        </p:spPr>
+        <p:style>
+          <a:lnRef idx="1">
+            <a:schemeClr val="dk1"/>
+          </a:lnRef>
+          <a:fillRef idx="0">
+            <a:schemeClr val="dk1"/>
+          </a:fillRef>
+          <a:effectRef idx="0">
+            <a:schemeClr val="dk1"/>
+          </a:effectRef>
+          <a:fontRef idx="minor">
+            <a:schemeClr val="tx1"/>
+          </a:fontRef>
+        </p:style>
+      </p:cxnSp>
+      <p:sp>
+        <p:nvSpPr>
+          <p:cNvPr id="11" name="ZoneTexte 10">
+            <a:extLst>
+              <a:ext uri="{FF2B5EF4-FFF2-40B4-BE49-F238E27FC236}">
+                <a16:creationId xmlns:a16="http://schemas.microsoft.com/office/drawing/2014/main" xmlns="" id="{479D2F68-32D5-4E80-B573-2C6156DCB22F}"/>
+              </a:ext>
+            </a:extLst>
+          </p:cNvPr>
+          <p:cNvSpPr txBox="1"/>
+          <p:nvPr/>
+        </p:nvSpPr>
+        <p:spPr>
+          <a:xfrm>
+            <a:off x="250071" y="962204"/>
+            <a:ext cx="4883132" cy="923330"/>
+          </a:xfrm>
+          <a:prstGeom prst="rect">
+            <a:avLst/>
+          </a:prstGeom>
+          <a:noFill/>
+        </p:spPr>
+        <p:txBody>
+          <a:bodyPr wrap="none" rtlCol="0">
+            <a:spAutoFit/>
+          </a:bodyPr>
+          <a:lstStyle/>
+          <a:p>
+            <a:pPr algn="ctr"/>
+            <a:r>
+              <a:rPr lang="fr-BE" dirty="0" smtClean="0"/>
+              <a:t>m</a:t>
+            </a:r>
+            <a:r>
+              <a:rPr lang="fr-BE" dirty="0" smtClean="0"/>
+              <a:t>ax_idle_timeout (=min(max_peer1,max_peer2))</a:t>
+            </a:r>
+          </a:p>
+          <a:p>
+            <a:pPr algn="ctr"/>
+            <a:r>
+              <a:rPr lang="fr-BE" dirty="0" smtClean="0"/>
+              <a:t>specified and exceed </a:t>
+            </a:r>
+            <a:r>
+              <a:rPr lang="fr-BE" b="1" dirty="0" smtClean="0"/>
+              <a:t>both</a:t>
+            </a:r>
+            <a:r>
+              <a:rPr lang="fr-BE" dirty="0" smtClean="0"/>
+              <a:t> peers</a:t>
+            </a:r>
+          </a:p>
+          <a:p>
+            <a:pPr algn="ctr"/>
+            <a:r>
+              <a:rPr lang="fr-BE" dirty="0" smtClean="0"/>
+              <a:t>+ &gt; 3 * ProbeTimeOut</a:t>
+            </a:r>
+            <a:endParaRPr lang="en-GB" dirty="0"/>
+          </a:p>
+        </p:txBody>
+      </p:sp>
+      <p:cxnSp>
+        <p:nvCxnSpPr>
+          <p:cNvPr id="12" name="Connecteur droit avec flèche 11">
+            <a:extLst>
+              <a:ext uri="{FF2B5EF4-FFF2-40B4-BE49-F238E27FC236}">
+                <a16:creationId xmlns:a16="http://schemas.microsoft.com/office/drawing/2014/main" xmlns="" id="{6589CEFF-63AD-48E0-B8C2-2B9C42EE3BA1}"/>
+              </a:ext>
+            </a:extLst>
+          </p:cNvPr>
+          <p:cNvCxnSpPr>
+            <a:stCxn id="9" idx="4"/>
+          </p:cNvCxnSpPr>
+          <p:nvPr/>
+        </p:nvCxnSpPr>
+        <p:spPr>
+          <a:xfrm flipH="1">
+            <a:off x="4518067" y="1788099"/>
+            <a:ext cx="1364196" cy="672906"/>
+          </a:xfrm>
+          <a:prstGeom prst="straightConnector1">
+            <a:avLst/>
+          </a:prstGeom>
+          <a:ln w="28575">
+            <a:tailEnd type="triangle"/>
+          </a:ln>
+        </p:spPr>
+        <p:style>
+          <a:lnRef idx="1">
+            <a:schemeClr val="dk1"/>
+          </a:lnRef>
+          <a:fillRef idx="0">
+            <a:schemeClr val="dk1"/>
+          </a:fillRef>
+          <a:effectRef idx="0">
+            <a:schemeClr val="dk1"/>
+          </a:effectRef>
+          <a:fontRef idx="minor">
+            <a:schemeClr val="tx1"/>
+          </a:fontRef>
+        </p:style>
+      </p:cxnSp>
+      <p:cxnSp>
+        <p:nvCxnSpPr>
+          <p:cNvPr id="15" name="Connecteur droit avec flèche 14">
+            <a:extLst>
+              <a:ext uri="{FF2B5EF4-FFF2-40B4-BE49-F238E27FC236}">
+                <a16:creationId xmlns:a16="http://schemas.microsoft.com/office/drawing/2014/main" xmlns="" id="{6589CEFF-63AD-48E0-B8C2-2B9C42EE3BA1}"/>
+              </a:ext>
+            </a:extLst>
+          </p:cNvPr>
+          <p:cNvCxnSpPr>
+            <a:stCxn id="9" idx="4"/>
+          </p:cNvCxnSpPr>
+          <p:nvPr/>
+        </p:nvCxnSpPr>
+        <p:spPr>
+          <a:xfrm>
+            <a:off x="5882263" y="1788099"/>
+            <a:ext cx="1732295" cy="676673"/>
+          </a:xfrm>
+          <a:prstGeom prst="straightConnector1">
+            <a:avLst/>
+          </a:prstGeom>
+          <a:ln w="28575">
+            <a:tailEnd type="triangle"/>
+          </a:ln>
+        </p:spPr>
+        <p:style>
+          <a:lnRef idx="1">
+            <a:schemeClr val="dk1"/>
+          </a:lnRef>
+          <a:fillRef idx="0">
+            <a:schemeClr val="dk1"/>
+          </a:fillRef>
+          <a:effectRef idx="0">
+            <a:schemeClr val="dk1"/>
+          </a:effectRef>
+          <a:fontRef idx="minor">
+            <a:schemeClr val="tx1"/>
+          </a:fontRef>
+        </p:style>
+      </p:cxnSp>
+      <p:sp>
+        <p:nvSpPr>
+          <p:cNvPr id="20" name="Ellipse 19">
+            <a:extLst>
+              <a:ext uri="{FF2B5EF4-FFF2-40B4-BE49-F238E27FC236}">
+                <a16:creationId xmlns:a16="http://schemas.microsoft.com/office/drawing/2014/main" xmlns="" id="{89FCD844-DF7E-40C9-9D11-022F7FE63189}"/>
+              </a:ext>
+            </a:extLst>
+          </p:cNvPr>
+          <p:cNvSpPr/>
+          <p:nvPr/>
+        </p:nvSpPr>
+        <p:spPr>
+          <a:xfrm>
+            <a:off x="3363686" y="2535786"/>
+            <a:ext cx="1494693" cy="931985"/>
+          </a:xfrm>
+          <a:prstGeom prst="ellipse">
+            <a:avLst/>
+          </a:prstGeom>
+        </p:spPr>
+        <p:style>
+          <a:lnRef idx="2">
+            <a:schemeClr val="accent2">
+              <a:shade val="50000"/>
+            </a:schemeClr>
+          </a:lnRef>
+          <a:fillRef idx="1">
+            <a:schemeClr val="accent2"/>
+          </a:fillRef>
+          <a:effectRef idx="0">
+            <a:schemeClr val="accent2"/>
+          </a:effectRef>
+          <a:fontRef idx="minor">
+            <a:schemeClr val="lt1"/>
+          </a:fontRef>
+        </p:style>
+        <p:txBody>
+          <a:bodyPr rtlCol="0" anchor="ctr"/>
+          <a:lstStyle/>
+          <a:p>
+            <a:pPr algn="ctr"/>
+            <a:r>
+              <a:rPr lang="fr-BE" sz="1400" b="1" dirty="0" smtClean="0"/>
+              <a:t>Closing connection</a:t>
+            </a:r>
+            <a:endParaRPr lang="en-GB" sz="1400" b="1" dirty="0"/>
+          </a:p>
+        </p:txBody>
+      </p:sp>
+      <p:sp>
+        <p:nvSpPr>
+          <p:cNvPr id="21" name="Ellipse 20">
+            <a:extLst>
+              <a:ext uri="{FF2B5EF4-FFF2-40B4-BE49-F238E27FC236}">
+                <a16:creationId xmlns:a16="http://schemas.microsoft.com/office/drawing/2014/main" xmlns="" id="{89FCD844-DF7E-40C9-9D11-022F7FE63189}"/>
+              </a:ext>
+            </a:extLst>
+          </p:cNvPr>
+          <p:cNvSpPr/>
+          <p:nvPr/>
+        </p:nvSpPr>
+        <p:spPr>
+          <a:xfrm>
+            <a:off x="7137875" y="2535786"/>
+            <a:ext cx="1494693" cy="931985"/>
+          </a:xfrm>
+          <a:prstGeom prst="ellipse">
+            <a:avLst/>
+          </a:prstGeom>
+        </p:spPr>
+        <p:style>
+          <a:lnRef idx="2">
+            <a:schemeClr val="accent2">
+              <a:shade val="50000"/>
+            </a:schemeClr>
+          </a:lnRef>
+          <a:fillRef idx="1">
+            <a:schemeClr val="accent2"/>
+          </a:fillRef>
+          <a:effectRef idx="0">
+            <a:schemeClr val="accent2"/>
+          </a:effectRef>
+          <a:fontRef idx="minor">
+            <a:schemeClr val="lt1"/>
+          </a:fontRef>
+        </p:style>
+        <p:txBody>
+          <a:bodyPr rtlCol="0" anchor="ctr"/>
+          <a:lstStyle/>
+          <a:p>
+            <a:pPr algn="ctr"/>
+            <a:r>
+              <a:rPr lang="fr-BE" sz="1400" b="1" dirty="0" smtClean="0"/>
+              <a:t>Draining connection</a:t>
+            </a:r>
+            <a:endParaRPr lang="en-GB" sz="1400" b="1" dirty="0"/>
+          </a:p>
+        </p:txBody>
+      </p:sp>
+      <p:sp>
+        <p:nvSpPr>
+          <p:cNvPr id="22" name="Ellipse 21">
+            <a:extLst>
+              <a:ext uri="{FF2B5EF4-FFF2-40B4-BE49-F238E27FC236}">
+                <a16:creationId xmlns:a16="http://schemas.microsoft.com/office/drawing/2014/main" xmlns="" id="{A05BD43F-3BA6-4D44-9A89-6240DC624C9A}"/>
+              </a:ext>
+            </a:extLst>
+          </p:cNvPr>
+          <p:cNvSpPr/>
+          <p:nvPr/>
+        </p:nvSpPr>
+        <p:spPr>
+          <a:xfrm>
+            <a:off x="3363685" y="5343463"/>
+            <a:ext cx="1494693" cy="931985"/>
+          </a:xfrm>
+          <a:prstGeom prst="ellipse">
+            <a:avLst/>
+          </a:prstGeom>
+          <a:solidFill>
+            <a:srgbClr val="C00000"/>
+          </a:solidFill>
+        </p:spPr>
+        <p:style>
+          <a:lnRef idx="2">
+            <a:schemeClr val="accent1">
+              <a:shade val="50000"/>
+            </a:schemeClr>
+          </a:lnRef>
+          <a:fillRef idx="1">
+            <a:schemeClr val="accent1"/>
+          </a:fillRef>
+          <a:effectRef idx="0">
+            <a:schemeClr val="accent1"/>
+          </a:effectRef>
+          <a:fontRef idx="minor">
+            <a:schemeClr val="lt1"/>
+          </a:fontRef>
+        </p:style>
+        <p:txBody>
+          <a:bodyPr rtlCol="0" anchor="ctr"/>
+          <a:lstStyle/>
+          <a:p>
+            <a:pPr algn="ctr"/>
+            <a:r>
+              <a:rPr lang="fr-BE" sz="1400" b="1" dirty="0" smtClean="0"/>
+              <a:t>Connection close sent</a:t>
+            </a:r>
+            <a:endParaRPr lang="en-GB" sz="1400" b="1" dirty="0"/>
+          </a:p>
+        </p:txBody>
+      </p:sp>
+      <p:cxnSp>
+        <p:nvCxnSpPr>
+          <p:cNvPr id="23" name="Connecteur droit avec flèche 22">
+            <a:extLst>
+              <a:ext uri="{FF2B5EF4-FFF2-40B4-BE49-F238E27FC236}">
+                <a16:creationId xmlns:a16="http://schemas.microsoft.com/office/drawing/2014/main" xmlns="" id="{6589CEFF-63AD-48E0-B8C2-2B9C42EE3BA1}"/>
+              </a:ext>
+            </a:extLst>
+          </p:cNvPr>
+          <p:cNvCxnSpPr>
+            <a:stCxn id="20" idx="4"/>
+            <a:endCxn id="22" idx="0"/>
+          </p:cNvCxnSpPr>
+          <p:nvPr/>
+        </p:nvCxnSpPr>
+        <p:spPr>
+          <a:xfrm flipH="1">
+            <a:off x="4111032" y="3467771"/>
+            <a:ext cx="1" cy="1875692"/>
+          </a:xfrm>
+          <a:prstGeom prst="straightConnector1">
+            <a:avLst/>
+          </a:prstGeom>
+          <a:ln w="28575">
+            <a:tailEnd type="triangle"/>
+          </a:ln>
+        </p:spPr>
+        <p:style>
+          <a:lnRef idx="1">
+            <a:schemeClr val="dk1"/>
+          </a:lnRef>
+          <a:fillRef idx="0">
+            <a:schemeClr val="dk1"/>
+          </a:fillRef>
+          <a:effectRef idx="0">
+            <a:schemeClr val="dk1"/>
+          </a:effectRef>
+          <a:fontRef idx="minor">
+            <a:schemeClr val="tx1"/>
+          </a:fontRef>
+        </p:style>
+      </p:cxnSp>
+      <p:sp>
+        <p:nvSpPr>
+          <p:cNvPr id="24" name="ZoneTexte 23">
+            <a:extLst>
+              <a:ext uri="{FF2B5EF4-FFF2-40B4-BE49-F238E27FC236}">
+                <a16:creationId xmlns:a16="http://schemas.microsoft.com/office/drawing/2014/main" xmlns="" id="{479D2F68-32D5-4E80-B573-2C6156DCB22F}"/>
+              </a:ext>
+            </a:extLst>
+          </p:cNvPr>
+          <p:cNvSpPr txBox="1"/>
+          <p:nvPr/>
+        </p:nvSpPr>
+        <p:spPr>
+          <a:xfrm rot="16200000">
+            <a:off x="3038718" y="4223839"/>
+            <a:ext cx="1836850" cy="307777"/>
+          </a:xfrm>
+          <a:prstGeom prst="rect">
+            <a:avLst/>
+          </a:prstGeom>
+          <a:noFill/>
+        </p:spPr>
+        <p:txBody>
+          <a:bodyPr wrap="none" rtlCol="0">
+            <a:spAutoFit/>
+          </a:bodyPr>
+          <a:lstStyle/>
+          <a:p>
+            <a:r>
+              <a:rPr lang="fr-BE" sz="1400" dirty="0"/>
+              <a:t>s</a:t>
+            </a:r>
+            <a:r>
+              <a:rPr lang="fr-BE" sz="1400" dirty="0" smtClean="0"/>
+              <a:t>.CONNECTION_CLOSE</a:t>
+            </a:r>
+            <a:endParaRPr lang="en-GB" sz="1400" dirty="0"/>
+          </a:p>
+        </p:txBody>
+      </p:sp>
+      <p:cxnSp>
+        <p:nvCxnSpPr>
+          <p:cNvPr id="25" name="Connecteur droit avec flèche 24">
+            <a:extLst>
+              <a:ext uri="{FF2B5EF4-FFF2-40B4-BE49-F238E27FC236}">
+                <a16:creationId xmlns:a16="http://schemas.microsoft.com/office/drawing/2014/main" xmlns="" id="{6589CEFF-63AD-48E0-B8C2-2B9C42EE3BA1}"/>
+              </a:ext>
+            </a:extLst>
+          </p:cNvPr>
+          <p:cNvCxnSpPr>
+            <a:endCxn id="21" idx="6"/>
+          </p:cNvCxnSpPr>
+          <p:nvPr/>
+        </p:nvCxnSpPr>
+        <p:spPr>
+          <a:xfrm flipH="1">
+            <a:off x="8632568" y="3001778"/>
+            <a:ext cx="1489570" cy="1"/>
+          </a:xfrm>
+          <a:prstGeom prst="straightConnector1">
+            <a:avLst/>
+          </a:prstGeom>
+          <a:ln w="28575">
+            <a:tailEnd type="triangle"/>
+          </a:ln>
+        </p:spPr>
+        <p:style>
+          <a:lnRef idx="1">
+            <a:schemeClr val="dk1"/>
+          </a:lnRef>
+          <a:fillRef idx="0">
+            <a:schemeClr val="dk1"/>
+          </a:fillRef>
+          <a:effectRef idx="0">
+            <a:schemeClr val="dk1"/>
+          </a:effectRef>
+          <a:fontRef idx="minor">
+            <a:schemeClr val="tx1"/>
+          </a:fontRef>
+        </p:style>
+      </p:cxnSp>
+      <p:sp>
+        <p:nvSpPr>
+          <p:cNvPr id="26" name="ZoneTexte 25">
+            <a:extLst>
+              <a:ext uri="{FF2B5EF4-FFF2-40B4-BE49-F238E27FC236}">
+                <a16:creationId xmlns:a16="http://schemas.microsoft.com/office/drawing/2014/main" xmlns="" id="{479D2F68-32D5-4E80-B573-2C6156DCB22F}"/>
+              </a:ext>
+            </a:extLst>
+          </p:cNvPr>
+          <p:cNvSpPr txBox="1"/>
+          <p:nvPr/>
+        </p:nvSpPr>
+        <p:spPr>
+          <a:xfrm>
+            <a:off x="10122138" y="2817112"/>
+            <a:ext cx="1069332" cy="369332"/>
+          </a:xfrm>
+          <a:prstGeom prst="rect">
+            <a:avLst/>
+          </a:prstGeom>
+          <a:noFill/>
+        </p:spPr>
+        <p:txBody>
+          <a:bodyPr wrap="none" rtlCol="0">
+            <a:spAutoFit/>
+          </a:bodyPr>
+          <a:lstStyle/>
+          <a:p>
+            <a:r>
+              <a:rPr lang="fr-BE" dirty="0" smtClean="0"/>
+              <a:t>Sig</a:t>
+            </a:r>
+            <a:r>
+              <a:rPr lang="fr-BE" dirty="0" smtClean="0"/>
+              <a:t>nal rcv</a:t>
+            </a:r>
+            <a:endParaRPr lang="en-GB" dirty="0"/>
+          </a:p>
+        </p:txBody>
+      </p:sp>
+      <p:cxnSp>
+        <p:nvCxnSpPr>
+          <p:cNvPr id="27" name="Connecteur droit avec flèche 26">
+            <a:extLst>
+              <a:ext uri="{FF2B5EF4-FFF2-40B4-BE49-F238E27FC236}">
+                <a16:creationId xmlns:a16="http://schemas.microsoft.com/office/drawing/2014/main" xmlns="" id="{6589CEFF-63AD-48E0-B8C2-2B9C42EE3BA1}"/>
+              </a:ext>
+            </a:extLst>
+          </p:cNvPr>
+          <p:cNvCxnSpPr>
+            <a:stCxn id="20" idx="6"/>
+            <a:endCxn id="21" idx="2"/>
+          </p:cNvCxnSpPr>
+          <p:nvPr/>
+        </p:nvCxnSpPr>
+        <p:spPr>
+          <a:xfrm>
+            <a:off x="4858379" y="3001779"/>
+            <a:ext cx="2279496" cy="0"/>
+          </a:xfrm>
+          <a:prstGeom prst="straightConnector1">
+            <a:avLst/>
+          </a:prstGeom>
+          <a:ln w="28575">
+            <a:tailEnd type="triangle"/>
+          </a:ln>
+        </p:spPr>
+        <p:style>
+          <a:lnRef idx="1">
+            <a:schemeClr val="dk1"/>
+          </a:lnRef>
+          <a:fillRef idx="0">
+            <a:schemeClr val="dk1"/>
+          </a:fillRef>
+          <a:effectRef idx="0">
+            <a:schemeClr val="dk1"/>
+          </a:effectRef>
+          <a:fontRef idx="minor">
+            <a:schemeClr val="tx1"/>
+          </a:fontRef>
+        </p:style>
+      </p:cxnSp>
+      <p:sp>
+        <p:nvSpPr>
+          <p:cNvPr id="28" name="ZoneTexte 27">
+            <a:extLst>
+              <a:ext uri="{FF2B5EF4-FFF2-40B4-BE49-F238E27FC236}">
+                <a16:creationId xmlns:a16="http://schemas.microsoft.com/office/drawing/2014/main" xmlns="" id="{479D2F68-32D5-4E80-B573-2C6156DCB22F}"/>
+              </a:ext>
+            </a:extLst>
+          </p:cNvPr>
+          <p:cNvSpPr txBox="1"/>
+          <p:nvPr/>
+        </p:nvSpPr>
+        <p:spPr>
+          <a:xfrm>
+            <a:off x="5038249" y="2461005"/>
+            <a:ext cx="1865254" cy="523220"/>
+          </a:xfrm>
+          <a:prstGeom prst="rect">
+            <a:avLst/>
+          </a:prstGeom>
+          <a:noFill/>
+        </p:spPr>
+        <p:txBody>
+          <a:bodyPr wrap="none" rtlCol="0">
+            <a:spAutoFit/>
+          </a:bodyPr>
+          <a:lstStyle/>
+          <a:p>
+            <a:r>
+              <a:rPr lang="fr-BE" sz="1400" dirty="0"/>
+              <a:t>[</a:t>
+            </a:r>
+            <a:r>
+              <a:rPr lang="fr-BE" sz="1400" dirty="0" smtClean="0"/>
+              <a:t>r.CONNECTION_CLOSE</a:t>
+            </a:r>
+          </a:p>
+          <a:p>
+            <a:r>
+              <a:rPr lang="fr-BE" sz="1400" dirty="0" smtClean="0"/>
+              <a:t>|| r.stateless_RESET</a:t>
+            </a:r>
+            <a:r>
+              <a:rPr lang="fr-BE" sz="1400" dirty="0" smtClean="0"/>
+              <a:t>]</a:t>
+            </a:r>
+            <a:endParaRPr lang="en-GB" sz="1400" dirty="0"/>
+          </a:p>
+        </p:txBody>
+      </p:sp>
+      <p:sp>
+        <p:nvSpPr>
+          <p:cNvPr id="29" name="Ellipse 28">
+            <a:extLst>
+              <a:ext uri="{FF2B5EF4-FFF2-40B4-BE49-F238E27FC236}">
+                <a16:creationId xmlns:a16="http://schemas.microsoft.com/office/drawing/2014/main" xmlns="" id="{D18BD9DA-F640-40D8-890E-826C2DD83CAC}"/>
+              </a:ext>
+            </a:extLst>
+          </p:cNvPr>
+          <p:cNvSpPr/>
+          <p:nvPr/>
+        </p:nvSpPr>
+        <p:spPr>
+          <a:xfrm>
+            <a:off x="7137874" y="4299270"/>
+            <a:ext cx="1494693" cy="931985"/>
+          </a:xfrm>
+          <a:prstGeom prst="ellipse">
+            <a:avLst/>
+          </a:prstGeom>
+          <a:solidFill>
+            <a:schemeClr val="accent6">
+              <a:lumMod val="75000"/>
+            </a:schemeClr>
+          </a:solidFill>
+        </p:spPr>
+        <p:style>
+          <a:lnRef idx="2">
+            <a:schemeClr val="accent1">
+              <a:shade val="50000"/>
+            </a:schemeClr>
+          </a:lnRef>
+          <a:fillRef idx="1">
+            <a:schemeClr val="accent1"/>
+          </a:fillRef>
+          <a:effectRef idx="0">
+            <a:schemeClr val="accent1"/>
+          </a:effectRef>
+          <a:fontRef idx="minor">
+            <a:schemeClr val="lt1"/>
+          </a:fontRef>
+        </p:style>
+        <p:txBody>
+          <a:bodyPr rtlCol="0" anchor="ctr"/>
+          <a:lstStyle/>
+          <a:p>
+            <a:pPr algn="ctr"/>
+            <a:r>
+              <a:rPr lang="fr-BE" sz="1400" b="1" dirty="0" smtClean="0"/>
+              <a:t>Connection close</a:t>
+            </a:r>
+            <a:endParaRPr lang="en-GB" sz="1400" b="1" dirty="0"/>
+          </a:p>
+        </p:txBody>
+      </p:sp>
+      <p:sp>
+        <p:nvSpPr>
+          <p:cNvPr id="30" name="Ellipse 29">
+            <a:extLst>
+              <a:ext uri="{FF2B5EF4-FFF2-40B4-BE49-F238E27FC236}">
+                <a16:creationId xmlns:a16="http://schemas.microsoft.com/office/drawing/2014/main" xmlns="" id="{D18BD9DA-F640-40D8-890E-826C2DD83CAC}"/>
+              </a:ext>
+            </a:extLst>
+          </p:cNvPr>
+          <p:cNvSpPr/>
+          <p:nvPr/>
+        </p:nvSpPr>
+        <p:spPr>
+          <a:xfrm>
+            <a:off x="7137873" y="5343462"/>
+            <a:ext cx="1494693" cy="931985"/>
+          </a:xfrm>
+          <a:prstGeom prst="ellipse">
+            <a:avLst/>
+          </a:prstGeom>
+          <a:solidFill>
+            <a:schemeClr val="accent6">
+              <a:lumMod val="75000"/>
+            </a:schemeClr>
+          </a:solidFill>
+        </p:spPr>
+        <p:style>
+          <a:lnRef idx="2">
+            <a:schemeClr val="accent1">
+              <a:shade val="50000"/>
+            </a:schemeClr>
+          </a:lnRef>
+          <a:fillRef idx="1">
+            <a:schemeClr val="accent1"/>
+          </a:fillRef>
+          <a:effectRef idx="0">
+            <a:schemeClr val="accent1"/>
+          </a:effectRef>
+          <a:fontRef idx="minor">
+            <a:schemeClr val="lt1"/>
+          </a:fontRef>
+        </p:style>
+        <p:txBody>
+          <a:bodyPr rtlCol="0" anchor="ctr"/>
+          <a:lstStyle/>
+          <a:p>
+            <a:pPr algn="ctr"/>
+            <a:r>
+              <a:rPr lang="fr-BE" sz="1400" b="1" dirty="0" smtClean="0"/>
+              <a:t>Connection close (faster)</a:t>
+            </a:r>
+            <a:endParaRPr lang="en-GB" sz="1400" b="1" dirty="0"/>
+          </a:p>
+        </p:txBody>
+      </p:sp>
+      <p:cxnSp>
+        <p:nvCxnSpPr>
+          <p:cNvPr id="31" name="Connecteur droit avec flèche 30">
+            <a:extLst>
+              <a:ext uri="{FF2B5EF4-FFF2-40B4-BE49-F238E27FC236}">
+                <a16:creationId xmlns:a16="http://schemas.microsoft.com/office/drawing/2014/main" xmlns="" id="{6589CEFF-63AD-48E0-B8C2-2B9C42EE3BA1}"/>
+              </a:ext>
+            </a:extLst>
+          </p:cNvPr>
+          <p:cNvCxnSpPr>
+            <a:stCxn id="20" idx="5"/>
+            <a:endCxn id="29" idx="1"/>
+          </p:cNvCxnSpPr>
+          <p:nvPr/>
+        </p:nvCxnSpPr>
+        <p:spPr>
+          <a:xfrm>
+            <a:off x="4639486" y="3331285"/>
+            <a:ext cx="2717281" cy="1104471"/>
+          </a:xfrm>
+          <a:prstGeom prst="straightConnector1">
+            <a:avLst/>
+          </a:prstGeom>
+          <a:ln w="28575">
+            <a:tailEnd type="triangle"/>
+          </a:ln>
+        </p:spPr>
+        <p:style>
+          <a:lnRef idx="1">
+            <a:schemeClr val="dk1"/>
+          </a:lnRef>
+          <a:fillRef idx="0">
+            <a:schemeClr val="dk1"/>
+          </a:fillRef>
+          <a:effectRef idx="0">
+            <a:schemeClr val="dk1"/>
+          </a:effectRef>
+          <a:fontRef idx="minor">
+            <a:schemeClr val="tx1"/>
+          </a:fontRef>
+        </p:style>
+      </p:cxnSp>
+      <p:cxnSp>
+        <p:nvCxnSpPr>
+          <p:cNvPr id="32" name="Connecteur droit avec flèche 31">
+            <a:extLst>
+              <a:ext uri="{FF2B5EF4-FFF2-40B4-BE49-F238E27FC236}">
+                <a16:creationId xmlns:a16="http://schemas.microsoft.com/office/drawing/2014/main" xmlns="" id="{6589CEFF-63AD-48E0-B8C2-2B9C42EE3BA1}"/>
+              </a:ext>
+            </a:extLst>
+          </p:cNvPr>
+          <p:cNvCxnSpPr>
+            <a:stCxn id="21" idx="4"/>
+            <a:endCxn id="29" idx="0"/>
+          </p:cNvCxnSpPr>
+          <p:nvPr/>
+        </p:nvCxnSpPr>
+        <p:spPr>
+          <a:xfrm flipH="1">
+            <a:off x="7885221" y="3467771"/>
+            <a:ext cx="1" cy="831499"/>
+          </a:xfrm>
+          <a:prstGeom prst="straightConnector1">
+            <a:avLst/>
+          </a:prstGeom>
+          <a:ln w="28575">
+            <a:tailEnd type="triangle"/>
+          </a:ln>
+        </p:spPr>
+        <p:style>
+          <a:lnRef idx="1">
+            <a:schemeClr val="dk1"/>
+          </a:lnRef>
+          <a:fillRef idx="0">
+            <a:schemeClr val="dk1"/>
+          </a:fillRef>
+          <a:effectRef idx="0">
+            <a:schemeClr val="dk1"/>
+          </a:effectRef>
+          <a:fontRef idx="minor">
+            <a:schemeClr val="tx1"/>
+          </a:fontRef>
+        </p:style>
+      </p:cxnSp>
+      <p:sp>
+        <p:nvSpPr>
+          <p:cNvPr id="33" name="ZoneTexte 32">
+            <a:extLst>
+              <a:ext uri="{FF2B5EF4-FFF2-40B4-BE49-F238E27FC236}">
+                <a16:creationId xmlns:a16="http://schemas.microsoft.com/office/drawing/2014/main" xmlns="" id="{479D2F68-32D5-4E80-B573-2C6156DCB22F}"/>
+              </a:ext>
+            </a:extLst>
+          </p:cNvPr>
+          <p:cNvSpPr txBox="1"/>
+          <p:nvPr/>
+        </p:nvSpPr>
+        <p:spPr>
+          <a:xfrm>
+            <a:off x="6463483" y="3630321"/>
+            <a:ext cx="1421736" cy="523220"/>
+          </a:xfrm>
+          <a:prstGeom prst="rect">
+            <a:avLst/>
+          </a:prstGeom>
+          <a:noFill/>
+        </p:spPr>
+        <p:txBody>
+          <a:bodyPr wrap="none" rtlCol="0">
+            <a:spAutoFit/>
+          </a:bodyPr>
+          <a:lstStyle/>
+          <a:p>
+            <a:pPr algn="ctr"/>
+            <a:r>
+              <a:rPr lang="fr-BE" sz="1400" dirty="0" smtClean="0"/>
+              <a:t>Closing/draining </a:t>
+            </a:r>
+          </a:p>
+          <a:p>
+            <a:pPr algn="ctr"/>
+            <a:r>
+              <a:rPr lang="fr-BE" sz="1400" dirty="0" smtClean="0"/>
+              <a:t>period finish</a:t>
+            </a:r>
+            <a:endParaRPr lang="en-GB" sz="1400" dirty="0"/>
+          </a:p>
+        </p:txBody>
+      </p:sp>
+      <p:cxnSp>
+        <p:nvCxnSpPr>
+          <p:cNvPr id="34" name="Connecteur droit avec flèche 33">
+            <a:extLst>
+              <a:ext uri="{FF2B5EF4-FFF2-40B4-BE49-F238E27FC236}">
+                <a16:creationId xmlns:a16="http://schemas.microsoft.com/office/drawing/2014/main" xmlns="" id="{6589CEFF-63AD-48E0-B8C2-2B9C42EE3BA1}"/>
+              </a:ext>
+            </a:extLst>
+          </p:cNvPr>
+          <p:cNvCxnSpPr>
+            <a:stCxn id="20" idx="5"/>
+            <a:endCxn id="30" idx="2"/>
+          </p:cNvCxnSpPr>
+          <p:nvPr/>
+        </p:nvCxnSpPr>
+        <p:spPr>
+          <a:xfrm>
+            <a:off x="4639486" y="3331285"/>
+            <a:ext cx="2498387" cy="2478170"/>
+          </a:xfrm>
+          <a:prstGeom prst="straightConnector1">
+            <a:avLst/>
+          </a:prstGeom>
+          <a:ln w="28575">
+            <a:tailEnd type="triangle"/>
+          </a:ln>
+        </p:spPr>
+        <p:style>
+          <a:lnRef idx="1">
+            <a:schemeClr val="dk1"/>
+          </a:lnRef>
+          <a:fillRef idx="0">
+            <a:schemeClr val="dk1"/>
+          </a:fillRef>
+          <a:effectRef idx="0">
+            <a:schemeClr val="dk1"/>
+          </a:effectRef>
+          <a:fontRef idx="minor">
+            <a:schemeClr val="tx1"/>
+          </a:fontRef>
+        </p:style>
+      </p:cxnSp>
+      <p:cxnSp>
+        <p:nvCxnSpPr>
+          <p:cNvPr id="35" name="Connecteur droit avec flèche 34">
+            <a:extLst>
+              <a:ext uri="{FF2B5EF4-FFF2-40B4-BE49-F238E27FC236}">
+                <a16:creationId xmlns:a16="http://schemas.microsoft.com/office/drawing/2014/main" xmlns="" id="{6589CEFF-63AD-48E0-B8C2-2B9C42EE3BA1}"/>
+              </a:ext>
+            </a:extLst>
+          </p:cNvPr>
+          <p:cNvCxnSpPr>
+            <a:stCxn id="21" idx="5"/>
+            <a:endCxn id="30" idx="7"/>
+          </p:cNvCxnSpPr>
+          <p:nvPr/>
+        </p:nvCxnSpPr>
+        <p:spPr>
+          <a:xfrm flipH="1">
+            <a:off x="8413673" y="3331285"/>
+            <a:ext cx="2" cy="2148663"/>
+          </a:xfrm>
+          <a:prstGeom prst="straightConnector1">
+            <a:avLst/>
+          </a:prstGeom>
+          <a:ln w="28575">
+            <a:tailEnd type="triangle"/>
+          </a:ln>
+        </p:spPr>
+        <p:style>
+          <a:lnRef idx="1">
+            <a:schemeClr val="dk1"/>
+          </a:lnRef>
+          <a:fillRef idx="0">
+            <a:schemeClr val="dk1"/>
+          </a:fillRef>
+          <a:effectRef idx="0">
+            <a:schemeClr val="dk1"/>
+          </a:effectRef>
+          <a:fontRef idx="minor">
+            <a:schemeClr val="tx1"/>
+          </a:fontRef>
+        </p:style>
+      </p:cxnSp>
+      <p:sp>
+        <p:nvSpPr>
+          <p:cNvPr id="36" name="ZoneTexte 35">
+            <a:extLst>
+              <a:ext uri="{FF2B5EF4-FFF2-40B4-BE49-F238E27FC236}">
+                <a16:creationId xmlns:a16="http://schemas.microsoft.com/office/drawing/2014/main" xmlns="" id="{479D2F68-32D5-4E80-B573-2C6156DCB22F}"/>
+              </a:ext>
+            </a:extLst>
+          </p:cNvPr>
+          <p:cNvSpPr txBox="1"/>
+          <p:nvPr/>
+        </p:nvSpPr>
+        <p:spPr>
+          <a:xfrm rot="2673654">
+            <a:off x="4352649" y="4612826"/>
+            <a:ext cx="2945871" cy="523220"/>
+          </a:xfrm>
+          <a:prstGeom prst="rect">
+            <a:avLst/>
+          </a:prstGeom>
+          <a:noFill/>
+        </p:spPr>
+        <p:txBody>
+          <a:bodyPr wrap="none" rtlCol="0">
+            <a:spAutoFit/>
+          </a:bodyPr>
+          <a:lstStyle/>
+          <a:p>
+            <a:pPr algn="ctr"/>
+            <a:r>
+              <a:rPr lang="fr-BE" sz="1400" dirty="0" smtClean="0"/>
+              <a:t>If no new socket open</a:t>
+            </a:r>
+          </a:p>
+          <a:p>
+            <a:pPr algn="ctr"/>
+            <a:r>
+              <a:rPr lang="fr-BE" sz="1400" dirty="0" smtClean="0"/>
+              <a:t>(no new response allow -&gt; close asap)</a:t>
+            </a:r>
+            <a:endParaRPr lang="en-GB" sz="1400" dirty="0"/>
           </a:p>
         </p:txBody>
       </p:sp>
@@ -8400,6 +13081,1191 @@
     <p:extLst>
       <p:ext uri="{BB962C8B-B14F-4D97-AF65-F5344CB8AC3E}">
         <p14:creationId xmlns:p14="http://schemas.microsoft.com/office/powerpoint/2010/main" val="3973114266"/>
+      </p:ext>
+    </p:extLst>
+  </p:cSld>
+  <p:clrMapOvr>
+    <a:masterClrMapping/>
+  </p:clrMapOvr>
+</p:sld>
+</file>
+
+<file path=ppt/slides/slide8.xml><?xml version="1.0" encoding="utf-8"?>
+<p:sld xmlns:a="http://schemas.openxmlformats.org/drawingml/2006/main" xmlns:r="http://schemas.openxmlformats.org/officeDocument/2006/relationships" xmlns:p="http://schemas.openxmlformats.org/presentationml/2006/main">
+  <p:cSld>
+    <p:spTree>
+      <p:nvGrpSpPr>
+        <p:cNvPr id="1" name=""/>
+        <p:cNvGrpSpPr/>
+        <p:nvPr/>
+      </p:nvGrpSpPr>
+      <p:grpSpPr>
+        <a:xfrm>
+          <a:off x="0" y="0"/>
+          <a:ext cx="0" cy="0"/>
+          <a:chOff x="0" y="0"/>
+          <a:chExt cx="0" cy="0"/>
+        </a:xfrm>
+      </p:grpSpPr>
+      <p:sp>
+        <p:nvSpPr>
+          <p:cNvPr id="5" name="ZoneTexte 4">
+            <a:extLst>
+              <a:ext uri="{FF2B5EF4-FFF2-40B4-BE49-F238E27FC236}">
+                <a16:creationId xmlns:a16="http://schemas.microsoft.com/office/drawing/2014/main" xmlns="" id="{25D0CFDD-F8D9-4498-A666-F31BA473AEDD}"/>
+              </a:ext>
+            </a:extLst>
+          </p:cNvPr>
+          <p:cNvSpPr txBox="1"/>
+          <p:nvPr/>
+        </p:nvSpPr>
+        <p:spPr>
+          <a:xfrm>
+            <a:off x="9748062" y="24641"/>
+            <a:ext cx="2443938" cy="523220"/>
+          </a:xfrm>
+          <a:prstGeom prst="rect">
+            <a:avLst/>
+          </a:prstGeom>
+          <a:noFill/>
+        </p:spPr>
+        <p:txBody>
+          <a:bodyPr wrap="square">
+            <a:spAutoFit/>
+          </a:bodyPr>
+          <a:lstStyle/>
+          <a:p>
+            <a:r>
+              <a:rPr lang="en-GB" sz="2800" b="1" dirty="0"/>
+              <a:t>S</a:t>
+            </a:r>
+            <a:r>
+              <a:rPr lang="en-GB" sz="2800" b="1" dirty="0" smtClean="0"/>
+              <a:t>tateless reset</a:t>
+            </a:r>
+            <a:endParaRPr lang="en-GB" sz="2800" b="1" dirty="0"/>
+          </a:p>
+        </p:txBody>
+      </p:sp>
+      <p:sp>
+        <p:nvSpPr>
+          <p:cNvPr id="9" name="Ellipse 8">
+            <a:extLst>
+              <a:ext uri="{FF2B5EF4-FFF2-40B4-BE49-F238E27FC236}">
+                <a16:creationId xmlns:a16="http://schemas.microsoft.com/office/drawing/2014/main" xmlns="" id="{89FCD844-DF7E-40C9-9D11-022F7FE63189}"/>
+              </a:ext>
+            </a:extLst>
+          </p:cNvPr>
+          <p:cNvSpPr/>
+          <p:nvPr/>
+        </p:nvSpPr>
+        <p:spPr>
+          <a:xfrm>
+            <a:off x="4018405" y="2899692"/>
+            <a:ext cx="1494693" cy="931985"/>
+          </a:xfrm>
+          <a:prstGeom prst="ellipse">
+            <a:avLst/>
+          </a:prstGeom>
+        </p:spPr>
+        <p:style>
+          <a:lnRef idx="2">
+            <a:schemeClr val="accent2">
+              <a:shade val="50000"/>
+            </a:schemeClr>
+          </a:lnRef>
+          <a:fillRef idx="1">
+            <a:schemeClr val="accent2"/>
+          </a:fillRef>
+          <a:effectRef idx="0">
+            <a:schemeClr val="accent2"/>
+          </a:effectRef>
+          <a:fontRef idx="minor">
+            <a:schemeClr val="lt1"/>
+          </a:fontRef>
+        </p:style>
+        <p:txBody>
+          <a:bodyPr rtlCol="0" anchor="ctr"/>
+          <a:lstStyle/>
+          <a:p>
+            <a:pPr algn="ctr"/>
+            <a:r>
+              <a:rPr lang="fr-BE" sz="1400" b="1" dirty="0" smtClean="0"/>
+              <a:t>Closing connection</a:t>
+            </a:r>
+            <a:endParaRPr lang="en-GB" sz="1400" b="1" dirty="0"/>
+          </a:p>
+        </p:txBody>
+      </p:sp>
+      <p:sp>
+        <p:nvSpPr>
+          <p:cNvPr id="10" name="Ellipse 9">
+            <a:extLst>
+              <a:ext uri="{FF2B5EF4-FFF2-40B4-BE49-F238E27FC236}">
+                <a16:creationId xmlns:a16="http://schemas.microsoft.com/office/drawing/2014/main" xmlns="" id="{89FCD844-DF7E-40C9-9D11-022F7FE63189}"/>
+              </a:ext>
+            </a:extLst>
+          </p:cNvPr>
+          <p:cNvSpPr/>
+          <p:nvPr/>
+        </p:nvSpPr>
+        <p:spPr>
+          <a:xfrm>
+            <a:off x="7792594" y="2899692"/>
+            <a:ext cx="1494693" cy="931985"/>
+          </a:xfrm>
+          <a:prstGeom prst="ellipse">
+            <a:avLst/>
+          </a:prstGeom>
+        </p:spPr>
+        <p:style>
+          <a:lnRef idx="2">
+            <a:schemeClr val="accent2">
+              <a:shade val="50000"/>
+            </a:schemeClr>
+          </a:lnRef>
+          <a:fillRef idx="1">
+            <a:schemeClr val="accent2"/>
+          </a:fillRef>
+          <a:effectRef idx="0">
+            <a:schemeClr val="accent2"/>
+          </a:effectRef>
+          <a:fontRef idx="minor">
+            <a:schemeClr val="lt1"/>
+          </a:fontRef>
+        </p:style>
+        <p:txBody>
+          <a:bodyPr rtlCol="0" anchor="ctr"/>
+          <a:lstStyle/>
+          <a:p>
+            <a:pPr algn="ctr"/>
+            <a:r>
+              <a:rPr lang="fr-BE" sz="1400" b="1" dirty="0" smtClean="0"/>
+              <a:t>Draining connection</a:t>
+            </a:r>
+            <a:endParaRPr lang="en-GB" sz="1400" b="1" dirty="0"/>
+          </a:p>
+        </p:txBody>
+      </p:sp>
+      <p:cxnSp>
+        <p:nvCxnSpPr>
+          <p:cNvPr id="11" name="Connecteur droit avec flèche 10">
+            <a:extLst>
+              <a:ext uri="{FF2B5EF4-FFF2-40B4-BE49-F238E27FC236}">
+                <a16:creationId xmlns:a16="http://schemas.microsoft.com/office/drawing/2014/main" xmlns="" id="{6589CEFF-63AD-48E0-B8C2-2B9C42EE3BA1}"/>
+              </a:ext>
+            </a:extLst>
+          </p:cNvPr>
+          <p:cNvCxnSpPr>
+            <a:endCxn id="9" idx="2"/>
+          </p:cNvCxnSpPr>
+          <p:nvPr/>
+        </p:nvCxnSpPr>
+        <p:spPr>
+          <a:xfrm>
+            <a:off x="3271058" y="3365684"/>
+            <a:ext cx="747347" cy="1"/>
+          </a:xfrm>
+          <a:prstGeom prst="straightConnector1">
+            <a:avLst/>
+          </a:prstGeom>
+          <a:ln w="28575">
+            <a:tailEnd type="triangle"/>
+          </a:ln>
+        </p:spPr>
+        <p:style>
+          <a:lnRef idx="1">
+            <a:schemeClr val="dk1"/>
+          </a:lnRef>
+          <a:fillRef idx="0">
+            <a:schemeClr val="dk1"/>
+          </a:fillRef>
+          <a:effectRef idx="0">
+            <a:schemeClr val="dk1"/>
+          </a:effectRef>
+          <a:fontRef idx="minor">
+            <a:schemeClr val="tx1"/>
+          </a:fontRef>
+        </p:style>
+      </p:cxnSp>
+      <p:sp>
+        <p:nvSpPr>
+          <p:cNvPr id="12" name="ZoneTexte 11">
+            <a:extLst>
+              <a:ext uri="{FF2B5EF4-FFF2-40B4-BE49-F238E27FC236}">
+                <a16:creationId xmlns:a16="http://schemas.microsoft.com/office/drawing/2014/main" xmlns="" id="{479D2F68-32D5-4E80-B573-2C6156DCB22F}"/>
+              </a:ext>
+            </a:extLst>
+          </p:cNvPr>
+          <p:cNvSpPr txBox="1"/>
+          <p:nvPr/>
+        </p:nvSpPr>
+        <p:spPr>
+          <a:xfrm>
+            <a:off x="988669" y="3027130"/>
+            <a:ext cx="2889189" cy="954107"/>
+          </a:xfrm>
+          <a:prstGeom prst="rect">
+            <a:avLst/>
+          </a:prstGeom>
+          <a:noFill/>
+        </p:spPr>
+        <p:txBody>
+          <a:bodyPr wrap="none" rtlCol="0">
+            <a:spAutoFit/>
+          </a:bodyPr>
+          <a:lstStyle/>
+          <a:p>
+            <a:r>
+              <a:rPr lang="fr-BE" sz="1400" dirty="0" smtClean="0"/>
+              <a:t>If StatelessResetToken field = 1</a:t>
+            </a:r>
+          </a:p>
+          <a:p>
+            <a:r>
+              <a:rPr lang="fr-BE" sz="1400" dirty="0" smtClean="0"/>
+              <a:t>And r.CONNECTION_CLOSE</a:t>
+            </a:r>
+          </a:p>
+          <a:p>
+            <a:r>
+              <a:rPr lang="fr-BE" sz="1400" dirty="0" smtClean="0"/>
+              <a:t>And r.RETIRE_CONNECTION_ID</a:t>
+            </a:r>
+            <a:endParaRPr lang="fr-BE" sz="1400" dirty="0"/>
+          </a:p>
+          <a:p>
+            <a:r>
+              <a:rPr lang="fr-BE" sz="1400" dirty="0" smtClean="0"/>
+              <a:t>And Unpredictable Bits field &gt; 38 bits</a:t>
+            </a:r>
+          </a:p>
+        </p:txBody>
+      </p:sp>
+      <p:sp>
+        <p:nvSpPr>
+          <p:cNvPr id="13" name="Ellipse 12">
+            <a:extLst>
+              <a:ext uri="{FF2B5EF4-FFF2-40B4-BE49-F238E27FC236}">
+                <a16:creationId xmlns:a16="http://schemas.microsoft.com/office/drawing/2014/main" xmlns="" id="{A05BD43F-3BA6-4D44-9A89-6240DC624C9A}"/>
+              </a:ext>
+            </a:extLst>
+          </p:cNvPr>
+          <p:cNvSpPr/>
+          <p:nvPr/>
+        </p:nvSpPr>
+        <p:spPr>
+          <a:xfrm>
+            <a:off x="4018404" y="5707369"/>
+            <a:ext cx="1494693" cy="931985"/>
+          </a:xfrm>
+          <a:prstGeom prst="ellipse">
+            <a:avLst/>
+          </a:prstGeom>
+          <a:solidFill>
+            <a:srgbClr val="C00000"/>
+          </a:solidFill>
+        </p:spPr>
+        <p:style>
+          <a:lnRef idx="2">
+            <a:schemeClr val="accent1">
+              <a:shade val="50000"/>
+            </a:schemeClr>
+          </a:lnRef>
+          <a:fillRef idx="1">
+            <a:schemeClr val="accent1"/>
+          </a:fillRef>
+          <a:effectRef idx="0">
+            <a:schemeClr val="accent1"/>
+          </a:effectRef>
+          <a:fontRef idx="minor">
+            <a:schemeClr val="lt1"/>
+          </a:fontRef>
+        </p:style>
+        <p:txBody>
+          <a:bodyPr rtlCol="0" anchor="ctr"/>
+          <a:lstStyle/>
+          <a:p>
+            <a:pPr algn="ctr"/>
+            <a:r>
+              <a:rPr lang="fr-BE" sz="1400" b="1" dirty="0" smtClean="0"/>
+              <a:t>Connection close sent</a:t>
+            </a:r>
+            <a:endParaRPr lang="en-GB" sz="1400" b="1" dirty="0"/>
+          </a:p>
+        </p:txBody>
+      </p:sp>
+      <p:cxnSp>
+        <p:nvCxnSpPr>
+          <p:cNvPr id="14" name="Connecteur droit avec flèche 13">
+            <a:extLst>
+              <a:ext uri="{FF2B5EF4-FFF2-40B4-BE49-F238E27FC236}">
+                <a16:creationId xmlns:a16="http://schemas.microsoft.com/office/drawing/2014/main" xmlns="" id="{6589CEFF-63AD-48E0-B8C2-2B9C42EE3BA1}"/>
+              </a:ext>
+            </a:extLst>
+          </p:cNvPr>
+          <p:cNvCxnSpPr>
+            <a:stCxn id="9" idx="4"/>
+            <a:endCxn id="13" idx="0"/>
+          </p:cNvCxnSpPr>
+          <p:nvPr/>
+        </p:nvCxnSpPr>
+        <p:spPr>
+          <a:xfrm flipH="1">
+            <a:off x="4765751" y="3831677"/>
+            <a:ext cx="1" cy="1875692"/>
+          </a:xfrm>
+          <a:prstGeom prst="straightConnector1">
+            <a:avLst/>
+          </a:prstGeom>
+          <a:ln w="28575">
+            <a:tailEnd type="triangle"/>
+          </a:ln>
+        </p:spPr>
+        <p:style>
+          <a:lnRef idx="1">
+            <a:schemeClr val="dk1"/>
+          </a:lnRef>
+          <a:fillRef idx="0">
+            <a:schemeClr val="dk1"/>
+          </a:fillRef>
+          <a:effectRef idx="0">
+            <a:schemeClr val="dk1"/>
+          </a:effectRef>
+          <a:fontRef idx="minor">
+            <a:schemeClr val="tx1"/>
+          </a:fontRef>
+        </p:style>
+      </p:cxnSp>
+      <p:sp>
+        <p:nvSpPr>
+          <p:cNvPr id="15" name="ZoneTexte 14">
+            <a:extLst>
+              <a:ext uri="{FF2B5EF4-FFF2-40B4-BE49-F238E27FC236}">
+                <a16:creationId xmlns:a16="http://schemas.microsoft.com/office/drawing/2014/main" xmlns="" id="{479D2F68-32D5-4E80-B573-2C6156DCB22F}"/>
+              </a:ext>
+            </a:extLst>
+          </p:cNvPr>
+          <p:cNvSpPr txBox="1"/>
+          <p:nvPr/>
+        </p:nvSpPr>
+        <p:spPr>
+          <a:xfrm rot="16200000">
+            <a:off x="3693437" y="4587745"/>
+            <a:ext cx="1836850" cy="307777"/>
+          </a:xfrm>
+          <a:prstGeom prst="rect">
+            <a:avLst/>
+          </a:prstGeom>
+          <a:noFill/>
+        </p:spPr>
+        <p:txBody>
+          <a:bodyPr wrap="none" rtlCol="0">
+            <a:spAutoFit/>
+          </a:bodyPr>
+          <a:lstStyle/>
+          <a:p>
+            <a:r>
+              <a:rPr lang="fr-BE" sz="1400" dirty="0"/>
+              <a:t>s</a:t>
+            </a:r>
+            <a:r>
+              <a:rPr lang="fr-BE" sz="1400" dirty="0" smtClean="0"/>
+              <a:t>.CONNECTION_CLOSE</a:t>
+            </a:r>
+            <a:endParaRPr lang="en-GB" sz="1400" dirty="0"/>
+          </a:p>
+        </p:txBody>
+      </p:sp>
+      <p:cxnSp>
+        <p:nvCxnSpPr>
+          <p:cNvPr id="16" name="Connecteur droit avec flèche 15">
+            <a:extLst>
+              <a:ext uri="{FF2B5EF4-FFF2-40B4-BE49-F238E27FC236}">
+                <a16:creationId xmlns:a16="http://schemas.microsoft.com/office/drawing/2014/main" xmlns="" id="{6589CEFF-63AD-48E0-B8C2-2B9C42EE3BA1}"/>
+              </a:ext>
+            </a:extLst>
+          </p:cNvPr>
+          <p:cNvCxnSpPr>
+            <a:endCxn id="10" idx="6"/>
+          </p:cNvCxnSpPr>
+          <p:nvPr/>
+        </p:nvCxnSpPr>
+        <p:spPr>
+          <a:xfrm flipH="1">
+            <a:off x="9287287" y="3365684"/>
+            <a:ext cx="999713" cy="1"/>
+          </a:xfrm>
+          <a:prstGeom prst="straightConnector1">
+            <a:avLst/>
+          </a:prstGeom>
+          <a:ln w="28575">
+            <a:tailEnd type="triangle"/>
+          </a:ln>
+        </p:spPr>
+        <p:style>
+          <a:lnRef idx="1">
+            <a:schemeClr val="dk1"/>
+          </a:lnRef>
+          <a:fillRef idx="0">
+            <a:schemeClr val="dk1"/>
+          </a:fillRef>
+          <a:effectRef idx="0">
+            <a:schemeClr val="dk1"/>
+          </a:effectRef>
+          <a:fontRef idx="minor">
+            <a:schemeClr val="tx1"/>
+          </a:fontRef>
+        </p:style>
+      </p:cxnSp>
+      <p:sp>
+        <p:nvSpPr>
+          <p:cNvPr id="17" name="ZoneTexte 16">
+            <a:extLst>
+              <a:ext uri="{FF2B5EF4-FFF2-40B4-BE49-F238E27FC236}">
+                <a16:creationId xmlns:a16="http://schemas.microsoft.com/office/drawing/2014/main" xmlns="" id="{479D2F68-32D5-4E80-B573-2C6156DCB22F}"/>
+              </a:ext>
+            </a:extLst>
+          </p:cNvPr>
+          <p:cNvSpPr txBox="1"/>
+          <p:nvPr/>
+        </p:nvSpPr>
+        <p:spPr>
+          <a:xfrm>
+            <a:off x="10338608" y="3016150"/>
+            <a:ext cx="1853392" cy="646331"/>
+          </a:xfrm>
+          <a:prstGeom prst="rect">
+            <a:avLst/>
+          </a:prstGeom>
+          <a:noFill/>
+        </p:spPr>
+        <p:txBody>
+          <a:bodyPr wrap="none" rtlCol="0">
+            <a:spAutoFit/>
+          </a:bodyPr>
+          <a:lstStyle/>
+          <a:p>
+            <a:r>
+              <a:rPr lang="fr-BE" dirty="0" smtClean="0"/>
+              <a:t>Sig</a:t>
+            </a:r>
+            <a:r>
+              <a:rPr lang="fr-BE" dirty="0" smtClean="0"/>
+              <a:t>nal rcv with</a:t>
+            </a:r>
+          </a:p>
+          <a:p>
+            <a:r>
+              <a:rPr lang="fr-BE" dirty="0" smtClean="0"/>
+              <a:t>Connection_close</a:t>
+            </a:r>
+            <a:endParaRPr lang="en-GB" dirty="0"/>
+          </a:p>
+        </p:txBody>
+      </p:sp>
+      <p:cxnSp>
+        <p:nvCxnSpPr>
+          <p:cNvPr id="18" name="Connecteur droit avec flèche 17">
+            <a:extLst>
+              <a:ext uri="{FF2B5EF4-FFF2-40B4-BE49-F238E27FC236}">
+                <a16:creationId xmlns:a16="http://schemas.microsoft.com/office/drawing/2014/main" xmlns="" id="{6589CEFF-63AD-48E0-B8C2-2B9C42EE3BA1}"/>
+              </a:ext>
+            </a:extLst>
+          </p:cNvPr>
+          <p:cNvCxnSpPr>
+            <a:stCxn id="9" idx="6"/>
+            <a:endCxn id="10" idx="2"/>
+          </p:cNvCxnSpPr>
+          <p:nvPr/>
+        </p:nvCxnSpPr>
+        <p:spPr>
+          <a:xfrm>
+            <a:off x="5513098" y="3365685"/>
+            <a:ext cx="2279496" cy="0"/>
+          </a:xfrm>
+          <a:prstGeom prst="straightConnector1">
+            <a:avLst/>
+          </a:prstGeom>
+          <a:ln w="28575">
+            <a:tailEnd type="triangle"/>
+          </a:ln>
+        </p:spPr>
+        <p:style>
+          <a:lnRef idx="1">
+            <a:schemeClr val="dk1"/>
+          </a:lnRef>
+          <a:fillRef idx="0">
+            <a:schemeClr val="dk1"/>
+          </a:fillRef>
+          <a:effectRef idx="0">
+            <a:schemeClr val="dk1"/>
+          </a:effectRef>
+          <a:fontRef idx="minor">
+            <a:schemeClr val="tx1"/>
+          </a:fontRef>
+        </p:style>
+      </p:cxnSp>
+      <p:sp>
+        <p:nvSpPr>
+          <p:cNvPr id="19" name="ZoneTexte 18">
+            <a:extLst>
+              <a:ext uri="{FF2B5EF4-FFF2-40B4-BE49-F238E27FC236}">
+                <a16:creationId xmlns:a16="http://schemas.microsoft.com/office/drawing/2014/main" xmlns="" id="{479D2F68-32D5-4E80-B573-2C6156DCB22F}"/>
+              </a:ext>
+            </a:extLst>
+          </p:cNvPr>
+          <p:cNvSpPr txBox="1"/>
+          <p:nvPr/>
+        </p:nvSpPr>
+        <p:spPr>
+          <a:xfrm>
+            <a:off x="5692968" y="2824911"/>
+            <a:ext cx="1865254" cy="523220"/>
+          </a:xfrm>
+          <a:prstGeom prst="rect">
+            <a:avLst/>
+          </a:prstGeom>
+          <a:noFill/>
+        </p:spPr>
+        <p:txBody>
+          <a:bodyPr wrap="none" rtlCol="0">
+            <a:spAutoFit/>
+          </a:bodyPr>
+          <a:lstStyle/>
+          <a:p>
+            <a:r>
+              <a:rPr lang="fr-BE" sz="1400" dirty="0"/>
+              <a:t>[</a:t>
+            </a:r>
+            <a:r>
+              <a:rPr lang="fr-BE" sz="1400" dirty="0" smtClean="0"/>
+              <a:t>r.CONNECTION_CLOSE</a:t>
+            </a:r>
+          </a:p>
+          <a:p>
+            <a:r>
+              <a:rPr lang="fr-BE" sz="1400" dirty="0" smtClean="0"/>
+              <a:t>|| r.stateless_RESET</a:t>
+            </a:r>
+            <a:r>
+              <a:rPr lang="fr-BE" sz="1400" dirty="0" smtClean="0"/>
+              <a:t>]</a:t>
+            </a:r>
+            <a:endParaRPr lang="en-GB" sz="1400" dirty="0"/>
+          </a:p>
+        </p:txBody>
+      </p:sp>
+      <p:sp>
+        <p:nvSpPr>
+          <p:cNvPr id="20" name="Ellipse 19">
+            <a:extLst>
+              <a:ext uri="{FF2B5EF4-FFF2-40B4-BE49-F238E27FC236}">
+                <a16:creationId xmlns:a16="http://schemas.microsoft.com/office/drawing/2014/main" xmlns="" id="{D18BD9DA-F640-40D8-890E-826C2DD83CAC}"/>
+              </a:ext>
+            </a:extLst>
+          </p:cNvPr>
+          <p:cNvSpPr/>
+          <p:nvPr/>
+        </p:nvSpPr>
+        <p:spPr>
+          <a:xfrm>
+            <a:off x="7792593" y="4663176"/>
+            <a:ext cx="1494693" cy="931985"/>
+          </a:xfrm>
+          <a:prstGeom prst="ellipse">
+            <a:avLst/>
+          </a:prstGeom>
+          <a:solidFill>
+            <a:schemeClr val="accent6">
+              <a:lumMod val="75000"/>
+            </a:schemeClr>
+          </a:solidFill>
+        </p:spPr>
+        <p:style>
+          <a:lnRef idx="2">
+            <a:schemeClr val="accent1">
+              <a:shade val="50000"/>
+            </a:schemeClr>
+          </a:lnRef>
+          <a:fillRef idx="1">
+            <a:schemeClr val="accent1"/>
+          </a:fillRef>
+          <a:effectRef idx="0">
+            <a:schemeClr val="accent1"/>
+          </a:effectRef>
+          <a:fontRef idx="minor">
+            <a:schemeClr val="lt1"/>
+          </a:fontRef>
+        </p:style>
+        <p:txBody>
+          <a:bodyPr rtlCol="0" anchor="ctr"/>
+          <a:lstStyle/>
+          <a:p>
+            <a:pPr algn="ctr"/>
+            <a:r>
+              <a:rPr lang="fr-BE" sz="1400" b="1" dirty="0" smtClean="0"/>
+              <a:t>Connection close</a:t>
+            </a:r>
+            <a:endParaRPr lang="en-GB" sz="1400" b="1" dirty="0"/>
+          </a:p>
+        </p:txBody>
+      </p:sp>
+      <p:sp>
+        <p:nvSpPr>
+          <p:cNvPr id="21" name="Ellipse 20">
+            <a:extLst>
+              <a:ext uri="{FF2B5EF4-FFF2-40B4-BE49-F238E27FC236}">
+                <a16:creationId xmlns:a16="http://schemas.microsoft.com/office/drawing/2014/main" xmlns="" id="{D18BD9DA-F640-40D8-890E-826C2DD83CAC}"/>
+              </a:ext>
+            </a:extLst>
+          </p:cNvPr>
+          <p:cNvSpPr/>
+          <p:nvPr/>
+        </p:nvSpPr>
+        <p:spPr>
+          <a:xfrm>
+            <a:off x="7792592" y="5707368"/>
+            <a:ext cx="1494693" cy="931985"/>
+          </a:xfrm>
+          <a:prstGeom prst="ellipse">
+            <a:avLst/>
+          </a:prstGeom>
+          <a:solidFill>
+            <a:schemeClr val="accent6">
+              <a:lumMod val="75000"/>
+            </a:schemeClr>
+          </a:solidFill>
+        </p:spPr>
+        <p:style>
+          <a:lnRef idx="2">
+            <a:schemeClr val="accent1">
+              <a:shade val="50000"/>
+            </a:schemeClr>
+          </a:lnRef>
+          <a:fillRef idx="1">
+            <a:schemeClr val="accent1"/>
+          </a:fillRef>
+          <a:effectRef idx="0">
+            <a:schemeClr val="accent1"/>
+          </a:effectRef>
+          <a:fontRef idx="minor">
+            <a:schemeClr val="lt1"/>
+          </a:fontRef>
+        </p:style>
+        <p:txBody>
+          <a:bodyPr rtlCol="0" anchor="ctr"/>
+          <a:lstStyle/>
+          <a:p>
+            <a:pPr algn="ctr"/>
+            <a:r>
+              <a:rPr lang="fr-BE" sz="1400" b="1" dirty="0" smtClean="0"/>
+              <a:t>Connection close (faster)</a:t>
+            </a:r>
+            <a:endParaRPr lang="en-GB" sz="1400" b="1" dirty="0"/>
+          </a:p>
+        </p:txBody>
+      </p:sp>
+      <p:cxnSp>
+        <p:nvCxnSpPr>
+          <p:cNvPr id="22" name="Connecteur droit avec flèche 21">
+            <a:extLst>
+              <a:ext uri="{FF2B5EF4-FFF2-40B4-BE49-F238E27FC236}">
+                <a16:creationId xmlns:a16="http://schemas.microsoft.com/office/drawing/2014/main" xmlns="" id="{6589CEFF-63AD-48E0-B8C2-2B9C42EE3BA1}"/>
+              </a:ext>
+            </a:extLst>
+          </p:cNvPr>
+          <p:cNvCxnSpPr>
+            <a:stCxn id="9" idx="5"/>
+            <a:endCxn id="20" idx="1"/>
+          </p:cNvCxnSpPr>
+          <p:nvPr/>
+        </p:nvCxnSpPr>
+        <p:spPr>
+          <a:xfrm>
+            <a:off x="5294205" y="3695191"/>
+            <a:ext cx="2717281" cy="1104471"/>
+          </a:xfrm>
+          <a:prstGeom prst="straightConnector1">
+            <a:avLst/>
+          </a:prstGeom>
+          <a:ln w="28575">
+            <a:tailEnd type="triangle"/>
+          </a:ln>
+        </p:spPr>
+        <p:style>
+          <a:lnRef idx="1">
+            <a:schemeClr val="dk1"/>
+          </a:lnRef>
+          <a:fillRef idx="0">
+            <a:schemeClr val="dk1"/>
+          </a:fillRef>
+          <a:effectRef idx="0">
+            <a:schemeClr val="dk1"/>
+          </a:effectRef>
+          <a:fontRef idx="minor">
+            <a:schemeClr val="tx1"/>
+          </a:fontRef>
+        </p:style>
+      </p:cxnSp>
+      <p:cxnSp>
+        <p:nvCxnSpPr>
+          <p:cNvPr id="23" name="Connecteur droit avec flèche 22">
+            <a:extLst>
+              <a:ext uri="{FF2B5EF4-FFF2-40B4-BE49-F238E27FC236}">
+                <a16:creationId xmlns:a16="http://schemas.microsoft.com/office/drawing/2014/main" xmlns="" id="{6589CEFF-63AD-48E0-B8C2-2B9C42EE3BA1}"/>
+              </a:ext>
+            </a:extLst>
+          </p:cNvPr>
+          <p:cNvCxnSpPr>
+            <a:stCxn id="10" idx="4"/>
+            <a:endCxn id="20" idx="0"/>
+          </p:cNvCxnSpPr>
+          <p:nvPr/>
+        </p:nvCxnSpPr>
+        <p:spPr>
+          <a:xfrm flipH="1">
+            <a:off x="8539940" y="3831677"/>
+            <a:ext cx="1" cy="831499"/>
+          </a:xfrm>
+          <a:prstGeom prst="straightConnector1">
+            <a:avLst/>
+          </a:prstGeom>
+          <a:ln w="28575">
+            <a:tailEnd type="triangle"/>
+          </a:ln>
+        </p:spPr>
+        <p:style>
+          <a:lnRef idx="1">
+            <a:schemeClr val="dk1"/>
+          </a:lnRef>
+          <a:fillRef idx="0">
+            <a:schemeClr val="dk1"/>
+          </a:fillRef>
+          <a:effectRef idx="0">
+            <a:schemeClr val="dk1"/>
+          </a:effectRef>
+          <a:fontRef idx="minor">
+            <a:schemeClr val="tx1"/>
+          </a:fontRef>
+        </p:style>
+      </p:cxnSp>
+      <p:sp>
+        <p:nvSpPr>
+          <p:cNvPr id="24" name="ZoneTexte 23">
+            <a:extLst>
+              <a:ext uri="{FF2B5EF4-FFF2-40B4-BE49-F238E27FC236}">
+                <a16:creationId xmlns:a16="http://schemas.microsoft.com/office/drawing/2014/main" xmlns="" id="{479D2F68-32D5-4E80-B573-2C6156DCB22F}"/>
+              </a:ext>
+            </a:extLst>
+          </p:cNvPr>
+          <p:cNvSpPr txBox="1"/>
+          <p:nvPr/>
+        </p:nvSpPr>
+        <p:spPr>
+          <a:xfrm>
+            <a:off x="7118202" y="3994227"/>
+            <a:ext cx="1421736" cy="523220"/>
+          </a:xfrm>
+          <a:prstGeom prst="rect">
+            <a:avLst/>
+          </a:prstGeom>
+          <a:noFill/>
+        </p:spPr>
+        <p:txBody>
+          <a:bodyPr wrap="none" rtlCol="0">
+            <a:spAutoFit/>
+          </a:bodyPr>
+          <a:lstStyle/>
+          <a:p>
+            <a:pPr algn="ctr"/>
+            <a:r>
+              <a:rPr lang="fr-BE" sz="1400" dirty="0" smtClean="0"/>
+              <a:t>Closing/draining </a:t>
+            </a:r>
+          </a:p>
+          <a:p>
+            <a:pPr algn="ctr"/>
+            <a:r>
+              <a:rPr lang="fr-BE" sz="1400" dirty="0" smtClean="0"/>
+              <a:t>period finish</a:t>
+            </a:r>
+            <a:endParaRPr lang="en-GB" sz="1400" dirty="0"/>
+          </a:p>
+        </p:txBody>
+      </p:sp>
+      <p:cxnSp>
+        <p:nvCxnSpPr>
+          <p:cNvPr id="25" name="Connecteur droit avec flèche 24">
+            <a:extLst>
+              <a:ext uri="{FF2B5EF4-FFF2-40B4-BE49-F238E27FC236}">
+                <a16:creationId xmlns:a16="http://schemas.microsoft.com/office/drawing/2014/main" xmlns="" id="{6589CEFF-63AD-48E0-B8C2-2B9C42EE3BA1}"/>
+              </a:ext>
+            </a:extLst>
+          </p:cNvPr>
+          <p:cNvCxnSpPr>
+            <a:stCxn id="9" idx="5"/>
+            <a:endCxn id="21" idx="2"/>
+          </p:cNvCxnSpPr>
+          <p:nvPr/>
+        </p:nvCxnSpPr>
+        <p:spPr>
+          <a:xfrm>
+            <a:off x="5294205" y="3695191"/>
+            <a:ext cx="2498387" cy="2478170"/>
+          </a:xfrm>
+          <a:prstGeom prst="straightConnector1">
+            <a:avLst/>
+          </a:prstGeom>
+          <a:ln w="28575">
+            <a:tailEnd type="triangle"/>
+          </a:ln>
+        </p:spPr>
+        <p:style>
+          <a:lnRef idx="1">
+            <a:schemeClr val="dk1"/>
+          </a:lnRef>
+          <a:fillRef idx="0">
+            <a:schemeClr val="dk1"/>
+          </a:fillRef>
+          <a:effectRef idx="0">
+            <a:schemeClr val="dk1"/>
+          </a:effectRef>
+          <a:fontRef idx="minor">
+            <a:schemeClr val="tx1"/>
+          </a:fontRef>
+        </p:style>
+      </p:cxnSp>
+      <p:cxnSp>
+        <p:nvCxnSpPr>
+          <p:cNvPr id="26" name="Connecteur droit avec flèche 25">
+            <a:extLst>
+              <a:ext uri="{FF2B5EF4-FFF2-40B4-BE49-F238E27FC236}">
+                <a16:creationId xmlns:a16="http://schemas.microsoft.com/office/drawing/2014/main" xmlns="" id="{6589CEFF-63AD-48E0-B8C2-2B9C42EE3BA1}"/>
+              </a:ext>
+            </a:extLst>
+          </p:cNvPr>
+          <p:cNvCxnSpPr>
+            <a:stCxn id="10" idx="5"/>
+            <a:endCxn id="21" idx="7"/>
+          </p:cNvCxnSpPr>
+          <p:nvPr/>
+        </p:nvCxnSpPr>
+        <p:spPr>
+          <a:xfrm flipH="1">
+            <a:off x="9068392" y="3695191"/>
+            <a:ext cx="2" cy="2148663"/>
+          </a:xfrm>
+          <a:prstGeom prst="straightConnector1">
+            <a:avLst/>
+          </a:prstGeom>
+          <a:ln w="28575">
+            <a:tailEnd type="triangle"/>
+          </a:ln>
+        </p:spPr>
+        <p:style>
+          <a:lnRef idx="1">
+            <a:schemeClr val="dk1"/>
+          </a:lnRef>
+          <a:fillRef idx="0">
+            <a:schemeClr val="dk1"/>
+          </a:fillRef>
+          <a:effectRef idx="0">
+            <a:schemeClr val="dk1"/>
+          </a:effectRef>
+          <a:fontRef idx="minor">
+            <a:schemeClr val="tx1"/>
+          </a:fontRef>
+        </p:style>
+      </p:cxnSp>
+      <p:sp>
+        <p:nvSpPr>
+          <p:cNvPr id="27" name="ZoneTexte 26">
+            <a:extLst>
+              <a:ext uri="{FF2B5EF4-FFF2-40B4-BE49-F238E27FC236}">
+                <a16:creationId xmlns:a16="http://schemas.microsoft.com/office/drawing/2014/main" xmlns="" id="{479D2F68-32D5-4E80-B573-2C6156DCB22F}"/>
+              </a:ext>
+            </a:extLst>
+          </p:cNvPr>
+          <p:cNvSpPr txBox="1"/>
+          <p:nvPr/>
+        </p:nvSpPr>
+        <p:spPr>
+          <a:xfrm rot="2673654">
+            <a:off x="5007368" y="4976732"/>
+            <a:ext cx="2945871" cy="523220"/>
+          </a:xfrm>
+          <a:prstGeom prst="rect">
+            <a:avLst/>
+          </a:prstGeom>
+          <a:noFill/>
+        </p:spPr>
+        <p:txBody>
+          <a:bodyPr wrap="none" rtlCol="0">
+            <a:spAutoFit/>
+          </a:bodyPr>
+          <a:lstStyle/>
+          <a:p>
+            <a:pPr algn="ctr"/>
+            <a:r>
+              <a:rPr lang="fr-BE" sz="1400" dirty="0" smtClean="0"/>
+              <a:t>If no new socket open</a:t>
+            </a:r>
+          </a:p>
+          <a:p>
+            <a:pPr algn="ctr"/>
+            <a:r>
+              <a:rPr lang="fr-BE" sz="1400" dirty="0" smtClean="0"/>
+              <a:t>(no new response allow -&gt; close asap)</a:t>
+            </a:r>
+            <a:endParaRPr lang="en-GB" sz="1400" dirty="0"/>
+          </a:p>
+        </p:txBody>
+      </p:sp>
+      <p:sp>
+        <p:nvSpPr>
+          <p:cNvPr id="28" name="Bulle narrative : rectangle à coins arrondis 2">
+            <a:extLst>
+              <a:ext uri="{FF2B5EF4-FFF2-40B4-BE49-F238E27FC236}">
+                <a16:creationId xmlns:a16="http://schemas.microsoft.com/office/drawing/2014/main" xmlns="" id="{988D0EB4-947A-46B9-A29D-46DAE79C5B8E}"/>
+              </a:ext>
+            </a:extLst>
+          </p:cNvPr>
+          <p:cNvSpPr/>
+          <p:nvPr/>
+        </p:nvSpPr>
+        <p:spPr>
+          <a:xfrm>
+            <a:off x="4919504" y="2407249"/>
+            <a:ext cx="1361293" cy="369332"/>
+          </a:xfrm>
+          <a:prstGeom prst="wedgeRoundRectCallout">
+            <a:avLst/>
+          </a:prstGeom>
+          <a:ln>
+            <a:solidFill>
+              <a:schemeClr val="tx1"/>
+            </a:solidFill>
+          </a:ln>
+        </p:spPr>
+        <p:style>
+          <a:lnRef idx="2">
+            <a:schemeClr val="accent6"/>
+          </a:lnRef>
+          <a:fillRef idx="1">
+            <a:schemeClr val="lt1"/>
+          </a:fillRef>
+          <a:effectRef idx="0">
+            <a:schemeClr val="accent6"/>
+          </a:effectRef>
+          <a:fontRef idx="minor">
+            <a:schemeClr val="dk1"/>
+          </a:fontRef>
+        </p:style>
+        <p:txBody>
+          <a:bodyPr rtlCol="0" anchor="ctr"/>
+          <a:lstStyle/>
+          <a:p>
+            <a:pPr algn="ctr"/>
+            <a:r>
+              <a:rPr lang="fr-FR" sz="1200" dirty="0" smtClean="0"/>
+              <a:t>All stream closed</a:t>
+            </a:r>
+            <a:endParaRPr lang="en-GB" sz="1200" dirty="0"/>
+          </a:p>
+        </p:txBody>
+      </p:sp>
+      <p:sp>
+        <p:nvSpPr>
+          <p:cNvPr id="30" name="Ellipse 29">
+            <a:extLst>
+              <a:ext uri="{FF2B5EF4-FFF2-40B4-BE49-F238E27FC236}">
+                <a16:creationId xmlns:a16="http://schemas.microsoft.com/office/drawing/2014/main" xmlns="" id="{89FCD844-DF7E-40C9-9D11-022F7FE63189}"/>
+              </a:ext>
+            </a:extLst>
+          </p:cNvPr>
+          <p:cNvSpPr/>
+          <p:nvPr/>
+        </p:nvSpPr>
+        <p:spPr>
+          <a:xfrm>
+            <a:off x="4018404" y="344689"/>
+            <a:ext cx="1494693" cy="931985"/>
+          </a:xfrm>
+          <a:prstGeom prst="ellipse">
+            <a:avLst/>
+          </a:prstGeom>
+        </p:spPr>
+        <p:style>
+          <a:lnRef idx="2">
+            <a:schemeClr val="accent2">
+              <a:shade val="50000"/>
+            </a:schemeClr>
+          </a:lnRef>
+          <a:fillRef idx="1">
+            <a:schemeClr val="accent2"/>
+          </a:fillRef>
+          <a:effectRef idx="0">
+            <a:schemeClr val="accent2"/>
+          </a:effectRef>
+          <a:fontRef idx="minor">
+            <a:schemeClr val="lt1"/>
+          </a:fontRef>
+        </p:style>
+        <p:txBody>
+          <a:bodyPr rtlCol="0" anchor="ctr"/>
+          <a:lstStyle/>
+          <a:p>
+            <a:pPr algn="ctr"/>
+            <a:r>
+              <a:rPr lang="fr-BE" sz="1400" b="1" dirty="0" smtClean="0"/>
+              <a:t>Cancel</a:t>
+            </a:r>
+            <a:endParaRPr lang="en-GB" sz="1400" b="1" dirty="0"/>
+          </a:p>
+        </p:txBody>
+      </p:sp>
+      <p:cxnSp>
+        <p:nvCxnSpPr>
+          <p:cNvPr id="31" name="Connecteur droit avec flèche 30">
+            <a:extLst>
+              <a:ext uri="{FF2B5EF4-FFF2-40B4-BE49-F238E27FC236}">
+                <a16:creationId xmlns:a16="http://schemas.microsoft.com/office/drawing/2014/main" xmlns="" id="{6589CEFF-63AD-48E0-B8C2-2B9C42EE3BA1}"/>
+              </a:ext>
+            </a:extLst>
+          </p:cNvPr>
+          <p:cNvCxnSpPr>
+            <a:stCxn id="9" idx="0"/>
+            <a:endCxn id="30" idx="4"/>
+          </p:cNvCxnSpPr>
+          <p:nvPr/>
+        </p:nvCxnSpPr>
+        <p:spPr>
+          <a:xfrm flipH="1" flipV="1">
+            <a:off x="4765751" y="1276674"/>
+            <a:ext cx="1" cy="1623018"/>
+          </a:xfrm>
+          <a:prstGeom prst="straightConnector1">
+            <a:avLst/>
+          </a:prstGeom>
+          <a:ln w="28575">
+            <a:tailEnd type="triangle"/>
+          </a:ln>
+        </p:spPr>
+        <p:style>
+          <a:lnRef idx="1">
+            <a:schemeClr val="dk1"/>
+          </a:lnRef>
+          <a:fillRef idx="0">
+            <a:schemeClr val="dk1"/>
+          </a:fillRef>
+          <a:effectRef idx="0">
+            <a:schemeClr val="dk1"/>
+          </a:effectRef>
+          <a:fontRef idx="minor">
+            <a:schemeClr val="tx1"/>
+          </a:fontRef>
+        </p:style>
+      </p:cxnSp>
+      <p:sp>
+        <p:nvSpPr>
+          <p:cNvPr id="34" name="ZoneTexte 33">
+            <a:extLst>
+              <a:ext uri="{FF2B5EF4-FFF2-40B4-BE49-F238E27FC236}">
+                <a16:creationId xmlns:a16="http://schemas.microsoft.com/office/drawing/2014/main" xmlns="" id="{25D0CFDD-F8D9-4498-A666-F31BA473AEDD}"/>
+              </a:ext>
+            </a:extLst>
+          </p:cNvPr>
+          <p:cNvSpPr txBox="1"/>
+          <p:nvPr/>
+        </p:nvSpPr>
+        <p:spPr>
+          <a:xfrm>
+            <a:off x="10574495" y="640194"/>
+            <a:ext cx="1474056" cy="523220"/>
+          </a:xfrm>
+          <a:prstGeom prst="rect">
+            <a:avLst/>
+          </a:prstGeom>
+          <a:noFill/>
+        </p:spPr>
+        <p:txBody>
+          <a:bodyPr wrap="square">
+            <a:spAutoFit/>
+          </a:bodyPr>
+          <a:lstStyle/>
+          <a:p>
+            <a:r>
+              <a:rPr lang="en-GB" sz="2800" b="1" dirty="0" smtClean="0"/>
+              <a:t>TOREAD</a:t>
+            </a:r>
+            <a:endParaRPr lang="en-GB" sz="2800" b="1" dirty="0"/>
+          </a:p>
+        </p:txBody>
+      </p:sp>
+    </p:spTree>
+    <p:extLst>
+      <p:ext uri="{BB962C8B-B14F-4D97-AF65-F5344CB8AC3E}">
+        <p14:creationId xmlns:p14="http://schemas.microsoft.com/office/powerpoint/2010/main" val="354199904"/>
+      </p:ext>
+    </p:extLst>
+  </p:cSld>
+  <p:clrMapOvr>
+    <a:masterClrMapping/>
+  </p:clrMapOvr>
+</p:sld>
+</file>
+
+<file path=ppt/slides/slide9.xml><?xml version="1.0" encoding="utf-8"?>
+<p:sld xmlns:a="http://schemas.openxmlformats.org/drawingml/2006/main" xmlns:r="http://schemas.openxmlformats.org/officeDocument/2006/relationships" xmlns:p="http://schemas.openxmlformats.org/presentationml/2006/main">
+  <p:cSld>
+    <p:spTree>
+      <p:nvGrpSpPr>
+        <p:cNvPr id="1" name=""/>
+        <p:cNvGrpSpPr/>
+        <p:nvPr/>
+      </p:nvGrpSpPr>
+      <p:grpSpPr>
+        <a:xfrm>
+          <a:off x="0" y="0"/>
+          <a:ext cx="0" cy="0"/>
+          <a:chOff x="0" y="0"/>
+          <a:chExt cx="0" cy="0"/>
+        </a:xfrm>
+      </p:grpSpPr>
+      <p:sp>
+        <p:nvSpPr>
+          <p:cNvPr id="2" name="Titre 1"/>
+          <p:cNvSpPr>
+            <a:spLocks noGrp="1"/>
+          </p:cNvSpPr>
+          <p:nvPr>
+            <p:ph type="title"/>
+          </p:nvPr>
+        </p:nvSpPr>
+        <p:spPr>
+          <a:xfrm>
+            <a:off x="903514" y="2705554"/>
+            <a:ext cx="10515600" cy="1325563"/>
+          </a:xfrm>
+        </p:spPr>
+        <p:txBody>
+          <a:bodyPr/>
+          <a:lstStyle/>
+          <a:p>
+            <a:pPr algn="ctr"/>
+            <a:r>
+              <a:rPr lang="en-GB" b="1" dirty="0" smtClean="0"/>
+              <a:t>11.Error Handling</a:t>
+            </a:r>
+            <a:endParaRPr lang="fr-FR" b="1" dirty="0"/>
+          </a:p>
+        </p:txBody>
+      </p:sp>
+    </p:spTree>
+    <p:extLst>
+      <p:ext uri="{BB962C8B-B14F-4D97-AF65-F5344CB8AC3E}">
+        <p14:creationId xmlns:p14="http://schemas.microsoft.com/office/powerpoint/2010/main" val="1990766040"/>
       </p:ext>
     </p:extLst>
   </p:cSld>

--- a/rapport/schema.pptx
+++ b/rapport/schema.pptx
@@ -236,7 +236,7 @@
           <a:p>
             <a:fld id="{A3D9FBD5-0A08-42A7-A20A-3E938E2C13C1}" type="datetimeFigureOut">
               <a:rPr lang="en-GB" smtClean="0"/>
-              <a:t>08/10/2020</a:t>
+              <a:t>12/02/2021</a:t>
             </a:fld>
             <a:endParaRPr lang="en-GB" dirty="0"/>
           </a:p>
@@ -1231,43 +1231,43 @@
           <a:lstStyle/>
           <a:p>
             <a:r>
-              <a:rPr lang="en-US" dirty="0" smtClean="0"/>
+              <a:rPr lang="en-US" dirty="0"/>
               <a:t>   If the Destination Connection ID is zero length and the addressing</a:t>
             </a:r>
           </a:p>
           <a:p>
             <a:r>
-              <a:rPr lang="en-US" dirty="0" smtClean="0"/>
+              <a:rPr lang="en-US" dirty="0"/>
               <a:t>   information in the packet matches the addressing information the</a:t>
             </a:r>
           </a:p>
           <a:p>
             <a:r>
-              <a:rPr lang="en-US" dirty="0" smtClean="0"/>
+              <a:rPr lang="en-US" dirty="0"/>
               <a:t>   endpoint uses to identify a connection with a zero-length connection</a:t>
             </a:r>
           </a:p>
           <a:p>
             <a:r>
-              <a:rPr lang="en-US" dirty="0" smtClean="0"/>
+              <a:rPr lang="en-US" dirty="0"/>
               <a:t>   ID, QUIC processes the packet as part of that connection.  An</a:t>
             </a:r>
           </a:p>
           <a:p>
             <a:r>
-              <a:rPr lang="en-US" dirty="0" smtClean="0"/>
+              <a:rPr lang="en-US" dirty="0"/>
               <a:t>   endpoint can use just destination IP and port or both source and</a:t>
             </a:r>
           </a:p>
           <a:p>
             <a:r>
-              <a:rPr lang="en-US" dirty="0" smtClean="0"/>
+              <a:rPr lang="en-US" dirty="0"/>
               <a:t>   destination addresses for identification, though this makes</a:t>
             </a:r>
           </a:p>
           <a:p>
             <a:r>
-              <a:rPr lang="en-US" dirty="0" smtClean="0"/>
+              <a:rPr lang="en-US" dirty="0"/>
               <a:t>   connections fragile as described in Section 5.1.</a:t>
             </a:r>
             <a:endParaRPr lang="fr-FR" dirty="0"/>
@@ -1355,25 +1355,25 @@
           <a:lstStyle/>
           <a:p>
             <a:r>
-              <a:rPr lang="en-US" dirty="0" smtClean="0"/>
+              <a:rPr lang="en-US" dirty="0"/>
               <a:t>   Due to packet reordering or loss, a client might receive packets for</a:t>
             </a:r>
           </a:p>
           <a:p>
             <a:r>
-              <a:rPr lang="en-US" dirty="0" smtClean="0"/>
+              <a:rPr lang="en-US" dirty="0"/>
               <a:t>   a connection that are encrypted with a key it has not yet computed.</a:t>
             </a:r>
           </a:p>
           <a:p>
             <a:r>
-              <a:rPr lang="en-US" dirty="0" smtClean="0"/>
+              <a:rPr lang="en-US" dirty="0"/>
               <a:t>   The client MAY drop these packets, or MAY buffer them in anticipation</a:t>
             </a:r>
           </a:p>
           <a:p>
             <a:r>
-              <a:rPr lang="en-US" dirty="0" smtClean="0"/>
+              <a:rPr lang="en-US" dirty="0"/>
               <a:t>   of later packets that allow it to compute the key.</a:t>
             </a:r>
             <a:endParaRPr lang="fr-FR" dirty="0"/>
@@ -3873,7 +3873,7 @@
           <p:cNvPr id="2" name="Titre 1">
             <a:extLst>
               <a:ext uri="{FF2B5EF4-FFF2-40B4-BE49-F238E27FC236}">
-                <a16:creationId xmlns:a16="http://schemas.microsoft.com/office/drawing/2014/main" xmlns="" id="{99E3394D-DD88-4BFA-88A9-110D4ECA49E8}"/>
+                <a16:creationId xmlns:a16="http://schemas.microsoft.com/office/drawing/2014/main" id="{99E3394D-DD88-4BFA-88A9-110D4ECA49E8}"/>
               </a:ext>
             </a:extLst>
           </p:cNvPr>
@@ -3911,7 +3911,7 @@
           <p:cNvPr id="3" name="Sous-titre 2">
             <a:extLst>
               <a:ext uri="{FF2B5EF4-FFF2-40B4-BE49-F238E27FC236}">
-                <a16:creationId xmlns:a16="http://schemas.microsoft.com/office/drawing/2014/main" xmlns="" id="{166594DE-FD46-42BB-A276-9B76DA001F8F}"/>
+                <a16:creationId xmlns:a16="http://schemas.microsoft.com/office/drawing/2014/main" id="{166594DE-FD46-42BB-A276-9B76DA001F8F}"/>
               </a:ext>
             </a:extLst>
           </p:cNvPr>
@@ -3982,7 +3982,7 @@
           <p:cNvPr id="4" name="Espace réservé de la date 3">
             <a:extLst>
               <a:ext uri="{FF2B5EF4-FFF2-40B4-BE49-F238E27FC236}">
-                <a16:creationId xmlns:a16="http://schemas.microsoft.com/office/drawing/2014/main" xmlns="" id="{7ECB63B5-A7DD-4085-A1E9-6C31FD67553A}"/>
+                <a16:creationId xmlns:a16="http://schemas.microsoft.com/office/drawing/2014/main" id="{7ECB63B5-A7DD-4085-A1E9-6C31FD67553A}"/>
               </a:ext>
             </a:extLst>
           </p:cNvPr>
@@ -4000,7 +4000,7 @@
           <a:p>
             <a:fld id="{DCD882A2-DD72-4F80-A6AB-80BB922E5FBF}" type="datetimeFigureOut">
               <a:rPr lang="en-GB" smtClean="0"/>
-              <a:t>08/10/2020</a:t>
+              <a:t>12/02/2021</a:t>
             </a:fld>
             <a:endParaRPr lang="en-GB" dirty="0"/>
           </a:p>
@@ -4011,7 +4011,7 @@
           <p:cNvPr id="5" name="Espace réservé du pied de page 4">
             <a:extLst>
               <a:ext uri="{FF2B5EF4-FFF2-40B4-BE49-F238E27FC236}">
-                <a16:creationId xmlns:a16="http://schemas.microsoft.com/office/drawing/2014/main" xmlns="" id="{675EFB3A-A725-4EAF-935A-76DA0DF3B699}"/>
+                <a16:creationId xmlns:a16="http://schemas.microsoft.com/office/drawing/2014/main" id="{675EFB3A-A725-4EAF-935A-76DA0DF3B699}"/>
               </a:ext>
             </a:extLst>
           </p:cNvPr>
@@ -4036,7 +4036,7 @@
           <p:cNvPr id="6" name="Espace réservé du numéro de diapositive 5">
             <a:extLst>
               <a:ext uri="{FF2B5EF4-FFF2-40B4-BE49-F238E27FC236}">
-                <a16:creationId xmlns:a16="http://schemas.microsoft.com/office/drawing/2014/main" xmlns="" id="{28ECEA54-9A57-4837-B63D-2C59499C0CCE}"/>
+                <a16:creationId xmlns:a16="http://schemas.microsoft.com/office/drawing/2014/main" id="{28ECEA54-9A57-4837-B63D-2C59499C0CCE}"/>
               </a:ext>
             </a:extLst>
           </p:cNvPr>
@@ -4095,7 +4095,7 @@
           <p:cNvPr id="2" name="Titre 1">
             <a:extLst>
               <a:ext uri="{FF2B5EF4-FFF2-40B4-BE49-F238E27FC236}">
-                <a16:creationId xmlns:a16="http://schemas.microsoft.com/office/drawing/2014/main" xmlns="" id="{EC9BE05C-63A7-450A-9790-60BDC0DFEFD6}"/>
+                <a16:creationId xmlns:a16="http://schemas.microsoft.com/office/drawing/2014/main" id="{EC9BE05C-63A7-450A-9790-60BDC0DFEFD6}"/>
               </a:ext>
             </a:extLst>
           </p:cNvPr>
@@ -4124,7 +4124,7 @@
           <p:cNvPr id="3" name="Espace réservé du texte vertical 2">
             <a:extLst>
               <a:ext uri="{FF2B5EF4-FFF2-40B4-BE49-F238E27FC236}">
-                <a16:creationId xmlns:a16="http://schemas.microsoft.com/office/drawing/2014/main" xmlns="" id="{41AC279B-0CA7-44FD-864C-FA7475C3F0EC}"/>
+                <a16:creationId xmlns:a16="http://schemas.microsoft.com/office/drawing/2014/main" id="{41AC279B-0CA7-44FD-864C-FA7475C3F0EC}"/>
               </a:ext>
             </a:extLst>
           </p:cNvPr>
@@ -4182,7 +4182,7 @@
           <p:cNvPr id="4" name="Espace réservé de la date 3">
             <a:extLst>
               <a:ext uri="{FF2B5EF4-FFF2-40B4-BE49-F238E27FC236}">
-                <a16:creationId xmlns:a16="http://schemas.microsoft.com/office/drawing/2014/main" xmlns="" id="{4E6E87B2-E303-4D52-8466-2576624DC979}"/>
+                <a16:creationId xmlns:a16="http://schemas.microsoft.com/office/drawing/2014/main" id="{4E6E87B2-E303-4D52-8466-2576624DC979}"/>
               </a:ext>
             </a:extLst>
           </p:cNvPr>
@@ -4200,7 +4200,7 @@
           <a:p>
             <a:fld id="{DCD882A2-DD72-4F80-A6AB-80BB922E5FBF}" type="datetimeFigureOut">
               <a:rPr lang="en-GB" smtClean="0"/>
-              <a:t>08/10/2020</a:t>
+              <a:t>12/02/2021</a:t>
             </a:fld>
             <a:endParaRPr lang="en-GB" dirty="0"/>
           </a:p>
@@ -4211,7 +4211,7 @@
           <p:cNvPr id="5" name="Espace réservé du pied de page 4">
             <a:extLst>
               <a:ext uri="{FF2B5EF4-FFF2-40B4-BE49-F238E27FC236}">
-                <a16:creationId xmlns:a16="http://schemas.microsoft.com/office/drawing/2014/main" xmlns="" id="{891C475F-EE53-4824-A479-291E8BC94E74}"/>
+                <a16:creationId xmlns:a16="http://schemas.microsoft.com/office/drawing/2014/main" id="{891C475F-EE53-4824-A479-291E8BC94E74}"/>
               </a:ext>
             </a:extLst>
           </p:cNvPr>
@@ -4236,7 +4236,7 @@
           <p:cNvPr id="6" name="Espace réservé du numéro de diapositive 5">
             <a:extLst>
               <a:ext uri="{FF2B5EF4-FFF2-40B4-BE49-F238E27FC236}">
-                <a16:creationId xmlns:a16="http://schemas.microsoft.com/office/drawing/2014/main" xmlns="" id="{4F6DC346-0C49-4B9D-B739-8D8FF178BFDA}"/>
+                <a16:creationId xmlns:a16="http://schemas.microsoft.com/office/drawing/2014/main" id="{4F6DC346-0C49-4B9D-B739-8D8FF178BFDA}"/>
               </a:ext>
             </a:extLst>
           </p:cNvPr>
@@ -4295,7 +4295,7 @@
           <p:cNvPr id="2" name="Titre vertical 1">
             <a:extLst>
               <a:ext uri="{FF2B5EF4-FFF2-40B4-BE49-F238E27FC236}">
-                <a16:creationId xmlns:a16="http://schemas.microsoft.com/office/drawing/2014/main" xmlns="" id="{4FED3BAF-2376-4728-8BF7-8DB84B7B6246}"/>
+                <a16:creationId xmlns:a16="http://schemas.microsoft.com/office/drawing/2014/main" id="{4FED3BAF-2376-4728-8BF7-8DB84B7B6246}"/>
               </a:ext>
             </a:extLst>
           </p:cNvPr>
@@ -4329,7 +4329,7 @@
           <p:cNvPr id="3" name="Espace réservé du texte vertical 2">
             <a:extLst>
               <a:ext uri="{FF2B5EF4-FFF2-40B4-BE49-F238E27FC236}">
-                <a16:creationId xmlns:a16="http://schemas.microsoft.com/office/drawing/2014/main" xmlns="" id="{F833F1F4-97DD-42BA-94D0-2FE696EBCF91}"/>
+                <a16:creationId xmlns:a16="http://schemas.microsoft.com/office/drawing/2014/main" id="{F833F1F4-97DD-42BA-94D0-2FE696EBCF91}"/>
               </a:ext>
             </a:extLst>
           </p:cNvPr>
@@ -4392,7 +4392,7 @@
           <p:cNvPr id="4" name="Espace réservé de la date 3">
             <a:extLst>
               <a:ext uri="{FF2B5EF4-FFF2-40B4-BE49-F238E27FC236}">
-                <a16:creationId xmlns:a16="http://schemas.microsoft.com/office/drawing/2014/main" xmlns="" id="{741BC0C2-2BC4-4C2F-968C-F17D8EECBB12}"/>
+                <a16:creationId xmlns:a16="http://schemas.microsoft.com/office/drawing/2014/main" id="{741BC0C2-2BC4-4C2F-968C-F17D8EECBB12}"/>
               </a:ext>
             </a:extLst>
           </p:cNvPr>
@@ -4410,7 +4410,7 @@
           <a:p>
             <a:fld id="{DCD882A2-DD72-4F80-A6AB-80BB922E5FBF}" type="datetimeFigureOut">
               <a:rPr lang="en-GB" smtClean="0"/>
-              <a:t>08/10/2020</a:t>
+              <a:t>12/02/2021</a:t>
             </a:fld>
             <a:endParaRPr lang="en-GB" dirty="0"/>
           </a:p>
@@ -4421,7 +4421,7 @@
           <p:cNvPr id="5" name="Espace réservé du pied de page 4">
             <a:extLst>
               <a:ext uri="{FF2B5EF4-FFF2-40B4-BE49-F238E27FC236}">
-                <a16:creationId xmlns:a16="http://schemas.microsoft.com/office/drawing/2014/main" xmlns="" id="{695F807C-4C53-4110-BE4D-D4A1AE7CF371}"/>
+                <a16:creationId xmlns:a16="http://schemas.microsoft.com/office/drawing/2014/main" id="{695F807C-4C53-4110-BE4D-D4A1AE7CF371}"/>
               </a:ext>
             </a:extLst>
           </p:cNvPr>
@@ -4446,7 +4446,7 @@
           <p:cNvPr id="6" name="Espace réservé du numéro de diapositive 5">
             <a:extLst>
               <a:ext uri="{FF2B5EF4-FFF2-40B4-BE49-F238E27FC236}">
-                <a16:creationId xmlns:a16="http://schemas.microsoft.com/office/drawing/2014/main" xmlns="" id="{5864A6F6-59D9-45F3-B32F-CCEACB684C37}"/>
+                <a16:creationId xmlns:a16="http://schemas.microsoft.com/office/drawing/2014/main" id="{5864A6F6-59D9-45F3-B32F-CCEACB684C37}"/>
               </a:ext>
             </a:extLst>
           </p:cNvPr>
@@ -4505,7 +4505,7 @@
           <p:cNvPr id="2" name="Titre 1">
             <a:extLst>
               <a:ext uri="{FF2B5EF4-FFF2-40B4-BE49-F238E27FC236}">
-                <a16:creationId xmlns:a16="http://schemas.microsoft.com/office/drawing/2014/main" xmlns="" id="{4D3C2618-69F0-45B6-8F27-09B7A203ADB9}"/>
+                <a16:creationId xmlns:a16="http://schemas.microsoft.com/office/drawing/2014/main" id="{4D3C2618-69F0-45B6-8F27-09B7A203ADB9}"/>
               </a:ext>
             </a:extLst>
           </p:cNvPr>
@@ -4534,7 +4534,7 @@
           <p:cNvPr id="3" name="Espace réservé du contenu 2">
             <a:extLst>
               <a:ext uri="{FF2B5EF4-FFF2-40B4-BE49-F238E27FC236}">
-                <a16:creationId xmlns:a16="http://schemas.microsoft.com/office/drawing/2014/main" xmlns="" id="{A4389116-6456-4E0B-9420-C0810F85220A}"/>
+                <a16:creationId xmlns:a16="http://schemas.microsoft.com/office/drawing/2014/main" id="{A4389116-6456-4E0B-9420-C0810F85220A}"/>
               </a:ext>
             </a:extLst>
           </p:cNvPr>
@@ -4592,7 +4592,7 @@
           <p:cNvPr id="4" name="Espace réservé de la date 3">
             <a:extLst>
               <a:ext uri="{FF2B5EF4-FFF2-40B4-BE49-F238E27FC236}">
-                <a16:creationId xmlns:a16="http://schemas.microsoft.com/office/drawing/2014/main" xmlns="" id="{F2D34F74-D7AB-4A9A-AF48-19A3714569DA}"/>
+                <a16:creationId xmlns:a16="http://schemas.microsoft.com/office/drawing/2014/main" id="{F2D34F74-D7AB-4A9A-AF48-19A3714569DA}"/>
               </a:ext>
             </a:extLst>
           </p:cNvPr>
@@ -4610,7 +4610,7 @@
           <a:p>
             <a:fld id="{DCD882A2-DD72-4F80-A6AB-80BB922E5FBF}" type="datetimeFigureOut">
               <a:rPr lang="en-GB" smtClean="0"/>
-              <a:t>08/10/2020</a:t>
+              <a:t>12/02/2021</a:t>
             </a:fld>
             <a:endParaRPr lang="en-GB" dirty="0"/>
           </a:p>
@@ -4621,7 +4621,7 @@
           <p:cNvPr id="5" name="Espace réservé du pied de page 4">
             <a:extLst>
               <a:ext uri="{FF2B5EF4-FFF2-40B4-BE49-F238E27FC236}">
-                <a16:creationId xmlns:a16="http://schemas.microsoft.com/office/drawing/2014/main" xmlns="" id="{3E284FFD-493C-407D-86AE-FA2209DC52A5}"/>
+                <a16:creationId xmlns:a16="http://schemas.microsoft.com/office/drawing/2014/main" id="{3E284FFD-493C-407D-86AE-FA2209DC52A5}"/>
               </a:ext>
             </a:extLst>
           </p:cNvPr>
@@ -4646,7 +4646,7 @@
           <p:cNvPr id="6" name="Espace réservé du numéro de diapositive 5">
             <a:extLst>
               <a:ext uri="{FF2B5EF4-FFF2-40B4-BE49-F238E27FC236}">
-                <a16:creationId xmlns:a16="http://schemas.microsoft.com/office/drawing/2014/main" xmlns="" id="{7A9E5556-53BA-4B18-8B46-7C10511CC2E8}"/>
+                <a16:creationId xmlns:a16="http://schemas.microsoft.com/office/drawing/2014/main" id="{7A9E5556-53BA-4B18-8B46-7C10511CC2E8}"/>
               </a:ext>
             </a:extLst>
           </p:cNvPr>
@@ -4705,7 +4705,7 @@
           <p:cNvPr id="2" name="Titre 1">
             <a:extLst>
               <a:ext uri="{FF2B5EF4-FFF2-40B4-BE49-F238E27FC236}">
-                <a16:creationId xmlns:a16="http://schemas.microsoft.com/office/drawing/2014/main" xmlns="" id="{B84EDBC3-48EB-4660-A71A-81D826DE0D3D}"/>
+                <a16:creationId xmlns:a16="http://schemas.microsoft.com/office/drawing/2014/main" id="{B84EDBC3-48EB-4660-A71A-81D826DE0D3D}"/>
               </a:ext>
             </a:extLst>
           </p:cNvPr>
@@ -4743,7 +4743,7 @@
           <p:cNvPr id="3" name="Espace réservé du texte 2">
             <a:extLst>
               <a:ext uri="{FF2B5EF4-FFF2-40B4-BE49-F238E27FC236}">
-                <a16:creationId xmlns:a16="http://schemas.microsoft.com/office/drawing/2014/main" xmlns="" id="{4934F111-3E17-4DC3-B9F1-3B281A0E5F6C}"/>
+                <a16:creationId xmlns:a16="http://schemas.microsoft.com/office/drawing/2014/main" id="{4934F111-3E17-4DC3-B9F1-3B281A0E5F6C}"/>
               </a:ext>
             </a:extLst>
           </p:cNvPr>
@@ -4868,7 +4868,7 @@
           <p:cNvPr id="4" name="Espace réservé de la date 3">
             <a:extLst>
               <a:ext uri="{FF2B5EF4-FFF2-40B4-BE49-F238E27FC236}">
-                <a16:creationId xmlns:a16="http://schemas.microsoft.com/office/drawing/2014/main" xmlns="" id="{8E844854-D2DD-43B9-B16A-2BBD39D0F67E}"/>
+                <a16:creationId xmlns:a16="http://schemas.microsoft.com/office/drawing/2014/main" id="{8E844854-D2DD-43B9-B16A-2BBD39D0F67E}"/>
               </a:ext>
             </a:extLst>
           </p:cNvPr>
@@ -4886,7 +4886,7 @@
           <a:p>
             <a:fld id="{DCD882A2-DD72-4F80-A6AB-80BB922E5FBF}" type="datetimeFigureOut">
               <a:rPr lang="en-GB" smtClean="0"/>
-              <a:t>08/10/2020</a:t>
+              <a:t>12/02/2021</a:t>
             </a:fld>
             <a:endParaRPr lang="en-GB" dirty="0"/>
           </a:p>
@@ -4897,7 +4897,7 @@
           <p:cNvPr id="5" name="Espace réservé du pied de page 4">
             <a:extLst>
               <a:ext uri="{FF2B5EF4-FFF2-40B4-BE49-F238E27FC236}">
-                <a16:creationId xmlns:a16="http://schemas.microsoft.com/office/drawing/2014/main" xmlns="" id="{D4CDFE30-C34F-44C1-AC90-65461E8B02F2}"/>
+                <a16:creationId xmlns:a16="http://schemas.microsoft.com/office/drawing/2014/main" id="{D4CDFE30-C34F-44C1-AC90-65461E8B02F2}"/>
               </a:ext>
             </a:extLst>
           </p:cNvPr>
@@ -4922,7 +4922,7 @@
           <p:cNvPr id="6" name="Espace réservé du numéro de diapositive 5">
             <a:extLst>
               <a:ext uri="{FF2B5EF4-FFF2-40B4-BE49-F238E27FC236}">
-                <a16:creationId xmlns:a16="http://schemas.microsoft.com/office/drawing/2014/main" xmlns="" id="{F09F30A0-E658-47E1-80FF-A795B55F9246}"/>
+                <a16:creationId xmlns:a16="http://schemas.microsoft.com/office/drawing/2014/main" id="{F09F30A0-E658-47E1-80FF-A795B55F9246}"/>
               </a:ext>
             </a:extLst>
           </p:cNvPr>
@@ -4981,7 +4981,7 @@
           <p:cNvPr id="2" name="Titre 1">
             <a:extLst>
               <a:ext uri="{FF2B5EF4-FFF2-40B4-BE49-F238E27FC236}">
-                <a16:creationId xmlns:a16="http://schemas.microsoft.com/office/drawing/2014/main" xmlns="" id="{F89645C2-3497-4817-8503-09A09D3F39B3}"/>
+                <a16:creationId xmlns:a16="http://schemas.microsoft.com/office/drawing/2014/main" id="{F89645C2-3497-4817-8503-09A09D3F39B3}"/>
               </a:ext>
             </a:extLst>
           </p:cNvPr>
@@ -5010,7 +5010,7 @@
           <p:cNvPr id="3" name="Espace réservé du contenu 2">
             <a:extLst>
               <a:ext uri="{FF2B5EF4-FFF2-40B4-BE49-F238E27FC236}">
-                <a16:creationId xmlns:a16="http://schemas.microsoft.com/office/drawing/2014/main" xmlns="" id="{5B58AEBF-CC00-4EB3-992E-D4901B40AAA9}"/>
+                <a16:creationId xmlns:a16="http://schemas.microsoft.com/office/drawing/2014/main" id="{5B58AEBF-CC00-4EB3-992E-D4901B40AAA9}"/>
               </a:ext>
             </a:extLst>
           </p:cNvPr>
@@ -5073,7 +5073,7 @@
           <p:cNvPr id="4" name="Espace réservé du contenu 3">
             <a:extLst>
               <a:ext uri="{FF2B5EF4-FFF2-40B4-BE49-F238E27FC236}">
-                <a16:creationId xmlns:a16="http://schemas.microsoft.com/office/drawing/2014/main" xmlns="" id="{D1AC2563-9C02-4FF6-AC5E-BD3104993299}"/>
+                <a16:creationId xmlns:a16="http://schemas.microsoft.com/office/drawing/2014/main" id="{D1AC2563-9C02-4FF6-AC5E-BD3104993299}"/>
               </a:ext>
             </a:extLst>
           </p:cNvPr>
@@ -5136,7 +5136,7 @@
           <p:cNvPr id="5" name="Espace réservé de la date 4">
             <a:extLst>
               <a:ext uri="{FF2B5EF4-FFF2-40B4-BE49-F238E27FC236}">
-                <a16:creationId xmlns:a16="http://schemas.microsoft.com/office/drawing/2014/main" xmlns="" id="{2DB32CB1-6FDC-4E55-8597-5B55A0D0EA32}"/>
+                <a16:creationId xmlns:a16="http://schemas.microsoft.com/office/drawing/2014/main" id="{2DB32CB1-6FDC-4E55-8597-5B55A0D0EA32}"/>
               </a:ext>
             </a:extLst>
           </p:cNvPr>
@@ -5154,7 +5154,7 @@
           <a:p>
             <a:fld id="{DCD882A2-DD72-4F80-A6AB-80BB922E5FBF}" type="datetimeFigureOut">
               <a:rPr lang="en-GB" smtClean="0"/>
-              <a:t>08/10/2020</a:t>
+              <a:t>12/02/2021</a:t>
             </a:fld>
             <a:endParaRPr lang="en-GB" dirty="0"/>
           </a:p>
@@ -5165,7 +5165,7 @@
           <p:cNvPr id="6" name="Espace réservé du pied de page 5">
             <a:extLst>
               <a:ext uri="{FF2B5EF4-FFF2-40B4-BE49-F238E27FC236}">
-                <a16:creationId xmlns:a16="http://schemas.microsoft.com/office/drawing/2014/main" xmlns="" id="{5216C04C-C11B-4D45-914C-335847044F86}"/>
+                <a16:creationId xmlns:a16="http://schemas.microsoft.com/office/drawing/2014/main" id="{5216C04C-C11B-4D45-914C-335847044F86}"/>
               </a:ext>
             </a:extLst>
           </p:cNvPr>
@@ -5190,7 +5190,7 @@
           <p:cNvPr id="7" name="Espace réservé du numéro de diapositive 6">
             <a:extLst>
               <a:ext uri="{FF2B5EF4-FFF2-40B4-BE49-F238E27FC236}">
-                <a16:creationId xmlns:a16="http://schemas.microsoft.com/office/drawing/2014/main" xmlns="" id="{94D47916-5038-4CB3-9CB7-F8FC9F8AD21B}"/>
+                <a16:creationId xmlns:a16="http://schemas.microsoft.com/office/drawing/2014/main" id="{94D47916-5038-4CB3-9CB7-F8FC9F8AD21B}"/>
               </a:ext>
             </a:extLst>
           </p:cNvPr>
@@ -5249,7 +5249,7 @@
           <p:cNvPr id="2" name="Titre 1">
             <a:extLst>
               <a:ext uri="{FF2B5EF4-FFF2-40B4-BE49-F238E27FC236}">
-                <a16:creationId xmlns:a16="http://schemas.microsoft.com/office/drawing/2014/main" xmlns="" id="{EE6DE7CE-1804-438D-92F3-8ECCE7FC6791}"/>
+                <a16:creationId xmlns:a16="http://schemas.microsoft.com/office/drawing/2014/main" id="{EE6DE7CE-1804-438D-92F3-8ECCE7FC6791}"/>
               </a:ext>
             </a:extLst>
           </p:cNvPr>
@@ -5283,7 +5283,7 @@
           <p:cNvPr id="3" name="Espace réservé du texte 2">
             <a:extLst>
               <a:ext uri="{FF2B5EF4-FFF2-40B4-BE49-F238E27FC236}">
-                <a16:creationId xmlns:a16="http://schemas.microsoft.com/office/drawing/2014/main" xmlns="" id="{1AEAF901-B2E6-4EFB-8256-2024C9F725DE}"/>
+                <a16:creationId xmlns:a16="http://schemas.microsoft.com/office/drawing/2014/main" id="{1AEAF901-B2E6-4EFB-8256-2024C9F725DE}"/>
               </a:ext>
             </a:extLst>
           </p:cNvPr>
@@ -5354,7 +5354,7 @@
           <p:cNvPr id="4" name="Espace réservé du contenu 3">
             <a:extLst>
               <a:ext uri="{FF2B5EF4-FFF2-40B4-BE49-F238E27FC236}">
-                <a16:creationId xmlns:a16="http://schemas.microsoft.com/office/drawing/2014/main" xmlns="" id="{4E0906BE-0FD6-4C59-891F-485B80865AB7}"/>
+                <a16:creationId xmlns:a16="http://schemas.microsoft.com/office/drawing/2014/main" id="{4E0906BE-0FD6-4C59-891F-485B80865AB7}"/>
               </a:ext>
             </a:extLst>
           </p:cNvPr>
@@ -5417,7 +5417,7 @@
           <p:cNvPr id="5" name="Espace réservé du texte 4">
             <a:extLst>
               <a:ext uri="{FF2B5EF4-FFF2-40B4-BE49-F238E27FC236}">
-                <a16:creationId xmlns:a16="http://schemas.microsoft.com/office/drawing/2014/main" xmlns="" id="{E9510595-D718-4D18-A662-38248708A406}"/>
+                <a16:creationId xmlns:a16="http://schemas.microsoft.com/office/drawing/2014/main" id="{E9510595-D718-4D18-A662-38248708A406}"/>
               </a:ext>
             </a:extLst>
           </p:cNvPr>
@@ -5488,7 +5488,7 @@
           <p:cNvPr id="6" name="Espace réservé du contenu 5">
             <a:extLst>
               <a:ext uri="{FF2B5EF4-FFF2-40B4-BE49-F238E27FC236}">
-                <a16:creationId xmlns:a16="http://schemas.microsoft.com/office/drawing/2014/main" xmlns="" id="{943853A8-6FB0-4188-82AE-071C2836EA4C}"/>
+                <a16:creationId xmlns:a16="http://schemas.microsoft.com/office/drawing/2014/main" id="{943853A8-6FB0-4188-82AE-071C2836EA4C}"/>
               </a:ext>
             </a:extLst>
           </p:cNvPr>
@@ -5551,7 +5551,7 @@
           <p:cNvPr id="7" name="Espace réservé de la date 6">
             <a:extLst>
               <a:ext uri="{FF2B5EF4-FFF2-40B4-BE49-F238E27FC236}">
-                <a16:creationId xmlns:a16="http://schemas.microsoft.com/office/drawing/2014/main" xmlns="" id="{D6E2BD8B-D645-423A-A613-EF6AE8CA5401}"/>
+                <a16:creationId xmlns:a16="http://schemas.microsoft.com/office/drawing/2014/main" id="{D6E2BD8B-D645-423A-A613-EF6AE8CA5401}"/>
               </a:ext>
             </a:extLst>
           </p:cNvPr>
@@ -5569,7 +5569,7 @@
           <a:p>
             <a:fld id="{DCD882A2-DD72-4F80-A6AB-80BB922E5FBF}" type="datetimeFigureOut">
               <a:rPr lang="en-GB" smtClean="0"/>
-              <a:t>08/10/2020</a:t>
+              <a:t>12/02/2021</a:t>
             </a:fld>
             <a:endParaRPr lang="en-GB" dirty="0"/>
           </a:p>
@@ -5580,7 +5580,7 @@
           <p:cNvPr id="8" name="Espace réservé du pied de page 7">
             <a:extLst>
               <a:ext uri="{FF2B5EF4-FFF2-40B4-BE49-F238E27FC236}">
-                <a16:creationId xmlns:a16="http://schemas.microsoft.com/office/drawing/2014/main" xmlns="" id="{1930F11A-0202-4F0A-B8CC-13773D6E17F7}"/>
+                <a16:creationId xmlns:a16="http://schemas.microsoft.com/office/drawing/2014/main" id="{1930F11A-0202-4F0A-B8CC-13773D6E17F7}"/>
               </a:ext>
             </a:extLst>
           </p:cNvPr>
@@ -5605,7 +5605,7 @@
           <p:cNvPr id="9" name="Espace réservé du numéro de diapositive 8">
             <a:extLst>
               <a:ext uri="{FF2B5EF4-FFF2-40B4-BE49-F238E27FC236}">
-                <a16:creationId xmlns:a16="http://schemas.microsoft.com/office/drawing/2014/main" xmlns="" id="{C2EBFF67-0B6C-41CB-B69D-58B7A1FCEAD8}"/>
+                <a16:creationId xmlns:a16="http://schemas.microsoft.com/office/drawing/2014/main" id="{C2EBFF67-0B6C-41CB-B69D-58B7A1FCEAD8}"/>
               </a:ext>
             </a:extLst>
           </p:cNvPr>
@@ -5664,7 +5664,7 @@
           <p:cNvPr id="2" name="Titre 1">
             <a:extLst>
               <a:ext uri="{FF2B5EF4-FFF2-40B4-BE49-F238E27FC236}">
-                <a16:creationId xmlns:a16="http://schemas.microsoft.com/office/drawing/2014/main" xmlns="" id="{5E1B6B80-0F0A-4418-9FF7-988FF646AB5C}"/>
+                <a16:creationId xmlns:a16="http://schemas.microsoft.com/office/drawing/2014/main" id="{5E1B6B80-0F0A-4418-9FF7-988FF646AB5C}"/>
               </a:ext>
             </a:extLst>
           </p:cNvPr>
@@ -5693,7 +5693,7 @@
           <p:cNvPr id="3" name="Espace réservé de la date 2">
             <a:extLst>
               <a:ext uri="{FF2B5EF4-FFF2-40B4-BE49-F238E27FC236}">
-                <a16:creationId xmlns:a16="http://schemas.microsoft.com/office/drawing/2014/main" xmlns="" id="{7C0B3F64-9335-40BA-999F-C11D959399C4}"/>
+                <a16:creationId xmlns:a16="http://schemas.microsoft.com/office/drawing/2014/main" id="{7C0B3F64-9335-40BA-999F-C11D959399C4}"/>
               </a:ext>
             </a:extLst>
           </p:cNvPr>
@@ -5711,7 +5711,7 @@
           <a:p>
             <a:fld id="{DCD882A2-DD72-4F80-A6AB-80BB922E5FBF}" type="datetimeFigureOut">
               <a:rPr lang="en-GB" smtClean="0"/>
-              <a:t>08/10/2020</a:t>
+              <a:t>12/02/2021</a:t>
             </a:fld>
             <a:endParaRPr lang="en-GB" dirty="0"/>
           </a:p>
@@ -5722,7 +5722,7 @@
           <p:cNvPr id="4" name="Espace réservé du pied de page 3">
             <a:extLst>
               <a:ext uri="{FF2B5EF4-FFF2-40B4-BE49-F238E27FC236}">
-                <a16:creationId xmlns:a16="http://schemas.microsoft.com/office/drawing/2014/main" xmlns="" id="{A95AA07E-E44B-40C4-904A-6B2F9984E576}"/>
+                <a16:creationId xmlns:a16="http://schemas.microsoft.com/office/drawing/2014/main" id="{A95AA07E-E44B-40C4-904A-6B2F9984E576}"/>
               </a:ext>
             </a:extLst>
           </p:cNvPr>
@@ -5747,7 +5747,7 @@
           <p:cNvPr id="5" name="Espace réservé du numéro de diapositive 4">
             <a:extLst>
               <a:ext uri="{FF2B5EF4-FFF2-40B4-BE49-F238E27FC236}">
-                <a16:creationId xmlns:a16="http://schemas.microsoft.com/office/drawing/2014/main" xmlns="" id="{114E8655-3895-4A33-BB09-1138AD2BB1F3}"/>
+                <a16:creationId xmlns:a16="http://schemas.microsoft.com/office/drawing/2014/main" id="{114E8655-3895-4A33-BB09-1138AD2BB1F3}"/>
               </a:ext>
             </a:extLst>
           </p:cNvPr>
@@ -5806,7 +5806,7 @@
           <p:cNvPr id="2" name="Espace réservé de la date 1">
             <a:extLst>
               <a:ext uri="{FF2B5EF4-FFF2-40B4-BE49-F238E27FC236}">
-                <a16:creationId xmlns:a16="http://schemas.microsoft.com/office/drawing/2014/main" xmlns="" id="{DF25D4A0-12F0-439C-BD13-D69D2E90A80F}"/>
+                <a16:creationId xmlns:a16="http://schemas.microsoft.com/office/drawing/2014/main" id="{DF25D4A0-12F0-439C-BD13-D69D2E90A80F}"/>
               </a:ext>
             </a:extLst>
           </p:cNvPr>
@@ -5824,7 +5824,7 @@
           <a:p>
             <a:fld id="{DCD882A2-DD72-4F80-A6AB-80BB922E5FBF}" type="datetimeFigureOut">
               <a:rPr lang="en-GB" smtClean="0"/>
-              <a:t>08/10/2020</a:t>
+              <a:t>12/02/2021</a:t>
             </a:fld>
             <a:endParaRPr lang="en-GB" dirty="0"/>
           </a:p>
@@ -5835,7 +5835,7 @@
           <p:cNvPr id="3" name="Espace réservé du pied de page 2">
             <a:extLst>
               <a:ext uri="{FF2B5EF4-FFF2-40B4-BE49-F238E27FC236}">
-                <a16:creationId xmlns:a16="http://schemas.microsoft.com/office/drawing/2014/main" xmlns="" id="{9404ED9A-37C7-4CD4-8544-B3E56ABA6E47}"/>
+                <a16:creationId xmlns:a16="http://schemas.microsoft.com/office/drawing/2014/main" id="{9404ED9A-37C7-4CD4-8544-B3E56ABA6E47}"/>
               </a:ext>
             </a:extLst>
           </p:cNvPr>
@@ -5860,7 +5860,7 @@
           <p:cNvPr id="4" name="Espace réservé du numéro de diapositive 3">
             <a:extLst>
               <a:ext uri="{FF2B5EF4-FFF2-40B4-BE49-F238E27FC236}">
-                <a16:creationId xmlns:a16="http://schemas.microsoft.com/office/drawing/2014/main" xmlns="" id="{AD368354-4F02-410F-B452-5F8092422E99}"/>
+                <a16:creationId xmlns:a16="http://schemas.microsoft.com/office/drawing/2014/main" id="{AD368354-4F02-410F-B452-5F8092422E99}"/>
               </a:ext>
             </a:extLst>
           </p:cNvPr>
@@ -5919,7 +5919,7 @@
           <p:cNvPr id="2" name="Titre 1">
             <a:extLst>
               <a:ext uri="{FF2B5EF4-FFF2-40B4-BE49-F238E27FC236}">
-                <a16:creationId xmlns:a16="http://schemas.microsoft.com/office/drawing/2014/main" xmlns="" id="{532ADDE6-48F7-491B-9EEB-E0CFCFAE8804}"/>
+                <a16:creationId xmlns:a16="http://schemas.microsoft.com/office/drawing/2014/main" id="{532ADDE6-48F7-491B-9EEB-E0CFCFAE8804}"/>
               </a:ext>
             </a:extLst>
           </p:cNvPr>
@@ -5957,7 +5957,7 @@
           <p:cNvPr id="3" name="Espace réservé du contenu 2">
             <a:extLst>
               <a:ext uri="{FF2B5EF4-FFF2-40B4-BE49-F238E27FC236}">
-                <a16:creationId xmlns:a16="http://schemas.microsoft.com/office/drawing/2014/main" xmlns="" id="{9A0582AD-F3CF-4B1C-8D7E-1CF8DA070BFB}"/>
+                <a16:creationId xmlns:a16="http://schemas.microsoft.com/office/drawing/2014/main" id="{9A0582AD-F3CF-4B1C-8D7E-1CF8DA070BFB}"/>
               </a:ext>
             </a:extLst>
           </p:cNvPr>
@@ -6048,7 +6048,7 @@
           <p:cNvPr id="4" name="Espace réservé du texte 3">
             <a:extLst>
               <a:ext uri="{FF2B5EF4-FFF2-40B4-BE49-F238E27FC236}">
-                <a16:creationId xmlns:a16="http://schemas.microsoft.com/office/drawing/2014/main" xmlns="" id="{CDEE0241-53C0-45BA-98AE-B40355BC499C}"/>
+                <a16:creationId xmlns:a16="http://schemas.microsoft.com/office/drawing/2014/main" id="{CDEE0241-53C0-45BA-98AE-B40355BC499C}"/>
               </a:ext>
             </a:extLst>
           </p:cNvPr>
@@ -6119,7 +6119,7 @@
           <p:cNvPr id="5" name="Espace réservé de la date 4">
             <a:extLst>
               <a:ext uri="{FF2B5EF4-FFF2-40B4-BE49-F238E27FC236}">
-                <a16:creationId xmlns:a16="http://schemas.microsoft.com/office/drawing/2014/main" xmlns="" id="{60609A82-974A-41D7-B24F-74B984890798}"/>
+                <a16:creationId xmlns:a16="http://schemas.microsoft.com/office/drawing/2014/main" id="{60609A82-974A-41D7-B24F-74B984890798}"/>
               </a:ext>
             </a:extLst>
           </p:cNvPr>
@@ -6137,7 +6137,7 @@
           <a:p>
             <a:fld id="{DCD882A2-DD72-4F80-A6AB-80BB922E5FBF}" type="datetimeFigureOut">
               <a:rPr lang="en-GB" smtClean="0"/>
-              <a:t>08/10/2020</a:t>
+              <a:t>12/02/2021</a:t>
             </a:fld>
             <a:endParaRPr lang="en-GB" dirty="0"/>
           </a:p>
@@ -6148,7 +6148,7 @@
           <p:cNvPr id="6" name="Espace réservé du pied de page 5">
             <a:extLst>
               <a:ext uri="{FF2B5EF4-FFF2-40B4-BE49-F238E27FC236}">
-                <a16:creationId xmlns:a16="http://schemas.microsoft.com/office/drawing/2014/main" xmlns="" id="{C970C28E-E1A0-45E4-93B9-216045297614}"/>
+                <a16:creationId xmlns:a16="http://schemas.microsoft.com/office/drawing/2014/main" id="{C970C28E-E1A0-45E4-93B9-216045297614}"/>
               </a:ext>
             </a:extLst>
           </p:cNvPr>
@@ -6173,7 +6173,7 @@
           <p:cNvPr id="7" name="Espace réservé du numéro de diapositive 6">
             <a:extLst>
               <a:ext uri="{FF2B5EF4-FFF2-40B4-BE49-F238E27FC236}">
-                <a16:creationId xmlns:a16="http://schemas.microsoft.com/office/drawing/2014/main" xmlns="" id="{498D67BA-5A09-432C-B808-23937F9ADC96}"/>
+                <a16:creationId xmlns:a16="http://schemas.microsoft.com/office/drawing/2014/main" id="{498D67BA-5A09-432C-B808-23937F9ADC96}"/>
               </a:ext>
             </a:extLst>
           </p:cNvPr>
@@ -6232,7 +6232,7 @@
           <p:cNvPr id="2" name="Titre 1">
             <a:extLst>
               <a:ext uri="{FF2B5EF4-FFF2-40B4-BE49-F238E27FC236}">
-                <a16:creationId xmlns:a16="http://schemas.microsoft.com/office/drawing/2014/main" xmlns="" id="{F2E0DACD-13BC-43FB-B1E0-B22645BDEBCE}"/>
+                <a16:creationId xmlns:a16="http://schemas.microsoft.com/office/drawing/2014/main" id="{F2E0DACD-13BC-43FB-B1E0-B22645BDEBCE}"/>
               </a:ext>
             </a:extLst>
           </p:cNvPr>
@@ -6270,7 +6270,7 @@
           <p:cNvPr id="3" name="Espace réservé pour une image  2">
             <a:extLst>
               <a:ext uri="{FF2B5EF4-FFF2-40B4-BE49-F238E27FC236}">
-                <a16:creationId xmlns:a16="http://schemas.microsoft.com/office/drawing/2014/main" xmlns="" id="{276D1F07-F43D-4E32-B947-4A4A6081DBFC}"/>
+                <a16:creationId xmlns:a16="http://schemas.microsoft.com/office/drawing/2014/main" id="{276D1F07-F43D-4E32-B947-4A4A6081DBFC}"/>
               </a:ext>
             </a:extLst>
           </p:cNvPr>
@@ -6337,7 +6337,7 @@
           <p:cNvPr id="4" name="Espace réservé du texte 3">
             <a:extLst>
               <a:ext uri="{FF2B5EF4-FFF2-40B4-BE49-F238E27FC236}">
-                <a16:creationId xmlns:a16="http://schemas.microsoft.com/office/drawing/2014/main" xmlns="" id="{9F8B9218-AB50-4D9F-B54E-C81D4450DDC3}"/>
+                <a16:creationId xmlns:a16="http://schemas.microsoft.com/office/drawing/2014/main" id="{9F8B9218-AB50-4D9F-B54E-C81D4450DDC3}"/>
               </a:ext>
             </a:extLst>
           </p:cNvPr>
@@ -6408,7 +6408,7 @@
           <p:cNvPr id="5" name="Espace réservé de la date 4">
             <a:extLst>
               <a:ext uri="{FF2B5EF4-FFF2-40B4-BE49-F238E27FC236}">
-                <a16:creationId xmlns:a16="http://schemas.microsoft.com/office/drawing/2014/main" xmlns="" id="{EC003829-24ED-4921-8854-A1DF8D768939}"/>
+                <a16:creationId xmlns:a16="http://schemas.microsoft.com/office/drawing/2014/main" id="{EC003829-24ED-4921-8854-A1DF8D768939}"/>
               </a:ext>
             </a:extLst>
           </p:cNvPr>
@@ -6426,7 +6426,7 @@
           <a:p>
             <a:fld id="{DCD882A2-DD72-4F80-A6AB-80BB922E5FBF}" type="datetimeFigureOut">
               <a:rPr lang="en-GB" smtClean="0"/>
-              <a:t>08/10/2020</a:t>
+              <a:t>12/02/2021</a:t>
             </a:fld>
             <a:endParaRPr lang="en-GB" dirty="0"/>
           </a:p>
@@ -6437,7 +6437,7 @@
           <p:cNvPr id="6" name="Espace réservé du pied de page 5">
             <a:extLst>
               <a:ext uri="{FF2B5EF4-FFF2-40B4-BE49-F238E27FC236}">
-                <a16:creationId xmlns:a16="http://schemas.microsoft.com/office/drawing/2014/main" xmlns="" id="{42928E3D-0B44-4C6A-99D0-CCCFF8FD2CE0}"/>
+                <a16:creationId xmlns:a16="http://schemas.microsoft.com/office/drawing/2014/main" id="{42928E3D-0B44-4C6A-99D0-CCCFF8FD2CE0}"/>
               </a:ext>
             </a:extLst>
           </p:cNvPr>
@@ -6462,7 +6462,7 @@
           <p:cNvPr id="7" name="Espace réservé du numéro de diapositive 6">
             <a:extLst>
               <a:ext uri="{FF2B5EF4-FFF2-40B4-BE49-F238E27FC236}">
-                <a16:creationId xmlns:a16="http://schemas.microsoft.com/office/drawing/2014/main" xmlns="" id="{3885E1CC-B383-4D7C-A565-8AD5768FC15A}"/>
+                <a16:creationId xmlns:a16="http://schemas.microsoft.com/office/drawing/2014/main" id="{3885E1CC-B383-4D7C-A565-8AD5768FC15A}"/>
               </a:ext>
             </a:extLst>
           </p:cNvPr>
@@ -6526,7 +6526,7 @@
           <p:cNvPr id="2" name="Espace réservé du titre 1">
             <a:extLst>
               <a:ext uri="{FF2B5EF4-FFF2-40B4-BE49-F238E27FC236}">
-                <a16:creationId xmlns:a16="http://schemas.microsoft.com/office/drawing/2014/main" xmlns="" id="{A649896A-D181-4C6A-A102-64120B1C840B}"/>
+                <a16:creationId xmlns:a16="http://schemas.microsoft.com/office/drawing/2014/main" id="{A649896A-D181-4C6A-A102-64120B1C840B}"/>
               </a:ext>
             </a:extLst>
           </p:cNvPr>
@@ -6565,7 +6565,7 @@
           <p:cNvPr id="3" name="Espace réservé du texte 2">
             <a:extLst>
               <a:ext uri="{FF2B5EF4-FFF2-40B4-BE49-F238E27FC236}">
-                <a16:creationId xmlns:a16="http://schemas.microsoft.com/office/drawing/2014/main" xmlns="" id="{18F8B4BF-987C-4DD9-90CE-D41F362065DC}"/>
+                <a16:creationId xmlns:a16="http://schemas.microsoft.com/office/drawing/2014/main" id="{18F8B4BF-987C-4DD9-90CE-D41F362065DC}"/>
               </a:ext>
             </a:extLst>
           </p:cNvPr>
@@ -6633,7 +6633,7 @@
           <p:cNvPr id="4" name="Espace réservé de la date 3">
             <a:extLst>
               <a:ext uri="{FF2B5EF4-FFF2-40B4-BE49-F238E27FC236}">
-                <a16:creationId xmlns:a16="http://schemas.microsoft.com/office/drawing/2014/main" xmlns="" id="{4B565221-4CE7-4A22-8435-CC6E9B131A88}"/>
+                <a16:creationId xmlns:a16="http://schemas.microsoft.com/office/drawing/2014/main" id="{4B565221-4CE7-4A22-8435-CC6E9B131A88}"/>
               </a:ext>
             </a:extLst>
           </p:cNvPr>
@@ -6669,7 +6669,7 @@
           <a:p>
             <a:fld id="{DCD882A2-DD72-4F80-A6AB-80BB922E5FBF}" type="datetimeFigureOut">
               <a:rPr lang="en-GB" smtClean="0"/>
-              <a:t>08/10/2020</a:t>
+              <a:t>12/02/2021</a:t>
             </a:fld>
             <a:endParaRPr lang="en-GB" dirty="0"/>
           </a:p>
@@ -6680,7 +6680,7 @@
           <p:cNvPr id="5" name="Espace réservé du pied de page 4">
             <a:extLst>
               <a:ext uri="{FF2B5EF4-FFF2-40B4-BE49-F238E27FC236}">
-                <a16:creationId xmlns:a16="http://schemas.microsoft.com/office/drawing/2014/main" xmlns="" id="{64618333-3851-4F4F-9D0A-6C6A85B7986F}"/>
+                <a16:creationId xmlns:a16="http://schemas.microsoft.com/office/drawing/2014/main" id="{64618333-3851-4F4F-9D0A-6C6A85B7986F}"/>
               </a:ext>
             </a:extLst>
           </p:cNvPr>
@@ -6723,7 +6723,7 @@
           <p:cNvPr id="6" name="Espace réservé du numéro de diapositive 5">
             <a:extLst>
               <a:ext uri="{FF2B5EF4-FFF2-40B4-BE49-F238E27FC236}">
-                <a16:creationId xmlns:a16="http://schemas.microsoft.com/office/drawing/2014/main" xmlns="" id="{7FB9699C-0E80-426A-A06E-7B1FF7B08558}"/>
+                <a16:creationId xmlns:a16="http://schemas.microsoft.com/office/drawing/2014/main" id="{7FB9699C-0E80-426A-A06E-7B1FF7B08558}"/>
               </a:ext>
             </a:extLst>
           </p:cNvPr>
@@ -7207,7 +7207,7 @@
           <p:cNvPr id="5" name="ZoneTexte 4">
             <a:extLst>
               <a:ext uri="{FF2B5EF4-FFF2-40B4-BE49-F238E27FC236}">
-                <a16:creationId xmlns:a16="http://schemas.microsoft.com/office/drawing/2014/main" xmlns="" id="{25D0CFDD-F8D9-4498-A666-F31BA473AEDD}"/>
+                <a16:creationId xmlns:a16="http://schemas.microsoft.com/office/drawing/2014/main" id="{25D0CFDD-F8D9-4498-A666-F31BA473AEDD}"/>
               </a:ext>
             </a:extLst>
           </p:cNvPr>
@@ -7242,7 +7242,7 @@
           <p:cNvPr id="33" name="Ellipse 32">
             <a:extLst>
               <a:ext uri="{FF2B5EF4-FFF2-40B4-BE49-F238E27FC236}">
-                <a16:creationId xmlns:a16="http://schemas.microsoft.com/office/drawing/2014/main" xmlns="" id="{89FCD844-DF7E-40C9-9D11-022F7FE63189}"/>
+                <a16:creationId xmlns:a16="http://schemas.microsoft.com/office/drawing/2014/main" id="{89FCD844-DF7E-40C9-9D11-022F7FE63189}"/>
               </a:ext>
             </a:extLst>
           </p:cNvPr>
@@ -7292,7 +7292,7 @@
           <p:cNvPr id="13" name="Connecteur droit avec flèche 12">
             <a:extLst>
               <a:ext uri="{FF2B5EF4-FFF2-40B4-BE49-F238E27FC236}">
-                <a16:creationId xmlns:a16="http://schemas.microsoft.com/office/drawing/2014/main" xmlns="" id="{6589CEFF-63AD-48E0-B8C2-2B9C42EE3BA1}"/>
+                <a16:creationId xmlns:a16="http://schemas.microsoft.com/office/drawing/2014/main" id="{6589CEFF-63AD-48E0-B8C2-2B9C42EE3BA1}"/>
               </a:ext>
             </a:extLst>
           </p:cNvPr>
@@ -7335,7 +7335,7 @@
           <p:cNvPr id="3" name="Ellipse 2">
             <a:extLst>
               <a:ext uri="{FF2B5EF4-FFF2-40B4-BE49-F238E27FC236}">
-                <a16:creationId xmlns:a16="http://schemas.microsoft.com/office/drawing/2014/main" xmlns="" id="{B48A28A4-F86C-489F-903E-CDB2F959EE1D}"/>
+                <a16:creationId xmlns:a16="http://schemas.microsoft.com/office/drawing/2014/main" id="{B48A28A4-F86C-489F-903E-CDB2F959EE1D}"/>
               </a:ext>
             </a:extLst>
           </p:cNvPr>
@@ -7385,7 +7385,7 @@
           <p:cNvPr id="8" name="Ellipse 7">
             <a:extLst>
               <a:ext uri="{FF2B5EF4-FFF2-40B4-BE49-F238E27FC236}">
-                <a16:creationId xmlns:a16="http://schemas.microsoft.com/office/drawing/2014/main" xmlns="" id="{846DBD23-0D29-4818-BD2D-A829F9FB2E58}"/>
+                <a16:creationId xmlns:a16="http://schemas.microsoft.com/office/drawing/2014/main" id="{846DBD23-0D29-4818-BD2D-A829F9FB2E58}"/>
               </a:ext>
             </a:extLst>
           </p:cNvPr>
@@ -7440,7 +7440,7 @@
           <p:cNvPr id="9" name="Connecteur droit avec flèche 8">
             <a:extLst>
               <a:ext uri="{FF2B5EF4-FFF2-40B4-BE49-F238E27FC236}">
-                <a16:creationId xmlns:a16="http://schemas.microsoft.com/office/drawing/2014/main" xmlns="" id="{A2709DEB-B9CB-48C6-9EEF-FAA9D59FAF00}"/>
+                <a16:creationId xmlns:a16="http://schemas.microsoft.com/office/drawing/2014/main" id="{A2709DEB-B9CB-48C6-9EEF-FAA9D59FAF00}"/>
               </a:ext>
             </a:extLst>
           </p:cNvPr>
@@ -7483,7 +7483,7 @@
           <p:cNvPr id="12" name="Ellipse 11">
             <a:extLst>
               <a:ext uri="{FF2B5EF4-FFF2-40B4-BE49-F238E27FC236}">
-                <a16:creationId xmlns:a16="http://schemas.microsoft.com/office/drawing/2014/main" xmlns="" id="{06F5DA17-42FC-4E88-9C45-EFD71A5EC87C}"/>
+                <a16:creationId xmlns:a16="http://schemas.microsoft.com/office/drawing/2014/main" id="{06F5DA17-42FC-4E88-9C45-EFD71A5EC87C}"/>
               </a:ext>
             </a:extLst>
           </p:cNvPr>
@@ -7533,7 +7533,7 @@
           <p:cNvPr id="17" name="Connecteur droit avec flèche 16">
             <a:extLst>
               <a:ext uri="{FF2B5EF4-FFF2-40B4-BE49-F238E27FC236}">
-                <a16:creationId xmlns:a16="http://schemas.microsoft.com/office/drawing/2014/main" xmlns="" id="{AA128350-1876-4C83-A0B1-01CCB7395F5A}"/>
+                <a16:creationId xmlns:a16="http://schemas.microsoft.com/office/drawing/2014/main" id="{AA128350-1876-4C83-A0B1-01CCB7395F5A}"/>
               </a:ext>
             </a:extLst>
           </p:cNvPr>
@@ -7576,7 +7576,7 @@
           <p:cNvPr id="24" name="ZoneTexte 23">
             <a:extLst>
               <a:ext uri="{FF2B5EF4-FFF2-40B4-BE49-F238E27FC236}">
-                <a16:creationId xmlns:a16="http://schemas.microsoft.com/office/drawing/2014/main" xmlns="" id="{DB2E3F2D-AC27-4D1A-AD28-4953753F6DC0}"/>
+                <a16:creationId xmlns:a16="http://schemas.microsoft.com/office/drawing/2014/main" id="{DB2E3F2D-AC27-4D1A-AD28-4953753F6DC0}"/>
               </a:ext>
             </a:extLst>
           </p:cNvPr>
@@ -7612,7 +7612,7 @@
           <p:cNvPr id="23" name="ZoneTexte 22">
             <a:extLst>
               <a:ext uri="{FF2B5EF4-FFF2-40B4-BE49-F238E27FC236}">
-                <a16:creationId xmlns:a16="http://schemas.microsoft.com/office/drawing/2014/main" xmlns="" id="{543AAAB8-788A-4F93-9C58-51E05382397B}"/>
+                <a16:creationId xmlns:a16="http://schemas.microsoft.com/office/drawing/2014/main" id="{543AAAB8-788A-4F93-9C58-51E05382397B}"/>
               </a:ext>
             </a:extLst>
           </p:cNvPr>
@@ -7655,7 +7655,7 @@
           <p:cNvPr id="28" name="ZoneTexte 27">
             <a:extLst>
               <a:ext uri="{FF2B5EF4-FFF2-40B4-BE49-F238E27FC236}">
-                <a16:creationId xmlns:a16="http://schemas.microsoft.com/office/drawing/2014/main" xmlns="" id="{9270B360-042D-48E9-B3A3-33EBCA6A28F4}"/>
+                <a16:creationId xmlns:a16="http://schemas.microsoft.com/office/drawing/2014/main" id="{9270B360-042D-48E9-B3A3-33EBCA6A28F4}"/>
               </a:ext>
             </a:extLst>
           </p:cNvPr>
@@ -7699,7 +7699,7 @@
           <p:cNvPr id="29" name="ZoneTexte 28">
             <a:extLst>
               <a:ext uri="{FF2B5EF4-FFF2-40B4-BE49-F238E27FC236}">
-                <a16:creationId xmlns:a16="http://schemas.microsoft.com/office/drawing/2014/main" xmlns="" id="{FAE7CBA8-3E2A-405A-BA2F-FDCF1AFF56A3}"/>
+                <a16:creationId xmlns:a16="http://schemas.microsoft.com/office/drawing/2014/main" id="{FAE7CBA8-3E2A-405A-BA2F-FDCF1AFF56A3}"/>
               </a:ext>
             </a:extLst>
           </p:cNvPr>
@@ -7735,7 +7735,7 @@
           <p:cNvPr id="31" name="Ellipse 30">
             <a:extLst>
               <a:ext uri="{FF2B5EF4-FFF2-40B4-BE49-F238E27FC236}">
-                <a16:creationId xmlns:a16="http://schemas.microsoft.com/office/drawing/2014/main" xmlns="" id="{BF52D8D0-4463-4D74-BAAE-A05DB2B34DAC}"/>
+                <a16:creationId xmlns:a16="http://schemas.microsoft.com/office/drawing/2014/main" id="{BF52D8D0-4463-4D74-BAAE-A05DB2B34DAC}"/>
               </a:ext>
             </a:extLst>
           </p:cNvPr>
@@ -7788,7 +7788,7 @@
           <p:cNvPr id="34" name="Connecteur droit avec flèche 33">
             <a:extLst>
               <a:ext uri="{FF2B5EF4-FFF2-40B4-BE49-F238E27FC236}">
-                <a16:creationId xmlns:a16="http://schemas.microsoft.com/office/drawing/2014/main" xmlns="" id="{AB6CF123-D473-45DD-9321-73C9635AC870}"/>
+                <a16:creationId xmlns:a16="http://schemas.microsoft.com/office/drawing/2014/main" id="{AB6CF123-D473-45DD-9321-73C9635AC870}"/>
               </a:ext>
             </a:extLst>
           </p:cNvPr>
@@ -7831,7 +7831,7 @@
           <p:cNvPr id="37" name="Connecteur droit avec flèche 36">
             <a:extLst>
               <a:ext uri="{FF2B5EF4-FFF2-40B4-BE49-F238E27FC236}">
-                <a16:creationId xmlns:a16="http://schemas.microsoft.com/office/drawing/2014/main" xmlns="" id="{60DC2FE3-6C6D-41EA-AF68-0B82CDDE788D}"/>
+                <a16:creationId xmlns:a16="http://schemas.microsoft.com/office/drawing/2014/main" id="{60DC2FE3-6C6D-41EA-AF68-0B82CDDE788D}"/>
               </a:ext>
             </a:extLst>
           </p:cNvPr>
@@ -7874,7 +7874,7 @@
           <p:cNvPr id="41" name="Ellipse 40">
             <a:extLst>
               <a:ext uri="{FF2B5EF4-FFF2-40B4-BE49-F238E27FC236}">
-                <a16:creationId xmlns:a16="http://schemas.microsoft.com/office/drawing/2014/main" xmlns="" id="{26787E28-7C6E-43F9-AEC4-2A4A28A2A009}"/>
+                <a16:creationId xmlns:a16="http://schemas.microsoft.com/office/drawing/2014/main" id="{26787E28-7C6E-43F9-AEC4-2A4A28A2A009}"/>
               </a:ext>
             </a:extLst>
           </p:cNvPr>
@@ -7929,7 +7929,7 @@
           <p:cNvPr id="43" name="ZoneTexte 42">
             <a:extLst>
               <a:ext uri="{FF2B5EF4-FFF2-40B4-BE49-F238E27FC236}">
-                <a16:creationId xmlns:a16="http://schemas.microsoft.com/office/drawing/2014/main" xmlns="" id="{03A04337-3EB1-40BE-96D6-83498BC7FCFE}"/>
+                <a16:creationId xmlns:a16="http://schemas.microsoft.com/office/drawing/2014/main" id="{03A04337-3EB1-40BE-96D6-83498BC7FCFE}"/>
               </a:ext>
             </a:extLst>
           </p:cNvPr>
@@ -7984,7 +7984,7 @@
           <p:cNvPr id="44" name="Connecteur droit avec flèche 43">
             <a:extLst>
               <a:ext uri="{FF2B5EF4-FFF2-40B4-BE49-F238E27FC236}">
-                <a16:creationId xmlns:a16="http://schemas.microsoft.com/office/drawing/2014/main" xmlns="" id="{17ED360D-D50C-4C0D-A160-B308B82DCEDD}"/>
+                <a16:creationId xmlns:a16="http://schemas.microsoft.com/office/drawing/2014/main" id="{17ED360D-D50C-4C0D-A160-B308B82DCEDD}"/>
               </a:ext>
             </a:extLst>
           </p:cNvPr>
@@ -8025,7 +8025,7 @@
           <p:cNvPr id="47" name="Ellipse 46">
             <a:extLst>
               <a:ext uri="{FF2B5EF4-FFF2-40B4-BE49-F238E27FC236}">
-                <a16:creationId xmlns:a16="http://schemas.microsoft.com/office/drawing/2014/main" xmlns="" id="{663ADA86-9B30-4980-AC62-3FE809086F2A}"/>
+                <a16:creationId xmlns:a16="http://schemas.microsoft.com/office/drawing/2014/main" id="{663ADA86-9B30-4980-AC62-3FE809086F2A}"/>
               </a:ext>
             </a:extLst>
           </p:cNvPr>
@@ -8075,7 +8075,7 @@
           <p:cNvPr id="48" name="Connecteur droit avec flèche 47">
             <a:extLst>
               <a:ext uri="{FF2B5EF4-FFF2-40B4-BE49-F238E27FC236}">
-                <a16:creationId xmlns:a16="http://schemas.microsoft.com/office/drawing/2014/main" xmlns="" id="{8090A4DA-5513-4BC5-9E01-E2DA1903B4DF}"/>
+                <a16:creationId xmlns:a16="http://schemas.microsoft.com/office/drawing/2014/main" id="{8090A4DA-5513-4BC5-9E01-E2DA1903B4DF}"/>
               </a:ext>
             </a:extLst>
           </p:cNvPr>
@@ -8118,7 +8118,7 @@
           <p:cNvPr id="52" name="ZoneTexte 51">
             <a:extLst>
               <a:ext uri="{FF2B5EF4-FFF2-40B4-BE49-F238E27FC236}">
-                <a16:creationId xmlns:a16="http://schemas.microsoft.com/office/drawing/2014/main" xmlns="" id="{6F804082-2EFB-410C-A9AB-C60E60D53043}"/>
+                <a16:creationId xmlns:a16="http://schemas.microsoft.com/office/drawing/2014/main" id="{6F804082-2EFB-410C-A9AB-C60E60D53043}"/>
               </a:ext>
             </a:extLst>
           </p:cNvPr>
@@ -8153,7 +8153,7 @@
           <p:cNvPr id="54" name="Ellipse 53">
             <a:extLst>
               <a:ext uri="{FF2B5EF4-FFF2-40B4-BE49-F238E27FC236}">
-                <a16:creationId xmlns:a16="http://schemas.microsoft.com/office/drawing/2014/main" xmlns="" id="{F5FDDE37-3FB0-4E06-9F9C-353A048BBD9B}"/>
+                <a16:creationId xmlns:a16="http://schemas.microsoft.com/office/drawing/2014/main" id="{F5FDDE37-3FB0-4E06-9F9C-353A048BBD9B}"/>
               </a:ext>
             </a:extLst>
           </p:cNvPr>
@@ -8208,7 +8208,7 @@
           <p:cNvPr id="55" name="Connecteur droit avec flèche 54">
             <a:extLst>
               <a:ext uri="{FF2B5EF4-FFF2-40B4-BE49-F238E27FC236}">
-                <a16:creationId xmlns:a16="http://schemas.microsoft.com/office/drawing/2014/main" xmlns="" id="{998504CA-25A9-41FB-A97F-386A6A7C2091}"/>
+                <a16:creationId xmlns:a16="http://schemas.microsoft.com/office/drawing/2014/main" id="{998504CA-25A9-41FB-A97F-386A6A7C2091}"/>
               </a:ext>
             </a:extLst>
           </p:cNvPr>
@@ -8251,7 +8251,7 @@
           <p:cNvPr id="60" name="ZoneTexte 59">
             <a:extLst>
               <a:ext uri="{FF2B5EF4-FFF2-40B4-BE49-F238E27FC236}">
-                <a16:creationId xmlns:a16="http://schemas.microsoft.com/office/drawing/2014/main" xmlns="" id="{7996DCD3-17BB-4CCD-BAB5-C69F7829C943}"/>
+                <a16:creationId xmlns:a16="http://schemas.microsoft.com/office/drawing/2014/main" id="{7996DCD3-17BB-4CCD-BAB5-C69F7829C943}"/>
               </a:ext>
             </a:extLst>
           </p:cNvPr>
@@ -8322,7 +8322,7 @@
           <p:cNvPr id="5" name="ZoneTexte 4">
             <a:extLst>
               <a:ext uri="{FF2B5EF4-FFF2-40B4-BE49-F238E27FC236}">
-                <a16:creationId xmlns:a16="http://schemas.microsoft.com/office/drawing/2014/main" xmlns="" id="{25D0CFDD-F8D9-4498-A666-F31BA473AEDD}"/>
+                <a16:creationId xmlns:a16="http://schemas.microsoft.com/office/drawing/2014/main" id="{25D0CFDD-F8D9-4498-A666-F31BA473AEDD}"/>
               </a:ext>
             </a:extLst>
           </p:cNvPr>
@@ -8357,7 +8357,7 @@
           <p:cNvPr id="33" name="Ellipse 32">
             <a:extLst>
               <a:ext uri="{FF2B5EF4-FFF2-40B4-BE49-F238E27FC236}">
-                <a16:creationId xmlns:a16="http://schemas.microsoft.com/office/drawing/2014/main" xmlns="" id="{89FCD844-DF7E-40C9-9D11-022F7FE63189}"/>
+                <a16:creationId xmlns:a16="http://schemas.microsoft.com/office/drawing/2014/main" id="{89FCD844-DF7E-40C9-9D11-022F7FE63189}"/>
               </a:ext>
             </a:extLst>
           </p:cNvPr>
@@ -8412,7 +8412,7 @@
           <p:cNvPr id="13" name="Connecteur droit avec flèche 12">
             <a:extLst>
               <a:ext uri="{FF2B5EF4-FFF2-40B4-BE49-F238E27FC236}">
-                <a16:creationId xmlns:a16="http://schemas.microsoft.com/office/drawing/2014/main" xmlns="" id="{6589CEFF-63AD-48E0-B8C2-2B9C42EE3BA1}"/>
+                <a16:creationId xmlns:a16="http://schemas.microsoft.com/office/drawing/2014/main" id="{6589CEFF-63AD-48E0-B8C2-2B9C42EE3BA1}"/>
               </a:ext>
             </a:extLst>
           </p:cNvPr>
@@ -8455,7 +8455,7 @@
           <p:cNvPr id="3" name="Ellipse 2">
             <a:extLst>
               <a:ext uri="{FF2B5EF4-FFF2-40B4-BE49-F238E27FC236}">
-                <a16:creationId xmlns:a16="http://schemas.microsoft.com/office/drawing/2014/main" xmlns="" id="{B48A28A4-F86C-489F-903E-CDB2F959EE1D}"/>
+                <a16:creationId xmlns:a16="http://schemas.microsoft.com/office/drawing/2014/main" id="{B48A28A4-F86C-489F-903E-CDB2F959EE1D}"/>
               </a:ext>
             </a:extLst>
           </p:cNvPr>
@@ -8505,7 +8505,7 @@
           <p:cNvPr id="11" name="Connecteur droit avec flèche 10">
             <a:extLst>
               <a:ext uri="{FF2B5EF4-FFF2-40B4-BE49-F238E27FC236}">
-                <a16:creationId xmlns:a16="http://schemas.microsoft.com/office/drawing/2014/main" xmlns="" id="{87454732-A711-482C-91AA-4E79773AA2A9}"/>
+                <a16:creationId xmlns:a16="http://schemas.microsoft.com/office/drawing/2014/main" id="{87454732-A711-482C-91AA-4E79773AA2A9}"/>
               </a:ext>
             </a:extLst>
           </p:cNvPr>
@@ -8546,7 +8546,7 @@
           <p:cNvPr id="7" name="ZoneTexte 6">
             <a:extLst>
               <a:ext uri="{FF2B5EF4-FFF2-40B4-BE49-F238E27FC236}">
-                <a16:creationId xmlns:a16="http://schemas.microsoft.com/office/drawing/2014/main" xmlns="" id="{A45D2913-C18C-4840-A38B-D170970F4158}"/>
+                <a16:creationId xmlns:a16="http://schemas.microsoft.com/office/drawing/2014/main" id="{A45D2913-C18C-4840-A38B-D170970F4158}"/>
               </a:ext>
             </a:extLst>
           </p:cNvPr>
@@ -8612,7 +8612,7 @@
           <p:cNvPr id="5" name="ZoneTexte 4">
             <a:extLst>
               <a:ext uri="{FF2B5EF4-FFF2-40B4-BE49-F238E27FC236}">
-                <a16:creationId xmlns:a16="http://schemas.microsoft.com/office/drawing/2014/main" xmlns="" id="{25D0CFDD-F8D9-4498-A666-F31BA473AEDD}"/>
+                <a16:creationId xmlns:a16="http://schemas.microsoft.com/office/drawing/2014/main" id="{25D0CFDD-F8D9-4498-A666-F31BA473AEDD}"/>
               </a:ext>
             </a:extLst>
           </p:cNvPr>
@@ -8647,7 +8647,7 @@
           <p:cNvPr id="33" name="Ellipse 32">
             <a:extLst>
               <a:ext uri="{FF2B5EF4-FFF2-40B4-BE49-F238E27FC236}">
-                <a16:creationId xmlns:a16="http://schemas.microsoft.com/office/drawing/2014/main" xmlns="" id="{89FCD844-DF7E-40C9-9D11-022F7FE63189}"/>
+                <a16:creationId xmlns:a16="http://schemas.microsoft.com/office/drawing/2014/main" id="{89FCD844-DF7E-40C9-9D11-022F7FE63189}"/>
               </a:ext>
             </a:extLst>
           </p:cNvPr>
@@ -8697,7 +8697,7 @@
           <p:cNvPr id="13" name="Connecteur droit avec flèche 12">
             <a:extLst>
               <a:ext uri="{FF2B5EF4-FFF2-40B4-BE49-F238E27FC236}">
-                <a16:creationId xmlns:a16="http://schemas.microsoft.com/office/drawing/2014/main" xmlns="" id="{6589CEFF-63AD-48E0-B8C2-2B9C42EE3BA1}"/>
+                <a16:creationId xmlns:a16="http://schemas.microsoft.com/office/drawing/2014/main" id="{6589CEFF-63AD-48E0-B8C2-2B9C42EE3BA1}"/>
               </a:ext>
             </a:extLst>
           </p:cNvPr>
@@ -8740,7 +8740,7 @@
           <p:cNvPr id="3" name="Ellipse 2">
             <a:extLst>
               <a:ext uri="{FF2B5EF4-FFF2-40B4-BE49-F238E27FC236}">
-                <a16:creationId xmlns:a16="http://schemas.microsoft.com/office/drawing/2014/main" xmlns="" id="{B48A28A4-F86C-489F-903E-CDB2F959EE1D}"/>
+                <a16:creationId xmlns:a16="http://schemas.microsoft.com/office/drawing/2014/main" id="{B48A28A4-F86C-489F-903E-CDB2F959EE1D}"/>
               </a:ext>
             </a:extLst>
           </p:cNvPr>
@@ -8792,7 +8792,7 @@
               <p:cNvPr id="18" name="ZoneTexte 17">
                 <a:extLst>
                   <a:ext uri="{FF2B5EF4-FFF2-40B4-BE49-F238E27FC236}">
-                    <a16:creationId xmlns:a16="http://schemas.microsoft.com/office/drawing/2014/main" xmlns="" id="{DB737F55-3E4B-44C8-95BF-7E258C52E571}"/>
+                    <a16:creationId xmlns:a16="http://schemas.microsoft.com/office/drawing/2014/main" id="{DB737F55-3E4B-44C8-95BF-7E258C52E571}"/>
                   </a:ext>
                 </a:extLst>
               </p:cNvPr>
@@ -8909,7 +8909,7 @@
           <p:cNvPr id="2" name="Ellipse 1">
             <a:extLst>
               <a:ext uri="{FF2B5EF4-FFF2-40B4-BE49-F238E27FC236}">
-                <a16:creationId xmlns:a16="http://schemas.microsoft.com/office/drawing/2014/main" xmlns="" id="{248768E0-C1A4-4110-B54A-35EAB18749A4}"/>
+                <a16:creationId xmlns:a16="http://schemas.microsoft.com/office/drawing/2014/main" id="{248768E0-C1A4-4110-B54A-35EAB18749A4}"/>
               </a:ext>
             </a:extLst>
           </p:cNvPr>
@@ -8962,7 +8962,7 @@
           <p:cNvPr id="11" name="Connecteur droit avec flèche 10">
             <a:extLst>
               <a:ext uri="{FF2B5EF4-FFF2-40B4-BE49-F238E27FC236}">
-                <a16:creationId xmlns:a16="http://schemas.microsoft.com/office/drawing/2014/main" xmlns="" id="{8E355309-D41D-48CF-A241-308F250C237D}"/>
+                <a16:creationId xmlns:a16="http://schemas.microsoft.com/office/drawing/2014/main" id="{8E355309-D41D-48CF-A241-308F250C237D}"/>
               </a:ext>
             </a:extLst>
           </p:cNvPr>
@@ -9005,7 +9005,7 @@
           <p:cNvPr id="7" name="ZoneTexte 6">
             <a:extLst>
               <a:ext uri="{FF2B5EF4-FFF2-40B4-BE49-F238E27FC236}">
-                <a16:creationId xmlns:a16="http://schemas.microsoft.com/office/drawing/2014/main" xmlns="" id="{836D266B-8A27-4DCF-8902-48EA7638FDF1}"/>
+                <a16:creationId xmlns:a16="http://schemas.microsoft.com/office/drawing/2014/main" id="{836D266B-8A27-4DCF-8902-48EA7638FDF1}"/>
               </a:ext>
             </a:extLst>
           </p:cNvPr>
@@ -9075,7 +9075,7 @@
           <p:cNvPr id="5" name="ZoneTexte 4">
             <a:extLst>
               <a:ext uri="{FF2B5EF4-FFF2-40B4-BE49-F238E27FC236}">
-                <a16:creationId xmlns:a16="http://schemas.microsoft.com/office/drawing/2014/main" xmlns="" id="{25D0CFDD-F8D9-4498-A666-F31BA473AEDD}"/>
+                <a16:creationId xmlns:a16="http://schemas.microsoft.com/office/drawing/2014/main" id="{25D0CFDD-F8D9-4498-A666-F31BA473AEDD}"/>
               </a:ext>
             </a:extLst>
           </p:cNvPr>
@@ -9110,7 +9110,7 @@
           <p:cNvPr id="33" name="Ellipse 32">
             <a:extLst>
               <a:ext uri="{FF2B5EF4-FFF2-40B4-BE49-F238E27FC236}">
-                <a16:creationId xmlns:a16="http://schemas.microsoft.com/office/drawing/2014/main" xmlns="" id="{89FCD844-DF7E-40C9-9D11-022F7FE63189}"/>
+                <a16:creationId xmlns:a16="http://schemas.microsoft.com/office/drawing/2014/main" id="{89FCD844-DF7E-40C9-9D11-022F7FE63189}"/>
               </a:ext>
             </a:extLst>
           </p:cNvPr>
@@ -9165,7 +9165,7 @@
           <p:cNvPr id="13" name="Connecteur droit avec flèche 12">
             <a:extLst>
               <a:ext uri="{FF2B5EF4-FFF2-40B4-BE49-F238E27FC236}">
-                <a16:creationId xmlns:a16="http://schemas.microsoft.com/office/drawing/2014/main" xmlns="" id="{6589CEFF-63AD-48E0-B8C2-2B9C42EE3BA1}"/>
+                <a16:creationId xmlns:a16="http://schemas.microsoft.com/office/drawing/2014/main" id="{6589CEFF-63AD-48E0-B8C2-2B9C42EE3BA1}"/>
               </a:ext>
             </a:extLst>
           </p:cNvPr>
@@ -9208,7 +9208,7 @@
           <p:cNvPr id="3" name="Ellipse 2">
             <a:extLst>
               <a:ext uri="{FF2B5EF4-FFF2-40B4-BE49-F238E27FC236}">
-                <a16:creationId xmlns:a16="http://schemas.microsoft.com/office/drawing/2014/main" xmlns="" id="{B48A28A4-F86C-489F-903E-CDB2F959EE1D}"/>
+                <a16:creationId xmlns:a16="http://schemas.microsoft.com/office/drawing/2014/main" id="{B48A28A4-F86C-489F-903E-CDB2F959EE1D}"/>
               </a:ext>
             </a:extLst>
           </p:cNvPr>
@@ -9265,7 +9265,7 @@
           <p:cNvPr id="8" name="Ellipse 7">
             <a:extLst>
               <a:ext uri="{FF2B5EF4-FFF2-40B4-BE49-F238E27FC236}">
-                <a16:creationId xmlns:a16="http://schemas.microsoft.com/office/drawing/2014/main" xmlns="" id="{846DBD23-0D29-4818-BD2D-A829F9FB2E58}"/>
+                <a16:creationId xmlns:a16="http://schemas.microsoft.com/office/drawing/2014/main" id="{846DBD23-0D29-4818-BD2D-A829F9FB2E58}"/>
               </a:ext>
             </a:extLst>
           </p:cNvPr>
@@ -9318,7 +9318,7 @@
           <p:cNvPr id="18" name="ZoneTexte 17">
             <a:extLst>
               <a:ext uri="{FF2B5EF4-FFF2-40B4-BE49-F238E27FC236}">
-                <a16:creationId xmlns:a16="http://schemas.microsoft.com/office/drawing/2014/main" xmlns="" id="{DB737F55-3E4B-44C8-95BF-7E258C52E571}"/>
+                <a16:creationId xmlns:a16="http://schemas.microsoft.com/office/drawing/2014/main" id="{DB737F55-3E4B-44C8-95BF-7E258C52E571}"/>
               </a:ext>
             </a:extLst>
           </p:cNvPr>
@@ -9354,7 +9354,7 @@
           <p:cNvPr id="4" name="ZoneTexte 3">
             <a:extLst>
               <a:ext uri="{FF2B5EF4-FFF2-40B4-BE49-F238E27FC236}">
-                <a16:creationId xmlns:a16="http://schemas.microsoft.com/office/drawing/2014/main" xmlns="" id="{D9FD1667-8C49-4AA0-AE36-E3F9302DF22B}"/>
+                <a16:creationId xmlns:a16="http://schemas.microsoft.com/office/drawing/2014/main" id="{D9FD1667-8C49-4AA0-AE36-E3F9302DF22B}"/>
               </a:ext>
             </a:extLst>
           </p:cNvPr>
@@ -9422,7 +9422,7 @@
           <p:cNvPr id="14" name="ZoneTexte 13">
             <a:extLst>
               <a:ext uri="{FF2B5EF4-FFF2-40B4-BE49-F238E27FC236}">
-                <a16:creationId xmlns:a16="http://schemas.microsoft.com/office/drawing/2014/main" xmlns="" id="{B2CF66E0-4079-4723-98F0-F4AC957EFF5A}"/>
+                <a16:creationId xmlns:a16="http://schemas.microsoft.com/office/drawing/2014/main" id="{B2CF66E0-4079-4723-98F0-F4AC957EFF5A}"/>
               </a:ext>
             </a:extLst>
           </p:cNvPr>
@@ -9458,7 +9458,7 @@
           <p:cNvPr id="9" name="Ellipse 8">
             <a:extLst>
               <a:ext uri="{FF2B5EF4-FFF2-40B4-BE49-F238E27FC236}">
-                <a16:creationId xmlns:a16="http://schemas.microsoft.com/office/drawing/2014/main" xmlns="" id="{FB5D375D-1AEB-44C9-9D03-AF946AD78DA6}"/>
+                <a16:creationId xmlns:a16="http://schemas.microsoft.com/office/drawing/2014/main" id="{FB5D375D-1AEB-44C9-9D03-AF946AD78DA6}"/>
               </a:ext>
             </a:extLst>
           </p:cNvPr>
@@ -9511,7 +9511,7 @@
           <p:cNvPr id="16" name="ZoneTexte 15">
             <a:extLst>
               <a:ext uri="{FF2B5EF4-FFF2-40B4-BE49-F238E27FC236}">
-                <a16:creationId xmlns:a16="http://schemas.microsoft.com/office/drawing/2014/main" xmlns="" id="{E8BB84E9-98A0-4BC9-BEE4-89A576223CBE}"/>
+                <a16:creationId xmlns:a16="http://schemas.microsoft.com/office/drawing/2014/main" id="{E8BB84E9-98A0-4BC9-BEE4-89A576223CBE}"/>
               </a:ext>
             </a:extLst>
           </p:cNvPr>
@@ -9547,7 +9547,7 @@
           <p:cNvPr id="20" name="Connecteur droit avec flèche 19">
             <a:extLst>
               <a:ext uri="{FF2B5EF4-FFF2-40B4-BE49-F238E27FC236}">
-                <a16:creationId xmlns:a16="http://schemas.microsoft.com/office/drawing/2014/main" xmlns="" id="{D8F1C8A3-978A-4CB9-BAAD-E33EAE62B3A1}"/>
+                <a16:creationId xmlns:a16="http://schemas.microsoft.com/office/drawing/2014/main" id="{D8F1C8A3-978A-4CB9-BAAD-E33EAE62B3A1}"/>
               </a:ext>
             </a:extLst>
           </p:cNvPr>
@@ -9590,7 +9590,7 @@
           <p:cNvPr id="23" name="Connecteur droit avec flèche 22">
             <a:extLst>
               <a:ext uri="{FF2B5EF4-FFF2-40B4-BE49-F238E27FC236}">
-                <a16:creationId xmlns:a16="http://schemas.microsoft.com/office/drawing/2014/main" xmlns="" id="{731BD197-2769-4696-8BCC-BB6D85302BEE}"/>
+                <a16:creationId xmlns:a16="http://schemas.microsoft.com/office/drawing/2014/main" id="{731BD197-2769-4696-8BCC-BB6D85302BEE}"/>
               </a:ext>
             </a:extLst>
           </p:cNvPr>
@@ -9633,7 +9633,7 @@
           <p:cNvPr id="25" name="Ellipse 24">
             <a:extLst>
               <a:ext uri="{FF2B5EF4-FFF2-40B4-BE49-F238E27FC236}">
-                <a16:creationId xmlns:a16="http://schemas.microsoft.com/office/drawing/2014/main" xmlns="" id="{F465DF87-C90E-4EED-893A-5403CC3F797A}"/>
+                <a16:creationId xmlns:a16="http://schemas.microsoft.com/office/drawing/2014/main" id="{F465DF87-C90E-4EED-893A-5403CC3F797A}"/>
               </a:ext>
             </a:extLst>
           </p:cNvPr>
@@ -9686,7 +9686,7 @@
           <p:cNvPr id="29" name="Connecteur droit avec flèche 28">
             <a:extLst>
               <a:ext uri="{FF2B5EF4-FFF2-40B4-BE49-F238E27FC236}">
-                <a16:creationId xmlns:a16="http://schemas.microsoft.com/office/drawing/2014/main" xmlns="" id="{FC38A84E-DF66-4B2C-9670-8E3F1896D70C}"/>
+                <a16:creationId xmlns:a16="http://schemas.microsoft.com/office/drawing/2014/main" id="{FC38A84E-DF66-4B2C-9670-8E3F1896D70C}"/>
               </a:ext>
             </a:extLst>
           </p:cNvPr>
@@ -9729,7 +9729,7 @@
           <p:cNvPr id="31" name="ZoneTexte 30">
             <a:extLst>
               <a:ext uri="{FF2B5EF4-FFF2-40B4-BE49-F238E27FC236}">
-                <a16:creationId xmlns:a16="http://schemas.microsoft.com/office/drawing/2014/main" xmlns="" id="{838D88F6-F52F-4996-A66D-D99BD69B7BE2}"/>
+                <a16:creationId xmlns:a16="http://schemas.microsoft.com/office/drawing/2014/main" id="{838D88F6-F52F-4996-A66D-D99BD69B7BE2}"/>
               </a:ext>
             </a:extLst>
           </p:cNvPr>
@@ -9765,7 +9765,7 @@
           <p:cNvPr id="35" name="Ellipse 34">
             <a:extLst>
               <a:ext uri="{FF2B5EF4-FFF2-40B4-BE49-F238E27FC236}">
-                <a16:creationId xmlns:a16="http://schemas.microsoft.com/office/drawing/2014/main" xmlns="" id="{D2279A72-45EB-4BA8-B25D-D4F7FBAEE09D}"/>
+                <a16:creationId xmlns:a16="http://schemas.microsoft.com/office/drawing/2014/main" id="{D2279A72-45EB-4BA8-B25D-D4F7FBAEE09D}"/>
               </a:ext>
             </a:extLst>
           </p:cNvPr>
@@ -9818,7 +9818,7 @@
           <p:cNvPr id="36" name="Connecteur droit avec flèche 35">
             <a:extLst>
               <a:ext uri="{FF2B5EF4-FFF2-40B4-BE49-F238E27FC236}">
-                <a16:creationId xmlns:a16="http://schemas.microsoft.com/office/drawing/2014/main" xmlns="" id="{EDBB3119-CEBC-4DD1-BE6C-2DD2F1DDABC8}"/>
+                <a16:creationId xmlns:a16="http://schemas.microsoft.com/office/drawing/2014/main" id="{EDBB3119-CEBC-4DD1-BE6C-2DD2F1DDABC8}"/>
               </a:ext>
             </a:extLst>
           </p:cNvPr>
@@ -9861,7 +9861,7 @@
           <p:cNvPr id="42" name="ZoneTexte 41">
             <a:extLst>
               <a:ext uri="{FF2B5EF4-FFF2-40B4-BE49-F238E27FC236}">
-                <a16:creationId xmlns:a16="http://schemas.microsoft.com/office/drawing/2014/main" xmlns="" id="{160DF9CA-5F00-47F7-BAD8-AC2F06F2F83B}"/>
+                <a16:creationId xmlns:a16="http://schemas.microsoft.com/office/drawing/2014/main" id="{160DF9CA-5F00-47F7-BAD8-AC2F06F2F83B}"/>
               </a:ext>
             </a:extLst>
           </p:cNvPr>
@@ -9985,7 +9985,7 @@
           <p:cNvPr id="5" name="ZoneTexte 4">
             <a:extLst>
               <a:ext uri="{FF2B5EF4-FFF2-40B4-BE49-F238E27FC236}">
-                <a16:creationId xmlns:a16="http://schemas.microsoft.com/office/drawing/2014/main" xmlns="" id="{25D0CFDD-F8D9-4498-A666-F31BA473AEDD}"/>
+                <a16:creationId xmlns:a16="http://schemas.microsoft.com/office/drawing/2014/main" id="{25D0CFDD-F8D9-4498-A666-F31BA473AEDD}"/>
               </a:ext>
             </a:extLst>
           </p:cNvPr>
@@ -10020,7 +10020,7 @@
           <p:cNvPr id="33" name="Ellipse 32">
             <a:extLst>
               <a:ext uri="{FF2B5EF4-FFF2-40B4-BE49-F238E27FC236}">
-                <a16:creationId xmlns:a16="http://schemas.microsoft.com/office/drawing/2014/main" xmlns="" id="{89FCD844-DF7E-40C9-9D11-022F7FE63189}"/>
+                <a16:creationId xmlns:a16="http://schemas.microsoft.com/office/drawing/2014/main" id="{89FCD844-DF7E-40C9-9D11-022F7FE63189}"/>
               </a:ext>
             </a:extLst>
           </p:cNvPr>
@@ -10075,7 +10075,7 @@
           <p:cNvPr id="13" name="Connecteur droit avec flèche 12">
             <a:extLst>
               <a:ext uri="{FF2B5EF4-FFF2-40B4-BE49-F238E27FC236}">
-                <a16:creationId xmlns:a16="http://schemas.microsoft.com/office/drawing/2014/main" xmlns="" id="{6589CEFF-63AD-48E0-B8C2-2B9C42EE3BA1}"/>
+                <a16:creationId xmlns:a16="http://schemas.microsoft.com/office/drawing/2014/main" id="{6589CEFF-63AD-48E0-B8C2-2B9C42EE3BA1}"/>
               </a:ext>
             </a:extLst>
           </p:cNvPr>
@@ -10118,7 +10118,7 @@
           <p:cNvPr id="9" name="Ellipse 8">
             <a:extLst>
               <a:ext uri="{FF2B5EF4-FFF2-40B4-BE49-F238E27FC236}">
-                <a16:creationId xmlns:a16="http://schemas.microsoft.com/office/drawing/2014/main" xmlns="" id="{04BDBEB7-3C74-4727-8DD5-1A16F59DCCBC}"/>
+                <a16:creationId xmlns:a16="http://schemas.microsoft.com/office/drawing/2014/main" id="{04BDBEB7-3C74-4727-8DD5-1A16F59DCCBC}"/>
               </a:ext>
             </a:extLst>
           </p:cNvPr>
@@ -10168,7 +10168,7 @@
           <p:cNvPr id="20" name="ZoneTexte 19">
             <a:extLst>
               <a:ext uri="{FF2B5EF4-FFF2-40B4-BE49-F238E27FC236}">
-                <a16:creationId xmlns:a16="http://schemas.microsoft.com/office/drawing/2014/main" xmlns="" id="{E62FDE30-A341-45C5-8D8C-90EE4600C3C2}"/>
+                <a16:creationId xmlns:a16="http://schemas.microsoft.com/office/drawing/2014/main" id="{E62FDE30-A341-45C5-8D8C-90EE4600C3C2}"/>
               </a:ext>
             </a:extLst>
           </p:cNvPr>
@@ -10211,7 +10211,7 @@
           <p:cNvPr id="21" name="Ellipse 20">
             <a:extLst>
               <a:ext uri="{FF2B5EF4-FFF2-40B4-BE49-F238E27FC236}">
-                <a16:creationId xmlns:a16="http://schemas.microsoft.com/office/drawing/2014/main" xmlns="" id="{A5979E7B-435B-48AD-9F58-4D9E32AE6E9B}"/>
+                <a16:creationId xmlns:a16="http://schemas.microsoft.com/office/drawing/2014/main" id="{A5979E7B-435B-48AD-9F58-4D9E32AE6E9B}"/>
               </a:ext>
             </a:extLst>
           </p:cNvPr>
@@ -10261,7 +10261,7 @@
           <p:cNvPr id="23" name="Ellipse 22">
             <a:extLst>
               <a:ext uri="{FF2B5EF4-FFF2-40B4-BE49-F238E27FC236}">
-                <a16:creationId xmlns:a16="http://schemas.microsoft.com/office/drawing/2014/main" xmlns="" id="{BB229BEC-1A47-4FDD-BF01-BE0C52C9D22E}"/>
+                <a16:creationId xmlns:a16="http://schemas.microsoft.com/office/drawing/2014/main" id="{BB229BEC-1A47-4FDD-BF01-BE0C52C9D22E}"/>
               </a:ext>
             </a:extLst>
           </p:cNvPr>
@@ -10311,7 +10311,7 @@
           <p:cNvPr id="26" name="Connecteur droit avec flèche 25">
             <a:extLst>
               <a:ext uri="{FF2B5EF4-FFF2-40B4-BE49-F238E27FC236}">
-                <a16:creationId xmlns:a16="http://schemas.microsoft.com/office/drawing/2014/main" xmlns="" id="{8AA26758-F849-4074-9BD0-D9ED172DB9D9}"/>
+                <a16:creationId xmlns:a16="http://schemas.microsoft.com/office/drawing/2014/main" id="{8AA26758-F849-4074-9BD0-D9ED172DB9D9}"/>
               </a:ext>
             </a:extLst>
           </p:cNvPr>
@@ -10354,7 +10354,7 @@
           <p:cNvPr id="29" name="Connecteur droit avec flèche 28">
             <a:extLst>
               <a:ext uri="{FF2B5EF4-FFF2-40B4-BE49-F238E27FC236}">
-                <a16:creationId xmlns:a16="http://schemas.microsoft.com/office/drawing/2014/main" xmlns="" id="{018CC3DE-A236-4A04-AD0A-7425B8DB708F}"/>
+                <a16:creationId xmlns:a16="http://schemas.microsoft.com/office/drawing/2014/main" id="{018CC3DE-A236-4A04-AD0A-7425B8DB708F}"/>
               </a:ext>
             </a:extLst>
           </p:cNvPr>
@@ -10397,7 +10397,7 @@
           <p:cNvPr id="31" name="ZoneTexte 30">
             <a:extLst>
               <a:ext uri="{FF2B5EF4-FFF2-40B4-BE49-F238E27FC236}">
-                <a16:creationId xmlns:a16="http://schemas.microsoft.com/office/drawing/2014/main" xmlns="" id="{34562A4F-50BA-4C02-9559-8117527D4994}"/>
+                <a16:creationId xmlns:a16="http://schemas.microsoft.com/office/drawing/2014/main" id="{34562A4F-50BA-4C02-9559-8117527D4994}"/>
               </a:ext>
             </a:extLst>
           </p:cNvPr>
@@ -10440,7 +10440,7 @@
           <p:cNvPr id="35" name="ZoneTexte 34">
             <a:extLst>
               <a:ext uri="{FF2B5EF4-FFF2-40B4-BE49-F238E27FC236}">
-                <a16:creationId xmlns:a16="http://schemas.microsoft.com/office/drawing/2014/main" xmlns="" id="{70FF6B56-89E9-422E-B7EB-FB1DE953FB4E}"/>
+                <a16:creationId xmlns:a16="http://schemas.microsoft.com/office/drawing/2014/main" id="{70FF6B56-89E9-422E-B7EB-FB1DE953FB4E}"/>
               </a:ext>
             </a:extLst>
           </p:cNvPr>
@@ -10483,7 +10483,7 @@
           <p:cNvPr id="37" name="Ellipse 36">
             <a:extLst>
               <a:ext uri="{FF2B5EF4-FFF2-40B4-BE49-F238E27FC236}">
-                <a16:creationId xmlns:a16="http://schemas.microsoft.com/office/drawing/2014/main" xmlns="" id="{54301E91-A2B2-4C30-B7B5-7D1C0025D2C6}"/>
+                <a16:creationId xmlns:a16="http://schemas.microsoft.com/office/drawing/2014/main" id="{54301E91-A2B2-4C30-B7B5-7D1C0025D2C6}"/>
               </a:ext>
             </a:extLst>
           </p:cNvPr>
@@ -10533,7 +10533,7 @@
           <p:cNvPr id="38" name="Connecteur droit avec flèche 37">
             <a:extLst>
               <a:ext uri="{FF2B5EF4-FFF2-40B4-BE49-F238E27FC236}">
-                <a16:creationId xmlns:a16="http://schemas.microsoft.com/office/drawing/2014/main" xmlns="" id="{5A4C3762-0093-478B-90CD-5557304E863D}"/>
+                <a16:creationId xmlns:a16="http://schemas.microsoft.com/office/drawing/2014/main" id="{5A4C3762-0093-478B-90CD-5557304E863D}"/>
               </a:ext>
             </a:extLst>
           </p:cNvPr>
@@ -10576,7 +10576,7 @@
           <p:cNvPr id="43" name="ZoneTexte 42">
             <a:extLst>
               <a:ext uri="{FF2B5EF4-FFF2-40B4-BE49-F238E27FC236}">
-                <a16:creationId xmlns:a16="http://schemas.microsoft.com/office/drawing/2014/main" xmlns="" id="{D90995EC-5DE3-4F9D-AE17-B109BA9D66C3}"/>
+                <a16:creationId xmlns:a16="http://schemas.microsoft.com/office/drawing/2014/main" id="{D90995EC-5DE3-4F9D-AE17-B109BA9D66C3}"/>
               </a:ext>
             </a:extLst>
           </p:cNvPr>
@@ -10616,7 +10616,7 @@
           <p:cNvPr id="47" name="Ellipse 46">
             <a:extLst>
               <a:ext uri="{FF2B5EF4-FFF2-40B4-BE49-F238E27FC236}">
-                <a16:creationId xmlns:a16="http://schemas.microsoft.com/office/drawing/2014/main" xmlns="" id="{3E6D2D7C-1270-4E7B-903B-29AA72901D04}"/>
+                <a16:creationId xmlns:a16="http://schemas.microsoft.com/office/drawing/2014/main" id="{3E6D2D7C-1270-4E7B-903B-29AA72901D04}"/>
               </a:ext>
             </a:extLst>
           </p:cNvPr>
@@ -10666,7 +10666,7 @@
           <p:cNvPr id="48" name="Connecteur droit avec flèche 47">
             <a:extLst>
               <a:ext uri="{FF2B5EF4-FFF2-40B4-BE49-F238E27FC236}">
-                <a16:creationId xmlns:a16="http://schemas.microsoft.com/office/drawing/2014/main" xmlns="" id="{5B905CDA-3C4D-453E-AD95-3BD4BD5DF2A8}"/>
+                <a16:creationId xmlns:a16="http://schemas.microsoft.com/office/drawing/2014/main" id="{5B905CDA-3C4D-453E-AD95-3BD4BD5DF2A8}"/>
               </a:ext>
             </a:extLst>
           </p:cNvPr>
@@ -10709,7 +10709,7 @@
           <p:cNvPr id="52" name="ZoneTexte 51">
             <a:extLst>
               <a:ext uri="{FF2B5EF4-FFF2-40B4-BE49-F238E27FC236}">
-                <a16:creationId xmlns:a16="http://schemas.microsoft.com/office/drawing/2014/main" xmlns="" id="{CDEF5010-7AF1-40DA-8DCD-01DF5AB65171}"/>
+                <a16:creationId xmlns:a16="http://schemas.microsoft.com/office/drawing/2014/main" id="{CDEF5010-7AF1-40DA-8DCD-01DF5AB65171}"/>
               </a:ext>
             </a:extLst>
           </p:cNvPr>
@@ -10776,7 +10776,7 @@
           <p:cNvPr id="5" name="ZoneTexte 4">
             <a:extLst>
               <a:ext uri="{FF2B5EF4-FFF2-40B4-BE49-F238E27FC236}">
-                <a16:creationId xmlns:a16="http://schemas.microsoft.com/office/drawing/2014/main" xmlns="" id="{25D0CFDD-F8D9-4498-A666-F31BA473AEDD}"/>
+                <a16:creationId xmlns:a16="http://schemas.microsoft.com/office/drawing/2014/main" id="{25D0CFDD-F8D9-4498-A666-F31BA473AEDD}"/>
               </a:ext>
             </a:extLst>
           </p:cNvPr>
@@ -10815,7 +10815,7 @@
           <p:cNvPr id="33" name="Ellipse 32">
             <a:extLst>
               <a:ext uri="{FF2B5EF4-FFF2-40B4-BE49-F238E27FC236}">
-                <a16:creationId xmlns:a16="http://schemas.microsoft.com/office/drawing/2014/main" xmlns="" id="{89FCD844-DF7E-40C9-9D11-022F7FE63189}"/>
+                <a16:creationId xmlns:a16="http://schemas.microsoft.com/office/drawing/2014/main" id="{89FCD844-DF7E-40C9-9D11-022F7FE63189}"/>
               </a:ext>
             </a:extLst>
           </p:cNvPr>
@@ -10870,7 +10870,7 @@
           <p:cNvPr id="13" name="Connecteur droit avec flèche 12">
             <a:extLst>
               <a:ext uri="{FF2B5EF4-FFF2-40B4-BE49-F238E27FC236}">
-                <a16:creationId xmlns:a16="http://schemas.microsoft.com/office/drawing/2014/main" xmlns="" id="{6589CEFF-63AD-48E0-B8C2-2B9C42EE3BA1}"/>
+                <a16:creationId xmlns:a16="http://schemas.microsoft.com/office/drawing/2014/main" id="{6589CEFF-63AD-48E0-B8C2-2B9C42EE3BA1}"/>
               </a:ext>
             </a:extLst>
           </p:cNvPr>
@@ -10912,7 +10912,7 @@
           <p:cNvPr id="18" name="ZoneTexte 17">
             <a:extLst>
               <a:ext uri="{FF2B5EF4-FFF2-40B4-BE49-F238E27FC236}">
-                <a16:creationId xmlns:a16="http://schemas.microsoft.com/office/drawing/2014/main" xmlns="" id="{DB737F55-3E4B-44C8-95BF-7E258C52E571}"/>
+                <a16:creationId xmlns:a16="http://schemas.microsoft.com/office/drawing/2014/main" id="{DB737F55-3E4B-44C8-95BF-7E258C52E571}"/>
               </a:ext>
             </a:extLst>
           </p:cNvPr>
@@ -10962,7 +10962,7 @@
           <p:cNvPr id="6" name="Ellipse 5">
             <a:extLst>
               <a:ext uri="{FF2B5EF4-FFF2-40B4-BE49-F238E27FC236}">
-                <a16:creationId xmlns:a16="http://schemas.microsoft.com/office/drawing/2014/main" xmlns="" id="{BEF99852-F1FD-443E-AAE4-FC734762E949}"/>
+                <a16:creationId xmlns:a16="http://schemas.microsoft.com/office/drawing/2014/main" id="{BEF99852-F1FD-443E-AAE4-FC734762E949}"/>
               </a:ext>
             </a:extLst>
           </p:cNvPr>
@@ -11012,7 +11012,7 @@
           <p:cNvPr id="9" name="Ellipse 8">
             <a:extLst>
               <a:ext uri="{FF2B5EF4-FFF2-40B4-BE49-F238E27FC236}">
-                <a16:creationId xmlns:a16="http://schemas.microsoft.com/office/drawing/2014/main" xmlns="" id="{9BE42D8C-07B9-4E1D-A414-2C22C6871521}"/>
+                <a16:creationId xmlns:a16="http://schemas.microsoft.com/office/drawing/2014/main" id="{9BE42D8C-07B9-4E1D-A414-2C22C6871521}"/>
               </a:ext>
             </a:extLst>
           </p:cNvPr>
@@ -11062,7 +11062,7 @@
           <p:cNvPr id="20" name="Connecteur droit avec flèche 19">
             <a:extLst>
               <a:ext uri="{FF2B5EF4-FFF2-40B4-BE49-F238E27FC236}">
-                <a16:creationId xmlns:a16="http://schemas.microsoft.com/office/drawing/2014/main" xmlns="" id="{74666AEA-453B-471D-8EDA-B59188C84F48}"/>
+                <a16:creationId xmlns:a16="http://schemas.microsoft.com/office/drawing/2014/main" id="{74666AEA-453B-471D-8EDA-B59188C84F48}"/>
               </a:ext>
             </a:extLst>
           </p:cNvPr>
@@ -11105,7 +11105,7 @@
           <p:cNvPr id="23" name="ZoneTexte 22">
             <a:extLst>
               <a:ext uri="{FF2B5EF4-FFF2-40B4-BE49-F238E27FC236}">
-                <a16:creationId xmlns:a16="http://schemas.microsoft.com/office/drawing/2014/main" xmlns="" id="{F1C002A0-5827-4A53-8C66-19BBDB237658}"/>
+                <a16:creationId xmlns:a16="http://schemas.microsoft.com/office/drawing/2014/main" id="{F1C002A0-5827-4A53-8C66-19BBDB237658}"/>
               </a:ext>
             </a:extLst>
           </p:cNvPr>
@@ -11149,7 +11149,7 @@
           <p:cNvPr id="26" name="Ellipse 25">
             <a:extLst>
               <a:ext uri="{FF2B5EF4-FFF2-40B4-BE49-F238E27FC236}">
-                <a16:creationId xmlns:a16="http://schemas.microsoft.com/office/drawing/2014/main" xmlns="" id="{2044A47E-6FCB-44C3-A3F1-4111163DE424}"/>
+                <a16:creationId xmlns:a16="http://schemas.microsoft.com/office/drawing/2014/main" id="{2044A47E-6FCB-44C3-A3F1-4111163DE424}"/>
               </a:ext>
             </a:extLst>
           </p:cNvPr>
@@ -11201,7 +11201,7 @@
           <p:cNvPr id="29" name="Connecteur droit avec flèche 28">
             <a:extLst>
               <a:ext uri="{FF2B5EF4-FFF2-40B4-BE49-F238E27FC236}">
-                <a16:creationId xmlns:a16="http://schemas.microsoft.com/office/drawing/2014/main" xmlns="" id="{77E192B5-E945-4CB8-8073-592991F090D0}"/>
+                <a16:creationId xmlns:a16="http://schemas.microsoft.com/office/drawing/2014/main" id="{77E192B5-E945-4CB8-8073-592991F090D0}"/>
               </a:ext>
             </a:extLst>
           </p:cNvPr>
@@ -11244,7 +11244,7 @@
           <p:cNvPr id="32" name="ZoneTexte 31">
             <a:extLst>
               <a:ext uri="{FF2B5EF4-FFF2-40B4-BE49-F238E27FC236}">
-                <a16:creationId xmlns:a16="http://schemas.microsoft.com/office/drawing/2014/main" xmlns="" id="{E4EB0A52-5E61-4F3A-A421-7E5999A38C46}"/>
+                <a16:creationId xmlns:a16="http://schemas.microsoft.com/office/drawing/2014/main" id="{E4EB0A52-5E61-4F3A-A421-7E5999A38C46}"/>
               </a:ext>
             </a:extLst>
           </p:cNvPr>
@@ -11280,7 +11280,7 @@
           <p:cNvPr id="36" name="Ellipse 35">
             <a:extLst>
               <a:ext uri="{FF2B5EF4-FFF2-40B4-BE49-F238E27FC236}">
-                <a16:creationId xmlns:a16="http://schemas.microsoft.com/office/drawing/2014/main" xmlns="" id="{7590F503-55F1-4E8E-B2AE-65E712222F8B}"/>
+                <a16:creationId xmlns:a16="http://schemas.microsoft.com/office/drawing/2014/main" id="{7590F503-55F1-4E8E-B2AE-65E712222F8B}"/>
               </a:ext>
             </a:extLst>
           </p:cNvPr>
@@ -11330,7 +11330,7 @@
           <p:cNvPr id="37" name="Connecteur droit avec flèche 36">
             <a:extLst>
               <a:ext uri="{FF2B5EF4-FFF2-40B4-BE49-F238E27FC236}">
-                <a16:creationId xmlns:a16="http://schemas.microsoft.com/office/drawing/2014/main" xmlns="" id="{85C891E8-9F25-4144-A7C1-2E4B009E93A6}"/>
+                <a16:creationId xmlns:a16="http://schemas.microsoft.com/office/drawing/2014/main" id="{85C891E8-9F25-4144-A7C1-2E4B009E93A6}"/>
               </a:ext>
             </a:extLst>
           </p:cNvPr>
@@ -11373,7 +11373,7 @@
           <p:cNvPr id="41" name="ZoneTexte 40">
             <a:extLst>
               <a:ext uri="{FF2B5EF4-FFF2-40B4-BE49-F238E27FC236}">
-                <a16:creationId xmlns:a16="http://schemas.microsoft.com/office/drawing/2014/main" xmlns="" id="{6DC5A78C-A20D-4C5B-B12A-05C991C514BF}"/>
+                <a16:creationId xmlns:a16="http://schemas.microsoft.com/office/drawing/2014/main" id="{6DC5A78C-A20D-4C5B-B12A-05C991C514BF}"/>
               </a:ext>
             </a:extLst>
           </p:cNvPr>
@@ -11409,7 +11409,7 @@
           <p:cNvPr id="44" name="Ellipse 43">
             <a:extLst>
               <a:ext uri="{FF2B5EF4-FFF2-40B4-BE49-F238E27FC236}">
-                <a16:creationId xmlns:a16="http://schemas.microsoft.com/office/drawing/2014/main" xmlns="" id="{9EF68C40-A41C-453A-A9F5-A84A1A782149}"/>
+                <a16:creationId xmlns:a16="http://schemas.microsoft.com/office/drawing/2014/main" id="{9EF68C40-A41C-453A-A9F5-A84A1A782149}"/>
               </a:ext>
             </a:extLst>
           </p:cNvPr>
@@ -11459,7 +11459,7 @@
           <p:cNvPr id="46" name="Connecteur droit avec flèche 45">
             <a:extLst>
               <a:ext uri="{FF2B5EF4-FFF2-40B4-BE49-F238E27FC236}">
-                <a16:creationId xmlns:a16="http://schemas.microsoft.com/office/drawing/2014/main" xmlns="" id="{4E0D0912-C247-4B87-8A18-1B611D1F795E}"/>
+                <a16:creationId xmlns:a16="http://schemas.microsoft.com/office/drawing/2014/main" id="{4E0D0912-C247-4B87-8A18-1B611D1F795E}"/>
               </a:ext>
             </a:extLst>
           </p:cNvPr>
@@ -11500,7 +11500,7 @@
           <p:cNvPr id="47" name="ZoneTexte 46">
             <a:extLst>
               <a:ext uri="{FF2B5EF4-FFF2-40B4-BE49-F238E27FC236}">
-                <a16:creationId xmlns:a16="http://schemas.microsoft.com/office/drawing/2014/main" xmlns="" id="{08DEFA4B-726A-4B98-B44E-9055B76E0672}"/>
+                <a16:creationId xmlns:a16="http://schemas.microsoft.com/office/drawing/2014/main" id="{08DEFA4B-726A-4B98-B44E-9055B76E0672}"/>
               </a:ext>
             </a:extLst>
           </p:cNvPr>
@@ -11537,7 +11537,7 @@
           <p:cNvPr id="48" name="Connecteur droit avec flèche 47">
             <a:extLst>
               <a:ext uri="{FF2B5EF4-FFF2-40B4-BE49-F238E27FC236}">
-                <a16:creationId xmlns:a16="http://schemas.microsoft.com/office/drawing/2014/main" xmlns="" id="{BA94399E-FE56-49CC-9CF5-7888AF70732D}"/>
+                <a16:creationId xmlns:a16="http://schemas.microsoft.com/office/drawing/2014/main" id="{BA94399E-FE56-49CC-9CF5-7888AF70732D}"/>
               </a:ext>
             </a:extLst>
           </p:cNvPr>
@@ -11580,7 +11580,7 @@
           <p:cNvPr id="52" name="ZoneTexte 51">
             <a:extLst>
               <a:ext uri="{FF2B5EF4-FFF2-40B4-BE49-F238E27FC236}">
-                <a16:creationId xmlns:a16="http://schemas.microsoft.com/office/drawing/2014/main" xmlns="" id="{A2399522-11C7-4D9E-8EE6-072CF8475AB7}"/>
+                <a16:creationId xmlns:a16="http://schemas.microsoft.com/office/drawing/2014/main" id="{A2399522-11C7-4D9E-8EE6-072CF8475AB7}"/>
               </a:ext>
             </a:extLst>
           </p:cNvPr>
@@ -11616,7 +11616,7 @@
           <p:cNvPr id="54" name="Connecteur : en arc 53">
             <a:extLst>
               <a:ext uri="{FF2B5EF4-FFF2-40B4-BE49-F238E27FC236}">
-                <a16:creationId xmlns:a16="http://schemas.microsoft.com/office/drawing/2014/main" xmlns="" id="{87AF58BA-DAED-4C39-9F9D-826A9E9BB8FA}"/>
+                <a16:creationId xmlns:a16="http://schemas.microsoft.com/office/drawing/2014/main" id="{87AF58BA-DAED-4C39-9F9D-826A9E9BB8FA}"/>
               </a:ext>
             </a:extLst>
           </p:cNvPr>
@@ -11660,7 +11660,7 @@
           <p:cNvPr id="56" name="ZoneTexte 55">
             <a:extLst>
               <a:ext uri="{FF2B5EF4-FFF2-40B4-BE49-F238E27FC236}">
-                <a16:creationId xmlns:a16="http://schemas.microsoft.com/office/drawing/2014/main" xmlns="" id="{2283845F-75D6-434D-8168-F02C7E37191C}"/>
+                <a16:creationId xmlns:a16="http://schemas.microsoft.com/office/drawing/2014/main" id="{2283845F-75D6-434D-8168-F02C7E37191C}"/>
               </a:ext>
             </a:extLst>
           </p:cNvPr>
@@ -11696,7 +11696,7 @@
           <p:cNvPr id="58" name="Ellipse 57">
             <a:extLst>
               <a:ext uri="{FF2B5EF4-FFF2-40B4-BE49-F238E27FC236}">
-                <a16:creationId xmlns:a16="http://schemas.microsoft.com/office/drawing/2014/main" xmlns="" id="{D3BE15D0-A757-4A44-A465-F5C3D1CCA883}"/>
+                <a16:creationId xmlns:a16="http://schemas.microsoft.com/office/drawing/2014/main" id="{D3BE15D0-A757-4A44-A465-F5C3D1CCA883}"/>
               </a:ext>
             </a:extLst>
           </p:cNvPr>
@@ -11746,7 +11746,7 @@
           <p:cNvPr id="59" name="Connecteur droit avec flèche 58">
             <a:extLst>
               <a:ext uri="{FF2B5EF4-FFF2-40B4-BE49-F238E27FC236}">
-                <a16:creationId xmlns:a16="http://schemas.microsoft.com/office/drawing/2014/main" xmlns="" id="{6FEDD379-E6E4-4BDB-A737-D1E5AA41683F}"/>
+                <a16:creationId xmlns:a16="http://schemas.microsoft.com/office/drawing/2014/main" id="{6FEDD379-E6E4-4BDB-A737-D1E5AA41683F}"/>
               </a:ext>
             </a:extLst>
           </p:cNvPr>
@@ -11788,7 +11788,7 @@
           <p:cNvPr id="63" name="Connecteur droit avec flèche 62">
             <a:extLst>
               <a:ext uri="{FF2B5EF4-FFF2-40B4-BE49-F238E27FC236}">
-                <a16:creationId xmlns:a16="http://schemas.microsoft.com/office/drawing/2014/main" xmlns="" id="{6E559E57-76EE-48EE-96D3-0237FA8F03B6}"/>
+                <a16:creationId xmlns:a16="http://schemas.microsoft.com/office/drawing/2014/main" id="{6E559E57-76EE-48EE-96D3-0237FA8F03B6}"/>
               </a:ext>
             </a:extLst>
           </p:cNvPr>
@@ -11831,7 +11831,7 @@
           <p:cNvPr id="67" name="ZoneTexte 66">
             <a:extLst>
               <a:ext uri="{FF2B5EF4-FFF2-40B4-BE49-F238E27FC236}">
-                <a16:creationId xmlns:a16="http://schemas.microsoft.com/office/drawing/2014/main" xmlns="" id="{365C61A8-1FEA-4587-B400-7B73193CC1C4}"/>
+                <a16:creationId xmlns:a16="http://schemas.microsoft.com/office/drawing/2014/main" id="{365C61A8-1FEA-4587-B400-7B73193CC1C4}"/>
               </a:ext>
             </a:extLst>
           </p:cNvPr>
@@ -11867,7 +11867,7 @@
           <p:cNvPr id="69" name="Ellipse 68">
             <a:extLst>
               <a:ext uri="{FF2B5EF4-FFF2-40B4-BE49-F238E27FC236}">
-                <a16:creationId xmlns:a16="http://schemas.microsoft.com/office/drawing/2014/main" xmlns="" id="{55F03CE9-27A8-47A7-ACD9-48ADD1222CAB}"/>
+                <a16:creationId xmlns:a16="http://schemas.microsoft.com/office/drawing/2014/main" id="{55F03CE9-27A8-47A7-ACD9-48ADD1222CAB}"/>
               </a:ext>
             </a:extLst>
           </p:cNvPr>
@@ -11922,7 +11922,7 @@
           <p:cNvPr id="70" name="Connecteur droit avec flèche 69">
             <a:extLst>
               <a:ext uri="{FF2B5EF4-FFF2-40B4-BE49-F238E27FC236}">
-                <a16:creationId xmlns:a16="http://schemas.microsoft.com/office/drawing/2014/main" xmlns="" id="{C0B28957-4EF0-4A7B-83D8-3E28C3358D71}"/>
+                <a16:creationId xmlns:a16="http://schemas.microsoft.com/office/drawing/2014/main" id="{C0B28957-4EF0-4A7B-83D8-3E28C3358D71}"/>
               </a:ext>
             </a:extLst>
           </p:cNvPr>
@@ -11965,7 +11965,7 @@
           <p:cNvPr id="74" name="ZoneTexte 73">
             <a:extLst>
               <a:ext uri="{FF2B5EF4-FFF2-40B4-BE49-F238E27FC236}">
-                <a16:creationId xmlns:a16="http://schemas.microsoft.com/office/drawing/2014/main" xmlns="" id="{B982874C-69B0-4192-9858-444EFB60854D}"/>
+                <a16:creationId xmlns:a16="http://schemas.microsoft.com/office/drawing/2014/main" id="{B982874C-69B0-4192-9858-444EFB60854D}"/>
               </a:ext>
             </a:extLst>
           </p:cNvPr>
@@ -12000,7 +12000,7 @@
           <p:cNvPr id="80" name="Ellipse 79">
             <a:extLst>
               <a:ext uri="{FF2B5EF4-FFF2-40B4-BE49-F238E27FC236}">
-                <a16:creationId xmlns:a16="http://schemas.microsoft.com/office/drawing/2014/main" xmlns="" id="{B0AAC6C2-7B66-4959-B30A-688160A2794A}"/>
+                <a16:creationId xmlns:a16="http://schemas.microsoft.com/office/drawing/2014/main" id="{B0AAC6C2-7B66-4959-B30A-688160A2794A}"/>
               </a:ext>
             </a:extLst>
           </p:cNvPr>
@@ -12053,7 +12053,7 @@
           <p:cNvPr id="81" name="Connecteur droit avec flèche 80">
             <a:extLst>
               <a:ext uri="{FF2B5EF4-FFF2-40B4-BE49-F238E27FC236}">
-                <a16:creationId xmlns:a16="http://schemas.microsoft.com/office/drawing/2014/main" xmlns="" id="{1D51AAC6-D4CC-404F-9667-2FF9D89895D3}"/>
+                <a16:creationId xmlns:a16="http://schemas.microsoft.com/office/drawing/2014/main" id="{1D51AAC6-D4CC-404F-9667-2FF9D89895D3}"/>
               </a:ext>
             </a:extLst>
           </p:cNvPr>
@@ -12096,7 +12096,7 @@
           <p:cNvPr id="88" name="ZoneTexte 87">
             <a:extLst>
               <a:ext uri="{FF2B5EF4-FFF2-40B4-BE49-F238E27FC236}">
-                <a16:creationId xmlns:a16="http://schemas.microsoft.com/office/drawing/2014/main" xmlns="" id="{066E6F3D-A7C4-43A3-8B76-B69D6E74340E}"/>
+                <a16:creationId xmlns:a16="http://schemas.microsoft.com/office/drawing/2014/main" id="{066E6F3D-A7C4-43A3-8B76-B69D6E74340E}"/>
               </a:ext>
             </a:extLst>
           </p:cNvPr>
@@ -12169,7 +12169,7 @@
           <p:cNvPr id="5" name="ZoneTexte 4">
             <a:extLst>
               <a:ext uri="{FF2B5EF4-FFF2-40B4-BE49-F238E27FC236}">
-                <a16:creationId xmlns:a16="http://schemas.microsoft.com/office/drawing/2014/main" xmlns="" id="{25D0CFDD-F8D9-4498-A666-F31BA473AEDD}"/>
+                <a16:creationId xmlns:a16="http://schemas.microsoft.com/office/drawing/2014/main" id="{25D0CFDD-F8D9-4498-A666-F31BA473AEDD}"/>
               </a:ext>
             </a:extLst>
           </p:cNvPr>
@@ -12204,7 +12204,7 @@
           <p:cNvPr id="33" name="Ellipse 32">
             <a:extLst>
               <a:ext uri="{FF2B5EF4-FFF2-40B4-BE49-F238E27FC236}">
-                <a16:creationId xmlns:a16="http://schemas.microsoft.com/office/drawing/2014/main" xmlns="" id="{89FCD844-DF7E-40C9-9D11-022F7FE63189}"/>
+                <a16:creationId xmlns:a16="http://schemas.microsoft.com/office/drawing/2014/main" id="{89FCD844-DF7E-40C9-9D11-022F7FE63189}"/>
               </a:ext>
             </a:extLst>
           </p:cNvPr>
@@ -12254,7 +12254,7 @@
           <p:cNvPr id="13" name="Connecteur droit avec flèche 12">
             <a:extLst>
               <a:ext uri="{FF2B5EF4-FFF2-40B4-BE49-F238E27FC236}">
-                <a16:creationId xmlns:a16="http://schemas.microsoft.com/office/drawing/2014/main" xmlns="" id="{6589CEFF-63AD-48E0-B8C2-2B9C42EE3BA1}"/>
+                <a16:creationId xmlns:a16="http://schemas.microsoft.com/office/drawing/2014/main" id="{6589CEFF-63AD-48E0-B8C2-2B9C42EE3BA1}"/>
               </a:ext>
             </a:extLst>
           </p:cNvPr>
@@ -12297,7 +12297,7 @@
           <p:cNvPr id="3" name="Ellipse 2">
             <a:extLst>
               <a:ext uri="{FF2B5EF4-FFF2-40B4-BE49-F238E27FC236}">
-                <a16:creationId xmlns:a16="http://schemas.microsoft.com/office/drawing/2014/main" xmlns="" id="{B48A28A4-F86C-489F-903E-CDB2F959EE1D}"/>
+                <a16:creationId xmlns:a16="http://schemas.microsoft.com/office/drawing/2014/main" id="{B48A28A4-F86C-489F-903E-CDB2F959EE1D}"/>
               </a:ext>
             </a:extLst>
           </p:cNvPr>
@@ -12347,7 +12347,7 @@
           <p:cNvPr id="6" name="Ellipse 5">
             <a:extLst>
               <a:ext uri="{FF2B5EF4-FFF2-40B4-BE49-F238E27FC236}">
-                <a16:creationId xmlns:a16="http://schemas.microsoft.com/office/drawing/2014/main" xmlns="" id="{E4E1C394-BCB0-41C3-90F3-25491E2FC76D}"/>
+                <a16:creationId xmlns:a16="http://schemas.microsoft.com/office/drawing/2014/main" id="{E4E1C394-BCB0-41C3-90F3-25491E2FC76D}"/>
               </a:ext>
             </a:extLst>
           </p:cNvPr>
@@ -12385,7 +12385,7 @@
           <a:p>
             <a:pPr algn="ctr"/>
             <a:r>
-              <a:rPr lang="fr-BE" sz="1200" b="1" dirty="0" smtClean="0"/>
+              <a:rPr lang="fr-BE" sz="1200" b="1" dirty="0"/>
               <a:t>No existing connection</a:t>
             </a:r>
             <a:endParaRPr lang="en-GB" sz="1600" b="1" dirty="0"/>
@@ -12397,7 +12397,7 @@
           <p:cNvPr id="14" name="Connecteur droit avec flèche 13">
             <a:extLst>
               <a:ext uri="{FF2B5EF4-FFF2-40B4-BE49-F238E27FC236}">
-                <a16:creationId xmlns:a16="http://schemas.microsoft.com/office/drawing/2014/main" xmlns="" id="{DBE50BE1-AE29-4545-99F7-417A2059523D}"/>
+                <a16:creationId xmlns:a16="http://schemas.microsoft.com/office/drawing/2014/main" id="{DBE50BE1-AE29-4545-99F7-417A2059523D}"/>
               </a:ext>
             </a:extLst>
           </p:cNvPr>
@@ -12440,7 +12440,7 @@
           <p:cNvPr id="21" name="ZoneTexte 20">
             <a:extLst>
               <a:ext uri="{FF2B5EF4-FFF2-40B4-BE49-F238E27FC236}">
-                <a16:creationId xmlns:a16="http://schemas.microsoft.com/office/drawing/2014/main" xmlns="" id="{69B8A459-4007-4744-8138-893C37E6704D}"/>
+                <a16:creationId xmlns:a16="http://schemas.microsoft.com/office/drawing/2014/main" id="{69B8A459-4007-4744-8138-893C37E6704D}"/>
               </a:ext>
             </a:extLst>
           </p:cNvPr>
@@ -12481,7 +12481,7 @@
           <p:cNvPr id="10" name="Connecteur droit avec flèche 9">
             <a:extLst>
               <a:ext uri="{FF2B5EF4-FFF2-40B4-BE49-F238E27FC236}">
-                <a16:creationId xmlns:a16="http://schemas.microsoft.com/office/drawing/2014/main" xmlns="" id="{6589CEFF-63AD-48E0-B8C2-2B9C42EE3BA1}"/>
+                <a16:creationId xmlns:a16="http://schemas.microsoft.com/office/drawing/2014/main" id="{6589CEFF-63AD-48E0-B8C2-2B9C42EE3BA1}"/>
               </a:ext>
             </a:extLst>
           </p:cNvPr>
@@ -12524,7 +12524,7 @@
           <p:cNvPr id="11" name="Ellipse 10">
             <a:extLst>
               <a:ext uri="{FF2B5EF4-FFF2-40B4-BE49-F238E27FC236}">
-                <a16:creationId xmlns:a16="http://schemas.microsoft.com/office/drawing/2014/main" xmlns="" id="{B48A28A4-F86C-489F-903E-CDB2F959EE1D}"/>
+                <a16:creationId xmlns:a16="http://schemas.microsoft.com/office/drawing/2014/main" id="{B48A28A4-F86C-489F-903E-CDB2F959EE1D}"/>
               </a:ext>
             </a:extLst>
           </p:cNvPr>
@@ -12563,11 +12563,7 @@
             <a:pPr algn="ctr"/>
             <a:r>
               <a:rPr lang="fr-BE" sz="1200" b="1" dirty="0"/>
-              <a:t>Existing </a:t>
-            </a:r>
-            <a:r>
-              <a:rPr lang="fr-BE" sz="1200" b="1" dirty="0" smtClean="0"/>
-              <a:t>connection with 0-length </a:t>
+              <a:t>Existing connection with 0-length </a:t>
             </a:r>
             <a:endParaRPr lang="en-GB" sz="1600" b="1" dirty="0"/>
           </a:p>
@@ -12578,7 +12574,7 @@
           <p:cNvPr id="12" name="ZoneTexte 11">
             <a:extLst>
               <a:ext uri="{FF2B5EF4-FFF2-40B4-BE49-F238E27FC236}">
-                <a16:creationId xmlns:a16="http://schemas.microsoft.com/office/drawing/2014/main" xmlns="" id="{69B8A459-4007-4744-8138-893C37E6704D}"/>
+                <a16:creationId xmlns:a16="http://schemas.microsoft.com/office/drawing/2014/main" id="{69B8A459-4007-4744-8138-893C37E6704D}"/>
               </a:ext>
             </a:extLst>
           </p:cNvPr>
@@ -12603,33 +12599,23 @@
           <a:p>
             <a:r>
               <a:rPr lang="en-GB" sz="1200" dirty="0"/>
-              <a:t>length Destination C</a:t>
-            </a:r>
-            <a:r>
-              <a:rPr lang="en-GB" sz="1200" dirty="0" smtClean="0"/>
-              <a:t>ID ==0</a:t>
-            </a:r>
+              <a:t>length Destination CID ==0</a:t>
+            </a:r>
+          </a:p>
+          <a:p>
+            <a:r>
+              <a:rPr lang="en-GB" sz="1200" dirty="0"/>
+              <a:t>Destination CID corresponding</a:t>
+            </a:r>
+          </a:p>
+          <a:p>
             <a:endParaRPr lang="en-GB" sz="1200" dirty="0"/>
           </a:p>
           <a:p>
             <a:r>
               <a:rPr lang="en-GB" sz="1200" dirty="0"/>
-              <a:t>Destination CID </a:t>
-            </a:r>
-            <a:r>
-              <a:rPr lang="en-GB" sz="1200" dirty="0" smtClean="0"/>
-              <a:t>corresponding</a:t>
-            </a:r>
-          </a:p>
-          <a:p>
-            <a:endParaRPr lang="en-GB" sz="1200" dirty="0"/>
-          </a:p>
-          <a:p>
-            <a:r>
-              <a:rPr lang="en-GB" sz="1200" dirty="0" smtClean="0"/>
               <a:t>(only port and address)</a:t>
             </a:r>
-            <a:endParaRPr lang="en-GB" sz="1200" dirty="0"/>
           </a:p>
         </p:txBody>
       </p:sp>
@@ -12638,7 +12624,7 @@
           <p:cNvPr id="20" name="Ellipse 19">
             <a:extLst>
               <a:ext uri="{FF2B5EF4-FFF2-40B4-BE49-F238E27FC236}">
-                <a16:creationId xmlns:a16="http://schemas.microsoft.com/office/drawing/2014/main" xmlns="" id="{E4E1C394-BCB0-41C3-90F3-25491E2FC76D}"/>
+                <a16:creationId xmlns:a16="http://schemas.microsoft.com/office/drawing/2014/main" id="{E4E1C394-BCB0-41C3-90F3-25491E2FC76D}"/>
               </a:ext>
             </a:extLst>
           </p:cNvPr>
@@ -12688,7 +12674,7 @@
           <p:cNvPr id="22" name="Ellipse 21">
             <a:extLst>
               <a:ext uri="{FF2B5EF4-FFF2-40B4-BE49-F238E27FC236}">
-                <a16:creationId xmlns:a16="http://schemas.microsoft.com/office/drawing/2014/main" xmlns="" id="{B0AAC6C2-7B66-4959-B30A-688160A2794A}"/>
+                <a16:creationId xmlns:a16="http://schemas.microsoft.com/office/drawing/2014/main" id="{B0AAC6C2-7B66-4959-B30A-688160A2794A}"/>
               </a:ext>
             </a:extLst>
           </p:cNvPr>
@@ -12729,7 +12715,7 @@
           <a:p>
             <a:pPr algn="ctr"/>
             <a:r>
-              <a:rPr lang="fr-BE" sz="1100" b="1" dirty="0" smtClean="0"/>
+              <a:rPr lang="fr-BE" sz="1100" b="1" dirty="0"/>
               <a:t>Connection Unusable</a:t>
             </a:r>
             <a:endParaRPr lang="en-GB" sz="1100" b="1" dirty="0"/>
@@ -12741,7 +12727,7 @@
           <p:cNvPr id="24" name="Connecteur droit avec flèche 23">
             <a:extLst>
               <a:ext uri="{FF2B5EF4-FFF2-40B4-BE49-F238E27FC236}">
-                <a16:creationId xmlns:a16="http://schemas.microsoft.com/office/drawing/2014/main" xmlns="" id="{DBE50BE1-AE29-4545-99F7-417A2059523D}"/>
+                <a16:creationId xmlns:a16="http://schemas.microsoft.com/office/drawing/2014/main" id="{DBE50BE1-AE29-4545-99F7-417A2059523D}"/>
               </a:ext>
             </a:extLst>
           </p:cNvPr>
@@ -12784,7 +12770,7 @@
           <p:cNvPr id="28" name="Connecteur droit avec flèche 27">
             <a:extLst>
               <a:ext uri="{FF2B5EF4-FFF2-40B4-BE49-F238E27FC236}">
-                <a16:creationId xmlns:a16="http://schemas.microsoft.com/office/drawing/2014/main" xmlns="" id="{DBE50BE1-AE29-4545-99F7-417A2059523D}"/>
+                <a16:creationId xmlns:a16="http://schemas.microsoft.com/office/drawing/2014/main" id="{DBE50BE1-AE29-4545-99F7-417A2059523D}"/>
               </a:ext>
             </a:extLst>
           </p:cNvPr>
@@ -12827,7 +12813,7 @@
           <p:cNvPr id="32" name="ZoneTexte 31">
             <a:extLst>
               <a:ext uri="{FF2B5EF4-FFF2-40B4-BE49-F238E27FC236}">
-                <a16:creationId xmlns:a16="http://schemas.microsoft.com/office/drawing/2014/main" xmlns="" id="{E4EB0A52-5E61-4F3A-A421-7E5999A38C46}"/>
+                <a16:creationId xmlns:a16="http://schemas.microsoft.com/office/drawing/2014/main" id="{E4EB0A52-5E61-4F3A-A421-7E5999A38C46}"/>
               </a:ext>
             </a:extLst>
           </p:cNvPr>
@@ -12852,7 +12838,7 @@
           <a:p>
             <a:pPr algn="ctr"/>
             <a:r>
-              <a:rPr lang="en-GB" sz="1400" dirty="0" smtClean="0"/>
+              <a:rPr lang="en-GB" sz="1400" dirty="0"/>
               <a:t>If packets inconsistent with</a:t>
             </a:r>
           </a:p>
@@ -12860,20 +12846,15 @@
             <a:pPr algn="ctr"/>
             <a:r>
               <a:rPr lang="en-GB" sz="1400" dirty="0"/>
-              <a:t>s</a:t>
-            </a:r>
-            <a:r>
-              <a:rPr lang="en-GB" sz="1400" dirty="0" smtClean="0"/>
-              <a:t>tate of connection</a:t>
+              <a:t>state of connection</a:t>
             </a:r>
           </a:p>
           <a:p>
             <a:pPr algn="ctr"/>
             <a:r>
-              <a:rPr lang="en-GB" sz="1400" dirty="0" smtClean="0"/>
+              <a:rPr lang="en-GB" sz="1400" dirty="0"/>
               <a:t>(wrong version, protection, …)</a:t>
             </a:r>
-            <a:endParaRPr lang="en-GB" sz="1400" dirty="0"/>
           </a:p>
         </p:txBody>
       </p:sp>
@@ -12882,7 +12863,7 @@
           <p:cNvPr id="34" name="Ellipse 33">
             <a:extLst>
               <a:ext uri="{FF2B5EF4-FFF2-40B4-BE49-F238E27FC236}">
-                <a16:creationId xmlns:a16="http://schemas.microsoft.com/office/drawing/2014/main" xmlns="" id="{B0AAC6C2-7B66-4959-B30A-688160A2794A}"/>
+                <a16:creationId xmlns:a16="http://schemas.microsoft.com/office/drawing/2014/main" id="{B0AAC6C2-7B66-4959-B30A-688160A2794A}"/>
               </a:ext>
             </a:extLst>
           </p:cNvPr>
@@ -12923,7 +12904,7 @@
           <a:p>
             <a:pPr algn="ctr"/>
             <a:r>
-              <a:rPr lang="fr-BE" sz="1100" b="1" dirty="0" smtClean="0"/>
+              <a:rPr lang="fr-BE" sz="1100" b="1" dirty="0"/>
               <a:t>Packet discards</a:t>
             </a:r>
             <a:endParaRPr lang="en-GB" sz="1100" b="1" dirty="0"/>
@@ -12935,7 +12916,7 @@
           <p:cNvPr id="35" name="Connecteur droit avec flèche 34">
             <a:extLst>
               <a:ext uri="{FF2B5EF4-FFF2-40B4-BE49-F238E27FC236}">
-                <a16:creationId xmlns:a16="http://schemas.microsoft.com/office/drawing/2014/main" xmlns="" id="{DBE50BE1-AE29-4545-99F7-417A2059523D}"/>
+                <a16:creationId xmlns:a16="http://schemas.microsoft.com/office/drawing/2014/main" id="{DBE50BE1-AE29-4545-99F7-417A2059523D}"/>
               </a:ext>
             </a:extLst>
           </p:cNvPr>
@@ -12978,7 +12959,7 @@
           <p:cNvPr id="37" name="Connecteur droit avec flèche 36">
             <a:extLst>
               <a:ext uri="{FF2B5EF4-FFF2-40B4-BE49-F238E27FC236}">
-                <a16:creationId xmlns:a16="http://schemas.microsoft.com/office/drawing/2014/main" xmlns="" id="{DBE50BE1-AE29-4545-99F7-417A2059523D}"/>
+                <a16:creationId xmlns:a16="http://schemas.microsoft.com/office/drawing/2014/main" id="{DBE50BE1-AE29-4545-99F7-417A2059523D}"/>
               </a:ext>
             </a:extLst>
           </p:cNvPr>
@@ -13021,7 +13002,7 @@
           <p:cNvPr id="40" name="ZoneTexte 39">
             <a:extLst>
               <a:ext uri="{FF2B5EF4-FFF2-40B4-BE49-F238E27FC236}">
-                <a16:creationId xmlns:a16="http://schemas.microsoft.com/office/drawing/2014/main" xmlns="" id="{E4EB0A52-5E61-4F3A-A421-7E5999A38C46}"/>
+                <a16:creationId xmlns:a16="http://schemas.microsoft.com/office/drawing/2014/main" id="{E4EB0A52-5E61-4F3A-A421-7E5999A38C46}"/>
               </a:ext>
             </a:extLst>
           </p:cNvPr>
@@ -13046,10 +13027,9 @@
           <a:p>
             <a:pPr algn="ctr"/>
             <a:r>
-              <a:rPr lang="en-GB" sz="1400" dirty="0" smtClean="0"/>
+              <a:rPr lang="en-GB" sz="1400" dirty="0"/>
               <a:t>Stateless Reset</a:t>
             </a:r>
-            <a:endParaRPr lang="en-GB" sz="1400" dirty="0"/>
           </a:p>
         </p:txBody>
       </p:sp>
@@ -13088,7 +13068,7 @@
           <p:cNvPr id="5" name="ZoneTexte 4">
             <a:extLst>
               <a:ext uri="{FF2B5EF4-FFF2-40B4-BE49-F238E27FC236}">
-                <a16:creationId xmlns:a16="http://schemas.microsoft.com/office/drawing/2014/main" xmlns="" id="{25D0CFDD-F8D9-4498-A666-F31BA473AEDD}"/>
+                <a16:creationId xmlns:a16="http://schemas.microsoft.com/office/drawing/2014/main" id="{25D0CFDD-F8D9-4498-A666-F31BA473AEDD}"/>
               </a:ext>
             </a:extLst>
           </p:cNvPr>
@@ -13112,10 +13092,9 @@
           <a:lstStyle/>
           <a:p>
             <a:r>
-              <a:rPr lang="en-GB" sz="2800" b="1" dirty="0" smtClean="0"/>
+              <a:rPr lang="en-GB" sz="2800" b="1" dirty="0"/>
               <a:t>Client Packet Handling</a:t>
             </a:r>
-            <a:endParaRPr lang="en-GB" sz="2800" b="1" dirty="0"/>
           </a:p>
         </p:txBody>
       </p:sp>
@@ -13124,7 +13103,7 @@
           <p:cNvPr id="33" name="Ellipse 32">
             <a:extLst>
               <a:ext uri="{FF2B5EF4-FFF2-40B4-BE49-F238E27FC236}">
-                <a16:creationId xmlns:a16="http://schemas.microsoft.com/office/drawing/2014/main" xmlns="" id="{89FCD844-DF7E-40C9-9D11-022F7FE63189}"/>
+                <a16:creationId xmlns:a16="http://schemas.microsoft.com/office/drawing/2014/main" id="{89FCD844-DF7E-40C9-9D11-022F7FE63189}"/>
               </a:ext>
             </a:extLst>
           </p:cNvPr>
@@ -13162,7 +13141,7 @@
           <a:p>
             <a:pPr algn="ctr"/>
             <a:r>
-              <a:rPr lang="fr-BE" sz="1200" b="1" dirty="0" smtClean="0"/>
+              <a:rPr lang="fr-BE" sz="1200" b="1" dirty="0"/>
               <a:t>Client Receive Packet</a:t>
             </a:r>
             <a:endParaRPr lang="en-GB" sz="1600" b="1" dirty="0"/>
@@ -13174,7 +13153,7 @@
           <p:cNvPr id="13" name="Connecteur droit avec flèche 12">
             <a:extLst>
               <a:ext uri="{FF2B5EF4-FFF2-40B4-BE49-F238E27FC236}">
-                <a16:creationId xmlns:a16="http://schemas.microsoft.com/office/drawing/2014/main" xmlns="" id="{6589CEFF-63AD-48E0-B8C2-2B9C42EE3BA1}"/>
+                <a16:creationId xmlns:a16="http://schemas.microsoft.com/office/drawing/2014/main" id="{6589CEFF-63AD-48E0-B8C2-2B9C42EE3BA1}"/>
               </a:ext>
             </a:extLst>
           </p:cNvPr>
@@ -13217,7 +13196,7 @@
           <p:cNvPr id="3" name="Ellipse 2">
             <a:extLst>
               <a:ext uri="{FF2B5EF4-FFF2-40B4-BE49-F238E27FC236}">
-                <a16:creationId xmlns:a16="http://schemas.microsoft.com/office/drawing/2014/main" xmlns="" id="{B48A28A4-F86C-489F-903E-CDB2F959EE1D}"/>
+                <a16:creationId xmlns:a16="http://schemas.microsoft.com/office/drawing/2014/main" id="{B48A28A4-F86C-489F-903E-CDB2F959EE1D}"/>
               </a:ext>
             </a:extLst>
           </p:cNvPr>
@@ -13255,7 +13234,7 @@
           <a:p>
             <a:pPr algn="ctr"/>
             <a:r>
-              <a:rPr lang="fr-BE" sz="1100" b="1" dirty="0" smtClean="0"/>
+              <a:rPr lang="fr-BE" sz="1100" b="1" dirty="0"/>
               <a:t>DestinationCID  0-length</a:t>
             </a:r>
             <a:endParaRPr lang="en-GB" sz="1400" b="1" dirty="0"/>
@@ -13267,7 +13246,7 @@
           <p:cNvPr id="18" name="ZoneTexte 17">
             <a:extLst>
               <a:ext uri="{FF2B5EF4-FFF2-40B4-BE49-F238E27FC236}">
-                <a16:creationId xmlns:mc="http://schemas.openxmlformats.org/markup-compatibility/2006" xmlns:a14="http://schemas.microsoft.com/office/drawing/2010/main" xmlns:a16="http://schemas.microsoft.com/office/drawing/2014/main" xmlns="" id="{DB737F55-3E4B-44C8-95BF-7E258C52E571}"/>
+                <a16:creationId xmlns:a16="http://schemas.microsoft.com/office/drawing/2014/main" id="{DB737F55-3E4B-44C8-95BF-7E258C52E571}"/>
               </a:ext>
             </a:extLst>
           </p:cNvPr>
@@ -13292,10 +13271,9 @@
           <a:p>
             <a:pPr algn="ctr"/>
             <a:r>
-              <a:rPr lang="en-GB" sz="1400" dirty="0" smtClean="0"/>
+              <a:rPr lang="en-GB" sz="1400" dirty="0"/>
               <a:t>no</a:t>
             </a:r>
-            <a:endParaRPr lang="en-GB" sz="1400" dirty="0"/>
           </a:p>
         </p:txBody>
       </p:sp>
@@ -13304,7 +13282,7 @@
           <p:cNvPr id="2" name="Ellipse 1">
             <a:extLst>
               <a:ext uri="{FF2B5EF4-FFF2-40B4-BE49-F238E27FC236}">
-                <a16:creationId xmlns:a16="http://schemas.microsoft.com/office/drawing/2014/main" xmlns="" id="{248768E0-C1A4-4110-B54A-35EAB18749A4}"/>
+                <a16:creationId xmlns:a16="http://schemas.microsoft.com/office/drawing/2014/main" id="{248768E0-C1A4-4110-B54A-35EAB18749A4}"/>
               </a:ext>
             </a:extLst>
           </p:cNvPr>
@@ -13345,7 +13323,7 @@
           <a:p>
             <a:pPr algn="ctr"/>
             <a:r>
-              <a:rPr lang="fr-BE" sz="1100" b="1" dirty="0" smtClean="0"/>
+              <a:rPr lang="fr-BE" sz="1100" b="1" dirty="0"/>
               <a:t>Packet discard</a:t>
             </a:r>
             <a:endParaRPr lang="en-GB" sz="1100" b="1" dirty="0"/>
@@ -13357,7 +13335,7 @@
           <p:cNvPr id="11" name="Connecteur droit avec flèche 10">
             <a:extLst>
               <a:ext uri="{FF2B5EF4-FFF2-40B4-BE49-F238E27FC236}">
-                <a16:creationId xmlns:a16="http://schemas.microsoft.com/office/drawing/2014/main" xmlns="" id="{8E355309-D41D-48CF-A241-308F250C237D}"/>
+                <a16:creationId xmlns:a16="http://schemas.microsoft.com/office/drawing/2014/main" id="{8E355309-D41D-48CF-A241-308F250C237D}"/>
               </a:ext>
             </a:extLst>
           </p:cNvPr>
@@ -13400,7 +13378,7 @@
           <p:cNvPr id="17" name="Ellipse 16">
             <a:extLst>
               <a:ext uri="{FF2B5EF4-FFF2-40B4-BE49-F238E27FC236}">
-                <a16:creationId xmlns:a16="http://schemas.microsoft.com/office/drawing/2014/main" xmlns="" id="{B48A28A4-F86C-489F-903E-CDB2F959EE1D}"/>
+                <a16:creationId xmlns:a16="http://schemas.microsoft.com/office/drawing/2014/main" id="{B48A28A4-F86C-489F-903E-CDB2F959EE1D}"/>
               </a:ext>
             </a:extLst>
           </p:cNvPr>
@@ -13438,16 +13416,8 @@
           <a:p>
             <a:pPr algn="ctr"/>
             <a:r>
-              <a:rPr lang="fr-BE" sz="1100" b="1" dirty="0" smtClean="0"/>
-              <a:t>DestinationCID  matches client choosen</a:t>
-            </a:r>
-            <a:r>
               <a:rPr lang="fr-BE" sz="1100" b="1" dirty="0"/>
-              <a:t> </a:t>
-            </a:r>
-            <a:r>
-              <a:rPr lang="fr-BE" sz="1100" b="1" dirty="0" smtClean="0"/>
-              <a:t>value</a:t>
+              <a:t>DestinationCID  matches client choosen value</a:t>
             </a:r>
             <a:endParaRPr lang="en-GB" sz="1400" b="1" dirty="0"/>
           </a:p>
@@ -13458,7 +13428,7 @@
           <p:cNvPr id="21" name="Ellipse 20">
             <a:extLst>
               <a:ext uri="{FF2B5EF4-FFF2-40B4-BE49-F238E27FC236}">
-                <a16:creationId xmlns:a16="http://schemas.microsoft.com/office/drawing/2014/main" xmlns="" id="{B48A28A4-F86C-489F-903E-CDB2F959EE1D}"/>
+                <a16:creationId xmlns:a16="http://schemas.microsoft.com/office/drawing/2014/main" id="{B48A28A4-F86C-489F-903E-CDB2F959EE1D}"/>
               </a:ext>
             </a:extLst>
           </p:cNvPr>
@@ -13496,7 +13466,7 @@
           <a:p>
             <a:pPr algn="ctr"/>
             <a:r>
-              <a:rPr lang="fr-BE" sz="1100" b="1" dirty="0" smtClean="0"/>
+              <a:rPr lang="fr-BE" sz="1100" b="1" dirty="0"/>
               <a:t>Client accept 0-length ID</a:t>
             </a:r>
             <a:endParaRPr lang="en-GB" sz="1400" b="1" dirty="0"/>
@@ -13508,7 +13478,7 @@
           <p:cNvPr id="24" name="Connecteur droit avec flèche 23">
             <a:extLst>
               <a:ext uri="{FF2B5EF4-FFF2-40B4-BE49-F238E27FC236}">
-                <a16:creationId xmlns:a16="http://schemas.microsoft.com/office/drawing/2014/main" xmlns="" id="{8E355309-D41D-48CF-A241-308F250C237D}"/>
+                <a16:creationId xmlns:a16="http://schemas.microsoft.com/office/drawing/2014/main" id="{8E355309-D41D-48CF-A241-308F250C237D}"/>
               </a:ext>
             </a:extLst>
           </p:cNvPr>
@@ -13551,7 +13521,7 @@
           <p:cNvPr id="27" name="Connecteur droit avec flèche 26">
             <a:extLst>
               <a:ext uri="{FF2B5EF4-FFF2-40B4-BE49-F238E27FC236}">
-                <a16:creationId xmlns:a16="http://schemas.microsoft.com/office/drawing/2014/main" xmlns="" id="{8E355309-D41D-48CF-A241-308F250C237D}"/>
+                <a16:creationId xmlns:a16="http://schemas.microsoft.com/office/drawing/2014/main" id="{8E355309-D41D-48CF-A241-308F250C237D}"/>
               </a:ext>
             </a:extLst>
           </p:cNvPr>
@@ -13594,7 +13564,7 @@
           <p:cNvPr id="30" name="ZoneTexte 29">
             <a:extLst>
               <a:ext uri="{FF2B5EF4-FFF2-40B4-BE49-F238E27FC236}">
-                <a16:creationId xmlns:mc="http://schemas.openxmlformats.org/markup-compatibility/2006" xmlns:a14="http://schemas.microsoft.com/office/drawing/2010/main" xmlns:a16="http://schemas.microsoft.com/office/drawing/2014/main" xmlns="" id="{DB737F55-3E4B-44C8-95BF-7E258C52E571}"/>
+                <a16:creationId xmlns:a16="http://schemas.microsoft.com/office/drawing/2014/main" id="{DB737F55-3E4B-44C8-95BF-7E258C52E571}"/>
               </a:ext>
             </a:extLst>
           </p:cNvPr>
@@ -13619,10 +13589,9 @@
           <a:p>
             <a:pPr algn="ctr"/>
             <a:r>
-              <a:rPr lang="en-GB" sz="1400" dirty="0" smtClean="0"/>
+              <a:rPr lang="en-GB" sz="1400" dirty="0"/>
               <a:t>no</a:t>
             </a:r>
-            <a:endParaRPr lang="en-GB" sz="1400" dirty="0"/>
           </a:p>
         </p:txBody>
       </p:sp>
@@ -13631,7 +13600,7 @@
           <p:cNvPr id="31" name="Connecteur droit avec flèche 30">
             <a:extLst>
               <a:ext uri="{FF2B5EF4-FFF2-40B4-BE49-F238E27FC236}">
-                <a16:creationId xmlns:a16="http://schemas.microsoft.com/office/drawing/2014/main" xmlns="" id="{8E355309-D41D-48CF-A241-308F250C237D}"/>
+                <a16:creationId xmlns:a16="http://schemas.microsoft.com/office/drawing/2014/main" id="{8E355309-D41D-48CF-A241-308F250C237D}"/>
               </a:ext>
             </a:extLst>
           </p:cNvPr>
@@ -13674,7 +13643,7 @@
           <p:cNvPr id="34" name="ZoneTexte 33">
             <a:extLst>
               <a:ext uri="{FF2B5EF4-FFF2-40B4-BE49-F238E27FC236}">
-                <a16:creationId xmlns:mc="http://schemas.openxmlformats.org/markup-compatibility/2006" xmlns:a14="http://schemas.microsoft.com/office/drawing/2010/main" xmlns:a16="http://schemas.microsoft.com/office/drawing/2014/main" xmlns="" id="{DB737F55-3E4B-44C8-95BF-7E258C52E571}"/>
+                <a16:creationId xmlns:a16="http://schemas.microsoft.com/office/drawing/2014/main" id="{DB737F55-3E4B-44C8-95BF-7E258C52E571}"/>
               </a:ext>
             </a:extLst>
           </p:cNvPr>
@@ -13699,10 +13668,9 @@
           <a:p>
             <a:pPr algn="ctr"/>
             <a:r>
-              <a:rPr lang="en-GB" sz="1400" dirty="0" smtClean="0"/>
+              <a:rPr lang="en-GB" sz="1400" dirty="0"/>
               <a:t>no</a:t>
             </a:r>
-            <a:endParaRPr lang="en-GB" sz="1400" dirty="0"/>
           </a:p>
         </p:txBody>
       </p:sp>
@@ -13711,7 +13679,7 @@
           <p:cNvPr id="35" name="ZoneTexte 34">
             <a:extLst>
               <a:ext uri="{FF2B5EF4-FFF2-40B4-BE49-F238E27FC236}">
-                <a16:creationId xmlns:mc="http://schemas.openxmlformats.org/markup-compatibility/2006" xmlns:a14="http://schemas.microsoft.com/office/drawing/2010/main" xmlns:a16="http://schemas.microsoft.com/office/drawing/2014/main" xmlns="" id="{DB737F55-3E4B-44C8-95BF-7E258C52E571}"/>
+                <a16:creationId xmlns:a16="http://schemas.microsoft.com/office/drawing/2014/main" id="{DB737F55-3E4B-44C8-95BF-7E258C52E571}"/>
               </a:ext>
             </a:extLst>
           </p:cNvPr>
@@ -13736,10 +13704,9 @@
           <a:p>
             <a:pPr algn="ctr"/>
             <a:r>
-              <a:rPr lang="en-GB" sz="1400" dirty="0" smtClean="0"/>
+              <a:rPr lang="en-GB" sz="1400" dirty="0"/>
               <a:t>yes</a:t>
             </a:r>
-            <a:endParaRPr lang="en-GB" sz="1400" dirty="0"/>
           </a:p>
         </p:txBody>
       </p:sp>
@@ -13748,7 +13715,7 @@
           <p:cNvPr id="36" name="Ellipse 35">
             <a:extLst>
               <a:ext uri="{FF2B5EF4-FFF2-40B4-BE49-F238E27FC236}">
-                <a16:creationId xmlns:a16="http://schemas.microsoft.com/office/drawing/2014/main" xmlns="" id="{B48A28A4-F86C-489F-903E-CDB2F959EE1D}"/>
+                <a16:creationId xmlns:a16="http://schemas.microsoft.com/office/drawing/2014/main" id="{B48A28A4-F86C-489F-903E-CDB2F959EE1D}"/>
               </a:ext>
             </a:extLst>
           </p:cNvPr>
@@ -13786,7 +13753,7 @@
           <a:p>
             <a:pPr algn="ctr"/>
             <a:r>
-              <a:rPr lang="fr-BE" sz="1100" b="1" dirty="0" smtClean="0"/>
+              <a:rPr lang="fr-BE" sz="1100" b="1" dirty="0"/>
               <a:t>Match port and local address to identify connection</a:t>
             </a:r>
             <a:endParaRPr lang="en-GB" sz="1400" b="1" dirty="0"/>
@@ -13798,7 +13765,7 @@
           <p:cNvPr id="37" name="Connecteur droit avec flèche 36">
             <a:extLst>
               <a:ext uri="{FF2B5EF4-FFF2-40B4-BE49-F238E27FC236}">
-                <a16:creationId xmlns:a16="http://schemas.microsoft.com/office/drawing/2014/main" xmlns="" id="{8E355309-D41D-48CF-A241-308F250C237D}"/>
+                <a16:creationId xmlns:a16="http://schemas.microsoft.com/office/drawing/2014/main" id="{8E355309-D41D-48CF-A241-308F250C237D}"/>
               </a:ext>
             </a:extLst>
           </p:cNvPr>
@@ -13841,7 +13808,7 @@
           <p:cNvPr id="40" name="ZoneTexte 39">
             <a:extLst>
               <a:ext uri="{FF2B5EF4-FFF2-40B4-BE49-F238E27FC236}">
-                <a16:creationId xmlns:mc="http://schemas.openxmlformats.org/markup-compatibility/2006" xmlns:a14="http://schemas.microsoft.com/office/drawing/2010/main" xmlns:a16="http://schemas.microsoft.com/office/drawing/2014/main" xmlns="" id="{DB737F55-3E4B-44C8-95BF-7E258C52E571}"/>
+                <a16:creationId xmlns:a16="http://schemas.microsoft.com/office/drawing/2014/main" id="{DB737F55-3E4B-44C8-95BF-7E258C52E571}"/>
               </a:ext>
             </a:extLst>
           </p:cNvPr>
@@ -13866,10 +13833,9 @@
           <a:p>
             <a:pPr algn="ctr"/>
             <a:r>
-              <a:rPr lang="en-GB" sz="1400" dirty="0" smtClean="0"/>
+              <a:rPr lang="en-GB" sz="1400" dirty="0"/>
               <a:t>yes</a:t>
             </a:r>
-            <a:endParaRPr lang="en-GB" sz="1400" dirty="0"/>
           </a:p>
         </p:txBody>
       </p:sp>
@@ -13878,7 +13844,7 @@
           <p:cNvPr id="41" name="Connecteur droit avec flèche 40">
             <a:extLst>
               <a:ext uri="{FF2B5EF4-FFF2-40B4-BE49-F238E27FC236}">
-                <a16:creationId xmlns:a16="http://schemas.microsoft.com/office/drawing/2014/main" xmlns="" id="{8E355309-D41D-48CF-A241-308F250C237D}"/>
+                <a16:creationId xmlns:a16="http://schemas.microsoft.com/office/drawing/2014/main" id="{8E355309-D41D-48CF-A241-308F250C237D}"/>
               </a:ext>
             </a:extLst>
           </p:cNvPr>
@@ -13921,7 +13887,7 @@
           <p:cNvPr id="45" name="ZoneTexte 44">
             <a:extLst>
               <a:ext uri="{FF2B5EF4-FFF2-40B4-BE49-F238E27FC236}">
-                <a16:creationId xmlns:mc="http://schemas.openxmlformats.org/markup-compatibility/2006" xmlns:a14="http://schemas.microsoft.com/office/drawing/2010/main" xmlns:a16="http://schemas.microsoft.com/office/drawing/2014/main" xmlns="" id="{DB737F55-3E4B-44C8-95BF-7E258C52E571}"/>
+                <a16:creationId xmlns:a16="http://schemas.microsoft.com/office/drawing/2014/main" id="{DB737F55-3E4B-44C8-95BF-7E258C52E571}"/>
               </a:ext>
             </a:extLst>
           </p:cNvPr>
@@ -13946,10 +13912,9 @@
           <a:p>
             <a:pPr algn="ctr"/>
             <a:r>
-              <a:rPr lang="en-GB" sz="1400" dirty="0" smtClean="0"/>
+              <a:rPr lang="en-GB" sz="1400" dirty="0"/>
               <a:t>no</a:t>
             </a:r>
-            <a:endParaRPr lang="en-GB" sz="1400" dirty="0"/>
           </a:p>
         </p:txBody>
       </p:sp>
@@ -13958,7 +13923,7 @@
           <p:cNvPr id="46" name="Ellipse 45">
             <a:extLst>
               <a:ext uri="{FF2B5EF4-FFF2-40B4-BE49-F238E27FC236}">
-                <a16:creationId xmlns:a16="http://schemas.microsoft.com/office/drawing/2014/main" xmlns="" id="{B48A28A4-F86C-489F-903E-CDB2F959EE1D}"/>
+                <a16:creationId xmlns:a16="http://schemas.microsoft.com/office/drawing/2014/main" id="{B48A28A4-F86C-489F-903E-CDB2F959EE1D}"/>
               </a:ext>
             </a:extLst>
           </p:cNvPr>
@@ -13996,14 +13961,14 @@
           <a:p>
             <a:pPr algn="ctr"/>
             <a:r>
-              <a:rPr lang="fr-BE" sz="1100" b="1" dirty="0" smtClean="0"/>
+              <a:rPr lang="fr-BE" sz="1100" b="1" dirty="0"/>
               <a:t>Encryption Key </a:t>
             </a:r>
           </a:p>
           <a:p>
             <a:pPr algn="ctr"/>
             <a:r>
-              <a:rPr lang="fr-BE" sz="1100" b="1" dirty="0" smtClean="0"/>
+              <a:rPr lang="fr-BE" sz="1100" b="1" dirty="0"/>
               <a:t>Computed </a:t>
             </a:r>
             <a:endParaRPr lang="en-GB" sz="1400" b="1" dirty="0"/>
@@ -14015,7 +13980,7 @@
           <p:cNvPr id="47" name="Connecteur droit avec flèche 46">
             <a:extLst>
               <a:ext uri="{FF2B5EF4-FFF2-40B4-BE49-F238E27FC236}">
-                <a16:creationId xmlns:a16="http://schemas.microsoft.com/office/drawing/2014/main" xmlns="" id="{8E355309-D41D-48CF-A241-308F250C237D}"/>
+                <a16:creationId xmlns:a16="http://schemas.microsoft.com/office/drawing/2014/main" id="{8E355309-D41D-48CF-A241-308F250C237D}"/>
               </a:ext>
             </a:extLst>
           </p:cNvPr>
@@ -14056,7 +14021,7 @@
           <p:cNvPr id="48" name="ZoneTexte 47">
             <a:extLst>
               <a:ext uri="{FF2B5EF4-FFF2-40B4-BE49-F238E27FC236}">
-                <a16:creationId xmlns:mc="http://schemas.openxmlformats.org/markup-compatibility/2006" xmlns:a14="http://schemas.microsoft.com/office/drawing/2010/main" xmlns:a16="http://schemas.microsoft.com/office/drawing/2014/main" xmlns="" id="{DB737F55-3E4B-44C8-95BF-7E258C52E571}"/>
+                <a16:creationId xmlns:a16="http://schemas.microsoft.com/office/drawing/2014/main" id="{DB737F55-3E4B-44C8-95BF-7E258C52E571}"/>
               </a:ext>
             </a:extLst>
           </p:cNvPr>
@@ -14081,10 +14046,9 @@
           <a:p>
             <a:pPr algn="ctr"/>
             <a:r>
-              <a:rPr lang="en-GB" sz="1400" dirty="0" smtClean="0"/>
+              <a:rPr lang="en-GB" sz="1400" dirty="0"/>
               <a:t>yes</a:t>
             </a:r>
-            <a:endParaRPr lang="en-GB" sz="1400" dirty="0"/>
           </a:p>
         </p:txBody>
       </p:sp>
@@ -14093,7 +14057,7 @@
           <p:cNvPr id="49" name="Connecteur droit avec flèche 48">
             <a:extLst>
               <a:ext uri="{FF2B5EF4-FFF2-40B4-BE49-F238E27FC236}">
-                <a16:creationId xmlns:a16="http://schemas.microsoft.com/office/drawing/2014/main" xmlns="" id="{8E355309-D41D-48CF-A241-308F250C237D}"/>
+                <a16:creationId xmlns:a16="http://schemas.microsoft.com/office/drawing/2014/main" id="{8E355309-D41D-48CF-A241-308F250C237D}"/>
               </a:ext>
             </a:extLst>
           </p:cNvPr>
@@ -14136,7 +14100,7 @@
           <p:cNvPr id="52" name="Ellipse 51">
             <a:extLst>
               <a:ext uri="{FF2B5EF4-FFF2-40B4-BE49-F238E27FC236}">
-                <a16:creationId xmlns:a16="http://schemas.microsoft.com/office/drawing/2014/main" xmlns="" id="{B48A28A4-F86C-489F-903E-CDB2F959EE1D}"/>
+                <a16:creationId xmlns:a16="http://schemas.microsoft.com/office/drawing/2014/main" id="{B48A28A4-F86C-489F-903E-CDB2F959EE1D}"/>
               </a:ext>
             </a:extLst>
           </p:cNvPr>
@@ -14174,7 +14138,7 @@
           <a:p>
             <a:pPr algn="ctr"/>
             <a:r>
-              <a:rPr lang="fr-BE" sz="1100" b="1" dirty="0" smtClean="0"/>
+              <a:rPr lang="fr-BE" sz="1100" b="1" dirty="0"/>
               <a:t>Packet buffered</a:t>
             </a:r>
             <a:endParaRPr lang="en-GB" sz="1400" b="1" dirty="0"/>
@@ -14186,7 +14150,7 @@
           <p:cNvPr id="53" name="Connecteur droit avec flèche 52">
             <a:extLst>
               <a:ext uri="{FF2B5EF4-FFF2-40B4-BE49-F238E27FC236}">
-                <a16:creationId xmlns:a16="http://schemas.microsoft.com/office/drawing/2014/main" xmlns="" id="{8E355309-D41D-48CF-A241-308F250C237D}"/>
+                <a16:creationId xmlns:a16="http://schemas.microsoft.com/office/drawing/2014/main" id="{8E355309-D41D-48CF-A241-308F250C237D}"/>
               </a:ext>
             </a:extLst>
           </p:cNvPr>
@@ -14229,7 +14193,7 @@
           <p:cNvPr id="57" name="ZoneTexte 56">
             <a:extLst>
               <a:ext uri="{FF2B5EF4-FFF2-40B4-BE49-F238E27FC236}">
-                <a16:creationId xmlns:mc="http://schemas.openxmlformats.org/markup-compatibility/2006" xmlns:a14="http://schemas.microsoft.com/office/drawing/2010/main" xmlns:a16="http://schemas.microsoft.com/office/drawing/2014/main" xmlns="" id="{DB737F55-3E4B-44C8-95BF-7E258C52E571}"/>
+                <a16:creationId xmlns:a16="http://schemas.microsoft.com/office/drawing/2014/main" id="{DB737F55-3E4B-44C8-95BF-7E258C52E571}"/>
               </a:ext>
             </a:extLst>
           </p:cNvPr>
@@ -14254,10 +14218,9 @@
           <a:p>
             <a:pPr algn="ctr"/>
             <a:r>
-              <a:rPr lang="en-GB" sz="1400" dirty="0" smtClean="0"/>
+              <a:rPr lang="en-GB" sz="1400" dirty="0"/>
               <a:t>no</a:t>
             </a:r>
-            <a:endParaRPr lang="en-GB" sz="1400" dirty="0"/>
           </a:p>
         </p:txBody>
       </p:sp>
@@ -14266,7 +14229,7 @@
           <p:cNvPr id="58" name="Ellipse 57">
             <a:extLst>
               <a:ext uri="{FF2B5EF4-FFF2-40B4-BE49-F238E27FC236}">
-                <a16:creationId xmlns:a16="http://schemas.microsoft.com/office/drawing/2014/main" xmlns="" id="{B48A28A4-F86C-489F-903E-CDB2F959EE1D}"/>
+                <a16:creationId xmlns:a16="http://schemas.microsoft.com/office/drawing/2014/main" id="{B48A28A4-F86C-489F-903E-CDB2F959EE1D}"/>
               </a:ext>
             </a:extLst>
           </p:cNvPr>
@@ -14304,7 +14267,7 @@
           <a:p>
             <a:pPr algn="ctr"/>
             <a:r>
-              <a:rPr lang="fr-BE" sz="1100" b="1" dirty="0" smtClean="0"/>
+              <a:rPr lang="fr-BE" sz="1100" b="1" dirty="0"/>
               <a:t>Version corresponding</a:t>
             </a:r>
             <a:endParaRPr lang="en-GB" sz="1400" b="1" dirty="0"/>
@@ -14316,7 +14279,7 @@
           <p:cNvPr id="59" name="Connecteur droit avec flèche 58">
             <a:extLst>
               <a:ext uri="{FF2B5EF4-FFF2-40B4-BE49-F238E27FC236}">
-                <a16:creationId xmlns:a16="http://schemas.microsoft.com/office/drawing/2014/main" xmlns="" id="{8E355309-D41D-48CF-A241-308F250C237D}"/>
+                <a16:creationId xmlns:a16="http://schemas.microsoft.com/office/drawing/2014/main" id="{8E355309-D41D-48CF-A241-308F250C237D}"/>
               </a:ext>
             </a:extLst>
           </p:cNvPr>
@@ -14359,7 +14322,7 @@
           <p:cNvPr id="62" name="ZoneTexte 61">
             <a:extLst>
               <a:ext uri="{FF2B5EF4-FFF2-40B4-BE49-F238E27FC236}">
-                <a16:creationId xmlns:mc="http://schemas.openxmlformats.org/markup-compatibility/2006" xmlns:a14="http://schemas.microsoft.com/office/drawing/2010/main" xmlns:a16="http://schemas.microsoft.com/office/drawing/2014/main" xmlns="" id="{DB737F55-3E4B-44C8-95BF-7E258C52E571}"/>
+                <a16:creationId xmlns:a16="http://schemas.microsoft.com/office/drawing/2014/main" id="{DB737F55-3E4B-44C8-95BF-7E258C52E571}"/>
               </a:ext>
             </a:extLst>
           </p:cNvPr>
@@ -14384,10 +14347,9 @@
           <a:p>
             <a:pPr algn="ctr"/>
             <a:r>
-              <a:rPr lang="en-GB" sz="1400" dirty="0" smtClean="0"/>
+              <a:rPr lang="en-GB" sz="1400" dirty="0"/>
               <a:t>yes</a:t>
             </a:r>
-            <a:endParaRPr lang="en-GB" sz="1400" dirty="0"/>
           </a:p>
         </p:txBody>
       </p:sp>
@@ -14396,7 +14358,7 @@
           <p:cNvPr id="65" name="Connecteur droit avec flèche 64">
             <a:extLst>
               <a:ext uri="{FF2B5EF4-FFF2-40B4-BE49-F238E27FC236}">
-                <a16:creationId xmlns:a16="http://schemas.microsoft.com/office/drawing/2014/main" xmlns="" id="{8E355309-D41D-48CF-A241-308F250C237D}"/>
+                <a16:creationId xmlns:a16="http://schemas.microsoft.com/office/drawing/2014/main" id="{8E355309-D41D-48CF-A241-308F250C237D}"/>
               </a:ext>
             </a:extLst>
           </p:cNvPr>
@@ -14438,7 +14400,7 @@
           <p:cNvPr id="68" name="ZoneTexte 67">
             <a:extLst>
               <a:ext uri="{FF2B5EF4-FFF2-40B4-BE49-F238E27FC236}">
-                <a16:creationId xmlns:mc="http://schemas.openxmlformats.org/markup-compatibility/2006" xmlns:a14="http://schemas.microsoft.com/office/drawing/2010/main" xmlns:a16="http://schemas.microsoft.com/office/drawing/2014/main" xmlns="" id="{DB737F55-3E4B-44C8-95BF-7E258C52E571}"/>
+                <a16:creationId xmlns:a16="http://schemas.microsoft.com/office/drawing/2014/main" id="{DB737F55-3E4B-44C8-95BF-7E258C52E571}"/>
               </a:ext>
             </a:extLst>
           </p:cNvPr>
@@ -14463,10 +14425,9 @@
           <a:p>
             <a:pPr algn="ctr"/>
             <a:r>
-              <a:rPr lang="en-GB" sz="1400" dirty="0" smtClean="0"/>
+              <a:rPr lang="en-GB" sz="1400" dirty="0"/>
               <a:t>no</a:t>
             </a:r>
-            <a:endParaRPr lang="en-GB" sz="1400" dirty="0"/>
           </a:p>
         </p:txBody>
       </p:sp>
@@ -14505,7 +14466,7 @@
           <p:cNvPr id="5" name="ZoneTexte 4">
             <a:extLst>
               <a:ext uri="{FF2B5EF4-FFF2-40B4-BE49-F238E27FC236}">
-                <a16:creationId xmlns:a16="http://schemas.microsoft.com/office/drawing/2014/main" xmlns="" id="{25D0CFDD-F8D9-4498-A666-F31BA473AEDD}"/>
+                <a16:creationId xmlns:a16="http://schemas.microsoft.com/office/drawing/2014/main" id="{25D0CFDD-F8D9-4498-A666-F31BA473AEDD}"/>
               </a:ext>
             </a:extLst>
           </p:cNvPr>
@@ -14546,7 +14507,7 @@
           <p:cNvPr id="24" name="Ellipse 23">
             <a:extLst>
               <a:ext uri="{FF2B5EF4-FFF2-40B4-BE49-F238E27FC236}">
-                <a16:creationId xmlns:a16="http://schemas.microsoft.com/office/drawing/2014/main" xmlns="" id="{89FCD844-DF7E-40C9-9D11-022F7FE63189}"/>
+                <a16:creationId xmlns:a16="http://schemas.microsoft.com/office/drawing/2014/main" id="{89FCD844-DF7E-40C9-9D11-022F7FE63189}"/>
               </a:ext>
             </a:extLst>
           </p:cNvPr>
@@ -14596,7 +14557,7 @@
           <p:cNvPr id="33" name="Ellipse 32">
             <a:extLst>
               <a:ext uri="{FF2B5EF4-FFF2-40B4-BE49-F238E27FC236}">
-                <a16:creationId xmlns:a16="http://schemas.microsoft.com/office/drawing/2014/main" xmlns="" id="{89FCD844-DF7E-40C9-9D11-022F7FE63189}"/>
+                <a16:creationId xmlns:a16="http://schemas.microsoft.com/office/drawing/2014/main" id="{89FCD844-DF7E-40C9-9D11-022F7FE63189}"/>
               </a:ext>
             </a:extLst>
           </p:cNvPr>
@@ -14646,7 +14607,7 @@
           <p:cNvPr id="34" name="Connecteur droit avec flèche 33">
             <a:extLst>
               <a:ext uri="{FF2B5EF4-FFF2-40B4-BE49-F238E27FC236}">
-                <a16:creationId xmlns:a16="http://schemas.microsoft.com/office/drawing/2014/main" xmlns="" id="{6589CEFF-63AD-48E0-B8C2-2B9C42EE3BA1}"/>
+                <a16:creationId xmlns:a16="http://schemas.microsoft.com/office/drawing/2014/main" id="{6589CEFF-63AD-48E0-B8C2-2B9C42EE3BA1}"/>
               </a:ext>
             </a:extLst>
           </p:cNvPr>
@@ -14688,7 +14649,7 @@
           <p:cNvPr id="14" name="Ellipse 13">
             <a:extLst>
               <a:ext uri="{FF2B5EF4-FFF2-40B4-BE49-F238E27FC236}">
-                <a16:creationId xmlns:a16="http://schemas.microsoft.com/office/drawing/2014/main" xmlns="" id="{89FCD844-DF7E-40C9-9D11-022F7FE63189}"/>
+                <a16:creationId xmlns:a16="http://schemas.microsoft.com/office/drawing/2014/main" id="{89FCD844-DF7E-40C9-9D11-022F7FE63189}"/>
               </a:ext>
             </a:extLst>
           </p:cNvPr>
@@ -14738,7 +14699,7 @@
           <p:cNvPr id="15" name="Connecteur droit avec flèche 14">
             <a:extLst>
               <a:ext uri="{FF2B5EF4-FFF2-40B4-BE49-F238E27FC236}">
-                <a16:creationId xmlns:a16="http://schemas.microsoft.com/office/drawing/2014/main" xmlns="" id="{6589CEFF-63AD-48E0-B8C2-2B9C42EE3BA1}"/>
+                <a16:creationId xmlns:a16="http://schemas.microsoft.com/office/drawing/2014/main" id="{6589CEFF-63AD-48E0-B8C2-2B9C42EE3BA1}"/>
               </a:ext>
             </a:extLst>
           </p:cNvPr>
@@ -14810,7 +14771,7 @@
           <p:cNvPr id="22" name="Connecteur droit avec flèche 21">
             <a:extLst>
               <a:ext uri="{FF2B5EF4-FFF2-40B4-BE49-F238E27FC236}">
-                <a16:creationId xmlns:a16="http://schemas.microsoft.com/office/drawing/2014/main" xmlns="" id="{6589CEFF-63AD-48E0-B8C2-2B9C42EE3BA1}"/>
+                <a16:creationId xmlns:a16="http://schemas.microsoft.com/office/drawing/2014/main" id="{6589CEFF-63AD-48E0-B8C2-2B9C42EE3BA1}"/>
               </a:ext>
             </a:extLst>
           </p:cNvPr>
@@ -14852,7 +14813,7 @@
           <p:cNvPr id="26" name="ZoneTexte 25">
             <a:extLst>
               <a:ext uri="{FF2B5EF4-FFF2-40B4-BE49-F238E27FC236}">
-                <a16:creationId xmlns:a16="http://schemas.microsoft.com/office/drawing/2014/main" xmlns="" id="{479D2F68-32D5-4E80-B573-2C6156DCB22F}"/>
+                <a16:creationId xmlns:a16="http://schemas.microsoft.com/office/drawing/2014/main" id="{479D2F68-32D5-4E80-B573-2C6156DCB22F}"/>
               </a:ext>
             </a:extLst>
           </p:cNvPr>
@@ -14926,7 +14887,7 @@
           <p:cNvPr id="29" name="ZoneTexte 28">
             <a:extLst>
               <a:ext uri="{FF2B5EF4-FFF2-40B4-BE49-F238E27FC236}">
-                <a16:creationId xmlns:a16="http://schemas.microsoft.com/office/drawing/2014/main" xmlns="" id="{479D2F68-32D5-4E80-B573-2C6156DCB22F}"/>
+                <a16:creationId xmlns:a16="http://schemas.microsoft.com/office/drawing/2014/main" id="{479D2F68-32D5-4E80-B573-2C6156DCB22F}"/>
               </a:ext>
             </a:extLst>
           </p:cNvPr>
@@ -14992,7 +14953,7 @@
           <p:cNvPr id="5" name="ZoneTexte 4">
             <a:extLst>
               <a:ext uri="{FF2B5EF4-FFF2-40B4-BE49-F238E27FC236}">
-                <a16:creationId xmlns:a16="http://schemas.microsoft.com/office/drawing/2014/main" xmlns="" id="{25D0CFDD-F8D9-4498-A666-F31BA473AEDD}"/>
+                <a16:creationId xmlns:a16="http://schemas.microsoft.com/office/drawing/2014/main" id="{25D0CFDD-F8D9-4498-A666-F31BA473AEDD}"/>
               </a:ext>
             </a:extLst>
           </p:cNvPr>
@@ -15016,10 +14977,9 @@
           <a:lstStyle/>
           <a:p>
             <a:r>
-              <a:rPr lang="en-GB" sz="2800" b="1" dirty="0" smtClean="0"/>
+              <a:rPr lang="en-GB" sz="2800" b="1" dirty="0"/>
               <a:t>Server Packet Handling</a:t>
             </a:r>
-            <a:endParaRPr lang="en-GB" sz="2800" b="1" dirty="0"/>
           </a:p>
         </p:txBody>
       </p:sp>
@@ -15028,7 +14988,7 @@
           <p:cNvPr id="33" name="Ellipse 32">
             <a:extLst>
               <a:ext uri="{FF2B5EF4-FFF2-40B4-BE49-F238E27FC236}">
-                <a16:creationId xmlns:a16="http://schemas.microsoft.com/office/drawing/2014/main" xmlns="" id="{89FCD844-DF7E-40C9-9D11-022F7FE63189}"/>
+                <a16:creationId xmlns:a16="http://schemas.microsoft.com/office/drawing/2014/main" id="{89FCD844-DF7E-40C9-9D11-022F7FE63189}"/>
               </a:ext>
             </a:extLst>
           </p:cNvPr>
@@ -15066,12 +15026,8 @@
           <a:p>
             <a:pPr algn="ctr"/>
             <a:r>
-              <a:rPr lang="fr-BE" sz="1200" b="1" dirty="0" smtClean="0"/>
-              <a:t>Server Receive </a:t>
-            </a:r>
-            <a:r>
               <a:rPr lang="fr-BE" sz="1200" b="1" dirty="0"/>
-              <a:t>Packet</a:t>
+              <a:t>Server Receive Packet</a:t>
             </a:r>
             <a:endParaRPr lang="en-GB" sz="1600" b="1" dirty="0"/>
           </a:p>
@@ -15082,7 +15038,7 @@
           <p:cNvPr id="13" name="Connecteur droit avec flèche 12">
             <a:extLst>
               <a:ext uri="{FF2B5EF4-FFF2-40B4-BE49-F238E27FC236}">
-                <a16:creationId xmlns:a16="http://schemas.microsoft.com/office/drawing/2014/main" xmlns="" id="{6589CEFF-63AD-48E0-B8C2-2B9C42EE3BA1}"/>
+                <a16:creationId xmlns:a16="http://schemas.microsoft.com/office/drawing/2014/main" id="{6589CEFF-63AD-48E0-B8C2-2B9C42EE3BA1}"/>
               </a:ext>
             </a:extLst>
           </p:cNvPr>
@@ -15125,7 +15081,7 @@
           <p:cNvPr id="3" name="Ellipse 2">
             <a:extLst>
               <a:ext uri="{FF2B5EF4-FFF2-40B4-BE49-F238E27FC236}">
-                <a16:creationId xmlns:a16="http://schemas.microsoft.com/office/drawing/2014/main" xmlns="" id="{B48A28A4-F86C-489F-903E-CDB2F959EE1D}"/>
+                <a16:creationId xmlns:a16="http://schemas.microsoft.com/office/drawing/2014/main" id="{B48A28A4-F86C-489F-903E-CDB2F959EE1D}"/>
               </a:ext>
             </a:extLst>
           </p:cNvPr>
@@ -15163,7 +15119,7 @@
           <a:p>
             <a:pPr algn="ctr"/>
             <a:r>
-              <a:rPr lang="fr-BE" sz="1200" b="1" dirty="0" smtClean="0"/>
+              <a:rPr lang="fr-BE" sz="1200" b="1" dirty="0"/>
               <a:t>Supported Version</a:t>
             </a:r>
             <a:endParaRPr lang="en-GB" sz="1600" b="1" dirty="0"/>
@@ -15175,7 +15131,7 @@
           <p:cNvPr id="18" name="ZoneTexte 17">
             <a:extLst>
               <a:ext uri="{FF2B5EF4-FFF2-40B4-BE49-F238E27FC236}">
-                <a16:creationId xmlns:mc="http://schemas.openxmlformats.org/markup-compatibility/2006" xmlns:a14="http://schemas.microsoft.com/office/drawing/2010/main" xmlns:a16="http://schemas.microsoft.com/office/drawing/2014/main" xmlns="" id="{DB737F55-3E4B-44C8-95BF-7E258C52E571}"/>
+                <a16:creationId xmlns:a16="http://schemas.microsoft.com/office/drawing/2014/main" id="{DB737F55-3E4B-44C8-95BF-7E258C52E571}"/>
               </a:ext>
             </a:extLst>
           </p:cNvPr>
@@ -15200,10 +15156,9 @@
           <a:p>
             <a:pPr algn="ctr"/>
             <a:r>
-              <a:rPr lang="en-GB" sz="1400" dirty="0" smtClean="0"/>
+              <a:rPr lang="en-GB" sz="1400" dirty="0"/>
               <a:t>no</a:t>
             </a:r>
-            <a:endParaRPr lang="en-GB" sz="1400" dirty="0"/>
           </a:p>
         </p:txBody>
       </p:sp>
@@ -15212,7 +15167,7 @@
           <p:cNvPr id="2" name="Ellipse 1">
             <a:extLst>
               <a:ext uri="{FF2B5EF4-FFF2-40B4-BE49-F238E27FC236}">
-                <a16:creationId xmlns:a16="http://schemas.microsoft.com/office/drawing/2014/main" xmlns="" id="{248768E0-C1A4-4110-B54A-35EAB18749A4}"/>
+                <a16:creationId xmlns:a16="http://schemas.microsoft.com/office/drawing/2014/main" id="{248768E0-C1A4-4110-B54A-35EAB18749A4}"/>
               </a:ext>
             </a:extLst>
           </p:cNvPr>
@@ -15265,7 +15220,7 @@
           <p:cNvPr id="11" name="Connecteur droit avec flèche 10">
             <a:extLst>
               <a:ext uri="{FF2B5EF4-FFF2-40B4-BE49-F238E27FC236}">
-                <a16:creationId xmlns:a16="http://schemas.microsoft.com/office/drawing/2014/main" xmlns="" id="{8E355309-D41D-48CF-A241-308F250C237D}"/>
+                <a16:creationId xmlns:a16="http://schemas.microsoft.com/office/drawing/2014/main" id="{8E355309-D41D-48CF-A241-308F250C237D}"/>
               </a:ext>
             </a:extLst>
           </p:cNvPr>
@@ -15308,7 +15263,7 @@
           <p:cNvPr id="14" name="Ellipse 13">
             <a:extLst>
               <a:ext uri="{FF2B5EF4-FFF2-40B4-BE49-F238E27FC236}">
-                <a16:creationId xmlns:a16="http://schemas.microsoft.com/office/drawing/2014/main" xmlns="" id="{B48A28A4-F86C-489F-903E-CDB2F959EE1D}"/>
+                <a16:creationId xmlns:a16="http://schemas.microsoft.com/office/drawing/2014/main" id="{B48A28A4-F86C-489F-903E-CDB2F959EE1D}"/>
               </a:ext>
             </a:extLst>
           </p:cNvPr>
@@ -15346,7 +15301,7 @@
           <a:p>
             <a:pPr algn="ctr"/>
             <a:r>
-              <a:rPr lang="fr-BE" sz="1200" b="1" dirty="0" smtClean="0"/>
+              <a:rPr lang="fr-BE" sz="1200" b="1" dirty="0"/>
               <a:t>Large enough to init any supported version</a:t>
             </a:r>
             <a:endParaRPr lang="en-GB" sz="1600" b="1" dirty="0"/>
@@ -15358,7 +15313,7 @@
           <p:cNvPr id="17" name="Connecteur droit avec flèche 16">
             <a:extLst>
               <a:ext uri="{FF2B5EF4-FFF2-40B4-BE49-F238E27FC236}">
-                <a16:creationId xmlns:a16="http://schemas.microsoft.com/office/drawing/2014/main" xmlns="" id="{6589CEFF-63AD-48E0-B8C2-2B9C42EE3BA1}"/>
+                <a16:creationId xmlns:a16="http://schemas.microsoft.com/office/drawing/2014/main" id="{6589CEFF-63AD-48E0-B8C2-2B9C42EE3BA1}"/>
               </a:ext>
             </a:extLst>
           </p:cNvPr>
@@ -15399,7 +15354,7 @@
           <p:cNvPr id="19" name="Ellipse 18">
             <a:extLst>
               <a:ext uri="{FF2B5EF4-FFF2-40B4-BE49-F238E27FC236}">
-                <a16:creationId xmlns:a16="http://schemas.microsoft.com/office/drawing/2014/main" xmlns="" id="{B48A28A4-F86C-489F-903E-CDB2F959EE1D}"/>
+                <a16:creationId xmlns:a16="http://schemas.microsoft.com/office/drawing/2014/main" id="{B48A28A4-F86C-489F-903E-CDB2F959EE1D}"/>
               </a:ext>
             </a:extLst>
           </p:cNvPr>
@@ -15437,7 +15392,7 @@
           <a:p>
             <a:pPr algn="ctr"/>
             <a:r>
-              <a:rPr lang="fr-BE" sz="1200" b="1" dirty="0" smtClean="0"/>
+              <a:rPr lang="fr-BE" sz="1200" b="1" dirty="0"/>
               <a:t>[Limit of negotiation reach]</a:t>
             </a:r>
             <a:endParaRPr lang="en-GB" sz="1600" b="1" dirty="0"/>
@@ -15449,7 +15404,7 @@
           <p:cNvPr id="20" name="Connecteur droit avec flèche 19">
             <a:extLst>
               <a:ext uri="{FF2B5EF4-FFF2-40B4-BE49-F238E27FC236}">
-                <a16:creationId xmlns:a16="http://schemas.microsoft.com/office/drawing/2014/main" xmlns="" id="{6589CEFF-63AD-48E0-B8C2-2B9C42EE3BA1}"/>
+                <a16:creationId xmlns:a16="http://schemas.microsoft.com/office/drawing/2014/main" id="{6589CEFF-63AD-48E0-B8C2-2B9C42EE3BA1}"/>
               </a:ext>
             </a:extLst>
           </p:cNvPr>
@@ -15490,7 +15445,7 @@
           <p:cNvPr id="21" name="ZoneTexte 20">
             <a:extLst>
               <a:ext uri="{FF2B5EF4-FFF2-40B4-BE49-F238E27FC236}">
-                <a16:creationId xmlns:mc="http://schemas.openxmlformats.org/markup-compatibility/2006" xmlns:a14="http://schemas.microsoft.com/office/drawing/2010/main" xmlns:a16="http://schemas.microsoft.com/office/drawing/2014/main" xmlns="" id="{DB737F55-3E4B-44C8-95BF-7E258C52E571}"/>
+                <a16:creationId xmlns:a16="http://schemas.microsoft.com/office/drawing/2014/main" id="{DB737F55-3E4B-44C8-95BF-7E258C52E571}"/>
               </a:ext>
             </a:extLst>
           </p:cNvPr>
@@ -15515,10 +15470,9 @@
           <a:p>
             <a:pPr algn="ctr"/>
             <a:r>
-              <a:rPr lang="en-GB" sz="1400" dirty="0" smtClean="0"/>
+              <a:rPr lang="en-GB" sz="1400" dirty="0"/>
               <a:t>yes</a:t>
             </a:r>
-            <a:endParaRPr lang="en-GB" sz="1400" dirty="0"/>
           </a:p>
         </p:txBody>
       </p:sp>
@@ -15527,7 +15481,7 @@
           <p:cNvPr id="23" name="ZoneTexte 22">
             <a:extLst>
               <a:ext uri="{FF2B5EF4-FFF2-40B4-BE49-F238E27FC236}">
-                <a16:creationId xmlns:mc="http://schemas.openxmlformats.org/markup-compatibility/2006" xmlns:a14="http://schemas.microsoft.com/office/drawing/2010/main" xmlns:a16="http://schemas.microsoft.com/office/drawing/2014/main" xmlns="" id="{DB737F55-3E4B-44C8-95BF-7E258C52E571}"/>
+                <a16:creationId xmlns:a16="http://schemas.microsoft.com/office/drawing/2014/main" id="{DB737F55-3E4B-44C8-95BF-7E258C52E571}"/>
               </a:ext>
             </a:extLst>
           </p:cNvPr>
@@ -15552,10 +15506,9 @@
           <a:p>
             <a:pPr algn="ctr"/>
             <a:r>
-              <a:rPr lang="en-GB" sz="1400" dirty="0" smtClean="0"/>
+              <a:rPr lang="en-GB" sz="1400" dirty="0"/>
               <a:t>no</a:t>
             </a:r>
-            <a:endParaRPr lang="en-GB" sz="1400" dirty="0"/>
           </a:p>
         </p:txBody>
       </p:sp>
@@ -15564,7 +15517,7 @@
           <p:cNvPr id="25" name="Ellipse 24">
             <a:extLst>
               <a:ext uri="{FF2B5EF4-FFF2-40B4-BE49-F238E27FC236}">
-                <a16:creationId xmlns:a16="http://schemas.microsoft.com/office/drawing/2014/main" xmlns="" id="{B48A28A4-F86C-489F-903E-CDB2F959EE1D}"/>
+                <a16:creationId xmlns:a16="http://schemas.microsoft.com/office/drawing/2014/main" id="{B48A28A4-F86C-489F-903E-CDB2F959EE1D}"/>
               </a:ext>
             </a:extLst>
           </p:cNvPr>
@@ -15602,7 +15555,7 @@
           <a:p>
             <a:pPr algn="ctr"/>
             <a:r>
-              <a:rPr lang="fr-BE" sz="1200" b="1" dirty="0" smtClean="0"/>
+              <a:rPr lang="fr-BE" sz="1200" b="1" dirty="0"/>
               <a:t>Send Version Negotiation</a:t>
             </a:r>
             <a:endParaRPr lang="en-GB" sz="1600" b="1" dirty="0"/>
@@ -15614,7 +15567,7 @@
           <p:cNvPr id="26" name="Connecteur droit avec flèche 25">
             <a:extLst>
               <a:ext uri="{FF2B5EF4-FFF2-40B4-BE49-F238E27FC236}">
-                <a16:creationId xmlns:a16="http://schemas.microsoft.com/office/drawing/2014/main" xmlns="" id="{6589CEFF-63AD-48E0-B8C2-2B9C42EE3BA1}"/>
+                <a16:creationId xmlns:a16="http://schemas.microsoft.com/office/drawing/2014/main" id="{6589CEFF-63AD-48E0-B8C2-2B9C42EE3BA1}"/>
               </a:ext>
             </a:extLst>
           </p:cNvPr>
@@ -15655,7 +15608,7 @@
           <p:cNvPr id="27" name="ZoneTexte 26">
             <a:extLst>
               <a:ext uri="{FF2B5EF4-FFF2-40B4-BE49-F238E27FC236}">
-                <a16:creationId xmlns:mc="http://schemas.openxmlformats.org/markup-compatibility/2006" xmlns:a14="http://schemas.microsoft.com/office/drawing/2010/main" xmlns:a16="http://schemas.microsoft.com/office/drawing/2014/main" xmlns="" id="{DB737F55-3E4B-44C8-95BF-7E258C52E571}"/>
+                <a16:creationId xmlns:a16="http://schemas.microsoft.com/office/drawing/2014/main" id="{DB737F55-3E4B-44C8-95BF-7E258C52E571}"/>
               </a:ext>
             </a:extLst>
           </p:cNvPr>
@@ -15680,10 +15633,9 @@
           <a:p>
             <a:pPr algn="ctr"/>
             <a:r>
-              <a:rPr lang="en-GB" sz="1400" dirty="0" smtClean="0"/>
+              <a:rPr lang="en-GB" sz="1400" dirty="0"/>
               <a:t>no</a:t>
             </a:r>
-            <a:endParaRPr lang="en-GB" sz="1400" dirty="0"/>
           </a:p>
         </p:txBody>
       </p:sp>
@@ -15692,7 +15644,7 @@
           <p:cNvPr id="28" name="Ellipse 27">
             <a:extLst>
               <a:ext uri="{FF2B5EF4-FFF2-40B4-BE49-F238E27FC236}">
-                <a16:creationId xmlns:a16="http://schemas.microsoft.com/office/drawing/2014/main" xmlns="" id="{B48A28A4-F86C-489F-903E-CDB2F959EE1D}"/>
+                <a16:creationId xmlns:a16="http://schemas.microsoft.com/office/drawing/2014/main" id="{B48A28A4-F86C-489F-903E-CDB2F959EE1D}"/>
               </a:ext>
             </a:extLst>
           </p:cNvPr>
@@ -15730,7 +15682,7 @@
           <a:p>
             <a:pPr algn="ctr"/>
             <a:r>
-              <a:rPr lang="fr-BE" sz="1200" b="1" dirty="0" smtClean="0"/>
+              <a:rPr lang="fr-BE" sz="1200" b="1" dirty="0"/>
               <a:t>Match with CID or port/address</a:t>
             </a:r>
             <a:endParaRPr lang="en-GB" sz="1600" b="1" dirty="0"/>
@@ -15742,7 +15694,7 @@
           <p:cNvPr id="29" name="Connecteur droit avec flèche 28">
             <a:extLst>
               <a:ext uri="{FF2B5EF4-FFF2-40B4-BE49-F238E27FC236}">
-                <a16:creationId xmlns:a16="http://schemas.microsoft.com/office/drawing/2014/main" xmlns="" id="{6589CEFF-63AD-48E0-B8C2-2B9C42EE3BA1}"/>
+                <a16:creationId xmlns:a16="http://schemas.microsoft.com/office/drawing/2014/main" id="{6589CEFF-63AD-48E0-B8C2-2B9C42EE3BA1}"/>
               </a:ext>
             </a:extLst>
           </p:cNvPr>
@@ -15785,7 +15737,7 @@
           <p:cNvPr id="34" name="ZoneTexte 33">
             <a:extLst>
               <a:ext uri="{FF2B5EF4-FFF2-40B4-BE49-F238E27FC236}">
-                <a16:creationId xmlns:mc="http://schemas.openxmlformats.org/markup-compatibility/2006" xmlns:a14="http://schemas.microsoft.com/office/drawing/2010/main" xmlns:a16="http://schemas.microsoft.com/office/drawing/2014/main" xmlns="" id="{DB737F55-3E4B-44C8-95BF-7E258C52E571}"/>
+                <a16:creationId xmlns:a16="http://schemas.microsoft.com/office/drawing/2014/main" id="{DB737F55-3E4B-44C8-95BF-7E258C52E571}"/>
               </a:ext>
             </a:extLst>
           </p:cNvPr>
@@ -15810,10 +15762,9 @@
           <a:p>
             <a:pPr algn="ctr"/>
             <a:r>
-              <a:rPr lang="en-GB" sz="1400" dirty="0" smtClean="0"/>
+              <a:rPr lang="en-GB" sz="1400" dirty="0"/>
               <a:t>yes</a:t>
             </a:r>
-            <a:endParaRPr lang="en-GB" sz="1400" dirty="0"/>
           </a:p>
         </p:txBody>
       </p:sp>
@@ -15822,7 +15773,7 @@
           <p:cNvPr id="35" name="Ellipse 34">
             <a:extLst>
               <a:ext uri="{FF2B5EF4-FFF2-40B4-BE49-F238E27FC236}">
-                <a16:creationId xmlns:a16="http://schemas.microsoft.com/office/drawing/2014/main" xmlns="" id="{B48A28A4-F86C-489F-903E-CDB2F959EE1D}"/>
+                <a16:creationId xmlns:a16="http://schemas.microsoft.com/office/drawing/2014/main" id="{B48A28A4-F86C-489F-903E-CDB2F959EE1D}"/>
               </a:ext>
             </a:extLst>
           </p:cNvPr>
@@ -15860,7 +15811,7 @@
           <a:p>
             <a:pPr algn="ctr"/>
             <a:r>
-              <a:rPr lang="fr-BE" sz="1200" b="1" dirty="0" smtClean="0"/>
+              <a:rPr lang="fr-BE" sz="1200" b="1" dirty="0"/>
               <a:t>Match with CID or port/address</a:t>
             </a:r>
             <a:endParaRPr lang="en-GB" sz="1600" b="1" dirty="0"/>
@@ -15872,7 +15823,7 @@
           <p:cNvPr id="36" name="Connecteur droit avec flèche 35">
             <a:extLst>
               <a:ext uri="{FF2B5EF4-FFF2-40B4-BE49-F238E27FC236}">
-                <a16:creationId xmlns:a16="http://schemas.microsoft.com/office/drawing/2014/main" xmlns="" id="{6589CEFF-63AD-48E0-B8C2-2B9C42EE3BA1}"/>
+                <a16:creationId xmlns:a16="http://schemas.microsoft.com/office/drawing/2014/main" id="{6589CEFF-63AD-48E0-B8C2-2B9C42EE3BA1}"/>
               </a:ext>
             </a:extLst>
           </p:cNvPr>
@@ -15913,7 +15864,7 @@
           <p:cNvPr id="38" name="ZoneTexte 37">
             <a:extLst>
               <a:ext uri="{FF2B5EF4-FFF2-40B4-BE49-F238E27FC236}">
-                <a16:creationId xmlns:mc="http://schemas.openxmlformats.org/markup-compatibility/2006" xmlns:a14="http://schemas.microsoft.com/office/drawing/2010/main" xmlns:a16="http://schemas.microsoft.com/office/drawing/2014/main" xmlns="" id="{DB737F55-3E4B-44C8-95BF-7E258C52E571}"/>
+                <a16:creationId xmlns:a16="http://schemas.microsoft.com/office/drawing/2014/main" id="{DB737F55-3E4B-44C8-95BF-7E258C52E571}"/>
               </a:ext>
             </a:extLst>
           </p:cNvPr>
@@ -15938,10 +15889,9 @@
           <a:p>
             <a:pPr algn="ctr"/>
             <a:r>
-              <a:rPr lang="en-GB" sz="1400" dirty="0" smtClean="0"/>
+              <a:rPr lang="en-GB" sz="1400" dirty="0"/>
               <a:t>no</a:t>
             </a:r>
-            <a:endParaRPr lang="en-GB" sz="1400" dirty="0"/>
           </a:p>
         </p:txBody>
       </p:sp>
@@ -15950,7 +15900,7 @@
           <p:cNvPr id="39" name="Ellipse 38">
             <a:extLst>
               <a:ext uri="{FF2B5EF4-FFF2-40B4-BE49-F238E27FC236}">
-                <a16:creationId xmlns:a16="http://schemas.microsoft.com/office/drawing/2014/main" xmlns="" id="{B48A28A4-F86C-489F-903E-CDB2F959EE1D}"/>
+                <a16:creationId xmlns:a16="http://schemas.microsoft.com/office/drawing/2014/main" id="{B48A28A4-F86C-489F-903E-CDB2F959EE1D}"/>
               </a:ext>
             </a:extLst>
           </p:cNvPr>
@@ -15988,10 +15938,9 @@
           <a:p>
             <a:pPr algn="ctr"/>
             <a:r>
-              <a:rPr lang="en-GB" sz="1400" b="1" dirty="0" smtClean="0"/>
+              <a:rPr lang="en-GB" sz="1400" b="1" dirty="0"/>
               <a:t>Start handshake</a:t>
             </a:r>
-            <a:endParaRPr lang="en-GB" sz="1400" b="1" dirty="0"/>
           </a:p>
         </p:txBody>
       </p:sp>
@@ -16018,19 +15967,14 @@
           <a:p>
             <a:r>
               <a:rPr lang="fr-FR" sz="1400" dirty="0"/>
-              <a:t>Packet </a:t>
-            </a:r>
-            <a:r>
-              <a:rPr lang="fr-FR" sz="1400" dirty="0" smtClean="0"/>
-              <a:t>= </a:t>
-            </a:r>
-          </a:p>
-          <a:p>
-            <a:r>
-              <a:rPr lang="fr-FR" sz="1400" dirty="0" smtClean="0"/>
+              <a:t>Packet = </a:t>
+            </a:r>
+          </a:p>
+          <a:p>
+            <a:r>
+              <a:rPr lang="fr-FR" sz="1400" dirty="0"/>
               <a:t>Initial</a:t>
             </a:r>
-            <a:endParaRPr lang="fr-FR" sz="1400" dirty="0"/>
           </a:p>
         </p:txBody>
       </p:sp>
@@ -16039,7 +15983,7 @@
           <p:cNvPr id="40" name="Connecteur droit avec flèche 39">
             <a:extLst>
               <a:ext uri="{FF2B5EF4-FFF2-40B4-BE49-F238E27FC236}">
-                <a16:creationId xmlns:a16="http://schemas.microsoft.com/office/drawing/2014/main" xmlns="" id="{6589CEFF-63AD-48E0-B8C2-2B9C42EE3BA1}"/>
+                <a16:creationId xmlns:a16="http://schemas.microsoft.com/office/drawing/2014/main" id="{6589CEFF-63AD-48E0-B8C2-2B9C42EE3BA1}"/>
               </a:ext>
             </a:extLst>
           </p:cNvPr>
@@ -16080,7 +16024,7 @@
           <p:cNvPr id="41" name="Ellipse 40">
             <a:extLst>
               <a:ext uri="{FF2B5EF4-FFF2-40B4-BE49-F238E27FC236}">
-                <a16:creationId xmlns:a16="http://schemas.microsoft.com/office/drawing/2014/main" xmlns="" id="{B48A28A4-F86C-489F-903E-CDB2F959EE1D}"/>
+                <a16:creationId xmlns:a16="http://schemas.microsoft.com/office/drawing/2014/main" id="{B48A28A4-F86C-489F-903E-CDB2F959EE1D}"/>
               </a:ext>
             </a:extLst>
           </p:cNvPr>
@@ -16121,10 +16065,9 @@
           <a:p>
             <a:pPr algn="ctr"/>
             <a:r>
-              <a:rPr lang="en-GB" sz="1100" b="1" dirty="0" smtClean="0"/>
+              <a:rPr lang="en-GB" sz="1100" b="1" dirty="0"/>
               <a:t>Refuse connection Initial(Connection_close)</a:t>
             </a:r>
-            <a:endParaRPr lang="en-GB" sz="1100" b="1" dirty="0"/>
           </a:p>
         </p:txBody>
       </p:sp>
@@ -16133,7 +16076,7 @@
           <p:cNvPr id="42" name="Connecteur droit avec flèche 41">
             <a:extLst>
               <a:ext uri="{FF2B5EF4-FFF2-40B4-BE49-F238E27FC236}">
-                <a16:creationId xmlns:a16="http://schemas.microsoft.com/office/drawing/2014/main" xmlns="" id="{6589CEFF-63AD-48E0-B8C2-2B9C42EE3BA1}"/>
+                <a16:creationId xmlns:a16="http://schemas.microsoft.com/office/drawing/2014/main" id="{6589CEFF-63AD-48E0-B8C2-2B9C42EE3BA1}"/>
               </a:ext>
             </a:extLst>
           </p:cNvPr>
@@ -16176,7 +16119,7 @@
           <p:cNvPr id="45" name="Ellipse 44">
             <a:extLst>
               <a:ext uri="{FF2B5EF4-FFF2-40B4-BE49-F238E27FC236}">
-                <a16:creationId xmlns:a16="http://schemas.microsoft.com/office/drawing/2014/main" xmlns="" id="{B48A28A4-F86C-489F-903E-CDB2F959EE1D}"/>
+                <a16:creationId xmlns:a16="http://schemas.microsoft.com/office/drawing/2014/main" id="{B48A28A4-F86C-489F-903E-CDB2F959EE1D}"/>
               </a:ext>
             </a:extLst>
           </p:cNvPr>
@@ -16214,7 +16157,7 @@
           <a:p>
             <a:pPr algn="ctr"/>
             <a:r>
-              <a:rPr lang="fr-BE" sz="1100" b="1" dirty="0" smtClean="0"/>
+              <a:rPr lang="fr-BE" sz="1100" b="1" dirty="0"/>
               <a:t>[Packet buffered]</a:t>
             </a:r>
             <a:endParaRPr lang="en-GB" sz="1400" b="1" dirty="0"/>
@@ -16226,7 +16169,7 @@
           <p:cNvPr id="46" name="Connecteur droit avec flèche 45">
             <a:extLst>
               <a:ext uri="{FF2B5EF4-FFF2-40B4-BE49-F238E27FC236}">
-                <a16:creationId xmlns:a16="http://schemas.microsoft.com/office/drawing/2014/main" xmlns="" id="{6589CEFF-63AD-48E0-B8C2-2B9C42EE3BA1}"/>
+                <a16:creationId xmlns:a16="http://schemas.microsoft.com/office/drawing/2014/main" id="{6589CEFF-63AD-48E0-B8C2-2B9C42EE3BA1}"/>
               </a:ext>
             </a:extLst>
           </p:cNvPr>
@@ -16285,19 +16228,14 @@
           <a:p>
             <a:r>
               <a:rPr lang="fr-FR" sz="1400" dirty="0"/>
-              <a:t>Packet </a:t>
-            </a:r>
-            <a:r>
-              <a:rPr lang="fr-FR" sz="1400" dirty="0" smtClean="0"/>
-              <a:t>= </a:t>
-            </a:r>
-          </a:p>
-          <a:p>
-            <a:r>
-              <a:rPr lang="fr-FR" sz="1400" dirty="0" smtClean="0"/>
+              <a:t>Packet = </a:t>
+            </a:r>
+          </a:p>
+          <a:p>
+            <a:r>
+              <a:rPr lang="fr-FR" sz="1400" dirty="0"/>
               <a:t>0-RTT</a:t>
             </a:r>
-            <a:endParaRPr lang="fr-FR" sz="1400" dirty="0"/>
           </a:p>
         </p:txBody>
       </p:sp>
@@ -16306,7 +16244,7 @@
           <p:cNvPr id="52" name="Connecteur droit avec flèche 51">
             <a:extLst>
               <a:ext uri="{FF2B5EF4-FFF2-40B4-BE49-F238E27FC236}">
-                <a16:creationId xmlns:a16="http://schemas.microsoft.com/office/drawing/2014/main" xmlns="" id="{6589CEFF-63AD-48E0-B8C2-2B9C42EE3BA1}"/>
+                <a16:creationId xmlns:a16="http://schemas.microsoft.com/office/drawing/2014/main" id="{6589CEFF-63AD-48E0-B8C2-2B9C42EE3BA1}"/>
               </a:ext>
             </a:extLst>
           </p:cNvPr>
@@ -16349,7 +16287,7 @@
           <p:cNvPr id="55" name="ZoneTexte 54">
             <a:extLst>
               <a:ext uri="{FF2B5EF4-FFF2-40B4-BE49-F238E27FC236}">
-                <a16:creationId xmlns:mc="http://schemas.openxmlformats.org/markup-compatibility/2006" xmlns:a14="http://schemas.microsoft.com/office/drawing/2010/main" xmlns:a16="http://schemas.microsoft.com/office/drawing/2014/main" xmlns="" id="{DB737F55-3E4B-44C8-95BF-7E258C52E571}"/>
+                <a16:creationId xmlns:a16="http://schemas.microsoft.com/office/drawing/2014/main" id="{DB737F55-3E4B-44C8-95BF-7E258C52E571}"/>
               </a:ext>
             </a:extLst>
           </p:cNvPr>
@@ -16374,10 +16312,9 @@
           <a:p>
             <a:pPr algn="ctr"/>
             <a:r>
-              <a:rPr lang="en-GB" sz="1400" dirty="0" smtClean="0"/>
+              <a:rPr lang="en-GB" sz="1400" dirty="0"/>
               <a:t>else</a:t>
             </a:r>
-            <a:endParaRPr lang="en-GB" sz="1400" dirty="0"/>
           </a:p>
         </p:txBody>
       </p:sp>
@@ -16416,7 +16353,7 @@
           <p:cNvPr id="5" name="ZoneTexte 4">
             <a:extLst>
               <a:ext uri="{FF2B5EF4-FFF2-40B4-BE49-F238E27FC236}">
-                <a16:creationId xmlns:a16="http://schemas.microsoft.com/office/drawing/2014/main" xmlns="" id="{25D0CFDD-F8D9-4498-A666-F31BA473AEDD}"/>
+                <a16:creationId xmlns:a16="http://schemas.microsoft.com/office/drawing/2014/main" id="{25D0CFDD-F8D9-4498-A666-F31BA473AEDD}"/>
               </a:ext>
             </a:extLst>
           </p:cNvPr>
@@ -16451,7 +16388,7 @@
           <p:cNvPr id="33" name="Ellipse 32">
             <a:extLst>
               <a:ext uri="{FF2B5EF4-FFF2-40B4-BE49-F238E27FC236}">
-                <a16:creationId xmlns:a16="http://schemas.microsoft.com/office/drawing/2014/main" xmlns="" id="{89FCD844-DF7E-40C9-9D11-022F7FE63189}"/>
+                <a16:creationId xmlns:a16="http://schemas.microsoft.com/office/drawing/2014/main" id="{89FCD844-DF7E-40C9-9D11-022F7FE63189}"/>
               </a:ext>
             </a:extLst>
           </p:cNvPr>
@@ -16501,7 +16438,7 @@
           <p:cNvPr id="13" name="Connecteur droit avec flèche 12">
             <a:extLst>
               <a:ext uri="{FF2B5EF4-FFF2-40B4-BE49-F238E27FC236}">
-                <a16:creationId xmlns:a16="http://schemas.microsoft.com/office/drawing/2014/main" xmlns="" id="{6589CEFF-63AD-48E0-B8C2-2B9C42EE3BA1}"/>
+                <a16:creationId xmlns:a16="http://schemas.microsoft.com/office/drawing/2014/main" id="{6589CEFF-63AD-48E0-B8C2-2B9C42EE3BA1}"/>
               </a:ext>
             </a:extLst>
           </p:cNvPr>
@@ -16544,7 +16481,7 @@
           <p:cNvPr id="3" name="Ellipse 2">
             <a:extLst>
               <a:ext uri="{FF2B5EF4-FFF2-40B4-BE49-F238E27FC236}">
-                <a16:creationId xmlns:a16="http://schemas.microsoft.com/office/drawing/2014/main" xmlns="" id="{B48A28A4-F86C-489F-903E-CDB2F959EE1D}"/>
+                <a16:creationId xmlns:a16="http://schemas.microsoft.com/office/drawing/2014/main" id="{B48A28A4-F86C-489F-903E-CDB2F959EE1D}"/>
               </a:ext>
             </a:extLst>
           </p:cNvPr>
@@ -16596,7 +16533,7 @@
               <p:cNvPr id="18" name="ZoneTexte 17">
                 <a:extLst>
                   <a:ext uri="{FF2B5EF4-FFF2-40B4-BE49-F238E27FC236}">
-                    <a16:creationId xmlns:a16="http://schemas.microsoft.com/office/drawing/2014/main" xmlns="" id="{DB737F55-3E4B-44C8-95BF-7E258C52E571}"/>
+                    <a16:creationId xmlns:a16="http://schemas.microsoft.com/office/drawing/2014/main" id="{DB737F55-3E4B-44C8-95BF-7E258C52E571}"/>
                   </a:ext>
                 </a:extLst>
               </p:cNvPr>
@@ -16713,7 +16650,7 @@
           <p:cNvPr id="2" name="Ellipse 1">
             <a:extLst>
               <a:ext uri="{FF2B5EF4-FFF2-40B4-BE49-F238E27FC236}">
-                <a16:creationId xmlns:a16="http://schemas.microsoft.com/office/drawing/2014/main" xmlns="" id="{248768E0-C1A4-4110-B54A-35EAB18749A4}"/>
+                <a16:creationId xmlns:a16="http://schemas.microsoft.com/office/drawing/2014/main" id="{248768E0-C1A4-4110-B54A-35EAB18749A4}"/>
               </a:ext>
             </a:extLst>
           </p:cNvPr>
@@ -16766,7 +16703,7 @@
           <p:cNvPr id="11" name="Connecteur droit avec flèche 10">
             <a:extLst>
               <a:ext uri="{FF2B5EF4-FFF2-40B4-BE49-F238E27FC236}">
-                <a16:creationId xmlns:a16="http://schemas.microsoft.com/office/drawing/2014/main" xmlns="" id="{8E355309-D41D-48CF-A241-308F250C237D}"/>
+                <a16:creationId xmlns:a16="http://schemas.microsoft.com/office/drawing/2014/main" id="{8E355309-D41D-48CF-A241-308F250C237D}"/>
               </a:ext>
             </a:extLst>
           </p:cNvPr>
@@ -16809,7 +16746,7 @@
           <p:cNvPr id="7" name="ZoneTexte 6">
             <a:extLst>
               <a:ext uri="{FF2B5EF4-FFF2-40B4-BE49-F238E27FC236}">
-                <a16:creationId xmlns:a16="http://schemas.microsoft.com/office/drawing/2014/main" xmlns="" id="{836D266B-8A27-4DCF-8902-48EA7638FDF1}"/>
+                <a16:creationId xmlns:a16="http://schemas.microsoft.com/office/drawing/2014/main" id="{836D266B-8A27-4DCF-8902-48EA7638FDF1}"/>
               </a:ext>
             </a:extLst>
           </p:cNvPr>
@@ -16854,14 +16791,6 @@
   <p:clrMapOvr>
     <a:masterClrMapping/>
   </p:clrMapOvr>
-  <mc:AlternateContent xmlns:mc="http://schemas.openxmlformats.org/markup-compatibility/2006" xmlns:p14="http://schemas.microsoft.com/office/powerpoint/2010/main">
-    <mc:Choice Requires="p14">
-      <p:transition spd="slow" p14:dur="2000"/>
-    </mc:Choice>
-    <mc:Fallback xmlns="">
-      <p:transition spd="slow"/>
-    </mc:Fallback>
-  </mc:AlternateContent>
 </p:sld>
 </file>
 
@@ -16887,7 +16816,7 @@
           <p:cNvPr id="5" name="ZoneTexte 4">
             <a:extLst>
               <a:ext uri="{FF2B5EF4-FFF2-40B4-BE49-F238E27FC236}">
-                <a16:creationId xmlns:a16="http://schemas.microsoft.com/office/drawing/2014/main" xmlns="" id="{25D0CFDD-F8D9-4498-A666-F31BA473AEDD}"/>
+                <a16:creationId xmlns:a16="http://schemas.microsoft.com/office/drawing/2014/main" id="{25D0CFDD-F8D9-4498-A666-F31BA473AEDD}"/>
               </a:ext>
             </a:extLst>
           </p:cNvPr>
@@ -16922,7 +16851,7 @@
           <p:cNvPr id="33" name="Ellipse 32">
             <a:extLst>
               <a:ext uri="{FF2B5EF4-FFF2-40B4-BE49-F238E27FC236}">
-                <a16:creationId xmlns:a16="http://schemas.microsoft.com/office/drawing/2014/main" xmlns="" id="{89FCD844-DF7E-40C9-9D11-022F7FE63189}"/>
+                <a16:creationId xmlns:a16="http://schemas.microsoft.com/office/drawing/2014/main" id="{89FCD844-DF7E-40C9-9D11-022F7FE63189}"/>
               </a:ext>
             </a:extLst>
           </p:cNvPr>
@@ -16972,7 +16901,7 @@
           <p:cNvPr id="13" name="Connecteur droit avec flèche 12">
             <a:extLst>
               <a:ext uri="{FF2B5EF4-FFF2-40B4-BE49-F238E27FC236}">
-                <a16:creationId xmlns:a16="http://schemas.microsoft.com/office/drawing/2014/main" xmlns="" id="{6589CEFF-63AD-48E0-B8C2-2B9C42EE3BA1}"/>
+                <a16:creationId xmlns:a16="http://schemas.microsoft.com/office/drawing/2014/main" id="{6589CEFF-63AD-48E0-B8C2-2B9C42EE3BA1}"/>
               </a:ext>
             </a:extLst>
           </p:cNvPr>
@@ -17015,7 +16944,7 @@
           <p:cNvPr id="3" name="Ellipse 2">
             <a:extLst>
               <a:ext uri="{FF2B5EF4-FFF2-40B4-BE49-F238E27FC236}">
-                <a16:creationId xmlns:a16="http://schemas.microsoft.com/office/drawing/2014/main" xmlns="" id="{B48A28A4-F86C-489F-903E-CDB2F959EE1D}"/>
+                <a16:creationId xmlns:a16="http://schemas.microsoft.com/office/drawing/2014/main" id="{B48A28A4-F86C-489F-903E-CDB2F959EE1D}"/>
               </a:ext>
             </a:extLst>
           </p:cNvPr>
@@ -17067,7 +16996,7 @@
               <p:cNvPr id="18" name="ZoneTexte 17">
                 <a:extLst>
                   <a:ext uri="{FF2B5EF4-FFF2-40B4-BE49-F238E27FC236}">
-                    <a16:creationId xmlns:a16="http://schemas.microsoft.com/office/drawing/2014/main" xmlns="" id="{DB737F55-3E4B-44C8-95BF-7E258C52E571}"/>
+                    <a16:creationId xmlns:a16="http://schemas.microsoft.com/office/drawing/2014/main" id="{DB737F55-3E4B-44C8-95BF-7E258C52E571}"/>
                   </a:ext>
                 </a:extLst>
               </p:cNvPr>
@@ -17184,7 +17113,7 @@
           <p:cNvPr id="2" name="Ellipse 1">
             <a:extLst>
               <a:ext uri="{FF2B5EF4-FFF2-40B4-BE49-F238E27FC236}">
-                <a16:creationId xmlns:a16="http://schemas.microsoft.com/office/drawing/2014/main" xmlns="" id="{248768E0-C1A4-4110-B54A-35EAB18749A4}"/>
+                <a16:creationId xmlns:a16="http://schemas.microsoft.com/office/drawing/2014/main" id="{248768E0-C1A4-4110-B54A-35EAB18749A4}"/>
               </a:ext>
             </a:extLst>
           </p:cNvPr>
@@ -17237,7 +17166,7 @@
           <p:cNvPr id="11" name="Connecteur droit avec flèche 10">
             <a:extLst>
               <a:ext uri="{FF2B5EF4-FFF2-40B4-BE49-F238E27FC236}">
-                <a16:creationId xmlns:a16="http://schemas.microsoft.com/office/drawing/2014/main" xmlns="" id="{8E355309-D41D-48CF-A241-308F250C237D}"/>
+                <a16:creationId xmlns:a16="http://schemas.microsoft.com/office/drawing/2014/main" id="{8E355309-D41D-48CF-A241-308F250C237D}"/>
               </a:ext>
             </a:extLst>
           </p:cNvPr>
@@ -17280,7 +17209,7 @@
           <p:cNvPr id="7" name="ZoneTexte 6">
             <a:extLst>
               <a:ext uri="{FF2B5EF4-FFF2-40B4-BE49-F238E27FC236}">
-                <a16:creationId xmlns:a16="http://schemas.microsoft.com/office/drawing/2014/main" xmlns="" id="{836D266B-8A27-4DCF-8902-48EA7638FDF1}"/>
+                <a16:creationId xmlns:a16="http://schemas.microsoft.com/office/drawing/2014/main" id="{836D266B-8A27-4DCF-8902-48EA7638FDF1}"/>
               </a:ext>
             </a:extLst>
           </p:cNvPr>
@@ -17325,14 +17254,6 @@
   <p:clrMapOvr>
     <a:masterClrMapping/>
   </p:clrMapOvr>
-  <mc:AlternateContent xmlns:mc="http://schemas.openxmlformats.org/markup-compatibility/2006" xmlns:p14="http://schemas.microsoft.com/office/powerpoint/2010/main">
-    <mc:Choice Requires="p14">
-      <p:transition spd="slow" p14:dur="2000"/>
-    </mc:Choice>
-    <mc:Fallback xmlns="">
-      <p:transition spd="slow"/>
-    </mc:Fallback>
-  </mc:AlternateContent>
 </p:sld>
 </file>
 
@@ -17358,7 +17279,7 @@
           <p:cNvPr id="67" name="Connecteur droit avec flèche 66">
             <a:extLst>
               <a:ext uri="{FF2B5EF4-FFF2-40B4-BE49-F238E27FC236}">
-                <a16:creationId xmlns:a16="http://schemas.microsoft.com/office/drawing/2014/main" xmlns="" id="{6589CEFF-63AD-48E0-B8C2-2B9C42EE3BA1}"/>
+                <a16:creationId xmlns:a16="http://schemas.microsoft.com/office/drawing/2014/main" id="{6589CEFF-63AD-48E0-B8C2-2B9C42EE3BA1}"/>
               </a:ext>
             </a:extLst>
           </p:cNvPr>
@@ -17401,7 +17322,7 @@
           <p:cNvPr id="5" name="ZoneTexte 4">
             <a:extLst>
               <a:ext uri="{FF2B5EF4-FFF2-40B4-BE49-F238E27FC236}">
-                <a16:creationId xmlns:a16="http://schemas.microsoft.com/office/drawing/2014/main" xmlns="" id="{25D0CFDD-F8D9-4498-A666-F31BA473AEDD}"/>
+                <a16:creationId xmlns:a16="http://schemas.microsoft.com/office/drawing/2014/main" id="{25D0CFDD-F8D9-4498-A666-F31BA473AEDD}"/>
               </a:ext>
             </a:extLst>
           </p:cNvPr>
@@ -17425,12 +17346,8 @@
           <a:lstStyle/>
           <a:p>
             <a:r>
-              <a:rPr lang="en-GB" sz="2800" b="1" dirty="0" smtClean="0"/>
-              <a:t>Operations </a:t>
-            </a:r>
-            <a:r>
               <a:rPr lang="en-GB" sz="2800" b="1" dirty="0"/>
-              <a:t>on Connections</a:t>
+              <a:t>Operations on Connections</a:t>
             </a:r>
           </a:p>
         </p:txBody>
@@ -17440,7 +17357,7 @@
           <p:cNvPr id="33" name="Ellipse 32">
             <a:extLst>
               <a:ext uri="{FF2B5EF4-FFF2-40B4-BE49-F238E27FC236}">
-                <a16:creationId xmlns:a16="http://schemas.microsoft.com/office/drawing/2014/main" xmlns="" id="{89FCD844-DF7E-40C9-9D11-022F7FE63189}"/>
+                <a16:creationId xmlns:a16="http://schemas.microsoft.com/office/drawing/2014/main" id="{89FCD844-DF7E-40C9-9D11-022F7FE63189}"/>
               </a:ext>
             </a:extLst>
           </p:cNvPr>
@@ -17478,7 +17395,7 @@
           <a:p>
             <a:pPr algn="ctr"/>
             <a:r>
-              <a:rPr lang="fr-BE" sz="1200" b="1" dirty="0" smtClean="0"/>
+              <a:rPr lang="fr-BE" sz="1200" b="1" dirty="0"/>
               <a:t>Application</a:t>
             </a:r>
             <a:endParaRPr lang="en-GB" sz="1600" b="1" dirty="0"/>
@@ -17490,7 +17407,7 @@
           <p:cNvPr id="13" name="Connecteur droit avec flèche 12">
             <a:extLst>
               <a:ext uri="{FF2B5EF4-FFF2-40B4-BE49-F238E27FC236}">
-                <a16:creationId xmlns:a16="http://schemas.microsoft.com/office/drawing/2014/main" xmlns="" id="{6589CEFF-63AD-48E0-B8C2-2B9C42EE3BA1}"/>
+                <a16:creationId xmlns:a16="http://schemas.microsoft.com/office/drawing/2014/main" id="{6589CEFF-63AD-48E0-B8C2-2B9C42EE3BA1}"/>
               </a:ext>
             </a:extLst>
           </p:cNvPr>
@@ -17533,7 +17450,7 @@
           <p:cNvPr id="3" name="Ellipse 2">
             <a:extLst>
               <a:ext uri="{FF2B5EF4-FFF2-40B4-BE49-F238E27FC236}">
-                <a16:creationId xmlns:a16="http://schemas.microsoft.com/office/drawing/2014/main" xmlns="" id="{B48A28A4-F86C-489F-903E-CDB2F959EE1D}"/>
+                <a16:creationId xmlns:a16="http://schemas.microsoft.com/office/drawing/2014/main" id="{B48A28A4-F86C-489F-903E-CDB2F959EE1D}"/>
               </a:ext>
             </a:extLst>
           </p:cNvPr>
@@ -17571,7 +17488,7 @@
           <a:p>
             <a:pPr algn="ctr"/>
             <a:r>
-              <a:rPr lang="fr-BE" sz="1200" b="1" dirty="0" smtClean="0"/>
+              <a:rPr lang="fr-BE" sz="1200" b="1" dirty="0"/>
               <a:t>Server Role</a:t>
             </a:r>
             <a:endParaRPr lang="en-GB" sz="1600" b="1" dirty="0"/>
@@ -17583,7 +17500,7 @@
           <p:cNvPr id="11" name="Connecteur droit avec flèche 10">
             <a:extLst>
               <a:ext uri="{FF2B5EF4-FFF2-40B4-BE49-F238E27FC236}">
-                <a16:creationId xmlns:a16="http://schemas.microsoft.com/office/drawing/2014/main" xmlns="" id="{8E355309-D41D-48CF-A241-308F250C237D}"/>
+                <a16:creationId xmlns:a16="http://schemas.microsoft.com/office/drawing/2014/main" id="{8E355309-D41D-48CF-A241-308F250C237D}"/>
               </a:ext>
             </a:extLst>
           </p:cNvPr>
@@ -17626,7 +17543,7 @@
           <p:cNvPr id="7" name="ZoneTexte 6">
             <a:extLst>
               <a:ext uri="{FF2B5EF4-FFF2-40B4-BE49-F238E27FC236}">
-                <a16:creationId xmlns:a16="http://schemas.microsoft.com/office/drawing/2014/main" xmlns="" id="{836D266B-8A27-4DCF-8902-48EA7638FDF1}"/>
+                <a16:creationId xmlns:a16="http://schemas.microsoft.com/office/drawing/2014/main" id="{836D266B-8A27-4DCF-8902-48EA7638FDF1}"/>
               </a:ext>
             </a:extLst>
           </p:cNvPr>
@@ -17651,7 +17568,7 @@
           <a:p>
             <a:pPr algn="ctr"/>
             <a:r>
-              <a:rPr lang="en-GB" sz="1400" b="1" dirty="0" smtClean="0"/>
+              <a:rPr lang="en-GB" sz="1400" b="1" dirty="0"/>
               <a:t>yes</a:t>
             </a:r>
             <a:endParaRPr lang="en-GB" sz="1400" dirty="0"/>
@@ -17663,7 +17580,7 @@
           <p:cNvPr id="14" name="Ellipse 13">
             <a:extLst>
               <a:ext uri="{FF2B5EF4-FFF2-40B4-BE49-F238E27FC236}">
-                <a16:creationId xmlns:a16="http://schemas.microsoft.com/office/drawing/2014/main" xmlns="" id="{B48A28A4-F86C-489F-903E-CDB2F959EE1D}"/>
+                <a16:creationId xmlns:a16="http://schemas.microsoft.com/office/drawing/2014/main" id="{B48A28A4-F86C-489F-903E-CDB2F959EE1D}"/>
               </a:ext>
             </a:extLst>
           </p:cNvPr>
@@ -17701,7 +17618,7 @@
           <a:p>
             <a:pPr algn="ctr"/>
             <a:r>
-              <a:rPr lang="fr-BE" sz="1200" b="1" dirty="0" smtClean="0"/>
+              <a:rPr lang="fr-BE" sz="1200" b="1" dirty="0"/>
               <a:t>Client Role</a:t>
             </a:r>
             <a:endParaRPr lang="en-GB" sz="1600" b="1" dirty="0"/>
@@ -17713,7 +17630,7 @@
           <p:cNvPr id="15" name="Connecteur droit avec flèche 14">
             <a:extLst>
               <a:ext uri="{FF2B5EF4-FFF2-40B4-BE49-F238E27FC236}">
-                <a16:creationId xmlns:a16="http://schemas.microsoft.com/office/drawing/2014/main" xmlns="" id="{6589CEFF-63AD-48E0-B8C2-2B9C42EE3BA1}"/>
+                <a16:creationId xmlns:a16="http://schemas.microsoft.com/office/drawing/2014/main" id="{6589CEFF-63AD-48E0-B8C2-2B9C42EE3BA1}"/>
               </a:ext>
             </a:extLst>
           </p:cNvPr>
@@ -17756,7 +17673,7 @@
           <p:cNvPr id="20" name="Ellipse 19">
             <a:extLst>
               <a:ext uri="{FF2B5EF4-FFF2-40B4-BE49-F238E27FC236}">
-                <a16:creationId xmlns:a16="http://schemas.microsoft.com/office/drawing/2014/main" xmlns="" id="{B48A28A4-F86C-489F-903E-CDB2F959EE1D}"/>
+                <a16:creationId xmlns:a16="http://schemas.microsoft.com/office/drawing/2014/main" id="{B48A28A4-F86C-489F-903E-CDB2F959EE1D}"/>
               </a:ext>
             </a:extLst>
           </p:cNvPr>
@@ -17794,7 +17711,7 @@
           <a:p>
             <a:pPr algn="ctr"/>
             <a:r>
-              <a:rPr lang="fr-BE" sz="1200" b="1" dirty="0" smtClean="0"/>
+              <a:rPr lang="fr-BE" sz="1200" b="1" dirty="0"/>
               <a:t>Open Connection</a:t>
             </a:r>
             <a:endParaRPr lang="en-GB" sz="1600" b="1" dirty="0"/>
@@ -17806,7 +17723,7 @@
           <p:cNvPr id="21" name="Ellipse 20">
             <a:extLst>
               <a:ext uri="{FF2B5EF4-FFF2-40B4-BE49-F238E27FC236}">
-                <a16:creationId xmlns:a16="http://schemas.microsoft.com/office/drawing/2014/main" xmlns="" id="{B48A28A4-F86C-489F-903E-CDB2F959EE1D}"/>
+                <a16:creationId xmlns:a16="http://schemas.microsoft.com/office/drawing/2014/main" id="{B48A28A4-F86C-489F-903E-CDB2F959EE1D}"/>
               </a:ext>
             </a:extLst>
           </p:cNvPr>
@@ -17844,7 +17761,7 @@
           <a:p>
             <a:pPr algn="ctr"/>
             <a:r>
-              <a:rPr lang="fr-BE" sz="1200" b="1" dirty="0" smtClean="0"/>
+              <a:rPr lang="fr-BE" sz="1200" b="1" dirty="0"/>
               <a:t>Enable Early Data when available</a:t>
             </a:r>
             <a:endParaRPr lang="en-GB" sz="1600" b="1" dirty="0"/>
@@ -17856,7 +17773,7 @@
           <p:cNvPr id="22" name="Ellipse 21">
             <a:extLst>
               <a:ext uri="{FF2B5EF4-FFF2-40B4-BE49-F238E27FC236}">
-                <a16:creationId xmlns:a16="http://schemas.microsoft.com/office/drawing/2014/main" xmlns="" id="{B48A28A4-F86C-489F-903E-CDB2F959EE1D}"/>
+                <a16:creationId xmlns:a16="http://schemas.microsoft.com/office/drawing/2014/main" id="{B48A28A4-F86C-489F-903E-CDB2F959EE1D}"/>
               </a:ext>
             </a:extLst>
           </p:cNvPr>
@@ -17894,12 +17811,8 @@
           <a:p>
             <a:pPr algn="ctr"/>
             <a:r>
-              <a:rPr lang="fr-BE" sz="900" b="1" dirty="0" smtClean="0"/>
-              <a:t>Informed Early Data when accepted/</a:t>
-            </a:r>
-            <a:r>
-              <a:rPr lang="fr-BE" sz="900" b="1" dirty="0" err="1" smtClean="0"/>
-              <a:t>rejected</a:t>
+              <a:rPr lang="fr-BE" sz="900" b="1" dirty="0"/>
+              <a:t>Informed Early Data when accepted/rejected</a:t>
             </a:r>
             <a:endParaRPr lang="en-GB" sz="1050" b="1" dirty="0"/>
           </a:p>
@@ -17910,7 +17823,7 @@
           <p:cNvPr id="23" name="Connecteur droit avec flèche 22">
             <a:extLst>
               <a:ext uri="{FF2B5EF4-FFF2-40B4-BE49-F238E27FC236}">
-                <a16:creationId xmlns:a16="http://schemas.microsoft.com/office/drawing/2014/main" xmlns="" id="{6589CEFF-63AD-48E0-B8C2-2B9C42EE3BA1}"/>
+                <a16:creationId xmlns:a16="http://schemas.microsoft.com/office/drawing/2014/main" id="{6589CEFF-63AD-48E0-B8C2-2B9C42EE3BA1}"/>
               </a:ext>
             </a:extLst>
           </p:cNvPr>
@@ -17953,7 +17866,7 @@
           <p:cNvPr id="26" name="Connecteur droit avec flèche 25">
             <a:extLst>
               <a:ext uri="{FF2B5EF4-FFF2-40B4-BE49-F238E27FC236}">
-                <a16:creationId xmlns:a16="http://schemas.microsoft.com/office/drawing/2014/main" xmlns="" id="{6589CEFF-63AD-48E0-B8C2-2B9C42EE3BA1}"/>
+                <a16:creationId xmlns:a16="http://schemas.microsoft.com/office/drawing/2014/main" id="{6589CEFF-63AD-48E0-B8C2-2B9C42EE3BA1}"/>
               </a:ext>
             </a:extLst>
           </p:cNvPr>
@@ -17996,7 +17909,7 @@
           <p:cNvPr id="29" name="Connecteur droit avec flèche 28">
             <a:extLst>
               <a:ext uri="{FF2B5EF4-FFF2-40B4-BE49-F238E27FC236}">
-                <a16:creationId xmlns:a16="http://schemas.microsoft.com/office/drawing/2014/main" xmlns="" id="{6589CEFF-63AD-48E0-B8C2-2B9C42EE3BA1}"/>
+                <a16:creationId xmlns:a16="http://schemas.microsoft.com/office/drawing/2014/main" id="{6589CEFF-63AD-48E0-B8C2-2B9C42EE3BA1}"/>
               </a:ext>
             </a:extLst>
           </p:cNvPr>
@@ -18039,7 +17952,7 @@
           <p:cNvPr id="34" name="Ellipse 33">
             <a:extLst>
               <a:ext uri="{FF2B5EF4-FFF2-40B4-BE49-F238E27FC236}">
-                <a16:creationId xmlns:a16="http://schemas.microsoft.com/office/drawing/2014/main" xmlns="" id="{B48A28A4-F86C-489F-903E-CDB2F959EE1D}"/>
+                <a16:creationId xmlns:a16="http://schemas.microsoft.com/office/drawing/2014/main" id="{B48A28A4-F86C-489F-903E-CDB2F959EE1D}"/>
               </a:ext>
             </a:extLst>
           </p:cNvPr>
@@ -18077,7 +17990,7 @@
           <a:p>
             <a:pPr algn="ctr"/>
             <a:r>
-              <a:rPr lang="fr-BE" sz="1200" b="1" dirty="0" smtClean="0"/>
+              <a:rPr lang="fr-BE" sz="1200" b="1" dirty="0"/>
               <a:t>Listen for incomming connection</a:t>
             </a:r>
             <a:endParaRPr lang="en-GB" sz="1600" b="1" dirty="0"/>
@@ -18089,7 +18002,7 @@
           <p:cNvPr id="35" name="Ellipse 34">
             <a:extLst>
               <a:ext uri="{FF2B5EF4-FFF2-40B4-BE49-F238E27FC236}">
-                <a16:creationId xmlns:a16="http://schemas.microsoft.com/office/drawing/2014/main" xmlns="" id="{B48A28A4-F86C-489F-903E-CDB2F959EE1D}"/>
+                <a16:creationId xmlns:a16="http://schemas.microsoft.com/office/drawing/2014/main" id="{B48A28A4-F86C-489F-903E-CDB2F959EE1D}"/>
               </a:ext>
             </a:extLst>
           </p:cNvPr>
@@ -18127,7 +18040,7 @@
           <a:p>
             <a:pPr algn="ctr"/>
             <a:r>
-              <a:rPr lang="fr-BE" sz="1200" b="1" dirty="0" smtClean="0"/>
+              <a:rPr lang="fr-BE" sz="1200" b="1" dirty="0"/>
               <a:t>Early Data available</a:t>
             </a:r>
             <a:endParaRPr lang="en-GB" sz="1600" b="1" dirty="0"/>
@@ -18139,7 +18052,7 @@
           <p:cNvPr id="37" name="Connecteur droit avec flèche 36">
             <a:extLst>
               <a:ext uri="{FF2B5EF4-FFF2-40B4-BE49-F238E27FC236}">
-                <a16:creationId xmlns:a16="http://schemas.microsoft.com/office/drawing/2014/main" xmlns="" id="{8E355309-D41D-48CF-A241-308F250C237D}"/>
+                <a16:creationId xmlns:a16="http://schemas.microsoft.com/office/drawing/2014/main" id="{8E355309-D41D-48CF-A241-308F250C237D}"/>
               </a:ext>
             </a:extLst>
           </p:cNvPr>
@@ -18182,7 +18095,7 @@
           <p:cNvPr id="40" name="Ellipse 39">
             <a:extLst>
               <a:ext uri="{FF2B5EF4-FFF2-40B4-BE49-F238E27FC236}">
-                <a16:creationId xmlns:a16="http://schemas.microsoft.com/office/drawing/2014/main" xmlns="" id="{B48A28A4-F86C-489F-903E-CDB2F959EE1D}"/>
+                <a16:creationId xmlns:a16="http://schemas.microsoft.com/office/drawing/2014/main" id="{B48A28A4-F86C-489F-903E-CDB2F959EE1D}"/>
               </a:ext>
             </a:extLst>
           </p:cNvPr>
@@ -18220,7 +18133,7 @@
           <a:p>
             <a:pPr algn="ctr"/>
             <a:r>
-              <a:rPr lang="fr-BE" sz="1200" b="1" dirty="0" smtClean="0"/>
+              <a:rPr lang="fr-BE" sz="1200" b="1" dirty="0"/>
               <a:t>Embed app-control data in TLS ticket sent to client</a:t>
             </a:r>
             <a:endParaRPr lang="en-GB" sz="1600" b="1" dirty="0"/>
@@ -18232,7 +18145,7 @@
           <p:cNvPr id="41" name="Ellipse 40">
             <a:extLst>
               <a:ext uri="{FF2B5EF4-FFF2-40B4-BE49-F238E27FC236}">
-                <a16:creationId xmlns:a16="http://schemas.microsoft.com/office/drawing/2014/main" xmlns="" id="{B48A28A4-F86C-489F-903E-CDB2F959EE1D}"/>
+                <a16:creationId xmlns:a16="http://schemas.microsoft.com/office/drawing/2014/main" id="{B48A28A4-F86C-489F-903E-CDB2F959EE1D}"/>
               </a:ext>
             </a:extLst>
           </p:cNvPr>
@@ -18270,14 +18183,14 @@
           <a:p>
             <a:pPr algn="ctr"/>
             <a:r>
-              <a:rPr lang="fr-BE" sz="1200" b="1" dirty="0" smtClean="0"/>
+              <a:rPr lang="fr-BE" sz="1200" b="1" dirty="0"/>
               <a:t>Retrieve app-control data from client’ticket  and accept OR </a:t>
             </a:r>
           </a:p>
           <a:p>
             <a:pPr algn="ctr"/>
             <a:r>
-              <a:rPr lang="fr-BE" sz="1200" b="1" dirty="0" smtClean="0"/>
+              <a:rPr lang="fr-BE" sz="1200" b="1" dirty="0"/>
               <a:t>Reject</a:t>
             </a:r>
             <a:endParaRPr lang="en-GB" sz="1600" b="1" dirty="0"/>
@@ -18289,7 +18202,7 @@
           <p:cNvPr id="42" name="Connecteur droit avec flèche 41">
             <a:extLst>
               <a:ext uri="{FF2B5EF4-FFF2-40B4-BE49-F238E27FC236}">
-                <a16:creationId xmlns:a16="http://schemas.microsoft.com/office/drawing/2014/main" xmlns="" id="{6589CEFF-63AD-48E0-B8C2-2B9C42EE3BA1}"/>
+                <a16:creationId xmlns:a16="http://schemas.microsoft.com/office/drawing/2014/main" id="{6589CEFF-63AD-48E0-B8C2-2B9C42EE3BA1}"/>
               </a:ext>
             </a:extLst>
           </p:cNvPr>
@@ -18330,7 +18243,7 @@
           <p:cNvPr id="45" name="Connecteur droit avec flèche 44">
             <a:extLst>
               <a:ext uri="{FF2B5EF4-FFF2-40B4-BE49-F238E27FC236}">
-                <a16:creationId xmlns:a16="http://schemas.microsoft.com/office/drawing/2014/main" xmlns="" id="{6589CEFF-63AD-48E0-B8C2-2B9C42EE3BA1}"/>
+                <a16:creationId xmlns:a16="http://schemas.microsoft.com/office/drawing/2014/main" id="{6589CEFF-63AD-48E0-B8C2-2B9C42EE3BA1}"/>
               </a:ext>
             </a:extLst>
           </p:cNvPr>
@@ -18373,7 +18286,7 @@
           <p:cNvPr id="48" name="ZoneTexte 47">
             <a:extLst>
               <a:ext uri="{FF2B5EF4-FFF2-40B4-BE49-F238E27FC236}">
-                <a16:creationId xmlns:a16="http://schemas.microsoft.com/office/drawing/2014/main" xmlns="" id="{836D266B-8A27-4DCF-8902-48EA7638FDF1}"/>
+                <a16:creationId xmlns:a16="http://schemas.microsoft.com/office/drawing/2014/main" id="{836D266B-8A27-4DCF-8902-48EA7638FDF1}"/>
               </a:ext>
             </a:extLst>
           </p:cNvPr>
@@ -18398,7 +18311,7 @@
           <a:p>
             <a:pPr algn="ctr"/>
             <a:r>
-              <a:rPr lang="en-GB" sz="1400" b="1" dirty="0" smtClean="0"/>
+              <a:rPr lang="en-GB" sz="1400" b="1" dirty="0"/>
               <a:t>no</a:t>
             </a:r>
             <a:endParaRPr lang="en-GB" sz="1400" dirty="0"/>
@@ -18410,7 +18323,7 @@
           <p:cNvPr id="53" name="Ellipse 52">
             <a:extLst>
               <a:ext uri="{FF2B5EF4-FFF2-40B4-BE49-F238E27FC236}">
-                <a16:creationId xmlns:a16="http://schemas.microsoft.com/office/drawing/2014/main" xmlns="" id="{B48A28A4-F86C-489F-903E-CDB2F959EE1D}"/>
+                <a16:creationId xmlns:a16="http://schemas.microsoft.com/office/drawing/2014/main" id="{B48A28A4-F86C-489F-903E-CDB2F959EE1D}"/>
               </a:ext>
             </a:extLst>
           </p:cNvPr>
@@ -18449,15 +18362,7 @@
             <a:pPr algn="ctr"/>
             <a:r>
               <a:rPr lang="en-US" sz="1050" b="1" dirty="0"/>
-              <a:t>configure minimum values for the initial number of </a:t>
-            </a:r>
-            <a:r>
-              <a:rPr lang="en-US" sz="1050" b="1" dirty="0" smtClean="0"/>
-              <a:t>permitted  </a:t>
-            </a:r>
-            <a:r>
-              <a:rPr lang="en-US" sz="1050" b="1" dirty="0"/>
-              <a:t>streams of each type</a:t>
+              <a:t>configure minimum values for the initial number of permitted  streams of each type</a:t>
             </a:r>
             <a:endParaRPr lang="en-GB" sz="1200" b="1" dirty="0"/>
           </a:p>
@@ -18468,7 +18373,7 @@
           <p:cNvPr id="59" name="Ellipse 58">
             <a:extLst>
               <a:ext uri="{FF2B5EF4-FFF2-40B4-BE49-F238E27FC236}">
-                <a16:creationId xmlns:a16="http://schemas.microsoft.com/office/drawing/2014/main" xmlns="" id="{B48A28A4-F86C-489F-903E-CDB2F959EE1D}"/>
+                <a16:creationId xmlns:a16="http://schemas.microsoft.com/office/drawing/2014/main" id="{B48A28A4-F86C-489F-903E-CDB2F959EE1D}"/>
               </a:ext>
             </a:extLst>
           </p:cNvPr>
@@ -18525,7 +18430,7 @@
           <p:cNvPr id="60" name="Ellipse 59">
             <a:extLst>
               <a:ext uri="{FF2B5EF4-FFF2-40B4-BE49-F238E27FC236}">
-                <a16:creationId xmlns:a16="http://schemas.microsoft.com/office/drawing/2014/main" xmlns="" id="{B48A28A4-F86C-489F-903E-CDB2F959EE1D}"/>
+                <a16:creationId xmlns:a16="http://schemas.microsoft.com/office/drawing/2014/main" id="{B48A28A4-F86C-489F-903E-CDB2F959EE1D}"/>
               </a:ext>
             </a:extLst>
           </p:cNvPr>
@@ -18563,7 +18468,7 @@
           <a:p>
             <a:pPr algn="ctr"/>
             <a:r>
-              <a:rPr lang="en-US" sz="1050" b="1" dirty="0" smtClean="0"/>
+              <a:rPr lang="en-US" sz="1050" b="1" dirty="0"/>
               <a:t>Identify handshake completion</a:t>
             </a:r>
             <a:endParaRPr lang="en-GB" sz="1200" b="1" dirty="0"/>
@@ -18575,7 +18480,7 @@
           <p:cNvPr id="61" name="Ellipse 60">
             <a:extLst>
               <a:ext uri="{FF2B5EF4-FFF2-40B4-BE49-F238E27FC236}">
-                <a16:creationId xmlns:a16="http://schemas.microsoft.com/office/drawing/2014/main" xmlns="" id="{B48A28A4-F86C-489F-903E-CDB2F959EE1D}"/>
+                <a16:creationId xmlns:a16="http://schemas.microsoft.com/office/drawing/2014/main" id="{B48A28A4-F86C-489F-903E-CDB2F959EE1D}"/>
               </a:ext>
             </a:extLst>
           </p:cNvPr>
@@ -18613,7 +18518,7 @@
           <a:p>
             <a:pPr algn="ctr"/>
             <a:r>
-              <a:rPr lang="en-US" sz="1050" b="1" dirty="0" smtClean="0"/>
+              <a:rPr lang="en-US" sz="1050" b="1" dirty="0"/>
               <a:t>Keep connection alive</a:t>
             </a:r>
             <a:endParaRPr lang="en-GB" sz="1200" b="1" dirty="0"/>
@@ -18625,7 +18530,7 @@
           <p:cNvPr id="62" name="Ellipse 61">
             <a:extLst>
               <a:ext uri="{FF2B5EF4-FFF2-40B4-BE49-F238E27FC236}">
-                <a16:creationId xmlns:a16="http://schemas.microsoft.com/office/drawing/2014/main" xmlns="" id="{B48A28A4-F86C-489F-903E-CDB2F959EE1D}"/>
+                <a16:creationId xmlns:a16="http://schemas.microsoft.com/office/drawing/2014/main" id="{B48A28A4-F86C-489F-903E-CDB2F959EE1D}"/>
               </a:ext>
             </a:extLst>
           </p:cNvPr>
@@ -18663,7 +18568,7 @@
           <a:p>
             <a:pPr algn="ctr"/>
             <a:r>
-              <a:rPr lang="en-US" sz="1050" b="1" dirty="0" smtClean="0"/>
+              <a:rPr lang="en-US" sz="1050" b="1" dirty="0"/>
               <a:t>Close connection</a:t>
             </a:r>
             <a:endParaRPr lang="en-GB" sz="1200" b="1" dirty="0"/>
@@ -18675,7 +18580,7 @@
           <p:cNvPr id="63" name="Connecteur droit avec flèche 62">
             <a:extLst>
               <a:ext uri="{FF2B5EF4-FFF2-40B4-BE49-F238E27FC236}">
-                <a16:creationId xmlns:a16="http://schemas.microsoft.com/office/drawing/2014/main" xmlns="" id="{6589CEFF-63AD-48E0-B8C2-2B9C42EE3BA1}"/>
+                <a16:creationId xmlns:a16="http://schemas.microsoft.com/office/drawing/2014/main" id="{6589CEFF-63AD-48E0-B8C2-2B9C42EE3BA1}"/>
               </a:ext>
             </a:extLst>
           </p:cNvPr>
@@ -18718,7 +18623,7 @@
           <p:cNvPr id="71" name="Connecteur droit avec flèche 70">
             <a:extLst>
               <a:ext uri="{FF2B5EF4-FFF2-40B4-BE49-F238E27FC236}">
-                <a16:creationId xmlns:a16="http://schemas.microsoft.com/office/drawing/2014/main" xmlns="" id="{6589CEFF-63AD-48E0-B8C2-2B9C42EE3BA1}"/>
+                <a16:creationId xmlns:a16="http://schemas.microsoft.com/office/drawing/2014/main" id="{6589CEFF-63AD-48E0-B8C2-2B9C42EE3BA1}"/>
               </a:ext>
             </a:extLst>
           </p:cNvPr>
@@ -18761,7 +18666,7 @@
           <p:cNvPr id="75" name="Connecteur droit avec flèche 74">
             <a:extLst>
               <a:ext uri="{FF2B5EF4-FFF2-40B4-BE49-F238E27FC236}">
-                <a16:creationId xmlns:a16="http://schemas.microsoft.com/office/drawing/2014/main" xmlns="" id="{6589CEFF-63AD-48E0-B8C2-2B9C42EE3BA1}"/>
+                <a16:creationId xmlns:a16="http://schemas.microsoft.com/office/drawing/2014/main" id="{6589CEFF-63AD-48E0-B8C2-2B9C42EE3BA1}"/>
               </a:ext>
             </a:extLst>
           </p:cNvPr>
@@ -18804,7 +18709,7 @@
           <p:cNvPr id="78" name="Connecteur droit avec flèche 77">
             <a:extLst>
               <a:ext uri="{FF2B5EF4-FFF2-40B4-BE49-F238E27FC236}">
-                <a16:creationId xmlns:a16="http://schemas.microsoft.com/office/drawing/2014/main" xmlns="" id="{6589CEFF-63AD-48E0-B8C2-2B9C42EE3BA1}"/>
+                <a16:creationId xmlns:a16="http://schemas.microsoft.com/office/drawing/2014/main" id="{6589CEFF-63AD-48E0-B8C2-2B9C42EE3BA1}"/>
               </a:ext>
             </a:extLst>
           </p:cNvPr>
@@ -18894,7 +18799,7 @@
           <a:p>
             <a:pPr algn="ctr"/>
             <a:r>
-              <a:rPr lang="en-GB" b="1" dirty="0" smtClean="0"/>
+              <a:rPr lang="en-GB" b="1" dirty="0"/>
               <a:t>6.Version Negotiation</a:t>
             </a:r>
             <a:endParaRPr lang="fr-FR" b="1" dirty="0"/>
@@ -18936,7 +18841,7 @@
           <p:cNvPr id="5" name="ZoneTexte 4">
             <a:extLst>
               <a:ext uri="{FF2B5EF4-FFF2-40B4-BE49-F238E27FC236}">
-                <a16:creationId xmlns:a16="http://schemas.microsoft.com/office/drawing/2014/main" xmlns="" id="{25D0CFDD-F8D9-4498-A666-F31BA473AEDD}"/>
+                <a16:creationId xmlns:a16="http://schemas.microsoft.com/office/drawing/2014/main" id="{25D0CFDD-F8D9-4498-A666-F31BA473AEDD}"/>
               </a:ext>
             </a:extLst>
           </p:cNvPr>
@@ -18963,7 +18868,6 @@
               <a:rPr lang="en-GB" sz="2800" b="1" dirty="0"/>
               <a:t>Sending Version Negotiation Packets</a:t>
             </a:r>
-            <a:endParaRPr lang="en-GB" sz="2800" b="1" dirty="0"/>
           </a:p>
         </p:txBody>
       </p:sp>
@@ -18972,7 +18876,7 @@
           <p:cNvPr id="33" name="Ellipse 32">
             <a:extLst>
               <a:ext uri="{FF2B5EF4-FFF2-40B4-BE49-F238E27FC236}">
-                <a16:creationId xmlns:a16="http://schemas.microsoft.com/office/drawing/2014/main" xmlns="" id="{89FCD844-DF7E-40C9-9D11-022F7FE63189}"/>
+                <a16:creationId xmlns:a16="http://schemas.microsoft.com/office/drawing/2014/main" id="{89FCD844-DF7E-40C9-9D11-022F7FE63189}"/>
               </a:ext>
             </a:extLst>
           </p:cNvPr>
@@ -19010,7 +18914,7 @@
           <a:p>
             <a:pPr algn="ctr"/>
             <a:r>
-              <a:rPr lang="fr-BE" sz="1200" b="1" dirty="0" smtClean="0"/>
+              <a:rPr lang="fr-BE" sz="1200" b="1" dirty="0"/>
               <a:t>New Connection on server and version selected by client not supported</a:t>
             </a:r>
             <a:endParaRPr lang="en-GB" sz="1600" b="1" dirty="0"/>
@@ -19022,7 +18926,7 @@
           <p:cNvPr id="13" name="Connecteur droit avec flèche 12">
             <a:extLst>
               <a:ext uri="{FF2B5EF4-FFF2-40B4-BE49-F238E27FC236}">
-                <a16:creationId xmlns:a16="http://schemas.microsoft.com/office/drawing/2014/main" xmlns="" id="{6589CEFF-63AD-48E0-B8C2-2B9C42EE3BA1}"/>
+                <a16:creationId xmlns:a16="http://schemas.microsoft.com/office/drawing/2014/main" id="{6589CEFF-63AD-48E0-B8C2-2B9C42EE3BA1}"/>
               </a:ext>
             </a:extLst>
           </p:cNvPr>
@@ -19065,7 +18969,7 @@
           <p:cNvPr id="3" name="Ellipse 2">
             <a:extLst>
               <a:ext uri="{FF2B5EF4-FFF2-40B4-BE49-F238E27FC236}">
-                <a16:creationId xmlns:a16="http://schemas.microsoft.com/office/drawing/2014/main" xmlns="" id="{B48A28A4-F86C-489F-903E-CDB2F959EE1D}"/>
+                <a16:creationId xmlns:a16="http://schemas.microsoft.com/office/drawing/2014/main" id="{B48A28A4-F86C-489F-903E-CDB2F959EE1D}"/>
               </a:ext>
             </a:extLst>
           </p:cNvPr>
@@ -19103,10 +19007,9 @@
           <a:p>
             <a:pPr algn="ctr"/>
             <a:r>
-              <a:rPr lang="en-GB" sz="1200" b="1" dirty="0" smtClean="0"/>
+              <a:rPr lang="en-GB" sz="1200" b="1" dirty="0"/>
               <a:t>Client receive list of version</a:t>
             </a:r>
-            <a:endParaRPr lang="en-GB" sz="1200" b="1" dirty="0"/>
           </a:p>
         </p:txBody>
       </p:sp>
@@ -19115,7 +19018,7 @@
           <p:cNvPr id="18" name="ZoneTexte 17">
             <a:extLst>
               <a:ext uri="{FF2B5EF4-FFF2-40B4-BE49-F238E27FC236}">
-                <a16:creationId xmlns:a16="http://schemas.microsoft.com/office/drawing/2014/main" xmlns="" xmlns:a14="http://schemas.microsoft.com/office/drawing/2010/main" xmlns:mc="http://schemas.openxmlformats.org/markup-compatibility/2006" id="{DB737F55-3E4B-44C8-95BF-7E258C52E571}"/>
+                <a16:creationId xmlns:a16="http://schemas.microsoft.com/office/drawing/2014/main" id="{DB737F55-3E4B-44C8-95BF-7E258C52E571}"/>
               </a:ext>
             </a:extLst>
           </p:cNvPr>
@@ -19140,25 +19043,24 @@
           <a:p>
             <a:pPr algn="ctr"/>
             <a:r>
-              <a:rPr lang="en-GB" sz="1400" dirty="0" smtClean="0"/>
+              <a:rPr lang="en-GB" sz="1400" dirty="0"/>
               <a:t>Version Negociation packet</a:t>
             </a:r>
           </a:p>
           <a:p>
             <a:pPr algn="ctr"/>
             <a:r>
-              <a:rPr lang="en-GB" sz="1400" dirty="0" smtClean="0"/>
+              <a:rPr lang="en-GB" sz="1400" dirty="0"/>
               <a:t>-&gt; 1</a:t>
             </a:r>
             <a:r>
-              <a:rPr lang="en-GB" sz="1400" baseline="30000" dirty="0" smtClean="0"/>
+              <a:rPr lang="en-GB" sz="1400" baseline="30000" dirty="0"/>
               <a:t>st</a:t>
             </a:r>
             <a:r>
-              <a:rPr lang="en-GB" sz="1400" dirty="0" smtClean="0"/>
+              <a:rPr lang="en-GB" sz="1400" dirty="0"/>
               <a:t> UDP datagram need enough size</a:t>
             </a:r>
-            <a:endParaRPr lang="en-GB" sz="1400" dirty="0"/>
           </a:p>
         </p:txBody>
       </p:sp>
@@ -19167,7 +19069,7 @@
           <p:cNvPr id="10" name="Ellipse 9">
             <a:extLst>
               <a:ext uri="{FF2B5EF4-FFF2-40B4-BE49-F238E27FC236}">
-                <a16:creationId xmlns:a16="http://schemas.microsoft.com/office/drawing/2014/main" xmlns="" id="{248768E0-C1A4-4110-B54A-35EAB18749A4}"/>
+                <a16:creationId xmlns:a16="http://schemas.microsoft.com/office/drawing/2014/main" id="{248768E0-C1A4-4110-B54A-35EAB18749A4}"/>
               </a:ext>
             </a:extLst>
           </p:cNvPr>
@@ -19208,7 +19110,7 @@
           <a:p>
             <a:pPr algn="ctr"/>
             <a:r>
-              <a:rPr lang="fr-BE" sz="1100" b="1" dirty="0" smtClean="0"/>
+              <a:rPr lang="fr-BE" sz="1100" b="1" dirty="0"/>
               <a:t>« Error »</a:t>
             </a:r>
             <a:endParaRPr lang="en-GB" sz="1100" b="1" dirty="0"/>
@@ -19220,7 +19122,7 @@
           <p:cNvPr id="12" name="Connecteur droit avec flèche 11">
             <a:extLst>
               <a:ext uri="{FF2B5EF4-FFF2-40B4-BE49-F238E27FC236}">
-                <a16:creationId xmlns:a16="http://schemas.microsoft.com/office/drawing/2014/main" xmlns="" id="{6589CEFF-63AD-48E0-B8C2-2B9C42EE3BA1}"/>
+                <a16:creationId xmlns:a16="http://schemas.microsoft.com/office/drawing/2014/main" id="{6589CEFF-63AD-48E0-B8C2-2B9C42EE3BA1}"/>
               </a:ext>
             </a:extLst>
           </p:cNvPr>
@@ -19297,14 +19199,6 @@
   <p:clrMapOvr>
     <a:masterClrMapping/>
   </p:clrMapOvr>
-  <mc:AlternateContent xmlns:mc="http://schemas.openxmlformats.org/markup-compatibility/2006">
-    <mc:Choice xmlns:p14="http://schemas.microsoft.com/office/powerpoint/2010/main" Requires="p14">
-      <p:transition spd="slow" p14:dur="2000"/>
-    </mc:Choice>
-    <mc:Fallback>
-      <p:transition spd="slow"/>
-    </mc:Fallback>
-  </mc:AlternateContent>
 </p:sld>
 </file>
 
@@ -19330,7 +19224,7 @@
           <p:cNvPr id="5" name="ZoneTexte 4">
             <a:extLst>
               <a:ext uri="{FF2B5EF4-FFF2-40B4-BE49-F238E27FC236}">
-                <a16:creationId xmlns:a16="http://schemas.microsoft.com/office/drawing/2014/main" xmlns="" id="{25D0CFDD-F8D9-4498-A666-F31BA473AEDD}"/>
+                <a16:creationId xmlns:a16="http://schemas.microsoft.com/office/drawing/2014/main" id="{25D0CFDD-F8D9-4498-A666-F31BA473AEDD}"/>
               </a:ext>
             </a:extLst>
           </p:cNvPr>
@@ -19357,7 +19251,6 @@
               <a:rPr lang="en-GB" sz="2800" b="1" dirty="0"/>
               <a:t>Handling Version Negotiation Packets</a:t>
             </a:r>
-            <a:endParaRPr lang="en-GB" sz="2800" b="1" dirty="0"/>
           </a:p>
         </p:txBody>
       </p:sp>
@@ -19366,7 +19259,7 @@
           <p:cNvPr id="33" name="Ellipse 32">
             <a:extLst>
               <a:ext uri="{FF2B5EF4-FFF2-40B4-BE49-F238E27FC236}">
-                <a16:creationId xmlns:a16="http://schemas.microsoft.com/office/drawing/2014/main" xmlns="" id="{89FCD844-DF7E-40C9-9D11-022F7FE63189}"/>
+                <a16:creationId xmlns:a16="http://schemas.microsoft.com/office/drawing/2014/main" id="{89FCD844-DF7E-40C9-9D11-022F7FE63189}"/>
               </a:ext>
             </a:extLst>
           </p:cNvPr>
@@ -19404,7 +19297,7 @@
           <a:p>
             <a:pPr algn="ctr"/>
             <a:r>
-              <a:rPr lang="fr-BE" sz="1200" b="1" dirty="0" smtClean="0"/>
+              <a:rPr lang="fr-BE" sz="1200" b="1" dirty="0"/>
               <a:t>Client receive Version Negociation</a:t>
             </a:r>
             <a:endParaRPr lang="en-GB" sz="1600" b="1" dirty="0"/>
@@ -19416,7 +19309,7 @@
           <p:cNvPr id="13" name="Connecteur droit avec flèche 12">
             <a:extLst>
               <a:ext uri="{FF2B5EF4-FFF2-40B4-BE49-F238E27FC236}">
-                <a16:creationId xmlns:a16="http://schemas.microsoft.com/office/drawing/2014/main" xmlns="" id="{6589CEFF-63AD-48E0-B8C2-2B9C42EE3BA1}"/>
+                <a16:creationId xmlns:a16="http://schemas.microsoft.com/office/drawing/2014/main" id="{6589CEFF-63AD-48E0-B8C2-2B9C42EE3BA1}"/>
               </a:ext>
             </a:extLst>
           </p:cNvPr>
@@ -19458,7 +19351,7 @@
           <p:cNvPr id="18" name="ZoneTexte 17">
             <a:extLst>
               <a:ext uri="{FF2B5EF4-FFF2-40B4-BE49-F238E27FC236}">
-                <a16:creationId xmlns:a16="http://schemas.microsoft.com/office/drawing/2014/main" xmlns="" xmlns:a14="http://schemas.microsoft.com/office/drawing/2010/main" xmlns:mc="http://schemas.openxmlformats.org/markup-compatibility/2006" id="{DB737F55-3E4B-44C8-95BF-7E258C52E571}"/>
+                <a16:creationId xmlns:a16="http://schemas.microsoft.com/office/drawing/2014/main" id="{DB737F55-3E4B-44C8-95BF-7E258C52E571}"/>
               </a:ext>
             </a:extLst>
           </p:cNvPr>
@@ -19485,7 +19378,7 @@
               <a:buAutoNum type="arabicParenR"/>
             </a:pPr>
             <a:r>
-              <a:rPr lang="en-GB" sz="1400" dirty="0" smtClean="0"/>
+              <a:rPr lang="en-GB" sz="1400" dirty="0"/>
               <a:t>Already process any other packet</a:t>
             </a:r>
           </a:p>
@@ -19494,10 +19387,9 @@
               <a:buAutoNum type="arabicParenR"/>
             </a:pPr>
             <a:r>
-              <a:rPr lang="en-GB" sz="1400" dirty="0" smtClean="0"/>
+              <a:rPr lang="en-GB" sz="1400" dirty="0"/>
               <a:t>List version already selected by the client</a:t>
             </a:r>
-            <a:endParaRPr lang="en-GB" sz="1400" dirty="0"/>
           </a:p>
         </p:txBody>
       </p:sp>
@@ -19506,7 +19398,7 @@
           <p:cNvPr id="12" name="Ellipse 11">
             <a:extLst>
               <a:ext uri="{FF2B5EF4-FFF2-40B4-BE49-F238E27FC236}">
-                <a16:creationId xmlns:a16="http://schemas.microsoft.com/office/drawing/2014/main" xmlns="" id="{248768E0-C1A4-4110-B54A-35EAB18749A4}"/>
+                <a16:creationId xmlns:a16="http://schemas.microsoft.com/office/drawing/2014/main" id="{248768E0-C1A4-4110-B54A-35EAB18749A4}"/>
               </a:ext>
             </a:extLst>
           </p:cNvPr>
@@ -19547,7 +19439,7 @@
           <a:p>
             <a:pPr algn="ctr"/>
             <a:r>
-              <a:rPr lang="fr-BE" sz="1100" b="1" dirty="0" smtClean="0"/>
+              <a:rPr lang="fr-BE" sz="1100" b="1" dirty="0"/>
               <a:t>Packet discard</a:t>
             </a:r>
             <a:endParaRPr lang="en-GB" sz="1100" b="1" dirty="0"/>
@@ -19559,7 +19451,7 @@
           <p:cNvPr id="14" name="Connecteur droit avec flèche 13">
             <a:extLst>
               <a:ext uri="{FF2B5EF4-FFF2-40B4-BE49-F238E27FC236}">
-                <a16:creationId xmlns:a16="http://schemas.microsoft.com/office/drawing/2014/main" xmlns="" id="{6589CEFF-63AD-48E0-B8C2-2B9C42EE3BA1}"/>
+                <a16:creationId xmlns:a16="http://schemas.microsoft.com/office/drawing/2014/main" id="{6589CEFF-63AD-48E0-B8C2-2B9C42EE3BA1}"/>
               </a:ext>
             </a:extLst>
           </p:cNvPr>
@@ -19602,7 +19494,7 @@
           <p:cNvPr id="16" name="Ellipse 15">
             <a:extLst>
               <a:ext uri="{FF2B5EF4-FFF2-40B4-BE49-F238E27FC236}">
-                <a16:creationId xmlns:a16="http://schemas.microsoft.com/office/drawing/2014/main" xmlns="" id="{248768E0-C1A4-4110-B54A-35EAB18749A4}"/>
+                <a16:creationId xmlns:a16="http://schemas.microsoft.com/office/drawing/2014/main" id="{248768E0-C1A4-4110-B54A-35EAB18749A4}"/>
               </a:ext>
             </a:extLst>
           </p:cNvPr>
@@ -19643,7 +19535,7 @@
           <a:p>
             <a:pPr algn="ctr"/>
             <a:r>
-              <a:rPr lang="fr-BE" sz="1100" b="1" dirty="0" smtClean="0"/>
+              <a:rPr lang="fr-BE" sz="1100" b="1" dirty="0"/>
               <a:t>Connection closed</a:t>
             </a:r>
             <a:endParaRPr lang="en-GB" sz="1100" b="1" dirty="0"/>
@@ -19655,7 +19547,7 @@
           <p:cNvPr id="17" name="Connecteur droit avec flèche 16">
             <a:extLst>
               <a:ext uri="{FF2B5EF4-FFF2-40B4-BE49-F238E27FC236}">
-                <a16:creationId xmlns:a16="http://schemas.microsoft.com/office/drawing/2014/main" xmlns="" id="{6589CEFF-63AD-48E0-B8C2-2B9C42EE3BA1}"/>
+                <a16:creationId xmlns:a16="http://schemas.microsoft.com/office/drawing/2014/main" id="{6589CEFF-63AD-48E0-B8C2-2B9C42EE3BA1}"/>
               </a:ext>
             </a:extLst>
           </p:cNvPr>
@@ -19698,7 +19590,7 @@
           <p:cNvPr id="20" name="ZoneTexte 19">
             <a:extLst>
               <a:ext uri="{FF2B5EF4-FFF2-40B4-BE49-F238E27FC236}">
-                <a16:creationId xmlns:a16="http://schemas.microsoft.com/office/drawing/2014/main" xmlns="" xmlns:a14="http://schemas.microsoft.com/office/drawing/2010/main" xmlns:mc="http://schemas.openxmlformats.org/markup-compatibility/2006" id="{DB737F55-3E4B-44C8-95BF-7E258C52E571}"/>
+                <a16:creationId xmlns:a16="http://schemas.microsoft.com/office/drawing/2014/main" id="{DB737F55-3E4B-44C8-95BF-7E258C52E571}"/>
               </a:ext>
             </a:extLst>
           </p:cNvPr>
@@ -19723,10 +19615,9 @@
           <a:p>
             <a:pPr algn="ctr"/>
             <a:r>
-              <a:rPr lang="en-GB" sz="1400" dirty="0" smtClean="0"/>
+              <a:rPr lang="en-GB" sz="1400" dirty="0"/>
               <a:t>Only supported selected version</a:t>
             </a:r>
-            <a:endParaRPr lang="en-GB" sz="1400" dirty="0"/>
           </a:p>
         </p:txBody>
       </p:sp>
@@ -19753,10 +19644,9 @@
           <a:lstStyle/>
           <a:p>
             <a:r>
-              <a:rPr lang="fr-FR" b="1" dirty="0" smtClean="0"/>
+              <a:rPr lang="fr-FR" b="1" dirty="0"/>
               <a:t>? To be defined in the futur</a:t>
             </a:r>
-            <a:endParaRPr lang="fr-FR" b="1" dirty="0"/>
           </a:p>
         </p:txBody>
       </p:sp>
@@ -19770,14 +19660,6 @@
   <p:clrMapOvr>
     <a:masterClrMapping/>
   </p:clrMapOvr>
-  <mc:AlternateContent xmlns:mc="http://schemas.openxmlformats.org/markup-compatibility/2006">
-    <mc:Choice xmlns:p14="http://schemas.microsoft.com/office/powerpoint/2010/main" Requires="p14">
-      <p:transition spd="slow" p14:dur="2000"/>
-    </mc:Choice>
-    <mc:Fallback>
-      <p:transition spd="slow"/>
-    </mc:Fallback>
-  </mc:AlternateContent>
 </p:sld>
 </file>
 
@@ -19803,7 +19685,7 @@
           <p:cNvPr id="5" name="ZoneTexte 4">
             <a:extLst>
               <a:ext uri="{FF2B5EF4-FFF2-40B4-BE49-F238E27FC236}">
-                <a16:creationId xmlns:a16="http://schemas.microsoft.com/office/drawing/2014/main" xmlns="" id="{25D0CFDD-F8D9-4498-A666-F31BA473AEDD}"/>
+                <a16:creationId xmlns:a16="http://schemas.microsoft.com/office/drawing/2014/main" id="{25D0CFDD-F8D9-4498-A666-F31BA473AEDD}"/>
               </a:ext>
             </a:extLst>
           </p:cNvPr>
@@ -19830,7 +19712,6 @@
               <a:rPr lang="en-GB" sz="2800" b="1" dirty="0"/>
               <a:t>Using Reserved Versions</a:t>
             </a:r>
-            <a:endParaRPr lang="en-GB" sz="2800" b="1" dirty="0"/>
           </a:p>
         </p:txBody>
       </p:sp>
@@ -19839,7 +19720,7 @@
           <p:cNvPr id="33" name="Ellipse 32">
             <a:extLst>
               <a:ext uri="{FF2B5EF4-FFF2-40B4-BE49-F238E27FC236}">
-                <a16:creationId xmlns:a16="http://schemas.microsoft.com/office/drawing/2014/main" xmlns="" id="{89FCD844-DF7E-40C9-9D11-022F7FE63189}"/>
+                <a16:creationId xmlns:a16="http://schemas.microsoft.com/office/drawing/2014/main" id="{89FCD844-DF7E-40C9-9D11-022F7FE63189}"/>
               </a:ext>
             </a:extLst>
           </p:cNvPr>
@@ -19889,7 +19770,7 @@
           <p:cNvPr id="13" name="Connecteur droit avec flèche 12">
             <a:extLst>
               <a:ext uri="{FF2B5EF4-FFF2-40B4-BE49-F238E27FC236}">
-                <a16:creationId xmlns:a16="http://schemas.microsoft.com/office/drawing/2014/main" xmlns="" id="{6589CEFF-63AD-48E0-B8C2-2B9C42EE3BA1}"/>
+                <a16:creationId xmlns:a16="http://schemas.microsoft.com/office/drawing/2014/main" id="{6589CEFF-63AD-48E0-B8C2-2B9C42EE3BA1}"/>
               </a:ext>
             </a:extLst>
           </p:cNvPr>
@@ -19932,7 +19813,7 @@
           <p:cNvPr id="3" name="Ellipse 2">
             <a:extLst>
               <a:ext uri="{FF2B5EF4-FFF2-40B4-BE49-F238E27FC236}">
-                <a16:creationId xmlns:a16="http://schemas.microsoft.com/office/drawing/2014/main" xmlns="" id="{B48A28A4-F86C-489F-903E-CDB2F959EE1D}"/>
+                <a16:creationId xmlns:a16="http://schemas.microsoft.com/office/drawing/2014/main" id="{B48A28A4-F86C-489F-903E-CDB2F959EE1D}"/>
               </a:ext>
             </a:extLst>
           </p:cNvPr>
@@ -19977,14 +19858,14 @@
           </a:p>
         </p:txBody>
       </p:sp>
-      <mc:AlternateContent xmlns:mc="http://schemas.openxmlformats.org/markup-compatibility/2006">
-        <mc:Choice xmlns:a14="http://schemas.microsoft.com/office/drawing/2010/main" Requires="a14">
+      <mc:AlternateContent xmlns:mc="http://schemas.openxmlformats.org/markup-compatibility/2006" xmlns:a14="http://schemas.microsoft.com/office/drawing/2010/main">
+        <mc:Choice Requires="a14">
           <p:sp>
             <p:nvSpPr>
               <p:cNvPr id="18" name="ZoneTexte 17">
                 <a:extLst>
                   <a:ext uri="{FF2B5EF4-FFF2-40B4-BE49-F238E27FC236}">
-                    <a16:creationId xmlns:a16="http://schemas.microsoft.com/office/drawing/2014/main" xmlns="" id="{DB737F55-3E4B-44C8-95BF-7E258C52E571}"/>
+                    <a16:creationId xmlns:a16="http://schemas.microsoft.com/office/drawing/2014/main" id="{DB737F55-3E4B-44C8-95BF-7E258C52E571}"/>
                   </a:ext>
                 </a:extLst>
               </p:cNvPr>
@@ -20051,7 +19932,7 @@
             </p:txBody>
           </p:sp>
         </mc:Choice>
-        <mc:Fallback>
+        <mc:Fallback xmlns="">
           <p:sp>
             <p:nvSpPr>
               <p:cNvPr id="18" name="ZoneTexte 17">
@@ -20101,7 +19982,7 @@
           <p:cNvPr id="2" name="Ellipse 1">
             <a:extLst>
               <a:ext uri="{FF2B5EF4-FFF2-40B4-BE49-F238E27FC236}">
-                <a16:creationId xmlns:a16="http://schemas.microsoft.com/office/drawing/2014/main" xmlns="" id="{248768E0-C1A4-4110-B54A-35EAB18749A4}"/>
+                <a16:creationId xmlns:a16="http://schemas.microsoft.com/office/drawing/2014/main" id="{248768E0-C1A4-4110-B54A-35EAB18749A4}"/>
               </a:ext>
             </a:extLst>
           </p:cNvPr>
@@ -20154,7 +20035,7 @@
           <p:cNvPr id="11" name="Connecteur droit avec flèche 10">
             <a:extLst>
               <a:ext uri="{FF2B5EF4-FFF2-40B4-BE49-F238E27FC236}">
-                <a16:creationId xmlns:a16="http://schemas.microsoft.com/office/drawing/2014/main" xmlns="" id="{8E355309-D41D-48CF-A241-308F250C237D}"/>
+                <a16:creationId xmlns:a16="http://schemas.microsoft.com/office/drawing/2014/main" id="{8E355309-D41D-48CF-A241-308F250C237D}"/>
               </a:ext>
             </a:extLst>
           </p:cNvPr>
@@ -20197,7 +20078,7 @@
           <p:cNvPr id="7" name="ZoneTexte 6">
             <a:extLst>
               <a:ext uri="{FF2B5EF4-FFF2-40B4-BE49-F238E27FC236}">
-                <a16:creationId xmlns:a16="http://schemas.microsoft.com/office/drawing/2014/main" xmlns="" id="{836D266B-8A27-4DCF-8902-48EA7638FDF1}"/>
+                <a16:creationId xmlns:a16="http://schemas.microsoft.com/office/drawing/2014/main" id="{836D266B-8A27-4DCF-8902-48EA7638FDF1}"/>
               </a:ext>
             </a:extLst>
           </p:cNvPr>
@@ -20242,14 +20123,6 @@
   <p:clrMapOvr>
     <a:masterClrMapping/>
   </p:clrMapOvr>
-  <mc:AlternateContent xmlns:mc="http://schemas.openxmlformats.org/markup-compatibility/2006">
-    <mc:Choice xmlns:p14="http://schemas.microsoft.com/office/powerpoint/2010/main" Requires="p14">
-      <p:transition spd="slow" p14:dur="2000"/>
-    </mc:Choice>
-    <mc:Fallback>
-      <p:transition spd="slow"/>
-    </mc:Fallback>
-  </mc:AlternateContent>
 </p:sld>
 </file>
 
@@ -20292,12 +20165,8 @@
           <a:p>
             <a:pPr algn="ctr"/>
             <a:r>
-              <a:rPr lang="en-GB" b="1" dirty="0" smtClean="0"/>
-              <a:t>7</a:t>
-            </a:r>
-            <a:r>
               <a:rPr lang="en-GB" b="1" dirty="0"/>
-              <a:t>. Cryptographic and Transport Handshake</a:t>
+              <a:t>7. Cryptographic and Transport Handshake</a:t>
             </a:r>
             <a:endParaRPr lang="fr-FR" b="1" dirty="0"/>
           </a:p>
@@ -20397,7 +20266,7 @@
           <p:cNvPr id="5" name="ZoneTexte 4">
             <a:extLst>
               <a:ext uri="{FF2B5EF4-FFF2-40B4-BE49-F238E27FC236}">
-                <a16:creationId xmlns:a16="http://schemas.microsoft.com/office/drawing/2014/main" xmlns="" id="{25D0CFDD-F8D9-4498-A666-F31BA473AEDD}"/>
+                <a16:creationId xmlns:a16="http://schemas.microsoft.com/office/drawing/2014/main" id="{25D0CFDD-F8D9-4498-A666-F31BA473AEDD}"/>
               </a:ext>
             </a:extLst>
           </p:cNvPr>
@@ -20438,7 +20307,7 @@
           <p:cNvPr id="33" name="Ellipse 32">
             <a:extLst>
               <a:ext uri="{FF2B5EF4-FFF2-40B4-BE49-F238E27FC236}">
-                <a16:creationId xmlns:a16="http://schemas.microsoft.com/office/drawing/2014/main" xmlns="" id="{89FCD844-DF7E-40C9-9D11-022F7FE63189}"/>
+                <a16:creationId xmlns:a16="http://schemas.microsoft.com/office/drawing/2014/main" id="{89FCD844-DF7E-40C9-9D11-022F7FE63189}"/>
               </a:ext>
             </a:extLst>
           </p:cNvPr>
@@ -20488,7 +20357,7 @@
           <p:cNvPr id="14" name="Ellipse 13">
             <a:extLst>
               <a:ext uri="{FF2B5EF4-FFF2-40B4-BE49-F238E27FC236}">
-                <a16:creationId xmlns:a16="http://schemas.microsoft.com/office/drawing/2014/main" xmlns="" id="{89FCD844-DF7E-40C9-9D11-022F7FE63189}"/>
+                <a16:creationId xmlns:a16="http://schemas.microsoft.com/office/drawing/2014/main" id="{89FCD844-DF7E-40C9-9D11-022F7FE63189}"/>
               </a:ext>
             </a:extLst>
           </p:cNvPr>
@@ -20538,7 +20407,7 @@
           <p:cNvPr id="13" name="Connecteur droit avec flèche 12">
             <a:extLst>
               <a:ext uri="{FF2B5EF4-FFF2-40B4-BE49-F238E27FC236}">
-                <a16:creationId xmlns:a16="http://schemas.microsoft.com/office/drawing/2014/main" xmlns="" id="{6589CEFF-63AD-48E0-B8C2-2B9C42EE3BA1}"/>
+                <a16:creationId xmlns:a16="http://schemas.microsoft.com/office/drawing/2014/main" id="{6589CEFF-63AD-48E0-B8C2-2B9C42EE3BA1}"/>
               </a:ext>
             </a:extLst>
           </p:cNvPr>
@@ -20577,7 +20446,7 @@
           <p:cNvPr id="16" name="ZoneTexte 15">
             <a:extLst>
               <a:ext uri="{FF2B5EF4-FFF2-40B4-BE49-F238E27FC236}">
-                <a16:creationId xmlns:a16="http://schemas.microsoft.com/office/drawing/2014/main" xmlns="" id="{479D2F68-32D5-4E80-B573-2C6156DCB22F}"/>
+                <a16:creationId xmlns:a16="http://schemas.microsoft.com/office/drawing/2014/main" id="{479D2F68-32D5-4E80-B573-2C6156DCB22F}"/>
               </a:ext>
             </a:extLst>
           </p:cNvPr>
@@ -20613,7 +20482,7 @@
           <p:cNvPr id="19" name="Ellipse 18">
             <a:extLst>
               <a:ext uri="{FF2B5EF4-FFF2-40B4-BE49-F238E27FC236}">
-                <a16:creationId xmlns:a16="http://schemas.microsoft.com/office/drawing/2014/main" xmlns="" id="{89FCD844-DF7E-40C9-9D11-022F7FE63189}"/>
+                <a16:creationId xmlns:a16="http://schemas.microsoft.com/office/drawing/2014/main" id="{89FCD844-DF7E-40C9-9D11-022F7FE63189}"/>
               </a:ext>
             </a:extLst>
           </p:cNvPr>
@@ -20663,7 +20532,7 @@
           <p:cNvPr id="20" name="Connecteur droit avec flèche 19">
             <a:extLst>
               <a:ext uri="{FF2B5EF4-FFF2-40B4-BE49-F238E27FC236}">
-                <a16:creationId xmlns:a16="http://schemas.microsoft.com/office/drawing/2014/main" xmlns="" id="{6589CEFF-63AD-48E0-B8C2-2B9C42EE3BA1}"/>
+                <a16:creationId xmlns:a16="http://schemas.microsoft.com/office/drawing/2014/main" id="{6589CEFF-63AD-48E0-B8C2-2B9C42EE3BA1}"/>
               </a:ext>
             </a:extLst>
           </p:cNvPr>
@@ -20705,7 +20574,7 @@
           <p:cNvPr id="23" name="ZoneTexte 22">
             <a:extLst>
               <a:ext uri="{FF2B5EF4-FFF2-40B4-BE49-F238E27FC236}">
-                <a16:creationId xmlns:a16="http://schemas.microsoft.com/office/drawing/2014/main" xmlns="" id="{479D2F68-32D5-4E80-B573-2C6156DCB22F}"/>
+                <a16:creationId xmlns:a16="http://schemas.microsoft.com/office/drawing/2014/main" id="{479D2F68-32D5-4E80-B573-2C6156DCB22F}"/>
               </a:ext>
             </a:extLst>
           </p:cNvPr>
@@ -20748,7 +20617,7 @@
           <p:cNvPr id="25" name="Ellipse 24">
             <a:extLst>
               <a:ext uri="{FF2B5EF4-FFF2-40B4-BE49-F238E27FC236}">
-                <a16:creationId xmlns:a16="http://schemas.microsoft.com/office/drawing/2014/main" xmlns="" id="{89FCD844-DF7E-40C9-9D11-022F7FE63189}"/>
+                <a16:creationId xmlns:a16="http://schemas.microsoft.com/office/drawing/2014/main" id="{89FCD844-DF7E-40C9-9D11-022F7FE63189}"/>
               </a:ext>
             </a:extLst>
           </p:cNvPr>
@@ -20798,7 +20667,7 @@
           <p:cNvPr id="27" name="Connecteur droit avec flèche 26">
             <a:extLst>
               <a:ext uri="{FF2B5EF4-FFF2-40B4-BE49-F238E27FC236}">
-                <a16:creationId xmlns:a16="http://schemas.microsoft.com/office/drawing/2014/main" xmlns="" id="{6589CEFF-63AD-48E0-B8C2-2B9C42EE3BA1}"/>
+                <a16:creationId xmlns:a16="http://schemas.microsoft.com/office/drawing/2014/main" id="{6589CEFF-63AD-48E0-B8C2-2B9C42EE3BA1}"/>
               </a:ext>
             </a:extLst>
           </p:cNvPr>
@@ -20840,7 +20709,7 @@
           <p:cNvPr id="2" name="Ellipse 1">
             <a:extLst>
               <a:ext uri="{FF2B5EF4-FFF2-40B4-BE49-F238E27FC236}">
-                <a16:creationId xmlns:a16="http://schemas.microsoft.com/office/drawing/2014/main" xmlns="" id="{2D62BF91-374E-4C70-A413-1F361C845F1B}"/>
+                <a16:creationId xmlns:a16="http://schemas.microsoft.com/office/drawing/2014/main" id="{2D62BF91-374E-4C70-A413-1F361C845F1B}"/>
               </a:ext>
             </a:extLst>
           </p:cNvPr>
@@ -20893,7 +20762,7 @@
           <p:cNvPr id="15" name="Connecteur droit avec flèche 14">
             <a:extLst>
               <a:ext uri="{FF2B5EF4-FFF2-40B4-BE49-F238E27FC236}">
-                <a16:creationId xmlns:a16="http://schemas.microsoft.com/office/drawing/2014/main" xmlns="" id="{3F48AD53-7C18-4029-B812-9BAF898CE042}"/>
+                <a16:creationId xmlns:a16="http://schemas.microsoft.com/office/drawing/2014/main" id="{3F48AD53-7C18-4029-B812-9BAF898CE042}"/>
               </a:ext>
             </a:extLst>
           </p:cNvPr>
@@ -20936,7 +20805,7 @@
           <p:cNvPr id="7" name="ZoneTexte 6">
             <a:extLst>
               <a:ext uri="{FF2B5EF4-FFF2-40B4-BE49-F238E27FC236}">
-                <a16:creationId xmlns:a16="http://schemas.microsoft.com/office/drawing/2014/main" xmlns="" id="{77D58596-B6D2-4AB0-9B40-50C29125575C}"/>
+                <a16:creationId xmlns:a16="http://schemas.microsoft.com/office/drawing/2014/main" id="{77D58596-B6D2-4AB0-9B40-50C29125575C}"/>
               </a:ext>
             </a:extLst>
           </p:cNvPr>
@@ -20979,7 +20848,7 @@
           <p:cNvPr id="24" name="Connecteur droit avec flèche 23">
             <a:extLst>
               <a:ext uri="{FF2B5EF4-FFF2-40B4-BE49-F238E27FC236}">
-                <a16:creationId xmlns:a16="http://schemas.microsoft.com/office/drawing/2014/main" xmlns="" id="{CB53B89B-CE62-433B-A8D8-7E52C37474DB}"/>
+                <a16:creationId xmlns:a16="http://schemas.microsoft.com/office/drawing/2014/main" id="{CB53B89B-CE62-433B-A8D8-7E52C37474DB}"/>
               </a:ext>
             </a:extLst>
           </p:cNvPr>
@@ -21021,7 +20890,7 @@
           <p:cNvPr id="26" name="ZoneTexte 25">
             <a:extLst>
               <a:ext uri="{FF2B5EF4-FFF2-40B4-BE49-F238E27FC236}">
-                <a16:creationId xmlns:a16="http://schemas.microsoft.com/office/drawing/2014/main" xmlns="" id="{68FE54F3-E312-45AE-B889-3D59F20B3C07}"/>
+                <a16:creationId xmlns:a16="http://schemas.microsoft.com/office/drawing/2014/main" id="{68FE54F3-E312-45AE-B889-3D59F20B3C07}"/>
               </a:ext>
             </a:extLst>
           </p:cNvPr>
@@ -21094,7 +20963,7 @@
           <p:cNvPr id="5" name="ZoneTexte 4">
             <a:extLst>
               <a:ext uri="{FF2B5EF4-FFF2-40B4-BE49-F238E27FC236}">
-                <a16:creationId xmlns:a16="http://schemas.microsoft.com/office/drawing/2014/main" xmlns="" id="{25D0CFDD-F8D9-4498-A666-F31BA473AEDD}"/>
+                <a16:creationId xmlns:a16="http://schemas.microsoft.com/office/drawing/2014/main" id="{25D0CFDD-F8D9-4498-A666-F31BA473AEDD}"/>
               </a:ext>
             </a:extLst>
           </p:cNvPr>
@@ -21129,7 +20998,7 @@
           <p:cNvPr id="3" name="Ellipse 2">
             <a:extLst>
               <a:ext uri="{FF2B5EF4-FFF2-40B4-BE49-F238E27FC236}">
-                <a16:creationId xmlns:a16="http://schemas.microsoft.com/office/drawing/2014/main" xmlns="" id="{89FCD844-DF7E-40C9-9D11-022F7FE63189}"/>
+                <a16:creationId xmlns:a16="http://schemas.microsoft.com/office/drawing/2014/main" id="{89FCD844-DF7E-40C9-9D11-022F7FE63189}"/>
               </a:ext>
             </a:extLst>
           </p:cNvPr>
@@ -21179,7 +21048,7 @@
           <p:cNvPr id="4" name="Ellipse 3">
             <a:extLst>
               <a:ext uri="{FF2B5EF4-FFF2-40B4-BE49-F238E27FC236}">
-                <a16:creationId xmlns:a16="http://schemas.microsoft.com/office/drawing/2014/main" xmlns="" id="{89FCD844-DF7E-40C9-9D11-022F7FE63189}"/>
+                <a16:creationId xmlns:a16="http://schemas.microsoft.com/office/drawing/2014/main" id="{89FCD844-DF7E-40C9-9D11-022F7FE63189}"/>
               </a:ext>
             </a:extLst>
           </p:cNvPr>
@@ -21229,7 +21098,7 @@
           <p:cNvPr id="7" name="Connecteur droit avec flèche 6">
             <a:extLst>
               <a:ext uri="{FF2B5EF4-FFF2-40B4-BE49-F238E27FC236}">
-                <a16:creationId xmlns:a16="http://schemas.microsoft.com/office/drawing/2014/main" xmlns="" id="{6589CEFF-63AD-48E0-B8C2-2B9C42EE3BA1}"/>
+                <a16:creationId xmlns:a16="http://schemas.microsoft.com/office/drawing/2014/main" id="{6589CEFF-63AD-48E0-B8C2-2B9C42EE3BA1}"/>
               </a:ext>
             </a:extLst>
           </p:cNvPr>
@@ -21270,7 +21139,7 @@
           <p:cNvPr id="8" name="ZoneTexte 7">
             <a:extLst>
               <a:ext uri="{FF2B5EF4-FFF2-40B4-BE49-F238E27FC236}">
-                <a16:creationId xmlns:a16="http://schemas.microsoft.com/office/drawing/2014/main" xmlns="" id="{479D2F68-32D5-4E80-B573-2C6156DCB22F}"/>
+                <a16:creationId xmlns:a16="http://schemas.microsoft.com/office/drawing/2014/main" id="{479D2F68-32D5-4E80-B573-2C6156DCB22F}"/>
               </a:ext>
             </a:extLst>
           </p:cNvPr>
@@ -21305,7 +21174,7 @@
           <p:cNvPr id="9" name="Ellipse 8">
             <a:extLst>
               <a:ext uri="{FF2B5EF4-FFF2-40B4-BE49-F238E27FC236}">
-                <a16:creationId xmlns:a16="http://schemas.microsoft.com/office/drawing/2014/main" xmlns="" id="{A05BD43F-3BA6-4D44-9A89-6240DC624C9A}"/>
+                <a16:creationId xmlns:a16="http://schemas.microsoft.com/office/drawing/2014/main" id="{A05BD43F-3BA6-4D44-9A89-6240DC624C9A}"/>
               </a:ext>
             </a:extLst>
           </p:cNvPr>
@@ -21358,7 +21227,7 @@
           <p:cNvPr id="10" name="Connecteur droit avec flèche 9">
             <a:extLst>
               <a:ext uri="{FF2B5EF4-FFF2-40B4-BE49-F238E27FC236}">
-                <a16:creationId xmlns:a16="http://schemas.microsoft.com/office/drawing/2014/main" xmlns="" id="{6589CEFF-63AD-48E0-B8C2-2B9C42EE3BA1}"/>
+                <a16:creationId xmlns:a16="http://schemas.microsoft.com/office/drawing/2014/main" id="{6589CEFF-63AD-48E0-B8C2-2B9C42EE3BA1}"/>
               </a:ext>
             </a:extLst>
           </p:cNvPr>
@@ -21400,7 +21269,7 @@
           <p:cNvPr id="11" name="ZoneTexte 10">
             <a:extLst>
               <a:ext uri="{FF2B5EF4-FFF2-40B4-BE49-F238E27FC236}">
-                <a16:creationId xmlns:a16="http://schemas.microsoft.com/office/drawing/2014/main" xmlns="" id="{479D2F68-32D5-4E80-B573-2C6156DCB22F}"/>
+                <a16:creationId xmlns:a16="http://schemas.microsoft.com/office/drawing/2014/main" id="{479D2F68-32D5-4E80-B573-2C6156DCB22F}"/>
               </a:ext>
             </a:extLst>
           </p:cNvPr>
@@ -21436,7 +21305,7 @@
           <p:cNvPr id="17" name="Connecteur droit avec flèche 16">
             <a:extLst>
               <a:ext uri="{FF2B5EF4-FFF2-40B4-BE49-F238E27FC236}">
-                <a16:creationId xmlns:a16="http://schemas.microsoft.com/office/drawing/2014/main" xmlns="" id="{6589CEFF-63AD-48E0-B8C2-2B9C42EE3BA1}"/>
+                <a16:creationId xmlns:a16="http://schemas.microsoft.com/office/drawing/2014/main" id="{6589CEFF-63AD-48E0-B8C2-2B9C42EE3BA1}"/>
               </a:ext>
             </a:extLst>
           </p:cNvPr>
@@ -21477,7 +21346,7 @@
           <p:cNvPr id="18" name="ZoneTexte 17">
             <a:extLst>
               <a:ext uri="{FF2B5EF4-FFF2-40B4-BE49-F238E27FC236}">
-                <a16:creationId xmlns:a16="http://schemas.microsoft.com/office/drawing/2014/main" xmlns="" id="{479D2F68-32D5-4E80-B573-2C6156DCB22F}"/>
+                <a16:creationId xmlns:a16="http://schemas.microsoft.com/office/drawing/2014/main" id="{479D2F68-32D5-4E80-B573-2C6156DCB22F}"/>
               </a:ext>
             </a:extLst>
           </p:cNvPr>
@@ -21513,7 +21382,7 @@
           <p:cNvPr id="23" name="Connecteur droit avec flèche 22">
             <a:extLst>
               <a:ext uri="{FF2B5EF4-FFF2-40B4-BE49-F238E27FC236}">
-                <a16:creationId xmlns:a16="http://schemas.microsoft.com/office/drawing/2014/main" xmlns="" id="{6589CEFF-63AD-48E0-B8C2-2B9C42EE3BA1}"/>
+                <a16:creationId xmlns:a16="http://schemas.microsoft.com/office/drawing/2014/main" id="{6589CEFF-63AD-48E0-B8C2-2B9C42EE3BA1}"/>
               </a:ext>
             </a:extLst>
           </p:cNvPr>
@@ -21555,7 +21424,7 @@
           <p:cNvPr id="28" name="ZoneTexte 27">
             <a:extLst>
               <a:ext uri="{FF2B5EF4-FFF2-40B4-BE49-F238E27FC236}">
-                <a16:creationId xmlns:a16="http://schemas.microsoft.com/office/drawing/2014/main" xmlns="" id="{479D2F68-32D5-4E80-B573-2C6156DCB22F}"/>
+                <a16:creationId xmlns:a16="http://schemas.microsoft.com/office/drawing/2014/main" id="{479D2F68-32D5-4E80-B573-2C6156DCB22F}"/>
               </a:ext>
             </a:extLst>
           </p:cNvPr>
@@ -21597,7 +21466,7 @@
           <p:cNvPr id="29" name="Ellipse 28">
             <a:extLst>
               <a:ext uri="{FF2B5EF4-FFF2-40B4-BE49-F238E27FC236}">
-                <a16:creationId xmlns:a16="http://schemas.microsoft.com/office/drawing/2014/main" xmlns="" id="{D18BD9DA-F640-40D8-890E-826C2DD83CAC}"/>
+                <a16:creationId xmlns:a16="http://schemas.microsoft.com/office/drawing/2014/main" id="{D18BD9DA-F640-40D8-890E-826C2DD83CAC}"/>
               </a:ext>
             </a:extLst>
           </p:cNvPr>
@@ -21652,7 +21521,7 @@
           <p:cNvPr id="30" name="Ellipse 29">
             <a:extLst>
               <a:ext uri="{FF2B5EF4-FFF2-40B4-BE49-F238E27FC236}">
-                <a16:creationId xmlns:a16="http://schemas.microsoft.com/office/drawing/2014/main" xmlns="" id="{D18BD9DA-F640-40D8-890E-826C2DD83CAC}"/>
+                <a16:creationId xmlns:a16="http://schemas.microsoft.com/office/drawing/2014/main" id="{D18BD9DA-F640-40D8-890E-826C2DD83CAC}"/>
               </a:ext>
             </a:extLst>
           </p:cNvPr>
@@ -21707,7 +21576,7 @@
           <p:cNvPr id="31" name="Connecteur droit avec flèche 30">
             <a:extLst>
               <a:ext uri="{FF2B5EF4-FFF2-40B4-BE49-F238E27FC236}">
-                <a16:creationId xmlns:a16="http://schemas.microsoft.com/office/drawing/2014/main" xmlns="" id="{6589CEFF-63AD-48E0-B8C2-2B9C42EE3BA1}"/>
+                <a16:creationId xmlns:a16="http://schemas.microsoft.com/office/drawing/2014/main" id="{6589CEFF-63AD-48E0-B8C2-2B9C42EE3BA1}"/>
               </a:ext>
             </a:extLst>
           </p:cNvPr>
@@ -21749,7 +21618,7 @@
           <p:cNvPr id="35" name="Connecteur droit avec flèche 34">
             <a:extLst>
               <a:ext uri="{FF2B5EF4-FFF2-40B4-BE49-F238E27FC236}">
-                <a16:creationId xmlns:a16="http://schemas.microsoft.com/office/drawing/2014/main" xmlns="" id="{6589CEFF-63AD-48E0-B8C2-2B9C42EE3BA1}"/>
+                <a16:creationId xmlns:a16="http://schemas.microsoft.com/office/drawing/2014/main" id="{6589CEFF-63AD-48E0-B8C2-2B9C42EE3BA1}"/>
               </a:ext>
             </a:extLst>
           </p:cNvPr>
@@ -21791,7 +21660,7 @@
           <p:cNvPr id="38" name="ZoneTexte 37">
             <a:extLst>
               <a:ext uri="{FF2B5EF4-FFF2-40B4-BE49-F238E27FC236}">
-                <a16:creationId xmlns:a16="http://schemas.microsoft.com/office/drawing/2014/main" xmlns="" id="{479D2F68-32D5-4E80-B573-2C6156DCB22F}"/>
+                <a16:creationId xmlns:a16="http://schemas.microsoft.com/office/drawing/2014/main" id="{479D2F68-32D5-4E80-B573-2C6156DCB22F}"/>
               </a:ext>
             </a:extLst>
           </p:cNvPr>
@@ -21835,7 +21704,7 @@
           <p:cNvPr id="39" name="Connecteur droit avec flèche 38">
             <a:extLst>
               <a:ext uri="{FF2B5EF4-FFF2-40B4-BE49-F238E27FC236}">
-                <a16:creationId xmlns:a16="http://schemas.microsoft.com/office/drawing/2014/main" xmlns="" id="{6589CEFF-63AD-48E0-B8C2-2B9C42EE3BA1}"/>
+                <a16:creationId xmlns:a16="http://schemas.microsoft.com/office/drawing/2014/main" id="{6589CEFF-63AD-48E0-B8C2-2B9C42EE3BA1}"/>
               </a:ext>
             </a:extLst>
           </p:cNvPr>
@@ -21877,7 +21746,7 @@
           <p:cNvPr id="42" name="Connecteur droit avec flèche 41">
             <a:extLst>
               <a:ext uri="{FF2B5EF4-FFF2-40B4-BE49-F238E27FC236}">
-                <a16:creationId xmlns:a16="http://schemas.microsoft.com/office/drawing/2014/main" xmlns="" id="{6589CEFF-63AD-48E0-B8C2-2B9C42EE3BA1}"/>
+                <a16:creationId xmlns:a16="http://schemas.microsoft.com/office/drawing/2014/main" id="{6589CEFF-63AD-48E0-B8C2-2B9C42EE3BA1}"/>
               </a:ext>
             </a:extLst>
           </p:cNvPr>
@@ -21919,7 +21788,7 @@
           <p:cNvPr id="45" name="ZoneTexte 44">
             <a:extLst>
               <a:ext uri="{FF2B5EF4-FFF2-40B4-BE49-F238E27FC236}">
-                <a16:creationId xmlns:a16="http://schemas.microsoft.com/office/drawing/2014/main" xmlns="" id="{479D2F68-32D5-4E80-B573-2C6156DCB22F}"/>
+                <a16:creationId xmlns:a16="http://schemas.microsoft.com/office/drawing/2014/main" id="{479D2F68-32D5-4E80-B573-2C6156DCB22F}"/>
               </a:ext>
             </a:extLst>
           </p:cNvPr>
@@ -21963,7 +21832,7 @@
           <p:cNvPr id="54" name="Bulle narrative : rectangle à coins arrondis 2">
             <a:extLst>
               <a:ext uri="{FF2B5EF4-FFF2-40B4-BE49-F238E27FC236}">
-                <a16:creationId xmlns:a16="http://schemas.microsoft.com/office/drawing/2014/main" xmlns="" id="{988D0EB4-947A-46B9-A29D-46DAE79C5B8E}"/>
+                <a16:creationId xmlns:a16="http://schemas.microsoft.com/office/drawing/2014/main" id="{988D0EB4-947A-46B9-A29D-46DAE79C5B8E}"/>
               </a:ext>
             </a:extLst>
           </p:cNvPr>
@@ -22046,7 +21915,7 @@
           <p:cNvPr id="5" name="ZoneTexte 4">
             <a:extLst>
               <a:ext uri="{FF2B5EF4-FFF2-40B4-BE49-F238E27FC236}">
-                <a16:creationId xmlns:a16="http://schemas.microsoft.com/office/drawing/2014/main" xmlns="" id="{25D0CFDD-F8D9-4498-A666-F31BA473AEDD}"/>
+                <a16:creationId xmlns:a16="http://schemas.microsoft.com/office/drawing/2014/main" id="{25D0CFDD-F8D9-4498-A666-F31BA473AEDD}"/>
               </a:ext>
             </a:extLst>
           </p:cNvPr>
@@ -22081,7 +21950,7 @@
           <p:cNvPr id="9" name="Ellipse 8">
             <a:extLst>
               <a:ext uri="{FF2B5EF4-FFF2-40B4-BE49-F238E27FC236}">
-                <a16:creationId xmlns:a16="http://schemas.microsoft.com/office/drawing/2014/main" xmlns="" id="{1EA6948B-714F-43F0-9744-118D43364489}"/>
+                <a16:creationId xmlns:a16="http://schemas.microsoft.com/office/drawing/2014/main" id="{1EA6948B-714F-43F0-9744-118D43364489}"/>
               </a:ext>
             </a:extLst>
           </p:cNvPr>
@@ -22131,7 +22000,7 @@
           <p:cNvPr id="10" name="Connecteur droit avec flèche 9">
             <a:extLst>
               <a:ext uri="{FF2B5EF4-FFF2-40B4-BE49-F238E27FC236}">
-                <a16:creationId xmlns:a16="http://schemas.microsoft.com/office/drawing/2014/main" xmlns="" id="{6589CEFF-63AD-48E0-B8C2-2B9C42EE3BA1}"/>
+                <a16:creationId xmlns:a16="http://schemas.microsoft.com/office/drawing/2014/main" id="{6589CEFF-63AD-48E0-B8C2-2B9C42EE3BA1}"/>
               </a:ext>
             </a:extLst>
           </p:cNvPr>
@@ -22170,7 +22039,7 @@
           <p:cNvPr id="11" name="ZoneTexte 10">
             <a:extLst>
               <a:ext uri="{FF2B5EF4-FFF2-40B4-BE49-F238E27FC236}">
-                <a16:creationId xmlns:a16="http://schemas.microsoft.com/office/drawing/2014/main" xmlns="" id="{479D2F68-32D5-4E80-B573-2C6156DCB22F}"/>
+                <a16:creationId xmlns:a16="http://schemas.microsoft.com/office/drawing/2014/main" id="{479D2F68-32D5-4E80-B573-2C6156DCB22F}"/>
               </a:ext>
             </a:extLst>
           </p:cNvPr>
@@ -22229,7 +22098,7 @@
           <p:cNvPr id="12" name="Connecteur droit avec flèche 11">
             <a:extLst>
               <a:ext uri="{FF2B5EF4-FFF2-40B4-BE49-F238E27FC236}">
-                <a16:creationId xmlns:a16="http://schemas.microsoft.com/office/drawing/2014/main" xmlns="" id="{6589CEFF-63AD-48E0-B8C2-2B9C42EE3BA1}"/>
+                <a16:creationId xmlns:a16="http://schemas.microsoft.com/office/drawing/2014/main" id="{6589CEFF-63AD-48E0-B8C2-2B9C42EE3BA1}"/>
               </a:ext>
             </a:extLst>
           </p:cNvPr>
@@ -22270,7 +22139,7 @@
           <p:cNvPr id="15" name="Connecteur droit avec flèche 14">
             <a:extLst>
               <a:ext uri="{FF2B5EF4-FFF2-40B4-BE49-F238E27FC236}">
-                <a16:creationId xmlns:a16="http://schemas.microsoft.com/office/drawing/2014/main" xmlns="" id="{6589CEFF-63AD-48E0-B8C2-2B9C42EE3BA1}"/>
+                <a16:creationId xmlns:a16="http://schemas.microsoft.com/office/drawing/2014/main" id="{6589CEFF-63AD-48E0-B8C2-2B9C42EE3BA1}"/>
               </a:ext>
             </a:extLst>
           </p:cNvPr>
@@ -22311,7 +22180,7 @@
           <p:cNvPr id="20" name="Ellipse 19">
             <a:extLst>
               <a:ext uri="{FF2B5EF4-FFF2-40B4-BE49-F238E27FC236}">
-                <a16:creationId xmlns:a16="http://schemas.microsoft.com/office/drawing/2014/main" xmlns="" id="{89FCD844-DF7E-40C9-9D11-022F7FE63189}"/>
+                <a16:creationId xmlns:a16="http://schemas.microsoft.com/office/drawing/2014/main" id="{89FCD844-DF7E-40C9-9D11-022F7FE63189}"/>
               </a:ext>
             </a:extLst>
           </p:cNvPr>
@@ -22361,7 +22230,7 @@
           <p:cNvPr id="21" name="Ellipse 20">
             <a:extLst>
               <a:ext uri="{FF2B5EF4-FFF2-40B4-BE49-F238E27FC236}">
-                <a16:creationId xmlns:a16="http://schemas.microsoft.com/office/drawing/2014/main" xmlns="" id="{89FCD844-DF7E-40C9-9D11-022F7FE63189}"/>
+                <a16:creationId xmlns:a16="http://schemas.microsoft.com/office/drawing/2014/main" id="{89FCD844-DF7E-40C9-9D11-022F7FE63189}"/>
               </a:ext>
             </a:extLst>
           </p:cNvPr>
@@ -22411,7 +22280,7 @@
           <p:cNvPr id="22" name="Ellipse 21">
             <a:extLst>
               <a:ext uri="{FF2B5EF4-FFF2-40B4-BE49-F238E27FC236}">
-                <a16:creationId xmlns:a16="http://schemas.microsoft.com/office/drawing/2014/main" xmlns="" id="{A05BD43F-3BA6-4D44-9A89-6240DC624C9A}"/>
+                <a16:creationId xmlns:a16="http://schemas.microsoft.com/office/drawing/2014/main" id="{A05BD43F-3BA6-4D44-9A89-6240DC624C9A}"/>
               </a:ext>
             </a:extLst>
           </p:cNvPr>
@@ -22464,7 +22333,7 @@
           <p:cNvPr id="23" name="Connecteur droit avec flèche 22">
             <a:extLst>
               <a:ext uri="{FF2B5EF4-FFF2-40B4-BE49-F238E27FC236}">
-                <a16:creationId xmlns:a16="http://schemas.microsoft.com/office/drawing/2014/main" xmlns="" id="{6589CEFF-63AD-48E0-B8C2-2B9C42EE3BA1}"/>
+                <a16:creationId xmlns:a16="http://schemas.microsoft.com/office/drawing/2014/main" id="{6589CEFF-63AD-48E0-B8C2-2B9C42EE3BA1}"/>
               </a:ext>
             </a:extLst>
           </p:cNvPr>
@@ -22506,7 +22375,7 @@
           <p:cNvPr id="24" name="ZoneTexte 23">
             <a:extLst>
               <a:ext uri="{FF2B5EF4-FFF2-40B4-BE49-F238E27FC236}">
-                <a16:creationId xmlns:a16="http://schemas.microsoft.com/office/drawing/2014/main" xmlns="" id="{479D2F68-32D5-4E80-B573-2C6156DCB22F}"/>
+                <a16:creationId xmlns:a16="http://schemas.microsoft.com/office/drawing/2014/main" id="{479D2F68-32D5-4E80-B573-2C6156DCB22F}"/>
               </a:ext>
             </a:extLst>
           </p:cNvPr>
@@ -22542,7 +22411,7 @@
           <p:cNvPr id="25" name="Connecteur droit avec flèche 24">
             <a:extLst>
               <a:ext uri="{FF2B5EF4-FFF2-40B4-BE49-F238E27FC236}">
-                <a16:creationId xmlns:a16="http://schemas.microsoft.com/office/drawing/2014/main" xmlns="" id="{6589CEFF-63AD-48E0-B8C2-2B9C42EE3BA1}"/>
+                <a16:creationId xmlns:a16="http://schemas.microsoft.com/office/drawing/2014/main" id="{6589CEFF-63AD-48E0-B8C2-2B9C42EE3BA1}"/>
               </a:ext>
             </a:extLst>
           </p:cNvPr>
@@ -22583,7 +22452,7 @@
           <p:cNvPr id="26" name="ZoneTexte 25">
             <a:extLst>
               <a:ext uri="{FF2B5EF4-FFF2-40B4-BE49-F238E27FC236}">
-                <a16:creationId xmlns:a16="http://schemas.microsoft.com/office/drawing/2014/main" xmlns="" id="{479D2F68-32D5-4E80-B573-2C6156DCB22F}"/>
+                <a16:creationId xmlns:a16="http://schemas.microsoft.com/office/drawing/2014/main" id="{479D2F68-32D5-4E80-B573-2C6156DCB22F}"/>
               </a:ext>
             </a:extLst>
           </p:cNvPr>
@@ -22619,7 +22488,7 @@
           <p:cNvPr id="27" name="Connecteur droit avec flèche 26">
             <a:extLst>
               <a:ext uri="{FF2B5EF4-FFF2-40B4-BE49-F238E27FC236}">
-                <a16:creationId xmlns:a16="http://schemas.microsoft.com/office/drawing/2014/main" xmlns="" id="{6589CEFF-63AD-48E0-B8C2-2B9C42EE3BA1}"/>
+                <a16:creationId xmlns:a16="http://schemas.microsoft.com/office/drawing/2014/main" id="{6589CEFF-63AD-48E0-B8C2-2B9C42EE3BA1}"/>
               </a:ext>
             </a:extLst>
           </p:cNvPr>
@@ -22661,7 +22530,7 @@
           <p:cNvPr id="28" name="ZoneTexte 27">
             <a:extLst>
               <a:ext uri="{FF2B5EF4-FFF2-40B4-BE49-F238E27FC236}">
-                <a16:creationId xmlns:a16="http://schemas.microsoft.com/office/drawing/2014/main" xmlns="" id="{479D2F68-32D5-4E80-B573-2C6156DCB22F}"/>
+                <a16:creationId xmlns:a16="http://schemas.microsoft.com/office/drawing/2014/main" id="{479D2F68-32D5-4E80-B573-2C6156DCB22F}"/>
               </a:ext>
             </a:extLst>
           </p:cNvPr>
@@ -22703,7 +22572,7 @@
           <p:cNvPr id="29" name="Ellipse 28">
             <a:extLst>
               <a:ext uri="{FF2B5EF4-FFF2-40B4-BE49-F238E27FC236}">
-                <a16:creationId xmlns:a16="http://schemas.microsoft.com/office/drawing/2014/main" xmlns="" id="{D18BD9DA-F640-40D8-890E-826C2DD83CAC}"/>
+                <a16:creationId xmlns:a16="http://schemas.microsoft.com/office/drawing/2014/main" id="{D18BD9DA-F640-40D8-890E-826C2DD83CAC}"/>
               </a:ext>
             </a:extLst>
           </p:cNvPr>
@@ -22758,7 +22627,7 @@
           <p:cNvPr id="30" name="Ellipse 29">
             <a:extLst>
               <a:ext uri="{FF2B5EF4-FFF2-40B4-BE49-F238E27FC236}">
-                <a16:creationId xmlns:a16="http://schemas.microsoft.com/office/drawing/2014/main" xmlns="" id="{D18BD9DA-F640-40D8-890E-826C2DD83CAC}"/>
+                <a16:creationId xmlns:a16="http://schemas.microsoft.com/office/drawing/2014/main" id="{D18BD9DA-F640-40D8-890E-826C2DD83CAC}"/>
               </a:ext>
             </a:extLst>
           </p:cNvPr>
@@ -22813,7 +22682,7 @@
           <p:cNvPr id="31" name="Connecteur droit avec flèche 30">
             <a:extLst>
               <a:ext uri="{FF2B5EF4-FFF2-40B4-BE49-F238E27FC236}">
-                <a16:creationId xmlns:a16="http://schemas.microsoft.com/office/drawing/2014/main" xmlns="" id="{6589CEFF-63AD-48E0-B8C2-2B9C42EE3BA1}"/>
+                <a16:creationId xmlns:a16="http://schemas.microsoft.com/office/drawing/2014/main" id="{6589CEFF-63AD-48E0-B8C2-2B9C42EE3BA1}"/>
               </a:ext>
             </a:extLst>
           </p:cNvPr>
@@ -22855,7 +22724,7 @@
           <p:cNvPr id="32" name="Connecteur droit avec flèche 31">
             <a:extLst>
               <a:ext uri="{FF2B5EF4-FFF2-40B4-BE49-F238E27FC236}">
-                <a16:creationId xmlns:a16="http://schemas.microsoft.com/office/drawing/2014/main" xmlns="" id="{6589CEFF-63AD-48E0-B8C2-2B9C42EE3BA1}"/>
+                <a16:creationId xmlns:a16="http://schemas.microsoft.com/office/drawing/2014/main" id="{6589CEFF-63AD-48E0-B8C2-2B9C42EE3BA1}"/>
               </a:ext>
             </a:extLst>
           </p:cNvPr>
@@ -22897,7 +22766,7 @@
           <p:cNvPr id="33" name="ZoneTexte 32">
             <a:extLst>
               <a:ext uri="{FF2B5EF4-FFF2-40B4-BE49-F238E27FC236}">
-                <a16:creationId xmlns:a16="http://schemas.microsoft.com/office/drawing/2014/main" xmlns="" id="{479D2F68-32D5-4E80-B573-2C6156DCB22F}"/>
+                <a16:creationId xmlns:a16="http://schemas.microsoft.com/office/drawing/2014/main" id="{479D2F68-32D5-4E80-B573-2C6156DCB22F}"/>
               </a:ext>
             </a:extLst>
           </p:cNvPr>
@@ -22941,7 +22810,7 @@
           <p:cNvPr id="34" name="Connecteur droit avec flèche 33">
             <a:extLst>
               <a:ext uri="{FF2B5EF4-FFF2-40B4-BE49-F238E27FC236}">
-                <a16:creationId xmlns:a16="http://schemas.microsoft.com/office/drawing/2014/main" xmlns="" id="{6589CEFF-63AD-48E0-B8C2-2B9C42EE3BA1}"/>
+                <a16:creationId xmlns:a16="http://schemas.microsoft.com/office/drawing/2014/main" id="{6589CEFF-63AD-48E0-B8C2-2B9C42EE3BA1}"/>
               </a:ext>
             </a:extLst>
           </p:cNvPr>
@@ -22983,7 +22852,7 @@
           <p:cNvPr id="35" name="Connecteur droit avec flèche 34">
             <a:extLst>
               <a:ext uri="{FF2B5EF4-FFF2-40B4-BE49-F238E27FC236}">
-                <a16:creationId xmlns:a16="http://schemas.microsoft.com/office/drawing/2014/main" xmlns="" id="{6589CEFF-63AD-48E0-B8C2-2B9C42EE3BA1}"/>
+                <a16:creationId xmlns:a16="http://schemas.microsoft.com/office/drawing/2014/main" id="{6589CEFF-63AD-48E0-B8C2-2B9C42EE3BA1}"/>
               </a:ext>
             </a:extLst>
           </p:cNvPr>
@@ -23025,7 +22894,7 @@
           <p:cNvPr id="36" name="ZoneTexte 35">
             <a:extLst>
               <a:ext uri="{FF2B5EF4-FFF2-40B4-BE49-F238E27FC236}">
-                <a16:creationId xmlns:a16="http://schemas.microsoft.com/office/drawing/2014/main" xmlns="" id="{479D2F68-32D5-4E80-B573-2C6156DCB22F}"/>
+                <a16:creationId xmlns:a16="http://schemas.microsoft.com/office/drawing/2014/main" id="{479D2F68-32D5-4E80-B573-2C6156DCB22F}"/>
               </a:ext>
             </a:extLst>
           </p:cNvPr>
@@ -23099,7 +22968,7 @@
           <p:cNvPr id="5" name="ZoneTexte 4">
             <a:extLst>
               <a:ext uri="{FF2B5EF4-FFF2-40B4-BE49-F238E27FC236}">
-                <a16:creationId xmlns:a16="http://schemas.microsoft.com/office/drawing/2014/main" xmlns="" id="{25D0CFDD-F8D9-4498-A666-F31BA473AEDD}"/>
+                <a16:creationId xmlns:a16="http://schemas.microsoft.com/office/drawing/2014/main" id="{25D0CFDD-F8D9-4498-A666-F31BA473AEDD}"/>
               </a:ext>
             </a:extLst>
           </p:cNvPr>
@@ -23134,7 +23003,7 @@
           <p:cNvPr id="9" name="Ellipse 8">
             <a:extLst>
               <a:ext uri="{FF2B5EF4-FFF2-40B4-BE49-F238E27FC236}">
-                <a16:creationId xmlns:a16="http://schemas.microsoft.com/office/drawing/2014/main" xmlns="" id="{89FCD844-DF7E-40C9-9D11-022F7FE63189}"/>
+                <a16:creationId xmlns:a16="http://schemas.microsoft.com/office/drawing/2014/main" id="{89FCD844-DF7E-40C9-9D11-022F7FE63189}"/>
               </a:ext>
             </a:extLst>
           </p:cNvPr>
@@ -23184,7 +23053,7 @@
           <p:cNvPr id="10" name="Ellipse 9">
             <a:extLst>
               <a:ext uri="{FF2B5EF4-FFF2-40B4-BE49-F238E27FC236}">
-                <a16:creationId xmlns:a16="http://schemas.microsoft.com/office/drawing/2014/main" xmlns="" id="{89FCD844-DF7E-40C9-9D11-022F7FE63189}"/>
+                <a16:creationId xmlns:a16="http://schemas.microsoft.com/office/drawing/2014/main" id="{89FCD844-DF7E-40C9-9D11-022F7FE63189}"/>
               </a:ext>
             </a:extLst>
           </p:cNvPr>
@@ -23234,7 +23103,7 @@
           <p:cNvPr id="11" name="Connecteur droit avec flèche 10">
             <a:extLst>
               <a:ext uri="{FF2B5EF4-FFF2-40B4-BE49-F238E27FC236}">
-                <a16:creationId xmlns:a16="http://schemas.microsoft.com/office/drawing/2014/main" xmlns="" id="{6589CEFF-63AD-48E0-B8C2-2B9C42EE3BA1}"/>
+                <a16:creationId xmlns:a16="http://schemas.microsoft.com/office/drawing/2014/main" id="{6589CEFF-63AD-48E0-B8C2-2B9C42EE3BA1}"/>
               </a:ext>
             </a:extLst>
           </p:cNvPr>
@@ -23275,7 +23144,7 @@
           <p:cNvPr id="12" name="ZoneTexte 11">
             <a:extLst>
               <a:ext uri="{FF2B5EF4-FFF2-40B4-BE49-F238E27FC236}">
-                <a16:creationId xmlns:a16="http://schemas.microsoft.com/office/drawing/2014/main" xmlns="" id="{479D2F68-32D5-4E80-B573-2C6156DCB22F}"/>
+                <a16:creationId xmlns:a16="http://schemas.microsoft.com/office/drawing/2014/main" id="{479D2F68-32D5-4E80-B573-2C6156DCB22F}"/>
               </a:ext>
             </a:extLst>
           </p:cNvPr>
@@ -23328,7 +23197,7 @@
           <p:cNvPr id="13" name="Ellipse 12">
             <a:extLst>
               <a:ext uri="{FF2B5EF4-FFF2-40B4-BE49-F238E27FC236}">
-                <a16:creationId xmlns:a16="http://schemas.microsoft.com/office/drawing/2014/main" xmlns="" id="{A05BD43F-3BA6-4D44-9A89-6240DC624C9A}"/>
+                <a16:creationId xmlns:a16="http://schemas.microsoft.com/office/drawing/2014/main" id="{A05BD43F-3BA6-4D44-9A89-6240DC624C9A}"/>
               </a:ext>
             </a:extLst>
           </p:cNvPr>
@@ -23381,7 +23250,7 @@
           <p:cNvPr id="14" name="Connecteur droit avec flèche 13">
             <a:extLst>
               <a:ext uri="{FF2B5EF4-FFF2-40B4-BE49-F238E27FC236}">
-                <a16:creationId xmlns:a16="http://schemas.microsoft.com/office/drawing/2014/main" xmlns="" id="{6589CEFF-63AD-48E0-B8C2-2B9C42EE3BA1}"/>
+                <a16:creationId xmlns:a16="http://schemas.microsoft.com/office/drawing/2014/main" id="{6589CEFF-63AD-48E0-B8C2-2B9C42EE3BA1}"/>
               </a:ext>
             </a:extLst>
           </p:cNvPr>
@@ -23423,7 +23292,7 @@
           <p:cNvPr id="15" name="ZoneTexte 14">
             <a:extLst>
               <a:ext uri="{FF2B5EF4-FFF2-40B4-BE49-F238E27FC236}">
-                <a16:creationId xmlns:a16="http://schemas.microsoft.com/office/drawing/2014/main" xmlns="" id="{479D2F68-32D5-4E80-B573-2C6156DCB22F}"/>
+                <a16:creationId xmlns:a16="http://schemas.microsoft.com/office/drawing/2014/main" id="{479D2F68-32D5-4E80-B573-2C6156DCB22F}"/>
               </a:ext>
             </a:extLst>
           </p:cNvPr>
@@ -23459,7 +23328,7 @@
           <p:cNvPr id="16" name="Connecteur droit avec flèche 15">
             <a:extLst>
               <a:ext uri="{FF2B5EF4-FFF2-40B4-BE49-F238E27FC236}">
-                <a16:creationId xmlns:a16="http://schemas.microsoft.com/office/drawing/2014/main" xmlns="" id="{6589CEFF-63AD-48E0-B8C2-2B9C42EE3BA1}"/>
+                <a16:creationId xmlns:a16="http://schemas.microsoft.com/office/drawing/2014/main" id="{6589CEFF-63AD-48E0-B8C2-2B9C42EE3BA1}"/>
               </a:ext>
             </a:extLst>
           </p:cNvPr>
@@ -23500,7 +23369,7 @@
           <p:cNvPr id="17" name="ZoneTexte 16">
             <a:extLst>
               <a:ext uri="{FF2B5EF4-FFF2-40B4-BE49-F238E27FC236}">
-                <a16:creationId xmlns:a16="http://schemas.microsoft.com/office/drawing/2014/main" xmlns="" id="{479D2F68-32D5-4E80-B573-2C6156DCB22F}"/>
+                <a16:creationId xmlns:a16="http://schemas.microsoft.com/office/drawing/2014/main" id="{479D2F68-32D5-4E80-B573-2C6156DCB22F}"/>
               </a:ext>
             </a:extLst>
           </p:cNvPr>
@@ -23542,7 +23411,7 @@
           <p:cNvPr id="18" name="Connecteur droit avec flèche 17">
             <a:extLst>
               <a:ext uri="{FF2B5EF4-FFF2-40B4-BE49-F238E27FC236}">
-                <a16:creationId xmlns:a16="http://schemas.microsoft.com/office/drawing/2014/main" xmlns="" id="{6589CEFF-63AD-48E0-B8C2-2B9C42EE3BA1}"/>
+                <a16:creationId xmlns:a16="http://schemas.microsoft.com/office/drawing/2014/main" id="{6589CEFF-63AD-48E0-B8C2-2B9C42EE3BA1}"/>
               </a:ext>
             </a:extLst>
           </p:cNvPr>
@@ -23584,7 +23453,7 @@
           <p:cNvPr id="19" name="ZoneTexte 18">
             <a:extLst>
               <a:ext uri="{FF2B5EF4-FFF2-40B4-BE49-F238E27FC236}">
-                <a16:creationId xmlns:a16="http://schemas.microsoft.com/office/drawing/2014/main" xmlns="" id="{479D2F68-32D5-4E80-B573-2C6156DCB22F}"/>
+                <a16:creationId xmlns:a16="http://schemas.microsoft.com/office/drawing/2014/main" id="{479D2F68-32D5-4E80-B573-2C6156DCB22F}"/>
               </a:ext>
             </a:extLst>
           </p:cNvPr>
@@ -23626,7 +23495,7 @@
           <p:cNvPr id="20" name="Ellipse 19">
             <a:extLst>
               <a:ext uri="{FF2B5EF4-FFF2-40B4-BE49-F238E27FC236}">
-                <a16:creationId xmlns:a16="http://schemas.microsoft.com/office/drawing/2014/main" xmlns="" id="{D18BD9DA-F640-40D8-890E-826C2DD83CAC}"/>
+                <a16:creationId xmlns:a16="http://schemas.microsoft.com/office/drawing/2014/main" id="{D18BD9DA-F640-40D8-890E-826C2DD83CAC}"/>
               </a:ext>
             </a:extLst>
           </p:cNvPr>
@@ -23681,7 +23550,7 @@
           <p:cNvPr id="21" name="Ellipse 20">
             <a:extLst>
               <a:ext uri="{FF2B5EF4-FFF2-40B4-BE49-F238E27FC236}">
-                <a16:creationId xmlns:a16="http://schemas.microsoft.com/office/drawing/2014/main" xmlns="" id="{D18BD9DA-F640-40D8-890E-826C2DD83CAC}"/>
+                <a16:creationId xmlns:a16="http://schemas.microsoft.com/office/drawing/2014/main" id="{D18BD9DA-F640-40D8-890E-826C2DD83CAC}"/>
               </a:ext>
             </a:extLst>
           </p:cNvPr>
@@ -23736,7 +23605,7 @@
           <p:cNvPr id="22" name="Connecteur droit avec flèche 21">
             <a:extLst>
               <a:ext uri="{FF2B5EF4-FFF2-40B4-BE49-F238E27FC236}">
-                <a16:creationId xmlns:a16="http://schemas.microsoft.com/office/drawing/2014/main" xmlns="" id="{6589CEFF-63AD-48E0-B8C2-2B9C42EE3BA1}"/>
+                <a16:creationId xmlns:a16="http://schemas.microsoft.com/office/drawing/2014/main" id="{6589CEFF-63AD-48E0-B8C2-2B9C42EE3BA1}"/>
               </a:ext>
             </a:extLst>
           </p:cNvPr>
@@ -23778,7 +23647,7 @@
           <p:cNvPr id="23" name="Connecteur droit avec flèche 22">
             <a:extLst>
               <a:ext uri="{FF2B5EF4-FFF2-40B4-BE49-F238E27FC236}">
-                <a16:creationId xmlns:a16="http://schemas.microsoft.com/office/drawing/2014/main" xmlns="" id="{6589CEFF-63AD-48E0-B8C2-2B9C42EE3BA1}"/>
+                <a16:creationId xmlns:a16="http://schemas.microsoft.com/office/drawing/2014/main" id="{6589CEFF-63AD-48E0-B8C2-2B9C42EE3BA1}"/>
               </a:ext>
             </a:extLst>
           </p:cNvPr>
@@ -23820,7 +23689,7 @@
           <p:cNvPr id="24" name="ZoneTexte 23">
             <a:extLst>
               <a:ext uri="{FF2B5EF4-FFF2-40B4-BE49-F238E27FC236}">
-                <a16:creationId xmlns:a16="http://schemas.microsoft.com/office/drawing/2014/main" xmlns="" id="{479D2F68-32D5-4E80-B573-2C6156DCB22F}"/>
+                <a16:creationId xmlns:a16="http://schemas.microsoft.com/office/drawing/2014/main" id="{479D2F68-32D5-4E80-B573-2C6156DCB22F}"/>
               </a:ext>
             </a:extLst>
           </p:cNvPr>
@@ -23864,7 +23733,7 @@
           <p:cNvPr id="25" name="Connecteur droit avec flèche 24">
             <a:extLst>
               <a:ext uri="{FF2B5EF4-FFF2-40B4-BE49-F238E27FC236}">
-                <a16:creationId xmlns:a16="http://schemas.microsoft.com/office/drawing/2014/main" xmlns="" id="{6589CEFF-63AD-48E0-B8C2-2B9C42EE3BA1}"/>
+                <a16:creationId xmlns:a16="http://schemas.microsoft.com/office/drawing/2014/main" id="{6589CEFF-63AD-48E0-B8C2-2B9C42EE3BA1}"/>
               </a:ext>
             </a:extLst>
           </p:cNvPr>
@@ -23906,7 +23775,7 @@
           <p:cNvPr id="26" name="Connecteur droit avec flèche 25">
             <a:extLst>
               <a:ext uri="{FF2B5EF4-FFF2-40B4-BE49-F238E27FC236}">
-                <a16:creationId xmlns:a16="http://schemas.microsoft.com/office/drawing/2014/main" xmlns="" id="{6589CEFF-63AD-48E0-B8C2-2B9C42EE3BA1}"/>
+                <a16:creationId xmlns:a16="http://schemas.microsoft.com/office/drawing/2014/main" id="{6589CEFF-63AD-48E0-B8C2-2B9C42EE3BA1}"/>
               </a:ext>
             </a:extLst>
           </p:cNvPr>
@@ -23948,7 +23817,7 @@
           <p:cNvPr id="27" name="ZoneTexte 26">
             <a:extLst>
               <a:ext uri="{FF2B5EF4-FFF2-40B4-BE49-F238E27FC236}">
-                <a16:creationId xmlns:a16="http://schemas.microsoft.com/office/drawing/2014/main" xmlns="" id="{479D2F68-32D5-4E80-B573-2C6156DCB22F}"/>
+                <a16:creationId xmlns:a16="http://schemas.microsoft.com/office/drawing/2014/main" id="{479D2F68-32D5-4E80-B573-2C6156DCB22F}"/>
               </a:ext>
             </a:extLst>
           </p:cNvPr>
@@ -23992,7 +23861,7 @@
           <p:cNvPr id="28" name="Bulle narrative : rectangle à coins arrondis 2">
             <a:extLst>
               <a:ext uri="{FF2B5EF4-FFF2-40B4-BE49-F238E27FC236}">
-                <a16:creationId xmlns:a16="http://schemas.microsoft.com/office/drawing/2014/main" xmlns="" id="{988D0EB4-947A-46B9-A29D-46DAE79C5B8E}"/>
+                <a16:creationId xmlns:a16="http://schemas.microsoft.com/office/drawing/2014/main" id="{988D0EB4-947A-46B9-A29D-46DAE79C5B8E}"/>
               </a:ext>
             </a:extLst>
           </p:cNvPr>
@@ -24045,7 +23914,7 @@
           <p:cNvPr id="30" name="Ellipse 29">
             <a:extLst>
               <a:ext uri="{FF2B5EF4-FFF2-40B4-BE49-F238E27FC236}">
-                <a16:creationId xmlns:a16="http://schemas.microsoft.com/office/drawing/2014/main" xmlns="" id="{89FCD844-DF7E-40C9-9D11-022F7FE63189}"/>
+                <a16:creationId xmlns:a16="http://schemas.microsoft.com/office/drawing/2014/main" id="{89FCD844-DF7E-40C9-9D11-022F7FE63189}"/>
               </a:ext>
             </a:extLst>
           </p:cNvPr>
@@ -24095,7 +23964,7 @@
           <p:cNvPr id="31" name="Connecteur droit avec flèche 30">
             <a:extLst>
               <a:ext uri="{FF2B5EF4-FFF2-40B4-BE49-F238E27FC236}">
-                <a16:creationId xmlns:a16="http://schemas.microsoft.com/office/drawing/2014/main" xmlns="" id="{6589CEFF-63AD-48E0-B8C2-2B9C42EE3BA1}"/>
+                <a16:creationId xmlns:a16="http://schemas.microsoft.com/office/drawing/2014/main" id="{6589CEFF-63AD-48E0-B8C2-2B9C42EE3BA1}"/>
               </a:ext>
             </a:extLst>
           </p:cNvPr>
@@ -24137,7 +24006,7 @@
           <p:cNvPr id="34" name="ZoneTexte 33">
             <a:extLst>
               <a:ext uri="{FF2B5EF4-FFF2-40B4-BE49-F238E27FC236}">
-                <a16:creationId xmlns:a16="http://schemas.microsoft.com/office/drawing/2014/main" xmlns="" id="{25D0CFDD-F8D9-4498-A666-F31BA473AEDD}"/>
+                <a16:creationId xmlns:a16="http://schemas.microsoft.com/office/drawing/2014/main" id="{25D0CFDD-F8D9-4498-A666-F31BA473AEDD}"/>
               </a:ext>
             </a:extLst>
           </p:cNvPr>
@@ -24261,7 +24130,7 @@
           <p:cNvPr id="5" name="ZoneTexte 4">
             <a:extLst>
               <a:ext uri="{FF2B5EF4-FFF2-40B4-BE49-F238E27FC236}">
-                <a16:creationId xmlns:a16="http://schemas.microsoft.com/office/drawing/2014/main" xmlns="" id="{25D0CFDD-F8D9-4498-A666-F31BA473AEDD}"/>
+                <a16:creationId xmlns:a16="http://schemas.microsoft.com/office/drawing/2014/main" id="{25D0CFDD-F8D9-4498-A666-F31BA473AEDD}"/>
               </a:ext>
             </a:extLst>
           </p:cNvPr>
@@ -24296,7 +24165,7 @@
           <p:cNvPr id="24" name="Ellipse 23">
             <a:extLst>
               <a:ext uri="{FF2B5EF4-FFF2-40B4-BE49-F238E27FC236}">
-                <a16:creationId xmlns:a16="http://schemas.microsoft.com/office/drawing/2014/main" xmlns="" id="{89FCD844-DF7E-40C9-9D11-022F7FE63189}"/>
+                <a16:creationId xmlns:a16="http://schemas.microsoft.com/office/drawing/2014/main" id="{89FCD844-DF7E-40C9-9D11-022F7FE63189}"/>
               </a:ext>
             </a:extLst>
           </p:cNvPr>
@@ -24381,7 +24250,7 @@
           <p:cNvPr id="32" name="ZoneTexte 31">
             <a:extLst>
               <a:ext uri="{FF2B5EF4-FFF2-40B4-BE49-F238E27FC236}">
-                <a16:creationId xmlns:a16="http://schemas.microsoft.com/office/drawing/2014/main" xmlns="" id="{479D2F68-32D5-4E80-B573-2C6156DCB22F}"/>
+                <a16:creationId xmlns:a16="http://schemas.microsoft.com/office/drawing/2014/main" id="{479D2F68-32D5-4E80-B573-2C6156DCB22F}"/>
               </a:ext>
             </a:extLst>
           </p:cNvPr>
@@ -24422,7 +24291,7 @@
           <p:cNvPr id="33" name="Ellipse 32">
             <a:extLst>
               <a:ext uri="{FF2B5EF4-FFF2-40B4-BE49-F238E27FC236}">
-                <a16:creationId xmlns:a16="http://schemas.microsoft.com/office/drawing/2014/main" xmlns="" id="{89FCD844-DF7E-40C9-9D11-022F7FE63189}"/>
+                <a16:creationId xmlns:a16="http://schemas.microsoft.com/office/drawing/2014/main" id="{89FCD844-DF7E-40C9-9D11-022F7FE63189}"/>
               </a:ext>
             </a:extLst>
           </p:cNvPr>
@@ -24472,7 +24341,7 @@
           <p:cNvPr id="34" name="Connecteur droit avec flèche 33">
             <a:extLst>
               <a:ext uri="{FF2B5EF4-FFF2-40B4-BE49-F238E27FC236}">
-                <a16:creationId xmlns:a16="http://schemas.microsoft.com/office/drawing/2014/main" xmlns="" id="{6589CEFF-63AD-48E0-B8C2-2B9C42EE3BA1}"/>
+                <a16:creationId xmlns:a16="http://schemas.microsoft.com/office/drawing/2014/main" id="{6589CEFF-63AD-48E0-B8C2-2B9C42EE3BA1}"/>
               </a:ext>
             </a:extLst>
           </p:cNvPr>
@@ -24514,7 +24383,7 @@
           <p:cNvPr id="36" name="ZoneTexte 35">
             <a:extLst>
               <a:ext uri="{FF2B5EF4-FFF2-40B4-BE49-F238E27FC236}">
-                <a16:creationId xmlns:a16="http://schemas.microsoft.com/office/drawing/2014/main" xmlns="" id="{479D2F68-32D5-4E80-B573-2C6156DCB22F}"/>
+                <a16:creationId xmlns:a16="http://schemas.microsoft.com/office/drawing/2014/main" id="{479D2F68-32D5-4E80-B573-2C6156DCB22F}"/>
               </a:ext>
             </a:extLst>
           </p:cNvPr>
@@ -24550,7 +24419,7 @@
           <p:cNvPr id="37" name="Ellipse 36">
             <a:extLst>
               <a:ext uri="{FF2B5EF4-FFF2-40B4-BE49-F238E27FC236}">
-                <a16:creationId xmlns:a16="http://schemas.microsoft.com/office/drawing/2014/main" xmlns="" id="{D18BD9DA-F640-40D8-890E-826C2DD83CAC}"/>
+                <a16:creationId xmlns:a16="http://schemas.microsoft.com/office/drawing/2014/main" id="{D18BD9DA-F640-40D8-890E-826C2DD83CAC}"/>
               </a:ext>
             </a:extLst>
           </p:cNvPr>
@@ -24641,7 +24510,7 @@
           <p:cNvPr id="41" name="ZoneTexte 40">
             <a:extLst>
               <a:ext uri="{FF2B5EF4-FFF2-40B4-BE49-F238E27FC236}">
-                <a16:creationId xmlns:a16="http://schemas.microsoft.com/office/drawing/2014/main" xmlns="" id="{479D2F68-32D5-4E80-B573-2C6156DCB22F}"/>
+                <a16:creationId xmlns:a16="http://schemas.microsoft.com/office/drawing/2014/main" id="{479D2F68-32D5-4E80-B573-2C6156DCB22F}"/>
               </a:ext>
             </a:extLst>
           </p:cNvPr>
@@ -24707,7 +24576,7 @@
           <p:cNvPr id="5" name="ZoneTexte 4">
             <a:extLst>
               <a:ext uri="{FF2B5EF4-FFF2-40B4-BE49-F238E27FC236}">
-                <a16:creationId xmlns:a16="http://schemas.microsoft.com/office/drawing/2014/main" xmlns="" id="{25D0CFDD-F8D9-4498-A666-F31BA473AEDD}"/>
+                <a16:creationId xmlns:a16="http://schemas.microsoft.com/office/drawing/2014/main" id="{25D0CFDD-F8D9-4498-A666-F31BA473AEDD}"/>
               </a:ext>
             </a:extLst>
           </p:cNvPr>
@@ -24742,7 +24611,7 @@
           <p:cNvPr id="3" name="Ellipse 2">
             <a:extLst>
               <a:ext uri="{FF2B5EF4-FFF2-40B4-BE49-F238E27FC236}">
-                <a16:creationId xmlns:a16="http://schemas.microsoft.com/office/drawing/2014/main" xmlns="" id="{89FCD844-DF7E-40C9-9D11-022F7FE63189}"/>
+                <a16:creationId xmlns:a16="http://schemas.microsoft.com/office/drawing/2014/main" id="{89FCD844-DF7E-40C9-9D11-022F7FE63189}"/>
               </a:ext>
             </a:extLst>
           </p:cNvPr>
@@ -24827,7 +24696,7 @@
           <p:cNvPr id="6" name="ZoneTexte 5">
             <a:extLst>
               <a:ext uri="{FF2B5EF4-FFF2-40B4-BE49-F238E27FC236}">
-                <a16:creationId xmlns:a16="http://schemas.microsoft.com/office/drawing/2014/main" xmlns="" id="{479D2F68-32D5-4E80-B573-2C6156DCB22F}"/>
+                <a16:creationId xmlns:a16="http://schemas.microsoft.com/office/drawing/2014/main" id="{479D2F68-32D5-4E80-B573-2C6156DCB22F}"/>
               </a:ext>
             </a:extLst>
           </p:cNvPr>
@@ -24868,7 +24737,7 @@
           <p:cNvPr id="7" name="Ellipse 6">
             <a:extLst>
               <a:ext uri="{FF2B5EF4-FFF2-40B4-BE49-F238E27FC236}">
-                <a16:creationId xmlns:a16="http://schemas.microsoft.com/office/drawing/2014/main" xmlns="" id="{89FCD844-DF7E-40C9-9D11-022F7FE63189}"/>
+                <a16:creationId xmlns:a16="http://schemas.microsoft.com/office/drawing/2014/main" id="{89FCD844-DF7E-40C9-9D11-022F7FE63189}"/>
               </a:ext>
             </a:extLst>
           </p:cNvPr>
@@ -24918,7 +24787,7 @@
           <p:cNvPr id="8" name="Connecteur droit avec flèche 7">
             <a:extLst>
               <a:ext uri="{FF2B5EF4-FFF2-40B4-BE49-F238E27FC236}">
-                <a16:creationId xmlns:a16="http://schemas.microsoft.com/office/drawing/2014/main" xmlns="" id="{6589CEFF-63AD-48E0-B8C2-2B9C42EE3BA1}"/>
+                <a16:creationId xmlns:a16="http://schemas.microsoft.com/office/drawing/2014/main" id="{6589CEFF-63AD-48E0-B8C2-2B9C42EE3BA1}"/>
               </a:ext>
             </a:extLst>
           </p:cNvPr>
@@ -24960,7 +24829,7 @@
           <p:cNvPr id="9" name="ZoneTexte 8">
             <a:extLst>
               <a:ext uri="{FF2B5EF4-FFF2-40B4-BE49-F238E27FC236}">
-                <a16:creationId xmlns:a16="http://schemas.microsoft.com/office/drawing/2014/main" xmlns="" id="{479D2F68-32D5-4E80-B573-2C6156DCB22F}"/>
+                <a16:creationId xmlns:a16="http://schemas.microsoft.com/office/drawing/2014/main" id="{479D2F68-32D5-4E80-B573-2C6156DCB22F}"/>
               </a:ext>
             </a:extLst>
           </p:cNvPr>
@@ -25002,7 +24871,7 @@
           <p:cNvPr id="10" name="Ellipse 9">
             <a:extLst>
               <a:ext uri="{FF2B5EF4-FFF2-40B4-BE49-F238E27FC236}">
-                <a16:creationId xmlns:a16="http://schemas.microsoft.com/office/drawing/2014/main" xmlns="" id="{D18BD9DA-F640-40D8-890E-826C2DD83CAC}"/>
+                <a16:creationId xmlns:a16="http://schemas.microsoft.com/office/drawing/2014/main" id="{D18BD9DA-F640-40D8-890E-826C2DD83CAC}"/>
               </a:ext>
             </a:extLst>
           </p:cNvPr>
@@ -25057,7 +24926,7 @@
           <p:cNvPr id="11" name="ZoneTexte 10">
             <a:extLst>
               <a:ext uri="{FF2B5EF4-FFF2-40B4-BE49-F238E27FC236}">
-                <a16:creationId xmlns:a16="http://schemas.microsoft.com/office/drawing/2014/main" xmlns="" id="{479D2F68-32D5-4E80-B573-2C6156DCB22F}"/>
+                <a16:creationId xmlns:a16="http://schemas.microsoft.com/office/drawing/2014/main" id="{479D2F68-32D5-4E80-B573-2C6156DCB22F}"/>
               </a:ext>
             </a:extLst>
           </p:cNvPr>
@@ -25215,7 +25084,7 @@
           <p:cNvPr id="5" name="ZoneTexte 4">
             <a:extLst>
               <a:ext uri="{FF2B5EF4-FFF2-40B4-BE49-F238E27FC236}">
-                <a16:creationId xmlns:a16="http://schemas.microsoft.com/office/drawing/2014/main" xmlns="" id="{25D0CFDD-F8D9-4498-A666-F31BA473AEDD}"/>
+                <a16:creationId xmlns:a16="http://schemas.microsoft.com/office/drawing/2014/main" id="{25D0CFDD-F8D9-4498-A666-F31BA473AEDD}"/>
               </a:ext>
             </a:extLst>
           </p:cNvPr>
@@ -25250,7 +25119,7 @@
           <p:cNvPr id="13" name="Ellipse 12">
             <a:extLst>
               <a:ext uri="{FF2B5EF4-FFF2-40B4-BE49-F238E27FC236}">
-                <a16:creationId xmlns:a16="http://schemas.microsoft.com/office/drawing/2014/main" xmlns="" id="{89FCD844-DF7E-40C9-9D11-022F7FE63189}"/>
+                <a16:creationId xmlns:a16="http://schemas.microsoft.com/office/drawing/2014/main" id="{89FCD844-DF7E-40C9-9D11-022F7FE63189}"/>
               </a:ext>
             </a:extLst>
           </p:cNvPr>
@@ -25307,7 +25176,7 @@
           <p:cNvPr id="16" name="Ellipse 15">
             <a:extLst>
               <a:ext uri="{FF2B5EF4-FFF2-40B4-BE49-F238E27FC236}">
-                <a16:creationId xmlns:a16="http://schemas.microsoft.com/office/drawing/2014/main" xmlns="" id="{89FCD844-DF7E-40C9-9D11-022F7FE63189}"/>
+                <a16:creationId xmlns:a16="http://schemas.microsoft.com/office/drawing/2014/main" id="{89FCD844-DF7E-40C9-9D11-022F7FE63189}"/>
               </a:ext>
             </a:extLst>
           </p:cNvPr>
@@ -25357,7 +25226,7 @@
           <p:cNvPr id="17" name="Connecteur droit avec flèche 16">
             <a:extLst>
               <a:ext uri="{FF2B5EF4-FFF2-40B4-BE49-F238E27FC236}">
-                <a16:creationId xmlns:a16="http://schemas.microsoft.com/office/drawing/2014/main" xmlns="" id="{6589CEFF-63AD-48E0-B8C2-2B9C42EE3BA1}"/>
+                <a16:creationId xmlns:a16="http://schemas.microsoft.com/office/drawing/2014/main" id="{6589CEFF-63AD-48E0-B8C2-2B9C42EE3BA1}"/>
               </a:ext>
             </a:extLst>
           </p:cNvPr>
@@ -25399,7 +25268,7 @@
           <p:cNvPr id="18" name="ZoneTexte 17">
             <a:extLst>
               <a:ext uri="{FF2B5EF4-FFF2-40B4-BE49-F238E27FC236}">
-                <a16:creationId xmlns:a16="http://schemas.microsoft.com/office/drawing/2014/main" xmlns="" id="{479D2F68-32D5-4E80-B573-2C6156DCB22F}"/>
+                <a16:creationId xmlns:a16="http://schemas.microsoft.com/office/drawing/2014/main" id="{479D2F68-32D5-4E80-B573-2C6156DCB22F}"/>
               </a:ext>
             </a:extLst>
           </p:cNvPr>
@@ -25468,7 +25337,7 @@
           <p:cNvPr id="25" name="ZoneTexte 24">
             <a:extLst>
               <a:ext uri="{FF2B5EF4-FFF2-40B4-BE49-F238E27FC236}">
-                <a16:creationId xmlns:a16="http://schemas.microsoft.com/office/drawing/2014/main" xmlns="" id="{479D2F68-32D5-4E80-B573-2C6156DCB22F}"/>
+                <a16:creationId xmlns:a16="http://schemas.microsoft.com/office/drawing/2014/main" id="{479D2F68-32D5-4E80-B573-2C6156DCB22F}"/>
               </a:ext>
             </a:extLst>
           </p:cNvPr>
@@ -25534,7 +25403,7 @@
           <p:cNvPr id="5" name="ZoneTexte 4">
             <a:extLst>
               <a:ext uri="{FF2B5EF4-FFF2-40B4-BE49-F238E27FC236}">
-                <a16:creationId xmlns:a16="http://schemas.microsoft.com/office/drawing/2014/main" xmlns="" id="{25D0CFDD-F8D9-4498-A666-F31BA473AEDD}"/>
+                <a16:creationId xmlns:a16="http://schemas.microsoft.com/office/drawing/2014/main" id="{25D0CFDD-F8D9-4498-A666-F31BA473AEDD}"/>
               </a:ext>
             </a:extLst>
           </p:cNvPr>
@@ -25569,7 +25438,7 @@
           <p:cNvPr id="3" name="Ellipse 2">
             <a:extLst>
               <a:ext uri="{FF2B5EF4-FFF2-40B4-BE49-F238E27FC236}">
-                <a16:creationId xmlns:a16="http://schemas.microsoft.com/office/drawing/2014/main" xmlns="" id="{89FCD844-DF7E-40C9-9D11-022F7FE63189}"/>
+                <a16:creationId xmlns:a16="http://schemas.microsoft.com/office/drawing/2014/main" id="{89FCD844-DF7E-40C9-9D11-022F7FE63189}"/>
               </a:ext>
             </a:extLst>
           </p:cNvPr>
@@ -25618,7 +25487,7 @@
           <p:cNvPr id="7" name="ZoneTexte 6">
             <a:extLst>
               <a:ext uri="{FF2B5EF4-FFF2-40B4-BE49-F238E27FC236}">
-                <a16:creationId xmlns:a16="http://schemas.microsoft.com/office/drawing/2014/main" xmlns="" id="{479D2F68-32D5-4E80-B573-2C6156DCB22F}"/>
+                <a16:creationId xmlns:a16="http://schemas.microsoft.com/office/drawing/2014/main" id="{479D2F68-32D5-4E80-B573-2C6156DCB22F}"/>
               </a:ext>
             </a:extLst>
           </p:cNvPr>
@@ -25730,7 +25599,7 @@
           <p:cNvPr id="5" name="ZoneTexte 4">
             <a:extLst>
               <a:ext uri="{FF2B5EF4-FFF2-40B4-BE49-F238E27FC236}">
-                <a16:creationId xmlns:a16="http://schemas.microsoft.com/office/drawing/2014/main" xmlns="" id="{25D0CFDD-F8D9-4498-A666-F31BA473AEDD}"/>
+                <a16:creationId xmlns:a16="http://schemas.microsoft.com/office/drawing/2014/main" id="{25D0CFDD-F8D9-4498-A666-F31BA473AEDD}"/>
               </a:ext>
             </a:extLst>
           </p:cNvPr>
@@ -25765,7 +25634,7 @@
           <p:cNvPr id="3" name="Ellipse 2">
             <a:extLst>
               <a:ext uri="{FF2B5EF4-FFF2-40B4-BE49-F238E27FC236}">
-                <a16:creationId xmlns:a16="http://schemas.microsoft.com/office/drawing/2014/main" xmlns="" id="{89FCD844-DF7E-40C9-9D11-022F7FE63189}"/>
+                <a16:creationId xmlns:a16="http://schemas.microsoft.com/office/drawing/2014/main" id="{89FCD844-DF7E-40C9-9D11-022F7FE63189}"/>
               </a:ext>
             </a:extLst>
           </p:cNvPr>
@@ -25814,7 +25683,7 @@
           <p:cNvPr id="4" name="ZoneTexte 3">
             <a:extLst>
               <a:ext uri="{FF2B5EF4-FFF2-40B4-BE49-F238E27FC236}">
-                <a16:creationId xmlns:a16="http://schemas.microsoft.com/office/drawing/2014/main" xmlns="" id="{479D2F68-32D5-4E80-B573-2C6156DCB22F}"/>
+                <a16:creationId xmlns:a16="http://schemas.microsoft.com/office/drawing/2014/main" id="{479D2F68-32D5-4E80-B573-2C6156DCB22F}"/>
               </a:ext>
             </a:extLst>
           </p:cNvPr>
@@ -25905,7 +25774,7 @@
           <p:cNvPr id="9" name="Ellipse 8">
             <a:extLst>
               <a:ext uri="{FF2B5EF4-FFF2-40B4-BE49-F238E27FC236}">
-                <a16:creationId xmlns:a16="http://schemas.microsoft.com/office/drawing/2014/main" xmlns="" id="{89FCD844-DF7E-40C9-9D11-022F7FE63189}"/>
+                <a16:creationId xmlns:a16="http://schemas.microsoft.com/office/drawing/2014/main" id="{89FCD844-DF7E-40C9-9D11-022F7FE63189}"/>
               </a:ext>
             </a:extLst>
           </p:cNvPr>
@@ -25954,7 +25823,7 @@
           <p:cNvPr id="10" name="ZoneTexte 9">
             <a:extLst>
               <a:ext uri="{FF2B5EF4-FFF2-40B4-BE49-F238E27FC236}">
-                <a16:creationId xmlns:a16="http://schemas.microsoft.com/office/drawing/2014/main" xmlns="" id="{479D2F68-32D5-4E80-B573-2C6156DCB22F}"/>
+                <a16:creationId xmlns:a16="http://schemas.microsoft.com/office/drawing/2014/main" id="{479D2F68-32D5-4E80-B573-2C6156DCB22F}"/>
               </a:ext>
             </a:extLst>
           </p:cNvPr>
@@ -26025,7 +25894,7 @@
           <p:cNvPr id="15" name="Ellipse 14">
             <a:extLst>
               <a:ext uri="{FF2B5EF4-FFF2-40B4-BE49-F238E27FC236}">
-                <a16:creationId xmlns:a16="http://schemas.microsoft.com/office/drawing/2014/main" xmlns="" id="{A05BD43F-3BA6-4D44-9A89-6240DC624C9A}"/>
+                <a16:creationId xmlns:a16="http://schemas.microsoft.com/office/drawing/2014/main" id="{A05BD43F-3BA6-4D44-9A89-6240DC624C9A}"/>
               </a:ext>
             </a:extLst>
           </p:cNvPr>
@@ -26078,7 +25947,7 @@
           <p:cNvPr id="16" name="Ellipse 15">
             <a:extLst>
               <a:ext uri="{FF2B5EF4-FFF2-40B4-BE49-F238E27FC236}">
-                <a16:creationId xmlns:a16="http://schemas.microsoft.com/office/drawing/2014/main" xmlns="" id="{A05BD43F-3BA6-4D44-9A89-6240DC624C9A}"/>
+                <a16:creationId xmlns:a16="http://schemas.microsoft.com/office/drawing/2014/main" id="{A05BD43F-3BA6-4D44-9A89-6240DC624C9A}"/>
               </a:ext>
             </a:extLst>
           </p:cNvPr>
@@ -26131,7 +26000,7 @@
           <p:cNvPr id="17" name="Ellipse 16">
             <a:extLst>
               <a:ext uri="{FF2B5EF4-FFF2-40B4-BE49-F238E27FC236}">
-                <a16:creationId xmlns:a16="http://schemas.microsoft.com/office/drawing/2014/main" xmlns="" id="{A05BD43F-3BA6-4D44-9A89-6240DC624C9A}"/>
+                <a16:creationId xmlns:a16="http://schemas.microsoft.com/office/drawing/2014/main" id="{A05BD43F-3BA6-4D44-9A89-6240DC624C9A}"/>
               </a:ext>
             </a:extLst>
           </p:cNvPr>
@@ -26292,7 +26161,7 @@
           <p:cNvPr id="27" name="ZoneTexte 26">
             <a:extLst>
               <a:ext uri="{FF2B5EF4-FFF2-40B4-BE49-F238E27FC236}">
-                <a16:creationId xmlns:a16="http://schemas.microsoft.com/office/drawing/2014/main" xmlns="" id="{479D2F68-32D5-4E80-B573-2C6156DCB22F}"/>
+                <a16:creationId xmlns:a16="http://schemas.microsoft.com/office/drawing/2014/main" id="{479D2F68-32D5-4E80-B573-2C6156DCB22F}"/>
               </a:ext>
             </a:extLst>
           </p:cNvPr>
@@ -26328,7 +26197,7 @@
           <p:cNvPr id="28" name="ZoneTexte 27">
             <a:extLst>
               <a:ext uri="{FF2B5EF4-FFF2-40B4-BE49-F238E27FC236}">
-                <a16:creationId xmlns:a16="http://schemas.microsoft.com/office/drawing/2014/main" xmlns="" id="{479D2F68-32D5-4E80-B573-2C6156DCB22F}"/>
+                <a16:creationId xmlns:a16="http://schemas.microsoft.com/office/drawing/2014/main" id="{479D2F68-32D5-4E80-B573-2C6156DCB22F}"/>
               </a:ext>
             </a:extLst>
           </p:cNvPr>
@@ -26364,7 +26233,7 @@
           <p:cNvPr id="29" name="ZoneTexte 28">
             <a:extLst>
               <a:ext uri="{FF2B5EF4-FFF2-40B4-BE49-F238E27FC236}">
-                <a16:creationId xmlns:a16="http://schemas.microsoft.com/office/drawing/2014/main" xmlns="" id="{479D2F68-32D5-4E80-B573-2C6156DCB22F}"/>
+                <a16:creationId xmlns:a16="http://schemas.microsoft.com/office/drawing/2014/main" id="{479D2F68-32D5-4E80-B573-2C6156DCB22F}"/>
               </a:ext>
             </a:extLst>
           </p:cNvPr>
@@ -26400,7 +26269,7 @@
           <p:cNvPr id="31" name="Ellipse 30">
             <a:extLst>
               <a:ext uri="{FF2B5EF4-FFF2-40B4-BE49-F238E27FC236}">
-                <a16:creationId xmlns:a16="http://schemas.microsoft.com/office/drawing/2014/main" xmlns="" id="{D18BD9DA-F640-40D8-890E-826C2DD83CAC}"/>
+                <a16:creationId xmlns:a16="http://schemas.microsoft.com/office/drawing/2014/main" id="{D18BD9DA-F640-40D8-890E-826C2DD83CAC}"/>
               </a:ext>
             </a:extLst>
           </p:cNvPr>
@@ -26491,7 +26360,7 @@
           <p:cNvPr id="35" name="ZoneTexte 34">
             <a:extLst>
               <a:ext uri="{FF2B5EF4-FFF2-40B4-BE49-F238E27FC236}">
-                <a16:creationId xmlns:a16="http://schemas.microsoft.com/office/drawing/2014/main" xmlns="" id="{479D2F68-32D5-4E80-B573-2C6156DCB22F}"/>
+                <a16:creationId xmlns:a16="http://schemas.microsoft.com/office/drawing/2014/main" id="{479D2F68-32D5-4E80-B573-2C6156DCB22F}"/>
               </a:ext>
             </a:extLst>
           </p:cNvPr>
@@ -26566,7 +26435,7 @@
           <p:cNvPr id="5" name="ZoneTexte 4">
             <a:extLst>
               <a:ext uri="{FF2B5EF4-FFF2-40B4-BE49-F238E27FC236}">
-                <a16:creationId xmlns:a16="http://schemas.microsoft.com/office/drawing/2014/main" xmlns="" id="{25D0CFDD-F8D9-4498-A666-F31BA473AEDD}"/>
+                <a16:creationId xmlns:a16="http://schemas.microsoft.com/office/drawing/2014/main" id="{25D0CFDD-F8D9-4498-A666-F31BA473AEDD}"/>
               </a:ext>
             </a:extLst>
           </p:cNvPr>
@@ -26601,7 +26470,7 @@
           <p:cNvPr id="33" name="Ellipse 32">
             <a:extLst>
               <a:ext uri="{FF2B5EF4-FFF2-40B4-BE49-F238E27FC236}">
-                <a16:creationId xmlns:a16="http://schemas.microsoft.com/office/drawing/2014/main" xmlns="" id="{89FCD844-DF7E-40C9-9D11-022F7FE63189}"/>
+                <a16:creationId xmlns:a16="http://schemas.microsoft.com/office/drawing/2014/main" id="{89FCD844-DF7E-40C9-9D11-022F7FE63189}"/>
               </a:ext>
             </a:extLst>
           </p:cNvPr>
@@ -26651,7 +26520,7 @@
           <p:cNvPr id="13" name="Connecteur droit avec flèche 12">
             <a:extLst>
               <a:ext uri="{FF2B5EF4-FFF2-40B4-BE49-F238E27FC236}">
-                <a16:creationId xmlns:a16="http://schemas.microsoft.com/office/drawing/2014/main" xmlns="" id="{6589CEFF-63AD-48E0-B8C2-2B9C42EE3BA1}"/>
+                <a16:creationId xmlns:a16="http://schemas.microsoft.com/office/drawing/2014/main" id="{6589CEFF-63AD-48E0-B8C2-2B9C42EE3BA1}"/>
               </a:ext>
             </a:extLst>
           </p:cNvPr>
@@ -26694,7 +26563,7 @@
           <p:cNvPr id="3" name="Ellipse 2">
             <a:extLst>
               <a:ext uri="{FF2B5EF4-FFF2-40B4-BE49-F238E27FC236}">
-                <a16:creationId xmlns:a16="http://schemas.microsoft.com/office/drawing/2014/main" xmlns="" id="{B48A28A4-F86C-489F-903E-CDB2F959EE1D}"/>
+                <a16:creationId xmlns:a16="http://schemas.microsoft.com/office/drawing/2014/main" id="{B48A28A4-F86C-489F-903E-CDB2F959EE1D}"/>
               </a:ext>
             </a:extLst>
           </p:cNvPr>
@@ -26744,7 +26613,7 @@
           <p:cNvPr id="8" name="Ellipse 7">
             <a:extLst>
               <a:ext uri="{FF2B5EF4-FFF2-40B4-BE49-F238E27FC236}">
-                <a16:creationId xmlns:a16="http://schemas.microsoft.com/office/drawing/2014/main" xmlns="" id="{846DBD23-0D29-4818-BD2D-A829F9FB2E58}"/>
+                <a16:creationId xmlns:a16="http://schemas.microsoft.com/office/drawing/2014/main" id="{846DBD23-0D29-4818-BD2D-A829F9FB2E58}"/>
               </a:ext>
             </a:extLst>
           </p:cNvPr>
@@ -26794,7 +26663,7 @@
           <p:cNvPr id="10" name="Connecteur droit 9">
             <a:extLst>
               <a:ext uri="{FF2B5EF4-FFF2-40B4-BE49-F238E27FC236}">
-                <a16:creationId xmlns:a16="http://schemas.microsoft.com/office/drawing/2014/main" xmlns="" id="{DF23EB8A-F642-4232-8EBF-D9A94C501694}"/>
+                <a16:creationId xmlns:a16="http://schemas.microsoft.com/office/drawing/2014/main" id="{DF23EB8A-F642-4232-8EBF-D9A94C501694}"/>
               </a:ext>
             </a:extLst>
           </p:cNvPr>
@@ -26833,7 +26702,7 @@
           <p:cNvPr id="18" name="ZoneTexte 17">
             <a:extLst>
               <a:ext uri="{FF2B5EF4-FFF2-40B4-BE49-F238E27FC236}">
-                <a16:creationId xmlns:a16="http://schemas.microsoft.com/office/drawing/2014/main" xmlns="" id="{DB737F55-3E4B-44C8-95BF-7E258C52E571}"/>
+                <a16:creationId xmlns:a16="http://schemas.microsoft.com/office/drawing/2014/main" id="{DB737F55-3E4B-44C8-95BF-7E258C52E571}"/>
               </a:ext>
             </a:extLst>
           </p:cNvPr>
@@ -26899,7 +26768,7 @@
           <p:cNvPr id="5" name="ZoneTexte 4">
             <a:extLst>
               <a:ext uri="{FF2B5EF4-FFF2-40B4-BE49-F238E27FC236}">
-                <a16:creationId xmlns:a16="http://schemas.microsoft.com/office/drawing/2014/main" xmlns="" id="{25D0CFDD-F8D9-4498-A666-F31BA473AEDD}"/>
+                <a16:creationId xmlns:a16="http://schemas.microsoft.com/office/drawing/2014/main" id="{25D0CFDD-F8D9-4498-A666-F31BA473AEDD}"/>
               </a:ext>
             </a:extLst>
           </p:cNvPr>
@@ -26934,7 +26803,7 @@
           <p:cNvPr id="3" name="Ellipse 2">
             <a:extLst>
               <a:ext uri="{FF2B5EF4-FFF2-40B4-BE49-F238E27FC236}">
-                <a16:creationId xmlns:a16="http://schemas.microsoft.com/office/drawing/2014/main" xmlns="" id="{89FCD844-DF7E-40C9-9D11-022F7FE63189}"/>
+                <a16:creationId xmlns:a16="http://schemas.microsoft.com/office/drawing/2014/main" id="{89FCD844-DF7E-40C9-9D11-022F7FE63189}"/>
               </a:ext>
             </a:extLst>
           </p:cNvPr>
@@ -26983,7 +26852,7 @@
           <p:cNvPr id="7" name="ZoneTexte 6">
             <a:extLst>
               <a:ext uri="{FF2B5EF4-FFF2-40B4-BE49-F238E27FC236}">
-                <a16:creationId xmlns:a16="http://schemas.microsoft.com/office/drawing/2014/main" xmlns="" id="{479D2F68-32D5-4E80-B573-2C6156DCB22F}"/>
+                <a16:creationId xmlns:a16="http://schemas.microsoft.com/office/drawing/2014/main" id="{479D2F68-32D5-4E80-B573-2C6156DCB22F}"/>
               </a:ext>
             </a:extLst>
           </p:cNvPr>
@@ -27193,7 +27062,7 @@
           <p:cNvPr id="5" name="ZoneTexte 4">
             <a:extLst>
               <a:ext uri="{FF2B5EF4-FFF2-40B4-BE49-F238E27FC236}">
-                <a16:creationId xmlns:a16="http://schemas.microsoft.com/office/drawing/2014/main" xmlns="" id="{25D0CFDD-F8D9-4498-A666-F31BA473AEDD}"/>
+                <a16:creationId xmlns:a16="http://schemas.microsoft.com/office/drawing/2014/main" id="{25D0CFDD-F8D9-4498-A666-F31BA473AEDD}"/>
               </a:ext>
             </a:extLst>
           </p:cNvPr>
@@ -27228,7 +27097,7 @@
           <p:cNvPr id="13" name="Connecteur droit avec flèche 12">
             <a:extLst>
               <a:ext uri="{FF2B5EF4-FFF2-40B4-BE49-F238E27FC236}">
-                <a16:creationId xmlns:a16="http://schemas.microsoft.com/office/drawing/2014/main" xmlns="" id="{6589CEFF-63AD-48E0-B8C2-2B9C42EE3BA1}"/>
+                <a16:creationId xmlns:a16="http://schemas.microsoft.com/office/drawing/2014/main" id="{6589CEFF-63AD-48E0-B8C2-2B9C42EE3BA1}"/>
               </a:ext>
             </a:extLst>
           </p:cNvPr>
@@ -27271,7 +27140,7 @@
           <p:cNvPr id="8" name="Ellipse 7">
             <a:extLst>
               <a:ext uri="{FF2B5EF4-FFF2-40B4-BE49-F238E27FC236}">
-                <a16:creationId xmlns:a16="http://schemas.microsoft.com/office/drawing/2014/main" xmlns="" id="{846DBD23-0D29-4818-BD2D-A829F9FB2E58}"/>
+                <a16:creationId xmlns:a16="http://schemas.microsoft.com/office/drawing/2014/main" id="{846DBD23-0D29-4818-BD2D-A829F9FB2E58}"/>
               </a:ext>
             </a:extLst>
           </p:cNvPr>
@@ -27321,7 +27190,7 @@
           <p:cNvPr id="18" name="ZoneTexte 17">
             <a:extLst>
               <a:ext uri="{FF2B5EF4-FFF2-40B4-BE49-F238E27FC236}">
-                <a16:creationId xmlns:a16="http://schemas.microsoft.com/office/drawing/2014/main" xmlns="" id="{DB737F55-3E4B-44C8-95BF-7E258C52E571}"/>
+                <a16:creationId xmlns:a16="http://schemas.microsoft.com/office/drawing/2014/main" id="{DB737F55-3E4B-44C8-95BF-7E258C52E571}"/>
               </a:ext>
             </a:extLst>
           </p:cNvPr>
@@ -27357,7 +27226,7 @@
           <p:cNvPr id="2" name="Ellipse 1">
             <a:extLst>
               <a:ext uri="{FF2B5EF4-FFF2-40B4-BE49-F238E27FC236}">
-                <a16:creationId xmlns:a16="http://schemas.microsoft.com/office/drawing/2014/main" xmlns="" id="{D93DE7E0-18A0-4219-ABF7-1A9EE0DAEBBB}"/>
+                <a16:creationId xmlns:a16="http://schemas.microsoft.com/office/drawing/2014/main" id="{D93DE7E0-18A0-4219-ABF7-1A9EE0DAEBBB}"/>
               </a:ext>
             </a:extLst>
           </p:cNvPr>
@@ -27412,7 +27281,7 @@
           <p:cNvPr id="7" name="Ellipse 6">
             <a:extLst>
               <a:ext uri="{FF2B5EF4-FFF2-40B4-BE49-F238E27FC236}">
-                <a16:creationId xmlns:a16="http://schemas.microsoft.com/office/drawing/2014/main" xmlns="" id="{B433A216-DA7E-4A46-A117-1CEE29F8F6C8}"/>
+                <a16:creationId xmlns:a16="http://schemas.microsoft.com/office/drawing/2014/main" id="{B433A216-DA7E-4A46-A117-1CEE29F8F6C8}"/>
               </a:ext>
             </a:extLst>
           </p:cNvPr>
@@ -27467,7 +27336,7 @@
           <p:cNvPr id="15" name="Connecteur droit avec flèche 14">
             <a:extLst>
               <a:ext uri="{FF2B5EF4-FFF2-40B4-BE49-F238E27FC236}">
-                <a16:creationId xmlns:a16="http://schemas.microsoft.com/office/drawing/2014/main" xmlns="" id="{8939BAB6-48C8-40C7-8CA1-5F72BC1EC1D6}"/>
+                <a16:creationId xmlns:a16="http://schemas.microsoft.com/office/drawing/2014/main" id="{8939BAB6-48C8-40C7-8CA1-5F72BC1EC1D6}"/>
               </a:ext>
             </a:extLst>
           </p:cNvPr>
@@ -27510,7 +27379,7 @@
           <p:cNvPr id="22" name="Ellipse 21">
             <a:extLst>
               <a:ext uri="{FF2B5EF4-FFF2-40B4-BE49-F238E27FC236}">
-                <a16:creationId xmlns:a16="http://schemas.microsoft.com/office/drawing/2014/main" xmlns="" id="{C817682D-2E44-4081-BE9D-6F820EB51F93}"/>
+                <a16:creationId xmlns:a16="http://schemas.microsoft.com/office/drawing/2014/main" id="{C817682D-2E44-4081-BE9D-6F820EB51F93}"/>
               </a:ext>
             </a:extLst>
           </p:cNvPr>
@@ -27560,7 +27429,7 @@
           <p:cNvPr id="24" name="Ellipse 23">
             <a:extLst>
               <a:ext uri="{FF2B5EF4-FFF2-40B4-BE49-F238E27FC236}">
-                <a16:creationId xmlns:a16="http://schemas.microsoft.com/office/drawing/2014/main" xmlns="" id="{EE912597-D3FB-4EFB-8902-F6CAA09DE17F}"/>
+                <a16:creationId xmlns:a16="http://schemas.microsoft.com/office/drawing/2014/main" id="{EE912597-D3FB-4EFB-8902-F6CAA09DE17F}"/>
               </a:ext>
             </a:extLst>
           </p:cNvPr>
@@ -27610,7 +27479,7 @@
           <p:cNvPr id="26" name="Ellipse 25">
             <a:extLst>
               <a:ext uri="{FF2B5EF4-FFF2-40B4-BE49-F238E27FC236}">
-                <a16:creationId xmlns:a16="http://schemas.microsoft.com/office/drawing/2014/main" xmlns="" id="{A848EE60-A5BF-4202-BE08-4CA3D18F2770}"/>
+                <a16:creationId xmlns:a16="http://schemas.microsoft.com/office/drawing/2014/main" id="{A848EE60-A5BF-4202-BE08-4CA3D18F2770}"/>
               </a:ext>
             </a:extLst>
           </p:cNvPr>
@@ -27660,7 +27529,7 @@
           <p:cNvPr id="29" name="Connecteur droit avec flèche 28">
             <a:extLst>
               <a:ext uri="{FF2B5EF4-FFF2-40B4-BE49-F238E27FC236}">
-                <a16:creationId xmlns:a16="http://schemas.microsoft.com/office/drawing/2014/main" xmlns="" id="{BCDB3263-C4E7-4405-83E3-2AFC31143B2A}"/>
+                <a16:creationId xmlns:a16="http://schemas.microsoft.com/office/drawing/2014/main" id="{BCDB3263-C4E7-4405-83E3-2AFC31143B2A}"/>
               </a:ext>
             </a:extLst>
           </p:cNvPr>
@@ -27703,7 +27572,7 @@
           <p:cNvPr id="32" name="Connecteur droit avec flèche 31">
             <a:extLst>
               <a:ext uri="{FF2B5EF4-FFF2-40B4-BE49-F238E27FC236}">
-                <a16:creationId xmlns:a16="http://schemas.microsoft.com/office/drawing/2014/main" xmlns="" id="{CDF8986E-C313-4ACB-BD54-FB8932F64D61}"/>
+                <a16:creationId xmlns:a16="http://schemas.microsoft.com/office/drawing/2014/main" id="{CDF8986E-C313-4ACB-BD54-FB8932F64D61}"/>
               </a:ext>
             </a:extLst>
           </p:cNvPr>
@@ -27746,7 +27615,7 @@
           <p:cNvPr id="35" name="Connecteur droit avec flèche 34">
             <a:extLst>
               <a:ext uri="{FF2B5EF4-FFF2-40B4-BE49-F238E27FC236}">
-                <a16:creationId xmlns:a16="http://schemas.microsoft.com/office/drawing/2014/main" xmlns="" id="{7D5D8C5A-BCAE-4BAD-ADA6-FC9E03DFC60D}"/>
+                <a16:creationId xmlns:a16="http://schemas.microsoft.com/office/drawing/2014/main" id="{7D5D8C5A-BCAE-4BAD-ADA6-FC9E03DFC60D}"/>
               </a:ext>
             </a:extLst>
           </p:cNvPr>
@@ -27789,7 +27658,7 @@
           <p:cNvPr id="39" name="Ellipse 38">
             <a:extLst>
               <a:ext uri="{FF2B5EF4-FFF2-40B4-BE49-F238E27FC236}">
-                <a16:creationId xmlns:a16="http://schemas.microsoft.com/office/drawing/2014/main" xmlns="" id="{EAFC5736-B4EA-42F9-85AE-47CC96E7276B}"/>
+                <a16:creationId xmlns:a16="http://schemas.microsoft.com/office/drawing/2014/main" id="{EAFC5736-B4EA-42F9-85AE-47CC96E7276B}"/>
               </a:ext>
             </a:extLst>
           </p:cNvPr>
@@ -27839,7 +27708,7 @@
           <p:cNvPr id="41" name="Ellipse 40">
             <a:extLst>
               <a:ext uri="{FF2B5EF4-FFF2-40B4-BE49-F238E27FC236}">
-                <a16:creationId xmlns:a16="http://schemas.microsoft.com/office/drawing/2014/main" xmlns="" id="{DBACB7EC-0545-4AAA-A20F-D1B025273D05}"/>
+                <a16:creationId xmlns:a16="http://schemas.microsoft.com/office/drawing/2014/main" id="{DBACB7EC-0545-4AAA-A20F-D1B025273D05}"/>
               </a:ext>
             </a:extLst>
           </p:cNvPr>
@@ -27889,7 +27758,7 @@
           <p:cNvPr id="43" name="ZoneTexte 42">
             <a:extLst>
               <a:ext uri="{FF2B5EF4-FFF2-40B4-BE49-F238E27FC236}">
-                <a16:creationId xmlns:a16="http://schemas.microsoft.com/office/drawing/2014/main" xmlns="" id="{3549ACE9-D9DF-4A6E-8795-098B81244A28}"/>
+                <a16:creationId xmlns:a16="http://schemas.microsoft.com/office/drawing/2014/main" id="{3549ACE9-D9DF-4A6E-8795-098B81244A28}"/>
               </a:ext>
             </a:extLst>
           </p:cNvPr>
@@ -27925,7 +27794,7 @@
           <p:cNvPr id="44" name="Connecteur droit avec flèche 43">
             <a:extLst>
               <a:ext uri="{FF2B5EF4-FFF2-40B4-BE49-F238E27FC236}">
-                <a16:creationId xmlns:a16="http://schemas.microsoft.com/office/drawing/2014/main" xmlns="" id="{54DD9358-BEDF-4236-9500-99A60739A3B6}"/>
+                <a16:creationId xmlns:a16="http://schemas.microsoft.com/office/drawing/2014/main" id="{54DD9358-BEDF-4236-9500-99A60739A3B6}"/>
               </a:ext>
             </a:extLst>
           </p:cNvPr>
@@ -27968,7 +27837,7 @@
           <p:cNvPr id="47" name="Connecteur droit avec flèche 46">
             <a:extLst>
               <a:ext uri="{FF2B5EF4-FFF2-40B4-BE49-F238E27FC236}">
-                <a16:creationId xmlns:a16="http://schemas.microsoft.com/office/drawing/2014/main" xmlns="" id="{B9E7C0CB-7ECB-44E6-93B2-E00809A23BC0}"/>
+                <a16:creationId xmlns:a16="http://schemas.microsoft.com/office/drawing/2014/main" id="{B9E7C0CB-7ECB-44E6-93B2-E00809A23BC0}"/>
               </a:ext>
             </a:extLst>
           </p:cNvPr>
@@ -28011,7 +27880,7 @@
           <p:cNvPr id="51" name="ZoneTexte 50">
             <a:extLst>
               <a:ext uri="{FF2B5EF4-FFF2-40B4-BE49-F238E27FC236}">
-                <a16:creationId xmlns:a16="http://schemas.microsoft.com/office/drawing/2014/main" xmlns="" id="{9C451AEB-76F8-462C-BA0F-A02187D5D2DD}"/>
+                <a16:creationId xmlns:a16="http://schemas.microsoft.com/office/drawing/2014/main" id="{9C451AEB-76F8-462C-BA0F-A02187D5D2DD}"/>
               </a:ext>
             </a:extLst>
           </p:cNvPr>
@@ -28135,7 +28004,7 @@
           <p:cNvPr id="4" name="Ellipse 3">
             <a:extLst>
               <a:ext uri="{FF2B5EF4-FFF2-40B4-BE49-F238E27FC236}">
-                <a16:creationId xmlns:a16="http://schemas.microsoft.com/office/drawing/2014/main" xmlns="" id="{89FCD844-DF7E-40C9-9D11-022F7FE63189}"/>
+                <a16:creationId xmlns:a16="http://schemas.microsoft.com/office/drawing/2014/main" id="{89FCD844-DF7E-40C9-9D11-022F7FE63189}"/>
               </a:ext>
             </a:extLst>
           </p:cNvPr>
@@ -28185,7 +28054,7 @@
           <p:cNvPr id="5" name="Ellipse 4">
             <a:extLst>
               <a:ext uri="{FF2B5EF4-FFF2-40B4-BE49-F238E27FC236}">
-                <a16:creationId xmlns:a16="http://schemas.microsoft.com/office/drawing/2014/main" xmlns="" id="{04266D3A-83FA-4DC5-B077-3FE3BE66996C}"/>
+                <a16:creationId xmlns:a16="http://schemas.microsoft.com/office/drawing/2014/main" id="{04266D3A-83FA-4DC5-B077-3FE3BE66996C}"/>
               </a:ext>
             </a:extLst>
           </p:cNvPr>
@@ -28238,7 +28107,7 @@
           <p:cNvPr id="6" name="Ellipse 5">
             <a:extLst>
               <a:ext uri="{FF2B5EF4-FFF2-40B4-BE49-F238E27FC236}">
-                <a16:creationId xmlns:a16="http://schemas.microsoft.com/office/drawing/2014/main" xmlns="" id="{20EF6430-F8E7-4FD1-9FFC-35EEC2563371}"/>
+                <a16:creationId xmlns:a16="http://schemas.microsoft.com/office/drawing/2014/main" id="{20EF6430-F8E7-4FD1-9FFC-35EEC2563371}"/>
               </a:ext>
             </a:extLst>
           </p:cNvPr>
@@ -28291,7 +28160,7 @@
           <p:cNvPr id="7" name="Ellipse 6">
             <a:extLst>
               <a:ext uri="{FF2B5EF4-FFF2-40B4-BE49-F238E27FC236}">
-                <a16:creationId xmlns:a16="http://schemas.microsoft.com/office/drawing/2014/main" xmlns="" id="{A05BD43F-3BA6-4D44-9A89-6240DC624C9A}"/>
+                <a16:creationId xmlns:a16="http://schemas.microsoft.com/office/drawing/2014/main" id="{A05BD43F-3BA6-4D44-9A89-6240DC624C9A}"/>
               </a:ext>
             </a:extLst>
           </p:cNvPr>
@@ -28344,7 +28213,7 @@
           <p:cNvPr id="8" name="Ellipse 7">
             <a:extLst>
               <a:ext uri="{FF2B5EF4-FFF2-40B4-BE49-F238E27FC236}">
-                <a16:creationId xmlns:a16="http://schemas.microsoft.com/office/drawing/2014/main" xmlns="" id="{D18BD9DA-F640-40D8-890E-826C2DD83CAC}"/>
+                <a16:creationId xmlns:a16="http://schemas.microsoft.com/office/drawing/2014/main" id="{D18BD9DA-F640-40D8-890E-826C2DD83CAC}"/>
               </a:ext>
             </a:extLst>
           </p:cNvPr>
@@ -28399,7 +28268,7 @@
           <p:cNvPr id="9" name="Ellipse 8">
             <a:extLst>
               <a:ext uri="{FF2B5EF4-FFF2-40B4-BE49-F238E27FC236}">
-                <a16:creationId xmlns:a16="http://schemas.microsoft.com/office/drawing/2014/main" xmlns="" id="{C9FE4625-6D4C-4C81-B023-2ED8433BE05F}"/>
+                <a16:creationId xmlns:a16="http://schemas.microsoft.com/office/drawing/2014/main" id="{C9FE4625-6D4C-4C81-B023-2ED8433BE05F}"/>
               </a:ext>
             </a:extLst>
           </p:cNvPr>
@@ -28454,7 +28323,7 @@
           <p:cNvPr id="11" name="Connecteur droit avec flèche 10">
             <a:extLst>
               <a:ext uri="{FF2B5EF4-FFF2-40B4-BE49-F238E27FC236}">
-                <a16:creationId xmlns:a16="http://schemas.microsoft.com/office/drawing/2014/main" xmlns="" id="{FA4799A5-0298-4D1C-A51C-8C4AC1ECF70E}"/>
+                <a16:creationId xmlns:a16="http://schemas.microsoft.com/office/drawing/2014/main" id="{FA4799A5-0298-4D1C-A51C-8C4AC1ECF70E}"/>
               </a:ext>
             </a:extLst>
           </p:cNvPr>
@@ -28496,7 +28365,7 @@
           <p:cNvPr id="13" name="Connecteur droit avec flèche 12">
             <a:extLst>
               <a:ext uri="{FF2B5EF4-FFF2-40B4-BE49-F238E27FC236}">
-                <a16:creationId xmlns:a16="http://schemas.microsoft.com/office/drawing/2014/main" xmlns="" id="{015152B5-CA66-4A0F-9894-51E75D341D8D}"/>
+                <a16:creationId xmlns:a16="http://schemas.microsoft.com/office/drawing/2014/main" id="{015152B5-CA66-4A0F-9894-51E75D341D8D}"/>
               </a:ext>
             </a:extLst>
           </p:cNvPr>
@@ -28535,7 +28404,7 @@
           <p:cNvPr id="15" name="Connecteur droit avec flèche 14">
             <a:extLst>
               <a:ext uri="{FF2B5EF4-FFF2-40B4-BE49-F238E27FC236}">
-                <a16:creationId xmlns:a16="http://schemas.microsoft.com/office/drawing/2014/main" xmlns="" id="{7849844A-8993-4C5F-A72A-918BFA1F176F}"/>
+                <a16:creationId xmlns:a16="http://schemas.microsoft.com/office/drawing/2014/main" id="{7849844A-8993-4C5F-A72A-918BFA1F176F}"/>
               </a:ext>
             </a:extLst>
           </p:cNvPr>
@@ -28577,7 +28446,7 @@
           <p:cNvPr id="17" name="Connecteur droit avec flèche 16">
             <a:extLst>
               <a:ext uri="{FF2B5EF4-FFF2-40B4-BE49-F238E27FC236}">
-                <a16:creationId xmlns:a16="http://schemas.microsoft.com/office/drawing/2014/main" xmlns="" id="{35CD81BA-EEE1-4F6F-B1D2-060F1B5B1F95}"/>
+                <a16:creationId xmlns:a16="http://schemas.microsoft.com/office/drawing/2014/main" id="{35CD81BA-EEE1-4F6F-B1D2-060F1B5B1F95}"/>
               </a:ext>
             </a:extLst>
           </p:cNvPr>
@@ -28619,7 +28488,7 @@
           <p:cNvPr id="20" name="Connecteur droit avec flèche 19">
             <a:extLst>
               <a:ext uri="{FF2B5EF4-FFF2-40B4-BE49-F238E27FC236}">
-                <a16:creationId xmlns:a16="http://schemas.microsoft.com/office/drawing/2014/main" xmlns="" id="{1055E33E-43DF-4EA1-B851-345375F53862}"/>
+                <a16:creationId xmlns:a16="http://schemas.microsoft.com/office/drawing/2014/main" id="{1055E33E-43DF-4EA1-B851-345375F53862}"/>
               </a:ext>
             </a:extLst>
           </p:cNvPr>
@@ -28661,7 +28530,7 @@
           <p:cNvPr id="22" name="Connecteur droit avec flèche 21">
             <a:extLst>
               <a:ext uri="{FF2B5EF4-FFF2-40B4-BE49-F238E27FC236}">
-                <a16:creationId xmlns:a16="http://schemas.microsoft.com/office/drawing/2014/main" xmlns="" id="{774693B9-DF54-4AE5-81F3-7FD221F2E9EC}"/>
+                <a16:creationId xmlns:a16="http://schemas.microsoft.com/office/drawing/2014/main" id="{774693B9-DF54-4AE5-81F3-7FD221F2E9EC}"/>
               </a:ext>
             </a:extLst>
           </p:cNvPr>
@@ -28703,7 +28572,7 @@
           <p:cNvPr id="24" name="Connecteur droit avec flèche 23">
             <a:extLst>
               <a:ext uri="{FF2B5EF4-FFF2-40B4-BE49-F238E27FC236}">
-                <a16:creationId xmlns:a16="http://schemas.microsoft.com/office/drawing/2014/main" xmlns="" id="{FE3792FD-3716-4B03-8B24-62235C4F1465}"/>
+                <a16:creationId xmlns:a16="http://schemas.microsoft.com/office/drawing/2014/main" id="{FE3792FD-3716-4B03-8B24-62235C4F1465}"/>
               </a:ext>
             </a:extLst>
           </p:cNvPr>
@@ -28745,7 +28614,7 @@
           <p:cNvPr id="25" name="ZoneTexte 24">
             <a:extLst>
               <a:ext uri="{FF2B5EF4-FFF2-40B4-BE49-F238E27FC236}">
-                <a16:creationId xmlns:a16="http://schemas.microsoft.com/office/drawing/2014/main" xmlns="" id="{EC37E58C-8569-44E3-A1DC-1FED44F81068}"/>
+                <a16:creationId xmlns:a16="http://schemas.microsoft.com/office/drawing/2014/main" id="{EC37E58C-8569-44E3-A1DC-1FED44F81068}"/>
               </a:ext>
             </a:extLst>
           </p:cNvPr>
@@ -28781,7 +28650,7 @@
           <p:cNvPr id="26" name="ZoneTexte 25">
             <a:extLst>
               <a:ext uri="{FF2B5EF4-FFF2-40B4-BE49-F238E27FC236}">
-                <a16:creationId xmlns:a16="http://schemas.microsoft.com/office/drawing/2014/main" xmlns="" id="{FAA392D6-1A3B-4D0A-8C01-817A0F04B637}"/>
+                <a16:creationId xmlns:a16="http://schemas.microsoft.com/office/drawing/2014/main" id="{FAA392D6-1A3B-4D0A-8C01-817A0F04B637}"/>
               </a:ext>
             </a:extLst>
           </p:cNvPr>
@@ -28817,7 +28686,7 @@
           <p:cNvPr id="27" name="ZoneTexte 26">
             <a:extLst>
               <a:ext uri="{FF2B5EF4-FFF2-40B4-BE49-F238E27FC236}">
-                <a16:creationId xmlns:a16="http://schemas.microsoft.com/office/drawing/2014/main" xmlns="" id="{E9D2A897-EAB3-4778-A48C-996CC1E8AC50}"/>
+                <a16:creationId xmlns:a16="http://schemas.microsoft.com/office/drawing/2014/main" id="{E9D2A897-EAB3-4778-A48C-996CC1E8AC50}"/>
               </a:ext>
             </a:extLst>
           </p:cNvPr>
@@ -28853,7 +28722,7 @@
           <p:cNvPr id="28" name="ZoneTexte 27">
             <a:extLst>
               <a:ext uri="{FF2B5EF4-FFF2-40B4-BE49-F238E27FC236}">
-                <a16:creationId xmlns:a16="http://schemas.microsoft.com/office/drawing/2014/main" xmlns="" id="{25FE3CA9-2E21-4E5D-8555-BE8394BBA317}"/>
+                <a16:creationId xmlns:a16="http://schemas.microsoft.com/office/drawing/2014/main" id="{25FE3CA9-2E21-4E5D-8555-BE8394BBA317}"/>
               </a:ext>
             </a:extLst>
           </p:cNvPr>
@@ -28889,7 +28758,7 @@
           <p:cNvPr id="29" name="ZoneTexte 28">
             <a:extLst>
               <a:ext uri="{FF2B5EF4-FFF2-40B4-BE49-F238E27FC236}">
-                <a16:creationId xmlns:a16="http://schemas.microsoft.com/office/drawing/2014/main" xmlns="" id="{0692236C-15B0-4B00-964F-2FC9F6384F6F}"/>
+                <a16:creationId xmlns:a16="http://schemas.microsoft.com/office/drawing/2014/main" id="{0692236C-15B0-4B00-964F-2FC9F6384F6F}"/>
               </a:ext>
             </a:extLst>
           </p:cNvPr>
@@ -28925,7 +28794,7 @@
           <p:cNvPr id="30" name="ZoneTexte 29">
             <a:extLst>
               <a:ext uri="{FF2B5EF4-FFF2-40B4-BE49-F238E27FC236}">
-                <a16:creationId xmlns:a16="http://schemas.microsoft.com/office/drawing/2014/main" xmlns="" id="{CE7EF607-C441-4C6F-934E-973FAD16220A}"/>
+                <a16:creationId xmlns:a16="http://schemas.microsoft.com/office/drawing/2014/main" id="{CE7EF607-C441-4C6F-934E-973FAD16220A}"/>
               </a:ext>
             </a:extLst>
           </p:cNvPr>
@@ -28961,7 +28830,7 @@
           <p:cNvPr id="31" name="ZoneTexte 30">
             <a:extLst>
               <a:ext uri="{FF2B5EF4-FFF2-40B4-BE49-F238E27FC236}">
-                <a16:creationId xmlns:a16="http://schemas.microsoft.com/office/drawing/2014/main" xmlns="" id="{C9963DA0-1C1A-4E2E-BA58-B5FF1051DD91}"/>
+                <a16:creationId xmlns:a16="http://schemas.microsoft.com/office/drawing/2014/main" id="{C9963DA0-1C1A-4E2E-BA58-B5FF1051DD91}"/>
               </a:ext>
             </a:extLst>
           </p:cNvPr>
@@ -28970,8 +28839,8 @@
         </p:nvSpPr>
         <p:spPr>
           <a:xfrm rot="16200000">
-            <a:off x="712377" y="3031062"/>
-            <a:ext cx="2584747" cy="1138773"/>
+            <a:off x="657523" y="3031062"/>
+            <a:ext cx="2694456" cy="1138773"/>
           </a:xfrm>
           <a:prstGeom prst="rect">
             <a:avLst/>
@@ -28992,7 +28861,7 @@
           <a:p>
             <a:r>
               <a:rPr lang="fr-BE" dirty="0"/>
-              <a:t>s.STRAM_DATA_BLOCKED</a:t>
+              <a:t>s.STREAM_DATA_BLOCKED</a:t>
             </a:r>
           </a:p>
           <a:p>
@@ -29012,7 +28881,7 @@
           <p:cNvPr id="33" name="Connecteur droit avec flèche 32">
             <a:extLst>
               <a:ext uri="{FF2B5EF4-FFF2-40B4-BE49-F238E27FC236}">
-                <a16:creationId xmlns:a16="http://schemas.microsoft.com/office/drawing/2014/main" xmlns="" id="{6589CEFF-63AD-48E0-B8C2-2B9C42EE3BA1}"/>
+                <a16:creationId xmlns:a16="http://schemas.microsoft.com/office/drawing/2014/main" id="{6589CEFF-63AD-48E0-B8C2-2B9C42EE3BA1}"/>
               </a:ext>
             </a:extLst>
           </p:cNvPr>
@@ -29053,7 +28922,7 @@
           <p:cNvPr id="2" name="ZoneTexte 1">
             <a:extLst>
               <a:ext uri="{FF2B5EF4-FFF2-40B4-BE49-F238E27FC236}">
-                <a16:creationId xmlns:a16="http://schemas.microsoft.com/office/drawing/2014/main" xmlns="" id="{88F6E5C9-E973-4B06-9C4B-9944C2767988}"/>
+                <a16:creationId xmlns:a16="http://schemas.microsoft.com/office/drawing/2014/main" id="{88F6E5C9-E973-4B06-9C4B-9944C2767988}"/>
               </a:ext>
             </a:extLst>
           </p:cNvPr>
@@ -29099,7 +28968,7 @@
           <p:cNvPr id="3" name="Bulle narrative : rectangle à coins arrondis 2">
             <a:extLst>
               <a:ext uri="{FF2B5EF4-FFF2-40B4-BE49-F238E27FC236}">
-                <a16:creationId xmlns:a16="http://schemas.microsoft.com/office/drawing/2014/main" xmlns="" id="{988D0EB4-947A-46B9-A29D-46DAE79C5B8E}"/>
+                <a16:creationId xmlns:a16="http://schemas.microsoft.com/office/drawing/2014/main" id="{988D0EB4-947A-46B9-A29D-46DAE79C5B8E}"/>
               </a:ext>
             </a:extLst>
           </p:cNvPr>
@@ -29152,7 +29021,7 @@
           <p:cNvPr id="10" name="Bulle narrative : rectangle à coins arrondis 9">
             <a:extLst>
               <a:ext uri="{FF2B5EF4-FFF2-40B4-BE49-F238E27FC236}">
-                <a16:creationId xmlns:a16="http://schemas.microsoft.com/office/drawing/2014/main" xmlns="" id="{5DD2B065-1291-4E98-9EA8-E397CA6004D6}"/>
+                <a16:creationId xmlns:a16="http://schemas.microsoft.com/office/drawing/2014/main" id="{5DD2B065-1291-4E98-9EA8-E397CA6004D6}"/>
               </a:ext>
             </a:extLst>
           </p:cNvPr>
@@ -29205,7 +29074,7 @@
           <p:cNvPr id="14" name="Bulle narrative : rectangle à coins arrondis 13">
             <a:extLst>
               <a:ext uri="{FF2B5EF4-FFF2-40B4-BE49-F238E27FC236}">
-                <a16:creationId xmlns:a16="http://schemas.microsoft.com/office/drawing/2014/main" xmlns="" id="{949E7391-F356-4A29-822D-BB2783A50072}"/>
+                <a16:creationId xmlns:a16="http://schemas.microsoft.com/office/drawing/2014/main" id="{949E7391-F356-4A29-822D-BB2783A50072}"/>
               </a:ext>
             </a:extLst>
           </p:cNvPr>
@@ -29253,7 +29122,7 @@
           <p:cNvPr id="32" name="ZoneTexte 31">
             <a:extLst>
               <a:ext uri="{FF2B5EF4-FFF2-40B4-BE49-F238E27FC236}">
-                <a16:creationId xmlns:a16="http://schemas.microsoft.com/office/drawing/2014/main" xmlns="" id="{3854FA4F-3B96-4A8F-9412-672862F5CD0D}"/>
+                <a16:creationId xmlns:a16="http://schemas.microsoft.com/office/drawing/2014/main" id="{3854FA4F-3B96-4A8F-9412-672862F5CD0D}"/>
               </a:ext>
             </a:extLst>
           </p:cNvPr>
@@ -29318,7 +29187,7 @@
           <p:cNvPr id="4" name="Ellipse 3">
             <a:extLst>
               <a:ext uri="{FF2B5EF4-FFF2-40B4-BE49-F238E27FC236}">
-                <a16:creationId xmlns:a16="http://schemas.microsoft.com/office/drawing/2014/main" xmlns="" id="{89FCD844-DF7E-40C9-9D11-022F7FE63189}"/>
+                <a16:creationId xmlns:a16="http://schemas.microsoft.com/office/drawing/2014/main" id="{89FCD844-DF7E-40C9-9D11-022F7FE63189}"/>
               </a:ext>
             </a:extLst>
           </p:cNvPr>
@@ -29368,7 +29237,7 @@
           <p:cNvPr id="5" name="Ellipse 4">
             <a:extLst>
               <a:ext uri="{FF2B5EF4-FFF2-40B4-BE49-F238E27FC236}">
-                <a16:creationId xmlns:a16="http://schemas.microsoft.com/office/drawing/2014/main" xmlns="" id="{04266D3A-83FA-4DC5-B077-3FE3BE66996C}"/>
+                <a16:creationId xmlns:a16="http://schemas.microsoft.com/office/drawing/2014/main" id="{04266D3A-83FA-4DC5-B077-3FE3BE66996C}"/>
               </a:ext>
             </a:extLst>
           </p:cNvPr>
@@ -29421,7 +29290,7 @@
           <p:cNvPr id="6" name="Ellipse 5">
             <a:extLst>
               <a:ext uri="{FF2B5EF4-FFF2-40B4-BE49-F238E27FC236}">
-                <a16:creationId xmlns:a16="http://schemas.microsoft.com/office/drawing/2014/main" xmlns="" id="{20EF6430-F8E7-4FD1-9FFC-35EEC2563371}"/>
+                <a16:creationId xmlns:a16="http://schemas.microsoft.com/office/drawing/2014/main" id="{20EF6430-F8E7-4FD1-9FFC-35EEC2563371}"/>
               </a:ext>
             </a:extLst>
           </p:cNvPr>
@@ -29474,7 +29343,7 @@
           <p:cNvPr id="7" name="Ellipse 6">
             <a:extLst>
               <a:ext uri="{FF2B5EF4-FFF2-40B4-BE49-F238E27FC236}">
-                <a16:creationId xmlns:a16="http://schemas.microsoft.com/office/drawing/2014/main" xmlns="" id="{A05BD43F-3BA6-4D44-9A89-6240DC624C9A}"/>
+                <a16:creationId xmlns:a16="http://schemas.microsoft.com/office/drawing/2014/main" id="{A05BD43F-3BA6-4D44-9A89-6240DC624C9A}"/>
               </a:ext>
             </a:extLst>
           </p:cNvPr>
@@ -29527,7 +29396,7 @@
           <p:cNvPr id="8" name="Ellipse 7">
             <a:extLst>
               <a:ext uri="{FF2B5EF4-FFF2-40B4-BE49-F238E27FC236}">
-                <a16:creationId xmlns:a16="http://schemas.microsoft.com/office/drawing/2014/main" xmlns="" id="{D18BD9DA-F640-40D8-890E-826C2DD83CAC}"/>
+                <a16:creationId xmlns:a16="http://schemas.microsoft.com/office/drawing/2014/main" id="{D18BD9DA-F640-40D8-890E-826C2DD83CAC}"/>
               </a:ext>
             </a:extLst>
           </p:cNvPr>
@@ -29582,7 +29451,7 @@
           <p:cNvPr id="9" name="Ellipse 8">
             <a:extLst>
               <a:ext uri="{FF2B5EF4-FFF2-40B4-BE49-F238E27FC236}">
-                <a16:creationId xmlns:a16="http://schemas.microsoft.com/office/drawing/2014/main" xmlns="" id="{C9FE4625-6D4C-4C81-B023-2ED8433BE05F}"/>
+                <a16:creationId xmlns:a16="http://schemas.microsoft.com/office/drawing/2014/main" id="{C9FE4625-6D4C-4C81-B023-2ED8433BE05F}"/>
               </a:ext>
             </a:extLst>
           </p:cNvPr>
@@ -29637,7 +29506,7 @@
           <p:cNvPr id="11" name="Connecteur droit avec flèche 10">
             <a:extLst>
               <a:ext uri="{FF2B5EF4-FFF2-40B4-BE49-F238E27FC236}">
-                <a16:creationId xmlns:a16="http://schemas.microsoft.com/office/drawing/2014/main" xmlns="" id="{FA4799A5-0298-4D1C-A51C-8C4AC1ECF70E}"/>
+                <a16:creationId xmlns:a16="http://schemas.microsoft.com/office/drawing/2014/main" id="{FA4799A5-0298-4D1C-A51C-8C4AC1ECF70E}"/>
               </a:ext>
             </a:extLst>
           </p:cNvPr>
@@ -29679,7 +29548,7 @@
           <p:cNvPr id="13" name="Connecteur droit avec flèche 12">
             <a:extLst>
               <a:ext uri="{FF2B5EF4-FFF2-40B4-BE49-F238E27FC236}">
-                <a16:creationId xmlns:a16="http://schemas.microsoft.com/office/drawing/2014/main" xmlns="" id="{015152B5-CA66-4A0F-9894-51E75D341D8D}"/>
+                <a16:creationId xmlns:a16="http://schemas.microsoft.com/office/drawing/2014/main" id="{015152B5-CA66-4A0F-9894-51E75D341D8D}"/>
               </a:ext>
             </a:extLst>
           </p:cNvPr>
@@ -29718,7 +29587,7 @@
           <p:cNvPr id="15" name="Connecteur droit avec flèche 14">
             <a:extLst>
               <a:ext uri="{FF2B5EF4-FFF2-40B4-BE49-F238E27FC236}">
-                <a16:creationId xmlns:a16="http://schemas.microsoft.com/office/drawing/2014/main" xmlns="" id="{7849844A-8993-4C5F-A72A-918BFA1F176F}"/>
+                <a16:creationId xmlns:a16="http://schemas.microsoft.com/office/drawing/2014/main" id="{7849844A-8993-4C5F-A72A-918BFA1F176F}"/>
               </a:ext>
             </a:extLst>
           </p:cNvPr>
@@ -29760,7 +29629,7 @@
           <p:cNvPr id="17" name="Connecteur droit avec flèche 16">
             <a:extLst>
               <a:ext uri="{FF2B5EF4-FFF2-40B4-BE49-F238E27FC236}">
-                <a16:creationId xmlns:a16="http://schemas.microsoft.com/office/drawing/2014/main" xmlns="" id="{35CD81BA-EEE1-4F6F-B1D2-060F1B5B1F95}"/>
+                <a16:creationId xmlns:a16="http://schemas.microsoft.com/office/drawing/2014/main" id="{35CD81BA-EEE1-4F6F-B1D2-060F1B5B1F95}"/>
               </a:ext>
             </a:extLst>
           </p:cNvPr>
@@ -29802,7 +29671,7 @@
           <p:cNvPr id="20" name="Connecteur droit avec flèche 19">
             <a:extLst>
               <a:ext uri="{FF2B5EF4-FFF2-40B4-BE49-F238E27FC236}">
-                <a16:creationId xmlns:a16="http://schemas.microsoft.com/office/drawing/2014/main" xmlns="" id="{1055E33E-43DF-4EA1-B851-345375F53862}"/>
+                <a16:creationId xmlns:a16="http://schemas.microsoft.com/office/drawing/2014/main" id="{1055E33E-43DF-4EA1-B851-345375F53862}"/>
               </a:ext>
             </a:extLst>
           </p:cNvPr>
@@ -29844,7 +29713,7 @@
           <p:cNvPr id="22" name="Connecteur droit avec flèche 21">
             <a:extLst>
               <a:ext uri="{FF2B5EF4-FFF2-40B4-BE49-F238E27FC236}">
-                <a16:creationId xmlns:a16="http://schemas.microsoft.com/office/drawing/2014/main" xmlns="" id="{774693B9-DF54-4AE5-81F3-7FD221F2E9EC}"/>
+                <a16:creationId xmlns:a16="http://schemas.microsoft.com/office/drawing/2014/main" id="{774693B9-DF54-4AE5-81F3-7FD221F2E9EC}"/>
               </a:ext>
             </a:extLst>
           </p:cNvPr>
@@ -29886,7 +29755,7 @@
           <p:cNvPr id="24" name="Connecteur droit avec flèche 23">
             <a:extLst>
               <a:ext uri="{FF2B5EF4-FFF2-40B4-BE49-F238E27FC236}">
-                <a16:creationId xmlns:a16="http://schemas.microsoft.com/office/drawing/2014/main" xmlns="" id="{FE3792FD-3716-4B03-8B24-62235C4F1465}"/>
+                <a16:creationId xmlns:a16="http://schemas.microsoft.com/office/drawing/2014/main" id="{FE3792FD-3716-4B03-8B24-62235C4F1465}"/>
               </a:ext>
             </a:extLst>
           </p:cNvPr>
@@ -29927,7 +29796,7 @@
           <p:cNvPr id="25" name="ZoneTexte 24">
             <a:extLst>
               <a:ext uri="{FF2B5EF4-FFF2-40B4-BE49-F238E27FC236}">
-                <a16:creationId xmlns:a16="http://schemas.microsoft.com/office/drawing/2014/main" xmlns="" id="{EC37E58C-8569-44E3-A1DC-1FED44F81068}"/>
+                <a16:creationId xmlns:a16="http://schemas.microsoft.com/office/drawing/2014/main" id="{EC37E58C-8569-44E3-A1DC-1FED44F81068}"/>
               </a:ext>
             </a:extLst>
           </p:cNvPr>
@@ -29963,7 +29832,7 @@
           <p:cNvPr id="26" name="ZoneTexte 25">
             <a:extLst>
               <a:ext uri="{FF2B5EF4-FFF2-40B4-BE49-F238E27FC236}">
-                <a16:creationId xmlns:a16="http://schemas.microsoft.com/office/drawing/2014/main" xmlns="" id="{FAA392D6-1A3B-4D0A-8C01-817A0F04B637}"/>
+                <a16:creationId xmlns:a16="http://schemas.microsoft.com/office/drawing/2014/main" id="{FAA392D6-1A3B-4D0A-8C01-817A0F04B637}"/>
               </a:ext>
             </a:extLst>
           </p:cNvPr>
@@ -29999,7 +29868,7 @@
           <p:cNvPr id="27" name="ZoneTexte 26">
             <a:extLst>
               <a:ext uri="{FF2B5EF4-FFF2-40B4-BE49-F238E27FC236}">
-                <a16:creationId xmlns:a16="http://schemas.microsoft.com/office/drawing/2014/main" xmlns="" id="{E9D2A897-EAB3-4778-A48C-996CC1E8AC50}"/>
+                <a16:creationId xmlns:a16="http://schemas.microsoft.com/office/drawing/2014/main" id="{E9D2A897-EAB3-4778-A48C-996CC1E8AC50}"/>
               </a:ext>
             </a:extLst>
           </p:cNvPr>
@@ -30035,7 +29904,7 @@
           <p:cNvPr id="28" name="ZoneTexte 27">
             <a:extLst>
               <a:ext uri="{FF2B5EF4-FFF2-40B4-BE49-F238E27FC236}">
-                <a16:creationId xmlns:a16="http://schemas.microsoft.com/office/drawing/2014/main" xmlns="" id="{25FE3CA9-2E21-4E5D-8555-BE8394BBA317}"/>
+                <a16:creationId xmlns:a16="http://schemas.microsoft.com/office/drawing/2014/main" id="{25FE3CA9-2E21-4E5D-8555-BE8394BBA317}"/>
               </a:ext>
             </a:extLst>
           </p:cNvPr>
@@ -30071,7 +29940,7 @@
           <p:cNvPr id="29" name="ZoneTexte 28">
             <a:extLst>
               <a:ext uri="{FF2B5EF4-FFF2-40B4-BE49-F238E27FC236}">
-                <a16:creationId xmlns:a16="http://schemas.microsoft.com/office/drawing/2014/main" xmlns="" id="{0692236C-15B0-4B00-964F-2FC9F6384F6F}"/>
+                <a16:creationId xmlns:a16="http://schemas.microsoft.com/office/drawing/2014/main" id="{0692236C-15B0-4B00-964F-2FC9F6384F6F}"/>
               </a:ext>
             </a:extLst>
           </p:cNvPr>
@@ -30080,8 +29949,8 @@
         </p:nvSpPr>
         <p:spPr>
           <a:xfrm>
-            <a:off x="7641825" y="4897315"/>
-            <a:ext cx="937757" cy="369332"/>
+            <a:off x="3645639" y="5411639"/>
+            <a:ext cx="976421" cy="369332"/>
           </a:xfrm>
           <a:prstGeom prst="rect">
             <a:avLst/>
@@ -30096,7 +29965,7 @@
           <a:p>
             <a:r>
               <a:rPr lang="fr-BE" dirty="0"/>
-              <a:t>rAll.ACK</a:t>
+              <a:t>rAll.data</a:t>
             </a:r>
             <a:endParaRPr lang="en-GB" dirty="0"/>
           </a:p>
@@ -30107,7 +29976,7 @@
           <p:cNvPr id="30" name="ZoneTexte 29">
             <a:extLst>
               <a:ext uri="{FF2B5EF4-FFF2-40B4-BE49-F238E27FC236}">
-                <a16:creationId xmlns:a16="http://schemas.microsoft.com/office/drawing/2014/main" xmlns="" id="{CE7EF607-C441-4C6F-934E-973FAD16220A}"/>
+                <a16:creationId xmlns:a16="http://schemas.microsoft.com/office/drawing/2014/main" id="{CE7EF607-C441-4C6F-934E-973FAD16220A}"/>
               </a:ext>
             </a:extLst>
           </p:cNvPr>
@@ -30116,7 +29985,7 @@
         </p:nvSpPr>
         <p:spPr>
           <a:xfrm>
-            <a:off x="3431822" y="4985180"/>
+            <a:off x="7048280" y="5378883"/>
             <a:ext cx="1763688" cy="369332"/>
           </a:xfrm>
           <a:prstGeom prst="rect">
@@ -30143,7 +30012,7 @@
           <p:cNvPr id="31" name="ZoneTexte 30">
             <a:extLst>
               <a:ext uri="{FF2B5EF4-FFF2-40B4-BE49-F238E27FC236}">
-                <a16:creationId xmlns:a16="http://schemas.microsoft.com/office/drawing/2014/main" xmlns="" id="{C9963DA0-1C1A-4E2E-BA58-B5FF1051DD91}"/>
+                <a16:creationId xmlns:a16="http://schemas.microsoft.com/office/drawing/2014/main" id="{C9963DA0-1C1A-4E2E-BA58-B5FF1051DD91}"/>
               </a:ext>
             </a:extLst>
           </p:cNvPr>
@@ -30178,7 +30047,7 @@
           <p:cNvPr id="33" name="Connecteur droit avec flèche 32">
             <a:extLst>
               <a:ext uri="{FF2B5EF4-FFF2-40B4-BE49-F238E27FC236}">
-                <a16:creationId xmlns:a16="http://schemas.microsoft.com/office/drawing/2014/main" xmlns="" id="{6589CEFF-63AD-48E0-B8C2-2B9C42EE3BA1}"/>
+                <a16:creationId xmlns:a16="http://schemas.microsoft.com/office/drawing/2014/main" id="{6589CEFF-63AD-48E0-B8C2-2B9C42EE3BA1}"/>
               </a:ext>
             </a:extLst>
           </p:cNvPr>
@@ -30219,7 +30088,7 @@
           <p:cNvPr id="23" name="ZoneTexte 22">
             <a:extLst>
               <a:ext uri="{FF2B5EF4-FFF2-40B4-BE49-F238E27FC236}">
-                <a16:creationId xmlns:a16="http://schemas.microsoft.com/office/drawing/2014/main" xmlns="" id="{479D2F68-32D5-4E80-B573-2C6156DCB22F}"/>
+                <a16:creationId xmlns:a16="http://schemas.microsoft.com/office/drawing/2014/main" id="{479D2F68-32D5-4E80-B573-2C6156DCB22F}"/>
               </a:ext>
             </a:extLst>
           </p:cNvPr>
@@ -30273,7 +30142,7 @@
           <p:cNvPr id="32" name="Connecteur droit avec flèche 31">
             <a:extLst>
               <a:ext uri="{FF2B5EF4-FFF2-40B4-BE49-F238E27FC236}">
-                <a16:creationId xmlns:a16="http://schemas.microsoft.com/office/drawing/2014/main" xmlns="" id="{F4BA6B60-DF61-4E3A-B967-DF30AA624FE0}"/>
+                <a16:creationId xmlns:a16="http://schemas.microsoft.com/office/drawing/2014/main" id="{F4BA6B60-DF61-4E3A-B967-DF30AA624FE0}"/>
               </a:ext>
             </a:extLst>
           </p:cNvPr>
@@ -30314,7 +30183,7 @@
           <p:cNvPr id="34" name="ZoneTexte 33">
             <a:extLst>
               <a:ext uri="{FF2B5EF4-FFF2-40B4-BE49-F238E27FC236}">
-                <a16:creationId xmlns:a16="http://schemas.microsoft.com/office/drawing/2014/main" xmlns="" id="{E9ED5443-1DA7-441F-B3CC-AA9A0CEBB87B}"/>
+                <a16:creationId xmlns:a16="http://schemas.microsoft.com/office/drawing/2014/main" id="{E9ED5443-1DA7-441F-B3CC-AA9A0CEBB87B}"/>
               </a:ext>
             </a:extLst>
           </p:cNvPr>
@@ -30350,7 +30219,7 @@
           <p:cNvPr id="18" name="ZoneTexte 17">
             <a:extLst>
               <a:ext uri="{FF2B5EF4-FFF2-40B4-BE49-F238E27FC236}">
-                <a16:creationId xmlns:a16="http://schemas.microsoft.com/office/drawing/2014/main" xmlns="" id="{1B9DEA2C-3E1F-47F7-9854-33FFAE313979}"/>
+                <a16:creationId xmlns:a16="http://schemas.microsoft.com/office/drawing/2014/main" id="{1B9DEA2C-3E1F-47F7-9854-33FFAE313979}"/>
               </a:ext>
             </a:extLst>
           </p:cNvPr>
@@ -30415,7 +30284,7 @@
           <p:cNvPr id="162" name="ZoneTexte 161">
             <a:extLst>
               <a:ext uri="{FF2B5EF4-FFF2-40B4-BE49-F238E27FC236}">
-                <a16:creationId xmlns:a16="http://schemas.microsoft.com/office/drawing/2014/main" xmlns="" id="{1E9F2AA7-EE6F-4583-B9CC-274E91DD8329}"/>
+                <a16:creationId xmlns:a16="http://schemas.microsoft.com/office/drawing/2014/main" id="{1E9F2AA7-EE6F-4583-B9CC-274E91DD8329}"/>
               </a:ext>
             </a:extLst>
           </p:cNvPr>
@@ -30450,7 +30319,7 @@
           <p:cNvPr id="164" name="Ellipse 163">
             <a:extLst>
               <a:ext uri="{FF2B5EF4-FFF2-40B4-BE49-F238E27FC236}">
-                <a16:creationId xmlns:a16="http://schemas.microsoft.com/office/drawing/2014/main" xmlns="" id="{1EA6948B-714F-43F0-9744-118D43364489}"/>
+                <a16:creationId xmlns:a16="http://schemas.microsoft.com/office/drawing/2014/main" id="{1EA6948B-714F-43F0-9744-118D43364489}"/>
               </a:ext>
             </a:extLst>
           </p:cNvPr>
@@ -30500,7 +30369,7 @@
           <p:cNvPr id="168" name="Ellipse 167">
             <a:extLst>
               <a:ext uri="{FF2B5EF4-FFF2-40B4-BE49-F238E27FC236}">
-                <a16:creationId xmlns:a16="http://schemas.microsoft.com/office/drawing/2014/main" xmlns="" id="{CB6D624A-7107-465A-8446-21A7AFD83649}"/>
+                <a16:creationId xmlns:a16="http://schemas.microsoft.com/office/drawing/2014/main" id="{CB6D624A-7107-465A-8446-21A7AFD83649}"/>
               </a:ext>
             </a:extLst>
           </p:cNvPr>
@@ -30550,7 +30419,7 @@
           <p:cNvPr id="170" name="Ellipse 169">
             <a:extLst>
               <a:ext uri="{FF2B5EF4-FFF2-40B4-BE49-F238E27FC236}">
-                <a16:creationId xmlns:a16="http://schemas.microsoft.com/office/drawing/2014/main" xmlns="" id="{D96BE0B3-B7D3-43C3-BCE3-CF021A5D7237}"/>
+                <a16:creationId xmlns:a16="http://schemas.microsoft.com/office/drawing/2014/main" id="{D96BE0B3-B7D3-43C3-BCE3-CF021A5D7237}"/>
               </a:ext>
             </a:extLst>
           </p:cNvPr>
@@ -30607,7 +30476,7 @@
           <p:cNvPr id="172" name="Ellipse 171">
             <a:extLst>
               <a:ext uri="{FF2B5EF4-FFF2-40B4-BE49-F238E27FC236}">
-                <a16:creationId xmlns:a16="http://schemas.microsoft.com/office/drawing/2014/main" xmlns="" id="{619E1E41-588A-483E-9D50-84EBFE3C6057}"/>
+                <a16:creationId xmlns:a16="http://schemas.microsoft.com/office/drawing/2014/main" id="{619E1E41-588A-483E-9D50-84EBFE3C6057}"/>
               </a:ext>
             </a:extLst>
           </p:cNvPr>
@@ -30664,7 +30533,7 @@
           <p:cNvPr id="174" name="Ellipse 173">
             <a:extLst>
               <a:ext uri="{FF2B5EF4-FFF2-40B4-BE49-F238E27FC236}">
-                <a16:creationId xmlns:a16="http://schemas.microsoft.com/office/drawing/2014/main" xmlns="" id="{C5D5C692-6E58-4BC9-8D5E-89B457F0E824}"/>
+                <a16:creationId xmlns:a16="http://schemas.microsoft.com/office/drawing/2014/main" id="{C5D5C692-6E58-4BC9-8D5E-89B457F0E824}"/>
               </a:ext>
             </a:extLst>
           </p:cNvPr>
@@ -30714,7 +30583,7 @@
           <p:cNvPr id="175" name="Rectangle 174">
             <a:extLst>
               <a:ext uri="{FF2B5EF4-FFF2-40B4-BE49-F238E27FC236}">
-                <a16:creationId xmlns:a16="http://schemas.microsoft.com/office/drawing/2014/main" xmlns="" id="{66718011-F1A9-4A80-9F56-C0593A608762}"/>
+                <a16:creationId xmlns:a16="http://schemas.microsoft.com/office/drawing/2014/main" id="{66718011-F1A9-4A80-9F56-C0593A608762}"/>
               </a:ext>
             </a:extLst>
           </p:cNvPr>
@@ -30764,7 +30633,7 @@
           <p:cNvPr id="176" name="Rectangle : coins arrondis 175">
             <a:extLst>
               <a:ext uri="{FF2B5EF4-FFF2-40B4-BE49-F238E27FC236}">
-                <a16:creationId xmlns:a16="http://schemas.microsoft.com/office/drawing/2014/main" xmlns="" id="{6EC3BE33-2D16-45B4-B62D-63EB4C274A25}"/>
+                <a16:creationId xmlns:a16="http://schemas.microsoft.com/office/drawing/2014/main" id="{6EC3BE33-2D16-45B4-B62D-63EB4C274A25}"/>
               </a:ext>
             </a:extLst>
           </p:cNvPr>
@@ -30814,7 +30683,7 @@
           <p:cNvPr id="178" name="Rectangle 177">
             <a:extLst>
               <a:ext uri="{FF2B5EF4-FFF2-40B4-BE49-F238E27FC236}">
-                <a16:creationId xmlns:a16="http://schemas.microsoft.com/office/drawing/2014/main" xmlns="" id="{523D3E57-D6CD-47B5-9604-315199251AF9}"/>
+                <a16:creationId xmlns:a16="http://schemas.microsoft.com/office/drawing/2014/main" id="{523D3E57-D6CD-47B5-9604-315199251AF9}"/>
               </a:ext>
             </a:extLst>
           </p:cNvPr>
@@ -30867,7 +30736,7 @@
           <p:cNvPr id="180" name="Rectangle 179">
             <a:extLst>
               <a:ext uri="{FF2B5EF4-FFF2-40B4-BE49-F238E27FC236}">
-                <a16:creationId xmlns:a16="http://schemas.microsoft.com/office/drawing/2014/main" xmlns="" id="{2357F8A8-5CDA-4D11-8FE0-1989EE191E4A}"/>
+                <a16:creationId xmlns:a16="http://schemas.microsoft.com/office/drawing/2014/main" id="{2357F8A8-5CDA-4D11-8FE0-1989EE191E4A}"/>
               </a:ext>
             </a:extLst>
           </p:cNvPr>
@@ -30920,7 +30789,7 @@
           <p:cNvPr id="182" name="Rectangle 181">
             <a:extLst>
               <a:ext uri="{FF2B5EF4-FFF2-40B4-BE49-F238E27FC236}">
-                <a16:creationId xmlns:a16="http://schemas.microsoft.com/office/drawing/2014/main" xmlns="" id="{D725C38A-8727-4AD5-B8C6-AA47886C28D2}"/>
+                <a16:creationId xmlns:a16="http://schemas.microsoft.com/office/drawing/2014/main" id="{D725C38A-8727-4AD5-B8C6-AA47886C28D2}"/>
               </a:ext>
             </a:extLst>
           </p:cNvPr>
@@ -30973,7 +30842,7 @@
           <p:cNvPr id="184" name="Rectangle 183">
             <a:extLst>
               <a:ext uri="{FF2B5EF4-FFF2-40B4-BE49-F238E27FC236}">
-                <a16:creationId xmlns:a16="http://schemas.microsoft.com/office/drawing/2014/main" xmlns="" id="{70DF2D4B-F8F5-40C3-B075-1CAE3632CAFD}"/>
+                <a16:creationId xmlns:a16="http://schemas.microsoft.com/office/drawing/2014/main" id="{70DF2D4B-F8F5-40C3-B075-1CAE3632CAFD}"/>
               </a:ext>
             </a:extLst>
           </p:cNvPr>
@@ -31028,7 +30897,7 @@
           <p:cNvPr id="186" name="Rectangle 185">
             <a:extLst>
               <a:ext uri="{FF2B5EF4-FFF2-40B4-BE49-F238E27FC236}">
-                <a16:creationId xmlns:a16="http://schemas.microsoft.com/office/drawing/2014/main" xmlns="" id="{48D27E21-6331-4013-A8ED-C8F531D3EB23}"/>
+                <a16:creationId xmlns:a16="http://schemas.microsoft.com/office/drawing/2014/main" id="{48D27E21-6331-4013-A8ED-C8F531D3EB23}"/>
               </a:ext>
             </a:extLst>
           </p:cNvPr>
@@ -31083,7 +30952,7 @@
           <p:cNvPr id="188" name="Connecteur droit avec flèche 187">
             <a:extLst>
               <a:ext uri="{FF2B5EF4-FFF2-40B4-BE49-F238E27FC236}">
-                <a16:creationId xmlns:a16="http://schemas.microsoft.com/office/drawing/2014/main" xmlns="" id="{08D9A169-A7C0-461D-8187-840540051B18}"/>
+                <a16:creationId xmlns:a16="http://schemas.microsoft.com/office/drawing/2014/main" id="{08D9A169-A7C0-461D-8187-840540051B18}"/>
               </a:ext>
             </a:extLst>
           </p:cNvPr>
@@ -31128,7 +30997,7 @@
           <p:cNvPr id="189" name="Connecteur droit avec flèche 188">
             <a:extLst>
               <a:ext uri="{FF2B5EF4-FFF2-40B4-BE49-F238E27FC236}">
-                <a16:creationId xmlns:a16="http://schemas.microsoft.com/office/drawing/2014/main" xmlns="" id="{2DE85B40-3301-44A8-BFE9-E72679501136}"/>
+                <a16:creationId xmlns:a16="http://schemas.microsoft.com/office/drawing/2014/main" id="{2DE85B40-3301-44A8-BFE9-E72679501136}"/>
               </a:ext>
             </a:extLst>
           </p:cNvPr>
@@ -31174,7 +31043,7 @@
           <p:cNvPr id="192" name="Connecteur droit avec flèche 191">
             <a:extLst>
               <a:ext uri="{FF2B5EF4-FFF2-40B4-BE49-F238E27FC236}">
-                <a16:creationId xmlns:a16="http://schemas.microsoft.com/office/drawing/2014/main" xmlns="" id="{D6DA2AEB-C5AE-412C-A3CD-51F2A34EA60A}"/>
+                <a16:creationId xmlns:a16="http://schemas.microsoft.com/office/drawing/2014/main" id="{D6DA2AEB-C5AE-412C-A3CD-51F2A34EA60A}"/>
               </a:ext>
             </a:extLst>
           </p:cNvPr>
@@ -31220,7 +31089,7 @@
           <p:cNvPr id="195" name="Connecteur droit avec flèche 194">
             <a:extLst>
               <a:ext uri="{FF2B5EF4-FFF2-40B4-BE49-F238E27FC236}">
-                <a16:creationId xmlns:a16="http://schemas.microsoft.com/office/drawing/2014/main" xmlns="" id="{F8CF6522-BB05-404D-89B0-27210AC93648}"/>
+                <a16:creationId xmlns:a16="http://schemas.microsoft.com/office/drawing/2014/main" id="{F8CF6522-BB05-404D-89B0-27210AC93648}"/>
               </a:ext>
             </a:extLst>
           </p:cNvPr>
@@ -31266,7 +31135,7 @@
           <p:cNvPr id="215" name="Connecteur droit avec flèche 214">
             <a:extLst>
               <a:ext uri="{FF2B5EF4-FFF2-40B4-BE49-F238E27FC236}">
-                <a16:creationId xmlns:a16="http://schemas.microsoft.com/office/drawing/2014/main" xmlns="" id="{F06AB171-C4D0-4A6C-9431-6478921646FC}"/>
+                <a16:creationId xmlns:a16="http://schemas.microsoft.com/office/drawing/2014/main" id="{F06AB171-C4D0-4A6C-9431-6478921646FC}"/>
               </a:ext>
             </a:extLst>
           </p:cNvPr>
@@ -31310,7 +31179,7 @@
           <p:cNvPr id="217" name="Rectangle : coins arrondis 216">
             <a:extLst>
               <a:ext uri="{FF2B5EF4-FFF2-40B4-BE49-F238E27FC236}">
-                <a16:creationId xmlns:a16="http://schemas.microsoft.com/office/drawing/2014/main" xmlns="" id="{B1EBE2B5-BCD4-4009-BC49-E3743BDA79EE}"/>
+                <a16:creationId xmlns:a16="http://schemas.microsoft.com/office/drawing/2014/main" id="{B1EBE2B5-BCD4-4009-BC49-E3743BDA79EE}"/>
               </a:ext>
             </a:extLst>
           </p:cNvPr>
@@ -31363,7 +31232,7 @@
           <p:cNvPr id="219" name="Rectangle : coins arrondis 218">
             <a:extLst>
               <a:ext uri="{FF2B5EF4-FFF2-40B4-BE49-F238E27FC236}">
-                <a16:creationId xmlns:a16="http://schemas.microsoft.com/office/drawing/2014/main" xmlns="" id="{841C666D-A606-47D4-B762-686A42A8296D}"/>
+                <a16:creationId xmlns:a16="http://schemas.microsoft.com/office/drawing/2014/main" id="{841C666D-A606-47D4-B762-686A42A8296D}"/>
               </a:ext>
             </a:extLst>
           </p:cNvPr>
@@ -31416,7 +31285,7 @@
           <p:cNvPr id="220" name="Connecteur droit avec flèche 219">
             <a:extLst>
               <a:ext uri="{FF2B5EF4-FFF2-40B4-BE49-F238E27FC236}">
-                <a16:creationId xmlns:a16="http://schemas.microsoft.com/office/drawing/2014/main" xmlns="" id="{E282615C-C279-424D-AC29-946D456855CB}"/>
+                <a16:creationId xmlns:a16="http://schemas.microsoft.com/office/drawing/2014/main" id="{E282615C-C279-424D-AC29-946D456855CB}"/>
               </a:ext>
             </a:extLst>
           </p:cNvPr>
@@ -31458,7 +31327,7 @@
           <p:cNvPr id="222" name="Rectangle : coins arrondis 221">
             <a:extLst>
               <a:ext uri="{FF2B5EF4-FFF2-40B4-BE49-F238E27FC236}">
-                <a16:creationId xmlns:a16="http://schemas.microsoft.com/office/drawing/2014/main" xmlns="" id="{3BE9F64E-183E-4FC2-9E85-9AEC4A332740}"/>
+                <a16:creationId xmlns:a16="http://schemas.microsoft.com/office/drawing/2014/main" id="{3BE9F64E-183E-4FC2-9E85-9AEC4A332740}"/>
               </a:ext>
             </a:extLst>
           </p:cNvPr>
@@ -31511,7 +31380,7 @@
           <p:cNvPr id="223" name="Connecteur droit avec flèche 222">
             <a:extLst>
               <a:ext uri="{FF2B5EF4-FFF2-40B4-BE49-F238E27FC236}">
-                <a16:creationId xmlns:a16="http://schemas.microsoft.com/office/drawing/2014/main" xmlns="" id="{DF236E6B-21F7-4A46-966C-032D44C15BEF}"/>
+                <a16:creationId xmlns:a16="http://schemas.microsoft.com/office/drawing/2014/main" id="{DF236E6B-21F7-4A46-966C-032D44C15BEF}"/>
               </a:ext>
             </a:extLst>
           </p:cNvPr>
@@ -31555,7 +31424,7 @@
           <p:cNvPr id="224" name="Connecteur droit avec flèche 223">
             <a:extLst>
               <a:ext uri="{FF2B5EF4-FFF2-40B4-BE49-F238E27FC236}">
-                <a16:creationId xmlns:a16="http://schemas.microsoft.com/office/drawing/2014/main" xmlns="" id="{710F0520-3080-405A-8A08-0596A1BCD120}"/>
+                <a16:creationId xmlns:a16="http://schemas.microsoft.com/office/drawing/2014/main" id="{710F0520-3080-405A-8A08-0596A1BCD120}"/>
               </a:ext>
             </a:extLst>
           </p:cNvPr>
@@ -31599,7 +31468,7 @@
           <p:cNvPr id="225" name="Connecteur droit avec flèche 224">
             <a:extLst>
               <a:ext uri="{FF2B5EF4-FFF2-40B4-BE49-F238E27FC236}">
-                <a16:creationId xmlns:a16="http://schemas.microsoft.com/office/drawing/2014/main" xmlns="" id="{FD2AD9F1-AAA5-40ED-9EF5-A8FD862862E1}"/>
+                <a16:creationId xmlns:a16="http://schemas.microsoft.com/office/drawing/2014/main" id="{FD2AD9F1-AAA5-40ED-9EF5-A8FD862862E1}"/>
               </a:ext>
             </a:extLst>
           </p:cNvPr>
@@ -31643,7 +31512,7 @@
           <p:cNvPr id="230" name="Rectangle : coins arrondis 229">
             <a:extLst>
               <a:ext uri="{FF2B5EF4-FFF2-40B4-BE49-F238E27FC236}">
-                <a16:creationId xmlns:a16="http://schemas.microsoft.com/office/drawing/2014/main" xmlns="" id="{13F37134-309F-4816-9A78-651A5D7CB676}"/>
+                <a16:creationId xmlns:a16="http://schemas.microsoft.com/office/drawing/2014/main" id="{13F37134-309F-4816-9A78-651A5D7CB676}"/>
               </a:ext>
             </a:extLst>
           </p:cNvPr>
@@ -31698,7 +31567,7 @@
           <p:cNvPr id="232" name="Rectangle : coins arrondis 231">
             <a:extLst>
               <a:ext uri="{FF2B5EF4-FFF2-40B4-BE49-F238E27FC236}">
-                <a16:creationId xmlns:a16="http://schemas.microsoft.com/office/drawing/2014/main" xmlns="" id="{E561FA01-2DAB-42B4-95C2-0E356AA4D4DF}"/>
+                <a16:creationId xmlns:a16="http://schemas.microsoft.com/office/drawing/2014/main" id="{E561FA01-2DAB-42B4-95C2-0E356AA4D4DF}"/>
               </a:ext>
             </a:extLst>
           </p:cNvPr>
@@ -31753,7 +31622,7 @@
           <p:cNvPr id="233" name="Connecteur droit avec flèche 232">
             <a:extLst>
               <a:ext uri="{FF2B5EF4-FFF2-40B4-BE49-F238E27FC236}">
-                <a16:creationId xmlns:a16="http://schemas.microsoft.com/office/drawing/2014/main" xmlns="" id="{AB81251E-8436-4FCE-A331-264E6593C451}"/>
+                <a16:creationId xmlns:a16="http://schemas.microsoft.com/office/drawing/2014/main" id="{AB81251E-8436-4FCE-A331-264E6593C451}"/>
               </a:ext>
             </a:extLst>
           </p:cNvPr>
@@ -31797,7 +31666,7 @@
           <p:cNvPr id="234" name="Connecteur droit avec flèche 233">
             <a:extLst>
               <a:ext uri="{FF2B5EF4-FFF2-40B4-BE49-F238E27FC236}">
-                <a16:creationId xmlns:a16="http://schemas.microsoft.com/office/drawing/2014/main" xmlns="" id="{FE902090-C3A8-4B74-BEF8-4402648111E1}"/>
+                <a16:creationId xmlns:a16="http://schemas.microsoft.com/office/drawing/2014/main" id="{FE902090-C3A8-4B74-BEF8-4402648111E1}"/>
               </a:ext>
             </a:extLst>
           </p:cNvPr>
@@ -31841,7 +31710,7 @@
           <p:cNvPr id="235" name="Connecteur droit avec flèche 234">
             <a:extLst>
               <a:ext uri="{FF2B5EF4-FFF2-40B4-BE49-F238E27FC236}">
-                <a16:creationId xmlns:a16="http://schemas.microsoft.com/office/drawing/2014/main" xmlns="" id="{9A07EC96-3AC2-48A7-B279-3B7E74DA5465}"/>
+                <a16:creationId xmlns:a16="http://schemas.microsoft.com/office/drawing/2014/main" id="{9A07EC96-3AC2-48A7-B279-3B7E74DA5465}"/>
               </a:ext>
             </a:extLst>
           </p:cNvPr>
@@ -31887,7 +31756,7 @@
           <p:cNvPr id="239" name="Connecteur droit avec flèche 238">
             <a:extLst>
               <a:ext uri="{FF2B5EF4-FFF2-40B4-BE49-F238E27FC236}">
-                <a16:creationId xmlns:a16="http://schemas.microsoft.com/office/drawing/2014/main" xmlns="" id="{2E747C15-F807-45E7-BFDC-B8E819925F1A}"/>
+                <a16:creationId xmlns:a16="http://schemas.microsoft.com/office/drawing/2014/main" id="{2E747C15-F807-45E7-BFDC-B8E819925F1A}"/>
               </a:ext>
             </a:extLst>
           </p:cNvPr>
@@ -31933,7 +31802,7 @@
           <p:cNvPr id="242" name="Connecteur droit avec flèche 241">
             <a:extLst>
               <a:ext uri="{FF2B5EF4-FFF2-40B4-BE49-F238E27FC236}">
-                <a16:creationId xmlns:a16="http://schemas.microsoft.com/office/drawing/2014/main" xmlns="" id="{54CC4135-177E-4569-9CFA-193A1B456190}"/>
+                <a16:creationId xmlns:a16="http://schemas.microsoft.com/office/drawing/2014/main" id="{54CC4135-177E-4569-9CFA-193A1B456190}"/>
               </a:ext>
             </a:extLst>
           </p:cNvPr>
@@ -31979,7 +31848,7 @@
           <p:cNvPr id="246" name="Connecteur droit avec flèche 245">
             <a:extLst>
               <a:ext uri="{FF2B5EF4-FFF2-40B4-BE49-F238E27FC236}">
-                <a16:creationId xmlns:a16="http://schemas.microsoft.com/office/drawing/2014/main" xmlns="" id="{02386CF8-1EE3-4FE8-AA13-AD36A0F7108E}"/>
+                <a16:creationId xmlns:a16="http://schemas.microsoft.com/office/drawing/2014/main" id="{02386CF8-1EE3-4FE8-AA13-AD36A0F7108E}"/>
               </a:ext>
             </a:extLst>
           </p:cNvPr>
@@ -32025,7 +31894,7 @@
           <p:cNvPr id="251" name="Connecteur droit avec flèche 250">
             <a:extLst>
               <a:ext uri="{FF2B5EF4-FFF2-40B4-BE49-F238E27FC236}">
-                <a16:creationId xmlns:a16="http://schemas.microsoft.com/office/drawing/2014/main" xmlns="" id="{B45C2B87-9299-4486-B04F-AA6E045EEA78}"/>
+                <a16:creationId xmlns:a16="http://schemas.microsoft.com/office/drawing/2014/main" id="{B45C2B87-9299-4486-B04F-AA6E045EEA78}"/>
               </a:ext>
             </a:extLst>
           </p:cNvPr>
@@ -32068,7 +31937,7 @@
           <p:cNvPr id="252" name="Connecteur droit avec flèche 251">
             <a:extLst>
               <a:ext uri="{FF2B5EF4-FFF2-40B4-BE49-F238E27FC236}">
-                <a16:creationId xmlns:a16="http://schemas.microsoft.com/office/drawing/2014/main" xmlns="" id="{439C077F-27BB-4F3B-B59E-6A55E27B6D38}"/>
+                <a16:creationId xmlns:a16="http://schemas.microsoft.com/office/drawing/2014/main" id="{439C077F-27BB-4F3B-B59E-6A55E27B6D38}"/>
               </a:ext>
             </a:extLst>
           </p:cNvPr>
@@ -32112,7 +31981,7 @@
           <p:cNvPr id="256" name="Connecteur droit avec flèche 255">
             <a:extLst>
               <a:ext uri="{FF2B5EF4-FFF2-40B4-BE49-F238E27FC236}">
-                <a16:creationId xmlns:a16="http://schemas.microsoft.com/office/drawing/2014/main" xmlns="" id="{AAF2B872-E6D7-42D7-869A-0AF764772FD8}"/>
+                <a16:creationId xmlns:a16="http://schemas.microsoft.com/office/drawing/2014/main" id="{AAF2B872-E6D7-42D7-869A-0AF764772FD8}"/>
               </a:ext>
             </a:extLst>
           </p:cNvPr>
@@ -32156,7 +32025,7 @@
           <p:cNvPr id="259" name="Connecteur droit avec flèche 258">
             <a:extLst>
               <a:ext uri="{FF2B5EF4-FFF2-40B4-BE49-F238E27FC236}">
-                <a16:creationId xmlns:a16="http://schemas.microsoft.com/office/drawing/2014/main" xmlns="" id="{15F80B20-804A-4682-9538-EC1F3419BD2A}"/>
+                <a16:creationId xmlns:a16="http://schemas.microsoft.com/office/drawing/2014/main" id="{15F80B20-804A-4682-9538-EC1F3419BD2A}"/>
               </a:ext>
             </a:extLst>
           </p:cNvPr>
@@ -32200,7 +32069,7 @@
           <p:cNvPr id="265" name="Connecteur droit avec flèche 264">
             <a:extLst>
               <a:ext uri="{FF2B5EF4-FFF2-40B4-BE49-F238E27FC236}">
-                <a16:creationId xmlns:a16="http://schemas.microsoft.com/office/drawing/2014/main" xmlns="" id="{3E54D7A2-DE93-4811-861F-F48F159567E4}"/>
+                <a16:creationId xmlns:a16="http://schemas.microsoft.com/office/drawing/2014/main" id="{3E54D7A2-DE93-4811-861F-F48F159567E4}"/>
               </a:ext>
             </a:extLst>
           </p:cNvPr>
@@ -32242,7 +32111,7 @@
           <p:cNvPr id="267" name="Connecteur droit avec flèche 266">
             <a:extLst>
               <a:ext uri="{FF2B5EF4-FFF2-40B4-BE49-F238E27FC236}">
-                <a16:creationId xmlns:a16="http://schemas.microsoft.com/office/drawing/2014/main" xmlns="" id="{F7AC6A69-12E7-4B67-A60E-BB2E6236BA96}"/>
+                <a16:creationId xmlns:a16="http://schemas.microsoft.com/office/drawing/2014/main" id="{F7AC6A69-12E7-4B67-A60E-BB2E6236BA96}"/>
               </a:ext>
             </a:extLst>
           </p:cNvPr>
@@ -32285,7 +32154,7 @@
           <p:cNvPr id="270" name="Connecteur droit avec flèche 269">
             <a:extLst>
               <a:ext uri="{FF2B5EF4-FFF2-40B4-BE49-F238E27FC236}">
-                <a16:creationId xmlns:a16="http://schemas.microsoft.com/office/drawing/2014/main" xmlns="" id="{99F3C843-32BA-445B-A4F8-EBD52E25820E}"/>
+                <a16:creationId xmlns:a16="http://schemas.microsoft.com/office/drawing/2014/main" id="{99F3C843-32BA-445B-A4F8-EBD52E25820E}"/>
               </a:ext>
             </a:extLst>
           </p:cNvPr>
@@ -32328,7 +32197,7 @@
           <p:cNvPr id="273" name="Connecteur droit avec flèche 272">
             <a:extLst>
               <a:ext uri="{FF2B5EF4-FFF2-40B4-BE49-F238E27FC236}">
-                <a16:creationId xmlns:a16="http://schemas.microsoft.com/office/drawing/2014/main" xmlns="" id="{99E80C1D-CD0F-43B7-9F88-8A2CA1CFF469}"/>
+                <a16:creationId xmlns:a16="http://schemas.microsoft.com/office/drawing/2014/main" id="{99E80C1D-CD0F-43B7-9F88-8A2CA1CFF469}"/>
               </a:ext>
             </a:extLst>
           </p:cNvPr>
@@ -32371,7 +32240,7 @@
           <p:cNvPr id="276" name="Connecteur droit avec flèche 275">
             <a:extLst>
               <a:ext uri="{FF2B5EF4-FFF2-40B4-BE49-F238E27FC236}">
-                <a16:creationId xmlns:a16="http://schemas.microsoft.com/office/drawing/2014/main" xmlns="" id="{39D10607-7465-4ED6-AD0B-FEF292123988}"/>
+                <a16:creationId xmlns:a16="http://schemas.microsoft.com/office/drawing/2014/main" id="{39D10607-7465-4ED6-AD0B-FEF292123988}"/>
               </a:ext>
             </a:extLst>
           </p:cNvPr>
@@ -32415,7 +32284,7 @@
           <p:cNvPr id="279" name="Connecteur droit avec flèche 278">
             <a:extLst>
               <a:ext uri="{FF2B5EF4-FFF2-40B4-BE49-F238E27FC236}">
-                <a16:creationId xmlns:a16="http://schemas.microsoft.com/office/drawing/2014/main" xmlns="" id="{07027E4A-A6DF-4651-B31B-0348AFB091F4}"/>
+                <a16:creationId xmlns:a16="http://schemas.microsoft.com/office/drawing/2014/main" id="{07027E4A-A6DF-4651-B31B-0348AFB091F4}"/>
               </a:ext>
             </a:extLst>
           </p:cNvPr>
@@ -32459,7 +32328,7 @@
           <p:cNvPr id="282" name="Connecteur droit avec flèche 281">
             <a:extLst>
               <a:ext uri="{FF2B5EF4-FFF2-40B4-BE49-F238E27FC236}">
-                <a16:creationId xmlns:a16="http://schemas.microsoft.com/office/drawing/2014/main" xmlns="" id="{DEBB1C9C-3D9E-4EA6-B05E-B1C92B9B837D}"/>
+                <a16:creationId xmlns:a16="http://schemas.microsoft.com/office/drawing/2014/main" id="{DEBB1C9C-3D9E-4EA6-B05E-B1C92B9B837D}"/>
               </a:ext>
             </a:extLst>
           </p:cNvPr>
@@ -32503,7 +32372,7 @@
           <p:cNvPr id="285" name="Connecteur droit avec flèche 284">
             <a:extLst>
               <a:ext uri="{FF2B5EF4-FFF2-40B4-BE49-F238E27FC236}">
-                <a16:creationId xmlns:a16="http://schemas.microsoft.com/office/drawing/2014/main" xmlns="" id="{197E7B99-DEFD-4536-9E2C-99DC5AF8F6E0}"/>
+                <a16:creationId xmlns:a16="http://schemas.microsoft.com/office/drawing/2014/main" id="{197E7B99-DEFD-4536-9E2C-99DC5AF8F6E0}"/>
               </a:ext>
             </a:extLst>
           </p:cNvPr>
